--- a/presentations/Atrial-Fibrillation-Topic-Review.pptx
+++ b/presentations/Atrial-Fibrillation-Topic-Review.pptx
@@ -21,9 +21,11 @@
     <p:sldId id="269" r:id="rId15"/>
     <p:sldId id="270" r:id="rId16"/>
     <p:sldId id="271" r:id="rId17"/>
+    <p:sldId id="272" r:id="rId18"/>
+    <p:sldId id="273" r:id="rId19"/>
   </p:sldIdLst>
   <p:notesMasterIdLst>
-    <p:notesMasterId r:id="rId18"/>
+    <p:notesMasterId r:id="rId20"/>
   </p:notesMasterIdLst>
   <p:sldSz cx="12191695" cy="6858000"/>
   <p:notesSz cx="6858000" cy="12191695"/>
@@ -1157,6 +1159,182 @@
             <a:fld id="{F7021451-1387-4CA6-816F-3879F97B5CBC}" type="slidenum">
               <a:rPr lang="en-US"/>
               <a:t>16</a:t>
+            </a:fld>
+            <a:endParaRPr lang="en-US"/>
+          </a:p>
+        </p:txBody>
+      </p:sp>
+    </p:spTree>
+    <p:extLst>
+      <p:ext uri="{BB962C8B-B14F-4D97-AF65-F5344CB8AC3E}">
+        <p14:creationId xmlns:p14="http://schemas.microsoft.com/office/powerpoint/2010/main" val="1024086991"/>
+      </p:ext>
+    </p:extLst>
+  </p:cSld>
+  <p:clrMapOvr>
+    <a:masterClrMapping/>
+  </p:clrMapOvr>
+</p:notes>
+</file>
+
+<file path=ppt/notesSlides/notesSlide17.xml><?xml version="1.0" encoding="utf-8"?>
+<p:notes xmlns:a="http://schemas.openxmlformats.org/drawingml/2006/main" xmlns:r="http://schemas.openxmlformats.org/officeDocument/2006/relationships" xmlns:p="http://schemas.openxmlformats.org/presentationml/2006/main">
+  <p:cSld>
+    <p:spTree>
+      <p:nvGrpSpPr>
+        <p:cNvPr id="1" name=""/>
+        <p:cNvGrpSpPr/>
+        <p:nvPr/>
+      </p:nvGrpSpPr>
+      <p:grpSpPr>
+        <a:xfrm>
+          <a:off x="0" y="0"/>
+          <a:ext cx="0" cy="0"/>
+          <a:chOff x="0" y="0"/>
+          <a:chExt cx="0" cy="0"/>
+        </a:xfrm>
+      </p:grpSpPr>
+      <p:sp>
+        <p:nvSpPr>
+          <p:cNvPr id="2" name="Slide Image Placeholder 1"/>
+          <p:cNvSpPr>
+            <a:spLocks noGrp="1" noRot="1" noChangeAspect="1"/>
+          </p:cNvSpPr>
+          <p:nvPr>
+            <p:ph type="sldImg"/>
+          </p:nvPr>
+        </p:nvSpPr>
+        <p:spPr/>
+      </p:sp>
+      <p:sp>
+        <p:nvSpPr>
+          <p:cNvPr id="3" name="Notes Placeholder 2"/>
+          <p:cNvSpPr>
+            <a:spLocks noGrp="1"/>
+          </p:cNvSpPr>
+          <p:nvPr>
+            <p:ph type="body" idx="1"/>
+          </p:nvPr>
+        </p:nvSpPr>
+        <p:spPr/>
+        <p:txBody>
+          <a:bodyPr/>
+          <a:lstStyle/>
+          <a:p>
+            <a:r>
+              <a:rPr lang="en-US" dirty="0"/>
+              <a:t/>
+            </a:r>
+            <a:endParaRPr lang="en-US" dirty="0"/>
+          </a:p>
+        </p:txBody>
+      </p:sp>
+      <p:sp>
+        <p:nvSpPr>
+          <p:cNvPr id="4" name="Slide Number Placeholder 3"/>
+          <p:cNvSpPr>
+            <a:spLocks noGrp="1"/>
+          </p:cNvSpPr>
+          <p:nvPr>
+            <p:ph type="sldNum" sz="quarter" idx="10"/>
+          </p:nvPr>
+        </p:nvSpPr>
+        <p:spPr/>
+        <p:txBody>
+          <a:bodyPr/>
+          <a:lstStyle/>
+          <a:p>
+            <a:fld id="{F7021451-1387-4CA6-816F-3879F97B5CBC}" type="slidenum">
+              <a:rPr lang="en-US"/>
+              <a:t>17</a:t>
+            </a:fld>
+            <a:endParaRPr lang="en-US"/>
+          </a:p>
+        </p:txBody>
+      </p:sp>
+    </p:spTree>
+    <p:extLst>
+      <p:ext uri="{BB962C8B-B14F-4D97-AF65-F5344CB8AC3E}">
+        <p14:creationId xmlns:p14="http://schemas.microsoft.com/office/powerpoint/2010/main" val="1024086991"/>
+      </p:ext>
+    </p:extLst>
+  </p:cSld>
+  <p:clrMapOvr>
+    <a:masterClrMapping/>
+  </p:clrMapOvr>
+</p:notes>
+</file>
+
+<file path=ppt/notesSlides/notesSlide18.xml><?xml version="1.0" encoding="utf-8"?>
+<p:notes xmlns:a="http://schemas.openxmlformats.org/drawingml/2006/main" xmlns:r="http://schemas.openxmlformats.org/officeDocument/2006/relationships" xmlns:p="http://schemas.openxmlformats.org/presentationml/2006/main">
+  <p:cSld>
+    <p:spTree>
+      <p:nvGrpSpPr>
+        <p:cNvPr id="1" name=""/>
+        <p:cNvGrpSpPr/>
+        <p:nvPr/>
+      </p:nvGrpSpPr>
+      <p:grpSpPr>
+        <a:xfrm>
+          <a:off x="0" y="0"/>
+          <a:ext cx="0" cy="0"/>
+          <a:chOff x="0" y="0"/>
+          <a:chExt cx="0" cy="0"/>
+        </a:xfrm>
+      </p:grpSpPr>
+      <p:sp>
+        <p:nvSpPr>
+          <p:cNvPr id="2" name="Slide Image Placeholder 1"/>
+          <p:cNvSpPr>
+            <a:spLocks noGrp="1" noRot="1" noChangeAspect="1"/>
+          </p:cNvSpPr>
+          <p:nvPr>
+            <p:ph type="sldImg"/>
+          </p:nvPr>
+        </p:nvSpPr>
+        <p:spPr/>
+      </p:sp>
+      <p:sp>
+        <p:nvSpPr>
+          <p:cNvPr id="3" name="Notes Placeholder 2"/>
+          <p:cNvSpPr>
+            <a:spLocks noGrp="1"/>
+          </p:cNvSpPr>
+          <p:nvPr>
+            <p:ph type="body" idx="1"/>
+          </p:nvPr>
+        </p:nvSpPr>
+        <p:spPr/>
+        <p:txBody>
+          <a:bodyPr/>
+          <a:lstStyle/>
+          <a:p>
+            <a:r>
+              <a:rPr lang="en-US" dirty="0"/>
+              <a:t/>
+            </a:r>
+            <a:endParaRPr lang="en-US" dirty="0"/>
+          </a:p>
+        </p:txBody>
+      </p:sp>
+      <p:sp>
+        <p:nvSpPr>
+          <p:cNvPr id="4" name="Slide Number Placeholder 3"/>
+          <p:cNvSpPr>
+            <a:spLocks noGrp="1"/>
+          </p:cNvSpPr>
+          <p:nvPr>
+            <p:ph type="sldNum" sz="quarter" idx="10"/>
+          </p:nvPr>
+        </p:nvSpPr>
+        <p:spPr/>
+        <p:txBody>
+          <a:bodyPr/>
+          <a:lstStyle/>
+          <a:p>
+            <a:fld id="{F7021451-1387-4CA6-816F-3879F97B5CBC}" type="slidenum">
+              <a:rPr lang="en-US"/>
+              <a:t>18</a:t>
             </a:fld>
             <a:endParaRPr lang="en-US"/>
           </a:p>
@@ -10731,6 +10909,2098 @@
     <p:bg>
       <p:bgPr>
         <a:solidFill>
+          <a:srgbClr val="FFFFFF"/>
+        </a:solidFill>
+      </p:bgPr>
+    </p:bg>
+    <p:spTree>
+      <p:nvGrpSpPr>
+        <p:cNvPr id="1" name=""/>
+        <p:cNvGrpSpPr/>
+        <p:nvPr/>
+      </p:nvGrpSpPr>
+      <p:grpSpPr>
+        <a:xfrm>
+          <a:off x="0" y="0"/>
+          <a:ext cx="0" cy="0"/>
+          <a:chOff x="0" y="0"/>
+          <a:chExt cx="0" cy="0"/>
+        </a:xfrm>
+      </p:grpSpPr>
+      <p:sp>
+        <p:nvSpPr>
+          <p:cNvPr id="2" name="Shape 0"/>
+          <p:cNvSpPr/>
+          <p:nvPr/>
+        </p:nvSpPr>
+        <p:spPr>
+          <a:xfrm>
+            <a:off x="502920" y="457200"/>
+            <a:ext cx="868680" cy="868680"/>
+          </a:xfrm>
+          <a:prstGeom prst="ellipse">
+            <a:avLst/>
+          </a:prstGeom>
+          <a:solidFill>
+            <a:srgbClr val="FFF0F3"/>
+          </a:solidFill>
+          <a:ln w="12700">
+            <a:solidFill>
+              <a:srgbClr val="FBD8DF"/>
+            </a:solidFill>
+            <a:prstDash val="solid"/>
+          </a:ln>
+        </p:spPr>
+      </p:sp>
+      <p:pic>
+        <p:nvPicPr>
+          <p:cNvPr id="3" name="Image 0" descr="preencoded.png">    </p:cNvPr>
+          <p:cNvPicPr>
+            <a:picLocks noChangeAspect="1"/>
+          </p:cNvPicPr>
+          <p:nvPr/>
+        </p:nvPicPr>
+        <p:blipFill>
+          <a:blip r:embed="rId1"/>
+          <a:stretch>
+            <a:fillRect/>
+          </a:stretch>
+        </p:blipFill>
+        <p:spPr>
+          <a:xfrm>
+            <a:off x="694944" y="649224"/>
+            <a:ext cx="484632" cy="484632"/>
+          </a:xfrm>
+          <a:prstGeom prst="rect">
+            <a:avLst/>
+          </a:prstGeom>
+        </p:spPr>
+      </p:pic>
+      <p:sp>
+        <p:nvSpPr>
+          <p:cNvPr id="4" name="Text 1"/>
+          <p:cNvSpPr/>
+          <p:nvPr/>
+        </p:nvSpPr>
+        <p:spPr>
+          <a:xfrm>
+            <a:off x="1572768" y="502920"/>
+            <a:ext cx="9966960" cy="274320"/>
+          </a:xfrm>
+          <a:prstGeom prst="rect">
+            <a:avLst/>
+          </a:prstGeom>
+          <a:noFill/>
+          <a:ln/>
+        </p:spPr>
+        <p:txBody>
+          <a:bodyPr wrap="square" rtlCol="0" anchor="t"/>
+          <a:lstStyle/>
+          <a:p>
+            <a:pPr algn="l" indent="0" marL="0">
+              <a:buNone/>
+            </a:pPr>
+            <a:r>
+              <a:rPr lang="en-US" sz="1250" b="1" spc="200" kern="0" dirty="0">
+                <a:solidFill>
+                  <a:srgbClr val="A4133C"/>
+                </a:solidFill>
+                <a:latin typeface="Calibri" pitchFamily="34" charset="0"/>
+                <a:ea typeface="Calibri" pitchFamily="34" charset="-122"/>
+                <a:cs typeface="Calibri" pitchFamily="34" charset="-120"/>
+              </a:rPr>
+              <a:t>SPECIAL POPULATIONS · PREGNANCY</a:t>
+            </a:r>
+            <a:endParaRPr lang="en-US" sz="1250" dirty="0"/>
+          </a:p>
+        </p:txBody>
+      </p:sp>
+      <p:sp>
+        <p:nvSpPr>
+          <p:cNvPr id="5" name="Text 2"/>
+          <p:cNvSpPr/>
+          <p:nvPr/>
+        </p:nvSpPr>
+        <p:spPr>
+          <a:xfrm>
+            <a:off x="1554480" y="749808"/>
+            <a:ext cx="10241280" cy="640080"/>
+          </a:xfrm>
+          <a:prstGeom prst="rect">
+            <a:avLst/>
+          </a:prstGeom>
+          <a:noFill/>
+          <a:ln/>
+        </p:spPr>
+        <p:txBody>
+          <a:bodyPr wrap="square" rtlCol="0" anchor="t"/>
+          <a:lstStyle/>
+          <a:p>
+            <a:pPr algn="l" indent="0" marL="0">
+              <a:buNone/>
+            </a:pPr>
+            <a:r>
+              <a:rPr lang="en-US" sz="3000" b="1" dirty="0">
+                <a:solidFill>
+                  <a:srgbClr val="2B2B33"/>
+                </a:solidFill>
+                <a:latin typeface="Cambria" pitchFamily="34" charset="0"/>
+                <a:ea typeface="Cambria" pitchFamily="34" charset="-122"/>
+                <a:cs typeface="Cambria" pitchFamily="34" charset="-120"/>
+              </a:rPr>
+              <a:t>Anticoagulation in Pregnancy</a:t>
+            </a:r>
+            <a:endParaRPr lang="en-US" sz="3000" dirty="0"/>
+          </a:p>
+        </p:txBody>
+      </p:sp>
+      <p:sp>
+        <p:nvSpPr>
+          <p:cNvPr id="6" name="Shape 3"/>
+          <p:cNvSpPr/>
+          <p:nvPr/>
+        </p:nvSpPr>
+        <p:spPr>
+          <a:xfrm>
+            <a:off x="502920" y="1783080"/>
+            <a:ext cx="5532120" cy="2971800"/>
+          </a:xfrm>
+          <a:prstGeom prst="roundRect">
+            <a:avLst>
+              <a:gd name="adj" fmla="val 3692"/>
+            </a:avLst>
+          </a:prstGeom>
+          <a:solidFill>
+            <a:srgbClr val="FFF0F3"/>
+          </a:solidFill>
+          <a:ln w="12700">
+            <a:solidFill>
+              <a:srgbClr val="FBD8DF"/>
+            </a:solidFill>
+            <a:prstDash val="solid"/>
+          </a:ln>
+          <a:effectLst>
+            <a:outerShdw sx="100000" sy="100000" kx="0" ky="0" algn="bl" rotWithShape="0" blurRad="127000" dist="50800" dir="5400000">
+              <a:srgbClr val="C9A3AC">
+                <a:alpha val="45000"/>
+              </a:srgbClr>
+            </a:outerShdw>
+          </a:effectLst>
+        </p:spPr>
+      </p:sp>
+      <p:sp>
+        <p:nvSpPr>
+          <p:cNvPr id="7" name="Text 4"/>
+          <p:cNvSpPr/>
+          <p:nvPr/>
+        </p:nvSpPr>
+        <p:spPr>
+          <a:xfrm>
+            <a:off x="822960" y="2011680"/>
+            <a:ext cx="4846320" cy="274320"/>
+          </a:xfrm>
+          <a:prstGeom prst="rect">
+            <a:avLst/>
+          </a:prstGeom>
+          <a:noFill/>
+          <a:ln/>
+        </p:spPr>
+        <p:txBody>
+          <a:bodyPr wrap="square" rtlCol="0" anchor="t"/>
+          <a:lstStyle/>
+          <a:p>
+            <a:pPr algn="l" indent="0" marL="0">
+              <a:buNone/>
+            </a:pPr>
+            <a:r>
+              <a:rPr lang="en-US" sz="1300" b="1" spc="150" kern="0" dirty="0">
+                <a:solidFill>
+                  <a:srgbClr val="2E7D32"/>
+                </a:solidFill>
+                <a:latin typeface="Calibri" pitchFamily="34" charset="0"/>
+                <a:ea typeface="Calibri" pitchFamily="34" charset="-122"/>
+                <a:cs typeface="Calibri" pitchFamily="34" charset="-120"/>
+              </a:rPr>
+              <a:t>✓  </a:t>
+            </a:r>
+            <a:pPr algn="l" indent="0" marL="0">
+              <a:buNone/>
+            </a:pPr>
+            <a:r>
+              <a:rPr lang="en-US" sz="1300" b="1" spc="150" kern="0" dirty="0">
+                <a:solidFill>
+                  <a:srgbClr val="2E7D32"/>
+                </a:solidFill>
+                <a:latin typeface="Calibri" pitchFamily="34" charset="0"/>
+                <a:ea typeface="Calibri" pitchFamily="34" charset="-122"/>
+                <a:cs typeface="Calibri" pitchFamily="34" charset="-120"/>
+              </a:rPr>
+              <a:t>PREFERRED</a:t>
+            </a:r>
+            <a:endParaRPr lang="en-US" sz="1300" dirty="0"/>
+          </a:p>
+        </p:txBody>
+      </p:sp>
+      <p:sp>
+        <p:nvSpPr>
+          <p:cNvPr id="8" name="Shape 5"/>
+          <p:cNvSpPr/>
+          <p:nvPr/>
+        </p:nvSpPr>
+        <p:spPr>
+          <a:xfrm>
+            <a:off x="822960" y="2395728"/>
+            <a:ext cx="548640" cy="548640"/>
+          </a:xfrm>
+          <a:prstGeom prst="ellipse">
+            <a:avLst/>
+          </a:prstGeom>
+          <a:solidFill>
+            <a:srgbClr val="2E7D32"/>
+          </a:solidFill>
+          <a:ln/>
+        </p:spPr>
+      </p:sp>
+      <p:pic>
+        <p:nvPicPr>
+          <p:cNvPr id="9" name="Image 1" descr="preencoded.png">    </p:cNvPr>
+          <p:cNvPicPr>
+            <a:picLocks noChangeAspect="1"/>
+          </p:cNvPicPr>
+          <p:nvPr/>
+        </p:nvPicPr>
+        <p:blipFill>
+          <a:blip r:embed="rId2"/>
+          <a:stretch>
+            <a:fillRect/>
+          </a:stretch>
+        </p:blipFill>
+        <p:spPr>
+          <a:xfrm>
+            <a:off x="960120" y="2551176"/>
+            <a:ext cx="283464" cy="246888"/>
+          </a:xfrm>
+          <a:prstGeom prst="rect">
+            <a:avLst/>
+          </a:prstGeom>
+        </p:spPr>
+      </p:pic>
+      <p:sp>
+        <p:nvSpPr>
+          <p:cNvPr id="10" name="Text 6"/>
+          <p:cNvSpPr/>
+          <p:nvPr/>
+        </p:nvSpPr>
+        <p:spPr>
+          <a:xfrm>
+            <a:off x="1508760" y="2350008"/>
+            <a:ext cx="4343400" cy="365760"/>
+          </a:xfrm>
+          <a:prstGeom prst="rect">
+            <a:avLst/>
+          </a:prstGeom>
+          <a:noFill/>
+          <a:ln/>
+        </p:spPr>
+        <p:txBody>
+          <a:bodyPr wrap="square" lIns="0" tIns="0" rIns="0" bIns="0" rtlCol="0" anchor="t"/>
+          <a:lstStyle/>
+          <a:p>
+            <a:pPr algn="l" indent="0" marL="0">
+              <a:buNone/>
+            </a:pPr>
+            <a:r>
+              <a:rPr lang="en-US" sz="1650" b="1" dirty="0">
+                <a:solidFill>
+                  <a:srgbClr val="2B2B33"/>
+                </a:solidFill>
+                <a:latin typeface="Cambria" pitchFamily="34" charset="0"/>
+                <a:ea typeface="Cambria" pitchFamily="34" charset="-122"/>
+                <a:cs typeface="Cambria" pitchFamily="34" charset="-120"/>
+              </a:rPr>
+              <a:t>LMWH (enoxaparin)</a:t>
+            </a:r>
+            <a:endParaRPr lang="en-US" sz="1650" dirty="0"/>
+          </a:p>
+        </p:txBody>
+      </p:sp>
+      <p:sp>
+        <p:nvSpPr>
+          <p:cNvPr id="11" name="Text 7"/>
+          <p:cNvSpPr/>
+          <p:nvPr/>
+        </p:nvSpPr>
+        <p:spPr>
+          <a:xfrm>
+            <a:off x="1508760" y="2706624"/>
+            <a:ext cx="4389120" cy="685800"/>
+          </a:xfrm>
+          <a:prstGeom prst="rect">
+            <a:avLst/>
+          </a:prstGeom>
+          <a:noFill/>
+          <a:ln/>
+        </p:spPr>
+        <p:txBody>
+          <a:bodyPr wrap="square" lIns="0" tIns="0" rIns="0" bIns="0" rtlCol="0" anchor="t"/>
+          <a:lstStyle/>
+          <a:p>
+            <a:pPr algn="l" indent="0" marL="0">
+              <a:lnSpc>
+                <a:spcPct val="108000"/>
+              </a:lnSpc>
+              <a:buNone/>
+            </a:pPr>
+            <a:r>
+              <a:rPr lang="en-US" sz="1250" dirty="0">
+                <a:solidFill>
+                  <a:srgbClr val="6B6B76"/>
+                </a:solidFill>
+                <a:latin typeface="Calibri" pitchFamily="34" charset="0"/>
+                <a:ea typeface="Calibri" pitchFamily="34" charset="-122"/>
+                <a:cs typeface="Calibri" pitchFamily="34" charset="-120"/>
+              </a:rPr>
+              <a:t>Does not cross the placenta — the agent of choice; weight-adjusted, monitor anti-Xa</a:t>
+            </a:r>
+            <a:endParaRPr lang="en-US" sz="1250" dirty="0"/>
+          </a:p>
+        </p:txBody>
+      </p:sp>
+      <p:sp>
+        <p:nvSpPr>
+          <p:cNvPr id="12" name="Shape 8"/>
+          <p:cNvSpPr/>
+          <p:nvPr/>
+        </p:nvSpPr>
+        <p:spPr>
+          <a:xfrm>
+            <a:off x="822960" y="3511296"/>
+            <a:ext cx="548640" cy="548640"/>
+          </a:xfrm>
+          <a:prstGeom prst="ellipse">
+            <a:avLst/>
+          </a:prstGeom>
+          <a:solidFill>
+            <a:srgbClr val="2E7D32"/>
+          </a:solidFill>
+          <a:ln/>
+        </p:spPr>
+      </p:sp>
+      <p:pic>
+        <p:nvPicPr>
+          <p:cNvPr id="13" name="Image 2" descr="preencoded.png">    </p:cNvPr>
+          <p:cNvPicPr>
+            <a:picLocks noChangeAspect="1"/>
+          </p:cNvPicPr>
+          <p:nvPr/>
+        </p:nvPicPr>
+        <p:blipFill>
+          <a:blip r:embed="rId3"/>
+          <a:stretch>
+            <a:fillRect/>
+          </a:stretch>
+        </p:blipFill>
+        <p:spPr>
+          <a:xfrm>
+            <a:off x="960120" y="3666744"/>
+            <a:ext cx="283464" cy="246888"/>
+          </a:xfrm>
+          <a:prstGeom prst="rect">
+            <a:avLst/>
+          </a:prstGeom>
+        </p:spPr>
+      </p:pic>
+      <p:sp>
+        <p:nvSpPr>
+          <p:cNvPr id="14" name="Text 9"/>
+          <p:cNvSpPr/>
+          <p:nvPr/>
+        </p:nvSpPr>
+        <p:spPr>
+          <a:xfrm>
+            <a:off x="1508760" y="3465576"/>
+            <a:ext cx="4343400" cy="365760"/>
+          </a:xfrm>
+          <a:prstGeom prst="rect">
+            <a:avLst/>
+          </a:prstGeom>
+          <a:noFill/>
+          <a:ln/>
+        </p:spPr>
+        <p:txBody>
+          <a:bodyPr wrap="square" lIns="0" tIns="0" rIns="0" bIns="0" rtlCol="0" anchor="t"/>
+          <a:lstStyle/>
+          <a:p>
+            <a:pPr algn="l" indent="0" marL="0">
+              <a:buNone/>
+            </a:pPr>
+            <a:r>
+              <a:rPr lang="en-US" sz="1650" b="1" dirty="0">
+                <a:solidFill>
+                  <a:srgbClr val="2B2B33"/>
+                </a:solidFill>
+                <a:latin typeface="Cambria" pitchFamily="34" charset="0"/>
+                <a:ea typeface="Cambria" pitchFamily="34" charset="-122"/>
+                <a:cs typeface="Cambria" pitchFamily="34" charset="-120"/>
+              </a:rPr>
+              <a:t>Unfractionated heparin</a:t>
+            </a:r>
+            <a:endParaRPr lang="en-US" sz="1650" dirty="0"/>
+          </a:p>
+        </p:txBody>
+      </p:sp>
+      <p:sp>
+        <p:nvSpPr>
+          <p:cNvPr id="15" name="Text 10"/>
+          <p:cNvSpPr/>
+          <p:nvPr/>
+        </p:nvSpPr>
+        <p:spPr>
+          <a:xfrm>
+            <a:off x="1508760" y="3822192"/>
+            <a:ext cx="4389120" cy="685800"/>
+          </a:xfrm>
+          <a:prstGeom prst="rect">
+            <a:avLst/>
+          </a:prstGeom>
+          <a:noFill/>
+          <a:ln/>
+        </p:spPr>
+        <p:txBody>
+          <a:bodyPr wrap="square" lIns="0" tIns="0" rIns="0" bIns="0" rtlCol="0" anchor="t"/>
+          <a:lstStyle/>
+          <a:p>
+            <a:pPr algn="l" indent="0" marL="0">
+              <a:lnSpc>
+                <a:spcPct val="108000"/>
+              </a:lnSpc>
+              <a:buNone/>
+            </a:pPr>
+            <a:r>
+              <a:rPr lang="en-US" sz="1250" dirty="0">
+                <a:solidFill>
+                  <a:srgbClr val="6B6B76"/>
+                </a:solidFill>
+                <a:latin typeface="Calibri" pitchFamily="34" charset="0"/>
+                <a:ea typeface="Calibri" pitchFamily="34" charset="-122"/>
+                <a:cs typeface="Calibri" pitchFamily="34" charset="-120"/>
+              </a:rPr>
+              <a:t>Also placenta-safe; useful peri-delivery — short-acting &amp; reversible</a:t>
+            </a:r>
+            <a:endParaRPr lang="en-US" sz="1250" dirty="0"/>
+          </a:p>
+        </p:txBody>
+      </p:sp>
+      <p:sp>
+        <p:nvSpPr>
+          <p:cNvPr id="16" name="Shape 11"/>
+          <p:cNvSpPr/>
+          <p:nvPr/>
+        </p:nvSpPr>
+        <p:spPr>
+          <a:xfrm>
+            <a:off x="6172200" y="1783080"/>
+            <a:ext cx="5532120" cy="2971800"/>
+          </a:xfrm>
+          <a:prstGeom prst="roundRect">
+            <a:avLst>
+              <a:gd name="adj" fmla="val 3692"/>
+            </a:avLst>
+          </a:prstGeom>
+          <a:solidFill>
+            <a:srgbClr val="590D22"/>
+          </a:solidFill>
+          <a:ln/>
+          <a:effectLst>
+            <a:outerShdw sx="100000" sy="100000" kx="0" ky="0" algn="bl" rotWithShape="0" blurRad="127000" dist="50800" dir="5400000">
+              <a:srgbClr val="C9A3AC">
+                <a:alpha val="45000"/>
+              </a:srgbClr>
+            </a:outerShdw>
+          </a:effectLst>
+        </p:spPr>
+      </p:sp>
+      <p:sp>
+        <p:nvSpPr>
+          <p:cNvPr id="17" name="Text 12"/>
+          <p:cNvSpPr/>
+          <p:nvPr/>
+        </p:nvSpPr>
+        <p:spPr>
+          <a:xfrm>
+            <a:off x="6492240" y="2011680"/>
+            <a:ext cx="4846320" cy="274320"/>
+          </a:xfrm>
+          <a:prstGeom prst="rect">
+            <a:avLst/>
+          </a:prstGeom>
+          <a:noFill/>
+          <a:ln/>
+        </p:spPr>
+        <p:txBody>
+          <a:bodyPr wrap="square" rtlCol="0" anchor="t"/>
+          <a:lstStyle/>
+          <a:p>
+            <a:pPr algn="l" indent="0" marL="0">
+              <a:buNone/>
+            </a:pPr>
+            <a:r>
+              <a:rPr lang="en-US" sz="1300" b="1" spc="150" kern="0" dirty="0">
+                <a:solidFill>
+                  <a:srgbClr val="FF4D6D"/>
+                </a:solidFill>
+                <a:latin typeface="Calibri" pitchFamily="34" charset="0"/>
+                <a:ea typeface="Calibri" pitchFamily="34" charset="-122"/>
+                <a:cs typeface="Calibri" pitchFamily="34" charset="-120"/>
+              </a:rPr>
+              <a:t>✕  </a:t>
+            </a:r>
+            <a:pPr algn="l" indent="0" marL="0">
+              <a:buNone/>
+            </a:pPr>
+            <a:r>
+              <a:rPr lang="en-US" sz="1300" b="1" spc="150" kern="0" dirty="0">
+                <a:solidFill>
+                  <a:srgbClr val="FFFFFF"/>
+                </a:solidFill>
+                <a:latin typeface="Calibri" pitchFamily="34" charset="0"/>
+                <a:ea typeface="Calibri" pitchFamily="34" charset="-122"/>
+                <a:cs typeface="Calibri" pitchFamily="34" charset="-120"/>
+              </a:rPr>
+              <a:t>AVOID</a:t>
+            </a:r>
+            <a:endParaRPr lang="en-US" sz="1300" dirty="0"/>
+          </a:p>
+        </p:txBody>
+      </p:sp>
+      <p:sp>
+        <p:nvSpPr>
+          <p:cNvPr id="18" name="Shape 13"/>
+          <p:cNvSpPr/>
+          <p:nvPr/>
+        </p:nvSpPr>
+        <p:spPr>
+          <a:xfrm>
+            <a:off x="6492240" y="2395728"/>
+            <a:ext cx="548640" cy="548640"/>
+          </a:xfrm>
+          <a:prstGeom prst="ellipse">
+            <a:avLst/>
+          </a:prstGeom>
+          <a:solidFill>
+            <a:srgbClr val="A4133C"/>
+          </a:solidFill>
+          <a:ln/>
+        </p:spPr>
+      </p:sp>
+      <p:pic>
+        <p:nvPicPr>
+          <p:cNvPr id="19" name="Image 3" descr="preencoded.png">    </p:cNvPr>
+          <p:cNvPicPr>
+            <a:picLocks noChangeAspect="1"/>
+          </p:cNvPicPr>
+          <p:nvPr/>
+        </p:nvPicPr>
+        <p:blipFill>
+          <a:blip r:embed="rId4"/>
+          <a:stretch>
+            <a:fillRect/>
+          </a:stretch>
+        </p:blipFill>
+        <p:spPr>
+          <a:xfrm>
+            <a:off x="6638544" y="2551176"/>
+            <a:ext cx="256032" cy="256032"/>
+          </a:xfrm>
+          <a:prstGeom prst="rect">
+            <a:avLst/>
+          </a:prstGeom>
+        </p:spPr>
+      </p:pic>
+      <p:sp>
+        <p:nvSpPr>
+          <p:cNvPr id="20" name="Text 14"/>
+          <p:cNvSpPr/>
+          <p:nvPr/>
+        </p:nvSpPr>
+        <p:spPr>
+          <a:xfrm>
+            <a:off x="7178040" y="2350008"/>
+            <a:ext cx="4297680" cy="365760"/>
+          </a:xfrm>
+          <a:prstGeom prst="rect">
+            <a:avLst/>
+          </a:prstGeom>
+          <a:noFill/>
+          <a:ln/>
+        </p:spPr>
+        <p:txBody>
+          <a:bodyPr wrap="square" lIns="0" tIns="0" rIns="0" bIns="0" rtlCol="0" anchor="t"/>
+          <a:lstStyle/>
+          <a:p>
+            <a:pPr algn="l" indent="0" marL="0">
+              <a:buNone/>
+            </a:pPr>
+            <a:r>
+              <a:rPr lang="en-US" sz="1650" b="1" dirty="0">
+                <a:solidFill>
+                  <a:srgbClr val="FFFFFF"/>
+                </a:solidFill>
+                <a:latin typeface="Cambria" pitchFamily="34" charset="0"/>
+                <a:ea typeface="Cambria" pitchFamily="34" charset="-122"/>
+                <a:cs typeface="Cambria" pitchFamily="34" charset="-120"/>
+              </a:rPr>
+              <a:t>Warfarin (VKA)</a:t>
+            </a:r>
+            <a:endParaRPr lang="en-US" sz="1650" dirty="0"/>
+          </a:p>
+        </p:txBody>
+      </p:sp>
+      <p:sp>
+        <p:nvSpPr>
+          <p:cNvPr id="21" name="Text 15"/>
+          <p:cNvSpPr/>
+          <p:nvPr/>
+        </p:nvSpPr>
+        <p:spPr>
+          <a:xfrm>
+            <a:off x="7178040" y="2706624"/>
+            <a:ext cx="4343400" cy="685800"/>
+          </a:xfrm>
+          <a:prstGeom prst="rect">
+            <a:avLst/>
+          </a:prstGeom>
+          <a:noFill/>
+          <a:ln/>
+        </p:spPr>
+        <p:txBody>
+          <a:bodyPr wrap="square" lIns="0" tIns="0" rIns="0" bIns="0" rtlCol="0" anchor="t"/>
+          <a:lstStyle/>
+          <a:p>
+            <a:pPr algn="l" indent="0" marL="0">
+              <a:lnSpc>
+                <a:spcPct val="108000"/>
+              </a:lnSpc>
+              <a:buNone/>
+            </a:pPr>
+            <a:r>
+              <a:rPr lang="en-US" sz="1250" dirty="0">
+                <a:solidFill>
+                  <a:srgbClr val="FBD8DF"/>
+                </a:solidFill>
+                <a:latin typeface="Calibri" pitchFamily="34" charset="0"/>
+                <a:ea typeface="Calibri" pitchFamily="34" charset="-122"/>
+                <a:cs typeface="Calibri" pitchFamily="34" charset="-120"/>
+              </a:rPr>
+              <a:t>Teratogenic — embryopathy at weeks 6–12 and fetal bleeding near term</a:t>
+            </a:r>
+            <a:endParaRPr lang="en-US" sz="1250" dirty="0"/>
+          </a:p>
+        </p:txBody>
+      </p:sp>
+      <p:sp>
+        <p:nvSpPr>
+          <p:cNvPr id="22" name="Shape 16"/>
+          <p:cNvSpPr/>
+          <p:nvPr/>
+        </p:nvSpPr>
+        <p:spPr>
+          <a:xfrm>
+            <a:off x="6492240" y="3511296"/>
+            <a:ext cx="548640" cy="548640"/>
+          </a:xfrm>
+          <a:prstGeom prst="ellipse">
+            <a:avLst/>
+          </a:prstGeom>
+          <a:solidFill>
+            <a:srgbClr val="A4133C"/>
+          </a:solidFill>
+          <a:ln/>
+        </p:spPr>
+      </p:sp>
+      <p:pic>
+        <p:nvPicPr>
+          <p:cNvPr id="23" name="Image 4" descr="preencoded.png">    </p:cNvPr>
+          <p:cNvPicPr>
+            <a:picLocks noChangeAspect="1"/>
+          </p:cNvPicPr>
+          <p:nvPr/>
+        </p:nvPicPr>
+        <p:blipFill>
+          <a:blip r:embed="rId5"/>
+          <a:stretch>
+            <a:fillRect/>
+          </a:stretch>
+        </p:blipFill>
+        <p:spPr>
+          <a:xfrm>
+            <a:off x="6638544" y="3666744"/>
+            <a:ext cx="256032" cy="256032"/>
+          </a:xfrm>
+          <a:prstGeom prst="rect">
+            <a:avLst/>
+          </a:prstGeom>
+        </p:spPr>
+      </p:pic>
+      <p:sp>
+        <p:nvSpPr>
+          <p:cNvPr id="24" name="Text 17"/>
+          <p:cNvSpPr/>
+          <p:nvPr/>
+        </p:nvSpPr>
+        <p:spPr>
+          <a:xfrm>
+            <a:off x="7178040" y="3465576"/>
+            <a:ext cx="4297680" cy="365760"/>
+          </a:xfrm>
+          <a:prstGeom prst="rect">
+            <a:avLst/>
+          </a:prstGeom>
+          <a:noFill/>
+          <a:ln/>
+        </p:spPr>
+        <p:txBody>
+          <a:bodyPr wrap="square" lIns="0" tIns="0" rIns="0" bIns="0" rtlCol="0" anchor="t"/>
+          <a:lstStyle/>
+          <a:p>
+            <a:pPr algn="l" indent="0" marL="0">
+              <a:buNone/>
+            </a:pPr>
+            <a:r>
+              <a:rPr lang="en-US" sz="1650" b="1" dirty="0">
+                <a:solidFill>
+                  <a:srgbClr val="FFFFFF"/>
+                </a:solidFill>
+                <a:latin typeface="Cambria" pitchFamily="34" charset="0"/>
+                <a:ea typeface="Cambria" pitchFamily="34" charset="-122"/>
+                <a:cs typeface="Cambria" pitchFamily="34" charset="-120"/>
+              </a:rPr>
+              <a:t>DOACs</a:t>
+            </a:r>
+            <a:endParaRPr lang="en-US" sz="1650" dirty="0"/>
+          </a:p>
+        </p:txBody>
+      </p:sp>
+      <p:sp>
+        <p:nvSpPr>
+          <p:cNvPr id="25" name="Text 18"/>
+          <p:cNvSpPr/>
+          <p:nvPr/>
+        </p:nvSpPr>
+        <p:spPr>
+          <a:xfrm>
+            <a:off x="7178040" y="3822192"/>
+            <a:ext cx="4343400" cy="685800"/>
+          </a:xfrm>
+          <a:prstGeom prst="rect">
+            <a:avLst/>
+          </a:prstGeom>
+          <a:noFill/>
+          <a:ln/>
+        </p:spPr>
+        <p:txBody>
+          <a:bodyPr wrap="square" lIns="0" tIns="0" rIns="0" bIns="0" rtlCol="0" anchor="t"/>
+          <a:lstStyle/>
+          <a:p>
+            <a:pPr algn="l" indent="0" marL="0">
+              <a:lnSpc>
+                <a:spcPct val="108000"/>
+              </a:lnSpc>
+              <a:buNone/>
+            </a:pPr>
+            <a:r>
+              <a:rPr lang="en-US" sz="1250" dirty="0">
+                <a:solidFill>
+                  <a:srgbClr val="FBD8DF"/>
+                </a:solidFill>
+                <a:latin typeface="Calibri" pitchFamily="34" charset="0"/>
+                <a:ea typeface="Calibri" pitchFamily="34" charset="-122"/>
+                <a:cs typeface="Calibri" pitchFamily="34" charset="-120"/>
+              </a:rPr>
+              <a:t>Not recommended — cross the placenta with limited safety data</a:t>
+            </a:r>
+            <a:endParaRPr lang="en-US" sz="1250" dirty="0"/>
+          </a:p>
+        </p:txBody>
+      </p:sp>
+      <p:sp>
+        <p:nvSpPr>
+          <p:cNvPr id="26" name="Shape 19"/>
+          <p:cNvSpPr/>
+          <p:nvPr/>
+        </p:nvSpPr>
+        <p:spPr>
+          <a:xfrm>
+            <a:off x="502920" y="4937760"/>
+            <a:ext cx="11183112" cy="1051560"/>
+          </a:xfrm>
+          <a:prstGeom prst="roundRect">
+            <a:avLst>
+              <a:gd name="adj" fmla="val 10435"/>
+            </a:avLst>
+          </a:prstGeom>
+          <a:solidFill>
+            <a:srgbClr val="FBD8DF"/>
+          </a:solidFill>
+          <a:ln/>
+        </p:spPr>
+      </p:sp>
+      <p:sp>
+        <p:nvSpPr>
+          <p:cNvPr id="27" name="Text 20"/>
+          <p:cNvSpPr/>
+          <p:nvPr/>
+        </p:nvSpPr>
+        <p:spPr>
+          <a:xfrm>
+            <a:off x="914400" y="5084064"/>
+            <a:ext cx="10424160" cy="365760"/>
+          </a:xfrm>
+          <a:prstGeom prst="rect">
+            <a:avLst/>
+          </a:prstGeom>
+          <a:noFill/>
+          <a:ln/>
+        </p:spPr>
+        <p:txBody>
+          <a:bodyPr wrap="square" lIns="0" tIns="0" rIns="0" bIns="0" rtlCol="0" anchor="ctr"/>
+          <a:lstStyle/>
+          <a:p>
+            <a:pPr algn="l" indent="0" marL="0">
+              <a:buNone/>
+            </a:pPr>
+            <a:r>
+              <a:rPr lang="en-US" sz="1350" b="1" dirty="0">
+                <a:solidFill>
+                  <a:srgbClr val="A4133C"/>
+                </a:solidFill>
+                <a:latin typeface="Calibri" pitchFamily="34" charset="0"/>
+                <a:ea typeface="Calibri" pitchFamily="34" charset="-122"/>
+                <a:cs typeface="Calibri" pitchFamily="34" charset="-120"/>
+              </a:rPr>
+              <a:t>Peri-delivery   </a:t>
+            </a:r>
+            <a:pPr algn="l" indent="0" marL="0">
+              <a:buNone/>
+            </a:pPr>
+            <a:r>
+              <a:rPr lang="en-US" sz="1350" dirty="0">
+                <a:solidFill>
+                  <a:srgbClr val="2B2B33"/>
+                </a:solidFill>
+                <a:latin typeface="Calibri" pitchFamily="34" charset="0"/>
+                <a:ea typeface="Calibri" pitchFamily="34" charset="-122"/>
+                <a:cs typeface="Calibri" pitchFamily="34" charset="-120"/>
+              </a:rPr>
+              <a:t>switch LMWH → UFH (or briefly hold) to allow neuraxial anaesthesia and limit bleeding.</a:t>
+            </a:r>
+            <a:endParaRPr lang="en-US" sz="1350" dirty="0"/>
+          </a:p>
+        </p:txBody>
+      </p:sp>
+      <p:sp>
+        <p:nvSpPr>
+          <p:cNvPr id="28" name="Text 21"/>
+          <p:cNvSpPr/>
+          <p:nvPr/>
+        </p:nvSpPr>
+        <p:spPr>
+          <a:xfrm>
+            <a:off x="914400" y="5468112"/>
+            <a:ext cx="10607040" cy="365760"/>
+          </a:xfrm>
+          <a:prstGeom prst="rect">
+            <a:avLst/>
+          </a:prstGeom>
+          <a:noFill/>
+          <a:ln/>
+        </p:spPr>
+        <p:txBody>
+          <a:bodyPr wrap="square" lIns="0" tIns="0" rIns="0" bIns="0" rtlCol="0" anchor="ctr"/>
+          <a:lstStyle/>
+          <a:p>
+            <a:pPr algn="l" indent="0" marL="0">
+              <a:buNone/>
+            </a:pPr>
+            <a:r>
+              <a:rPr lang="en-US" sz="1350" b="1" dirty="0">
+                <a:solidFill>
+                  <a:srgbClr val="A4133C"/>
+                </a:solidFill>
+                <a:latin typeface="Calibri" pitchFamily="34" charset="0"/>
+                <a:ea typeface="Calibri" pitchFamily="34" charset="-122"/>
+                <a:cs typeface="Calibri" pitchFamily="34" charset="-120"/>
+              </a:rPr>
+              <a:t>Breastfeeding   </a:t>
+            </a:r>
+            <a:pPr algn="l" indent="0" marL="0">
+              <a:buNone/>
+            </a:pPr>
+            <a:r>
+              <a:rPr lang="en-US" sz="1350" dirty="0">
+                <a:solidFill>
+                  <a:srgbClr val="2B2B33"/>
+                </a:solidFill>
+                <a:latin typeface="Calibri" pitchFamily="34" charset="0"/>
+                <a:ea typeface="Calibri" pitchFamily="34" charset="-122"/>
+                <a:cs typeface="Calibri" pitchFamily="34" charset="-120"/>
+              </a:rPr>
+              <a:t>warfarin, LMWH and UFH are compatible; DOACs are avoided. Plan with a specialist team.</a:t>
+            </a:r>
+            <a:endParaRPr lang="en-US" sz="1350" dirty="0"/>
+          </a:p>
+        </p:txBody>
+      </p:sp>
+      <p:sp>
+        <p:nvSpPr>
+          <p:cNvPr id="29" name="Text 22"/>
+          <p:cNvSpPr/>
+          <p:nvPr/>
+        </p:nvSpPr>
+        <p:spPr>
+          <a:xfrm>
+            <a:off x="11277295" y="6355080"/>
+            <a:ext cx="548640" cy="320040"/>
+          </a:xfrm>
+          <a:prstGeom prst="rect">
+            <a:avLst/>
+          </a:prstGeom>
+          <a:noFill/>
+          <a:ln/>
+        </p:spPr>
+        <p:txBody>
+          <a:bodyPr wrap="square" rtlCol="0" anchor="t"/>
+          <a:lstStyle/>
+          <a:p>
+            <a:pPr algn="r" indent="0" marL="0">
+              <a:buNone/>
+            </a:pPr>
+            <a:r>
+              <a:rPr lang="en-US" sz="1100" b="1" dirty="0">
+                <a:solidFill>
+                  <a:srgbClr val="6B6B76"/>
+                </a:solidFill>
+                <a:latin typeface="Calibri" pitchFamily="34" charset="0"/>
+                <a:ea typeface="Calibri" pitchFamily="34" charset="-122"/>
+                <a:cs typeface="Calibri" pitchFamily="34" charset="-120"/>
+              </a:rPr>
+              <a:t>16</a:t>
+            </a:r>
+            <a:endParaRPr lang="en-US" sz="1100" dirty="0"/>
+          </a:p>
+        </p:txBody>
+      </p:sp>
+      <p:sp>
+        <p:nvSpPr>
+          <p:cNvPr id="30" name="Text 23"/>
+          <p:cNvSpPr/>
+          <p:nvPr/>
+        </p:nvSpPr>
+        <p:spPr>
+          <a:xfrm>
+            <a:off x="502920" y="6355080"/>
+            <a:ext cx="7315200" cy="320040"/>
+          </a:xfrm>
+          <a:prstGeom prst="rect">
+            <a:avLst/>
+          </a:prstGeom>
+          <a:noFill/>
+          <a:ln/>
+        </p:spPr>
+        <p:txBody>
+          <a:bodyPr wrap="square" rtlCol="0" anchor="t"/>
+          <a:lstStyle/>
+          <a:p>
+            <a:pPr algn="l" indent="0" marL="0">
+              <a:buNone/>
+            </a:pPr>
+            <a:r>
+              <a:rPr lang="en-US" sz="900" dirty="0">
+                <a:solidFill>
+                  <a:srgbClr val="6B6B76"/>
+                </a:solidFill>
+                <a:latin typeface="Calibri" pitchFamily="34" charset="0"/>
+                <a:ea typeface="Calibri" pitchFamily="34" charset="-122"/>
+                <a:cs typeface="Calibri" pitchFamily="34" charset="-120"/>
+              </a:rPr>
+              <a:t>Atrial Fibrillation — Clinical Topic Review</a:t>
+            </a:r>
+            <a:endParaRPr lang="en-US" sz="900" dirty="0"/>
+          </a:p>
+        </p:txBody>
+      </p:sp>
+    </p:spTree>
+  </p:cSld>
+  <p:clrMapOvr>
+    <a:masterClrMapping/>
+  </p:clrMapOvr>
+</p:sld>
+</file>
+
+<file path=ppt/slides/slide17.xml><?xml version="1.0" encoding="utf-8"?>
+<p:sld xmlns:a="http://schemas.openxmlformats.org/drawingml/2006/main" xmlns:r="http://schemas.openxmlformats.org/officeDocument/2006/relationships" xmlns:p="http://schemas.openxmlformats.org/presentationml/2006/main">
+  <p:cSld name="Slide 17">
+    <p:bg>
+      <p:bgPr>
+        <a:solidFill>
+          <a:srgbClr val="FFFFFF"/>
+        </a:solidFill>
+      </p:bgPr>
+    </p:bg>
+    <p:spTree>
+      <p:nvGrpSpPr>
+        <p:cNvPr id="1" name=""/>
+        <p:cNvGrpSpPr/>
+        <p:nvPr/>
+      </p:nvGrpSpPr>
+      <p:grpSpPr>
+        <a:xfrm>
+          <a:off x="0" y="0"/>
+          <a:ext cx="0" cy="0"/>
+          <a:chOff x="0" y="0"/>
+          <a:chExt cx="0" cy="0"/>
+        </a:xfrm>
+      </p:grpSpPr>
+      <p:sp>
+        <p:nvSpPr>
+          <p:cNvPr id="2" name="Shape 0"/>
+          <p:cNvSpPr/>
+          <p:nvPr/>
+        </p:nvSpPr>
+        <p:spPr>
+          <a:xfrm>
+            <a:off x="502920" y="457200"/>
+            <a:ext cx="868680" cy="868680"/>
+          </a:xfrm>
+          <a:prstGeom prst="ellipse">
+            <a:avLst/>
+          </a:prstGeom>
+          <a:solidFill>
+            <a:srgbClr val="FFF0F3"/>
+          </a:solidFill>
+          <a:ln w="12700">
+            <a:solidFill>
+              <a:srgbClr val="FBD8DF"/>
+            </a:solidFill>
+            <a:prstDash val="solid"/>
+          </a:ln>
+        </p:spPr>
+      </p:sp>
+      <p:pic>
+        <p:nvPicPr>
+          <p:cNvPr id="3" name="Image 0" descr="preencoded.png">    </p:cNvPr>
+          <p:cNvPicPr>
+            <a:picLocks noChangeAspect="1"/>
+          </p:cNvPicPr>
+          <p:nvPr/>
+        </p:nvPicPr>
+        <p:blipFill>
+          <a:blip r:embed="rId1"/>
+          <a:stretch>
+            <a:fillRect/>
+          </a:stretch>
+        </p:blipFill>
+        <p:spPr>
+          <a:xfrm>
+            <a:off x="694944" y="649224"/>
+            <a:ext cx="484632" cy="484632"/>
+          </a:xfrm>
+          <a:prstGeom prst="rect">
+            <a:avLst/>
+          </a:prstGeom>
+        </p:spPr>
+      </p:pic>
+      <p:sp>
+        <p:nvSpPr>
+          <p:cNvPr id="4" name="Text 1"/>
+          <p:cNvSpPr/>
+          <p:nvPr/>
+        </p:nvSpPr>
+        <p:spPr>
+          <a:xfrm>
+            <a:off x="1572768" y="502920"/>
+            <a:ext cx="9966960" cy="274320"/>
+          </a:xfrm>
+          <a:prstGeom prst="rect">
+            <a:avLst/>
+          </a:prstGeom>
+          <a:noFill/>
+          <a:ln/>
+        </p:spPr>
+        <p:txBody>
+          <a:bodyPr wrap="square" rtlCol="0" anchor="t"/>
+          <a:lstStyle/>
+          <a:p>
+            <a:pPr algn="l" indent="0" marL="0">
+              <a:buNone/>
+            </a:pPr>
+            <a:r>
+              <a:rPr lang="en-US" sz="1250" b="1" spc="200" kern="0" dirty="0">
+                <a:solidFill>
+                  <a:srgbClr val="A4133C"/>
+                </a:solidFill>
+                <a:latin typeface="Calibri" pitchFamily="34" charset="0"/>
+                <a:ea typeface="Calibri" pitchFamily="34" charset="-122"/>
+                <a:cs typeface="Calibri" pitchFamily="34" charset="-120"/>
+              </a:rPr>
+              <a:t>SPECIAL POPULATIONS · PREGNANCY</a:t>
+            </a:r>
+            <a:endParaRPr lang="en-US" sz="1250" dirty="0"/>
+          </a:p>
+        </p:txBody>
+      </p:sp>
+      <p:sp>
+        <p:nvSpPr>
+          <p:cNvPr id="5" name="Text 2"/>
+          <p:cNvSpPr/>
+          <p:nvPr/>
+        </p:nvSpPr>
+        <p:spPr>
+          <a:xfrm>
+            <a:off x="1554480" y="749808"/>
+            <a:ext cx="10241280" cy="640080"/>
+          </a:xfrm>
+          <a:prstGeom prst="rect">
+            <a:avLst/>
+          </a:prstGeom>
+          <a:noFill/>
+          <a:ln/>
+        </p:spPr>
+        <p:txBody>
+          <a:bodyPr wrap="square" rtlCol="0" anchor="t"/>
+          <a:lstStyle/>
+          <a:p>
+            <a:pPr algn="l" indent="0" marL="0">
+              <a:buNone/>
+            </a:pPr>
+            <a:r>
+              <a:rPr lang="en-US" sz="3000" b="1" dirty="0">
+                <a:solidFill>
+                  <a:srgbClr val="2B2B33"/>
+                </a:solidFill>
+                <a:latin typeface="Cambria" pitchFamily="34" charset="0"/>
+                <a:ea typeface="Cambria" pitchFamily="34" charset="-122"/>
+                <a:cs typeface="Cambria" pitchFamily="34" charset="-120"/>
+              </a:rPr>
+              <a:t>Rhythm &amp; Rate Control in Pregnancy</a:t>
+            </a:r>
+            <a:endParaRPr lang="en-US" sz="3000" dirty="0"/>
+          </a:p>
+        </p:txBody>
+      </p:sp>
+      <p:sp>
+        <p:nvSpPr>
+          <p:cNvPr id="6" name="Shape 3"/>
+          <p:cNvSpPr/>
+          <p:nvPr/>
+        </p:nvSpPr>
+        <p:spPr>
+          <a:xfrm>
+            <a:off x="502920" y="1783080"/>
+            <a:ext cx="5532120" cy="4206240"/>
+          </a:xfrm>
+          <a:prstGeom prst="roundRect">
+            <a:avLst>
+              <a:gd name="adj" fmla="val 2609"/>
+            </a:avLst>
+          </a:prstGeom>
+          <a:solidFill>
+            <a:srgbClr val="FFF0F3"/>
+          </a:solidFill>
+          <a:ln w="12700">
+            <a:solidFill>
+              <a:srgbClr val="FBD8DF"/>
+            </a:solidFill>
+            <a:prstDash val="solid"/>
+          </a:ln>
+          <a:effectLst>
+            <a:outerShdw sx="100000" sy="100000" kx="0" ky="0" algn="bl" rotWithShape="0" blurRad="127000" dist="50800" dir="5400000">
+              <a:srgbClr val="C9A3AC">
+                <a:alpha val="45000"/>
+              </a:srgbClr>
+            </a:outerShdw>
+          </a:effectLst>
+        </p:spPr>
+      </p:sp>
+      <p:sp>
+        <p:nvSpPr>
+          <p:cNvPr id="7" name="Text 4"/>
+          <p:cNvSpPr/>
+          <p:nvPr/>
+        </p:nvSpPr>
+        <p:spPr>
+          <a:xfrm>
+            <a:off x="868680" y="2057400"/>
+            <a:ext cx="4846320" cy="274320"/>
+          </a:xfrm>
+          <a:prstGeom prst="rect">
+            <a:avLst/>
+          </a:prstGeom>
+          <a:noFill/>
+          <a:ln/>
+        </p:spPr>
+        <p:txBody>
+          <a:bodyPr wrap="square" rtlCol="0" anchor="t"/>
+          <a:lstStyle/>
+          <a:p>
+            <a:pPr algn="l" indent="0" marL="0">
+              <a:buNone/>
+            </a:pPr>
+            <a:r>
+              <a:rPr lang="en-US" sz="1300" b="1" spc="150" kern="0" dirty="0">
+                <a:solidFill>
+                  <a:srgbClr val="2E7D32"/>
+                </a:solidFill>
+                <a:latin typeface="Calibri" pitchFamily="34" charset="0"/>
+                <a:ea typeface="Calibri" pitchFamily="34" charset="-122"/>
+                <a:cs typeface="Calibri" pitchFamily="34" charset="-120"/>
+              </a:rPr>
+              <a:t>✓  </a:t>
+            </a:r>
+            <a:pPr algn="l" indent="0" marL="0">
+              <a:buNone/>
+            </a:pPr>
+            <a:r>
+              <a:rPr lang="en-US" sz="1300" b="1" spc="150" kern="0" dirty="0">
+                <a:solidFill>
+                  <a:srgbClr val="2E7D32"/>
+                </a:solidFill>
+                <a:latin typeface="Calibri" pitchFamily="34" charset="0"/>
+                <a:ea typeface="Calibri" pitchFamily="34" charset="-122"/>
+                <a:cs typeface="Calibri" pitchFamily="34" charset="-120"/>
+              </a:rPr>
+              <a:t>GENERALLY SAFE</a:t>
+            </a:r>
+            <a:endParaRPr lang="en-US" sz="1300" dirty="0"/>
+          </a:p>
+        </p:txBody>
+      </p:sp>
+      <p:sp>
+        <p:nvSpPr>
+          <p:cNvPr id="8" name="Shape 5"/>
+          <p:cNvSpPr/>
+          <p:nvPr/>
+        </p:nvSpPr>
+        <p:spPr>
+          <a:xfrm>
+            <a:off x="868680" y="2542032"/>
+            <a:ext cx="566928" cy="566928"/>
+          </a:xfrm>
+          <a:prstGeom prst="ellipse">
+            <a:avLst/>
+          </a:prstGeom>
+          <a:solidFill>
+            <a:srgbClr val="FFFFFF"/>
+          </a:solidFill>
+          <a:ln w="12700">
+            <a:solidFill>
+              <a:srgbClr val="FBD8DF"/>
+            </a:solidFill>
+            <a:prstDash val="solid"/>
+          </a:ln>
+        </p:spPr>
+      </p:sp>
+      <p:pic>
+        <p:nvPicPr>
+          <p:cNvPr id="9" name="Image 1" descr="preencoded.png">    </p:cNvPr>
+          <p:cNvPicPr>
+            <a:picLocks noChangeAspect="1"/>
+          </p:cNvPicPr>
+          <p:nvPr/>
+        </p:nvPicPr>
+        <p:blipFill>
+          <a:blip r:embed="rId2"/>
+          <a:stretch>
+            <a:fillRect/>
+          </a:stretch>
+        </p:blipFill>
+        <p:spPr>
+          <a:xfrm>
+            <a:off x="1014984" y="2688336"/>
+            <a:ext cx="274320" cy="274320"/>
+          </a:xfrm>
+          <a:prstGeom prst="rect">
+            <a:avLst/>
+          </a:prstGeom>
+        </p:spPr>
+      </p:pic>
+      <p:sp>
+        <p:nvSpPr>
+          <p:cNvPr id="10" name="Text 6"/>
+          <p:cNvSpPr/>
+          <p:nvPr/>
+        </p:nvSpPr>
+        <p:spPr>
+          <a:xfrm>
+            <a:off x="1618488" y="2505456"/>
+            <a:ext cx="4233672" cy="292608"/>
+          </a:xfrm>
+          <a:prstGeom prst="rect">
+            <a:avLst/>
+          </a:prstGeom>
+          <a:noFill/>
+          <a:ln/>
+        </p:spPr>
+        <p:txBody>
+          <a:bodyPr wrap="square" lIns="0" tIns="0" rIns="0" bIns="0" rtlCol="0" anchor="t"/>
+          <a:lstStyle/>
+          <a:p>
+            <a:pPr algn="l" indent="0" marL="0">
+              <a:buNone/>
+            </a:pPr>
+            <a:r>
+              <a:rPr lang="en-US" sz="1600" b="1" dirty="0">
+                <a:solidFill>
+                  <a:srgbClr val="2B2B33"/>
+                </a:solidFill>
+                <a:latin typeface="Cambria" pitchFamily="34" charset="0"/>
+                <a:ea typeface="Cambria" pitchFamily="34" charset="-122"/>
+                <a:cs typeface="Cambria" pitchFamily="34" charset="-120"/>
+              </a:rPr>
+              <a:t>Beta-blockers</a:t>
+            </a:r>
+            <a:endParaRPr lang="en-US" sz="1600" dirty="0"/>
+          </a:p>
+        </p:txBody>
+      </p:sp>
+      <p:sp>
+        <p:nvSpPr>
+          <p:cNvPr id="11" name="Text 7"/>
+          <p:cNvSpPr/>
+          <p:nvPr/>
+        </p:nvSpPr>
+        <p:spPr>
+          <a:xfrm>
+            <a:off x="1618488" y="2816352"/>
+            <a:ext cx="4233672" cy="365760"/>
+          </a:xfrm>
+          <a:prstGeom prst="rect">
+            <a:avLst/>
+          </a:prstGeom>
+          <a:noFill/>
+          <a:ln/>
+        </p:spPr>
+        <p:txBody>
+          <a:bodyPr wrap="square" lIns="0" tIns="0" rIns="0" bIns="0" rtlCol="0" anchor="t"/>
+          <a:lstStyle/>
+          <a:p>
+            <a:pPr algn="l" indent="0" marL="0">
+              <a:buNone/>
+            </a:pPr>
+            <a:r>
+              <a:rPr lang="en-US" sz="1250" dirty="0">
+                <a:solidFill>
+                  <a:srgbClr val="6B6B76"/>
+                </a:solidFill>
+                <a:latin typeface="Calibri" pitchFamily="34" charset="0"/>
+                <a:ea typeface="Calibri" pitchFamily="34" charset="-122"/>
+                <a:cs typeface="Calibri" pitchFamily="34" charset="-120"/>
+              </a:rPr>
+              <a:t>First-line rate control (metoprolol, bisoprolol) — avoid atenolol</a:t>
+            </a:r>
+            <a:endParaRPr lang="en-US" sz="1250" dirty="0"/>
+          </a:p>
+        </p:txBody>
+      </p:sp>
+      <p:sp>
+        <p:nvSpPr>
+          <p:cNvPr id="12" name="Shape 8"/>
+          <p:cNvSpPr/>
+          <p:nvPr/>
+        </p:nvSpPr>
+        <p:spPr>
+          <a:xfrm>
+            <a:off x="868680" y="3621024"/>
+            <a:ext cx="566928" cy="566928"/>
+          </a:xfrm>
+          <a:prstGeom prst="ellipse">
+            <a:avLst/>
+          </a:prstGeom>
+          <a:solidFill>
+            <a:srgbClr val="FFFFFF"/>
+          </a:solidFill>
+          <a:ln w="12700">
+            <a:solidFill>
+              <a:srgbClr val="FBD8DF"/>
+            </a:solidFill>
+            <a:prstDash val="solid"/>
+          </a:ln>
+        </p:spPr>
+      </p:sp>
+      <p:pic>
+        <p:nvPicPr>
+          <p:cNvPr id="13" name="Image 2" descr="preencoded.png">    </p:cNvPr>
+          <p:cNvPicPr>
+            <a:picLocks noChangeAspect="1"/>
+          </p:cNvPicPr>
+          <p:nvPr/>
+        </p:nvPicPr>
+        <p:blipFill>
+          <a:blip r:embed="rId3"/>
+          <a:stretch>
+            <a:fillRect/>
+          </a:stretch>
+        </p:blipFill>
+        <p:spPr>
+          <a:xfrm>
+            <a:off x="1014984" y="3767328"/>
+            <a:ext cx="274320" cy="274320"/>
+          </a:xfrm>
+          <a:prstGeom prst="rect">
+            <a:avLst/>
+          </a:prstGeom>
+        </p:spPr>
+      </p:pic>
+      <p:sp>
+        <p:nvSpPr>
+          <p:cNvPr id="14" name="Text 9"/>
+          <p:cNvSpPr/>
+          <p:nvPr/>
+        </p:nvSpPr>
+        <p:spPr>
+          <a:xfrm>
+            <a:off x="1618488" y="3584448"/>
+            <a:ext cx="4233672" cy="292608"/>
+          </a:xfrm>
+          <a:prstGeom prst="rect">
+            <a:avLst/>
+          </a:prstGeom>
+          <a:noFill/>
+          <a:ln/>
+        </p:spPr>
+        <p:txBody>
+          <a:bodyPr wrap="square" lIns="0" tIns="0" rIns="0" bIns="0" rtlCol="0" anchor="t"/>
+          <a:lstStyle/>
+          <a:p>
+            <a:pPr algn="l" indent="0" marL="0">
+              <a:buNone/>
+            </a:pPr>
+            <a:r>
+              <a:rPr lang="en-US" sz="1600" b="1" dirty="0">
+                <a:solidFill>
+                  <a:srgbClr val="2B2B33"/>
+                </a:solidFill>
+                <a:latin typeface="Cambria" pitchFamily="34" charset="0"/>
+                <a:ea typeface="Cambria" pitchFamily="34" charset="-122"/>
+                <a:cs typeface="Cambria" pitchFamily="34" charset="-120"/>
+              </a:rPr>
+              <a:t>Digoxin</a:t>
+            </a:r>
+            <a:endParaRPr lang="en-US" sz="1600" dirty="0"/>
+          </a:p>
+        </p:txBody>
+      </p:sp>
+      <p:sp>
+        <p:nvSpPr>
+          <p:cNvPr id="15" name="Text 10"/>
+          <p:cNvSpPr/>
+          <p:nvPr/>
+        </p:nvSpPr>
+        <p:spPr>
+          <a:xfrm>
+            <a:off x="1618488" y="3895344"/>
+            <a:ext cx="4233672" cy="365760"/>
+          </a:xfrm>
+          <a:prstGeom prst="rect">
+            <a:avLst/>
+          </a:prstGeom>
+          <a:noFill/>
+          <a:ln/>
+        </p:spPr>
+        <p:txBody>
+          <a:bodyPr wrap="square" lIns="0" tIns="0" rIns="0" bIns="0" rtlCol="0" anchor="t"/>
+          <a:lstStyle/>
+          <a:p>
+            <a:pPr algn="l" indent="0" marL="0">
+              <a:buNone/>
+            </a:pPr>
+            <a:r>
+              <a:rPr lang="en-US" sz="1250" dirty="0">
+                <a:solidFill>
+                  <a:srgbClr val="6B6B76"/>
+                </a:solidFill>
+                <a:latin typeface="Calibri" pitchFamily="34" charset="0"/>
+                <a:ea typeface="Calibri" pitchFamily="34" charset="-122"/>
+                <a:cs typeface="Calibri" pitchFamily="34" charset="-120"/>
+              </a:rPr>
+              <a:t>Safe option for rate control</a:t>
+            </a:r>
+            <a:endParaRPr lang="en-US" sz="1250" dirty="0"/>
+          </a:p>
+        </p:txBody>
+      </p:sp>
+      <p:sp>
+        <p:nvSpPr>
+          <p:cNvPr id="16" name="Shape 11"/>
+          <p:cNvSpPr/>
+          <p:nvPr/>
+        </p:nvSpPr>
+        <p:spPr>
+          <a:xfrm>
+            <a:off x="868680" y="4700016"/>
+            <a:ext cx="566928" cy="566928"/>
+          </a:xfrm>
+          <a:prstGeom prst="ellipse">
+            <a:avLst/>
+          </a:prstGeom>
+          <a:solidFill>
+            <a:srgbClr val="FFFFFF"/>
+          </a:solidFill>
+          <a:ln w="12700">
+            <a:solidFill>
+              <a:srgbClr val="FBD8DF"/>
+            </a:solidFill>
+            <a:prstDash val="solid"/>
+          </a:ln>
+        </p:spPr>
+      </p:sp>
+      <p:pic>
+        <p:nvPicPr>
+          <p:cNvPr id="17" name="Image 3" descr="preencoded.png">    </p:cNvPr>
+          <p:cNvPicPr>
+            <a:picLocks noChangeAspect="1"/>
+          </p:cNvPicPr>
+          <p:nvPr/>
+        </p:nvPicPr>
+        <p:blipFill>
+          <a:blip r:embed="rId4"/>
+          <a:stretch>
+            <a:fillRect/>
+          </a:stretch>
+        </p:blipFill>
+        <p:spPr>
+          <a:xfrm>
+            <a:off x="1014984" y="4846320"/>
+            <a:ext cx="274320" cy="274320"/>
+          </a:xfrm>
+          <a:prstGeom prst="rect">
+            <a:avLst/>
+          </a:prstGeom>
+        </p:spPr>
+      </p:pic>
+      <p:sp>
+        <p:nvSpPr>
+          <p:cNvPr id="18" name="Text 12"/>
+          <p:cNvSpPr/>
+          <p:nvPr/>
+        </p:nvSpPr>
+        <p:spPr>
+          <a:xfrm>
+            <a:off x="1618488" y="4663440"/>
+            <a:ext cx="4233672" cy="292608"/>
+          </a:xfrm>
+          <a:prstGeom prst="rect">
+            <a:avLst/>
+          </a:prstGeom>
+          <a:noFill/>
+          <a:ln/>
+        </p:spPr>
+        <p:txBody>
+          <a:bodyPr wrap="square" lIns="0" tIns="0" rIns="0" bIns="0" rtlCol="0" anchor="t"/>
+          <a:lstStyle/>
+          <a:p>
+            <a:pPr algn="l" indent="0" marL="0">
+              <a:buNone/>
+            </a:pPr>
+            <a:r>
+              <a:rPr lang="en-US" sz="1600" b="1" dirty="0">
+                <a:solidFill>
+                  <a:srgbClr val="2B2B33"/>
+                </a:solidFill>
+                <a:latin typeface="Cambria" pitchFamily="34" charset="0"/>
+                <a:ea typeface="Cambria" pitchFamily="34" charset="-122"/>
+                <a:cs typeface="Cambria" pitchFamily="34" charset="-120"/>
+              </a:rPr>
+              <a:t>Flecainide / sotalol</a:t>
+            </a:r>
+            <a:endParaRPr lang="en-US" sz="1600" dirty="0"/>
+          </a:p>
+        </p:txBody>
+      </p:sp>
+      <p:sp>
+        <p:nvSpPr>
+          <p:cNvPr id="19" name="Text 13"/>
+          <p:cNvSpPr/>
+          <p:nvPr/>
+        </p:nvSpPr>
+        <p:spPr>
+          <a:xfrm>
+            <a:off x="1618488" y="4974336"/>
+            <a:ext cx="4233672" cy="365760"/>
+          </a:xfrm>
+          <a:prstGeom prst="rect">
+            <a:avLst/>
+          </a:prstGeom>
+          <a:noFill/>
+          <a:ln/>
+        </p:spPr>
+        <p:txBody>
+          <a:bodyPr wrap="square" lIns="0" tIns="0" rIns="0" bIns="0" rtlCol="0" anchor="t"/>
+          <a:lstStyle/>
+          <a:p>
+            <a:pPr algn="l" indent="0" marL="0">
+              <a:buNone/>
+            </a:pPr>
+            <a:r>
+              <a:rPr lang="en-US" sz="1250" dirty="0">
+                <a:solidFill>
+                  <a:srgbClr val="6B6B76"/>
+                </a:solidFill>
+                <a:latin typeface="Calibri" pitchFamily="34" charset="0"/>
+                <a:ea typeface="Calibri" pitchFamily="34" charset="-122"/>
+                <a:cs typeface="Calibri" pitchFamily="34" charset="-120"/>
+              </a:rPr>
+              <a:t>For rhythm control when needed</a:t>
+            </a:r>
+            <a:endParaRPr lang="en-US" sz="1250" dirty="0"/>
+          </a:p>
+        </p:txBody>
+      </p:sp>
+      <p:sp>
+        <p:nvSpPr>
+          <p:cNvPr id="20" name="Shape 14"/>
+          <p:cNvSpPr/>
+          <p:nvPr/>
+        </p:nvSpPr>
+        <p:spPr>
+          <a:xfrm>
+            <a:off x="6172200" y="1783080"/>
+            <a:ext cx="5532120" cy="2011680"/>
+          </a:xfrm>
+          <a:prstGeom prst="roundRect">
+            <a:avLst>
+              <a:gd name="adj" fmla="val 5455"/>
+            </a:avLst>
+          </a:prstGeom>
+          <a:solidFill>
+            <a:srgbClr val="590D22"/>
+          </a:solidFill>
+          <a:ln/>
+          <a:effectLst>
+            <a:outerShdw sx="100000" sy="100000" kx="0" ky="0" algn="bl" rotWithShape="0" blurRad="127000" dist="50800" dir="5400000">
+              <a:srgbClr val="C9A3AC">
+                <a:alpha val="45000"/>
+              </a:srgbClr>
+            </a:outerShdw>
+          </a:effectLst>
+        </p:spPr>
+      </p:sp>
+      <p:sp>
+        <p:nvSpPr>
+          <p:cNvPr id="21" name="Shape 15"/>
+          <p:cNvSpPr/>
+          <p:nvPr/>
+        </p:nvSpPr>
+        <p:spPr>
+          <a:xfrm>
+            <a:off x="6492240" y="2148840"/>
+            <a:ext cx="868680" cy="868680"/>
+          </a:xfrm>
+          <a:prstGeom prst="ellipse">
+            <a:avLst/>
+          </a:prstGeom>
+          <a:solidFill>
+            <a:srgbClr val="A4133C"/>
+          </a:solidFill>
+          <a:ln/>
+        </p:spPr>
+      </p:sp>
+      <p:pic>
+        <p:nvPicPr>
+          <p:cNvPr id="22" name="Image 4" descr="preencoded.png">    </p:cNvPr>
+          <p:cNvPicPr>
+            <a:picLocks noChangeAspect="1"/>
+          </p:cNvPicPr>
+          <p:nvPr/>
+        </p:nvPicPr>
+        <p:blipFill>
+          <a:blip r:embed="rId5"/>
+          <a:stretch>
+            <a:fillRect/>
+          </a:stretch>
+        </p:blipFill>
+        <p:spPr>
+          <a:xfrm>
+            <a:off x="6729984" y="2377440"/>
+            <a:ext cx="402336" cy="402336"/>
+          </a:xfrm>
+          <a:prstGeom prst="rect">
+            <a:avLst/>
+          </a:prstGeom>
+        </p:spPr>
+      </p:pic>
+      <p:sp>
+        <p:nvSpPr>
+          <p:cNvPr id="23" name="Text 16"/>
+          <p:cNvSpPr/>
+          <p:nvPr/>
+        </p:nvSpPr>
+        <p:spPr>
+          <a:xfrm>
+            <a:off x="7498080" y="2194560"/>
+            <a:ext cx="4023360" cy="457200"/>
+          </a:xfrm>
+          <a:prstGeom prst="rect">
+            <a:avLst/>
+          </a:prstGeom>
+          <a:noFill/>
+          <a:ln/>
+        </p:spPr>
+        <p:txBody>
+          <a:bodyPr wrap="square" rtlCol="0" anchor="ctr"/>
+          <a:lstStyle/>
+          <a:p>
+            <a:pPr algn="l" indent="0" marL="0">
+              <a:buNone/>
+            </a:pPr>
+            <a:r>
+              <a:rPr lang="en-US" sz="2100" b="1" dirty="0">
+                <a:solidFill>
+                  <a:srgbClr val="FFFFFF"/>
+                </a:solidFill>
+                <a:latin typeface="Cambria" pitchFamily="34" charset="0"/>
+                <a:ea typeface="Cambria" pitchFamily="34" charset="-122"/>
+                <a:cs typeface="Cambria" pitchFamily="34" charset="-120"/>
+              </a:rPr>
+              <a:t>Cardioversion</a:t>
+            </a:r>
+            <a:endParaRPr lang="en-US" sz="2100" dirty="0"/>
+          </a:p>
+        </p:txBody>
+      </p:sp>
+      <p:sp>
+        <p:nvSpPr>
+          <p:cNvPr id="24" name="Text 17"/>
+          <p:cNvSpPr/>
+          <p:nvPr/>
+        </p:nvSpPr>
+        <p:spPr>
+          <a:xfrm>
+            <a:off x="6537960" y="2852928"/>
+            <a:ext cx="5029200" cy="822960"/>
+          </a:xfrm>
+          <a:prstGeom prst="rect">
+            <a:avLst/>
+          </a:prstGeom>
+          <a:noFill/>
+          <a:ln/>
+        </p:spPr>
+        <p:txBody>
+          <a:bodyPr wrap="square" rtlCol="0" anchor="t"/>
+          <a:lstStyle/>
+          <a:p>
+            <a:pPr algn="l" indent="0" marL="0">
+              <a:lnSpc>
+                <a:spcPct val="112000"/>
+              </a:lnSpc>
+              <a:buNone/>
+            </a:pPr>
+            <a:r>
+              <a:rPr lang="en-US" sz="1400" dirty="0">
+                <a:solidFill>
+                  <a:srgbClr val="FBD8DF"/>
+                </a:solidFill>
+                <a:latin typeface="Calibri" pitchFamily="34" charset="0"/>
+                <a:ea typeface="Calibri" pitchFamily="34" charset="-122"/>
+                <a:cs typeface="Calibri" pitchFamily="34" charset="-120"/>
+              </a:rPr>
+              <a:t>DC cardioversion is safe in all trimesters — perform with fetal monitoring.</a:t>
+            </a:r>
+            <a:endParaRPr lang="en-US" sz="1400" dirty="0"/>
+          </a:p>
+        </p:txBody>
+      </p:sp>
+      <p:sp>
+        <p:nvSpPr>
+          <p:cNvPr id="25" name="Shape 18"/>
+          <p:cNvSpPr/>
+          <p:nvPr/>
+        </p:nvSpPr>
+        <p:spPr>
+          <a:xfrm>
+            <a:off x="6172200" y="3977640"/>
+            <a:ext cx="5532120" cy="2011680"/>
+          </a:xfrm>
+          <a:prstGeom prst="roundRect">
+            <a:avLst>
+              <a:gd name="adj" fmla="val 5455"/>
+            </a:avLst>
+          </a:prstGeom>
+          <a:solidFill>
+            <a:srgbClr val="FFF0F3"/>
+          </a:solidFill>
+          <a:ln w="12700">
+            <a:solidFill>
+              <a:srgbClr val="FBD8DF"/>
+            </a:solidFill>
+            <a:prstDash val="solid"/>
+          </a:ln>
+          <a:effectLst>
+            <a:outerShdw sx="100000" sy="100000" kx="0" ky="0" algn="bl" rotWithShape="0" blurRad="127000" dist="50800" dir="5400000">
+              <a:srgbClr val="C9A3AC">
+                <a:alpha val="45000"/>
+              </a:srgbClr>
+            </a:outerShdw>
+          </a:effectLst>
+        </p:spPr>
+      </p:sp>
+      <p:sp>
+        <p:nvSpPr>
+          <p:cNvPr id="26" name="Text 19"/>
+          <p:cNvSpPr/>
+          <p:nvPr/>
+        </p:nvSpPr>
+        <p:spPr>
+          <a:xfrm>
+            <a:off x="6537960" y="4206240"/>
+            <a:ext cx="4937760" cy="274320"/>
+          </a:xfrm>
+          <a:prstGeom prst="rect">
+            <a:avLst/>
+          </a:prstGeom>
+          <a:noFill/>
+          <a:ln/>
+        </p:spPr>
+        <p:txBody>
+          <a:bodyPr wrap="square" rtlCol="0" anchor="t"/>
+          <a:lstStyle/>
+          <a:p>
+            <a:pPr algn="l" indent="0" marL="0">
+              <a:buNone/>
+            </a:pPr>
+            <a:r>
+              <a:rPr lang="en-US" sz="1300" b="1" spc="120" kern="0" dirty="0">
+                <a:solidFill>
+                  <a:srgbClr val="A4133C"/>
+                </a:solidFill>
+                <a:latin typeface="Calibri" pitchFamily="34" charset="0"/>
+                <a:ea typeface="Calibri" pitchFamily="34" charset="-122"/>
+                <a:cs typeface="Calibri" pitchFamily="34" charset="-120"/>
+              </a:rPr>
+              <a:t>✕  </a:t>
+            </a:r>
+            <a:pPr algn="l" indent="0" marL="0">
+              <a:buNone/>
+            </a:pPr>
+            <a:r>
+              <a:rPr lang="en-US" sz="1300" b="1" spc="120" kern="0" dirty="0">
+                <a:solidFill>
+                  <a:srgbClr val="A4133C"/>
+                </a:solidFill>
+                <a:latin typeface="Calibri" pitchFamily="34" charset="0"/>
+                <a:ea typeface="Calibri" pitchFamily="34" charset="-122"/>
+                <a:cs typeface="Calibri" pitchFamily="34" charset="-120"/>
+              </a:rPr>
+              <a:t>USE WITH CAUTION / AVOID</a:t>
+            </a:r>
+            <a:endParaRPr lang="en-US" sz="1300" dirty="0"/>
+          </a:p>
+        </p:txBody>
+      </p:sp>
+      <p:sp>
+        <p:nvSpPr>
+          <p:cNvPr id="27" name="Text 20"/>
+          <p:cNvSpPr/>
+          <p:nvPr/>
+        </p:nvSpPr>
+        <p:spPr>
+          <a:xfrm>
+            <a:off x="6537960" y="4645152"/>
+            <a:ext cx="5029200" cy="594360"/>
+          </a:xfrm>
+          <a:prstGeom prst="rect">
+            <a:avLst/>
+          </a:prstGeom>
+          <a:noFill/>
+          <a:ln/>
+        </p:spPr>
+        <p:txBody>
+          <a:bodyPr wrap="square" lIns="0" tIns="0" rIns="0" bIns="0" rtlCol="0" anchor="t"/>
+          <a:lstStyle/>
+          <a:p>
+            <a:pPr algn="l" indent="0" marL="0">
+              <a:lnSpc>
+                <a:spcPct val="105000"/>
+              </a:lnSpc>
+              <a:buNone/>
+            </a:pPr>
+            <a:r>
+              <a:rPr lang="en-US" sz="1350" b="1" dirty="0">
+                <a:solidFill>
+                  <a:srgbClr val="2B2B33"/>
+                </a:solidFill>
+                <a:latin typeface="Calibri" pitchFamily="34" charset="0"/>
+                <a:ea typeface="Calibri" pitchFamily="34" charset="-122"/>
+                <a:cs typeface="Calibri" pitchFamily="34" charset="-120"/>
+              </a:rPr>
+              <a:t>Amiodarone  </a:t>
+            </a:r>
+            <a:pPr algn="l" indent="0" marL="0">
+              <a:lnSpc>
+                <a:spcPct val="105000"/>
+              </a:lnSpc>
+              <a:buNone/>
+            </a:pPr>
+            <a:r>
+              <a:rPr lang="en-US" sz="1350" dirty="0">
+                <a:solidFill>
+                  <a:srgbClr val="6B6B76"/>
+                </a:solidFill>
+                <a:latin typeface="Calibri" pitchFamily="34" charset="0"/>
+                <a:ea typeface="Calibri" pitchFamily="34" charset="-122"/>
+                <a:cs typeface="Calibri" pitchFamily="34" charset="-120"/>
+              </a:rPr>
+              <a:t>— fetal thyroid dysfunction &amp; IUGR; only if life-threatening</a:t>
+            </a:r>
+            <a:endParaRPr lang="en-US" sz="1350" dirty="0"/>
+          </a:p>
+        </p:txBody>
+      </p:sp>
+      <p:sp>
+        <p:nvSpPr>
+          <p:cNvPr id="28" name="Text 21"/>
+          <p:cNvSpPr/>
+          <p:nvPr/>
+        </p:nvSpPr>
+        <p:spPr>
+          <a:xfrm>
+            <a:off x="6537960" y="5285232"/>
+            <a:ext cx="5029200" cy="457200"/>
+          </a:xfrm>
+          <a:prstGeom prst="rect">
+            <a:avLst/>
+          </a:prstGeom>
+          <a:noFill/>
+          <a:ln/>
+        </p:spPr>
+        <p:txBody>
+          <a:bodyPr wrap="square" lIns="0" tIns="0" rIns="0" bIns="0" rtlCol="0" anchor="t"/>
+          <a:lstStyle/>
+          <a:p>
+            <a:pPr algn="l" indent="0" marL="0">
+              <a:buNone/>
+            </a:pPr>
+            <a:r>
+              <a:rPr lang="en-US" sz="1350" b="1" dirty="0">
+                <a:solidFill>
+                  <a:srgbClr val="2B2B33"/>
+                </a:solidFill>
+                <a:latin typeface="Calibri" pitchFamily="34" charset="0"/>
+                <a:ea typeface="Calibri" pitchFamily="34" charset="-122"/>
+                <a:cs typeface="Calibri" pitchFamily="34" charset="-120"/>
+              </a:rPr>
+              <a:t>Atenolol  </a:t>
+            </a:r>
+            <a:pPr algn="l" indent="0" marL="0">
+              <a:buNone/>
+            </a:pPr>
+            <a:r>
+              <a:rPr lang="en-US" sz="1350" dirty="0">
+                <a:solidFill>
+                  <a:srgbClr val="6B6B76"/>
+                </a:solidFill>
+                <a:latin typeface="Calibri" pitchFamily="34" charset="0"/>
+                <a:ea typeface="Calibri" pitchFamily="34" charset="-122"/>
+                <a:cs typeface="Calibri" pitchFamily="34" charset="-120"/>
+              </a:rPr>
+              <a:t>— linked to fetal growth restriction</a:t>
+            </a:r>
+            <a:endParaRPr lang="en-US" sz="1350" dirty="0"/>
+          </a:p>
+        </p:txBody>
+      </p:sp>
+      <p:sp>
+        <p:nvSpPr>
+          <p:cNvPr id="29" name="Text 22"/>
+          <p:cNvSpPr/>
+          <p:nvPr/>
+        </p:nvSpPr>
+        <p:spPr>
+          <a:xfrm>
+            <a:off x="11277295" y="6355080"/>
+            <a:ext cx="548640" cy="320040"/>
+          </a:xfrm>
+          <a:prstGeom prst="rect">
+            <a:avLst/>
+          </a:prstGeom>
+          <a:noFill/>
+          <a:ln/>
+        </p:spPr>
+        <p:txBody>
+          <a:bodyPr wrap="square" rtlCol="0" anchor="t"/>
+          <a:lstStyle/>
+          <a:p>
+            <a:pPr algn="r" indent="0" marL="0">
+              <a:buNone/>
+            </a:pPr>
+            <a:r>
+              <a:rPr lang="en-US" sz="1100" b="1" dirty="0">
+                <a:solidFill>
+                  <a:srgbClr val="6B6B76"/>
+                </a:solidFill>
+                <a:latin typeface="Calibri" pitchFamily="34" charset="0"/>
+                <a:ea typeface="Calibri" pitchFamily="34" charset="-122"/>
+                <a:cs typeface="Calibri" pitchFamily="34" charset="-120"/>
+              </a:rPr>
+              <a:t>17</a:t>
+            </a:r>
+            <a:endParaRPr lang="en-US" sz="1100" dirty="0"/>
+          </a:p>
+        </p:txBody>
+      </p:sp>
+      <p:sp>
+        <p:nvSpPr>
+          <p:cNvPr id="30" name="Text 23"/>
+          <p:cNvSpPr/>
+          <p:nvPr/>
+        </p:nvSpPr>
+        <p:spPr>
+          <a:xfrm>
+            <a:off x="502920" y="6355080"/>
+            <a:ext cx="7315200" cy="320040"/>
+          </a:xfrm>
+          <a:prstGeom prst="rect">
+            <a:avLst/>
+          </a:prstGeom>
+          <a:noFill/>
+          <a:ln/>
+        </p:spPr>
+        <p:txBody>
+          <a:bodyPr wrap="square" rtlCol="0" anchor="t"/>
+          <a:lstStyle/>
+          <a:p>
+            <a:pPr algn="l" indent="0" marL="0">
+              <a:buNone/>
+            </a:pPr>
+            <a:r>
+              <a:rPr lang="en-US" sz="900" dirty="0">
+                <a:solidFill>
+                  <a:srgbClr val="6B6B76"/>
+                </a:solidFill>
+                <a:latin typeface="Calibri" pitchFamily="34" charset="0"/>
+                <a:ea typeface="Calibri" pitchFamily="34" charset="-122"/>
+                <a:cs typeface="Calibri" pitchFamily="34" charset="-120"/>
+              </a:rPr>
+              <a:t>Atrial Fibrillation — Clinical Topic Review</a:t>
+            </a:r>
+            <a:endParaRPr lang="en-US" sz="900" dirty="0"/>
+          </a:p>
+        </p:txBody>
+      </p:sp>
+    </p:spTree>
+  </p:cSld>
+  <p:clrMapOvr>
+    <a:masterClrMapping/>
+  </p:clrMapOvr>
+</p:sld>
+</file>
+
+<file path=ppt/slides/slide18.xml><?xml version="1.0" encoding="utf-8"?>
+<p:sld xmlns:a="http://schemas.openxmlformats.org/drawingml/2006/main" xmlns:r="http://schemas.openxmlformats.org/officeDocument/2006/relationships" xmlns:p="http://schemas.openxmlformats.org/presentationml/2006/main">
+  <p:cSld name="Slide 18">
+    <p:bg>
+      <p:bgPr>
+        <a:solidFill>
           <a:srgbClr val="590D22"/>
         </a:solidFill>
       </p:bgPr>
@@ -10927,7 +13197,7 @@
         </p:nvSpPr>
         <p:spPr>
           <a:xfrm>
-            <a:off x="713232" y="2816352"/>
+            <a:off x="713232" y="2596896"/>
             <a:ext cx="292608" cy="292608"/>
           </a:xfrm>
           <a:prstGeom prst="ellipse">
@@ -10955,7 +13225,7 @@
         </p:blipFill>
         <p:spPr>
           <a:xfrm>
-            <a:off x="777240" y="2880360"/>
+            <a:off x="777240" y="2660904"/>
             <a:ext cx="164592" cy="164592"/>
           </a:xfrm>
           <a:prstGeom prst="rect">
@@ -10971,8 +13241,8 @@
         </p:nvSpPr>
         <p:spPr>
           <a:xfrm>
-            <a:off x="1188720" y="2788920"/>
-            <a:ext cx="9692640" cy="548640"/>
+            <a:off x="1188720" y="2578608"/>
+            <a:ext cx="10058400" cy="502920"/>
           </a:xfrm>
           <a:prstGeom prst="rect">
             <a:avLst/>
@@ -10991,7 +13261,7 @@
               <a:buNone/>
             </a:pPr>
             <a:r>
-              <a:rPr lang="en-US" sz="1550" dirty="0">
+              <a:rPr lang="en-US" sz="1500" dirty="0">
                 <a:solidFill>
                   <a:srgbClr val="FBD8DF"/>
                 </a:solidFill>
@@ -11001,7 +13271,7 @@
               </a:rPr>
               <a:t>AF = irregularly irregular rhythm with absent P waves and a fibrillatory baseline.</a:t>
             </a:r>
-            <a:endParaRPr lang="en-US" sz="1550" dirty="0"/>
+            <a:endParaRPr lang="en-US" sz="1500" dirty="0"/>
           </a:p>
         </p:txBody>
       </p:sp>
@@ -11013,7 +13283,7 @@
         </p:nvSpPr>
         <p:spPr>
           <a:xfrm>
-            <a:off x="713232" y="3419856"/>
+            <a:off x="713232" y="3145536"/>
             <a:ext cx="292608" cy="292608"/>
           </a:xfrm>
           <a:prstGeom prst="ellipse">
@@ -11041,7 +13311,7 @@
         </p:blipFill>
         <p:spPr>
           <a:xfrm>
-            <a:off x="777240" y="3483864"/>
+            <a:off x="777240" y="3209544"/>
             <a:ext cx="164592" cy="164592"/>
           </a:xfrm>
           <a:prstGeom prst="rect">
@@ -11057,8 +13327,8 @@
         </p:nvSpPr>
         <p:spPr>
           <a:xfrm>
-            <a:off x="1188720" y="3392424"/>
-            <a:ext cx="9692640" cy="548640"/>
+            <a:off x="1188720" y="3127248"/>
+            <a:ext cx="10058400" cy="502920"/>
           </a:xfrm>
           <a:prstGeom prst="rect">
             <a:avLst/>
@@ -11077,7 +13347,7 @@
               <a:buNone/>
             </a:pPr>
             <a:r>
-              <a:rPr lang="en-US" sz="1550" dirty="0">
+              <a:rPr lang="en-US" sz="1500" dirty="0">
                 <a:solidFill>
                   <a:srgbClr val="FBD8DF"/>
                 </a:solidFill>
@@ -11085,9 +13355,9 @@
                 <a:ea typeface="Calibri" pitchFamily="34" charset="-122"/>
                 <a:cs typeface="Calibri" pitchFamily="34" charset="-120"/>
               </a:rPr>
-              <a:t>The commonest sustained arrhythmia — strongly linked to hypertension, age and structural heart disease.</a:t>
-            </a:r>
-            <a:endParaRPr lang="en-US" sz="1550" dirty="0"/>
+              <a:t>The commonest sustained arrhythmia — linked to hypertension, age and structural heart disease.</a:t>
+            </a:r>
+            <a:endParaRPr lang="en-US" sz="1500" dirty="0"/>
           </a:p>
         </p:txBody>
       </p:sp>
@@ -11099,7 +13369,7 @@
         </p:nvSpPr>
         <p:spPr>
           <a:xfrm>
-            <a:off x="713232" y="4023360"/>
+            <a:off x="713232" y="3694176"/>
             <a:ext cx="292608" cy="292608"/>
           </a:xfrm>
           <a:prstGeom prst="ellipse">
@@ -11127,7 +13397,7 @@
         </p:blipFill>
         <p:spPr>
           <a:xfrm>
-            <a:off x="777240" y="4087368"/>
+            <a:off x="777240" y="3758184"/>
             <a:ext cx="164592" cy="164592"/>
           </a:xfrm>
           <a:prstGeom prst="rect">
@@ -11143,8 +13413,8 @@
         </p:nvSpPr>
         <p:spPr>
           <a:xfrm>
-            <a:off x="1188720" y="3995928"/>
-            <a:ext cx="9692640" cy="548640"/>
+            <a:off x="1188720" y="3675888"/>
+            <a:ext cx="10058400" cy="502920"/>
           </a:xfrm>
           <a:prstGeom prst="rect">
             <a:avLst/>
@@ -11163,7 +13433,7 @@
               <a:buNone/>
             </a:pPr>
             <a:r>
-              <a:rPr lang="en-US" sz="1550" dirty="0">
+              <a:rPr lang="en-US" sz="1500" dirty="0">
                 <a:solidFill>
                   <a:srgbClr val="FBD8DF"/>
                 </a:solidFill>
@@ -11171,9 +13441,9 @@
                 <a:ea typeface="Calibri" pitchFamily="34" charset="-122"/>
                 <a:cs typeface="Calibri" pitchFamily="34" charset="-120"/>
               </a:rPr>
-              <a:t>Its main danger is thromboembolic stroke — always assess stroke risk.</a:t>
-            </a:r>
-            <a:endParaRPr lang="en-US" sz="1550" dirty="0"/>
+              <a:t>Its main danger is thromboembolic stroke — always assess stroke risk (CHA₂DS₂-VASc).</a:t>
+            </a:r>
+            <a:endParaRPr lang="en-US" sz="1500" dirty="0"/>
           </a:p>
         </p:txBody>
       </p:sp>
@@ -11185,7 +13455,7 @@
         </p:nvSpPr>
         <p:spPr>
           <a:xfrm>
-            <a:off x="713232" y="4626864"/>
+            <a:off x="713232" y="4242816"/>
             <a:ext cx="292608" cy="292608"/>
           </a:xfrm>
           <a:prstGeom prst="ellipse">
@@ -11213,7 +13483,7 @@
         </p:blipFill>
         <p:spPr>
           <a:xfrm>
-            <a:off x="777240" y="4690872"/>
+            <a:off x="777240" y="4306824"/>
             <a:ext cx="164592" cy="164592"/>
           </a:xfrm>
           <a:prstGeom prst="rect">
@@ -11229,8 +13499,8 @@
         </p:nvSpPr>
         <p:spPr>
           <a:xfrm>
-            <a:off x="1188720" y="4599432"/>
-            <a:ext cx="9692640" cy="548640"/>
+            <a:off x="1188720" y="4224528"/>
+            <a:ext cx="10058400" cy="502920"/>
           </a:xfrm>
           <a:prstGeom prst="rect">
             <a:avLst/>
@@ -11249,7 +13519,7 @@
               <a:buNone/>
             </a:pPr>
             <a:r>
-              <a:rPr lang="en-US" sz="1550" dirty="0">
+              <a:rPr lang="en-US" sz="1500" dirty="0">
                 <a:solidFill>
                   <a:srgbClr val="FBD8DF"/>
                 </a:solidFill>
@@ -11257,9 +13527,9 @@
                 <a:ea typeface="Calibri" pitchFamily="34" charset="-122"/>
                 <a:cs typeface="Calibri" pitchFamily="34" charset="-120"/>
               </a:rPr>
-              <a:t>Key differentials: atrial flutter, multifocal atrial tachycardia, frequent PACs, SVT, and pre-excited AF / VT.</a:t>
-            </a:r>
-            <a:endParaRPr lang="en-US" sz="1550" dirty="0"/>
+              <a:t>Differentials: atrial flutter, multifocal atrial tachycardia, frequent PACs, SVT, pre-excited AF / VT.</a:t>
+            </a:r>
+            <a:endParaRPr lang="en-US" sz="1500" dirty="0"/>
           </a:p>
         </p:txBody>
       </p:sp>
@@ -11271,7 +13541,7 @@
         </p:nvSpPr>
         <p:spPr>
           <a:xfrm>
-            <a:off x="713232" y="5230368"/>
+            <a:off x="713232" y="4791456"/>
             <a:ext cx="292608" cy="292608"/>
           </a:xfrm>
           <a:prstGeom prst="ellipse">
@@ -11299,7 +13569,7 @@
         </p:blipFill>
         <p:spPr>
           <a:xfrm>
-            <a:off x="777240" y="5294376"/>
+            <a:off x="777240" y="4855464"/>
             <a:ext cx="164592" cy="164592"/>
           </a:xfrm>
           <a:prstGeom prst="rect">
@@ -11315,8 +13585,8 @@
         </p:nvSpPr>
         <p:spPr>
           <a:xfrm>
-            <a:off x="1188720" y="5202936"/>
-            <a:ext cx="9692640" cy="548640"/>
+            <a:off x="1188720" y="4773168"/>
+            <a:ext cx="10058400" cy="502920"/>
           </a:xfrm>
           <a:prstGeom prst="rect">
             <a:avLst/>
@@ -11335,7 +13605,7 @@
               <a:buNone/>
             </a:pPr>
             <a:r>
-              <a:rPr lang="en-US" sz="1550" dirty="0">
+              <a:rPr lang="en-US" sz="1500" dirty="0">
                 <a:solidFill>
                   <a:srgbClr val="FBD8DF"/>
                 </a:solidFill>
@@ -11343,22 +13613,108 @@
                 <a:ea typeface="Calibri" pitchFamily="34" charset="-122"/>
                 <a:cs typeface="Calibri" pitchFamily="34" charset="-120"/>
               </a:rPr>
-              <a:t>Manage with the ABC pathway: Anticoagulation, Better symptom control, Comorbidity management.</a:t>
-            </a:r>
-            <a:endParaRPr lang="en-US" sz="1550" dirty="0"/>
-          </a:p>
-        </p:txBody>
-      </p:sp>
-      <p:sp>
-        <p:nvSpPr>
-          <p:cNvPr id="23" name="Text 14"/>
-          <p:cNvSpPr/>
-          <p:nvPr/>
-        </p:nvSpPr>
-        <p:spPr>
-          <a:xfrm>
-            <a:off x="685800" y="5760720"/>
-            <a:ext cx="5486400" cy="457200"/>
+              <a:t>Manage with the ABC pathway: Anticoagulation, Better symptom control, Comorbidities.</a:t>
+            </a:r>
+            <a:endParaRPr lang="en-US" sz="1500" dirty="0"/>
+          </a:p>
+        </p:txBody>
+      </p:sp>
+      <p:sp>
+        <p:nvSpPr>
+          <p:cNvPr id="23" name="Shape 14"/>
+          <p:cNvSpPr/>
+          <p:nvPr/>
+        </p:nvSpPr>
+        <p:spPr>
+          <a:xfrm>
+            <a:off x="713232" y="5340096"/>
+            <a:ext cx="292608" cy="292608"/>
+          </a:xfrm>
+          <a:prstGeom prst="ellipse">
+            <a:avLst/>
+          </a:prstGeom>
+          <a:solidFill>
+            <a:srgbClr val="A4133C"/>
+          </a:solidFill>
+          <a:ln/>
+        </p:spPr>
+      </p:sp>
+      <p:pic>
+        <p:nvPicPr>
+          <p:cNvPr id="24" name="Image 7" descr="preencoded.png">    </p:cNvPr>
+          <p:cNvPicPr>
+            <a:picLocks noChangeAspect="1"/>
+          </p:cNvPicPr>
+          <p:nvPr/>
+        </p:nvPicPr>
+        <p:blipFill>
+          <a:blip r:embed="rId8"/>
+          <a:stretch>
+            <a:fillRect/>
+          </a:stretch>
+        </p:blipFill>
+        <p:spPr>
+          <a:xfrm>
+            <a:off x="777240" y="5404104"/>
+            <a:ext cx="164592" cy="164592"/>
+          </a:xfrm>
+          <a:prstGeom prst="rect">
+            <a:avLst/>
+          </a:prstGeom>
+        </p:spPr>
+      </p:pic>
+      <p:sp>
+        <p:nvSpPr>
+          <p:cNvPr id="25" name="Text 15"/>
+          <p:cNvSpPr/>
+          <p:nvPr/>
+        </p:nvSpPr>
+        <p:spPr>
+          <a:xfrm>
+            <a:off x="1188720" y="5321808"/>
+            <a:ext cx="10058400" cy="502920"/>
+          </a:xfrm>
+          <a:prstGeom prst="rect">
+            <a:avLst/>
+          </a:prstGeom>
+          <a:noFill/>
+          <a:ln/>
+        </p:spPr>
+        <p:txBody>
+          <a:bodyPr wrap="square" lIns="0" tIns="0" rIns="0" bIns="0" rtlCol="0" anchor="ctr"/>
+          <a:lstStyle/>
+          <a:p>
+            <a:pPr algn="l" indent="0" marL="0">
+              <a:lnSpc>
+                <a:spcPct val="105000"/>
+              </a:lnSpc>
+              <a:buNone/>
+            </a:pPr>
+            <a:r>
+              <a:rPr lang="en-US" sz="1500" dirty="0">
+                <a:solidFill>
+                  <a:srgbClr val="FBD8DF"/>
+                </a:solidFill>
+                <a:latin typeface="Calibri" pitchFamily="34" charset="0"/>
+                <a:ea typeface="Calibri" pitchFamily="34" charset="-122"/>
+                <a:cs typeface="Calibri" pitchFamily="34" charset="-120"/>
+              </a:rPr>
+              <a:t>In pregnancy: LMWH is the anticoagulant of choice — avoid warfarin and DOACs.</a:t>
+            </a:r>
+            <a:endParaRPr lang="en-US" sz="1500" dirty="0"/>
+          </a:p>
+        </p:txBody>
+      </p:sp>
+      <p:sp>
+        <p:nvSpPr>
+          <p:cNvPr id="26" name="Text 16"/>
+          <p:cNvSpPr/>
+          <p:nvPr/>
+        </p:nvSpPr>
+        <p:spPr>
+          <a:xfrm>
+            <a:off x="685800" y="5943600"/>
+            <a:ext cx="5486400" cy="411480"/>
           </a:xfrm>
           <a:prstGeom prst="rect">
             <a:avLst/>
@@ -11374,7 +13730,7 @@
               <a:buNone/>
             </a:pPr>
             <a:r>
-              <a:rPr lang="en-US" sz="2300" b="1" i="1" dirty="0">
+              <a:rPr lang="en-US" sz="2200" b="1" i="1" dirty="0">
                 <a:solidFill>
                   <a:srgbClr val="FBD8DF"/>
                 </a:solidFill>
@@ -11384,13 +13740,13 @@
               </a:rPr>
               <a:t>Thank you</a:t>
             </a:r>
-            <a:endParaRPr lang="en-US" sz="2300" dirty="0"/>
-          </a:p>
-        </p:txBody>
-      </p:sp>
-      <p:sp>
-        <p:nvSpPr>
-          <p:cNvPr id="24" name="Text 15"/>
+            <a:endParaRPr lang="en-US" sz="2200" dirty="0"/>
+          </a:p>
+        </p:txBody>
+      </p:sp>
+      <p:sp>
+        <p:nvSpPr>
+          <p:cNvPr id="27" name="Text 17"/>
           <p:cNvSpPr/>
           <p:nvPr/>
         </p:nvSpPr>
@@ -11421,7 +13777,7 @@
                 <a:ea typeface="Calibri" pitchFamily="34" charset="-122"/>
                 <a:cs typeface="Calibri" pitchFamily="34" charset="-120"/>
               </a:rPr>
-              <a:t>16</a:t>
+              <a:t>18</a:t>
             </a:r>
             <a:endParaRPr lang="en-US" sz="1100" dirty="0"/>
           </a:p>
@@ -11429,7 +13785,7 @@
       </p:sp>
       <p:sp>
         <p:nvSpPr>
-          <p:cNvPr id="25" name="Text 16"/>
+          <p:cNvPr id="28" name="Text 18"/>
           <p:cNvSpPr/>
           <p:nvPr/>
         </p:nvSpPr>

--- a/presentations/Atrial-Fibrillation-Topic-Review.pptx
+++ b/presentations/Atrial-Fibrillation-Topic-Review.pptx
@@ -23,9 +23,10 @@
     <p:sldId id="271" r:id="rId17"/>
     <p:sldId id="272" r:id="rId18"/>
     <p:sldId id="273" r:id="rId19"/>
+    <p:sldId id="274" r:id="rId20"/>
   </p:sldIdLst>
   <p:notesMasterIdLst>
-    <p:notesMasterId r:id="rId20"/>
+    <p:notesMasterId r:id="rId21"/>
   </p:notesMasterIdLst>
   <p:sldSz cx="12191695" cy="6858000"/>
   <p:notesSz cx="6858000" cy="12191695"/>
@@ -1335,6 +1336,94 @@
             <a:fld id="{F7021451-1387-4CA6-816F-3879F97B5CBC}" type="slidenum">
               <a:rPr lang="en-US"/>
               <a:t>18</a:t>
+            </a:fld>
+            <a:endParaRPr lang="en-US"/>
+          </a:p>
+        </p:txBody>
+      </p:sp>
+    </p:spTree>
+    <p:extLst>
+      <p:ext uri="{BB962C8B-B14F-4D97-AF65-F5344CB8AC3E}">
+        <p14:creationId xmlns:p14="http://schemas.microsoft.com/office/powerpoint/2010/main" val="1024086991"/>
+      </p:ext>
+    </p:extLst>
+  </p:cSld>
+  <p:clrMapOvr>
+    <a:masterClrMapping/>
+  </p:clrMapOvr>
+</p:notes>
+</file>
+
+<file path=ppt/notesSlides/notesSlide19.xml><?xml version="1.0" encoding="utf-8"?>
+<p:notes xmlns:a="http://schemas.openxmlformats.org/drawingml/2006/main" xmlns:r="http://schemas.openxmlformats.org/officeDocument/2006/relationships" xmlns:p="http://schemas.openxmlformats.org/presentationml/2006/main">
+  <p:cSld>
+    <p:spTree>
+      <p:nvGrpSpPr>
+        <p:cNvPr id="1" name=""/>
+        <p:cNvGrpSpPr/>
+        <p:nvPr/>
+      </p:nvGrpSpPr>
+      <p:grpSpPr>
+        <a:xfrm>
+          <a:off x="0" y="0"/>
+          <a:ext cx="0" cy="0"/>
+          <a:chOff x="0" y="0"/>
+          <a:chExt cx="0" cy="0"/>
+        </a:xfrm>
+      </p:grpSpPr>
+      <p:sp>
+        <p:nvSpPr>
+          <p:cNvPr id="2" name="Slide Image Placeholder 1"/>
+          <p:cNvSpPr>
+            <a:spLocks noGrp="1" noRot="1" noChangeAspect="1"/>
+          </p:cNvSpPr>
+          <p:nvPr>
+            <p:ph type="sldImg"/>
+          </p:nvPr>
+        </p:nvSpPr>
+        <p:spPr/>
+      </p:sp>
+      <p:sp>
+        <p:nvSpPr>
+          <p:cNvPr id="3" name="Notes Placeholder 2"/>
+          <p:cNvSpPr>
+            <a:spLocks noGrp="1"/>
+          </p:cNvSpPr>
+          <p:nvPr>
+            <p:ph type="body" idx="1"/>
+          </p:nvPr>
+        </p:nvSpPr>
+        <p:spPr/>
+        <p:txBody>
+          <a:bodyPr/>
+          <a:lstStyle/>
+          <a:p>
+            <a:r>
+              <a:rPr lang="en-US" dirty="0"/>
+              <a:t/>
+            </a:r>
+            <a:endParaRPr lang="en-US" dirty="0"/>
+          </a:p>
+        </p:txBody>
+      </p:sp>
+      <p:sp>
+        <p:nvSpPr>
+          <p:cNvPr id="4" name="Slide Number Placeholder 3"/>
+          <p:cNvSpPr>
+            <a:spLocks noGrp="1"/>
+          </p:cNvSpPr>
+          <p:nvPr>
+            <p:ph type="sldNum" sz="quarter" idx="10"/>
+          </p:nvPr>
+        </p:nvSpPr>
+        <p:spPr/>
+        <p:txBody>
+          <a:bodyPr/>
+          <a:lstStyle/>
+          <a:p>
+            <a:fld id="{F7021451-1387-4CA6-816F-3879F97B5CBC}" type="slidenum">
+              <a:rPr lang="en-US"/>
+              <a:t>19</a:t>
             </a:fld>
             <a:endParaRPr lang="en-US"/>
           </a:p>
@@ -13713,8 +13802,8 @@
         </p:nvSpPr>
         <p:spPr>
           <a:xfrm>
-            <a:off x="685800" y="5943600"/>
-            <a:ext cx="5486400" cy="411480"/>
+            <a:off x="11277295" y="6355080"/>
+            <a:ext cx="548640" cy="320040"/>
           </a:xfrm>
           <a:prstGeom prst="rect">
             <a:avLst/>
@@ -13726,34 +13815,262 @@
           <a:bodyPr wrap="square" rtlCol="0" anchor="t"/>
           <a:lstStyle/>
           <a:p>
+            <a:pPr algn="r" indent="0" marL="0">
+              <a:buNone/>
+            </a:pPr>
+            <a:r>
+              <a:rPr lang="en-US" sz="1100" b="1" dirty="0">
+                <a:solidFill>
+                  <a:srgbClr val="FBD8DF"/>
+                </a:solidFill>
+                <a:latin typeface="Calibri" pitchFamily="34" charset="0"/>
+                <a:ea typeface="Calibri" pitchFamily="34" charset="-122"/>
+                <a:cs typeface="Calibri" pitchFamily="34" charset="-120"/>
+              </a:rPr>
+              <a:t>18</a:t>
+            </a:r>
+            <a:endParaRPr lang="en-US" sz="1100" dirty="0"/>
+          </a:p>
+        </p:txBody>
+      </p:sp>
+      <p:sp>
+        <p:nvSpPr>
+          <p:cNvPr id="27" name="Text 17"/>
+          <p:cNvSpPr/>
+          <p:nvPr/>
+        </p:nvSpPr>
+        <p:spPr>
+          <a:xfrm>
+            <a:off x="502920" y="6355080"/>
+            <a:ext cx="7315200" cy="320040"/>
+          </a:xfrm>
+          <a:prstGeom prst="rect">
+            <a:avLst/>
+          </a:prstGeom>
+          <a:noFill/>
+          <a:ln/>
+        </p:spPr>
+        <p:txBody>
+          <a:bodyPr wrap="square" rtlCol="0" anchor="t"/>
+          <a:lstStyle/>
+          <a:p>
             <a:pPr algn="l" indent="0" marL="0">
               <a:buNone/>
             </a:pPr>
             <a:r>
-              <a:rPr lang="en-US" sz="2200" b="1" i="1" dirty="0">
+              <a:rPr lang="en-US" sz="900" dirty="0">
                 <a:solidFill>
                   <a:srgbClr val="FBD8DF"/>
+                </a:solidFill>
+                <a:latin typeface="Calibri" pitchFamily="34" charset="0"/>
+                <a:ea typeface="Calibri" pitchFamily="34" charset="-122"/>
+                <a:cs typeface="Calibri" pitchFamily="34" charset="-120"/>
+              </a:rPr>
+              <a:t>Atrial Fibrillation — Clinical Topic Review</a:t>
+            </a:r>
+            <a:endParaRPr lang="en-US" sz="900" dirty="0"/>
+          </a:p>
+        </p:txBody>
+      </p:sp>
+    </p:spTree>
+  </p:cSld>
+  <p:clrMapOvr>
+    <a:masterClrMapping/>
+  </p:clrMapOvr>
+</p:sld>
+</file>
+
+<file path=ppt/slides/slide19.xml><?xml version="1.0" encoding="utf-8"?>
+<p:sld xmlns:a="http://schemas.openxmlformats.org/drawingml/2006/main" xmlns:r="http://schemas.openxmlformats.org/officeDocument/2006/relationships" xmlns:p="http://schemas.openxmlformats.org/presentationml/2006/main">
+  <p:cSld name="Slide 19">
+    <p:bg>
+      <p:bgPr>
+        <a:solidFill>
+          <a:srgbClr val="590D22"/>
+        </a:solidFill>
+      </p:bgPr>
+    </p:bg>
+    <p:spTree>
+      <p:nvGrpSpPr>
+        <p:cNvPr id="1" name=""/>
+        <p:cNvGrpSpPr/>
+        <p:nvPr/>
+      </p:nvGrpSpPr>
+      <p:grpSpPr>
+        <a:xfrm>
+          <a:off x="0" y="0"/>
+          <a:ext cx="0" cy="0"/>
+          <a:chOff x="0" y="0"/>
+          <a:chExt cx="0" cy="0"/>
+        </a:xfrm>
+      </p:grpSpPr>
+      <p:sp>
+        <p:nvSpPr>
+          <p:cNvPr id="2" name="Shape 0"/>
+          <p:cNvSpPr/>
+          <p:nvPr/>
+        </p:nvSpPr>
+        <p:spPr>
+          <a:xfrm>
+            <a:off x="0" y="0"/>
+            <a:ext cx="12191695" cy="6858000"/>
+          </a:xfrm>
+          <a:prstGeom prst="rect">
+            <a:avLst/>
+          </a:prstGeom>
+          <a:solidFill>
+            <a:srgbClr val="3A0A17">
+              <a:alpha val="74000"/>
+            </a:srgbClr>
+          </a:solidFill>
+          <a:ln/>
+        </p:spPr>
+      </p:sp>
+      <p:pic>
+        <p:nvPicPr>
+          <p:cNvPr id="3" name="Image 0" descr="preencoded.png">    </p:cNvPr>
+          <p:cNvPicPr>
+            <a:picLocks noChangeAspect="1"/>
+          </p:cNvPicPr>
+          <p:nvPr/>
+        </p:nvPicPr>
+        <p:blipFill>
+          <a:blip r:embed="rId1">
+            <a:alphaModFix amt="10000"/>
+          </a:blip>
+          <a:stretch>
+            <a:fillRect/>
+          </a:stretch>
+        </p:blipFill>
+        <p:spPr>
+          <a:xfrm>
+            <a:off x="8092440" y="3063240"/>
+            <a:ext cx="4754880" cy="4754880"/>
+          </a:xfrm>
+          <a:prstGeom prst="rect">
+            <a:avLst/>
+          </a:prstGeom>
+        </p:spPr>
+      </p:pic>
+      <p:pic>
+        <p:nvPicPr>
+          <p:cNvPr id="4" name="Image 1" descr="preencoded.png">    </p:cNvPr>
+          <p:cNvPicPr>
+            <a:picLocks noChangeAspect="1"/>
+          </p:cNvPicPr>
+          <p:nvPr/>
+        </p:nvPicPr>
+        <p:blipFill>
+          <a:blip r:embed="rId2">
+            <a:alphaModFix amt="7000"/>
+          </a:blip>
+          <a:stretch>
+            <a:fillRect/>
+          </a:stretch>
+        </p:blipFill>
+        <p:spPr>
+          <a:xfrm>
+            <a:off x="-822960" y="-960120"/>
+            <a:ext cx="4023360" cy="4023360"/>
+          </a:xfrm>
+          <a:prstGeom prst="rect">
+            <a:avLst/>
+          </a:prstGeom>
+        </p:spPr>
+      </p:pic>
+      <p:sp>
+        <p:nvSpPr>
+          <p:cNvPr id="5" name="Shape 1"/>
+          <p:cNvSpPr/>
+          <p:nvPr/>
+        </p:nvSpPr>
+        <p:spPr>
+          <a:xfrm>
+            <a:off x="5711800" y="1234440"/>
+            <a:ext cx="768096" cy="768096"/>
+          </a:xfrm>
+          <a:prstGeom prst="ellipse">
+            <a:avLst/>
+          </a:prstGeom>
+          <a:solidFill>
+            <a:srgbClr val="A4133C"/>
+          </a:solidFill>
+          <a:ln/>
+        </p:spPr>
+      </p:sp>
+      <p:pic>
+        <p:nvPicPr>
+          <p:cNvPr id="6" name="Image 2" descr="preencoded.png">    </p:cNvPr>
+          <p:cNvPicPr>
+            <a:picLocks noChangeAspect="1"/>
+          </p:cNvPicPr>
+          <p:nvPr/>
+        </p:nvPicPr>
+        <p:blipFill>
+          <a:blip r:embed="rId3"/>
+          <a:stretch>
+            <a:fillRect/>
+          </a:stretch>
+        </p:blipFill>
+        <p:spPr>
+          <a:xfrm>
+            <a:off x="5867248" y="1399032"/>
+            <a:ext cx="457200" cy="457200"/>
+          </a:xfrm>
+          <a:prstGeom prst="rect">
+            <a:avLst/>
+          </a:prstGeom>
+        </p:spPr>
+      </p:pic>
+      <p:sp>
+        <p:nvSpPr>
+          <p:cNvPr id="7" name="Text 2"/>
+          <p:cNvSpPr/>
+          <p:nvPr/>
+        </p:nvSpPr>
+        <p:spPr>
+          <a:xfrm>
+            <a:off x="457200" y="2286000"/>
+            <a:ext cx="11274552" cy="1554480"/>
+          </a:xfrm>
+          <a:prstGeom prst="rect">
+            <a:avLst/>
+          </a:prstGeom>
+          <a:noFill/>
+          <a:ln/>
+        </p:spPr>
+        <p:txBody>
+          <a:bodyPr wrap="square" rtlCol="0" anchor="t"/>
+          <a:lstStyle/>
+          <a:p>
+            <a:pPr algn="ctr" indent="0" marL="0">
+              <a:buNone/>
+            </a:pPr>
+            <a:r>
+              <a:rPr lang="en-US" sz="8800" b="1" dirty="0">
+                <a:solidFill>
+                  <a:srgbClr val="FFFFFF"/>
                 </a:solidFill>
                 <a:latin typeface="Cambria" pitchFamily="34" charset="0"/>
                 <a:ea typeface="Cambria" pitchFamily="34" charset="-122"/>
                 <a:cs typeface="Cambria" pitchFamily="34" charset="-120"/>
               </a:rPr>
-              <a:t>Thank you</a:t>
-            </a:r>
-            <a:endParaRPr lang="en-US" sz="2200" dirty="0"/>
-          </a:p>
-        </p:txBody>
-      </p:sp>
-      <p:sp>
-        <p:nvSpPr>
-          <p:cNvPr id="27" name="Text 17"/>
-          <p:cNvSpPr/>
-          <p:nvPr/>
-        </p:nvSpPr>
-        <p:spPr>
-          <a:xfrm>
-            <a:off x="11277295" y="6355080"/>
-            <a:ext cx="548640" cy="320040"/>
+              <a:t>Thank You</a:t>
+            </a:r>
+            <a:endParaRPr lang="en-US" sz="8800" dirty="0"/>
+          </a:p>
+        </p:txBody>
+      </p:sp>
+      <p:sp>
+        <p:nvSpPr>
+          <p:cNvPr id="8" name="Text 3"/>
+          <p:cNvSpPr/>
+          <p:nvPr/>
+        </p:nvSpPr>
+        <p:spPr>
+          <a:xfrm>
+            <a:off x="457200" y="4114800"/>
+            <a:ext cx="11274552" cy="457200"/>
           </a:xfrm>
           <a:prstGeom prst="rect">
             <a:avLst/>
@@ -13765,60 +14082,264 @@
           <a:bodyPr wrap="square" rtlCol="0" anchor="t"/>
           <a:lstStyle/>
           <a:p>
-            <a:pPr algn="r" indent="0" marL="0">
-              <a:buNone/>
-            </a:pPr>
-            <a:r>
-              <a:rPr lang="en-US" sz="1100" b="1" dirty="0">
-                <a:solidFill>
-                  <a:srgbClr val="FBD8DF"/>
+            <a:pPr algn="ctr" indent="0" marL="0">
+              <a:buNone/>
+            </a:pPr>
+            <a:r>
+              <a:rPr lang="en-US" sz="2200" i="1" dirty="0">
+                <a:solidFill>
+                  <a:srgbClr val="FF4D6D"/>
                 </a:solidFill>
                 <a:latin typeface="Calibri" pitchFamily="34" charset="0"/>
                 <a:ea typeface="Calibri" pitchFamily="34" charset="-122"/>
                 <a:cs typeface="Calibri" pitchFamily="34" charset="-120"/>
               </a:rPr>
-              <a:t>18</a:t>
-            </a:r>
-            <a:endParaRPr lang="en-US" sz="1100" dirty="0"/>
-          </a:p>
-        </p:txBody>
-      </p:sp>
-      <p:sp>
-        <p:nvSpPr>
-          <p:cNvPr id="28" name="Text 18"/>
-          <p:cNvSpPr/>
-          <p:nvPr/>
-        </p:nvSpPr>
-        <p:spPr>
-          <a:xfrm>
-            <a:off x="502920" y="6355080"/>
-            <a:ext cx="7315200" cy="320040"/>
-          </a:xfrm>
-          <a:prstGeom prst="rect">
-            <a:avLst/>
-          </a:prstGeom>
-          <a:noFill/>
-          <a:ln/>
-        </p:spPr>
-        <p:txBody>
-          <a:bodyPr wrap="square" rtlCol="0" anchor="t"/>
-          <a:lstStyle/>
-          <a:p>
-            <a:pPr algn="l" indent="0" marL="0">
-              <a:buNone/>
-            </a:pPr>
-            <a:r>
-              <a:rPr lang="en-US" sz="900" dirty="0">
-                <a:solidFill>
-                  <a:srgbClr val="FBD8DF"/>
+              <a:t>Questions &amp; Discussion Welcome</a:t>
+            </a:r>
+            <a:endParaRPr lang="en-US" sz="2200" dirty="0"/>
+          </a:p>
+        </p:txBody>
+      </p:sp>
+      <p:sp>
+        <p:nvSpPr>
+          <p:cNvPr id="9" name="Shape 4"/>
+          <p:cNvSpPr/>
+          <p:nvPr/>
+        </p:nvSpPr>
+        <p:spPr>
+          <a:xfrm>
+            <a:off x="3355848" y="5212080"/>
+            <a:ext cx="1865376" cy="0"/>
+          </a:xfrm>
+          <a:prstGeom prst="line">
+            <a:avLst/>
+          </a:prstGeom>
+          <a:noFill/>
+          <a:ln w="28575">
+            <a:solidFill>
+              <a:srgbClr val="FF4D6D"/>
+            </a:solidFill>
+            <a:prstDash val="solid"/>
+          </a:ln>
+        </p:spPr>
+      </p:sp>
+      <p:sp>
+        <p:nvSpPr>
+          <p:cNvPr id="10" name="Shape 5"/>
+          <p:cNvSpPr/>
+          <p:nvPr/>
+        </p:nvSpPr>
+        <p:spPr>
+          <a:xfrm flipV="1">
+            <a:off x="5221224" y="5065776"/>
+            <a:ext cx="329184" cy="146304"/>
+          </a:xfrm>
+          <a:prstGeom prst="line">
+            <a:avLst/>
+          </a:prstGeom>
+          <a:noFill/>
+          <a:ln w="28575">
+            <a:solidFill>
+              <a:srgbClr val="FF4D6D"/>
+            </a:solidFill>
+            <a:prstDash val="solid"/>
+          </a:ln>
+        </p:spPr>
+      </p:sp>
+      <p:sp>
+        <p:nvSpPr>
+          <p:cNvPr id="11" name="Shape 6"/>
+          <p:cNvSpPr/>
+          <p:nvPr/>
+        </p:nvSpPr>
+        <p:spPr>
+          <a:xfrm>
+            <a:off x="5550408" y="5065776"/>
+            <a:ext cx="329184" cy="457200"/>
+          </a:xfrm>
+          <a:prstGeom prst="line">
+            <a:avLst/>
+          </a:prstGeom>
+          <a:noFill/>
+          <a:ln w="28575">
+            <a:solidFill>
+              <a:srgbClr val="FF4D6D"/>
+            </a:solidFill>
+            <a:prstDash val="solid"/>
+          </a:ln>
+        </p:spPr>
+      </p:sp>
+      <p:sp>
+        <p:nvSpPr>
+          <p:cNvPr id="12" name="Shape 7"/>
+          <p:cNvSpPr/>
+          <p:nvPr/>
+        </p:nvSpPr>
+        <p:spPr>
+          <a:xfrm flipV="1">
+            <a:off x="5879592" y="4709160"/>
+            <a:ext cx="329184" cy="813816"/>
+          </a:xfrm>
+          <a:prstGeom prst="line">
+            <a:avLst/>
+          </a:prstGeom>
+          <a:noFill/>
+          <a:ln w="28575">
+            <a:solidFill>
+              <a:srgbClr val="FF4D6D"/>
+            </a:solidFill>
+            <a:prstDash val="solid"/>
+          </a:ln>
+        </p:spPr>
+      </p:sp>
+      <p:sp>
+        <p:nvSpPr>
+          <p:cNvPr id="13" name="Shape 8"/>
+          <p:cNvSpPr/>
+          <p:nvPr/>
+        </p:nvSpPr>
+        <p:spPr>
+          <a:xfrm>
+            <a:off x="6208776" y="4709160"/>
+            <a:ext cx="329184" cy="685800"/>
+          </a:xfrm>
+          <a:prstGeom prst="line">
+            <a:avLst/>
+          </a:prstGeom>
+          <a:noFill/>
+          <a:ln w="28575">
+            <a:solidFill>
+              <a:srgbClr val="FF4D6D"/>
+            </a:solidFill>
+            <a:prstDash val="solid"/>
+          </a:ln>
+        </p:spPr>
+      </p:sp>
+      <p:sp>
+        <p:nvSpPr>
+          <p:cNvPr id="14" name="Shape 9"/>
+          <p:cNvSpPr/>
+          <p:nvPr/>
+        </p:nvSpPr>
+        <p:spPr>
+          <a:xfrm flipV="1">
+            <a:off x="6537960" y="5212080"/>
+            <a:ext cx="329184" cy="182880"/>
+          </a:xfrm>
+          <a:prstGeom prst="line">
+            <a:avLst/>
+          </a:prstGeom>
+          <a:noFill/>
+          <a:ln w="28575">
+            <a:solidFill>
+              <a:srgbClr val="FF4D6D"/>
+            </a:solidFill>
+            <a:prstDash val="solid"/>
+          </a:ln>
+        </p:spPr>
+      </p:sp>
+      <p:sp>
+        <p:nvSpPr>
+          <p:cNvPr id="15" name="Shape 10"/>
+          <p:cNvSpPr/>
+          <p:nvPr/>
+        </p:nvSpPr>
+        <p:spPr>
+          <a:xfrm>
+            <a:off x="6867144" y="5212080"/>
+            <a:ext cx="1975104" cy="0"/>
+          </a:xfrm>
+          <a:prstGeom prst="line">
+            <a:avLst/>
+          </a:prstGeom>
+          <a:noFill/>
+          <a:ln w="28575">
+            <a:solidFill>
+              <a:srgbClr val="FF4D6D"/>
+            </a:solidFill>
+            <a:prstDash val="solid"/>
+          </a:ln>
+        </p:spPr>
+      </p:sp>
+      <p:sp>
+        <p:nvSpPr>
+          <p:cNvPr id="16" name="Shape 11"/>
+          <p:cNvSpPr/>
+          <p:nvPr/>
+        </p:nvSpPr>
+        <p:spPr>
+          <a:xfrm>
+            <a:off x="2621128" y="5486400"/>
+            <a:ext cx="6949440" cy="658368"/>
+          </a:xfrm>
+          <a:prstGeom prst="roundRect">
+            <a:avLst>
+              <a:gd name="adj" fmla="val 50000"/>
+            </a:avLst>
+          </a:prstGeom>
+          <a:solidFill>
+            <a:srgbClr val="FFFFFF">
+              <a:alpha val="8000"/>
+            </a:srgbClr>
+          </a:solidFill>
+          <a:ln w="12700">
+            <a:solidFill>
+              <a:srgbClr val="FF4D6D"/>
+            </a:solidFill>
+            <a:prstDash val="solid"/>
+          </a:ln>
+        </p:spPr>
+      </p:sp>
+      <p:sp>
+        <p:nvSpPr>
+          <p:cNvPr id="17" name="Text 12"/>
+          <p:cNvSpPr/>
+          <p:nvPr/>
+        </p:nvSpPr>
+        <p:spPr>
+          <a:xfrm>
+            <a:off x="2621128" y="5486400"/>
+            <a:ext cx="6949440" cy="658368"/>
+          </a:xfrm>
+          <a:prstGeom prst="rect">
+            <a:avLst/>
+          </a:prstGeom>
+          <a:noFill/>
+          <a:ln/>
+        </p:spPr>
+        <p:txBody>
+          <a:bodyPr wrap="square" rtlCol="0" anchor="ctr"/>
+          <a:lstStyle/>
+          <a:p>
+            <a:pPr algn="ctr" indent="0" marL="0">
+              <a:buNone/>
+            </a:pPr>
+            <a:r>
+              <a:rPr lang="en-US" sz="1400" b="1" dirty="0">
+                <a:solidFill>
+                  <a:srgbClr val="FFFFFF"/>
                 </a:solidFill>
                 <a:latin typeface="Calibri" pitchFamily="34" charset="0"/>
                 <a:ea typeface="Calibri" pitchFamily="34" charset="-122"/>
                 <a:cs typeface="Calibri" pitchFamily="34" charset="-120"/>
               </a:rPr>
-              <a:t>Atrial Fibrillation — Clinical Topic Review</a:t>
-            </a:r>
-            <a:endParaRPr lang="en-US" sz="900" dirty="0"/>
+              <a:t>Dr Mubashir Aziz</a:t>
+            </a:r>
+            <a:pPr algn="ctr" indent="0" marL="0">
+              <a:buNone/>
+            </a:pPr>
+            <a:r>
+              <a:rPr lang="en-US" sz="1400" dirty="0">
+                <a:solidFill>
+                  <a:srgbClr val="FBD8DF"/>
+                </a:solidFill>
+                <a:latin typeface="Calibri" pitchFamily="34" charset="0"/>
+                <a:ea typeface="Calibri" pitchFamily="34" charset="-122"/>
+                <a:cs typeface="Calibri" pitchFamily="34" charset="-120"/>
+              </a:rPr>
+              <a:t>   ·   Department of Cardiology · PEIC, Bahawalpur</a:t>
+            </a:r>
+            <a:endParaRPr lang="en-US" sz="1400" dirty="0"/>
           </a:p>
         </p:txBody>
       </p:sp>

--- a/presentations/Atrial-Fibrillation-Topic-Review.pptx
+++ b/presentations/Atrial-Fibrillation-Topic-Review.pptx
@@ -4260,7 +4260,7 @@
                 <a:ea typeface="Calibri" pitchFamily="34" charset="-122"/>
                 <a:cs typeface="Calibri" pitchFamily="34" charset="-120"/>
               </a:rPr>
-              <a:t>DIFFERENTIAL DIAGNOSIS</a:t>
+              <a:t>COMPLICATIONS</a:t>
             </a:r>
             <a:endParaRPr lang="en-US" sz="1250" dirty="0"/>
           </a:p>
@@ -4299,7 +4299,7 @@
                 <a:ea typeface="Cambria" pitchFamily="34" charset="-122"/>
                 <a:cs typeface="Cambria" pitchFamily="34" charset="-120"/>
               </a:rPr>
-              <a:t>Telling the Irregular Rhythms Apart</a:t>
+              <a:t>Why AF Matters</a:t>
             </a:r>
             <a:endParaRPr lang="en-US" sz="3000" dirty="0"/>
           </a:p>
@@ -4313,256 +4313,12 @@
         </p:nvSpPr>
         <p:spPr>
           <a:xfrm>
-            <a:off x="502920" y="1965960"/>
-            <a:ext cx="2231136" cy="548640"/>
+            <a:off x="502920" y="1920240"/>
+            <a:ext cx="3611880" cy="4023360"/>
           </a:xfrm>
           <a:prstGeom prst="roundRect">
             <a:avLst>
-              <a:gd name="adj" fmla="val 10000"/>
-            </a:avLst>
-          </a:prstGeom>
-          <a:solidFill>
-            <a:srgbClr val="A4133C"/>
-          </a:solidFill>
-          <a:ln/>
-        </p:spPr>
-      </p:sp>
-      <p:sp>
-        <p:nvSpPr>
-          <p:cNvPr id="7" name="Text 4"/>
-          <p:cNvSpPr/>
-          <p:nvPr/>
-        </p:nvSpPr>
-        <p:spPr>
-          <a:xfrm>
-            <a:off x="640080" y="1965960"/>
-            <a:ext cx="2011680" cy="548640"/>
-          </a:xfrm>
-          <a:prstGeom prst="rect">
-            <a:avLst/>
-          </a:prstGeom>
-          <a:noFill/>
-          <a:ln/>
-        </p:spPr>
-        <p:txBody>
-          <a:bodyPr wrap="square" lIns="0" tIns="0" rIns="0" bIns="0" rtlCol="0" anchor="ctr"/>
-          <a:lstStyle/>
-          <a:p>
-            <a:pPr algn="l" indent="0" marL="0">
-              <a:buNone/>
-            </a:pPr>
-            <a:r>
-              <a:rPr lang="en-US" sz="1300" b="1" dirty="0">
-                <a:solidFill>
-                  <a:srgbClr val="FFFFFF"/>
-                </a:solidFill>
-                <a:latin typeface="Calibri" pitchFamily="34" charset="0"/>
-                <a:ea typeface="Calibri" pitchFamily="34" charset="-122"/>
-                <a:cs typeface="Calibri" pitchFamily="34" charset="-120"/>
-              </a:rPr>
-              <a:t>Rhythm</a:t>
-            </a:r>
-            <a:endParaRPr lang="en-US" sz="1300" dirty="0"/>
-          </a:p>
-        </p:txBody>
-      </p:sp>
-      <p:sp>
-        <p:nvSpPr>
-          <p:cNvPr id="8" name="Shape 5"/>
-          <p:cNvSpPr/>
-          <p:nvPr/>
-        </p:nvSpPr>
-        <p:spPr>
-          <a:xfrm>
-            <a:off x="2843784" y="1965960"/>
-            <a:ext cx="2779776" cy="548640"/>
-          </a:xfrm>
-          <a:prstGeom prst="roundRect">
-            <a:avLst>
-              <a:gd name="adj" fmla="val 10000"/>
-            </a:avLst>
-          </a:prstGeom>
-          <a:solidFill>
-            <a:srgbClr val="A4133C"/>
-          </a:solidFill>
-          <a:ln/>
-        </p:spPr>
-      </p:sp>
-      <p:sp>
-        <p:nvSpPr>
-          <p:cNvPr id="9" name="Text 6"/>
-          <p:cNvSpPr/>
-          <p:nvPr/>
-        </p:nvSpPr>
-        <p:spPr>
-          <a:xfrm>
-            <a:off x="2926080" y="1965960"/>
-            <a:ext cx="2560320" cy="548640"/>
-          </a:xfrm>
-          <a:prstGeom prst="rect">
-            <a:avLst/>
-          </a:prstGeom>
-          <a:noFill/>
-          <a:ln/>
-        </p:spPr>
-        <p:txBody>
-          <a:bodyPr wrap="square" lIns="0" tIns="0" rIns="0" bIns="0" rtlCol="0" anchor="ctr"/>
-          <a:lstStyle/>
-          <a:p>
-            <a:pPr algn="l" indent="0" marL="0">
-              <a:buNone/>
-            </a:pPr>
-            <a:r>
-              <a:rPr lang="en-US" sz="1300" b="1" dirty="0">
-                <a:solidFill>
-                  <a:srgbClr val="FFFFFF"/>
-                </a:solidFill>
-                <a:latin typeface="Calibri" pitchFamily="34" charset="0"/>
-                <a:ea typeface="Calibri" pitchFamily="34" charset="-122"/>
-                <a:cs typeface="Calibri" pitchFamily="34" charset="-120"/>
-              </a:rPr>
-              <a:t>Atrial activity</a:t>
-            </a:r>
-            <a:endParaRPr lang="en-US" sz="1300" dirty="0"/>
-          </a:p>
-        </p:txBody>
-      </p:sp>
-      <p:sp>
-        <p:nvSpPr>
-          <p:cNvPr id="10" name="Shape 7"/>
-          <p:cNvSpPr/>
-          <p:nvPr/>
-        </p:nvSpPr>
-        <p:spPr>
-          <a:xfrm>
-            <a:off x="5678424" y="1965960"/>
-            <a:ext cx="2322576" cy="548640"/>
-          </a:xfrm>
-          <a:prstGeom prst="roundRect">
-            <a:avLst>
-              <a:gd name="adj" fmla="val 10000"/>
-            </a:avLst>
-          </a:prstGeom>
-          <a:solidFill>
-            <a:srgbClr val="A4133C"/>
-          </a:solidFill>
-          <a:ln/>
-        </p:spPr>
-      </p:sp>
-      <p:sp>
-        <p:nvSpPr>
-          <p:cNvPr id="11" name="Text 8"/>
-          <p:cNvSpPr/>
-          <p:nvPr/>
-        </p:nvSpPr>
-        <p:spPr>
-          <a:xfrm>
-            <a:off x="5760720" y="1965960"/>
-            <a:ext cx="2103120" cy="548640"/>
-          </a:xfrm>
-          <a:prstGeom prst="rect">
-            <a:avLst/>
-          </a:prstGeom>
-          <a:noFill/>
-          <a:ln/>
-        </p:spPr>
-        <p:txBody>
-          <a:bodyPr wrap="square" lIns="0" tIns="0" rIns="0" bIns="0" rtlCol="0" anchor="ctr"/>
-          <a:lstStyle/>
-          <a:p>
-            <a:pPr algn="l" indent="0" marL="0">
-              <a:buNone/>
-            </a:pPr>
-            <a:r>
-              <a:rPr lang="en-US" sz="1300" b="1" dirty="0">
-                <a:solidFill>
-                  <a:srgbClr val="FFFFFF"/>
-                </a:solidFill>
-                <a:latin typeface="Calibri" pitchFamily="34" charset="0"/>
-                <a:ea typeface="Calibri" pitchFamily="34" charset="-122"/>
-                <a:cs typeface="Calibri" pitchFamily="34" charset="-120"/>
-              </a:rPr>
-              <a:t>Ventricular rate</a:t>
-            </a:r>
-            <a:endParaRPr lang="en-US" sz="1300" dirty="0"/>
-          </a:p>
-        </p:txBody>
-      </p:sp>
-      <p:sp>
-        <p:nvSpPr>
-          <p:cNvPr id="12" name="Shape 9"/>
-          <p:cNvSpPr/>
-          <p:nvPr/>
-        </p:nvSpPr>
-        <p:spPr>
-          <a:xfrm>
-            <a:off x="8055864" y="1965960"/>
-            <a:ext cx="3630168" cy="548640"/>
-          </a:xfrm>
-          <a:prstGeom prst="roundRect">
-            <a:avLst>
-              <a:gd name="adj" fmla="val 10000"/>
-            </a:avLst>
-          </a:prstGeom>
-          <a:solidFill>
-            <a:srgbClr val="A4133C"/>
-          </a:solidFill>
-          <a:ln/>
-        </p:spPr>
-      </p:sp>
-      <p:sp>
-        <p:nvSpPr>
-          <p:cNvPr id="13" name="Text 10"/>
-          <p:cNvSpPr/>
-          <p:nvPr/>
-        </p:nvSpPr>
-        <p:spPr>
-          <a:xfrm>
-            <a:off x="8138160" y="1965960"/>
-            <a:ext cx="3410712" cy="548640"/>
-          </a:xfrm>
-          <a:prstGeom prst="rect">
-            <a:avLst/>
-          </a:prstGeom>
-          <a:noFill/>
-          <a:ln/>
-        </p:spPr>
-        <p:txBody>
-          <a:bodyPr wrap="square" lIns="0" tIns="0" rIns="0" bIns="0" rtlCol="0" anchor="ctr"/>
-          <a:lstStyle/>
-          <a:p>
-            <a:pPr algn="l" indent="0" marL="0">
-              <a:buNone/>
-            </a:pPr>
-            <a:r>
-              <a:rPr lang="en-US" sz="1300" b="1" dirty="0">
-                <a:solidFill>
-                  <a:srgbClr val="FFFFFF"/>
-                </a:solidFill>
-                <a:latin typeface="Calibri" pitchFamily="34" charset="0"/>
-                <a:ea typeface="Calibri" pitchFamily="34" charset="-122"/>
-                <a:cs typeface="Calibri" pitchFamily="34" charset="-120"/>
-              </a:rPr>
-              <a:t>Key distinguishing clue</a:t>
-            </a:r>
-            <a:endParaRPr lang="en-US" sz="1300" dirty="0"/>
-          </a:p>
-        </p:txBody>
-      </p:sp>
-      <p:sp>
-        <p:nvSpPr>
-          <p:cNvPr id="14" name="Shape 11"/>
-          <p:cNvSpPr/>
-          <p:nvPr/>
-        </p:nvSpPr>
-        <p:spPr>
-          <a:xfrm>
-            <a:off x="502920" y="2606040"/>
-            <a:ext cx="2231136" cy="1051560"/>
-          </a:xfrm>
-          <a:prstGeom prst="roundRect">
-            <a:avLst>
-              <a:gd name="adj" fmla="val 5217"/>
+              <a:gd name="adj" fmla="val 3038"/>
             </a:avLst>
           </a:prstGeom>
           <a:solidFill>
@@ -4574,37 +4330,93 @@
             </a:solidFill>
             <a:prstDash val="solid"/>
           </a:ln>
-        </p:spPr>
-      </p:sp>
-      <p:sp>
-        <p:nvSpPr>
-          <p:cNvPr id="15" name="Text 12"/>
-          <p:cNvSpPr/>
-          <p:nvPr/>
-        </p:nvSpPr>
-        <p:spPr>
-          <a:xfrm>
-            <a:off x="667512" y="2651760"/>
-            <a:ext cx="1975104" cy="960120"/>
-          </a:xfrm>
-          <a:prstGeom prst="rect">
-            <a:avLst/>
-          </a:prstGeom>
-          <a:noFill/>
-          <a:ln/>
-        </p:spPr>
-        <p:txBody>
-          <a:bodyPr wrap="square" lIns="0" tIns="0" rIns="0" bIns="0" rtlCol="0" anchor="ctr"/>
+          <a:effectLst>
+            <a:outerShdw sx="100000" sy="100000" kx="0" ky="0" algn="bl" rotWithShape="0" blurRad="127000" dist="50800" dir="5400000">
+              <a:srgbClr val="C9A3AC">
+                <a:alpha val="45000"/>
+              </a:srgbClr>
+            </a:outerShdw>
+          </a:effectLst>
+        </p:spPr>
+      </p:sp>
+      <p:sp>
+        <p:nvSpPr>
+          <p:cNvPr id="7" name="Shape 4"/>
+          <p:cNvSpPr/>
+          <p:nvPr/>
+        </p:nvSpPr>
+        <p:spPr>
+          <a:xfrm>
+            <a:off x="868680" y="2331720"/>
+            <a:ext cx="1051560" cy="1051560"/>
+          </a:xfrm>
+          <a:prstGeom prst="ellipse">
+            <a:avLst/>
+          </a:prstGeom>
+          <a:solidFill>
+            <a:srgbClr val="A4133C"/>
+          </a:solidFill>
+          <a:ln w="12700">
+            <a:solidFill>
+              <a:srgbClr val="FBD8DF"/>
+            </a:solidFill>
+            <a:prstDash val="solid"/>
+          </a:ln>
+        </p:spPr>
+      </p:sp>
+      <p:pic>
+        <p:nvPicPr>
+          <p:cNvPr id="8" name="Image 1" descr="preencoded.png">    </p:cNvPr>
+          <p:cNvPicPr>
+            <a:picLocks noChangeAspect="1"/>
+          </p:cNvPicPr>
+          <p:nvPr/>
+        </p:nvPicPr>
+        <p:blipFill>
+          <a:blip r:embed="rId2"/>
+          <a:stretch>
+            <a:fillRect/>
+          </a:stretch>
+        </p:blipFill>
+        <p:spPr>
+          <a:xfrm>
+            <a:off x="1161288" y="2624328"/>
+            <a:ext cx="466344" cy="466344"/>
+          </a:xfrm>
+          <a:prstGeom prst="rect">
+            <a:avLst/>
+          </a:prstGeom>
+        </p:spPr>
+      </p:pic>
+      <p:sp>
+        <p:nvSpPr>
+          <p:cNvPr id="9" name="Text 5"/>
+          <p:cNvSpPr/>
+          <p:nvPr/>
+        </p:nvSpPr>
+        <p:spPr>
+          <a:xfrm>
+            <a:off x="822960" y="3657600"/>
+            <a:ext cx="3063240" cy="868680"/>
+          </a:xfrm>
+          <a:prstGeom prst="rect">
+            <a:avLst/>
+          </a:prstGeom>
+          <a:noFill/>
+          <a:ln/>
+        </p:spPr>
+        <p:txBody>
+          <a:bodyPr wrap="square" rtlCol="0" anchor="t"/>
           <a:lstStyle/>
           <a:p>
             <a:pPr algn="l" indent="0" marL="0">
               <a:lnSpc>
-                <a:spcPct val="108000"/>
+                <a:spcPct val="102000"/>
               </a:lnSpc>
               <a:buNone/>
             </a:pPr>
             <a:r>
-              <a:rPr lang="en-US" sz="1500" b="1" dirty="0">
+              <a:rPr lang="en-US" sz="1900" b="1" dirty="0">
                 <a:solidFill>
                   <a:srgbClr val="FFFFFF"/>
                 </a:solidFill>
@@ -4612,26 +4424,68 @@
                 <a:ea typeface="Cambria" pitchFamily="34" charset="-122"/>
                 <a:cs typeface="Cambria" pitchFamily="34" charset="-120"/>
               </a:rPr>
-              <a:t>Atrial Fibrillation</a:t>
-            </a:r>
-            <a:endParaRPr lang="en-US" sz="1500" dirty="0"/>
-          </a:p>
-        </p:txBody>
-      </p:sp>
-      <p:sp>
-        <p:nvSpPr>
-          <p:cNvPr id="16" name="Shape 13"/>
-          <p:cNvSpPr/>
-          <p:nvPr/>
-        </p:nvSpPr>
-        <p:spPr>
-          <a:xfrm>
-            <a:off x="2843784" y="2606040"/>
-            <a:ext cx="2779776" cy="1051560"/>
+              <a:t>Thromboembolism &amp; Stroke</a:t>
+            </a:r>
+            <a:endParaRPr lang="en-US" sz="1900" dirty="0"/>
+          </a:p>
+        </p:txBody>
+      </p:sp>
+      <p:sp>
+        <p:nvSpPr>
+          <p:cNvPr id="10" name="Text 6"/>
+          <p:cNvSpPr/>
+          <p:nvPr/>
+        </p:nvSpPr>
+        <p:spPr>
+          <a:xfrm>
+            <a:off x="822960" y="4572000"/>
+            <a:ext cx="2971800" cy="1280160"/>
+          </a:xfrm>
+          <a:prstGeom prst="rect">
+            <a:avLst/>
+          </a:prstGeom>
+          <a:noFill/>
+          <a:ln/>
+        </p:spPr>
+        <p:txBody>
+          <a:bodyPr wrap="square" rtlCol="0" anchor="t"/>
+          <a:lstStyle/>
+          <a:p>
+            <a:pPr algn="l" indent="0" marL="0">
+              <a:lnSpc>
+                <a:spcPct val="115000"/>
+              </a:lnSpc>
+              <a:buNone/>
+            </a:pPr>
+            <a:r>
+              <a:rPr lang="en-US" sz="1400" dirty="0">
+                <a:solidFill>
+                  <a:srgbClr val="FBD8DF"/>
+                </a:solidFill>
+                <a:latin typeface="Calibri" pitchFamily="34" charset="0"/>
+                <a:ea typeface="Calibri" pitchFamily="34" charset="-122"/>
+                <a:cs typeface="Calibri" pitchFamily="34" charset="-120"/>
+              </a:rPr>
+              <a:t>Stasis in the left atrial appendage forms thrombi — the leading danger, with ~5× stroke risk</a:t>
+            </a:r>
+            <a:endParaRPr lang="en-US" sz="1400" dirty="0"/>
+          </a:p>
+        </p:txBody>
+      </p:sp>
+      <p:sp>
+        <p:nvSpPr>
+          <p:cNvPr id="11" name="Shape 7"/>
+          <p:cNvSpPr/>
+          <p:nvPr/>
+        </p:nvSpPr>
+        <p:spPr>
+          <a:xfrm>
+            <a:off x="4288536" y="1920240"/>
+            <a:ext cx="3611880" cy="4023360"/>
           </a:xfrm>
           <a:prstGeom prst="roundRect">
             <a:avLst>
-              <a:gd name="adj" fmla="val 5217"/>
+              <a:gd name="adj" fmla="val 3038"/>
             </a:avLst>
           </a:prstGeom>
           <a:solidFill>
@@ -4643,64 +4497,162 @@
             </a:solidFill>
             <a:prstDash val="solid"/>
           </a:ln>
-        </p:spPr>
-      </p:sp>
-      <p:sp>
-        <p:nvSpPr>
-          <p:cNvPr id="17" name="Text 14"/>
-          <p:cNvSpPr/>
-          <p:nvPr/>
-        </p:nvSpPr>
-        <p:spPr>
-          <a:xfrm>
-            <a:off x="2953512" y="2651760"/>
-            <a:ext cx="2523744" cy="960120"/>
-          </a:xfrm>
-          <a:prstGeom prst="rect">
-            <a:avLst/>
-          </a:prstGeom>
-          <a:noFill/>
-          <a:ln/>
-        </p:spPr>
-        <p:txBody>
-          <a:bodyPr wrap="square" lIns="0" tIns="0" rIns="0" bIns="0" rtlCol="0" anchor="ctr"/>
+          <a:effectLst>
+            <a:outerShdw sx="100000" sy="100000" kx="0" ky="0" algn="bl" rotWithShape="0" blurRad="127000" dist="50800" dir="5400000">
+              <a:srgbClr val="C9A3AC">
+                <a:alpha val="45000"/>
+              </a:srgbClr>
+            </a:outerShdw>
+          </a:effectLst>
+        </p:spPr>
+      </p:sp>
+      <p:sp>
+        <p:nvSpPr>
+          <p:cNvPr id="12" name="Shape 8"/>
+          <p:cNvSpPr/>
+          <p:nvPr/>
+        </p:nvSpPr>
+        <p:spPr>
+          <a:xfrm>
+            <a:off x="4654296" y="2331720"/>
+            <a:ext cx="1051560" cy="1051560"/>
+          </a:xfrm>
+          <a:prstGeom prst="ellipse">
+            <a:avLst/>
+          </a:prstGeom>
+          <a:solidFill>
+            <a:srgbClr val="FFFFFF"/>
+          </a:solidFill>
+          <a:ln w="12700">
+            <a:solidFill>
+              <a:srgbClr val="FBD8DF"/>
+            </a:solidFill>
+            <a:prstDash val="solid"/>
+          </a:ln>
+        </p:spPr>
+      </p:sp>
+      <p:pic>
+        <p:nvPicPr>
+          <p:cNvPr id="13" name="Image 2" descr="preencoded.png">    </p:cNvPr>
+          <p:cNvPicPr>
+            <a:picLocks noChangeAspect="1"/>
+          </p:cNvPicPr>
+          <p:nvPr/>
+        </p:nvPicPr>
+        <p:blipFill>
+          <a:blip r:embed="rId3"/>
+          <a:stretch>
+            <a:fillRect/>
+          </a:stretch>
+        </p:blipFill>
+        <p:spPr>
+          <a:xfrm>
+            <a:off x="4946904" y="2624328"/>
+            <a:ext cx="466344" cy="466344"/>
+          </a:xfrm>
+          <a:prstGeom prst="rect">
+            <a:avLst/>
+          </a:prstGeom>
+        </p:spPr>
+      </p:pic>
+      <p:sp>
+        <p:nvSpPr>
+          <p:cNvPr id="14" name="Text 9"/>
+          <p:cNvSpPr/>
+          <p:nvPr/>
+        </p:nvSpPr>
+        <p:spPr>
+          <a:xfrm>
+            <a:off x="4608576" y="3657600"/>
+            <a:ext cx="3063240" cy="868680"/>
+          </a:xfrm>
+          <a:prstGeom prst="rect">
+            <a:avLst/>
+          </a:prstGeom>
+          <a:noFill/>
+          <a:ln/>
+        </p:spPr>
+        <p:txBody>
+          <a:bodyPr wrap="square" rtlCol="0" anchor="t"/>
           <a:lstStyle/>
           <a:p>
             <a:pPr algn="l" indent="0" marL="0">
               <a:lnSpc>
-                <a:spcPct val="108000"/>
+                <a:spcPct val="102000"/>
               </a:lnSpc>
               <a:buNone/>
             </a:pPr>
             <a:r>
-              <a:rPr lang="en-US" sz="1300" dirty="0">
+              <a:rPr lang="en-US" sz="1900" b="1" dirty="0">
                 <a:solidFill>
                   <a:srgbClr val="2B2B33"/>
+                </a:solidFill>
+                <a:latin typeface="Cambria" pitchFamily="34" charset="0"/>
+                <a:ea typeface="Cambria" pitchFamily="34" charset="-122"/>
+                <a:cs typeface="Cambria" pitchFamily="34" charset="-120"/>
+              </a:rPr>
+              <a:t>Heart Failure</a:t>
+            </a:r>
+            <a:endParaRPr lang="en-US" sz="1900" dirty="0"/>
+          </a:p>
+        </p:txBody>
+      </p:sp>
+      <p:sp>
+        <p:nvSpPr>
+          <p:cNvPr id="15" name="Text 10"/>
+          <p:cNvSpPr/>
+          <p:nvPr/>
+        </p:nvSpPr>
+        <p:spPr>
+          <a:xfrm>
+            <a:off x="4608576" y="4572000"/>
+            <a:ext cx="2971800" cy="1280160"/>
+          </a:xfrm>
+          <a:prstGeom prst="rect">
+            <a:avLst/>
+          </a:prstGeom>
+          <a:noFill/>
+          <a:ln/>
+        </p:spPr>
+        <p:txBody>
+          <a:bodyPr wrap="square" rtlCol="0" anchor="t"/>
+          <a:lstStyle/>
+          <a:p>
+            <a:pPr algn="l" indent="0" marL="0">
+              <a:lnSpc>
+                <a:spcPct val="115000"/>
+              </a:lnSpc>
+              <a:buNone/>
+            </a:pPr>
+            <a:r>
+              <a:rPr lang="en-US" sz="1400" dirty="0">
+                <a:solidFill>
+                  <a:srgbClr val="6B6B76"/>
                 </a:solidFill>
                 <a:latin typeface="Calibri" pitchFamily="34" charset="0"/>
                 <a:ea typeface="Calibri" pitchFamily="34" charset="-122"/>
                 <a:cs typeface="Calibri" pitchFamily="34" charset="-120"/>
               </a:rPr>
-              <a:t>No P waves; fibrillatory baseline</a:t>
-            </a:r>
-            <a:endParaRPr lang="en-US" sz="1300" dirty="0"/>
-          </a:p>
-        </p:txBody>
-      </p:sp>
-      <p:sp>
-        <p:nvSpPr>
-          <p:cNvPr id="18" name="Shape 15"/>
-          <p:cNvSpPr/>
-          <p:nvPr/>
-        </p:nvSpPr>
-        <p:spPr>
-          <a:xfrm>
-            <a:off x="5678424" y="2606040"/>
-            <a:ext cx="2322576" cy="1051560"/>
+              <a:t>Loss of atrial kick plus rapid rates reduce cardiac output and worsen existing HF</a:t>
+            </a:r>
+            <a:endParaRPr lang="en-US" sz="1400" dirty="0"/>
+          </a:p>
+        </p:txBody>
+      </p:sp>
+      <p:sp>
+        <p:nvSpPr>
+          <p:cNvPr id="16" name="Shape 11"/>
+          <p:cNvSpPr/>
+          <p:nvPr/>
+        </p:nvSpPr>
+        <p:spPr>
+          <a:xfrm>
+            <a:off x="8074152" y="1920240"/>
+            <a:ext cx="3611880" cy="4023360"/>
           </a:xfrm>
           <a:prstGeom prst="roundRect">
             <a:avLst>
-              <a:gd name="adj" fmla="val 5217"/>
+              <a:gd name="adj" fmla="val 3038"/>
             </a:avLst>
           </a:prstGeom>
           <a:solidFill>
@@ -4712,68 +4664,31 @@
             </a:solidFill>
             <a:prstDash val="solid"/>
           </a:ln>
-        </p:spPr>
-      </p:sp>
-      <p:sp>
-        <p:nvSpPr>
-          <p:cNvPr id="19" name="Text 16"/>
-          <p:cNvSpPr/>
-          <p:nvPr/>
-        </p:nvSpPr>
-        <p:spPr>
-          <a:xfrm>
-            <a:off x="5788152" y="2651760"/>
-            <a:ext cx="2066544" cy="960120"/>
-          </a:xfrm>
-          <a:prstGeom prst="rect">
-            <a:avLst/>
-          </a:prstGeom>
-          <a:noFill/>
-          <a:ln/>
-        </p:spPr>
-        <p:txBody>
-          <a:bodyPr wrap="square" lIns="0" tIns="0" rIns="0" bIns="0" rtlCol="0" anchor="ctr"/>
-          <a:lstStyle/>
-          <a:p>
-            <a:pPr algn="l" indent="0" marL="0">
-              <a:lnSpc>
-                <a:spcPct val="108000"/>
-              </a:lnSpc>
-              <a:buNone/>
-            </a:pPr>
-            <a:r>
-              <a:rPr lang="en-US" sz="1300" dirty="0">
-                <a:solidFill>
-                  <a:srgbClr val="2B2B33"/>
-                </a:solidFill>
-                <a:latin typeface="Calibri" pitchFamily="34" charset="0"/>
-                <a:ea typeface="Calibri" pitchFamily="34" charset="-122"/>
-                <a:cs typeface="Calibri" pitchFamily="34" charset="-120"/>
-              </a:rPr>
-              <a:t>Irregularly irregular</a:t>
-            </a:r>
-            <a:endParaRPr lang="en-US" sz="1300" dirty="0"/>
-          </a:p>
-        </p:txBody>
-      </p:sp>
-      <p:sp>
-        <p:nvSpPr>
-          <p:cNvPr id="20" name="Shape 17"/>
-          <p:cNvSpPr/>
-          <p:nvPr/>
-        </p:nvSpPr>
-        <p:spPr>
-          <a:xfrm>
-            <a:off x="8055864" y="2606040"/>
-            <a:ext cx="3630168" cy="1051560"/>
-          </a:xfrm>
-          <a:prstGeom prst="roundRect">
-            <a:avLst>
-              <a:gd name="adj" fmla="val 5217"/>
-            </a:avLst>
+          <a:effectLst>
+            <a:outerShdw sx="100000" sy="100000" kx="0" ky="0" algn="bl" rotWithShape="0" blurRad="127000" dist="50800" dir="5400000">
+              <a:srgbClr val="C9A3AC">
+                <a:alpha val="45000"/>
+              </a:srgbClr>
+            </a:outerShdw>
+          </a:effectLst>
+        </p:spPr>
+      </p:sp>
+      <p:sp>
+        <p:nvSpPr>
+          <p:cNvPr id="17" name="Shape 12"/>
+          <p:cNvSpPr/>
+          <p:nvPr/>
+        </p:nvSpPr>
+        <p:spPr>
+          <a:xfrm>
+            <a:off x="8439912" y="2331720"/>
+            <a:ext cx="1051560" cy="1051560"/>
+          </a:xfrm>
+          <a:prstGeom prst="ellipse">
+            <a:avLst/>
           </a:prstGeom>
           <a:solidFill>
-            <a:srgbClr val="FFF0F3"/>
+            <a:srgbClr val="FFFFFF"/>
           </a:solidFill>
           <a:ln w="12700">
             <a:solidFill>
@@ -4783,708 +4698,147 @@
           </a:ln>
         </p:spPr>
       </p:sp>
-      <p:sp>
-        <p:nvSpPr>
-          <p:cNvPr id="21" name="Text 18"/>
-          <p:cNvSpPr/>
-          <p:nvPr/>
-        </p:nvSpPr>
-        <p:spPr>
-          <a:xfrm>
-            <a:off x="8165592" y="2651760"/>
-            <a:ext cx="3374136" cy="960120"/>
-          </a:xfrm>
-          <a:prstGeom prst="rect">
-            <a:avLst/>
-          </a:prstGeom>
-          <a:noFill/>
-          <a:ln/>
-        </p:spPr>
-        <p:txBody>
-          <a:bodyPr wrap="square" lIns="0" tIns="0" rIns="0" bIns="0" rtlCol="0" anchor="ctr"/>
+      <p:pic>
+        <p:nvPicPr>
+          <p:cNvPr id="18" name="Image 3" descr="preencoded.png">    </p:cNvPr>
+          <p:cNvPicPr>
+            <a:picLocks noChangeAspect="1"/>
+          </p:cNvPicPr>
+          <p:nvPr/>
+        </p:nvPicPr>
+        <p:blipFill>
+          <a:blip r:embed="rId4"/>
+          <a:stretch>
+            <a:fillRect/>
+          </a:stretch>
+        </p:blipFill>
+        <p:spPr>
+          <a:xfrm>
+            <a:off x="8732520" y="2624328"/>
+            <a:ext cx="466344" cy="466344"/>
+          </a:xfrm>
+          <a:prstGeom prst="rect">
+            <a:avLst/>
+          </a:prstGeom>
+        </p:spPr>
+      </p:pic>
+      <p:sp>
+        <p:nvSpPr>
+          <p:cNvPr id="19" name="Text 13"/>
+          <p:cNvSpPr/>
+          <p:nvPr/>
+        </p:nvSpPr>
+        <p:spPr>
+          <a:xfrm>
+            <a:off x="8394192" y="3657600"/>
+            <a:ext cx="3063240" cy="868680"/>
+          </a:xfrm>
+          <a:prstGeom prst="rect">
+            <a:avLst/>
+          </a:prstGeom>
+          <a:noFill/>
+          <a:ln/>
+        </p:spPr>
+        <p:txBody>
+          <a:bodyPr wrap="square" rtlCol="0" anchor="t"/>
           <a:lstStyle/>
           <a:p>
             <a:pPr algn="l" indent="0" marL="0">
               <a:lnSpc>
-                <a:spcPct val="108000"/>
+                <a:spcPct val="102000"/>
               </a:lnSpc>
               <a:buNone/>
             </a:pPr>
             <a:r>
-              <a:rPr lang="en-US" sz="1300" dirty="0">
+              <a:rPr lang="en-US" sz="1900" b="1" dirty="0">
                 <a:solidFill>
                   <a:srgbClr val="2B2B33"/>
+                </a:solidFill>
+                <a:latin typeface="Cambria" pitchFamily="34" charset="0"/>
+                <a:ea typeface="Cambria" pitchFamily="34" charset="-122"/>
+                <a:cs typeface="Cambria" pitchFamily="34" charset="-120"/>
+              </a:rPr>
+              <a:t>Tachycardia-induced Cardiomyopathy</a:t>
+            </a:r>
+            <a:endParaRPr lang="en-US" sz="1900" dirty="0"/>
+          </a:p>
+        </p:txBody>
+      </p:sp>
+      <p:sp>
+        <p:nvSpPr>
+          <p:cNvPr id="20" name="Text 14"/>
+          <p:cNvSpPr/>
+          <p:nvPr/>
+        </p:nvSpPr>
+        <p:spPr>
+          <a:xfrm>
+            <a:off x="8394192" y="4572000"/>
+            <a:ext cx="2971800" cy="1280160"/>
+          </a:xfrm>
+          <a:prstGeom prst="rect">
+            <a:avLst/>
+          </a:prstGeom>
+          <a:noFill/>
+          <a:ln/>
+        </p:spPr>
+        <p:txBody>
+          <a:bodyPr wrap="square" rtlCol="0" anchor="t"/>
+          <a:lstStyle/>
+          <a:p>
+            <a:pPr algn="l" indent="0" marL="0">
+              <a:lnSpc>
+                <a:spcPct val="115000"/>
+              </a:lnSpc>
+              <a:buNone/>
+            </a:pPr>
+            <a:r>
+              <a:rPr lang="en-US" sz="1400" dirty="0">
+                <a:solidFill>
+                  <a:srgbClr val="6B6B76"/>
                 </a:solidFill>
                 <a:latin typeface="Calibri" pitchFamily="34" charset="0"/>
                 <a:ea typeface="Calibri" pitchFamily="34" charset="-122"/>
                 <a:cs typeface="Calibri" pitchFamily="34" charset="-120"/>
               </a:rPr>
-              <a:t>Chaotic — no organised atrial activity</a:t>
-            </a:r>
-            <a:endParaRPr lang="en-US" sz="1300" dirty="0"/>
-          </a:p>
-        </p:txBody>
-      </p:sp>
-      <p:sp>
-        <p:nvSpPr>
-          <p:cNvPr id="22" name="Shape 19"/>
-          <p:cNvSpPr/>
-          <p:nvPr/>
-        </p:nvSpPr>
-        <p:spPr>
-          <a:xfrm>
-            <a:off x="502920" y="3703320"/>
-            <a:ext cx="2231136" cy="1051560"/>
-          </a:xfrm>
-          <a:prstGeom prst="roundRect">
-            <a:avLst>
-              <a:gd name="adj" fmla="val 5217"/>
-            </a:avLst>
-          </a:prstGeom>
-          <a:solidFill>
-            <a:srgbClr val="FBD8DF"/>
-          </a:solidFill>
-          <a:ln w="12700">
-            <a:solidFill>
-              <a:srgbClr val="FBD8DF"/>
-            </a:solidFill>
-            <a:prstDash val="solid"/>
-          </a:ln>
-        </p:spPr>
-      </p:sp>
-      <p:sp>
-        <p:nvSpPr>
-          <p:cNvPr id="23" name="Text 20"/>
-          <p:cNvSpPr/>
-          <p:nvPr/>
-        </p:nvSpPr>
-        <p:spPr>
-          <a:xfrm>
-            <a:off x="667512" y="3749040"/>
-            <a:ext cx="1975104" cy="960120"/>
-          </a:xfrm>
-          <a:prstGeom prst="rect">
-            <a:avLst/>
-          </a:prstGeom>
-          <a:noFill/>
-          <a:ln/>
-        </p:spPr>
-        <p:txBody>
-          <a:bodyPr wrap="square" lIns="0" tIns="0" rIns="0" bIns="0" rtlCol="0" anchor="ctr"/>
-          <a:lstStyle/>
-          <a:p>
-            <a:pPr algn="l" indent="0" marL="0">
-              <a:lnSpc>
-                <a:spcPct val="108000"/>
-              </a:lnSpc>
-              <a:buNone/>
-            </a:pPr>
-            <a:r>
-              <a:rPr lang="en-US" sz="1500" b="1" dirty="0">
-                <a:solidFill>
-                  <a:srgbClr val="2B2B33"/>
-                </a:solidFill>
-                <a:latin typeface="Cambria" pitchFamily="34" charset="0"/>
-                <a:ea typeface="Cambria" pitchFamily="34" charset="-122"/>
-                <a:cs typeface="Cambria" pitchFamily="34" charset="-120"/>
-              </a:rPr>
-              <a:t>Atrial Flutter</a:t>
-            </a:r>
-            <a:endParaRPr lang="en-US" sz="1500" dirty="0"/>
-          </a:p>
-        </p:txBody>
-      </p:sp>
-      <p:sp>
-        <p:nvSpPr>
-          <p:cNvPr id="24" name="Shape 21"/>
-          <p:cNvSpPr/>
-          <p:nvPr/>
-        </p:nvSpPr>
-        <p:spPr>
-          <a:xfrm>
-            <a:off x="2843784" y="3703320"/>
-            <a:ext cx="2779776" cy="1051560"/>
-          </a:xfrm>
-          <a:prstGeom prst="roundRect">
-            <a:avLst>
-              <a:gd name="adj" fmla="val 5217"/>
-            </a:avLst>
-          </a:prstGeom>
-          <a:solidFill>
-            <a:srgbClr val="FFF0F3"/>
-          </a:solidFill>
-          <a:ln w="12700">
-            <a:solidFill>
-              <a:srgbClr val="FBD8DF"/>
-            </a:solidFill>
-            <a:prstDash val="solid"/>
-          </a:ln>
-        </p:spPr>
-      </p:sp>
-      <p:sp>
-        <p:nvSpPr>
-          <p:cNvPr id="25" name="Text 22"/>
-          <p:cNvSpPr/>
-          <p:nvPr/>
-        </p:nvSpPr>
-        <p:spPr>
-          <a:xfrm>
-            <a:off x="2953512" y="3749040"/>
-            <a:ext cx="2523744" cy="960120"/>
-          </a:xfrm>
-          <a:prstGeom prst="rect">
-            <a:avLst/>
-          </a:prstGeom>
-          <a:noFill/>
-          <a:ln/>
-        </p:spPr>
-        <p:txBody>
-          <a:bodyPr wrap="square" lIns="0" tIns="0" rIns="0" bIns="0" rtlCol="0" anchor="ctr"/>
-          <a:lstStyle/>
-          <a:p>
-            <a:pPr algn="l" indent="0" marL="0">
-              <a:lnSpc>
-                <a:spcPct val="108000"/>
-              </a:lnSpc>
-              <a:buNone/>
-            </a:pPr>
-            <a:r>
-              <a:rPr lang="en-US" sz="1300" dirty="0">
-                <a:solidFill>
-                  <a:srgbClr val="2B2B33"/>
+              <a:t>Persistently rapid ventricular rates can cause reversible LV dysfunction</a:t>
+            </a:r>
+            <a:endParaRPr lang="en-US" sz="1400" dirty="0"/>
+          </a:p>
+        </p:txBody>
+      </p:sp>
+      <p:sp>
+        <p:nvSpPr>
+          <p:cNvPr id="21" name="Text 15"/>
+          <p:cNvSpPr/>
+          <p:nvPr/>
+        </p:nvSpPr>
+        <p:spPr>
+          <a:xfrm>
+            <a:off x="11277295" y="6355080"/>
+            <a:ext cx="548640" cy="320040"/>
+          </a:xfrm>
+          <a:prstGeom prst="rect">
+            <a:avLst/>
+          </a:prstGeom>
+          <a:noFill/>
+          <a:ln/>
+        </p:spPr>
+        <p:txBody>
+          <a:bodyPr wrap="square" rtlCol="0" anchor="t"/>
+          <a:lstStyle/>
+          <a:p>
+            <a:pPr algn="r" indent="0" marL="0">
+              <a:buNone/>
+            </a:pPr>
+            <a:r>
+              <a:rPr lang="en-US" sz="1100" b="1" dirty="0">
+                <a:solidFill>
+                  <a:srgbClr val="6B6B76"/>
                 </a:solidFill>
                 <a:latin typeface="Calibri" pitchFamily="34" charset="0"/>
                 <a:ea typeface="Calibri" pitchFamily="34" charset="-122"/>
                 <a:cs typeface="Calibri" pitchFamily="34" charset="-120"/>
               </a:rPr>
-              <a:t>Sawtooth flutter waves (~300/min)</a:t>
-            </a:r>
-            <a:endParaRPr lang="en-US" sz="1300" dirty="0"/>
-          </a:p>
-        </p:txBody>
-      </p:sp>
-      <p:sp>
-        <p:nvSpPr>
-          <p:cNvPr id="26" name="Shape 23"/>
-          <p:cNvSpPr/>
-          <p:nvPr/>
-        </p:nvSpPr>
-        <p:spPr>
-          <a:xfrm>
-            <a:off x="5678424" y="3703320"/>
-            <a:ext cx="2322576" cy="1051560"/>
-          </a:xfrm>
-          <a:prstGeom prst="roundRect">
-            <a:avLst>
-              <a:gd name="adj" fmla="val 5217"/>
-            </a:avLst>
-          </a:prstGeom>
-          <a:solidFill>
-            <a:srgbClr val="FFF0F3"/>
-          </a:solidFill>
-          <a:ln w="12700">
-            <a:solidFill>
-              <a:srgbClr val="FBD8DF"/>
-            </a:solidFill>
-            <a:prstDash val="solid"/>
-          </a:ln>
-        </p:spPr>
-      </p:sp>
-      <p:sp>
-        <p:nvSpPr>
-          <p:cNvPr id="27" name="Text 24"/>
-          <p:cNvSpPr/>
-          <p:nvPr/>
-        </p:nvSpPr>
-        <p:spPr>
-          <a:xfrm>
-            <a:off x="5788152" y="3749040"/>
-            <a:ext cx="2066544" cy="960120"/>
-          </a:xfrm>
-          <a:prstGeom prst="rect">
-            <a:avLst/>
-          </a:prstGeom>
-          <a:noFill/>
-          <a:ln/>
-        </p:spPr>
-        <p:txBody>
-          <a:bodyPr wrap="square" lIns="0" tIns="0" rIns="0" bIns="0" rtlCol="0" anchor="ctr"/>
-          <a:lstStyle/>
-          <a:p>
-            <a:pPr algn="l" indent="0" marL="0">
-              <a:lnSpc>
-                <a:spcPct val="108000"/>
-              </a:lnSpc>
-              <a:buNone/>
-            </a:pPr>
-            <a:r>
-              <a:rPr lang="en-US" sz="1300" dirty="0">
-                <a:solidFill>
-                  <a:srgbClr val="2B2B33"/>
-                </a:solidFill>
-                <a:latin typeface="Calibri" pitchFamily="34" charset="0"/>
-                <a:ea typeface="Calibri" pitchFamily="34" charset="-122"/>
-                <a:cs typeface="Calibri" pitchFamily="34" charset="-120"/>
-              </a:rPr>
-              <a:t>Often regular (2:1, 3:1)</a:t>
-            </a:r>
-            <a:endParaRPr lang="en-US" sz="1300" dirty="0"/>
-          </a:p>
-        </p:txBody>
-      </p:sp>
-      <p:sp>
-        <p:nvSpPr>
-          <p:cNvPr id="28" name="Shape 25"/>
-          <p:cNvSpPr/>
-          <p:nvPr/>
-        </p:nvSpPr>
-        <p:spPr>
-          <a:xfrm>
-            <a:off x="8055864" y="3703320"/>
-            <a:ext cx="3630168" cy="1051560"/>
-          </a:xfrm>
-          <a:prstGeom prst="roundRect">
-            <a:avLst>
-              <a:gd name="adj" fmla="val 5217"/>
-            </a:avLst>
-          </a:prstGeom>
-          <a:solidFill>
-            <a:srgbClr val="FFF0F3"/>
-          </a:solidFill>
-          <a:ln w="12700">
-            <a:solidFill>
-              <a:srgbClr val="FBD8DF"/>
-            </a:solidFill>
-            <a:prstDash val="solid"/>
-          </a:ln>
-        </p:spPr>
-      </p:sp>
-      <p:sp>
-        <p:nvSpPr>
-          <p:cNvPr id="29" name="Text 26"/>
-          <p:cNvSpPr/>
-          <p:nvPr/>
-        </p:nvSpPr>
-        <p:spPr>
-          <a:xfrm>
-            <a:off x="8165592" y="3749040"/>
-            <a:ext cx="3374136" cy="960120"/>
-          </a:xfrm>
-          <a:prstGeom prst="rect">
-            <a:avLst/>
-          </a:prstGeom>
-          <a:noFill/>
-          <a:ln/>
-        </p:spPr>
-        <p:txBody>
-          <a:bodyPr wrap="square" lIns="0" tIns="0" rIns="0" bIns="0" rtlCol="0" anchor="ctr"/>
-          <a:lstStyle/>
-          <a:p>
-            <a:pPr algn="l" indent="0" marL="0">
-              <a:lnSpc>
-                <a:spcPct val="108000"/>
-              </a:lnSpc>
-              <a:buNone/>
-            </a:pPr>
-            <a:r>
-              <a:rPr lang="en-US" sz="1300" dirty="0">
-                <a:solidFill>
-                  <a:srgbClr val="2B2B33"/>
-                </a:solidFill>
-                <a:latin typeface="Calibri" pitchFamily="34" charset="0"/>
-                <a:ea typeface="Calibri" pitchFamily="34" charset="-122"/>
-                <a:cs typeface="Calibri" pitchFamily="34" charset="-120"/>
-              </a:rPr>
-              <a:t>Regular “picket-fence” baseline</a:t>
-            </a:r>
-            <a:endParaRPr lang="en-US" sz="1300" dirty="0"/>
-          </a:p>
-        </p:txBody>
-      </p:sp>
-      <p:sp>
-        <p:nvSpPr>
-          <p:cNvPr id="30" name="Shape 27"/>
-          <p:cNvSpPr/>
-          <p:nvPr/>
-        </p:nvSpPr>
-        <p:spPr>
-          <a:xfrm>
-            <a:off x="502920" y="4800600"/>
-            <a:ext cx="2231136" cy="1051560"/>
-          </a:xfrm>
-          <a:prstGeom prst="roundRect">
-            <a:avLst>
-              <a:gd name="adj" fmla="val 5217"/>
-            </a:avLst>
-          </a:prstGeom>
-          <a:solidFill>
-            <a:srgbClr val="FBD8DF"/>
-          </a:solidFill>
-          <a:ln w="12700">
-            <a:solidFill>
-              <a:srgbClr val="FBD8DF"/>
-            </a:solidFill>
-            <a:prstDash val="solid"/>
-          </a:ln>
-        </p:spPr>
-      </p:sp>
-      <p:sp>
-        <p:nvSpPr>
-          <p:cNvPr id="31" name="Text 28"/>
-          <p:cNvSpPr/>
-          <p:nvPr/>
-        </p:nvSpPr>
-        <p:spPr>
-          <a:xfrm>
-            <a:off x="667512" y="4846320"/>
-            <a:ext cx="1975104" cy="960120"/>
-          </a:xfrm>
-          <a:prstGeom prst="rect">
-            <a:avLst/>
-          </a:prstGeom>
-          <a:noFill/>
-          <a:ln/>
-        </p:spPr>
-        <p:txBody>
-          <a:bodyPr wrap="square" lIns="0" tIns="0" rIns="0" bIns="0" rtlCol="0" anchor="ctr"/>
-          <a:lstStyle/>
-          <a:p>
-            <a:pPr algn="l" indent="0" marL="0">
-              <a:lnSpc>
-                <a:spcPct val="108000"/>
-              </a:lnSpc>
-              <a:buNone/>
-            </a:pPr>
-            <a:r>
-              <a:rPr lang="en-US" sz="1500" b="1" dirty="0">
-                <a:solidFill>
-                  <a:srgbClr val="2B2B33"/>
-                </a:solidFill>
-                <a:latin typeface="Cambria" pitchFamily="34" charset="0"/>
-                <a:ea typeface="Cambria" pitchFamily="34" charset="-122"/>
-                <a:cs typeface="Cambria" pitchFamily="34" charset="-120"/>
-              </a:rPr>
-              <a:t>Multifocal Atrial Tach.</a:t>
-            </a:r>
-            <a:endParaRPr lang="en-US" sz="1500" dirty="0"/>
-          </a:p>
-        </p:txBody>
-      </p:sp>
-      <p:sp>
-        <p:nvSpPr>
-          <p:cNvPr id="32" name="Shape 29"/>
-          <p:cNvSpPr/>
-          <p:nvPr/>
-        </p:nvSpPr>
-        <p:spPr>
-          <a:xfrm>
-            <a:off x="2843784" y="4800600"/>
-            <a:ext cx="2779776" cy="1051560"/>
-          </a:xfrm>
-          <a:prstGeom prst="roundRect">
-            <a:avLst>
-              <a:gd name="adj" fmla="val 5217"/>
-            </a:avLst>
-          </a:prstGeom>
-          <a:solidFill>
-            <a:srgbClr val="FFF0F3"/>
-          </a:solidFill>
-          <a:ln w="12700">
-            <a:solidFill>
-              <a:srgbClr val="FBD8DF"/>
-            </a:solidFill>
-            <a:prstDash val="solid"/>
-          </a:ln>
-        </p:spPr>
-      </p:sp>
-      <p:sp>
-        <p:nvSpPr>
-          <p:cNvPr id="33" name="Text 30"/>
-          <p:cNvSpPr/>
-          <p:nvPr/>
-        </p:nvSpPr>
-        <p:spPr>
-          <a:xfrm>
-            <a:off x="2953512" y="4846320"/>
-            <a:ext cx="2523744" cy="960120"/>
-          </a:xfrm>
-          <a:prstGeom prst="rect">
-            <a:avLst/>
-          </a:prstGeom>
-          <a:noFill/>
-          <a:ln/>
-        </p:spPr>
-        <p:txBody>
-          <a:bodyPr wrap="square" lIns="0" tIns="0" rIns="0" bIns="0" rtlCol="0" anchor="ctr"/>
-          <a:lstStyle/>
-          <a:p>
-            <a:pPr algn="l" indent="0" marL="0">
-              <a:lnSpc>
-                <a:spcPct val="108000"/>
-              </a:lnSpc>
-              <a:buNone/>
-            </a:pPr>
-            <a:r>
-              <a:rPr lang="en-US" sz="1300" dirty="0">
-                <a:solidFill>
-                  <a:srgbClr val="2B2B33"/>
-                </a:solidFill>
-                <a:latin typeface="Calibri" pitchFamily="34" charset="0"/>
-                <a:ea typeface="Calibri" pitchFamily="34" charset="-122"/>
-                <a:cs typeface="Calibri" pitchFamily="34" charset="-120"/>
-              </a:rPr>
-              <a:t>≥ 3 distinct P-wave shapes</a:t>
-            </a:r>
-            <a:endParaRPr lang="en-US" sz="1300" dirty="0"/>
-          </a:p>
-        </p:txBody>
-      </p:sp>
-      <p:sp>
-        <p:nvSpPr>
-          <p:cNvPr id="34" name="Shape 31"/>
-          <p:cNvSpPr/>
-          <p:nvPr/>
-        </p:nvSpPr>
-        <p:spPr>
-          <a:xfrm>
-            <a:off x="5678424" y="4800600"/>
-            <a:ext cx="2322576" cy="1051560"/>
-          </a:xfrm>
-          <a:prstGeom prst="roundRect">
-            <a:avLst>
-              <a:gd name="adj" fmla="val 5217"/>
-            </a:avLst>
-          </a:prstGeom>
-          <a:solidFill>
-            <a:srgbClr val="FFF0F3"/>
-          </a:solidFill>
-          <a:ln w="12700">
-            <a:solidFill>
-              <a:srgbClr val="FBD8DF"/>
-            </a:solidFill>
-            <a:prstDash val="solid"/>
-          </a:ln>
-        </p:spPr>
-      </p:sp>
-      <p:sp>
-        <p:nvSpPr>
-          <p:cNvPr id="35" name="Text 32"/>
-          <p:cNvSpPr/>
-          <p:nvPr/>
-        </p:nvSpPr>
-        <p:spPr>
-          <a:xfrm>
-            <a:off x="5788152" y="4846320"/>
-            <a:ext cx="2066544" cy="960120"/>
-          </a:xfrm>
-          <a:prstGeom prst="rect">
-            <a:avLst/>
-          </a:prstGeom>
-          <a:noFill/>
-          <a:ln/>
-        </p:spPr>
-        <p:txBody>
-          <a:bodyPr wrap="square" lIns="0" tIns="0" rIns="0" bIns="0" rtlCol="0" anchor="ctr"/>
-          <a:lstStyle/>
-          <a:p>
-            <a:pPr algn="l" indent="0" marL="0">
-              <a:lnSpc>
-                <a:spcPct val="108000"/>
-              </a:lnSpc>
-              <a:buNone/>
-            </a:pPr>
-            <a:r>
-              <a:rPr lang="en-US" sz="1300" dirty="0">
-                <a:solidFill>
-                  <a:srgbClr val="2B2B33"/>
-                </a:solidFill>
-                <a:latin typeface="Calibri" pitchFamily="34" charset="0"/>
-                <a:ea typeface="Calibri" pitchFamily="34" charset="-122"/>
-                <a:cs typeface="Calibri" pitchFamily="34" charset="-120"/>
-              </a:rPr>
-              <a:t>Irregular</a:t>
-            </a:r>
-            <a:endParaRPr lang="en-US" sz="1300" dirty="0"/>
-          </a:p>
-        </p:txBody>
-      </p:sp>
-      <p:sp>
-        <p:nvSpPr>
-          <p:cNvPr id="36" name="Shape 33"/>
-          <p:cNvSpPr/>
-          <p:nvPr/>
-        </p:nvSpPr>
-        <p:spPr>
-          <a:xfrm>
-            <a:off x="8055864" y="4800600"/>
-            <a:ext cx="3630168" cy="1051560"/>
-          </a:xfrm>
-          <a:prstGeom prst="roundRect">
-            <a:avLst>
-              <a:gd name="adj" fmla="val 5217"/>
-            </a:avLst>
-          </a:prstGeom>
-          <a:solidFill>
-            <a:srgbClr val="FFF0F3"/>
-          </a:solidFill>
-          <a:ln w="12700">
-            <a:solidFill>
-              <a:srgbClr val="FBD8DF"/>
-            </a:solidFill>
-            <a:prstDash val="solid"/>
-          </a:ln>
-        </p:spPr>
-      </p:sp>
-      <p:sp>
-        <p:nvSpPr>
-          <p:cNvPr id="37" name="Text 34"/>
-          <p:cNvSpPr/>
-          <p:nvPr/>
-        </p:nvSpPr>
-        <p:spPr>
-          <a:xfrm>
-            <a:off x="8165592" y="4846320"/>
-            <a:ext cx="3374136" cy="960120"/>
-          </a:xfrm>
-          <a:prstGeom prst="rect">
-            <a:avLst/>
-          </a:prstGeom>
-          <a:noFill/>
-          <a:ln/>
-        </p:spPr>
-        <p:txBody>
-          <a:bodyPr wrap="square" lIns="0" tIns="0" rIns="0" bIns="0" rtlCol="0" anchor="ctr"/>
-          <a:lstStyle/>
-          <a:p>
-            <a:pPr algn="l" indent="0" marL="0">
-              <a:lnSpc>
-                <a:spcPct val="108000"/>
-              </a:lnSpc>
-              <a:buNone/>
-            </a:pPr>
-            <a:r>
-              <a:rPr lang="en-US" sz="1300" dirty="0">
-                <a:solidFill>
-                  <a:srgbClr val="2B2B33"/>
-                </a:solidFill>
-                <a:latin typeface="Calibri" pitchFamily="34" charset="0"/>
-                <a:ea typeface="Calibri" pitchFamily="34" charset="-122"/>
-                <a:cs typeface="Calibri" pitchFamily="34" charset="-120"/>
-              </a:rPr>
-              <a:t>Discrete varying P waves; COPD</a:t>
-            </a:r>
-            <a:endParaRPr lang="en-US" sz="1300" dirty="0"/>
-          </a:p>
-        </p:txBody>
-      </p:sp>
-      <p:sp>
-        <p:nvSpPr>
-          <p:cNvPr id="38" name="Shape 35"/>
-          <p:cNvSpPr/>
-          <p:nvPr/>
-        </p:nvSpPr>
-        <p:spPr>
-          <a:xfrm>
-            <a:off x="502920" y="5806440"/>
-            <a:ext cx="11183112" cy="457200"/>
-          </a:xfrm>
-          <a:prstGeom prst="roundRect">
-            <a:avLst>
-              <a:gd name="adj" fmla="val 16000"/>
-            </a:avLst>
-          </a:prstGeom>
-          <a:solidFill>
-            <a:srgbClr val="FFF0F3"/>
-          </a:solidFill>
-          <a:ln/>
-        </p:spPr>
-      </p:sp>
-      <p:sp>
-        <p:nvSpPr>
-          <p:cNvPr id="39" name="Text 36"/>
-          <p:cNvSpPr/>
-          <p:nvPr/>
-        </p:nvSpPr>
-        <p:spPr>
-          <a:xfrm>
-            <a:off x="822960" y="5806440"/>
-            <a:ext cx="10607040" cy="457200"/>
-          </a:xfrm>
-          <a:prstGeom prst="rect">
-            <a:avLst/>
-          </a:prstGeom>
-          <a:noFill/>
-          <a:ln/>
-        </p:spPr>
-        <p:txBody>
-          <a:bodyPr wrap="square" rtlCol="0" anchor="ctr"/>
-          <a:lstStyle/>
-          <a:p>
-            <a:pPr algn="l" indent="0" marL="0">
-              <a:buNone/>
-            </a:pPr>
-            <a:r>
-              <a:rPr lang="en-US" sz="1300" b="1" dirty="0">
-                <a:solidFill>
-                  <a:srgbClr val="A4133C"/>
-                </a:solidFill>
-                <a:latin typeface="Calibri" pitchFamily="34" charset="0"/>
-                <a:ea typeface="Calibri" pitchFamily="34" charset="-122"/>
-                <a:cs typeface="Calibri" pitchFamily="34" charset="-120"/>
-              </a:rPr>
-              <a:t>First question:  </a:t>
-            </a:r>
-            <a:pPr algn="l" indent="0" marL="0">
-              <a:buNone/>
-            </a:pPr>
-            <a:r>
-              <a:rPr lang="en-US" sz="1300" dirty="0">
-                <a:solidFill>
-                  <a:srgbClr val="2B2B33"/>
-                </a:solidFill>
-                <a:latin typeface="Calibri" pitchFamily="34" charset="0"/>
-                <a:ea typeface="Calibri" pitchFamily="34" charset="-122"/>
-                <a:cs typeface="Calibri" pitchFamily="34" charset="-120"/>
-              </a:rPr>
-              <a:t>is the rhythm regular or irregular?  Then look at the atrial activity — P waves, flutter waves, or fibrillation.</a:t>
-            </a:r>
-            <a:endParaRPr lang="en-US" sz="1300" dirty="0"/>
-          </a:p>
-        </p:txBody>
-      </p:sp>
-      <p:sp>
-        <p:nvSpPr>
-          <p:cNvPr id="40" name="Text 37"/>
-          <p:cNvSpPr/>
-          <p:nvPr/>
-        </p:nvSpPr>
-        <p:spPr>
-          <a:xfrm>
-            <a:off x="11277295" y="6355080"/>
-            <a:ext cx="548640" cy="320040"/>
-          </a:xfrm>
-          <a:prstGeom prst="rect">
-            <a:avLst/>
-          </a:prstGeom>
-          <a:noFill/>
-          <a:ln/>
-        </p:spPr>
-        <p:txBody>
-          <a:bodyPr wrap="square" rtlCol="0" anchor="t"/>
-          <a:lstStyle/>
-          <a:p>
-            <a:pPr algn="r" indent="0" marL="0">
-              <a:buNone/>
-            </a:pPr>
-            <a:r>
-              <a:rPr lang="en-US" sz="1100" b="1" dirty="0">
-                <a:solidFill>
-                  <a:srgbClr val="6B6B76"/>
-                </a:solidFill>
-                <a:latin typeface="Calibri" pitchFamily="34" charset="0"/>
-                <a:ea typeface="Calibri" pitchFamily="34" charset="-122"/>
-                <a:cs typeface="Calibri" pitchFamily="34" charset="-120"/>
-              </a:rPr>
               <a:t>10</a:t>
             </a:r>
             <a:endParaRPr lang="en-US" sz="1100" dirty="0"/>
@@ -5493,7 +4847,7 @@
       </p:sp>
       <p:sp>
         <p:nvSpPr>
-          <p:cNvPr id="41" name="Text 38"/>
+          <p:cNvPr id="22" name="Text 16"/>
           <p:cNvSpPr/>
           <p:nvPr/>
         </p:nvSpPr>
@@ -5644,7 +4998,7 @@
                 <a:ea typeface="Calibri" pitchFamily="34" charset="-122"/>
                 <a:cs typeface="Calibri" pitchFamily="34" charset="-120"/>
               </a:rPr>
-              <a:t>COMPLICATIONS</a:t>
+              <a:t>RISK STRATIFICATION</a:t>
             </a:r>
             <a:endParaRPr lang="en-US" sz="1250" dirty="0"/>
           </a:p>
@@ -5683,7 +5037,7 @@
                 <a:ea typeface="Cambria" pitchFamily="34" charset="-122"/>
                 <a:cs typeface="Cambria" pitchFamily="34" charset="-120"/>
               </a:rPr>
-              <a:t>Why AF Matters</a:t>
+              <a:t>Stroke &amp; Bleeding Risk</a:t>
             </a:r>
             <a:endParaRPr lang="en-US" sz="3000" dirty="0"/>
           </a:p>
@@ -5697,179 +5051,12 @@
         </p:nvSpPr>
         <p:spPr>
           <a:xfrm>
-            <a:off x="502920" y="1920240"/>
-            <a:ext cx="3611880" cy="4023360"/>
+            <a:off x="502920" y="1828800"/>
+            <a:ext cx="6903720" cy="4206240"/>
           </a:xfrm>
           <a:prstGeom prst="roundRect">
             <a:avLst>
-              <a:gd name="adj" fmla="val 3038"/>
-            </a:avLst>
-          </a:prstGeom>
-          <a:solidFill>
-            <a:srgbClr val="590D22"/>
-          </a:solidFill>
-          <a:ln w="12700">
-            <a:solidFill>
-              <a:srgbClr val="FBD8DF"/>
-            </a:solidFill>
-            <a:prstDash val="solid"/>
-          </a:ln>
-          <a:effectLst>
-            <a:outerShdw sx="100000" sy="100000" kx="0" ky="0" algn="bl" rotWithShape="0" blurRad="127000" dist="50800" dir="5400000">
-              <a:srgbClr val="C9A3AC">
-                <a:alpha val="45000"/>
-              </a:srgbClr>
-            </a:outerShdw>
-          </a:effectLst>
-        </p:spPr>
-      </p:sp>
-      <p:sp>
-        <p:nvSpPr>
-          <p:cNvPr id="7" name="Shape 4"/>
-          <p:cNvSpPr/>
-          <p:nvPr/>
-        </p:nvSpPr>
-        <p:spPr>
-          <a:xfrm>
-            <a:off x="868680" y="2331720"/>
-            <a:ext cx="1051560" cy="1051560"/>
-          </a:xfrm>
-          <a:prstGeom prst="ellipse">
-            <a:avLst/>
-          </a:prstGeom>
-          <a:solidFill>
-            <a:srgbClr val="A4133C"/>
-          </a:solidFill>
-          <a:ln w="12700">
-            <a:solidFill>
-              <a:srgbClr val="FBD8DF"/>
-            </a:solidFill>
-            <a:prstDash val="solid"/>
-          </a:ln>
-        </p:spPr>
-      </p:sp>
-      <p:pic>
-        <p:nvPicPr>
-          <p:cNvPr id="8" name="Image 1" descr="preencoded.png">    </p:cNvPr>
-          <p:cNvPicPr>
-            <a:picLocks noChangeAspect="1"/>
-          </p:cNvPicPr>
-          <p:nvPr/>
-        </p:nvPicPr>
-        <p:blipFill>
-          <a:blip r:embed="rId2"/>
-          <a:stretch>
-            <a:fillRect/>
-          </a:stretch>
-        </p:blipFill>
-        <p:spPr>
-          <a:xfrm>
-            <a:off x="1161288" y="2624328"/>
-            <a:ext cx="466344" cy="466344"/>
-          </a:xfrm>
-          <a:prstGeom prst="rect">
-            <a:avLst/>
-          </a:prstGeom>
-        </p:spPr>
-      </p:pic>
-      <p:sp>
-        <p:nvSpPr>
-          <p:cNvPr id="9" name="Text 5"/>
-          <p:cNvSpPr/>
-          <p:nvPr/>
-        </p:nvSpPr>
-        <p:spPr>
-          <a:xfrm>
-            <a:off x="822960" y="3657600"/>
-            <a:ext cx="3063240" cy="868680"/>
-          </a:xfrm>
-          <a:prstGeom prst="rect">
-            <a:avLst/>
-          </a:prstGeom>
-          <a:noFill/>
-          <a:ln/>
-        </p:spPr>
-        <p:txBody>
-          <a:bodyPr wrap="square" rtlCol="0" anchor="t"/>
-          <a:lstStyle/>
-          <a:p>
-            <a:pPr algn="l" indent="0" marL="0">
-              <a:lnSpc>
-                <a:spcPct val="102000"/>
-              </a:lnSpc>
-              <a:buNone/>
-            </a:pPr>
-            <a:r>
-              <a:rPr lang="en-US" sz="1900" b="1" dirty="0">
-                <a:solidFill>
-                  <a:srgbClr val="FFFFFF"/>
-                </a:solidFill>
-                <a:latin typeface="Cambria" pitchFamily="34" charset="0"/>
-                <a:ea typeface="Cambria" pitchFamily="34" charset="-122"/>
-                <a:cs typeface="Cambria" pitchFamily="34" charset="-120"/>
-              </a:rPr>
-              <a:t>Thromboembolism &amp; Stroke</a:t>
-            </a:r>
-            <a:endParaRPr lang="en-US" sz="1900" dirty="0"/>
-          </a:p>
-        </p:txBody>
-      </p:sp>
-      <p:sp>
-        <p:nvSpPr>
-          <p:cNvPr id="10" name="Text 6"/>
-          <p:cNvSpPr/>
-          <p:nvPr/>
-        </p:nvSpPr>
-        <p:spPr>
-          <a:xfrm>
-            <a:off x="822960" y="4572000"/>
-            <a:ext cx="2971800" cy="1280160"/>
-          </a:xfrm>
-          <a:prstGeom prst="rect">
-            <a:avLst/>
-          </a:prstGeom>
-          <a:noFill/>
-          <a:ln/>
-        </p:spPr>
-        <p:txBody>
-          <a:bodyPr wrap="square" rtlCol="0" anchor="t"/>
-          <a:lstStyle/>
-          <a:p>
-            <a:pPr algn="l" indent="0" marL="0">
-              <a:lnSpc>
-                <a:spcPct val="115000"/>
-              </a:lnSpc>
-              <a:buNone/>
-            </a:pPr>
-            <a:r>
-              <a:rPr lang="en-US" sz="1400" dirty="0">
-                <a:solidFill>
-                  <a:srgbClr val="FBD8DF"/>
-                </a:solidFill>
-                <a:latin typeface="Calibri" pitchFamily="34" charset="0"/>
-                <a:ea typeface="Calibri" pitchFamily="34" charset="-122"/>
-                <a:cs typeface="Calibri" pitchFamily="34" charset="-120"/>
-              </a:rPr>
-              <a:t>Stasis in the left atrial appendage forms thrombi — the leading danger, with ~5× stroke risk</a:t>
-            </a:r>
-            <a:endParaRPr lang="en-US" sz="1400" dirty="0"/>
-          </a:p>
-        </p:txBody>
-      </p:sp>
-      <p:sp>
-        <p:nvSpPr>
-          <p:cNvPr id="11" name="Shape 7"/>
-          <p:cNvSpPr/>
-          <p:nvPr/>
-        </p:nvSpPr>
-        <p:spPr>
-          <a:xfrm>
-            <a:off x="4288536" y="1920240"/>
-            <a:ext cx="3611880" cy="4023360"/>
-          </a:xfrm>
-          <a:prstGeom prst="roundRect">
-            <a:avLst>
-              <a:gd name="adj" fmla="val 3038"/>
+              <a:gd name="adj" fmla="val 2609"/>
             </a:avLst>
           </a:prstGeom>
           <a:solidFill>
@@ -5892,63 +5079,14 @@
       </p:sp>
       <p:sp>
         <p:nvSpPr>
-          <p:cNvPr id="12" name="Shape 8"/>
-          <p:cNvSpPr/>
-          <p:nvPr/>
-        </p:nvSpPr>
-        <p:spPr>
-          <a:xfrm>
-            <a:off x="4654296" y="2331720"/>
-            <a:ext cx="1051560" cy="1051560"/>
-          </a:xfrm>
-          <a:prstGeom prst="ellipse">
-            <a:avLst/>
-          </a:prstGeom>
-          <a:solidFill>
-            <a:srgbClr val="FFFFFF"/>
-          </a:solidFill>
-          <a:ln w="12700">
-            <a:solidFill>
-              <a:srgbClr val="FBD8DF"/>
-            </a:solidFill>
-            <a:prstDash val="solid"/>
-          </a:ln>
-        </p:spPr>
-      </p:sp>
-      <p:pic>
-        <p:nvPicPr>
-          <p:cNvPr id="13" name="Image 2" descr="preencoded.png">    </p:cNvPr>
-          <p:cNvPicPr>
-            <a:picLocks noChangeAspect="1"/>
-          </p:cNvPicPr>
-          <p:nvPr/>
-        </p:nvPicPr>
-        <p:blipFill>
-          <a:blip r:embed="rId3"/>
-          <a:stretch>
-            <a:fillRect/>
-          </a:stretch>
-        </p:blipFill>
-        <p:spPr>
-          <a:xfrm>
-            <a:off x="4946904" y="2624328"/>
-            <a:ext cx="466344" cy="466344"/>
-          </a:xfrm>
-          <a:prstGeom prst="rect">
-            <a:avLst/>
-          </a:prstGeom>
-        </p:spPr>
-      </p:pic>
-      <p:sp>
-        <p:nvSpPr>
-          <p:cNvPr id="14" name="Text 9"/>
-          <p:cNvSpPr/>
-          <p:nvPr/>
-        </p:nvSpPr>
-        <p:spPr>
-          <a:xfrm>
-            <a:off x="4608576" y="3657600"/>
-            <a:ext cx="3063240" cy="868680"/>
+          <p:cNvPr id="7" name="Text 4"/>
+          <p:cNvSpPr/>
+          <p:nvPr/>
+        </p:nvSpPr>
+        <p:spPr>
+          <a:xfrm>
+            <a:off x="822960" y="2057400"/>
+            <a:ext cx="6309360" cy="365760"/>
           </a:xfrm>
           <a:prstGeom prst="rect">
             <a:avLst/>
@@ -5961,93 +5099,1460 @@
           <a:lstStyle/>
           <a:p>
             <a:pPr algn="l" indent="0" marL="0">
-              <a:lnSpc>
-                <a:spcPct val="102000"/>
-              </a:lnSpc>
-              <a:buNone/>
-            </a:pPr>
-            <a:r>
-              <a:rPr lang="en-US" sz="1900" b="1" dirty="0">
-                <a:solidFill>
-                  <a:srgbClr val="2B2B33"/>
+              <a:buNone/>
+            </a:pPr>
+            <a:r>
+              <a:rPr lang="en-US" sz="2000" b="1" dirty="0">
+                <a:solidFill>
+                  <a:srgbClr val="A4133C"/>
                 </a:solidFill>
                 <a:latin typeface="Cambria" pitchFamily="34" charset="0"/>
                 <a:ea typeface="Cambria" pitchFamily="34" charset="-122"/>
                 <a:cs typeface="Cambria" pitchFamily="34" charset="-120"/>
               </a:rPr>
-              <a:t>Heart Failure</a:t>
-            </a:r>
-            <a:endParaRPr lang="en-US" sz="1900" dirty="0"/>
-          </a:p>
-        </p:txBody>
-      </p:sp>
-      <p:sp>
-        <p:nvSpPr>
-          <p:cNvPr id="15" name="Text 10"/>
-          <p:cNvSpPr/>
-          <p:nvPr/>
-        </p:nvSpPr>
-        <p:spPr>
-          <a:xfrm>
-            <a:off x="4608576" y="4572000"/>
-            <a:ext cx="2971800" cy="1280160"/>
-          </a:xfrm>
-          <a:prstGeom prst="rect">
-            <a:avLst/>
-          </a:prstGeom>
-          <a:noFill/>
-          <a:ln/>
-        </p:spPr>
-        <p:txBody>
-          <a:bodyPr wrap="square" rtlCol="0" anchor="t"/>
-          <a:lstStyle/>
-          <a:p>
+              <a:t>CHA</a:t>
+            </a:r>
             <a:pPr algn="l" indent="0" marL="0">
-              <a:lnSpc>
-                <a:spcPct val="115000"/>
-              </a:lnSpc>
-              <a:buNone/>
-            </a:pPr>
-            <a:r>
-              <a:rPr lang="en-US" sz="1400" dirty="0">
+              <a:buNone/>
+            </a:pPr>
+            <a:r>
+              <a:rPr lang="en-US" sz="2000" b="1" dirty="0">
+                <a:solidFill>
+                  <a:srgbClr val="A4133C"/>
+                </a:solidFill>
+                <a:latin typeface="Cambria" pitchFamily="34" charset="0"/>
+                <a:ea typeface="Cambria" pitchFamily="34" charset="-122"/>
+                <a:cs typeface="Cambria" pitchFamily="34" charset="-120"/>
+              </a:rPr>
+              <a:t>₂</a:t>
+            </a:r>
+            <a:pPr algn="l" indent="0" marL="0">
+              <a:buNone/>
+            </a:pPr>
+            <a:r>
+              <a:rPr lang="en-US" sz="2000" b="1" dirty="0">
+                <a:solidFill>
+                  <a:srgbClr val="A4133C"/>
+                </a:solidFill>
+                <a:latin typeface="Cambria" pitchFamily="34" charset="0"/>
+                <a:ea typeface="Cambria" pitchFamily="34" charset="-122"/>
+                <a:cs typeface="Cambria" pitchFamily="34" charset="-120"/>
+              </a:rPr>
+              <a:t>DS</a:t>
+            </a:r>
+            <a:pPr algn="l" indent="0" marL="0">
+              <a:buNone/>
+            </a:pPr>
+            <a:r>
+              <a:rPr lang="en-US" sz="2000" b="1" dirty="0">
+                <a:solidFill>
+                  <a:srgbClr val="A4133C"/>
+                </a:solidFill>
+                <a:latin typeface="Cambria" pitchFamily="34" charset="0"/>
+                <a:ea typeface="Cambria" pitchFamily="34" charset="-122"/>
+                <a:cs typeface="Cambria" pitchFamily="34" charset="-120"/>
+              </a:rPr>
+              <a:t>₂</a:t>
+            </a:r>
+            <a:pPr algn="l" indent="0" marL="0">
+              <a:buNone/>
+            </a:pPr>
+            <a:r>
+              <a:rPr lang="en-US" sz="2000" b="1" dirty="0">
+                <a:solidFill>
+                  <a:srgbClr val="A4133C"/>
+                </a:solidFill>
+                <a:latin typeface="Cambria" pitchFamily="34" charset="0"/>
+                <a:ea typeface="Cambria" pitchFamily="34" charset="-122"/>
+                <a:cs typeface="Cambria" pitchFamily="34" charset="-120"/>
+              </a:rPr>
+              <a:t>-VASc</a:t>
+            </a:r>
+            <a:pPr algn="l" indent="0" marL="0">
+              <a:buNone/>
+            </a:pPr>
+            <a:r>
+              <a:rPr lang="en-US" sz="2000" b="1" dirty="0">
                 <a:solidFill>
                   <a:srgbClr val="6B6B76"/>
+                </a:solidFill>
+                <a:latin typeface="Cambria" pitchFamily="34" charset="0"/>
+                <a:ea typeface="Cambria" pitchFamily="34" charset="-122"/>
+                <a:cs typeface="Cambria" pitchFamily="34" charset="-120"/>
+              </a:rPr>
+              <a:t>   ·  stroke risk</a:t>
+            </a:r>
+            <a:endParaRPr lang="en-US" sz="2000" dirty="0"/>
+          </a:p>
+        </p:txBody>
+      </p:sp>
+      <p:sp>
+        <p:nvSpPr>
+          <p:cNvPr id="8" name="Shape 5"/>
+          <p:cNvSpPr/>
+          <p:nvPr/>
+        </p:nvSpPr>
+        <p:spPr>
+          <a:xfrm>
+            <a:off x="822960" y="2606040"/>
+            <a:ext cx="457200" cy="457200"/>
+          </a:xfrm>
+          <a:prstGeom prst="roundRect">
+            <a:avLst>
+              <a:gd name="adj" fmla="val 20000"/>
+            </a:avLst>
+          </a:prstGeom>
+          <a:solidFill>
+            <a:srgbClr val="A4133C"/>
+          </a:solidFill>
+          <a:ln/>
+        </p:spPr>
+      </p:sp>
+      <p:sp>
+        <p:nvSpPr>
+          <p:cNvPr id="9" name="Text 6"/>
+          <p:cNvSpPr/>
+          <p:nvPr/>
+        </p:nvSpPr>
+        <p:spPr>
+          <a:xfrm>
+            <a:off x="777240" y="2606040"/>
+            <a:ext cx="548640" cy="457200"/>
+          </a:xfrm>
+          <a:prstGeom prst="rect">
+            <a:avLst/>
+          </a:prstGeom>
+          <a:noFill/>
+          <a:ln/>
+        </p:spPr>
+        <p:txBody>
+          <a:bodyPr wrap="square" lIns="0" tIns="0" rIns="0" bIns="0" rtlCol="0" anchor="ctr"/>
+          <a:lstStyle/>
+          <a:p>
+            <a:pPr algn="ctr" indent="0" marL="0">
+              <a:buNone/>
+            </a:pPr>
+            <a:r>
+              <a:rPr lang="en-US" sz="1500" b="1" dirty="0">
+                <a:solidFill>
+                  <a:srgbClr val="FFFFFF"/>
+                </a:solidFill>
+                <a:latin typeface="Cambria" pitchFamily="34" charset="0"/>
+                <a:ea typeface="Cambria" pitchFamily="34" charset="-122"/>
+                <a:cs typeface="Cambria" pitchFamily="34" charset="-120"/>
+              </a:rPr>
+              <a:t>C</a:t>
+            </a:r>
+            <a:endParaRPr lang="en-US" sz="1500" dirty="0"/>
+          </a:p>
+        </p:txBody>
+      </p:sp>
+      <p:sp>
+        <p:nvSpPr>
+          <p:cNvPr id="10" name="Text 7"/>
+          <p:cNvSpPr/>
+          <p:nvPr/>
+        </p:nvSpPr>
+        <p:spPr>
+          <a:xfrm>
+            <a:off x="1417320" y="2606040"/>
+            <a:ext cx="1965960" cy="457200"/>
+          </a:xfrm>
+          <a:prstGeom prst="rect">
+            <a:avLst/>
+          </a:prstGeom>
+          <a:noFill/>
+          <a:ln/>
+        </p:spPr>
+        <p:txBody>
+          <a:bodyPr wrap="square" lIns="0" tIns="0" rIns="0" bIns="0" rtlCol="0" anchor="ctr"/>
+          <a:lstStyle/>
+          <a:p>
+            <a:pPr algn="l" indent="0" marL="0">
+              <a:buNone/>
+            </a:pPr>
+            <a:r>
+              <a:rPr lang="en-US" sz="1350" dirty="0">
+                <a:solidFill>
+                  <a:srgbClr val="2B2B33"/>
                 </a:solidFill>
                 <a:latin typeface="Calibri" pitchFamily="34" charset="0"/>
                 <a:ea typeface="Calibri" pitchFamily="34" charset="-122"/>
                 <a:cs typeface="Calibri" pitchFamily="34" charset="-120"/>
               </a:rPr>
-              <a:t>Loss of atrial kick plus rapid rates reduce cardiac output and worsen existing HF</a:t>
-            </a:r>
-            <a:endParaRPr lang="en-US" sz="1400" dirty="0"/>
-          </a:p>
-        </p:txBody>
-      </p:sp>
-      <p:sp>
-        <p:nvSpPr>
-          <p:cNvPr id="16" name="Shape 11"/>
-          <p:cNvSpPr/>
-          <p:nvPr/>
-        </p:nvSpPr>
-        <p:spPr>
-          <a:xfrm>
-            <a:off x="8074152" y="1920240"/>
-            <a:ext cx="3611880" cy="4023360"/>
+              <a:t>Congestive HF</a:t>
+            </a:r>
+            <a:endParaRPr lang="en-US" sz="1350" dirty="0"/>
+          </a:p>
+        </p:txBody>
+      </p:sp>
+      <p:sp>
+        <p:nvSpPr>
+          <p:cNvPr id="11" name="Shape 8"/>
+          <p:cNvSpPr/>
+          <p:nvPr/>
+        </p:nvSpPr>
+        <p:spPr>
+          <a:xfrm>
+            <a:off x="3337560" y="2670048"/>
+            <a:ext cx="329184" cy="329184"/>
+          </a:xfrm>
+          <a:prstGeom prst="ellipse">
+            <a:avLst/>
+          </a:prstGeom>
+          <a:solidFill>
+            <a:srgbClr val="FBD8DF"/>
+          </a:solidFill>
+          <a:ln/>
+        </p:spPr>
+      </p:sp>
+      <p:sp>
+        <p:nvSpPr>
+          <p:cNvPr id="12" name="Text 9"/>
+          <p:cNvSpPr/>
+          <p:nvPr/>
+        </p:nvSpPr>
+        <p:spPr>
+          <a:xfrm>
+            <a:off x="3337560" y="2670048"/>
+            <a:ext cx="329184" cy="329184"/>
+          </a:xfrm>
+          <a:prstGeom prst="rect">
+            <a:avLst/>
+          </a:prstGeom>
+          <a:noFill/>
+          <a:ln/>
+        </p:spPr>
+        <p:txBody>
+          <a:bodyPr wrap="square" lIns="0" tIns="0" rIns="0" bIns="0" rtlCol="0" anchor="ctr"/>
+          <a:lstStyle/>
+          <a:p>
+            <a:pPr algn="ctr" indent="0" marL="0">
+              <a:buNone/>
+            </a:pPr>
+            <a:r>
+              <a:rPr lang="en-US" sz="1300" b="1" dirty="0">
+                <a:solidFill>
+                  <a:srgbClr val="A4133C"/>
+                </a:solidFill>
+                <a:latin typeface="Calibri" pitchFamily="34" charset="0"/>
+                <a:ea typeface="Calibri" pitchFamily="34" charset="-122"/>
+                <a:cs typeface="Calibri" pitchFamily="34" charset="-120"/>
+              </a:rPr>
+              <a:t>1</a:t>
+            </a:r>
+            <a:endParaRPr lang="en-US" sz="1300" dirty="0"/>
+          </a:p>
+        </p:txBody>
+      </p:sp>
+      <p:sp>
+        <p:nvSpPr>
+          <p:cNvPr id="13" name="Shape 10"/>
+          <p:cNvSpPr/>
+          <p:nvPr/>
+        </p:nvSpPr>
+        <p:spPr>
+          <a:xfrm>
+            <a:off x="4069080" y="2606040"/>
+            <a:ext cx="457200" cy="457200"/>
           </a:xfrm>
           <a:prstGeom prst="roundRect">
             <a:avLst>
-              <a:gd name="adj" fmla="val 3038"/>
+              <a:gd name="adj" fmla="val 20000"/>
             </a:avLst>
           </a:prstGeom>
           <a:solidFill>
-            <a:srgbClr val="FFF0F3"/>
+            <a:srgbClr val="A4133C"/>
           </a:solidFill>
-          <a:ln w="12700">
-            <a:solidFill>
-              <a:srgbClr val="FBD8DF"/>
-            </a:solidFill>
-            <a:prstDash val="solid"/>
-          </a:ln>
+          <a:ln/>
+        </p:spPr>
+      </p:sp>
+      <p:sp>
+        <p:nvSpPr>
+          <p:cNvPr id="14" name="Text 11"/>
+          <p:cNvSpPr/>
+          <p:nvPr/>
+        </p:nvSpPr>
+        <p:spPr>
+          <a:xfrm>
+            <a:off x="4023360" y="2606040"/>
+            <a:ext cx="548640" cy="457200"/>
+          </a:xfrm>
+          <a:prstGeom prst="rect">
+            <a:avLst/>
+          </a:prstGeom>
+          <a:noFill/>
+          <a:ln/>
+        </p:spPr>
+        <p:txBody>
+          <a:bodyPr wrap="square" lIns="0" tIns="0" rIns="0" bIns="0" rtlCol="0" anchor="ctr"/>
+          <a:lstStyle/>
+          <a:p>
+            <a:pPr algn="ctr" indent="0" marL="0">
+              <a:buNone/>
+            </a:pPr>
+            <a:r>
+              <a:rPr lang="en-US" sz="1500" b="1" dirty="0">
+                <a:solidFill>
+                  <a:srgbClr val="FFFFFF"/>
+                </a:solidFill>
+                <a:latin typeface="Cambria" pitchFamily="34" charset="0"/>
+                <a:ea typeface="Cambria" pitchFamily="34" charset="-122"/>
+                <a:cs typeface="Cambria" pitchFamily="34" charset="-120"/>
+              </a:rPr>
+              <a:t>H</a:t>
+            </a:r>
+            <a:endParaRPr lang="en-US" sz="1500" dirty="0"/>
+          </a:p>
+        </p:txBody>
+      </p:sp>
+      <p:sp>
+        <p:nvSpPr>
+          <p:cNvPr id="15" name="Text 12"/>
+          <p:cNvSpPr/>
+          <p:nvPr/>
+        </p:nvSpPr>
+        <p:spPr>
+          <a:xfrm>
+            <a:off x="4663440" y="2606040"/>
+            <a:ext cx="1965960" cy="457200"/>
+          </a:xfrm>
+          <a:prstGeom prst="rect">
+            <a:avLst/>
+          </a:prstGeom>
+          <a:noFill/>
+          <a:ln/>
+        </p:spPr>
+        <p:txBody>
+          <a:bodyPr wrap="square" lIns="0" tIns="0" rIns="0" bIns="0" rtlCol="0" anchor="ctr"/>
+          <a:lstStyle/>
+          <a:p>
+            <a:pPr algn="l" indent="0" marL="0">
+              <a:buNone/>
+            </a:pPr>
+            <a:r>
+              <a:rPr lang="en-US" sz="1350" dirty="0">
+                <a:solidFill>
+                  <a:srgbClr val="2B2B33"/>
+                </a:solidFill>
+                <a:latin typeface="Calibri" pitchFamily="34" charset="0"/>
+                <a:ea typeface="Calibri" pitchFamily="34" charset="-122"/>
+                <a:cs typeface="Calibri" pitchFamily="34" charset="-120"/>
+              </a:rPr>
+              <a:t>Hypertension</a:t>
+            </a:r>
+            <a:endParaRPr lang="en-US" sz="1350" dirty="0"/>
+          </a:p>
+        </p:txBody>
+      </p:sp>
+      <p:sp>
+        <p:nvSpPr>
+          <p:cNvPr id="16" name="Shape 13"/>
+          <p:cNvSpPr/>
+          <p:nvPr/>
+        </p:nvSpPr>
+        <p:spPr>
+          <a:xfrm>
+            <a:off x="6583680" y="2670048"/>
+            <a:ext cx="329184" cy="329184"/>
+          </a:xfrm>
+          <a:prstGeom prst="ellipse">
+            <a:avLst/>
+          </a:prstGeom>
+          <a:solidFill>
+            <a:srgbClr val="FBD8DF"/>
+          </a:solidFill>
+          <a:ln/>
+        </p:spPr>
+      </p:sp>
+      <p:sp>
+        <p:nvSpPr>
+          <p:cNvPr id="17" name="Text 14"/>
+          <p:cNvSpPr/>
+          <p:nvPr/>
+        </p:nvSpPr>
+        <p:spPr>
+          <a:xfrm>
+            <a:off x="6583680" y="2670048"/>
+            <a:ext cx="329184" cy="329184"/>
+          </a:xfrm>
+          <a:prstGeom prst="rect">
+            <a:avLst/>
+          </a:prstGeom>
+          <a:noFill/>
+          <a:ln/>
+        </p:spPr>
+        <p:txBody>
+          <a:bodyPr wrap="square" lIns="0" tIns="0" rIns="0" bIns="0" rtlCol="0" anchor="ctr"/>
+          <a:lstStyle/>
+          <a:p>
+            <a:pPr algn="ctr" indent="0" marL="0">
+              <a:buNone/>
+            </a:pPr>
+            <a:r>
+              <a:rPr lang="en-US" sz="1300" b="1" dirty="0">
+                <a:solidFill>
+                  <a:srgbClr val="A4133C"/>
+                </a:solidFill>
+                <a:latin typeface="Calibri" pitchFamily="34" charset="0"/>
+                <a:ea typeface="Calibri" pitchFamily="34" charset="-122"/>
+                <a:cs typeface="Calibri" pitchFamily="34" charset="-120"/>
+              </a:rPr>
+              <a:t>1</a:t>
+            </a:r>
+            <a:endParaRPr lang="en-US" sz="1300" dirty="0"/>
+          </a:p>
+        </p:txBody>
+      </p:sp>
+      <p:sp>
+        <p:nvSpPr>
+          <p:cNvPr id="18" name="Shape 15"/>
+          <p:cNvSpPr/>
+          <p:nvPr/>
+        </p:nvSpPr>
+        <p:spPr>
+          <a:xfrm>
+            <a:off x="822960" y="3264408"/>
+            <a:ext cx="457200" cy="457200"/>
+          </a:xfrm>
+          <a:prstGeom prst="roundRect">
+            <a:avLst>
+              <a:gd name="adj" fmla="val 20000"/>
+            </a:avLst>
+          </a:prstGeom>
+          <a:solidFill>
+            <a:srgbClr val="A4133C"/>
+          </a:solidFill>
+          <a:ln/>
+        </p:spPr>
+      </p:sp>
+      <p:sp>
+        <p:nvSpPr>
+          <p:cNvPr id="19" name="Text 16"/>
+          <p:cNvSpPr/>
+          <p:nvPr/>
+        </p:nvSpPr>
+        <p:spPr>
+          <a:xfrm>
+            <a:off x="777240" y="3264408"/>
+            <a:ext cx="548640" cy="457200"/>
+          </a:xfrm>
+          <a:prstGeom prst="rect">
+            <a:avLst/>
+          </a:prstGeom>
+          <a:noFill/>
+          <a:ln/>
+        </p:spPr>
+        <p:txBody>
+          <a:bodyPr wrap="square" lIns="0" tIns="0" rIns="0" bIns="0" rtlCol="0" anchor="ctr"/>
+          <a:lstStyle/>
+          <a:p>
+            <a:pPr algn="ctr" indent="0" marL="0">
+              <a:buNone/>
+            </a:pPr>
+            <a:r>
+              <a:rPr lang="en-US" sz="1500" b="1" dirty="0">
+                <a:solidFill>
+                  <a:srgbClr val="FFFFFF"/>
+                </a:solidFill>
+                <a:latin typeface="Cambria" pitchFamily="34" charset="0"/>
+                <a:ea typeface="Cambria" pitchFamily="34" charset="-122"/>
+                <a:cs typeface="Cambria" pitchFamily="34" charset="-120"/>
+              </a:rPr>
+              <a:t>A₂</a:t>
+            </a:r>
+            <a:endParaRPr lang="en-US" sz="1500" dirty="0"/>
+          </a:p>
+        </p:txBody>
+      </p:sp>
+      <p:sp>
+        <p:nvSpPr>
+          <p:cNvPr id="20" name="Text 17"/>
+          <p:cNvSpPr/>
+          <p:nvPr/>
+        </p:nvSpPr>
+        <p:spPr>
+          <a:xfrm>
+            <a:off x="1417320" y="3264408"/>
+            <a:ext cx="1965960" cy="457200"/>
+          </a:xfrm>
+          <a:prstGeom prst="rect">
+            <a:avLst/>
+          </a:prstGeom>
+          <a:noFill/>
+          <a:ln/>
+        </p:spPr>
+        <p:txBody>
+          <a:bodyPr wrap="square" lIns="0" tIns="0" rIns="0" bIns="0" rtlCol="0" anchor="ctr"/>
+          <a:lstStyle/>
+          <a:p>
+            <a:pPr algn="l" indent="0" marL="0">
+              <a:buNone/>
+            </a:pPr>
+            <a:r>
+              <a:rPr lang="en-US" sz="1350" dirty="0">
+                <a:solidFill>
+                  <a:srgbClr val="2B2B33"/>
+                </a:solidFill>
+                <a:latin typeface="Calibri" pitchFamily="34" charset="0"/>
+                <a:ea typeface="Calibri" pitchFamily="34" charset="-122"/>
+                <a:cs typeface="Calibri" pitchFamily="34" charset="-120"/>
+              </a:rPr>
+              <a:t>Age ≥ 75</a:t>
+            </a:r>
+            <a:endParaRPr lang="en-US" sz="1350" dirty="0"/>
+          </a:p>
+        </p:txBody>
+      </p:sp>
+      <p:sp>
+        <p:nvSpPr>
+          <p:cNvPr id="21" name="Shape 18"/>
+          <p:cNvSpPr/>
+          <p:nvPr/>
+        </p:nvSpPr>
+        <p:spPr>
+          <a:xfrm>
+            <a:off x="3337560" y="3328416"/>
+            <a:ext cx="329184" cy="329184"/>
+          </a:xfrm>
+          <a:prstGeom prst="ellipse">
+            <a:avLst/>
+          </a:prstGeom>
+          <a:solidFill>
+            <a:srgbClr val="FBD8DF"/>
+          </a:solidFill>
+          <a:ln/>
+        </p:spPr>
+      </p:sp>
+      <p:sp>
+        <p:nvSpPr>
+          <p:cNvPr id="22" name="Text 19"/>
+          <p:cNvSpPr/>
+          <p:nvPr/>
+        </p:nvSpPr>
+        <p:spPr>
+          <a:xfrm>
+            <a:off x="3337560" y="3328416"/>
+            <a:ext cx="329184" cy="329184"/>
+          </a:xfrm>
+          <a:prstGeom prst="rect">
+            <a:avLst/>
+          </a:prstGeom>
+          <a:noFill/>
+          <a:ln/>
+        </p:spPr>
+        <p:txBody>
+          <a:bodyPr wrap="square" lIns="0" tIns="0" rIns="0" bIns="0" rtlCol="0" anchor="ctr"/>
+          <a:lstStyle/>
+          <a:p>
+            <a:pPr algn="ctr" indent="0" marL="0">
+              <a:buNone/>
+            </a:pPr>
+            <a:r>
+              <a:rPr lang="en-US" sz="1300" b="1" dirty="0">
+                <a:solidFill>
+                  <a:srgbClr val="A4133C"/>
+                </a:solidFill>
+                <a:latin typeface="Calibri" pitchFamily="34" charset="0"/>
+                <a:ea typeface="Calibri" pitchFamily="34" charset="-122"/>
+                <a:cs typeface="Calibri" pitchFamily="34" charset="-120"/>
+              </a:rPr>
+              <a:t>2</a:t>
+            </a:r>
+            <a:endParaRPr lang="en-US" sz="1300" dirty="0"/>
+          </a:p>
+        </p:txBody>
+      </p:sp>
+      <p:sp>
+        <p:nvSpPr>
+          <p:cNvPr id="23" name="Shape 20"/>
+          <p:cNvSpPr/>
+          <p:nvPr/>
+        </p:nvSpPr>
+        <p:spPr>
+          <a:xfrm>
+            <a:off x="4069080" y="3264408"/>
+            <a:ext cx="457200" cy="457200"/>
+          </a:xfrm>
+          <a:prstGeom prst="roundRect">
+            <a:avLst>
+              <a:gd name="adj" fmla="val 20000"/>
+            </a:avLst>
+          </a:prstGeom>
+          <a:solidFill>
+            <a:srgbClr val="A4133C"/>
+          </a:solidFill>
+          <a:ln/>
+        </p:spPr>
+      </p:sp>
+      <p:sp>
+        <p:nvSpPr>
+          <p:cNvPr id="24" name="Text 21"/>
+          <p:cNvSpPr/>
+          <p:nvPr/>
+        </p:nvSpPr>
+        <p:spPr>
+          <a:xfrm>
+            <a:off x="4023360" y="3264408"/>
+            <a:ext cx="548640" cy="457200"/>
+          </a:xfrm>
+          <a:prstGeom prst="rect">
+            <a:avLst/>
+          </a:prstGeom>
+          <a:noFill/>
+          <a:ln/>
+        </p:spPr>
+        <p:txBody>
+          <a:bodyPr wrap="square" lIns="0" tIns="0" rIns="0" bIns="0" rtlCol="0" anchor="ctr"/>
+          <a:lstStyle/>
+          <a:p>
+            <a:pPr algn="ctr" indent="0" marL="0">
+              <a:buNone/>
+            </a:pPr>
+            <a:r>
+              <a:rPr lang="en-US" sz="1500" b="1" dirty="0">
+                <a:solidFill>
+                  <a:srgbClr val="FFFFFF"/>
+                </a:solidFill>
+                <a:latin typeface="Cambria" pitchFamily="34" charset="0"/>
+                <a:ea typeface="Cambria" pitchFamily="34" charset="-122"/>
+                <a:cs typeface="Cambria" pitchFamily="34" charset="-120"/>
+              </a:rPr>
+              <a:t>D</a:t>
+            </a:r>
+            <a:endParaRPr lang="en-US" sz="1500" dirty="0"/>
+          </a:p>
+        </p:txBody>
+      </p:sp>
+      <p:sp>
+        <p:nvSpPr>
+          <p:cNvPr id="25" name="Text 22"/>
+          <p:cNvSpPr/>
+          <p:nvPr/>
+        </p:nvSpPr>
+        <p:spPr>
+          <a:xfrm>
+            <a:off x="4663440" y="3264408"/>
+            <a:ext cx="1965960" cy="457200"/>
+          </a:xfrm>
+          <a:prstGeom prst="rect">
+            <a:avLst/>
+          </a:prstGeom>
+          <a:noFill/>
+          <a:ln/>
+        </p:spPr>
+        <p:txBody>
+          <a:bodyPr wrap="square" lIns="0" tIns="0" rIns="0" bIns="0" rtlCol="0" anchor="ctr"/>
+          <a:lstStyle/>
+          <a:p>
+            <a:pPr algn="l" indent="0" marL="0">
+              <a:buNone/>
+            </a:pPr>
+            <a:r>
+              <a:rPr lang="en-US" sz="1350" dirty="0">
+                <a:solidFill>
+                  <a:srgbClr val="2B2B33"/>
+                </a:solidFill>
+                <a:latin typeface="Calibri" pitchFamily="34" charset="0"/>
+                <a:ea typeface="Calibri" pitchFamily="34" charset="-122"/>
+                <a:cs typeface="Calibri" pitchFamily="34" charset="-120"/>
+              </a:rPr>
+              <a:t>Diabetes</a:t>
+            </a:r>
+            <a:endParaRPr lang="en-US" sz="1350" dirty="0"/>
+          </a:p>
+        </p:txBody>
+      </p:sp>
+      <p:sp>
+        <p:nvSpPr>
+          <p:cNvPr id="26" name="Shape 23"/>
+          <p:cNvSpPr/>
+          <p:nvPr/>
+        </p:nvSpPr>
+        <p:spPr>
+          <a:xfrm>
+            <a:off x="6583680" y="3328416"/>
+            <a:ext cx="329184" cy="329184"/>
+          </a:xfrm>
+          <a:prstGeom prst="ellipse">
+            <a:avLst/>
+          </a:prstGeom>
+          <a:solidFill>
+            <a:srgbClr val="FBD8DF"/>
+          </a:solidFill>
+          <a:ln/>
+        </p:spPr>
+      </p:sp>
+      <p:sp>
+        <p:nvSpPr>
+          <p:cNvPr id="27" name="Text 24"/>
+          <p:cNvSpPr/>
+          <p:nvPr/>
+        </p:nvSpPr>
+        <p:spPr>
+          <a:xfrm>
+            <a:off x="6583680" y="3328416"/>
+            <a:ext cx="329184" cy="329184"/>
+          </a:xfrm>
+          <a:prstGeom prst="rect">
+            <a:avLst/>
+          </a:prstGeom>
+          <a:noFill/>
+          <a:ln/>
+        </p:spPr>
+        <p:txBody>
+          <a:bodyPr wrap="square" lIns="0" tIns="0" rIns="0" bIns="0" rtlCol="0" anchor="ctr"/>
+          <a:lstStyle/>
+          <a:p>
+            <a:pPr algn="ctr" indent="0" marL="0">
+              <a:buNone/>
+            </a:pPr>
+            <a:r>
+              <a:rPr lang="en-US" sz="1300" b="1" dirty="0">
+                <a:solidFill>
+                  <a:srgbClr val="A4133C"/>
+                </a:solidFill>
+                <a:latin typeface="Calibri" pitchFamily="34" charset="0"/>
+                <a:ea typeface="Calibri" pitchFamily="34" charset="-122"/>
+                <a:cs typeface="Calibri" pitchFamily="34" charset="-120"/>
+              </a:rPr>
+              <a:t>1</a:t>
+            </a:r>
+            <a:endParaRPr lang="en-US" sz="1300" dirty="0"/>
+          </a:p>
+        </p:txBody>
+      </p:sp>
+      <p:sp>
+        <p:nvSpPr>
+          <p:cNvPr id="28" name="Shape 25"/>
+          <p:cNvSpPr/>
+          <p:nvPr/>
+        </p:nvSpPr>
+        <p:spPr>
+          <a:xfrm>
+            <a:off x="822960" y="3922776"/>
+            <a:ext cx="457200" cy="457200"/>
+          </a:xfrm>
+          <a:prstGeom prst="roundRect">
+            <a:avLst>
+              <a:gd name="adj" fmla="val 20000"/>
+            </a:avLst>
+          </a:prstGeom>
+          <a:solidFill>
+            <a:srgbClr val="A4133C"/>
+          </a:solidFill>
+          <a:ln/>
+        </p:spPr>
+      </p:sp>
+      <p:sp>
+        <p:nvSpPr>
+          <p:cNvPr id="29" name="Text 26"/>
+          <p:cNvSpPr/>
+          <p:nvPr/>
+        </p:nvSpPr>
+        <p:spPr>
+          <a:xfrm>
+            <a:off x="777240" y="3922776"/>
+            <a:ext cx="548640" cy="457200"/>
+          </a:xfrm>
+          <a:prstGeom prst="rect">
+            <a:avLst/>
+          </a:prstGeom>
+          <a:noFill/>
+          <a:ln/>
+        </p:spPr>
+        <p:txBody>
+          <a:bodyPr wrap="square" lIns="0" tIns="0" rIns="0" bIns="0" rtlCol="0" anchor="ctr"/>
+          <a:lstStyle/>
+          <a:p>
+            <a:pPr algn="ctr" indent="0" marL="0">
+              <a:buNone/>
+            </a:pPr>
+            <a:r>
+              <a:rPr lang="en-US" sz="1500" b="1" dirty="0">
+                <a:solidFill>
+                  <a:srgbClr val="FFFFFF"/>
+                </a:solidFill>
+                <a:latin typeface="Cambria" pitchFamily="34" charset="0"/>
+                <a:ea typeface="Cambria" pitchFamily="34" charset="-122"/>
+                <a:cs typeface="Cambria" pitchFamily="34" charset="-120"/>
+              </a:rPr>
+              <a:t>S₂</a:t>
+            </a:r>
+            <a:endParaRPr lang="en-US" sz="1500" dirty="0"/>
+          </a:p>
+        </p:txBody>
+      </p:sp>
+      <p:sp>
+        <p:nvSpPr>
+          <p:cNvPr id="30" name="Text 27"/>
+          <p:cNvSpPr/>
+          <p:nvPr/>
+        </p:nvSpPr>
+        <p:spPr>
+          <a:xfrm>
+            <a:off x="1417320" y="3922776"/>
+            <a:ext cx="1965960" cy="457200"/>
+          </a:xfrm>
+          <a:prstGeom prst="rect">
+            <a:avLst/>
+          </a:prstGeom>
+          <a:noFill/>
+          <a:ln/>
+        </p:spPr>
+        <p:txBody>
+          <a:bodyPr wrap="square" lIns="0" tIns="0" rIns="0" bIns="0" rtlCol="0" anchor="ctr"/>
+          <a:lstStyle/>
+          <a:p>
+            <a:pPr algn="l" indent="0" marL="0">
+              <a:buNone/>
+            </a:pPr>
+            <a:r>
+              <a:rPr lang="en-US" sz="1350" dirty="0">
+                <a:solidFill>
+                  <a:srgbClr val="2B2B33"/>
+                </a:solidFill>
+                <a:latin typeface="Calibri" pitchFamily="34" charset="0"/>
+                <a:ea typeface="Calibri" pitchFamily="34" charset="-122"/>
+                <a:cs typeface="Calibri" pitchFamily="34" charset="-120"/>
+              </a:rPr>
+              <a:t>Prior stroke / TIA</a:t>
+            </a:r>
+            <a:endParaRPr lang="en-US" sz="1350" dirty="0"/>
+          </a:p>
+        </p:txBody>
+      </p:sp>
+      <p:sp>
+        <p:nvSpPr>
+          <p:cNvPr id="31" name="Shape 28"/>
+          <p:cNvSpPr/>
+          <p:nvPr/>
+        </p:nvSpPr>
+        <p:spPr>
+          <a:xfrm>
+            <a:off x="3337560" y="3986784"/>
+            <a:ext cx="329184" cy="329184"/>
+          </a:xfrm>
+          <a:prstGeom prst="ellipse">
+            <a:avLst/>
+          </a:prstGeom>
+          <a:solidFill>
+            <a:srgbClr val="FBD8DF"/>
+          </a:solidFill>
+          <a:ln/>
+        </p:spPr>
+      </p:sp>
+      <p:sp>
+        <p:nvSpPr>
+          <p:cNvPr id="32" name="Text 29"/>
+          <p:cNvSpPr/>
+          <p:nvPr/>
+        </p:nvSpPr>
+        <p:spPr>
+          <a:xfrm>
+            <a:off x="3337560" y="3986784"/>
+            <a:ext cx="329184" cy="329184"/>
+          </a:xfrm>
+          <a:prstGeom prst="rect">
+            <a:avLst/>
+          </a:prstGeom>
+          <a:noFill/>
+          <a:ln/>
+        </p:spPr>
+        <p:txBody>
+          <a:bodyPr wrap="square" lIns="0" tIns="0" rIns="0" bIns="0" rtlCol="0" anchor="ctr"/>
+          <a:lstStyle/>
+          <a:p>
+            <a:pPr algn="ctr" indent="0" marL="0">
+              <a:buNone/>
+            </a:pPr>
+            <a:r>
+              <a:rPr lang="en-US" sz="1300" b="1" dirty="0">
+                <a:solidFill>
+                  <a:srgbClr val="A4133C"/>
+                </a:solidFill>
+                <a:latin typeface="Calibri" pitchFamily="34" charset="0"/>
+                <a:ea typeface="Calibri" pitchFamily="34" charset="-122"/>
+                <a:cs typeface="Calibri" pitchFamily="34" charset="-120"/>
+              </a:rPr>
+              <a:t>2</a:t>
+            </a:r>
+            <a:endParaRPr lang="en-US" sz="1300" dirty="0"/>
+          </a:p>
+        </p:txBody>
+      </p:sp>
+      <p:sp>
+        <p:nvSpPr>
+          <p:cNvPr id="33" name="Shape 30"/>
+          <p:cNvSpPr/>
+          <p:nvPr/>
+        </p:nvSpPr>
+        <p:spPr>
+          <a:xfrm>
+            <a:off x="4069080" y="3922776"/>
+            <a:ext cx="457200" cy="457200"/>
+          </a:xfrm>
+          <a:prstGeom prst="roundRect">
+            <a:avLst>
+              <a:gd name="adj" fmla="val 20000"/>
+            </a:avLst>
+          </a:prstGeom>
+          <a:solidFill>
+            <a:srgbClr val="A4133C"/>
+          </a:solidFill>
+          <a:ln/>
+        </p:spPr>
+      </p:sp>
+      <p:sp>
+        <p:nvSpPr>
+          <p:cNvPr id="34" name="Text 31"/>
+          <p:cNvSpPr/>
+          <p:nvPr/>
+        </p:nvSpPr>
+        <p:spPr>
+          <a:xfrm>
+            <a:off x="4023360" y="3922776"/>
+            <a:ext cx="548640" cy="457200"/>
+          </a:xfrm>
+          <a:prstGeom prst="rect">
+            <a:avLst/>
+          </a:prstGeom>
+          <a:noFill/>
+          <a:ln/>
+        </p:spPr>
+        <p:txBody>
+          <a:bodyPr wrap="square" lIns="0" tIns="0" rIns="0" bIns="0" rtlCol="0" anchor="ctr"/>
+          <a:lstStyle/>
+          <a:p>
+            <a:pPr algn="ctr" indent="0" marL="0">
+              <a:buNone/>
+            </a:pPr>
+            <a:r>
+              <a:rPr lang="en-US" sz="1500" b="1" dirty="0">
+                <a:solidFill>
+                  <a:srgbClr val="FFFFFF"/>
+                </a:solidFill>
+                <a:latin typeface="Cambria" pitchFamily="34" charset="0"/>
+                <a:ea typeface="Cambria" pitchFamily="34" charset="-122"/>
+                <a:cs typeface="Cambria" pitchFamily="34" charset="-120"/>
+              </a:rPr>
+              <a:t>V</a:t>
+            </a:r>
+            <a:endParaRPr lang="en-US" sz="1500" dirty="0"/>
+          </a:p>
+        </p:txBody>
+      </p:sp>
+      <p:sp>
+        <p:nvSpPr>
+          <p:cNvPr id="35" name="Text 32"/>
+          <p:cNvSpPr/>
+          <p:nvPr/>
+        </p:nvSpPr>
+        <p:spPr>
+          <a:xfrm>
+            <a:off x="4663440" y="3922776"/>
+            <a:ext cx="1965960" cy="457200"/>
+          </a:xfrm>
+          <a:prstGeom prst="rect">
+            <a:avLst/>
+          </a:prstGeom>
+          <a:noFill/>
+          <a:ln/>
+        </p:spPr>
+        <p:txBody>
+          <a:bodyPr wrap="square" lIns="0" tIns="0" rIns="0" bIns="0" rtlCol="0" anchor="ctr"/>
+          <a:lstStyle/>
+          <a:p>
+            <a:pPr algn="l" indent="0" marL="0">
+              <a:buNone/>
+            </a:pPr>
+            <a:r>
+              <a:rPr lang="en-US" sz="1350" dirty="0">
+                <a:solidFill>
+                  <a:srgbClr val="2B2B33"/>
+                </a:solidFill>
+                <a:latin typeface="Calibri" pitchFamily="34" charset="0"/>
+                <a:ea typeface="Calibri" pitchFamily="34" charset="-122"/>
+                <a:cs typeface="Calibri" pitchFamily="34" charset="-120"/>
+              </a:rPr>
+              <a:t>Vascular disease</a:t>
+            </a:r>
+            <a:endParaRPr lang="en-US" sz="1350" dirty="0"/>
+          </a:p>
+        </p:txBody>
+      </p:sp>
+      <p:sp>
+        <p:nvSpPr>
+          <p:cNvPr id="36" name="Shape 33"/>
+          <p:cNvSpPr/>
+          <p:nvPr/>
+        </p:nvSpPr>
+        <p:spPr>
+          <a:xfrm>
+            <a:off x="6583680" y="3986784"/>
+            <a:ext cx="329184" cy="329184"/>
+          </a:xfrm>
+          <a:prstGeom prst="ellipse">
+            <a:avLst/>
+          </a:prstGeom>
+          <a:solidFill>
+            <a:srgbClr val="FBD8DF"/>
+          </a:solidFill>
+          <a:ln/>
+        </p:spPr>
+      </p:sp>
+      <p:sp>
+        <p:nvSpPr>
+          <p:cNvPr id="37" name="Text 34"/>
+          <p:cNvSpPr/>
+          <p:nvPr/>
+        </p:nvSpPr>
+        <p:spPr>
+          <a:xfrm>
+            <a:off x="6583680" y="3986784"/>
+            <a:ext cx="329184" cy="329184"/>
+          </a:xfrm>
+          <a:prstGeom prst="rect">
+            <a:avLst/>
+          </a:prstGeom>
+          <a:noFill/>
+          <a:ln/>
+        </p:spPr>
+        <p:txBody>
+          <a:bodyPr wrap="square" lIns="0" tIns="0" rIns="0" bIns="0" rtlCol="0" anchor="ctr"/>
+          <a:lstStyle/>
+          <a:p>
+            <a:pPr algn="ctr" indent="0" marL="0">
+              <a:buNone/>
+            </a:pPr>
+            <a:r>
+              <a:rPr lang="en-US" sz="1300" b="1" dirty="0">
+                <a:solidFill>
+                  <a:srgbClr val="A4133C"/>
+                </a:solidFill>
+                <a:latin typeface="Calibri" pitchFamily="34" charset="0"/>
+                <a:ea typeface="Calibri" pitchFamily="34" charset="-122"/>
+                <a:cs typeface="Calibri" pitchFamily="34" charset="-120"/>
+              </a:rPr>
+              <a:t>1</a:t>
+            </a:r>
+            <a:endParaRPr lang="en-US" sz="1300" dirty="0"/>
+          </a:p>
+        </p:txBody>
+      </p:sp>
+      <p:sp>
+        <p:nvSpPr>
+          <p:cNvPr id="38" name="Shape 35"/>
+          <p:cNvSpPr/>
+          <p:nvPr/>
+        </p:nvSpPr>
+        <p:spPr>
+          <a:xfrm>
+            <a:off x="822960" y="4581144"/>
+            <a:ext cx="457200" cy="457200"/>
+          </a:xfrm>
+          <a:prstGeom prst="roundRect">
+            <a:avLst>
+              <a:gd name="adj" fmla="val 20000"/>
+            </a:avLst>
+          </a:prstGeom>
+          <a:solidFill>
+            <a:srgbClr val="A4133C"/>
+          </a:solidFill>
+          <a:ln/>
+        </p:spPr>
+      </p:sp>
+      <p:sp>
+        <p:nvSpPr>
+          <p:cNvPr id="39" name="Text 36"/>
+          <p:cNvSpPr/>
+          <p:nvPr/>
+        </p:nvSpPr>
+        <p:spPr>
+          <a:xfrm>
+            <a:off x="777240" y="4581144"/>
+            <a:ext cx="548640" cy="457200"/>
+          </a:xfrm>
+          <a:prstGeom prst="rect">
+            <a:avLst/>
+          </a:prstGeom>
+          <a:noFill/>
+          <a:ln/>
+        </p:spPr>
+        <p:txBody>
+          <a:bodyPr wrap="square" lIns="0" tIns="0" rIns="0" bIns="0" rtlCol="0" anchor="ctr"/>
+          <a:lstStyle/>
+          <a:p>
+            <a:pPr algn="ctr" indent="0" marL="0">
+              <a:buNone/>
+            </a:pPr>
+            <a:r>
+              <a:rPr lang="en-US" sz="1500" b="1" dirty="0">
+                <a:solidFill>
+                  <a:srgbClr val="FFFFFF"/>
+                </a:solidFill>
+                <a:latin typeface="Cambria" pitchFamily="34" charset="0"/>
+                <a:ea typeface="Cambria" pitchFamily="34" charset="-122"/>
+                <a:cs typeface="Cambria" pitchFamily="34" charset="-120"/>
+              </a:rPr>
+              <a:t>A</a:t>
+            </a:r>
+            <a:endParaRPr lang="en-US" sz="1500" dirty="0"/>
+          </a:p>
+        </p:txBody>
+      </p:sp>
+      <p:sp>
+        <p:nvSpPr>
+          <p:cNvPr id="40" name="Text 37"/>
+          <p:cNvSpPr/>
+          <p:nvPr/>
+        </p:nvSpPr>
+        <p:spPr>
+          <a:xfrm>
+            <a:off x="1417320" y="4581144"/>
+            <a:ext cx="1965960" cy="457200"/>
+          </a:xfrm>
+          <a:prstGeom prst="rect">
+            <a:avLst/>
+          </a:prstGeom>
+          <a:noFill/>
+          <a:ln/>
+        </p:spPr>
+        <p:txBody>
+          <a:bodyPr wrap="square" lIns="0" tIns="0" rIns="0" bIns="0" rtlCol="0" anchor="ctr"/>
+          <a:lstStyle/>
+          <a:p>
+            <a:pPr algn="l" indent="0" marL="0">
+              <a:buNone/>
+            </a:pPr>
+            <a:r>
+              <a:rPr lang="en-US" sz="1350" dirty="0">
+                <a:solidFill>
+                  <a:srgbClr val="2B2B33"/>
+                </a:solidFill>
+                <a:latin typeface="Calibri" pitchFamily="34" charset="0"/>
+                <a:ea typeface="Calibri" pitchFamily="34" charset="-122"/>
+                <a:cs typeface="Calibri" pitchFamily="34" charset="-120"/>
+              </a:rPr>
+              <a:t>Age 65–74</a:t>
+            </a:r>
+            <a:endParaRPr lang="en-US" sz="1350" dirty="0"/>
+          </a:p>
+        </p:txBody>
+      </p:sp>
+      <p:sp>
+        <p:nvSpPr>
+          <p:cNvPr id="41" name="Shape 38"/>
+          <p:cNvSpPr/>
+          <p:nvPr/>
+        </p:nvSpPr>
+        <p:spPr>
+          <a:xfrm>
+            <a:off x="3337560" y="4645152"/>
+            <a:ext cx="329184" cy="329184"/>
+          </a:xfrm>
+          <a:prstGeom prst="ellipse">
+            <a:avLst/>
+          </a:prstGeom>
+          <a:solidFill>
+            <a:srgbClr val="FBD8DF"/>
+          </a:solidFill>
+          <a:ln/>
+        </p:spPr>
+      </p:sp>
+      <p:sp>
+        <p:nvSpPr>
+          <p:cNvPr id="42" name="Text 39"/>
+          <p:cNvSpPr/>
+          <p:nvPr/>
+        </p:nvSpPr>
+        <p:spPr>
+          <a:xfrm>
+            <a:off x="3337560" y="4645152"/>
+            <a:ext cx="329184" cy="329184"/>
+          </a:xfrm>
+          <a:prstGeom prst="rect">
+            <a:avLst/>
+          </a:prstGeom>
+          <a:noFill/>
+          <a:ln/>
+        </p:spPr>
+        <p:txBody>
+          <a:bodyPr wrap="square" lIns="0" tIns="0" rIns="0" bIns="0" rtlCol="0" anchor="ctr"/>
+          <a:lstStyle/>
+          <a:p>
+            <a:pPr algn="ctr" indent="0" marL="0">
+              <a:buNone/>
+            </a:pPr>
+            <a:r>
+              <a:rPr lang="en-US" sz="1300" b="1" dirty="0">
+                <a:solidFill>
+                  <a:srgbClr val="A4133C"/>
+                </a:solidFill>
+                <a:latin typeface="Calibri" pitchFamily="34" charset="0"/>
+                <a:ea typeface="Calibri" pitchFamily="34" charset="-122"/>
+                <a:cs typeface="Calibri" pitchFamily="34" charset="-120"/>
+              </a:rPr>
+              <a:t>1</a:t>
+            </a:r>
+            <a:endParaRPr lang="en-US" sz="1300" dirty="0"/>
+          </a:p>
+        </p:txBody>
+      </p:sp>
+      <p:sp>
+        <p:nvSpPr>
+          <p:cNvPr id="43" name="Shape 40"/>
+          <p:cNvSpPr/>
+          <p:nvPr/>
+        </p:nvSpPr>
+        <p:spPr>
+          <a:xfrm>
+            <a:off x="4069080" y="4581144"/>
+            <a:ext cx="457200" cy="457200"/>
+          </a:xfrm>
+          <a:prstGeom prst="roundRect">
+            <a:avLst>
+              <a:gd name="adj" fmla="val 20000"/>
+            </a:avLst>
+          </a:prstGeom>
+          <a:solidFill>
+            <a:srgbClr val="A4133C"/>
+          </a:solidFill>
+          <a:ln/>
+        </p:spPr>
+      </p:sp>
+      <p:sp>
+        <p:nvSpPr>
+          <p:cNvPr id="44" name="Text 41"/>
+          <p:cNvSpPr/>
+          <p:nvPr/>
+        </p:nvSpPr>
+        <p:spPr>
+          <a:xfrm>
+            <a:off x="4023360" y="4581144"/>
+            <a:ext cx="548640" cy="457200"/>
+          </a:xfrm>
+          <a:prstGeom prst="rect">
+            <a:avLst/>
+          </a:prstGeom>
+          <a:noFill/>
+          <a:ln/>
+        </p:spPr>
+        <p:txBody>
+          <a:bodyPr wrap="square" lIns="0" tIns="0" rIns="0" bIns="0" rtlCol="0" anchor="ctr"/>
+          <a:lstStyle/>
+          <a:p>
+            <a:pPr algn="ctr" indent="0" marL="0">
+              <a:buNone/>
+            </a:pPr>
+            <a:r>
+              <a:rPr lang="en-US" sz="1500" b="1" dirty="0">
+                <a:solidFill>
+                  <a:srgbClr val="FFFFFF"/>
+                </a:solidFill>
+                <a:latin typeface="Cambria" pitchFamily="34" charset="0"/>
+                <a:ea typeface="Cambria" pitchFamily="34" charset="-122"/>
+                <a:cs typeface="Cambria" pitchFamily="34" charset="-120"/>
+              </a:rPr>
+              <a:t>Sc</a:t>
+            </a:r>
+            <a:endParaRPr lang="en-US" sz="1500" dirty="0"/>
+          </a:p>
+        </p:txBody>
+      </p:sp>
+      <p:sp>
+        <p:nvSpPr>
+          <p:cNvPr id="45" name="Text 42"/>
+          <p:cNvSpPr/>
+          <p:nvPr/>
+        </p:nvSpPr>
+        <p:spPr>
+          <a:xfrm>
+            <a:off x="4663440" y="4581144"/>
+            <a:ext cx="1965960" cy="457200"/>
+          </a:xfrm>
+          <a:prstGeom prst="rect">
+            <a:avLst/>
+          </a:prstGeom>
+          <a:noFill/>
+          <a:ln/>
+        </p:spPr>
+        <p:txBody>
+          <a:bodyPr wrap="square" lIns="0" tIns="0" rIns="0" bIns="0" rtlCol="0" anchor="ctr"/>
+          <a:lstStyle/>
+          <a:p>
+            <a:pPr algn="l" indent="0" marL="0">
+              <a:buNone/>
+            </a:pPr>
+            <a:r>
+              <a:rPr lang="en-US" sz="1350" dirty="0">
+                <a:solidFill>
+                  <a:srgbClr val="2B2B33"/>
+                </a:solidFill>
+                <a:latin typeface="Calibri" pitchFamily="34" charset="0"/>
+                <a:ea typeface="Calibri" pitchFamily="34" charset="-122"/>
+                <a:cs typeface="Calibri" pitchFamily="34" charset="-120"/>
+              </a:rPr>
+              <a:t>Sex (female)</a:t>
+            </a:r>
+            <a:endParaRPr lang="en-US" sz="1350" dirty="0"/>
+          </a:p>
+        </p:txBody>
+      </p:sp>
+      <p:sp>
+        <p:nvSpPr>
+          <p:cNvPr id="46" name="Shape 43"/>
+          <p:cNvSpPr/>
+          <p:nvPr/>
+        </p:nvSpPr>
+        <p:spPr>
+          <a:xfrm>
+            <a:off x="6583680" y="4645152"/>
+            <a:ext cx="329184" cy="329184"/>
+          </a:xfrm>
+          <a:prstGeom prst="ellipse">
+            <a:avLst/>
+          </a:prstGeom>
+          <a:solidFill>
+            <a:srgbClr val="FBD8DF"/>
+          </a:solidFill>
+          <a:ln/>
+        </p:spPr>
+      </p:sp>
+      <p:sp>
+        <p:nvSpPr>
+          <p:cNvPr id="47" name="Text 44"/>
+          <p:cNvSpPr/>
+          <p:nvPr/>
+        </p:nvSpPr>
+        <p:spPr>
+          <a:xfrm>
+            <a:off x="6583680" y="4645152"/>
+            <a:ext cx="329184" cy="329184"/>
+          </a:xfrm>
+          <a:prstGeom prst="rect">
+            <a:avLst/>
+          </a:prstGeom>
+          <a:noFill/>
+          <a:ln/>
+        </p:spPr>
+        <p:txBody>
+          <a:bodyPr wrap="square" lIns="0" tIns="0" rIns="0" bIns="0" rtlCol="0" anchor="ctr"/>
+          <a:lstStyle/>
+          <a:p>
+            <a:pPr algn="ctr" indent="0" marL="0">
+              <a:buNone/>
+            </a:pPr>
+            <a:r>
+              <a:rPr lang="en-US" sz="1300" b="1" dirty="0">
+                <a:solidFill>
+                  <a:srgbClr val="A4133C"/>
+                </a:solidFill>
+                <a:latin typeface="Calibri" pitchFamily="34" charset="0"/>
+                <a:ea typeface="Calibri" pitchFamily="34" charset="-122"/>
+                <a:cs typeface="Calibri" pitchFamily="34" charset="-120"/>
+              </a:rPr>
+              <a:t>1</a:t>
+            </a:r>
+            <a:endParaRPr lang="en-US" sz="1300" dirty="0"/>
+          </a:p>
+        </p:txBody>
+      </p:sp>
+      <p:sp>
+        <p:nvSpPr>
+          <p:cNvPr id="48" name="Shape 45"/>
+          <p:cNvSpPr/>
+          <p:nvPr/>
+        </p:nvSpPr>
+        <p:spPr>
+          <a:xfrm>
+            <a:off x="822960" y="5440680"/>
+            <a:ext cx="6263640" cy="457200"/>
+          </a:xfrm>
+          <a:prstGeom prst="roundRect">
+            <a:avLst>
+              <a:gd name="adj" fmla="val 16000"/>
+            </a:avLst>
+          </a:prstGeom>
+          <a:solidFill>
+            <a:srgbClr val="590D22"/>
+          </a:solidFill>
+          <a:ln/>
+        </p:spPr>
+      </p:sp>
+      <p:sp>
+        <p:nvSpPr>
+          <p:cNvPr id="49" name="Text 46"/>
+          <p:cNvSpPr/>
+          <p:nvPr/>
+        </p:nvSpPr>
+        <p:spPr>
+          <a:xfrm>
+            <a:off x="1051560" y="5440680"/>
+            <a:ext cx="5943600" cy="457200"/>
+          </a:xfrm>
+          <a:prstGeom prst="rect">
+            <a:avLst/>
+          </a:prstGeom>
+          <a:noFill/>
+          <a:ln/>
+        </p:spPr>
+        <p:txBody>
+          <a:bodyPr wrap="square" rtlCol="0" anchor="ctr"/>
+          <a:lstStyle/>
+          <a:p>
+            <a:pPr algn="l" indent="0" marL="0">
+              <a:buNone/>
+            </a:pPr>
+            <a:r>
+              <a:rPr lang="en-US" sz="1350" dirty="0">
+                <a:solidFill>
+                  <a:srgbClr val="FBD8DF"/>
+                </a:solidFill>
+                <a:latin typeface="Calibri" pitchFamily="34" charset="0"/>
+                <a:ea typeface="Calibri" pitchFamily="34" charset="-122"/>
+                <a:cs typeface="Calibri" pitchFamily="34" charset="-120"/>
+              </a:rPr>
+              <a:t>Anticoagulate if  </a:t>
+            </a:r>
+            <a:pPr algn="l" indent="0" marL="0">
+              <a:buNone/>
+            </a:pPr>
+            <a:r>
+              <a:rPr lang="en-US" sz="1350" b="1" dirty="0">
+                <a:solidFill>
+                  <a:srgbClr val="FFFFFF"/>
+                </a:solidFill>
+                <a:latin typeface="Calibri" pitchFamily="34" charset="0"/>
+                <a:ea typeface="Calibri" pitchFamily="34" charset="-122"/>
+                <a:cs typeface="Calibri" pitchFamily="34" charset="-120"/>
+              </a:rPr>
+              <a:t>≥ 2 (men)  /  ≥ 3 (women)</a:t>
+            </a:r>
+            <a:endParaRPr lang="en-US" sz="1350" dirty="0"/>
+          </a:p>
+        </p:txBody>
+      </p:sp>
+      <p:sp>
+        <p:nvSpPr>
+          <p:cNvPr id="50" name="Shape 47"/>
+          <p:cNvSpPr/>
+          <p:nvPr/>
+        </p:nvSpPr>
+        <p:spPr>
+          <a:xfrm>
+            <a:off x="7543800" y="1828800"/>
+            <a:ext cx="4160520" cy="4206240"/>
+          </a:xfrm>
+          <a:prstGeom prst="roundRect">
+            <a:avLst>
+              <a:gd name="adj" fmla="val 2637"/>
+            </a:avLst>
+          </a:prstGeom>
+          <a:solidFill>
+            <a:srgbClr val="590D22"/>
+          </a:solidFill>
+          <a:ln/>
           <a:effectLst>
             <a:outerShdw sx="100000" sy="100000" kx="0" ky="0" algn="bl" rotWithShape="0" blurRad="127000" dist="50800" dir="5400000">
               <a:srgbClr val="C9A3AC">
@@ -6059,63 +6564,14 @@
       </p:sp>
       <p:sp>
         <p:nvSpPr>
-          <p:cNvPr id="17" name="Shape 12"/>
-          <p:cNvSpPr/>
-          <p:nvPr/>
-        </p:nvSpPr>
-        <p:spPr>
-          <a:xfrm>
-            <a:off x="8439912" y="2331720"/>
-            <a:ext cx="1051560" cy="1051560"/>
-          </a:xfrm>
-          <a:prstGeom prst="ellipse">
-            <a:avLst/>
-          </a:prstGeom>
-          <a:solidFill>
-            <a:srgbClr val="FFFFFF"/>
-          </a:solidFill>
-          <a:ln w="12700">
-            <a:solidFill>
-              <a:srgbClr val="FBD8DF"/>
-            </a:solidFill>
-            <a:prstDash val="solid"/>
-          </a:ln>
-        </p:spPr>
-      </p:sp>
-      <p:pic>
-        <p:nvPicPr>
-          <p:cNvPr id="18" name="Image 3" descr="preencoded.png">    </p:cNvPr>
-          <p:cNvPicPr>
-            <a:picLocks noChangeAspect="1"/>
-          </p:cNvPicPr>
-          <p:nvPr/>
-        </p:nvPicPr>
-        <p:blipFill>
-          <a:blip r:embed="rId4"/>
-          <a:stretch>
-            <a:fillRect/>
-          </a:stretch>
-        </p:blipFill>
-        <p:spPr>
-          <a:xfrm>
-            <a:off x="8732520" y="2624328"/>
-            <a:ext cx="466344" cy="466344"/>
-          </a:xfrm>
-          <a:prstGeom prst="rect">
-            <a:avLst/>
-          </a:prstGeom>
-        </p:spPr>
-      </p:pic>
-      <p:sp>
-        <p:nvSpPr>
-          <p:cNvPr id="19" name="Text 13"/>
-          <p:cNvSpPr/>
-          <p:nvPr/>
-        </p:nvSpPr>
-        <p:spPr>
-          <a:xfrm>
-            <a:off x="8394192" y="3657600"/>
-            <a:ext cx="3063240" cy="868680"/>
+          <p:cNvPr id="51" name="Text 48"/>
+          <p:cNvSpPr/>
+          <p:nvPr/>
+        </p:nvSpPr>
+        <p:spPr>
+          <a:xfrm>
+            <a:off x="7863840" y="2057400"/>
+            <a:ext cx="3566160" cy="365760"/>
           </a:xfrm>
           <a:prstGeom prst="rect">
             <a:avLst/>
@@ -6128,36 +6584,33 @@
           <a:lstStyle/>
           <a:p>
             <a:pPr algn="l" indent="0" marL="0">
-              <a:lnSpc>
-                <a:spcPct val="102000"/>
-              </a:lnSpc>
-              <a:buNone/>
-            </a:pPr>
-            <a:r>
-              <a:rPr lang="en-US" sz="1900" b="1" dirty="0">
-                <a:solidFill>
-                  <a:srgbClr val="2B2B33"/>
+              <a:buNone/>
+            </a:pPr>
+            <a:r>
+              <a:rPr lang="en-US" sz="2000" b="1" dirty="0">
+                <a:solidFill>
+                  <a:srgbClr val="FFFFFF"/>
                 </a:solidFill>
                 <a:latin typeface="Cambria" pitchFamily="34" charset="0"/>
                 <a:ea typeface="Cambria" pitchFamily="34" charset="-122"/>
                 <a:cs typeface="Cambria" pitchFamily="34" charset="-120"/>
               </a:rPr>
-              <a:t>Tachycardia-induced Cardiomyopathy</a:t>
-            </a:r>
-            <a:endParaRPr lang="en-US" sz="1900" dirty="0"/>
-          </a:p>
-        </p:txBody>
-      </p:sp>
-      <p:sp>
-        <p:nvSpPr>
-          <p:cNvPr id="20" name="Text 14"/>
-          <p:cNvSpPr/>
-          <p:nvPr/>
-        </p:nvSpPr>
-        <p:spPr>
-          <a:xfrm>
-            <a:off x="8394192" y="4572000"/>
-            <a:ext cx="2971800" cy="1280160"/>
+              <a:t>HAS-BLED</a:t>
+            </a:r>
+            <a:endParaRPr lang="en-US" sz="2000" dirty="0"/>
+          </a:p>
+        </p:txBody>
+      </p:sp>
+      <p:sp>
+        <p:nvSpPr>
+          <p:cNvPr id="52" name="Text 49"/>
+          <p:cNvSpPr/>
+          <p:nvPr/>
+        </p:nvSpPr>
+        <p:spPr>
+          <a:xfrm>
+            <a:off x="7863840" y="2432304"/>
+            <a:ext cx="3566160" cy="274320"/>
           </a:xfrm>
           <a:prstGeom prst="rect">
             <a:avLst/>
@@ -6170,59 +6623,427 @@
           <a:lstStyle/>
           <a:p>
             <a:pPr algn="l" indent="0" marL="0">
-              <a:lnSpc>
-                <a:spcPct val="115000"/>
-              </a:lnSpc>
-              <a:buNone/>
-            </a:pPr>
-            <a:r>
-              <a:rPr lang="en-US" sz="1400" dirty="0">
-                <a:solidFill>
-                  <a:srgbClr val="6B6B76"/>
+              <a:buNone/>
+            </a:pPr>
+            <a:r>
+              <a:rPr lang="en-US" sz="1200" i="1" dirty="0">
+                <a:solidFill>
+                  <a:srgbClr val="FBD8DF"/>
                 </a:solidFill>
                 <a:latin typeface="Calibri" pitchFamily="34" charset="0"/>
                 <a:ea typeface="Calibri" pitchFamily="34" charset="-122"/>
                 <a:cs typeface="Calibri" pitchFamily="34" charset="-120"/>
               </a:rPr>
-              <a:t>Persistently rapid ventricular rates can cause reversible LV dysfunction</a:t>
-            </a:r>
-            <a:endParaRPr lang="en-US" sz="1400" dirty="0"/>
-          </a:p>
-        </p:txBody>
-      </p:sp>
-      <p:sp>
-        <p:nvSpPr>
-          <p:cNvPr id="21" name="Text 15"/>
-          <p:cNvSpPr/>
-          <p:nvPr/>
-        </p:nvSpPr>
-        <p:spPr>
-          <a:xfrm>
-            <a:off x="11277295" y="6355080"/>
-            <a:ext cx="548640" cy="320040"/>
-          </a:xfrm>
-          <a:prstGeom prst="rect">
-            <a:avLst/>
-          </a:prstGeom>
-          <a:noFill/>
-          <a:ln/>
-        </p:spPr>
-        <p:txBody>
-          <a:bodyPr wrap="square" rtlCol="0" anchor="t"/>
-          <a:lstStyle/>
-          <a:p>
-            <a:pPr algn="r" indent="0" marL="0">
-              <a:buNone/>
-            </a:pPr>
-            <a:r>
-              <a:rPr lang="en-US" sz="1100" b="1" dirty="0">
-                <a:solidFill>
-                  <a:srgbClr val="6B6B76"/>
+              <a:t>Bleeding risk on anticoagulation</a:t>
+            </a:r>
+            <a:endParaRPr lang="en-US" sz="1200" dirty="0"/>
+          </a:p>
+        </p:txBody>
+      </p:sp>
+      <p:sp>
+        <p:nvSpPr>
+          <p:cNvPr id="53" name="Text 50"/>
+          <p:cNvSpPr/>
+          <p:nvPr/>
+        </p:nvSpPr>
+        <p:spPr>
+          <a:xfrm>
+            <a:off x="7863840" y="2880360"/>
+            <a:ext cx="3611880" cy="402336"/>
+          </a:xfrm>
+          <a:prstGeom prst="rect">
+            <a:avLst/>
+          </a:prstGeom>
+          <a:noFill/>
+          <a:ln/>
+        </p:spPr>
+        <p:txBody>
+          <a:bodyPr wrap="square" lIns="0" tIns="0" rIns="0" bIns="0" rtlCol="0" anchor="ctr"/>
+          <a:lstStyle/>
+          <a:p>
+            <a:pPr algn="l" indent="0" marL="0">
+              <a:buNone/>
+            </a:pPr>
+            <a:r>
+              <a:rPr lang="en-US" sz="1300" b="1" dirty="0">
+                <a:solidFill>
+                  <a:srgbClr val="FF4D6D"/>
                 </a:solidFill>
                 <a:latin typeface="Calibri" pitchFamily="34" charset="0"/>
                 <a:ea typeface="Calibri" pitchFamily="34" charset="-122"/>
                 <a:cs typeface="Calibri" pitchFamily="34" charset="-120"/>
               </a:rPr>
+              <a:t>H  </a:t>
+            </a:r>
+            <a:pPr algn="l" indent="0" marL="0">
+              <a:buNone/>
+            </a:pPr>
+            <a:r>
+              <a:rPr lang="en-US" sz="1300" dirty="0">
+                <a:solidFill>
+                  <a:srgbClr val="FBD8DF"/>
+                </a:solidFill>
+                <a:latin typeface="Calibri" pitchFamily="34" charset="0"/>
+                <a:ea typeface="Calibri" pitchFamily="34" charset="-122"/>
+                <a:cs typeface="Calibri" pitchFamily="34" charset="-120"/>
+              </a:rPr>
+              <a:t>— Hypertension</a:t>
+            </a:r>
+            <a:endParaRPr lang="en-US" sz="1300" dirty="0"/>
+          </a:p>
+        </p:txBody>
+      </p:sp>
+      <p:sp>
+        <p:nvSpPr>
+          <p:cNvPr id="54" name="Text 51"/>
+          <p:cNvSpPr/>
+          <p:nvPr/>
+        </p:nvSpPr>
+        <p:spPr>
+          <a:xfrm>
+            <a:off x="7863840" y="3310128"/>
+            <a:ext cx="3611880" cy="402336"/>
+          </a:xfrm>
+          <a:prstGeom prst="rect">
+            <a:avLst/>
+          </a:prstGeom>
+          <a:noFill/>
+          <a:ln/>
+        </p:spPr>
+        <p:txBody>
+          <a:bodyPr wrap="square" lIns="0" tIns="0" rIns="0" bIns="0" rtlCol="0" anchor="ctr"/>
+          <a:lstStyle/>
+          <a:p>
+            <a:pPr algn="l" indent="0" marL="0">
+              <a:buNone/>
+            </a:pPr>
+            <a:r>
+              <a:rPr lang="en-US" sz="1300" b="1" dirty="0">
+                <a:solidFill>
+                  <a:srgbClr val="FF4D6D"/>
+                </a:solidFill>
+                <a:latin typeface="Calibri" pitchFamily="34" charset="0"/>
+                <a:ea typeface="Calibri" pitchFamily="34" charset="-122"/>
+                <a:cs typeface="Calibri" pitchFamily="34" charset="-120"/>
+              </a:rPr>
+              <a:t>A  </a:t>
+            </a:r>
+            <a:pPr algn="l" indent="0" marL="0">
+              <a:buNone/>
+            </a:pPr>
+            <a:r>
+              <a:rPr lang="en-US" sz="1300" dirty="0">
+                <a:solidFill>
+                  <a:srgbClr val="FBD8DF"/>
+                </a:solidFill>
+                <a:latin typeface="Calibri" pitchFamily="34" charset="0"/>
+                <a:ea typeface="Calibri" pitchFamily="34" charset="-122"/>
+                <a:cs typeface="Calibri" pitchFamily="34" charset="-120"/>
+              </a:rPr>
+              <a:t>— Abnormal renal / liver</a:t>
+            </a:r>
+            <a:endParaRPr lang="en-US" sz="1300" dirty="0"/>
+          </a:p>
+        </p:txBody>
+      </p:sp>
+      <p:sp>
+        <p:nvSpPr>
+          <p:cNvPr id="55" name="Text 52"/>
+          <p:cNvSpPr/>
+          <p:nvPr/>
+        </p:nvSpPr>
+        <p:spPr>
+          <a:xfrm>
+            <a:off x="7863840" y="3739896"/>
+            <a:ext cx="3611880" cy="402336"/>
+          </a:xfrm>
+          <a:prstGeom prst="rect">
+            <a:avLst/>
+          </a:prstGeom>
+          <a:noFill/>
+          <a:ln/>
+        </p:spPr>
+        <p:txBody>
+          <a:bodyPr wrap="square" lIns="0" tIns="0" rIns="0" bIns="0" rtlCol="0" anchor="ctr"/>
+          <a:lstStyle/>
+          <a:p>
+            <a:pPr algn="l" indent="0" marL="0">
+              <a:buNone/>
+            </a:pPr>
+            <a:r>
+              <a:rPr lang="en-US" sz="1300" b="1" dirty="0">
+                <a:solidFill>
+                  <a:srgbClr val="FF4D6D"/>
+                </a:solidFill>
+                <a:latin typeface="Calibri" pitchFamily="34" charset="0"/>
+                <a:ea typeface="Calibri" pitchFamily="34" charset="-122"/>
+                <a:cs typeface="Calibri" pitchFamily="34" charset="-120"/>
+              </a:rPr>
+              <a:t>S  </a:t>
+            </a:r>
+            <a:pPr algn="l" indent="0" marL="0">
+              <a:buNone/>
+            </a:pPr>
+            <a:r>
+              <a:rPr lang="en-US" sz="1300" dirty="0">
+                <a:solidFill>
+                  <a:srgbClr val="FBD8DF"/>
+                </a:solidFill>
+                <a:latin typeface="Calibri" pitchFamily="34" charset="0"/>
+                <a:ea typeface="Calibri" pitchFamily="34" charset="-122"/>
+                <a:cs typeface="Calibri" pitchFamily="34" charset="-120"/>
+              </a:rPr>
+              <a:t>— Stroke history</a:t>
+            </a:r>
+            <a:endParaRPr lang="en-US" sz="1300" dirty="0"/>
+          </a:p>
+        </p:txBody>
+      </p:sp>
+      <p:sp>
+        <p:nvSpPr>
+          <p:cNvPr id="56" name="Text 53"/>
+          <p:cNvSpPr/>
+          <p:nvPr/>
+        </p:nvSpPr>
+        <p:spPr>
+          <a:xfrm>
+            <a:off x="7863840" y="4169664"/>
+            <a:ext cx="3611880" cy="402336"/>
+          </a:xfrm>
+          <a:prstGeom prst="rect">
+            <a:avLst/>
+          </a:prstGeom>
+          <a:noFill/>
+          <a:ln/>
+        </p:spPr>
+        <p:txBody>
+          <a:bodyPr wrap="square" lIns="0" tIns="0" rIns="0" bIns="0" rtlCol="0" anchor="ctr"/>
+          <a:lstStyle/>
+          <a:p>
+            <a:pPr algn="l" indent="0" marL="0">
+              <a:buNone/>
+            </a:pPr>
+            <a:r>
+              <a:rPr lang="en-US" sz="1300" b="1" dirty="0">
+                <a:solidFill>
+                  <a:srgbClr val="FF4D6D"/>
+                </a:solidFill>
+                <a:latin typeface="Calibri" pitchFamily="34" charset="0"/>
+                <a:ea typeface="Calibri" pitchFamily="34" charset="-122"/>
+                <a:cs typeface="Calibri" pitchFamily="34" charset="-120"/>
+              </a:rPr>
+              <a:t>B  </a:t>
+            </a:r>
+            <a:pPr algn="l" indent="0" marL="0">
+              <a:buNone/>
+            </a:pPr>
+            <a:r>
+              <a:rPr lang="en-US" sz="1300" dirty="0">
+                <a:solidFill>
+                  <a:srgbClr val="FBD8DF"/>
+                </a:solidFill>
+                <a:latin typeface="Calibri" pitchFamily="34" charset="0"/>
+                <a:ea typeface="Calibri" pitchFamily="34" charset="-122"/>
+                <a:cs typeface="Calibri" pitchFamily="34" charset="-120"/>
+              </a:rPr>
+              <a:t>— Bleeding tendency</a:t>
+            </a:r>
+            <a:endParaRPr lang="en-US" sz="1300" dirty="0"/>
+          </a:p>
+        </p:txBody>
+      </p:sp>
+      <p:sp>
+        <p:nvSpPr>
+          <p:cNvPr id="57" name="Text 54"/>
+          <p:cNvSpPr/>
+          <p:nvPr/>
+        </p:nvSpPr>
+        <p:spPr>
+          <a:xfrm>
+            <a:off x="7863840" y="4599432"/>
+            <a:ext cx="3611880" cy="402336"/>
+          </a:xfrm>
+          <a:prstGeom prst="rect">
+            <a:avLst/>
+          </a:prstGeom>
+          <a:noFill/>
+          <a:ln/>
+        </p:spPr>
+        <p:txBody>
+          <a:bodyPr wrap="square" lIns="0" tIns="0" rIns="0" bIns="0" rtlCol="0" anchor="ctr"/>
+          <a:lstStyle/>
+          <a:p>
+            <a:pPr algn="l" indent="0" marL="0">
+              <a:buNone/>
+            </a:pPr>
+            <a:r>
+              <a:rPr lang="en-US" sz="1300" b="1" dirty="0">
+                <a:solidFill>
+                  <a:srgbClr val="FF4D6D"/>
+                </a:solidFill>
+                <a:latin typeface="Calibri" pitchFamily="34" charset="0"/>
+                <a:ea typeface="Calibri" pitchFamily="34" charset="-122"/>
+                <a:cs typeface="Calibri" pitchFamily="34" charset="-120"/>
+              </a:rPr>
+              <a:t>L  </a:t>
+            </a:r>
+            <a:pPr algn="l" indent="0" marL="0">
+              <a:buNone/>
+            </a:pPr>
+            <a:r>
+              <a:rPr lang="en-US" sz="1300" dirty="0">
+                <a:solidFill>
+                  <a:srgbClr val="FBD8DF"/>
+                </a:solidFill>
+                <a:latin typeface="Calibri" pitchFamily="34" charset="0"/>
+                <a:ea typeface="Calibri" pitchFamily="34" charset="-122"/>
+                <a:cs typeface="Calibri" pitchFamily="34" charset="-120"/>
+              </a:rPr>
+              <a:t>— Labile INR</a:t>
+            </a:r>
+            <a:endParaRPr lang="en-US" sz="1300" dirty="0"/>
+          </a:p>
+        </p:txBody>
+      </p:sp>
+      <p:sp>
+        <p:nvSpPr>
+          <p:cNvPr id="58" name="Text 55"/>
+          <p:cNvSpPr/>
+          <p:nvPr/>
+        </p:nvSpPr>
+        <p:spPr>
+          <a:xfrm>
+            <a:off x="7863840" y="5029200"/>
+            <a:ext cx="3611880" cy="402336"/>
+          </a:xfrm>
+          <a:prstGeom prst="rect">
+            <a:avLst/>
+          </a:prstGeom>
+          <a:noFill/>
+          <a:ln/>
+        </p:spPr>
+        <p:txBody>
+          <a:bodyPr wrap="square" lIns="0" tIns="0" rIns="0" bIns="0" rtlCol="0" anchor="ctr"/>
+          <a:lstStyle/>
+          <a:p>
+            <a:pPr algn="l" indent="0" marL="0">
+              <a:buNone/>
+            </a:pPr>
+            <a:r>
+              <a:rPr lang="en-US" sz="1300" b="1" dirty="0">
+                <a:solidFill>
+                  <a:srgbClr val="FF4D6D"/>
+                </a:solidFill>
+                <a:latin typeface="Calibri" pitchFamily="34" charset="0"/>
+                <a:ea typeface="Calibri" pitchFamily="34" charset="-122"/>
+                <a:cs typeface="Calibri" pitchFamily="34" charset="-120"/>
+              </a:rPr>
+              <a:t>E  </a:t>
+            </a:r>
+            <a:pPr algn="l" indent="0" marL="0">
+              <a:buNone/>
+            </a:pPr>
+            <a:r>
+              <a:rPr lang="en-US" sz="1300" dirty="0">
+                <a:solidFill>
+                  <a:srgbClr val="FBD8DF"/>
+                </a:solidFill>
+                <a:latin typeface="Calibri" pitchFamily="34" charset="0"/>
+                <a:ea typeface="Calibri" pitchFamily="34" charset="-122"/>
+                <a:cs typeface="Calibri" pitchFamily="34" charset="-120"/>
+              </a:rPr>
+              <a:t>— Elderly (&gt; 65)</a:t>
+            </a:r>
+            <a:endParaRPr lang="en-US" sz="1300" dirty="0"/>
+          </a:p>
+        </p:txBody>
+      </p:sp>
+      <p:sp>
+        <p:nvSpPr>
+          <p:cNvPr id="59" name="Text 56"/>
+          <p:cNvSpPr/>
+          <p:nvPr/>
+        </p:nvSpPr>
+        <p:spPr>
+          <a:xfrm>
+            <a:off x="7863840" y="5458968"/>
+            <a:ext cx="3611880" cy="402336"/>
+          </a:xfrm>
+          <a:prstGeom prst="rect">
+            <a:avLst/>
+          </a:prstGeom>
+          <a:noFill/>
+          <a:ln/>
+        </p:spPr>
+        <p:txBody>
+          <a:bodyPr wrap="square" lIns="0" tIns="0" rIns="0" bIns="0" rtlCol="0" anchor="ctr"/>
+          <a:lstStyle/>
+          <a:p>
+            <a:pPr algn="l" indent="0" marL="0">
+              <a:buNone/>
+            </a:pPr>
+            <a:r>
+              <a:rPr lang="en-US" sz="1300" b="1" dirty="0">
+                <a:solidFill>
+                  <a:srgbClr val="FF4D6D"/>
+                </a:solidFill>
+                <a:latin typeface="Calibri" pitchFamily="34" charset="0"/>
+                <a:ea typeface="Calibri" pitchFamily="34" charset="-122"/>
+                <a:cs typeface="Calibri" pitchFamily="34" charset="-120"/>
+              </a:rPr>
+              <a:t>D  </a:t>
+            </a:r>
+            <a:pPr algn="l" indent="0" marL="0">
+              <a:buNone/>
+            </a:pPr>
+            <a:r>
+              <a:rPr lang="en-US" sz="1300" dirty="0">
+                <a:solidFill>
+                  <a:srgbClr val="FBD8DF"/>
+                </a:solidFill>
+                <a:latin typeface="Calibri" pitchFamily="34" charset="0"/>
+                <a:ea typeface="Calibri" pitchFamily="34" charset="-122"/>
+                <a:cs typeface="Calibri" pitchFamily="34" charset="-120"/>
+              </a:rPr>
+              <a:t>— Drugs / alcohol</a:t>
+            </a:r>
+            <a:endParaRPr lang="en-US" sz="1300" dirty="0"/>
+          </a:p>
+        </p:txBody>
+      </p:sp>
+      <p:sp>
+        <p:nvSpPr>
+          <p:cNvPr id="60" name="Text 57"/>
+          <p:cNvSpPr/>
+          <p:nvPr/>
+        </p:nvSpPr>
+        <p:spPr>
+          <a:xfrm>
+            <a:off x="11277295" y="6355080"/>
+            <a:ext cx="548640" cy="320040"/>
+          </a:xfrm>
+          <a:prstGeom prst="rect">
+            <a:avLst/>
+          </a:prstGeom>
+          <a:noFill/>
+          <a:ln/>
+        </p:spPr>
+        <p:txBody>
+          <a:bodyPr wrap="square" rtlCol="0" anchor="t"/>
+          <a:lstStyle/>
+          <a:p>
+            <a:pPr algn="r" indent="0" marL="0">
+              <a:buNone/>
+            </a:pPr>
+            <a:r>
+              <a:rPr lang="en-US" sz="1100" b="1" dirty="0">
+                <a:solidFill>
+                  <a:srgbClr val="6B6B76"/>
+                </a:solidFill>
+                <a:latin typeface="Calibri" pitchFamily="34" charset="0"/>
+                <a:ea typeface="Calibri" pitchFamily="34" charset="-122"/>
+                <a:cs typeface="Calibri" pitchFamily="34" charset="-120"/>
+              </a:rPr>
               <a:t>11</a:t>
             </a:r>
             <a:endParaRPr lang="en-US" sz="1100" dirty="0"/>
@@ -6231,7 +7052,7 @@
       </p:sp>
       <p:sp>
         <p:nvSpPr>
-          <p:cNvPr id="22" name="Text 16"/>
+          <p:cNvPr id="61" name="Text 58"/>
           <p:cNvSpPr/>
           <p:nvPr/>
         </p:nvSpPr>
@@ -6382,7 +7203,7 @@
                 <a:ea typeface="Calibri" pitchFamily="34" charset="-122"/>
                 <a:cs typeface="Calibri" pitchFamily="34" charset="-120"/>
               </a:rPr>
-              <a:t>RISK STRATIFICATION</a:t>
+              <a:t>MANAGEMENT</a:t>
             </a:r>
             <a:endParaRPr lang="en-US" sz="1250" dirty="0"/>
           </a:p>
@@ -6421,7 +7242,7 @@
                 <a:ea typeface="Cambria" pitchFamily="34" charset="-122"/>
                 <a:cs typeface="Cambria" pitchFamily="34" charset="-120"/>
               </a:rPr>
-              <a:t>Stroke &amp; Bleeding Risk</a:t>
+              <a:t>The ABC Pathway</a:t>
             </a:r>
             <a:endParaRPr lang="en-US" sz="3000" dirty="0"/>
           </a:p>
@@ -6435,23 +7256,18 @@
         </p:nvSpPr>
         <p:spPr>
           <a:xfrm>
-            <a:off x="502920" y="1828800"/>
-            <a:ext cx="6903720" cy="4206240"/>
+            <a:off x="502920" y="1920240"/>
+            <a:ext cx="3611880" cy="4023360"/>
           </a:xfrm>
           <a:prstGeom prst="roundRect">
             <a:avLst>
-              <a:gd name="adj" fmla="val 2609"/>
+              <a:gd name="adj" fmla="val 3038"/>
             </a:avLst>
           </a:prstGeom>
           <a:solidFill>
-            <a:srgbClr val="FFF0F3"/>
+            <a:srgbClr val="590D22"/>
           </a:solidFill>
-          <a:ln w="12700">
-            <a:solidFill>
-              <a:srgbClr val="FBD8DF"/>
-            </a:solidFill>
-            <a:prstDash val="solid"/>
-          </a:ln>
+          <a:ln/>
           <a:effectLst>
             <a:outerShdw sx="100000" sy="100000" kx="0" ky="0" algn="bl" rotWithShape="0" blurRad="127000" dist="50800" dir="5400000">
               <a:srgbClr val="C9A3AC">
@@ -6469,1468 +7285,179 @@
         </p:nvSpPr>
         <p:spPr>
           <a:xfrm>
-            <a:off x="822960" y="2057400"/>
-            <a:ext cx="6309360" cy="365760"/>
-          </a:xfrm>
-          <a:prstGeom prst="rect">
-            <a:avLst/>
-          </a:prstGeom>
-          <a:noFill/>
-          <a:ln/>
-        </p:spPr>
-        <p:txBody>
-          <a:bodyPr wrap="square" rtlCol="0" anchor="t"/>
+            <a:off x="777240" y="2194560"/>
+            <a:ext cx="1463040" cy="1280160"/>
+          </a:xfrm>
+          <a:prstGeom prst="rect">
+            <a:avLst/>
+          </a:prstGeom>
+          <a:noFill/>
+          <a:ln/>
+        </p:spPr>
+        <p:txBody>
+          <a:bodyPr wrap="square" lIns="0" tIns="0" rIns="0" bIns="0" rtlCol="0" anchor="t"/>
           <a:lstStyle/>
           <a:p>
             <a:pPr algn="l" indent="0" marL="0">
               <a:buNone/>
             </a:pPr>
             <a:r>
-              <a:rPr lang="en-US" sz="2000" b="1" dirty="0">
-                <a:solidFill>
-                  <a:srgbClr val="A4133C"/>
+              <a:rPr lang="en-US" sz="7400" b="1" dirty="0">
+                <a:solidFill>
+                  <a:srgbClr val="FF4D6D"/>
                 </a:solidFill>
                 <a:latin typeface="Cambria" pitchFamily="34" charset="0"/>
                 <a:ea typeface="Cambria" pitchFamily="34" charset="-122"/>
                 <a:cs typeface="Cambria" pitchFamily="34" charset="-120"/>
               </a:rPr>
-              <a:t>CHA</a:t>
-            </a:r>
+              <a:t>A</a:t>
+            </a:r>
+            <a:endParaRPr lang="en-US" sz="7400" dirty="0"/>
+          </a:p>
+        </p:txBody>
+      </p:sp>
+      <p:sp>
+        <p:nvSpPr>
+          <p:cNvPr id="8" name="Shape 5"/>
+          <p:cNvSpPr/>
+          <p:nvPr/>
+        </p:nvSpPr>
+        <p:spPr>
+          <a:xfrm>
+            <a:off x="2788920" y="2377440"/>
+            <a:ext cx="914400" cy="914400"/>
+          </a:xfrm>
+          <a:prstGeom prst="ellipse">
+            <a:avLst/>
+          </a:prstGeom>
+          <a:solidFill>
+            <a:srgbClr val="A4133C"/>
+          </a:solidFill>
+          <a:ln/>
+        </p:spPr>
+      </p:sp>
+      <p:pic>
+        <p:nvPicPr>
+          <p:cNvPr id="9" name="Image 1" descr="preencoded.png">    </p:cNvPr>
+          <p:cNvPicPr>
+            <a:picLocks noChangeAspect="1"/>
+          </p:cNvPicPr>
+          <p:nvPr/>
+        </p:nvPicPr>
+        <p:blipFill>
+          <a:blip r:embed="rId2"/>
+          <a:stretch>
+            <a:fillRect/>
+          </a:stretch>
+        </p:blipFill>
+        <p:spPr>
+          <a:xfrm>
+            <a:off x="3026664" y="2615184"/>
+            <a:ext cx="438912" cy="438912"/>
+          </a:xfrm>
+          <a:prstGeom prst="rect">
+            <a:avLst/>
+          </a:prstGeom>
+        </p:spPr>
+      </p:pic>
+      <p:sp>
+        <p:nvSpPr>
+          <p:cNvPr id="10" name="Text 6"/>
+          <p:cNvSpPr/>
+          <p:nvPr/>
+        </p:nvSpPr>
+        <p:spPr>
+          <a:xfrm>
+            <a:off x="822960" y="3749040"/>
+            <a:ext cx="2971800" cy="822960"/>
+          </a:xfrm>
+          <a:prstGeom prst="rect">
+            <a:avLst/>
+          </a:prstGeom>
+          <a:noFill/>
+          <a:ln/>
+        </p:spPr>
+        <p:txBody>
+          <a:bodyPr wrap="square" rtlCol="0" anchor="t"/>
+          <a:lstStyle/>
+          <a:p>
             <a:pPr algn="l" indent="0" marL="0">
+              <a:lnSpc>
+                <a:spcPct val="102000"/>
+              </a:lnSpc>
               <a:buNone/>
             </a:pPr>
             <a:r>
               <a:rPr lang="en-US" sz="2000" b="1" dirty="0">
                 <a:solidFill>
-                  <a:srgbClr val="A4133C"/>
+                  <a:srgbClr val="FFFFFF"/>
                 </a:solidFill>
                 <a:latin typeface="Cambria" pitchFamily="34" charset="0"/>
                 <a:ea typeface="Cambria" pitchFamily="34" charset="-122"/>
                 <a:cs typeface="Cambria" pitchFamily="34" charset="-120"/>
               </a:rPr>
-              <a:t>₂</a:t>
-            </a:r>
+              <a:t>Anticoagulation</a:t>
+            </a:r>
+            <a:endParaRPr lang="en-US" sz="2000" dirty="0"/>
+          </a:p>
+        </p:txBody>
+      </p:sp>
+      <p:sp>
+        <p:nvSpPr>
+          <p:cNvPr id="11" name="Text 7"/>
+          <p:cNvSpPr/>
+          <p:nvPr/>
+        </p:nvSpPr>
+        <p:spPr>
+          <a:xfrm>
+            <a:off x="822960" y="4617720"/>
+            <a:ext cx="2971800" cy="1234440"/>
+          </a:xfrm>
+          <a:prstGeom prst="rect">
+            <a:avLst/>
+          </a:prstGeom>
+          <a:noFill/>
+          <a:ln/>
+        </p:spPr>
+        <p:txBody>
+          <a:bodyPr wrap="square" rtlCol="0" anchor="t"/>
+          <a:lstStyle/>
+          <a:p>
             <a:pPr algn="l" indent="0" marL="0">
-              <a:buNone/>
-            </a:pPr>
-            <a:r>
-              <a:rPr lang="en-US" sz="2000" b="1" dirty="0">
-                <a:solidFill>
-                  <a:srgbClr val="A4133C"/>
-                </a:solidFill>
-                <a:latin typeface="Cambria" pitchFamily="34" charset="0"/>
-                <a:ea typeface="Cambria" pitchFamily="34" charset="-122"/>
-                <a:cs typeface="Cambria" pitchFamily="34" charset="-120"/>
-              </a:rPr>
-              <a:t>DS</a:t>
-            </a:r>
-            <a:pPr algn="l" indent="0" marL="0">
-              <a:buNone/>
-            </a:pPr>
-            <a:r>
-              <a:rPr lang="en-US" sz="2000" b="1" dirty="0">
-                <a:solidFill>
-                  <a:srgbClr val="A4133C"/>
-                </a:solidFill>
-                <a:latin typeface="Cambria" pitchFamily="34" charset="0"/>
-                <a:ea typeface="Cambria" pitchFamily="34" charset="-122"/>
-                <a:cs typeface="Cambria" pitchFamily="34" charset="-120"/>
-              </a:rPr>
-              <a:t>₂</a:t>
-            </a:r>
-            <a:pPr algn="l" indent="0" marL="0">
-              <a:buNone/>
-            </a:pPr>
-            <a:r>
-              <a:rPr lang="en-US" sz="2000" b="1" dirty="0">
-                <a:solidFill>
-                  <a:srgbClr val="A4133C"/>
-                </a:solidFill>
-                <a:latin typeface="Cambria" pitchFamily="34" charset="0"/>
-                <a:ea typeface="Cambria" pitchFamily="34" charset="-122"/>
-                <a:cs typeface="Cambria" pitchFamily="34" charset="-120"/>
-              </a:rPr>
-              <a:t>-VASc</a:t>
-            </a:r>
-            <a:pPr algn="l" indent="0" marL="0">
-              <a:buNone/>
-            </a:pPr>
-            <a:r>
-              <a:rPr lang="en-US" sz="2000" b="1" dirty="0">
-                <a:solidFill>
-                  <a:srgbClr val="6B6B76"/>
-                </a:solidFill>
-                <a:latin typeface="Cambria" pitchFamily="34" charset="0"/>
-                <a:ea typeface="Cambria" pitchFamily="34" charset="-122"/>
-                <a:cs typeface="Cambria" pitchFamily="34" charset="-120"/>
-              </a:rPr>
-              <a:t>   ·  stroke risk</a:t>
-            </a:r>
-            <a:endParaRPr lang="en-US" sz="2000" dirty="0"/>
-          </a:p>
-        </p:txBody>
-      </p:sp>
-      <p:sp>
-        <p:nvSpPr>
-          <p:cNvPr id="8" name="Shape 5"/>
-          <p:cNvSpPr/>
-          <p:nvPr/>
-        </p:nvSpPr>
-        <p:spPr>
-          <a:xfrm>
-            <a:off x="822960" y="2606040"/>
-            <a:ext cx="457200" cy="457200"/>
-          </a:xfrm>
-          <a:prstGeom prst="roundRect">
-            <a:avLst>
-              <a:gd name="adj" fmla="val 20000"/>
-            </a:avLst>
-          </a:prstGeom>
-          <a:solidFill>
-            <a:srgbClr val="A4133C"/>
-          </a:solidFill>
-          <a:ln/>
-        </p:spPr>
-      </p:sp>
-      <p:sp>
-        <p:nvSpPr>
-          <p:cNvPr id="9" name="Text 6"/>
-          <p:cNvSpPr/>
-          <p:nvPr/>
-        </p:nvSpPr>
-        <p:spPr>
-          <a:xfrm>
-            <a:off x="777240" y="2606040"/>
-            <a:ext cx="548640" cy="457200"/>
-          </a:xfrm>
-          <a:prstGeom prst="rect">
-            <a:avLst/>
-          </a:prstGeom>
-          <a:noFill/>
-          <a:ln/>
-        </p:spPr>
-        <p:txBody>
-          <a:bodyPr wrap="square" lIns="0" tIns="0" rIns="0" bIns="0" rtlCol="0" anchor="ctr"/>
-          <a:lstStyle/>
-          <a:p>
-            <a:pPr algn="ctr" indent="0" marL="0">
-              <a:buNone/>
-            </a:pPr>
-            <a:r>
-              <a:rPr lang="en-US" sz="1500" b="1" dirty="0">
-                <a:solidFill>
-                  <a:srgbClr val="FFFFFF"/>
-                </a:solidFill>
-                <a:latin typeface="Cambria" pitchFamily="34" charset="0"/>
-                <a:ea typeface="Cambria" pitchFamily="34" charset="-122"/>
-                <a:cs typeface="Cambria" pitchFamily="34" charset="-120"/>
-              </a:rPr>
-              <a:t>C</a:t>
-            </a:r>
-            <a:endParaRPr lang="en-US" sz="1500" dirty="0"/>
-          </a:p>
-        </p:txBody>
-      </p:sp>
-      <p:sp>
-        <p:nvSpPr>
-          <p:cNvPr id="10" name="Text 7"/>
-          <p:cNvSpPr/>
-          <p:nvPr/>
-        </p:nvSpPr>
-        <p:spPr>
-          <a:xfrm>
-            <a:off x="1417320" y="2606040"/>
-            <a:ext cx="1965960" cy="457200"/>
-          </a:xfrm>
-          <a:prstGeom prst="rect">
-            <a:avLst/>
-          </a:prstGeom>
-          <a:noFill/>
-          <a:ln/>
-        </p:spPr>
-        <p:txBody>
-          <a:bodyPr wrap="square" lIns="0" tIns="0" rIns="0" bIns="0" rtlCol="0" anchor="ctr"/>
-          <a:lstStyle/>
-          <a:p>
-            <a:pPr algn="l" indent="0" marL="0">
-              <a:buNone/>
-            </a:pPr>
-            <a:r>
-              <a:rPr lang="en-US" sz="1350" dirty="0">
-                <a:solidFill>
-                  <a:srgbClr val="2B2B33"/>
+              <a:lnSpc>
+                <a:spcPct val="115000"/>
+              </a:lnSpc>
+              <a:buNone/>
+            </a:pPr>
+            <a:r>
+              <a:rPr lang="en-US" sz="1400" dirty="0">
+                <a:solidFill>
+                  <a:srgbClr val="FBD8DF"/>
                 </a:solidFill>
                 <a:latin typeface="Calibri" pitchFamily="34" charset="0"/>
                 <a:ea typeface="Calibri" pitchFamily="34" charset="-122"/>
                 <a:cs typeface="Calibri" pitchFamily="34" charset="-120"/>
               </a:rPr>
-              <a:t>Congestive HF</a:t>
-            </a:r>
-            <a:endParaRPr lang="en-US" sz="1350" dirty="0"/>
-          </a:p>
-        </p:txBody>
-      </p:sp>
-      <p:sp>
-        <p:nvSpPr>
-          <p:cNvPr id="11" name="Shape 8"/>
-          <p:cNvSpPr/>
-          <p:nvPr/>
-        </p:nvSpPr>
-        <p:spPr>
-          <a:xfrm>
-            <a:off x="3337560" y="2670048"/>
-            <a:ext cx="329184" cy="329184"/>
-          </a:xfrm>
-          <a:prstGeom prst="ellipse">
-            <a:avLst/>
-          </a:prstGeom>
-          <a:solidFill>
-            <a:srgbClr val="FBD8DF"/>
-          </a:solidFill>
-          <a:ln/>
-        </p:spPr>
-      </p:sp>
-      <p:sp>
-        <p:nvSpPr>
-          <p:cNvPr id="12" name="Text 9"/>
-          <p:cNvSpPr/>
-          <p:nvPr/>
-        </p:nvSpPr>
-        <p:spPr>
-          <a:xfrm>
-            <a:off x="3337560" y="2670048"/>
-            <a:ext cx="329184" cy="329184"/>
-          </a:xfrm>
-          <a:prstGeom prst="rect">
-            <a:avLst/>
-          </a:prstGeom>
-          <a:noFill/>
-          <a:ln/>
-        </p:spPr>
-        <p:txBody>
-          <a:bodyPr wrap="square" lIns="0" tIns="0" rIns="0" bIns="0" rtlCol="0" anchor="ctr"/>
-          <a:lstStyle/>
-          <a:p>
-            <a:pPr algn="ctr" indent="0" marL="0">
-              <a:buNone/>
-            </a:pPr>
-            <a:r>
-              <a:rPr lang="en-US" sz="1300" b="1" dirty="0">
-                <a:solidFill>
-                  <a:srgbClr val="A4133C"/>
-                </a:solidFill>
-                <a:latin typeface="Calibri" pitchFamily="34" charset="0"/>
-                <a:ea typeface="Calibri" pitchFamily="34" charset="-122"/>
-                <a:cs typeface="Calibri" pitchFamily="34" charset="-120"/>
-              </a:rPr>
-              <a:t>1</a:t>
-            </a:r>
-            <a:endParaRPr lang="en-US" sz="1300" dirty="0"/>
-          </a:p>
-        </p:txBody>
-      </p:sp>
-      <p:sp>
-        <p:nvSpPr>
-          <p:cNvPr id="13" name="Shape 10"/>
-          <p:cNvSpPr/>
-          <p:nvPr/>
-        </p:nvSpPr>
-        <p:spPr>
-          <a:xfrm>
-            <a:off x="4069080" y="2606040"/>
-            <a:ext cx="457200" cy="457200"/>
+              <a:t>Avoid stroke — assess with CHA₂DS₂-VASc, then a DOAC (or warfarin where indicated)</a:t>
+            </a:r>
+            <a:endParaRPr lang="en-US" sz="1400" dirty="0"/>
+          </a:p>
+        </p:txBody>
+      </p:sp>
+      <p:sp>
+        <p:nvSpPr>
+          <p:cNvPr id="12" name="Shape 8"/>
+          <p:cNvSpPr/>
+          <p:nvPr/>
+        </p:nvSpPr>
+        <p:spPr>
+          <a:xfrm>
+            <a:off x="4288536" y="1920240"/>
+            <a:ext cx="3611880" cy="4023360"/>
           </a:xfrm>
           <a:prstGeom prst="roundRect">
             <a:avLst>
-              <a:gd name="adj" fmla="val 20000"/>
-            </a:avLst>
-          </a:prstGeom>
-          <a:solidFill>
-            <a:srgbClr val="A4133C"/>
-          </a:solidFill>
-          <a:ln/>
-        </p:spPr>
-      </p:sp>
-      <p:sp>
-        <p:nvSpPr>
-          <p:cNvPr id="14" name="Text 11"/>
-          <p:cNvSpPr/>
-          <p:nvPr/>
-        </p:nvSpPr>
-        <p:spPr>
-          <a:xfrm>
-            <a:off x="4023360" y="2606040"/>
-            <a:ext cx="548640" cy="457200"/>
-          </a:xfrm>
-          <a:prstGeom prst="rect">
-            <a:avLst/>
-          </a:prstGeom>
-          <a:noFill/>
-          <a:ln/>
-        </p:spPr>
-        <p:txBody>
-          <a:bodyPr wrap="square" lIns="0" tIns="0" rIns="0" bIns="0" rtlCol="0" anchor="ctr"/>
-          <a:lstStyle/>
-          <a:p>
-            <a:pPr algn="ctr" indent="0" marL="0">
-              <a:buNone/>
-            </a:pPr>
-            <a:r>
-              <a:rPr lang="en-US" sz="1500" b="1" dirty="0">
-                <a:solidFill>
-                  <a:srgbClr val="FFFFFF"/>
-                </a:solidFill>
-                <a:latin typeface="Cambria" pitchFamily="34" charset="0"/>
-                <a:ea typeface="Cambria" pitchFamily="34" charset="-122"/>
-                <a:cs typeface="Cambria" pitchFamily="34" charset="-120"/>
-              </a:rPr>
-              <a:t>H</a:t>
-            </a:r>
-            <a:endParaRPr lang="en-US" sz="1500" dirty="0"/>
-          </a:p>
-        </p:txBody>
-      </p:sp>
-      <p:sp>
-        <p:nvSpPr>
-          <p:cNvPr id="15" name="Text 12"/>
-          <p:cNvSpPr/>
-          <p:nvPr/>
-        </p:nvSpPr>
-        <p:spPr>
-          <a:xfrm>
-            <a:off x="4663440" y="2606040"/>
-            <a:ext cx="1965960" cy="457200"/>
-          </a:xfrm>
-          <a:prstGeom prst="rect">
-            <a:avLst/>
-          </a:prstGeom>
-          <a:noFill/>
-          <a:ln/>
-        </p:spPr>
-        <p:txBody>
-          <a:bodyPr wrap="square" lIns="0" tIns="0" rIns="0" bIns="0" rtlCol="0" anchor="ctr"/>
-          <a:lstStyle/>
-          <a:p>
-            <a:pPr algn="l" indent="0" marL="0">
-              <a:buNone/>
-            </a:pPr>
-            <a:r>
-              <a:rPr lang="en-US" sz="1350" dirty="0">
-                <a:solidFill>
-                  <a:srgbClr val="2B2B33"/>
-                </a:solidFill>
-                <a:latin typeface="Calibri" pitchFamily="34" charset="0"/>
-                <a:ea typeface="Calibri" pitchFamily="34" charset="-122"/>
-                <a:cs typeface="Calibri" pitchFamily="34" charset="-120"/>
-              </a:rPr>
-              <a:t>Hypertension</a:t>
-            </a:r>
-            <a:endParaRPr lang="en-US" sz="1350" dirty="0"/>
-          </a:p>
-        </p:txBody>
-      </p:sp>
-      <p:sp>
-        <p:nvSpPr>
-          <p:cNvPr id="16" name="Shape 13"/>
-          <p:cNvSpPr/>
-          <p:nvPr/>
-        </p:nvSpPr>
-        <p:spPr>
-          <a:xfrm>
-            <a:off x="6583680" y="2670048"/>
-            <a:ext cx="329184" cy="329184"/>
-          </a:xfrm>
-          <a:prstGeom prst="ellipse">
-            <a:avLst/>
-          </a:prstGeom>
-          <a:solidFill>
-            <a:srgbClr val="FBD8DF"/>
-          </a:solidFill>
-          <a:ln/>
-        </p:spPr>
-      </p:sp>
-      <p:sp>
-        <p:nvSpPr>
-          <p:cNvPr id="17" name="Text 14"/>
-          <p:cNvSpPr/>
-          <p:nvPr/>
-        </p:nvSpPr>
-        <p:spPr>
-          <a:xfrm>
-            <a:off x="6583680" y="2670048"/>
-            <a:ext cx="329184" cy="329184"/>
-          </a:xfrm>
-          <a:prstGeom prst="rect">
-            <a:avLst/>
-          </a:prstGeom>
-          <a:noFill/>
-          <a:ln/>
-        </p:spPr>
-        <p:txBody>
-          <a:bodyPr wrap="square" lIns="0" tIns="0" rIns="0" bIns="0" rtlCol="0" anchor="ctr"/>
-          <a:lstStyle/>
-          <a:p>
-            <a:pPr algn="ctr" indent="0" marL="0">
-              <a:buNone/>
-            </a:pPr>
-            <a:r>
-              <a:rPr lang="en-US" sz="1300" b="1" dirty="0">
-                <a:solidFill>
-                  <a:srgbClr val="A4133C"/>
-                </a:solidFill>
-                <a:latin typeface="Calibri" pitchFamily="34" charset="0"/>
-                <a:ea typeface="Calibri" pitchFamily="34" charset="-122"/>
-                <a:cs typeface="Calibri" pitchFamily="34" charset="-120"/>
-              </a:rPr>
-              <a:t>1</a:t>
-            </a:r>
-            <a:endParaRPr lang="en-US" sz="1300" dirty="0"/>
-          </a:p>
-        </p:txBody>
-      </p:sp>
-      <p:sp>
-        <p:nvSpPr>
-          <p:cNvPr id="18" name="Shape 15"/>
-          <p:cNvSpPr/>
-          <p:nvPr/>
-        </p:nvSpPr>
-        <p:spPr>
-          <a:xfrm>
-            <a:off x="822960" y="3264408"/>
-            <a:ext cx="457200" cy="457200"/>
-          </a:xfrm>
-          <a:prstGeom prst="roundRect">
-            <a:avLst>
-              <a:gd name="adj" fmla="val 20000"/>
-            </a:avLst>
-          </a:prstGeom>
-          <a:solidFill>
-            <a:srgbClr val="A4133C"/>
-          </a:solidFill>
-          <a:ln/>
-        </p:spPr>
-      </p:sp>
-      <p:sp>
-        <p:nvSpPr>
-          <p:cNvPr id="19" name="Text 16"/>
-          <p:cNvSpPr/>
-          <p:nvPr/>
-        </p:nvSpPr>
-        <p:spPr>
-          <a:xfrm>
-            <a:off x="777240" y="3264408"/>
-            <a:ext cx="548640" cy="457200"/>
-          </a:xfrm>
-          <a:prstGeom prst="rect">
-            <a:avLst/>
-          </a:prstGeom>
-          <a:noFill/>
-          <a:ln/>
-        </p:spPr>
-        <p:txBody>
-          <a:bodyPr wrap="square" lIns="0" tIns="0" rIns="0" bIns="0" rtlCol="0" anchor="ctr"/>
-          <a:lstStyle/>
-          <a:p>
-            <a:pPr algn="ctr" indent="0" marL="0">
-              <a:buNone/>
-            </a:pPr>
-            <a:r>
-              <a:rPr lang="en-US" sz="1500" b="1" dirty="0">
-                <a:solidFill>
-                  <a:srgbClr val="FFFFFF"/>
-                </a:solidFill>
-                <a:latin typeface="Cambria" pitchFamily="34" charset="0"/>
-                <a:ea typeface="Cambria" pitchFamily="34" charset="-122"/>
-                <a:cs typeface="Cambria" pitchFamily="34" charset="-120"/>
-              </a:rPr>
-              <a:t>A₂</a:t>
-            </a:r>
-            <a:endParaRPr lang="en-US" sz="1500" dirty="0"/>
-          </a:p>
-        </p:txBody>
-      </p:sp>
-      <p:sp>
-        <p:nvSpPr>
-          <p:cNvPr id="20" name="Text 17"/>
-          <p:cNvSpPr/>
-          <p:nvPr/>
-        </p:nvSpPr>
-        <p:spPr>
-          <a:xfrm>
-            <a:off x="1417320" y="3264408"/>
-            <a:ext cx="1965960" cy="457200"/>
-          </a:xfrm>
-          <a:prstGeom prst="rect">
-            <a:avLst/>
-          </a:prstGeom>
-          <a:noFill/>
-          <a:ln/>
-        </p:spPr>
-        <p:txBody>
-          <a:bodyPr wrap="square" lIns="0" tIns="0" rIns="0" bIns="0" rtlCol="0" anchor="ctr"/>
-          <a:lstStyle/>
-          <a:p>
-            <a:pPr algn="l" indent="0" marL="0">
-              <a:buNone/>
-            </a:pPr>
-            <a:r>
-              <a:rPr lang="en-US" sz="1350" dirty="0">
-                <a:solidFill>
-                  <a:srgbClr val="2B2B33"/>
-                </a:solidFill>
-                <a:latin typeface="Calibri" pitchFamily="34" charset="0"/>
-                <a:ea typeface="Calibri" pitchFamily="34" charset="-122"/>
-                <a:cs typeface="Calibri" pitchFamily="34" charset="-120"/>
-              </a:rPr>
-              <a:t>Age ≥ 75</a:t>
-            </a:r>
-            <a:endParaRPr lang="en-US" sz="1350" dirty="0"/>
-          </a:p>
-        </p:txBody>
-      </p:sp>
-      <p:sp>
-        <p:nvSpPr>
-          <p:cNvPr id="21" name="Shape 18"/>
-          <p:cNvSpPr/>
-          <p:nvPr/>
-        </p:nvSpPr>
-        <p:spPr>
-          <a:xfrm>
-            <a:off x="3337560" y="3328416"/>
-            <a:ext cx="329184" cy="329184"/>
-          </a:xfrm>
-          <a:prstGeom prst="ellipse">
-            <a:avLst/>
-          </a:prstGeom>
-          <a:solidFill>
-            <a:srgbClr val="FBD8DF"/>
-          </a:solidFill>
-          <a:ln/>
-        </p:spPr>
-      </p:sp>
-      <p:sp>
-        <p:nvSpPr>
-          <p:cNvPr id="22" name="Text 19"/>
-          <p:cNvSpPr/>
-          <p:nvPr/>
-        </p:nvSpPr>
-        <p:spPr>
-          <a:xfrm>
-            <a:off x="3337560" y="3328416"/>
-            <a:ext cx="329184" cy="329184"/>
-          </a:xfrm>
-          <a:prstGeom prst="rect">
-            <a:avLst/>
-          </a:prstGeom>
-          <a:noFill/>
-          <a:ln/>
-        </p:spPr>
-        <p:txBody>
-          <a:bodyPr wrap="square" lIns="0" tIns="0" rIns="0" bIns="0" rtlCol="0" anchor="ctr"/>
-          <a:lstStyle/>
-          <a:p>
-            <a:pPr algn="ctr" indent="0" marL="0">
-              <a:buNone/>
-            </a:pPr>
-            <a:r>
-              <a:rPr lang="en-US" sz="1300" b="1" dirty="0">
-                <a:solidFill>
-                  <a:srgbClr val="A4133C"/>
-                </a:solidFill>
-                <a:latin typeface="Calibri" pitchFamily="34" charset="0"/>
-                <a:ea typeface="Calibri" pitchFamily="34" charset="-122"/>
-                <a:cs typeface="Calibri" pitchFamily="34" charset="-120"/>
-              </a:rPr>
-              <a:t>2</a:t>
-            </a:r>
-            <a:endParaRPr lang="en-US" sz="1300" dirty="0"/>
-          </a:p>
-        </p:txBody>
-      </p:sp>
-      <p:sp>
-        <p:nvSpPr>
-          <p:cNvPr id="23" name="Shape 20"/>
-          <p:cNvSpPr/>
-          <p:nvPr/>
-        </p:nvSpPr>
-        <p:spPr>
-          <a:xfrm>
-            <a:off x="4069080" y="3264408"/>
-            <a:ext cx="457200" cy="457200"/>
-          </a:xfrm>
-          <a:prstGeom prst="roundRect">
-            <a:avLst>
-              <a:gd name="adj" fmla="val 20000"/>
-            </a:avLst>
-          </a:prstGeom>
-          <a:solidFill>
-            <a:srgbClr val="A4133C"/>
-          </a:solidFill>
-          <a:ln/>
-        </p:spPr>
-      </p:sp>
-      <p:sp>
-        <p:nvSpPr>
-          <p:cNvPr id="24" name="Text 21"/>
-          <p:cNvSpPr/>
-          <p:nvPr/>
-        </p:nvSpPr>
-        <p:spPr>
-          <a:xfrm>
-            <a:off x="4023360" y="3264408"/>
-            <a:ext cx="548640" cy="457200"/>
-          </a:xfrm>
-          <a:prstGeom prst="rect">
-            <a:avLst/>
-          </a:prstGeom>
-          <a:noFill/>
-          <a:ln/>
-        </p:spPr>
-        <p:txBody>
-          <a:bodyPr wrap="square" lIns="0" tIns="0" rIns="0" bIns="0" rtlCol="0" anchor="ctr"/>
-          <a:lstStyle/>
-          <a:p>
-            <a:pPr algn="ctr" indent="0" marL="0">
-              <a:buNone/>
-            </a:pPr>
-            <a:r>
-              <a:rPr lang="en-US" sz="1500" b="1" dirty="0">
-                <a:solidFill>
-                  <a:srgbClr val="FFFFFF"/>
-                </a:solidFill>
-                <a:latin typeface="Cambria" pitchFamily="34" charset="0"/>
-                <a:ea typeface="Cambria" pitchFamily="34" charset="-122"/>
-                <a:cs typeface="Cambria" pitchFamily="34" charset="-120"/>
-              </a:rPr>
-              <a:t>D</a:t>
-            </a:r>
-            <a:endParaRPr lang="en-US" sz="1500" dirty="0"/>
-          </a:p>
-        </p:txBody>
-      </p:sp>
-      <p:sp>
-        <p:nvSpPr>
-          <p:cNvPr id="25" name="Text 22"/>
-          <p:cNvSpPr/>
-          <p:nvPr/>
-        </p:nvSpPr>
-        <p:spPr>
-          <a:xfrm>
-            <a:off x="4663440" y="3264408"/>
-            <a:ext cx="1965960" cy="457200"/>
-          </a:xfrm>
-          <a:prstGeom prst="rect">
-            <a:avLst/>
-          </a:prstGeom>
-          <a:noFill/>
-          <a:ln/>
-        </p:spPr>
-        <p:txBody>
-          <a:bodyPr wrap="square" lIns="0" tIns="0" rIns="0" bIns="0" rtlCol="0" anchor="ctr"/>
-          <a:lstStyle/>
-          <a:p>
-            <a:pPr algn="l" indent="0" marL="0">
-              <a:buNone/>
-            </a:pPr>
-            <a:r>
-              <a:rPr lang="en-US" sz="1350" dirty="0">
-                <a:solidFill>
-                  <a:srgbClr val="2B2B33"/>
-                </a:solidFill>
-                <a:latin typeface="Calibri" pitchFamily="34" charset="0"/>
-                <a:ea typeface="Calibri" pitchFamily="34" charset="-122"/>
-                <a:cs typeface="Calibri" pitchFamily="34" charset="-120"/>
-              </a:rPr>
-              <a:t>Diabetes</a:t>
-            </a:r>
-            <a:endParaRPr lang="en-US" sz="1350" dirty="0"/>
-          </a:p>
-        </p:txBody>
-      </p:sp>
-      <p:sp>
-        <p:nvSpPr>
-          <p:cNvPr id="26" name="Shape 23"/>
-          <p:cNvSpPr/>
-          <p:nvPr/>
-        </p:nvSpPr>
-        <p:spPr>
-          <a:xfrm>
-            <a:off x="6583680" y="3328416"/>
-            <a:ext cx="329184" cy="329184"/>
-          </a:xfrm>
-          <a:prstGeom prst="ellipse">
-            <a:avLst/>
-          </a:prstGeom>
-          <a:solidFill>
-            <a:srgbClr val="FBD8DF"/>
-          </a:solidFill>
-          <a:ln/>
-        </p:spPr>
-      </p:sp>
-      <p:sp>
-        <p:nvSpPr>
-          <p:cNvPr id="27" name="Text 24"/>
-          <p:cNvSpPr/>
-          <p:nvPr/>
-        </p:nvSpPr>
-        <p:spPr>
-          <a:xfrm>
-            <a:off x="6583680" y="3328416"/>
-            <a:ext cx="329184" cy="329184"/>
-          </a:xfrm>
-          <a:prstGeom prst="rect">
-            <a:avLst/>
-          </a:prstGeom>
-          <a:noFill/>
-          <a:ln/>
-        </p:spPr>
-        <p:txBody>
-          <a:bodyPr wrap="square" lIns="0" tIns="0" rIns="0" bIns="0" rtlCol="0" anchor="ctr"/>
-          <a:lstStyle/>
-          <a:p>
-            <a:pPr algn="ctr" indent="0" marL="0">
-              <a:buNone/>
-            </a:pPr>
-            <a:r>
-              <a:rPr lang="en-US" sz="1300" b="1" dirty="0">
-                <a:solidFill>
-                  <a:srgbClr val="A4133C"/>
-                </a:solidFill>
-                <a:latin typeface="Calibri" pitchFamily="34" charset="0"/>
-                <a:ea typeface="Calibri" pitchFamily="34" charset="-122"/>
-                <a:cs typeface="Calibri" pitchFamily="34" charset="-120"/>
-              </a:rPr>
-              <a:t>1</a:t>
-            </a:r>
-            <a:endParaRPr lang="en-US" sz="1300" dirty="0"/>
-          </a:p>
-        </p:txBody>
-      </p:sp>
-      <p:sp>
-        <p:nvSpPr>
-          <p:cNvPr id="28" name="Shape 25"/>
-          <p:cNvSpPr/>
-          <p:nvPr/>
-        </p:nvSpPr>
-        <p:spPr>
-          <a:xfrm>
-            <a:off x="822960" y="3922776"/>
-            <a:ext cx="457200" cy="457200"/>
-          </a:xfrm>
-          <a:prstGeom prst="roundRect">
-            <a:avLst>
-              <a:gd name="adj" fmla="val 20000"/>
-            </a:avLst>
-          </a:prstGeom>
-          <a:solidFill>
-            <a:srgbClr val="A4133C"/>
-          </a:solidFill>
-          <a:ln/>
-        </p:spPr>
-      </p:sp>
-      <p:sp>
-        <p:nvSpPr>
-          <p:cNvPr id="29" name="Text 26"/>
-          <p:cNvSpPr/>
-          <p:nvPr/>
-        </p:nvSpPr>
-        <p:spPr>
-          <a:xfrm>
-            <a:off x="777240" y="3922776"/>
-            <a:ext cx="548640" cy="457200"/>
-          </a:xfrm>
-          <a:prstGeom prst="rect">
-            <a:avLst/>
-          </a:prstGeom>
-          <a:noFill/>
-          <a:ln/>
-        </p:spPr>
-        <p:txBody>
-          <a:bodyPr wrap="square" lIns="0" tIns="0" rIns="0" bIns="0" rtlCol="0" anchor="ctr"/>
-          <a:lstStyle/>
-          <a:p>
-            <a:pPr algn="ctr" indent="0" marL="0">
-              <a:buNone/>
-            </a:pPr>
-            <a:r>
-              <a:rPr lang="en-US" sz="1500" b="1" dirty="0">
-                <a:solidFill>
-                  <a:srgbClr val="FFFFFF"/>
-                </a:solidFill>
-                <a:latin typeface="Cambria" pitchFamily="34" charset="0"/>
-                <a:ea typeface="Cambria" pitchFamily="34" charset="-122"/>
-                <a:cs typeface="Cambria" pitchFamily="34" charset="-120"/>
-              </a:rPr>
-              <a:t>S₂</a:t>
-            </a:r>
-            <a:endParaRPr lang="en-US" sz="1500" dirty="0"/>
-          </a:p>
-        </p:txBody>
-      </p:sp>
-      <p:sp>
-        <p:nvSpPr>
-          <p:cNvPr id="30" name="Text 27"/>
-          <p:cNvSpPr/>
-          <p:nvPr/>
-        </p:nvSpPr>
-        <p:spPr>
-          <a:xfrm>
-            <a:off x="1417320" y="3922776"/>
-            <a:ext cx="1965960" cy="457200"/>
-          </a:xfrm>
-          <a:prstGeom prst="rect">
-            <a:avLst/>
-          </a:prstGeom>
-          <a:noFill/>
-          <a:ln/>
-        </p:spPr>
-        <p:txBody>
-          <a:bodyPr wrap="square" lIns="0" tIns="0" rIns="0" bIns="0" rtlCol="0" anchor="ctr"/>
-          <a:lstStyle/>
-          <a:p>
-            <a:pPr algn="l" indent="0" marL="0">
-              <a:buNone/>
-            </a:pPr>
-            <a:r>
-              <a:rPr lang="en-US" sz="1350" dirty="0">
-                <a:solidFill>
-                  <a:srgbClr val="2B2B33"/>
-                </a:solidFill>
-                <a:latin typeface="Calibri" pitchFamily="34" charset="0"/>
-                <a:ea typeface="Calibri" pitchFamily="34" charset="-122"/>
-                <a:cs typeface="Calibri" pitchFamily="34" charset="-120"/>
-              </a:rPr>
-              <a:t>Prior stroke / TIA</a:t>
-            </a:r>
-            <a:endParaRPr lang="en-US" sz="1350" dirty="0"/>
-          </a:p>
-        </p:txBody>
-      </p:sp>
-      <p:sp>
-        <p:nvSpPr>
-          <p:cNvPr id="31" name="Shape 28"/>
-          <p:cNvSpPr/>
-          <p:nvPr/>
-        </p:nvSpPr>
-        <p:spPr>
-          <a:xfrm>
-            <a:off x="3337560" y="3986784"/>
-            <a:ext cx="329184" cy="329184"/>
-          </a:xfrm>
-          <a:prstGeom prst="ellipse">
-            <a:avLst/>
-          </a:prstGeom>
-          <a:solidFill>
-            <a:srgbClr val="FBD8DF"/>
-          </a:solidFill>
-          <a:ln/>
-        </p:spPr>
-      </p:sp>
-      <p:sp>
-        <p:nvSpPr>
-          <p:cNvPr id="32" name="Text 29"/>
-          <p:cNvSpPr/>
-          <p:nvPr/>
-        </p:nvSpPr>
-        <p:spPr>
-          <a:xfrm>
-            <a:off x="3337560" y="3986784"/>
-            <a:ext cx="329184" cy="329184"/>
-          </a:xfrm>
-          <a:prstGeom prst="rect">
-            <a:avLst/>
-          </a:prstGeom>
-          <a:noFill/>
-          <a:ln/>
-        </p:spPr>
-        <p:txBody>
-          <a:bodyPr wrap="square" lIns="0" tIns="0" rIns="0" bIns="0" rtlCol="0" anchor="ctr"/>
-          <a:lstStyle/>
-          <a:p>
-            <a:pPr algn="ctr" indent="0" marL="0">
-              <a:buNone/>
-            </a:pPr>
-            <a:r>
-              <a:rPr lang="en-US" sz="1300" b="1" dirty="0">
-                <a:solidFill>
-                  <a:srgbClr val="A4133C"/>
-                </a:solidFill>
-                <a:latin typeface="Calibri" pitchFamily="34" charset="0"/>
-                <a:ea typeface="Calibri" pitchFamily="34" charset="-122"/>
-                <a:cs typeface="Calibri" pitchFamily="34" charset="-120"/>
-              </a:rPr>
-              <a:t>2</a:t>
-            </a:r>
-            <a:endParaRPr lang="en-US" sz="1300" dirty="0"/>
-          </a:p>
-        </p:txBody>
-      </p:sp>
-      <p:sp>
-        <p:nvSpPr>
-          <p:cNvPr id="33" name="Shape 30"/>
-          <p:cNvSpPr/>
-          <p:nvPr/>
-        </p:nvSpPr>
-        <p:spPr>
-          <a:xfrm>
-            <a:off x="4069080" y="3922776"/>
-            <a:ext cx="457200" cy="457200"/>
-          </a:xfrm>
-          <a:prstGeom prst="roundRect">
-            <a:avLst>
-              <a:gd name="adj" fmla="val 20000"/>
-            </a:avLst>
-          </a:prstGeom>
-          <a:solidFill>
-            <a:srgbClr val="A4133C"/>
-          </a:solidFill>
-          <a:ln/>
-        </p:spPr>
-      </p:sp>
-      <p:sp>
-        <p:nvSpPr>
-          <p:cNvPr id="34" name="Text 31"/>
-          <p:cNvSpPr/>
-          <p:nvPr/>
-        </p:nvSpPr>
-        <p:spPr>
-          <a:xfrm>
-            <a:off x="4023360" y="3922776"/>
-            <a:ext cx="548640" cy="457200"/>
-          </a:xfrm>
-          <a:prstGeom prst="rect">
-            <a:avLst/>
-          </a:prstGeom>
-          <a:noFill/>
-          <a:ln/>
-        </p:spPr>
-        <p:txBody>
-          <a:bodyPr wrap="square" lIns="0" tIns="0" rIns="0" bIns="0" rtlCol="0" anchor="ctr"/>
-          <a:lstStyle/>
-          <a:p>
-            <a:pPr algn="ctr" indent="0" marL="0">
-              <a:buNone/>
-            </a:pPr>
-            <a:r>
-              <a:rPr lang="en-US" sz="1500" b="1" dirty="0">
-                <a:solidFill>
-                  <a:srgbClr val="FFFFFF"/>
-                </a:solidFill>
-                <a:latin typeface="Cambria" pitchFamily="34" charset="0"/>
-                <a:ea typeface="Cambria" pitchFamily="34" charset="-122"/>
-                <a:cs typeface="Cambria" pitchFamily="34" charset="-120"/>
-              </a:rPr>
-              <a:t>V</a:t>
-            </a:r>
-            <a:endParaRPr lang="en-US" sz="1500" dirty="0"/>
-          </a:p>
-        </p:txBody>
-      </p:sp>
-      <p:sp>
-        <p:nvSpPr>
-          <p:cNvPr id="35" name="Text 32"/>
-          <p:cNvSpPr/>
-          <p:nvPr/>
-        </p:nvSpPr>
-        <p:spPr>
-          <a:xfrm>
-            <a:off x="4663440" y="3922776"/>
-            <a:ext cx="1965960" cy="457200"/>
-          </a:xfrm>
-          <a:prstGeom prst="rect">
-            <a:avLst/>
-          </a:prstGeom>
-          <a:noFill/>
-          <a:ln/>
-        </p:spPr>
-        <p:txBody>
-          <a:bodyPr wrap="square" lIns="0" tIns="0" rIns="0" bIns="0" rtlCol="0" anchor="ctr"/>
-          <a:lstStyle/>
-          <a:p>
-            <a:pPr algn="l" indent="0" marL="0">
-              <a:buNone/>
-            </a:pPr>
-            <a:r>
-              <a:rPr lang="en-US" sz="1350" dirty="0">
-                <a:solidFill>
-                  <a:srgbClr val="2B2B33"/>
-                </a:solidFill>
-                <a:latin typeface="Calibri" pitchFamily="34" charset="0"/>
-                <a:ea typeface="Calibri" pitchFamily="34" charset="-122"/>
-                <a:cs typeface="Calibri" pitchFamily="34" charset="-120"/>
-              </a:rPr>
-              <a:t>Vascular disease</a:t>
-            </a:r>
-            <a:endParaRPr lang="en-US" sz="1350" dirty="0"/>
-          </a:p>
-        </p:txBody>
-      </p:sp>
-      <p:sp>
-        <p:nvSpPr>
-          <p:cNvPr id="36" name="Shape 33"/>
-          <p:cNvSpPr/>
-          <p:nvPr/>
-        </p:nvSpPr>
-        <p:spPr>
-          <a:xfrm>
-            <a:off x="6583680" y="3986784"/>
-            <a:ext cx="329184" cy="329184"/>
-          </a:xfrm>
-          <a:prstGeom prst="ellipse">
-            <a:avLst/>
-          </a:prstGeom>
-          <a:solidFill>
-            <a:srgbClr val="FBD8DF"/>
-          </a:solidFill>
-          <a:ln/>
-        </p:spPr>
-      </p:sp>
-      <p:sp>
-        <p:nvSpPr>
-          <p:cNvPr id="37" name="Text 34"/>
-          <p:cNvSpPr/>
-          <p:nvPr/>
-        </p:nvSpPr>
-        <p:spPr>
-          <a:xfrm>
-            <a:off x="6583680" y="3986784"/>
-            <a:ext cx="329184" cy="329184"/>
-          </a:xfrm>
-          <a:prstGeom prst="rect">
-            <a:avLst/>
-          </a:prstGeom>
-          <a:noFill/>
-          <a:ln/>
-        </p:spPr>
-        <p:txBody>
-          <a:bodyPr wrap="square" lIns="0" tIns="0" rIns="0" bIns="0" rtlCol="0" anchor="ctr"/>
-          <a:lstStyle/>
-          <a:p>
-            <a:pPr algn="ctr" indent="0" marL="0">
-              <a:buNone/>
-            </a:pPr>
-            <a:r>
-              <a:rPr lang="en-US" sz="1300" b="1" dirty="0">
-                <a:solidFill>
-                  <a:srgbClr val="A4133C"/>
-                </a:solidFill>
-                <a:latin typeface="Calibri" pitchFamily="34" charset="0"/>
-                <a:ea typeface="Calibri" pitchFamily="34" charset="-122"/>
-                <a:cs typeface="Calibri" pitchFamily="34" charset="-120"/>
-              </a:rPr>
-              <a:t>1</a:t>
-            </a:r>
-            <a:endParaRPr lang="en-US" sz="1300" dirty="0"/>
-          </a:p>
-        </p:txBody>
-      </p:sp>
-      <p:sp>
-        <p:nvSpPr>
-          <p:cNvPr id="38" name="Shape 35"/>
-          <p:cNvSpPr/>
-          <p:nvPr/>
-        </p:nvSpPr>
-        <p:spPr>
-          <a:xfrm>
-            <a:off x="822960" y="4581144"/>
-            <a:ext cx="457200" cy="457200"/>
-          </a:xfrm>
-          <a:prstGeom prst="roundRect">
-            <a:avLst>
-              <a:gd name="adj" fmla="val 20000"/>
-            </a:avLst>
-          </a:prstGeom>
-          <a:solidFill>
-            <a:srgbClr val="A4133C"/>
-          </a:solidFill>
-          <a:ln/>
-        </p:spPr>
-      </p:sp>
-      <p:sp>
-        <p:nvSpPr>
-          <p:cNvPr id="39" name="Text 36"/>
-          <p:cNvSpPr/>
-          <p:nvPr/>
-        </p:nvSpPr>
-        <p:spPr>
-          <a:xfrm>
-            <a:off x="777240" y="4581144"/>
-            <a:ext cx="548640" cy="457200"/>
-          </a:xfrm>
-          <a:prstGeom prst="rect">
-            <a:avLst/>
-          </a:prstGeom>
-          <a:noFill/>
-          <a:ln/>
-        </p:spPr>
-        <p:txBody>
-          <a:bodyPr wrap="square" lIns="0" tIns="0" rIns="0" bIns="0" rtlCol="0" anchor="ctr"/>
-          <a:lstStyle/>
-          <a:p>
-            <a:pPr algn="ctr" indent="0" marL="0">
-              <a:buNone/>
-            </a:pPr>
-            <a:r>
-              <a:rPr lang="en-US" sz="1500" b="1" dirty="0">
-                <a:solidFill>
-                  <a:srgbClr val="FFFFFF"/>
-                </a:solidFill>
-                <a:latin typeface="Cambria" pitchFamily="34" charset="0"/>
-                <a:ea typeface="Cambria" pitchFamily="34" charset="-122"/>
-                <a:cs typeface="Cambria" pitchFamily="34" charset="-120"/>
-              </a:rPr>
-              <a:t>A</a:t>
-            </a:r>
-            <a:endParaRPr lang="en-US" sz="1500" dirty="0"/>
-          </a:p>
-        </p:txBody>
-      </p:sp>
-      <p:sp>
-        <p:nvSpPr>
-          <p:cNvPr id="40" name="Text 37"/>
-          <p:cNvSpPr/>
-          <p:nvPr/>
-        </p:nvSpPr>
-        <p:spPr>
-          <a:xfrm>
-            <a:off x="1417320" y="4581144"/>
-            <a:ext cx="1965960" cy="457200"/>
-          </a:xfrm>
-          <a:prstGeom prst="rect">
-            <a:avLst/>
-          </a:prstGeom>
-          <a:noFill/>
-          <a:ln/>
-        </p:spPr>
-        <p:txBody>
-          <a:bodyPr wrap="square" lIns="0" tIns="0" rIns="0" bIns="0" rtlCol="0" anchor="ctr"/>
-          <a:lstStyle/>
-          <a:p>
-            <a:pPr algn="l" indent="0" marL="0">
-              <a:buNone/>
-            </a:pPr>
-            <a:r>
-              <a:rPr lang="en-US" sz="1350" dirty="0">
-                <a:solidFill>
-                  <a:srgbClr val="2B2B33"/>
-                </a:solidFill>
-                <a:latin typeface="Calibri" pitchFamily="34" charset="0"/>
-                <a:ea typeface="Calibri" pitchFamily="34" charset="-122"/>
-                <a:cs typeface="Calibri" pitchFamily="34" charset="-120"/>
-              </a:rPr>
-              <a:t>Age 65–74</a:t>
-            </a:r>
-            <a:endParaRPr lang="en-US" sz="1350" dirty="0"/>
-          </a:p>
-        </p:txBody>
-      </p:sp>
-      <p:sp>
-        <p:nvSpPr>
-          <p:cNvPr id="41" name="Shape 38"/>
-          <p:cNvSpPr/>
-          <p:nvPr/>
-        </p:nvSpPr>
-        <p:spPr>
-          <a:xfrm>
-            <a:off x="3337560" y="4645152"/>
-            <a:ext cx="329184" cy="329184"/>
-          </a:xfrm>
-          <a:prstGeom prst="ellipse">
-            <a:avLst/>
-          </a:prstGeom>
-          <a:solidFill>
-            <a:srgbClr val="FBD8DF"/>
-          </a:solidFill>
-          <a:ln/>
-        </p:spPr>
-      </p:sp>
-      <p:sp>
-        <p:nvSpPr>
-          <p:cNvPr id="42" name="Text 39"/>
-          <p:cNvSpPr/>
-          <p:nvPr/>
-        </p:nvSpPr>
-        <p:spPr>
-          <a:xfrm>
-            <a:off x="3337560" y="4645152"/>
-            <a:ext cx="329184" cy="329184"/>
-          </a:xfrm>
-          <a:prstGeom prst="rect">
-            <a:avLst/>
-          </a:prstGeom>
-          <a:noFill/>
-          <a:ln/>
-        </p:spPr>
-        <p:txBody>
-          <a:bodyPr wrap="square" lIns="0" tIns="0" rIns="0" bIns="0" rtlCol="0" anchor="ctr"/>
-          <a:lstStyle/>
-          <a:p>
-            <a:pPr algn="ctr" indent="0" marL="0">
-              <a:buNone/>
-            </a:pPr>
-            <a:r>
-              <a:rPr lang="en-US" sz="1300" b="1" dirty="0">
-                <a:solidFill>
-                  <a:srgbClr val="A4133C"/>
-                </a:solidFill>
-                <a:latin typeface="Calibri" pitchFamily="34" charset="0"/>
-                <a:ea typeface="Calibri" pitchFamily="34" charset="-122"/>
-                <a:cs typeface="Calibri" pitchFamily="34" charset="-120"/>
-              </a:rPr>
-              <a:t>1</a:t>
-            </a:r>
-            <a:endParaRPr lang="en-US" sz="1300" dirty="0"/>
-          </a:p>
-        </p:txBody>
-      </p:sp>
-      <p:sp>
-        <p:nvSpPr>
-          <p:cNvPr id="43" name="Shape 40"/>
-          <p:cNvSpPr/>
-          <p:nvPr/>
-        </p:nvSpPr>
-        <p:spPr>
-          <a:xfrm>
-            <a:off x="4069080" y="4581144"/>
-            <a:ext cx="457200" cy="457200"/>
-          </a:xfrm>
-          <a:prstGeom prst="roundRect">
-            <a:avLst>
-              <a:gd name="adj" fmla="val 20000"/>
-            </a:avLst>
-          </a:prstGeom>
-          <a:solidFill>
-            <a:srgbClr val="A4133C"/>
-          </a:solidFill>
-          <a:ln/>
-        </p:spPr>
-      </p:sp>
-      <p:sp>
-        <p:nvSpPr>
-          <p:cNvPr id="44" name="Text 41"/>
-          <p:cNvSpPr/>
-          <p:nvPr/>
-        </p:nvSpPr>
-        <p:spPr>
-          <a:xfrm>
-            <a:off x="4023360" y="4581144"/>
-            <a:ext cx="548640" cy="457200"/>
-          </a:xfrm>
-          <a:prstGeom prst="rect">
-            <a:avLst/>
-          </a:prstGeom>
-          <a:noFill/>
-          <a:ln/>
-        </p:spPr>
-        <p:txBody>
-          <a:bodyPr wrap="square" lIns="0" tIns="0" rIns="0" bIns="0" rtlCol="0" anchor="ctr"/>
-          <a:lstStyle/>
-          <a:p>
-            <a:pPr algn="ctr" indent="0" marL="0">
-              <a:buNone/>
-            </a:pPr>
-            <a:r>
-              <a:rPr lang="en-US" sz="1500" b="1" dirty="0">
-                <a:solidFill>
-                  <a:srgbClr val="FFFFFF"/>
-                </a:solidFill>
-                <a:latin typeface="Cambria" pitchFamily="34" charset="0"/>
-                <a:ea typeface="Cambria" pitchFamily="34" charset="-122"/>
-                <a:cs typeface="Cambria" pitchFamily="34" charset="-120"/>
-              </a:rPr>
-              <a:t>Sc</a:t>
-            </a:r>
-            <a:endParaRPr lang="en-US" sz="1500" dirty="0"/>
-          </a:p>
-        </p:txBody>
-      </p:sp>
-      <p:sp>
-        <p:nvSpPr>
-          <p:cNvPr id="45" name="Text 42"/>
-          <p:cNvSpPr/>
-          <p:nvPr/>
-        </p:nvSpPr>
-        <p:spPr>
-          <a:xfrm>
-            <a:off x="4663440" y="4581144"/>
-            <a:ext cx="1965960" cy="457200"/>
-          </a:xfrm>
-          <a:prstGeom prst="rect">
-            <a:avLst/>
-          </a:prstGeom>
-          <a:noFill/>
-          <a:ln/>
-        </p:spPr>
-        <p:txBody>
-          <a:bodyPr wrap="square" lIns="0" tIns="0" rIns="0" bIns="0" rtlCol="0" anchor="ctr"/>
-          <a:lstStyle/>
-          <a:p>
-            <a:pPr algn="l" indent="0" marL="0">
-              <a:buNone/>
-            </a:pPr>
-            <a:r>
-              <a:rPr lang="en-US" sz="1350" dirty="0">
-                <a:solidFill>
-                  <a:srgbClr val="2B2B33"/>
-                </a:solidFill>
-                <a:latin typeface="Calibri" pitchFamily="34" charset="0"/>
-                <a:ea typeface="Calibri" pitchFamily="34" charset="-122"/>
-                <a:cs typeface="Calibri" pitchFamily="34" charset="-120"/>
-              </a:rPr>
-              <a:t>Sex (female)</a:t>
-            </a:r>
-            <a:endParaRPr lang="en-US" sz="1350" dirty="0"/>
-          </a:p>
-        </p:txBody>
-      </p:sp>
-      <p:sp>
-        <p:nvSpPr>
-          <p:cNvPr id="46" name="Shape 43"/>
-          <p:cNvSpPr/>
-          <p:nvPr/>
-        </p:nvSpPr>
-        <p:spPr>
-          <a:xfrm>
-            <a:off x="6583680" y="4645152"/>
-            <a:ext cx="329184" cy="329184"/>
-          </a:xfrm>
-          <a:prstGeom prst="ellipse">
-            <a:avLst/>
-          </a:prstGeom>
-          <a:solidFill>
-            <a:srgbClr val="FBD8DF"/>
-          </a:solidFill>
-          <a:ln/>
-        </p:spPr>
-      </p:sp>
-      <p:sp>
-        <p:nvSpPr>
-          <p:cNvPr id="47" name="Text 44"/>
-          <p:cNvSpPr/>
-          <p:nvPr/>
-        </p:nvSpPr>
-        <p:spPr>
-          <a:xfrm>
-            <a:off x="6583680" y="4645152"/>
-            <a:ext cx="329184" cy="329184"/>
-          </a:xfrm>
-          <a:prstGeom prst="rect">
-            <a:avLst/>
-          </a:prstGeom>
-          <a:noFill/>
-          <a:ln/>
-        </p:spPr>
-        <p:txBody>
-          <a:bodyPr wrap="square" lIns="0" tIns="0" rIns="0" bIns="0" rtlCol="0" anchor="ctr"/>
-          <a:lstStyle/>
-          <a:p>
-            <a:pPr algn="ctr" indent="0" marL="0">
-              <a:buNone/>
-            </a:pPr>
-            <a:r>
-              <a:rPr lang="en-US" sz="1300" b="1" dirty="0">
-                <a:solidFill>
-                  <a:srgbClr val="A4133C"/>
-                </a:solidFill>
-                <a:latin typeface="Calibri" pitchFamily="34" charset="0"/>
-                <a:ea typeface="Calibri" pitchFamily="34" charset="-122"/>
-                <a:cs typeface="Calibri" pitchFamily="34" charset="-120"/>
-              </a:rPr>
-              <a:t>1</a:t>
-            </a:r>
-            <a:endParaRPr lang="en-US" sz="1300" dirty="0"/>
-          </a:p>
-        </p:txBody>
-      </p:sp>
-      <p:sp>
-        <p:nvSpPr>
-          <p:cNvPr id="48" name="Shape 45"/>
-          <p:cNvSpPr/>
-          <p:nvPr/>
-        </p:nvSpPr>
-        <p:spPr>
-          <a:xfrm>
-            <a:off x="822960" y="5440680"/>
-            <a:ext cx="6263640" cy="457200"/>
-          </a:xfrm>
-          <a:prstGeom prst="roundRect">
-            <a:avLst>
-              <a:gd name="adj" fmla="val 16000"/>
-            </a:avLst>
-          </a:prstGeom>
-          <a:solidFill>
-            <a:srgbClr val="590D22"/>
-          </a:solidFill>
-          <a:ln/>
-        </p:spPr>
-      </p:sp>
-      <p:sp>
-        <p:nvSpPr>
-          <p:cNvPr id="49" name="Text 46"/>
-          <p:cNvSpPr/>
-          <p:nvPr/>
-        </p:nvSpPr>
-        <p:spPr>
-          <a:xfrm>
-            <a:off x="1051560" y="5440680"/>
-            <a:ext cx="5943600" cy="457200"/>
-          </a:xfrm>
-          <a:prstGeom prst="rect">
-            <a:avLst/>
-          </a:prstGeom>
-          <a:noFill/>
-          <a:ln/>
-        </p:spPr>
-        <p:txBody>
-          <a:bodyPr wrap="square" rtlCol="0" anchor="ctr"/>
-          <a:lstStyle/>
-          <a:p>
-            <a:pPr algn="l" indent="0" marL="0">
-              <a:buNone/>
-            </a:pPr>
-            <a:r>
-              <a:rPr lang="en-US" sz="1350" dirty="0">
-                <a:solidFill>
-                  <a:srgbClr val="FBD8DF"/>
-                </a:solidFill>
-                <a:latin typeface="Calibri" pitchFamily="34" charset="0"/>
-                <a:ea typeface="Calibri" pitchFamily="34" charset="-122"/>
-                <a:cs typeface="Calibri" pitchFamily="34" charset="-120"/>
-              </a:rPr>
-              <a:t>Anticoagulate if  </a:t>
-            </a:r>
-            <a:pPr algn="l" indent="0" marL="0">
-              <a:buNone/>
-            </a:pPr>
-            <a:r>
-              <a:rPr lang="en-US" sz="1350" b="1" dirty="0">
-                <a:solidFill>
-                  <a:srgbClr val="FFFFFF"/>
-                </a:solidFill>
-                <a:latin typeface="Calibri" pitchFamily="34" charset="0"/>
-                <a:ea typeface="Calibri" pitchFamily="34" charset="-122"/>
-                <a:cs typeface="Calibri" pitchFamily="34" charset="-120"/>
-              </a:rPr>
-              <a:t>≥ 2 (men)  /  ≥ 3 (women)</a:t>
-            </a:r>
-            <a:endParaRPr lang="en-US" sz="1350" dirty="0"/>
-          </a:p>
-        </p:txBody>
-      </p:sp>
-      <p:sp>
-        <p:nvSpPr>
-          <p:cNvPr id="50" name="Shape 47"/>
-          <p:cNvSpPr/>
-          <p:nvPr/>
-        </p:nvSpPr>
-        <p:spPr>
-          <a:xfrm>
-            <a:off x="7543800" y="1828800"/>
-            <a:ext cx="4160520" cy="4206240"/>
-          </a:xfrm>
-          <a:prstGeom prst="roundRect">
-            <a:avLst>
-              <a:gd name="adj" fmla="val 2637"/>
+              <a:gd name="adj" fmla="val 3038"/>
             </a:avLst>
           </a:prstGeom>
           <a:solidFill>
@@ -7948,38 +7475,124 @@
       </p:sp>
       <p:sp>
         <p:nvSpPr>
-          <p:cNvPr id="51" name="Text 48"/>
-          <p:cNvSpPr/>
-          <p:nvPr/>
-        </p:nvSpPr>
-        <p:spPr>
-          <a:xfrm>
-            <a:off x="7863840" y="2057400"/>
-            <a:ext cx="3566160" cy="365760"/>
-          </a:xfrm>
-          <a:prstGeom prst="rect">
-            <a:avLst/>
-          </a:prstGeom>
-          <a:noFill/>
-          <a:ln/>
-        </p:spPr>
-        <p:txBody>
-          <a:bodyPr wrap="square" rtlCol="0" anchor="t"/>
+          <p:cNvPr id="13" name="Text 9"/>
+          <p:cNvSpPr/>
+          <p:nvPr/>
+        </p:nvSpPr>
+        <p:spPr>
+          <a:xfrm>
+            <a:off x="4562856" y="2194560"/>
+            <a:ext cx="1463040" cy="1280160"/>
+          </a:xfrm>
+          <a:prstGeom prst="rect">
+            <a:avLst/>
+          </a:prstGeom>
+          <a:noFill/>
+          <a:ln/>
+        </p:spPr>
+        <p:txBody>
+          <a:bodyPr wrap="square" lIns="0" tIns="0" rIns="0" bIns="0" rtlCol="0" anchor="t"/>
           <a:lstStyle/>
           <a:p>
             <a:pPr algn="l" indent="0" marL="0">
               <a:buNone/>
             </a:pPr>
             <a:r>
-              <a:rPr lang="en-US" sz="2000" b="1" dirty="0">
-                <a:solidFill>
-                  <a:srgbClr val="FFFFFF"/>
+              <a:rPr lang="en-US" sz="7400" b="1" dirty="0">
+                <a:solidFill>
+                  <a:srgbClr val="FF4D6D"/>
                 </a:solidFill>
                 <a:latin typeface="Cambria" pitchFamily="34" charset="0"/>
                 <a:ea typeface="Cambria" pitchFamily="34" charset="-122"/>
                 <a:cs typeface="Cambria" pitchFamily="34" charset="-120"/>
               </a:rPr>
-              <a:t>HAS-BLED</a:t>
+              <a:t>B</a:t>
+            </a:r>
+            <a:endParaRPr lang="en-US" sz="7400" dirty="0"/>
+          </a:p>
+        </p:txBody>
+      </p:sp>
+      <p:sp>
+        <p:nvSpPr>
+          <p:cNvPr id="14" name="Shape 10"/>
+          <p:cNvSpPr/>
+          <p:nvPr/>
+        </p:nvSpPr>
+        <p:spPr>
+          <a:xfrm>
+            <a:off x="6574536" y="2377440"/>
+            <a:ext cx="914400" cy="914400"/>
+          </a:xfrm>
+          <a:prstGeom prst="ellipse">
+            <a:avLst/>
+          </a:prstGeom>
+          <a:solidFill>
+            <a:srgbClr val="A4133C"/>
+          </a:solidFill>
+          <a:ln/>
+        </p:spPr>
+      </p:sp>
+      <p:pic>
+        <p:nvPicPr>
+          <p:cNvPr id="15" name="Image 2" descr="preencoded.png">    </p:cNvPr>
+          <p:cNvPicPr>
+            <a:picLocks noChangeAspect="1"/>
+          </p:cNvPicPr>
+          <p:nvPr/>
+        </p:nvPicPr>
+        <p:blipFill>
+          <a:blip r:embed="rId3"/>
+          <a:stretch>
+            <a:fillRect/>
+          </a:stretch>
+        </p:blipFill>
+        <p:spPr>
+          <a:xfrm>
+            <a:off x="6812280" y="2615184"/>
+            <a:ext cx="438912" cy="438912"/>
+          </a:xfrm>
+          <a:prstGeom prst="rect">
+            <a:avLst/>
+          </a:prstGeom>
+        </p:spPr>
+      </p:pic>
+      <p:sp>
+        <p:nvSpPr>
+          <p:cNvPr id="16" name="Text 11"/>
+          <p:cNvSpPr/>
+          <p:nvPr/>
+        </p:nvSpPr>
+        <p:spPr>
+          <a:xfrm>
+            <a:off x="4608576" y="3749040"/>
+            <a:ext cx="2971800" cy="822960"/>
+          </a:xfrm>
+          <a:prstGeom prst="rect">
+            <a:avLst/>
+          </a:prstGeom>
+          <a:noFill/>
+          <a:ln/>
+        </p:spPr>
+        <p:txBody>
+          <a:bodyPr wrap="square" rtlCol="0" anchor="t"/>
+          <a:lstStyle/>
+          <a:p>
+            <a:pPr algn="l" indent="0" marL="0">
+              <a:lnSpc>
+                <a:spcPct val="102000"/>
+              </a:lnSpc>
+              <a:buNone/>
+            </a:pPr>
+            <a:r>
+              <a:rPr lang="en-US" sz="2000" b="1" dirty="0">
+                <a:solidFill>
+                  <a:srgbClr val="FFFFFF"/>
+                </a:solidFill>
+                <a:latin typeface="Cambria" pitchFamily="34" charset="0"/>
+                <a:ea typeface="Cambria" pitchFamily="34" charset="-122"/>
+                <a:cs typeface="Cambria" pitchFamily="34" charset="-120"/>
+              </a:rPr>
+              <a:t>Better symptom control</a:t>
             </a:r>
             <a:endParaRPr lang="en-US" sz="2000" dirty="0"/>
           </a:p>
@@ -7987,14 +7600,14 @@
       </p:sp>
       <p:sp>
         <p:nvSpPr>
-          <p:cNvPr id="52" name="Text 49"/>
-          <p:cNvSpPr/>
-          <p:nvPr/>
-        </p:nvSpPr>
-        <p:spPr>
-          <a:xfrm>
-            <a:off x="7863840" y="2432304"/>
-            <a:ext cx="3566160" cy="274320"/>
+          <p:cNvPr id="17" name="Text 12"/>
+          <p:cNvSpPr/>
+          <p:nvPr/>
+        </p:nvSpPr>
+        <p:spPr>
+          <a:xfrm>
+            <a:off x="4608576" y="4617720"/>
+            <a:ext cx="2971800" cy="1234440"/>
           </a:xfrm>
           <a:prstGeom prst="rect">
             <a:avLst/>
@@ -8007,10 +7620,13 @@
           <a:lstStyle/>
           <a:p>
             <a:pPr algn="l" indent="0" marL="0">
-              <a:buNone/>
-            </a:pPr>
-            <a:r>
-              <a:rPr lang="en-US" sz="1200" i="1" dirty="0">
+              <a:lnSpc>
+                <a:spcPct val="115000"/>
+              </a:lnSpc>
+              <a:buNone/>
+            </a:pPr>
+            <a:r>
+              <a:rPr lang="en-US" sz="1400" dirty="0">
                 <a:solidFill>
                   <a:srgbClr val="FBD8DF"/>
                 </a:solidFill>
@@ -8018,416 +7634,241 @@
                 <a:ea typeface="Calibri" pitchFamily="34" charset="-122"/>
                 <a:cs typeface="Calibri" pitchFamily="34" charset="-120"/>
               </a:rPr>
-              <a:t>Bleeding risk on anticoagulation</a:t>
-            </a:r>
-            <a:endParaRPr lang="en-US" sz="1200" dirty="0"/>
-          </a:p>
-        </p:txBody>
-      </p:sp>
-      <p:sp>
-        <p:nvSpPr>
-          <p:cNvPr id="53" name="Text 50"/>
-          <p:cNvSpPr/>
-          <p:nvPr/>
-        </p:nvSpPr>
-        <p:spPr>
-          <a:xfrm>
-            <a:off x="7863840" y="2880360"/>
-            <a:ext cx="3611880" cy="402336"/>
-          </a:xfrm>
-          <a:prstGeom prst="rect">
-            <a:avLst/>
-          </a:prstGeom>
-          <a:noFill/>
-          <a:ln/>
-        </p:spPr>
-        <p:txBody>
-          <a:bodyPr wrap="square" lIns="0" tIns="0" rIns="0" bIns="0" rtlCol="0" anchor="ctr"/>
+              <a:t>Rate control and/or rhythm control to relieve symptoms</a:t>
+            </a:r>
+            <a:endParaRPr lang="en-US" sz="1400" dirty="0"/>
+          </a:p>
+        </p:txBody>
+      </p:sp>
+      <p:sp>
+        <p:nvSpPr>
+          <p:cNvPr id="18" name="Shape 13"/>
+          <p:cNvSpPr/>
+          <p:nvPr/>
+        </p:nvSpPr>
+        <p:spPr>
+          <a:xfrm>
+            <a:off x="8074152" y="1920240"/>
+            <a:ext cx="3611880" cy="4023360"/>
+          </a:xfrm>
+          <a:prstGeom prst="roundRect">
+            <a:avLst>
+              <a:gd name="adj" fmla="val 3038"/>
+            </a:avLst>
+          </a:prstGeom>
+          <a:solidFill>
+            <a:srgbClr val="590D22"/>
+          </a:solidFill>
+          <a:ln/>
+          <a:effectLst>
+            <a:outerShdw sx="100000" sy="100000" kx="0" ky="0" algn="bl" rotWithShape="0" blurRad="127000" dist="50800" dir="5400000">
+              <a:srgbClr val="C9A3AC">
+                <a:alpha val="45000"/>
+              </a:srgbClr>
+            </a:outerShdw>
+          </a:effectLst>
+        </p:spPr>
+      </p:sp>
+      <p:sp>
+        <p:nvSpPr>
+          <p:cNvPr id="19" name="Text 14"/>
+          <p:cNvSpPr/>
+          <p:nvPr/>
+        </p:nvSpPr>
+        <p:spPr>
+          <a:xfrm>
+            <a:off x="8348472" y="2194560"/>
+            <a:ext cx="1463040" cy="1280160"/>
+          </a:xfrm>
+          <a:prstGeom prst="rect">
+            <a:avLst/>
+          </a:prstGeom>
+          <a:noFill/>
+          <a:ln/>
+        </p:spPr>
+        <p:txBody>
+          <a:bodyPr wrap="square" lIns="0" tIns="0" rIns="0" bIns="0" rtlCol="0" anchor="t"/>
           <a:lstStyle/>
           <a:p>
             <a:pPr algn="l" indent="0" marL="0">
               <a:buNone/>
             </a:pPr>
             <a:r>
-              <a:rPr lang="en-US" sz="1300" b="1" dirty="0">
+              <a:rPr lang="en-US" sz="7400" b="1" dirty="0">
                 <a:solidFill>
                   <a:srgbClr val="FF4D6D"/>
+                </a:solidFill>
+                <a:latin typeface="Cambria" pitchFamily="34" charset="0"/>
+                <a:ea typeface="Cambria" pitchFamily="34" charset="-122"/>
+                <a:cs typeface="Cambria" pitchFamily="34" charset="-120"/>
+              </a:rPr>
+              <a:t>C</a:t>
+            </a:r>
+            <a:endParaRPr lang="en-US" sz="7400" dirty="0"/>
+          </a:p>
+        </p:txBody>
+      </p:sp>
+      <p:sp>
+        <p:nvSpPr>
+          <p:cNvPr id="20" name="Shape 15"/>
+          <p:cNvSpPr/>
+          <p:nvPr/>
+        </p:nvSpPr>
+        <p:spPr>
+          <a:xfrm>
+            <a:off x="10360152" y="2377440"/>
+            <a:ext cx="914400" cy="914400"/>
+          </a:xfrm>
+          <a:prstGeom prst="ellipse">
+            <a:avLst/>
+          </a:prstGeom>
+          <a:solidFill>
+            <a:srgbClr val="A4133C"/>
+          </a:solidFill>
+          <a:ln/>
+        </p:spPr>
+      </p:sp>
+      <p:pic>
+        <p:nvPicPr>
+          <p:cNvPr id="21" name="Image 3" descr="preencoded.png">    </p:cNvPr>
+          <p:cNvPicPr>
+            <a:picLocks noChangeAspect="1"/>
+          </p:cNvPicPr>
+          <p:nvPr/>
+        </p:nvPicPr>
+        <p:blipFill>
+          <a:blip r:embed="rId4"/>
+          <a:stretch>
+            <a:fillRect/>
+          </a:stretch>
+        </p:blipFill>
+        <p:spPr>
+          <a:xfrm>
+            <a:off x="10597896" y="2615184"/>
+            <a:ext cx="438912" cy="438912"/>
+          </a:xfrm>
+          <a:prstGeom prst="rect">
+            <a:avLst/>
+          </a:prstGeom>
+        </p:spPr>
+      </p:pic>
+      <p:sp>
+        <p:nvSpPr>
+          <p:cNvPr id="22" name="Text 16"/>
+          <p:cNvSpPr/>
+          <p:nvPr/>
+        </p:nvSpPr>
+        <p:spPr>
+          <a:xfrm>
+            <a:off x="8394192" y="3749040"/>
+            <a:ext cx="2971800" cy="822960"/>
+          </a:xfrm>
+          <a:prstGeom prst="rect">
+            <a:avLst/>
+          </a:prstGeom>
+          <a:noFill/>
+          <a:ln/>
+        </p:spPr>
+        <p:txBody>
+          <a:bodyPr wrap="square" rtlCol="0" anchor="t"/>
+          <a:lstStyle/>
+          <a:p>
+            <a:pPr algn="l" indent="0" marL="0">
+              <a:lnSpc>
+                <a:spcPct val="102000"/>
+              </a:lnSpc>
+              <a:buNone/>
+            </a:pPr>
+            <a:r>
+              <a:rPr lang="en-US" sz="2000" b="1" dirty="0">
+                <a:solidFill>
+                  <a:srgbClr val="FFFFFF"/>
+                </a:solidFill>
+                <a:latin typeface="Cambria" pitchFamily="34" charset="0"/>
+                <a:ea typeface="Cambria" pitchFamily="34" charset="-122"/>
+                <a:cs typeface="Cambria" pitchFamily="34" charset="-120"/>
+              </a:rPr>
+              <a:t>Comorbidities &amp; risk factors</a:t>
+            </a:r>
+            <a:endParaRPr lang="en-US" sz="2000" dirty="0"/>
+          </a:p>
+        </p:txBody>
+      </p:sp>
+      <p:sp>
+        <p:nvSpPr>
+          <p:cNvPr id="23" name="Text 17"/>
+          <p:cNvSpPr/>
+          <p:nvPr/>
+        </p:nvSpPr>
+        <p:spPr>
+          <a:xfrm>
+            <a:off x="8394192" y="4617720"/>
+            <a:ext cx="2971800" cy="1234440"/>
+          </a:xfrm>
+          <a:prstGeom prst="rect">
+            <a:avLst/>
+          </a:prstGeom>
+          <a:noFill/>
+          <a:ln/>
+        </p:spPr>
+        <p:txBody>
+          <a:bodyPr wrap="square" rtlCol="0" anchor="t"/>
+          <a:lstStyle/>
+          <a:p>
+            <a:pPr algn="l" indent="0" marL="0">
+              <a:lnSpc>
+                <a:spcPct val="115000"/>
+              </a:lnSpc>
+              <a:buNone/>
+            </a:pPr>
+            <a:r>
+              <a:rPr lang="en-US" sz="1400" dirty="0">
+                <a:solidFill>
+                  <a:srgbClr val="FBD8DF"/>
                 </a:solidFill>
                 <a:latin typeface="Calibri" pitchFamily="34" charset="0"/>
                 <a:ea typeface="Calibri" pitchFamily="34" charset="-122"/>
                 <a:cs typeface="Calibri" pitchFamily="34" charset="-120"/>
               </a:rPr>
-              <a:t>H  </a:t>
-            </a:r>
-            <a:pPr algn="l" indent="0" marL="0">
-              <a:buNone/>
-            </a:pPr>
-            <a:r>
-              <a:rPr lang="en-US" sz="1300" dirty="0">
-                <a:solidFill>
-                  <a:srgbClr val="FBD8DF"/>
+              <a:t>Treat HTN, sleep apnoea, obesity, alcohol excess, diabetes</a:t>
+            </a:r>
+            <a:endParaRPr lang="en-US" sz="1400" dirty="0"/>
+          </a:p>
+        </p:txBody>
+      </p:sp>
+      <p:sp>
+        <p:nvSpPr>
+          <p:cNvPr id="24" name="Text 18"/>
+          <p:cNvSpPr/>
+          <p:nvPr/>
+        </p:nvSpPr>
+        <p:spPr>
+          <a:xfrm>
+            <a:off x="11277295" y="6355080"/>
+            <a:ext cx="548640" cy="320040"/>
+          </a:xfrm>
+          <a:prstGeom prst="rect">
+            <a:avLst/>
+          </a:prstGeom>
+          <a:noFill/>
+          <a:ln/>
+        </p:spPr>
+        <p:txBody>
+          <a:bodyPr wrap="square" rtlCol="0" anchor="t"/>
+          <a:lstStyle/>
+          <a:p>
+            <a:pPr algn="r" indent="0" marL="0">
+              <a:buNone/>
+            </a:pPr>
+            <a:r>
+              <a:rPr lang="en-US" sz="1100" b="1" dirty="0">
+                <a:solidFill>
+                  <a:srgbClr val="6B6B76"/>
                 </a:solidFill>
                 <a:latin typeface="Calibri" pitchFamily="34" charset="0"/>
                 <a:ea typeface="Calibri" pitchFamily="34" charset="-122"/>
                 <a:cs typeface="Calibri" pitchFamily="34" charset="-120"/>
               </a:rPr>
-              <a:t>— Hypertension</a:t>
-            </a:r>
-            <a:endParaRPr lang="en-US" sz="1300" dirty="0"/>
-          </a:p>
-        </p:txBody>
-      </p:sp>
-      <p:sp>
-        <p:nvSpPr>
-          <p:cNvPr id="54" name="Text 51"/>
-          <p:cNvSpPr/>
-          <p:nvPr/>
-        </p:nvSpPr>
-        <p:spPr>
-          <a:xfrm>
-            <a:off x="7863840" y="3310128"/>
-            <a:ext cx="3611880" cy="402336"/>
-          </a:xfrm>
-          <a:prstGeom prst="rect">
-            <a:avLst/>
-          </a:prstGeom>
-          <a:noFill/>
-          <a:ln/>
-        </p:spPr>
-        <p:txBody>
-          <a:bodyPr wrap="square" lIns="0" tIns="0" rIns="0" bIns="0" rtlCol="0" anchor="ctr"/>
-          <a:lstStyle/>
-          <a:p>
-            <a:pPr algn="l" indent="0" marL="0">
-              <a:buNone/>
-            </a:pPr>
-            <a:r>
-              <a:rPr lang="en-US" sz="1300" b="1" dirty="0">
-                <a:solidFill>
-                  <a:srgbClr val="FF4D6D"/>
-                </a:solidFill>
-                <a:latin typeface="Calibri" pitchFamily="34" charset="0"/>
-                <a:ea typeface="Calibri" pitchFamily="34" charset="-122"/>
-                <a:cs typeface="Calibri" pitchFamily="34" charset="-120"/>
-              </a:rPr>
-              <a:t>A  </a:t>
-            </a:r>
-            <a:pPr algn="l" indent="0" marL="0">
-              <a:buNone/>
-            </a:pPr>
-            <a:r>
-              <a:rPr lang="en-US" sz="1300" dirty="0">
-                <a:solidFill>
-                  <a:srgbClr val="FBD8DF"/>
-                </a:solidFill>
-                <a:latin typeface="Calibri" pitchFamily="34" charset="0"/>
-                <a:ea typeface="Calibri" pitchFamily="34" charset="-122"/>
-                <a:cs typeface="Calibri" pitchFamily="34" charset="-120"/>
-              </a:rPr>
-              <a:t>— Abnormal renal / liver</a:t>
-            </a:r>
-            <a:endParaRPr lang="en-US" sz="1300" dirty="0"/>
-          </a:p>
-        </p:txBody>
-      </p:sp>
-      <p:sp>
-        <p:nvSpPr>
-          <p:cNvPr id="55" name="Text 52"/>
-          <p:cNvSpPr/>
-          <p:nvPr/>
-        </p:nvSpPr>
-        <p:spPr>
-          <a:xfrm>
-            <a:off x="7863840" y="3739896"/>
-            <a:ext cx="3611880" cy="402336"/>
-          </a:xfrm>
-          <a:prstGeom prst="rect">
-            <a:avLst/>
-          </a:prstGeom>
-          <a:noFill/>
-          <a:ln/>
-        </p:spPr>
-        <p:txBody>
-          <a:bodyPr wrap="square" lIns="0" tIns="0" rIns="0" bIns="0" rtlCol="0" anchor="ctr"/>
-          <a:lstStyle/>
-          <a:p>
-            <a:pPr algn="l" indent="0" marL="0">
-              <a:buNone/>
-            </a:pPr>
-            <a:r>
-              <a:rPr lang="en-US" sz="1300" b="1" dirty="0">
-                <a:solidFill>
-                  <a:srgbClr val="FF4D6D"/>
-                </a:solidFill>
-                <a:latin typeface="Calibri" pitchFamily="34" charset="0"/>
-                <a:ea typeface="Calibri" pitchFamily="34" charset="-122"/>
-                <a:cs typeface="Calibri" pitchFamily="34" charset="-120"/>
-              </a:rPr>
-              <a:t>S  </a:t>
-            </a:r>
-            <a:pPr algn="l" indent="0" marL="0">
-              <a:buNone/>
-            </a:pPr>
-            <a:r>
-              <a:rPr lang="en-US" sz="1300" dirty="0">
-                <a:solidFill>
-                  <a:srgbClr val="FBD8DF"/>
-                </a:solidFill>
-                <a:latin typeface="Calibri" pitchFamily="34" charset="0"/>
-                <a:ea typeface="Calibri" pitchFamily="34" charset="-122"/>
-                <a:cs typeface="Calibri" pitchFamily="34" charset="-120"/>
-              </a:rPr>
-              <a:t>— Stroke history</a:t>
-            </a:r>
-            <a:endParaRPr lang="en-US" sz="1300" dirty="0"/>
-          </a:p>
-        </p:txBody>
-      </p:sp>
-      <p:sp>
-        <p:nvSpPr>
-          <p:cNvPr id="56" name="Text 53"/>
-          <p:cNvSpPr/>
-          <p:nvPr/>
-        </p:nvSpPr>
-        <p:spPr>
-          <a:xfrm>
-            <a:off x="7863840" y="4169664"/>
-            <a:ext cx="3611880" cy="402336"/>
-          </a:xfrm>
-          <a:prstGeom prst="rect">
-            <a:avLst/>
-          </a:prstGeom>
-          <a:noFill/>
-          <a:ln/>
-        </p:spPr>
-        <p:txBody>
-          <a:bodyPr wrap="square" lIns="0" tIns="0" rIns="0" bIns="0" rtlCol="0" anchor="ctr"/>
-          <a:lstStyle/>
-          <a:p>
-            <a:pPr algn="l" indent="0" marL="0">
-              <a:buNone/>
-            </a:pPr>
-            <a:r>
-              <a:rPr lang="en-US" sz="1300" b="1" dirty="0">
-                <a:solidFill>
-                  <a:srgbClr val="FF4D6D"/>
-                </a:solidFill>
-                <a:latin typeface="Calibri" pitchFamily="34" charset="0"/>
-                <a:ea typeface="Calibri" pitchFamily="34" charset="-122"/>
-                <a:cs typeface="Calibri" pitchFamily="34" charset="-120"/>
-              </a:rPr>
-              <a:t>B  </a:t>
-            </a:r>
-            <a:pPr algn="l" indent="0" marL="0">
-              <a:buNone/>
-            </a:pPr>
-            <a:r>
-              <a:rPr lang="en-US" sz="1300" dirty="0">
-                <a:solidFill>
-                  <a:srgbClr val="FBD8DF"/>
-                </a:solidFill>
-                <a:latin typeface="Calibri" pitchFamily="34" charset="0"/>
-                <a:ea typeface="Calibri" pitchFamily="34" charset="-122"/>
-                <a:cs typeface="Calibri" pitchFamily="34" charset="-120"/>
-              </a:rPr>
-              <a:t>— Bleeding tendency</a:t>
-            </a:r>
-            <a:endParaRPr lang="en-US" sz="1300" dirty="0"/>
-          </a:p>
-        </p:txBody>
-      </p:sp>
-      <p:sp>
-        <p:nvSpPr>
-          <p:cNvPr id="57" name="Text 54"/>
-          <p:cNvSpPr/>
-          <p:nvPr/>
-        </p:nvSpPr>
-        <p:spPr>
-          <a:xfrm>
-            <a:off x="7863840" y="4599432"/>
-            <a:ext cx="3611880" cy="402336"/>
-          </a:xfrm>
-          <a:prstGeom prst="rect">
-            <a:avLst/>
-          </a:prstGeom>
-          <a:noFill/>
-          <a:ln/>
-        </p:spPr>
-        <p:txBody>
-          <a:bodyPr wrap="square" lIns="0" tIns="0" rIns="0" bIns="0" rtlCol="0" anchor="ctr"/>
-          <a:lstStyle/>
-          <a:p>
-            <a:pPr algn="l" indent="0" marL="0">
-              <a:buNone/>
-            </a:pPr>
-            <a:r>
-              <a:rPr lang="en-US" sz="1300" b="1" dirty="0">
-                <a:solidFill>
-                  <a:srgbClr val="FF4D6D"/>
-                </a:solidFill>
-                <a:latin typeface="Calibri" pitchFamily="34" charset="0"/>
-                <a:ea typeface="Calibri" pitchFamily="34" charset="-122"/>
-                <a:cs typeface="Calibri" pitchFamily="34" charset="-120"/>
-              </a:rPr>
-              <a:t>L  </a:t>
-            </a:r>
-            <a:pPr algn="l" indent="0" marL="0">
-              <a:buNone/>
-            </a:pPr>
-            <a:r>
-              <a:rPr lang="en-US" sz="1300" dirty="0">
-                <a:solidFill>
-                  <a:srgbClr val="FBD8DF"/>
-                </a:solidFill>
-                <a:latin typeface="Calibri" pitchFamily="34" charset="0"/>
-                <a:ea typeface="Calibri" pitchFamily="34" charset="-122"/>
-                <a:cs typeface="Calibri" pitchFamily="34" charset="-120"/>
-              </a:rPr>
-              <a:t>— Labile INR</a:t>
-            </a:r>
-            <a:endParaRPr lang="en-US" sz="1300" dirty="0"/>
-          </a:p>
-        </p:txBody>
-      </p:sp>
-      <p:sp>
-        <p:nvSpPr>
-          <p:cNvPr id="58" name="Text 55"/>
-          <p:cNvSpPr/>
-          <p:nvPr/>
-        </p:nvSpPr>
-        <p:spPr>
-          <a:xfrm>
-            <a:off x="7863840" y="5029200"/>
-            <a:ext cx="3611880" cy="402336"/>
-          </a:xfrm>
-          <a:prstGeom prst="rect">
-            <a:avLst/>
-          </a:prstGeom>
-          <a:noFill/>
-          <a:ln/>
-        </p:spPr>
-        <p:txBody>
-          <a:bodyPr wrap="square" lIns="0" tIns="0" rIns="0" bIns="0" rtlCol="0" anchor="ctr"/>
-          <a:lstStyle/>
-          <a:p>
-            <a:pPr algn="l" indent="0" marL="0">
-              <a:buNone/>
-            </a:pPr>
-            <a:r>
-              <a:rPr lang="en-US" sz="1300" b="1" dirty="0">
-                <a:solidFill>
-                  <a:srgbClr val="FF4D6D"/>
-                </a:solidFill>
-                <a:latin typeface="Calibri" pitchFamily="34" charset="0"/>
-                <a:ea typeface="Calibri" pitchFamily="34" charset="-122"/>
-                <a:cs typeface="Calibri" pitchFamily="34" charset="-120"/>
-              </a:rPr>
-              <a:t>E  </a:t>
-            </a:r>
-            <a:pPr algn="l" indent="0" marL="0">
-              <a:buNone/>
-            </a:pPr>
-            <a:r>
-              <a:rPr lang="en-US" sz="1300" dirty="0">
-                <a:solidFill>
-                  <a:srgbClr val="FBD8DF"/>
-                </a:solidFill>
-                <a:latin typeface="Calibri" pitchFamily="34" charset="0"/>
-                <a:ea typeface="Calibri" pitchFamily="34" charset="-122"/>
-                <a:cs typeface="Calibri" pitchFamily="34" charset="-120"/>
-              </a:rPr>
-              <a:t>— Elderly (&gt; 65)</a:t>
-            </a:r>
-            <a:endParaRPr lang="en-US" sz="1300" dirty="0"/>
-          </a:p>
-        </p:txBody>
-      </p:sp>
-      <p:sp>
-        <p:nvSpPr>
-          <p:cNvPr id="59" name="Text 56"/>
-          <p:cNvSpPr/>
-          <p:nvPr/>
-        </p:nvSpPr>
-        <p:spPr>
-          <a:xfrm>
-            <a:off x="7863840" y="5458968"/>
-            <a:ext cx="3611880" cy="402336"/>
-          </a:xfrm>
-          <a:prstGeom prst="rect">
-            <a:avLst/>
-          </a:prstGeom>
-          <a:noFill/>
-          <a:ln/>
-        </p:spPr>
-        <p:txBody>
-          <a:bodyPr wrap="square" lIns="0" tIns="0" rIns="0" bIns="0" rtlCol="0" anchor="ctr"/>
-          <a:lstStyle/>
-          <a:p>
-            <a:pPr algn="l" indent="0" marL="0">
-              <a:buNone/>
-            </a:pPr>
-            <a:r>
-              <a:rPr lang="en-US" sz="1300" b="1" dirty="0">
-                <a:solidFill>
-                  <a:srgbClr val="FF4D6D"/>
-                </a:solidFill>
-                <a:latin typeface="Calibri" pitchFamily="34" charset="0"/>
-                <a:ea typeface="Calibri" pitchFamily="34" charset="-122"/>
-                <a:cs typeface="Calibri" pitchFamily="34" charset="-120"/>
-              </a:rPr>
-              <a:t>D  </a:t>
-            </a:r>
-            <a:pPr algn="l" indent="0" marL="0">
-              <a:buNone/>
-            </a:pPr>
-            <a:r>
-              <a:rPr lang="en-US" sz="1300" dirty="0">
-                <a:solidFill>
-                  <a:srgbClr val="FBD8DF"/>
-                </a:solidFill>
-                <a:latin typeface="Calibri" pitchFamily="34" charset="0"/>
-                <a:ea typeface="Calibri" pitchFamily="34" charset="-122"/>
-                <a:cs typeface="Calibri" pitchFamily="34" charset="-120"/>
-              </a:rPr>
-              <a:t>— Drugs / alcohol</a:t>
-            </a:r>
-            <a:endParaRPr lang="en-US" sz="1300" dirty="0"/>
-          </a:p>
-        </p:txBody>
-      </p:sp>
-      <p:sp>
-        <p:nvSpPr>
-          <p:cNvPr id="60" name="Text 57"/>
-          <p:cNvSpPr/>
-          <p:nvPr/>
-        </p:nvSpPr>
-        <p:spPr>
-          <a:xfrm>
-            <a:off x="11277295" y="6355080"/>
-            <a:ext cx="548640" cy="320040"/>
-          </a:xfrm>
-          <a:prstGeom prst="rect">
-            <a:avLst/>
-          </a:prstGeom>
-          <a:noFill/>
-          <a:ln/>
-        </p:spPr>
-        <p:txBody>
-          <a:bodyPr wrap="square" rtlCol="0" anchor="t"/>
-          <a:lstStyle/>
-          <a:p>
-            <a:pPr algn="r" indent="0" marL="0">
-              <a:buNone/>
-            </a:pPr>
-            <a:r>
-              <a:rPr lang="en-US" sz="1100" b="1" dirty="0">
-                <a:solidFill>
-                  <a:srgbClr val="6B6B76"/>
-                </a:solidFill>
-                <a:latin typeface="Calibri" pitchFamily="34" charset="0"/>
-                <a:ea typeface="Calibri" pitchFamily="34" charset="-122"/>
-                <a:cs typeface="Calibri" pitchFamily="34" charset="-120"/>
-              </a:rPr>
               <a:t>12</a:t>
             </a:r>
             <a:endParaRPr lang="en-US" sz="1100" dirty="0"/>
@@ -8436,7 +7877,7 @@
       </p:sp>
       <p:sp>
         <p:nvSpPr>
-          <p:cNvPr id="61" name="Text 58"/>
+          <p:cNvPr id="25" name="Text 19"/>
           <p:cNvSpPr/>
           <p:nvPr/>
         </p:nvSpPr>
@@ -8587,7 +8028,7 @@
                 <a:ea typeface="Calibri" pitchFamily="34" charset="-122"/>
                 <a:cs typeface="Calibri" pitchFamily="34" charset="-120"/>
               </a:rPr>
-              <a:t>MANAGEMENT</a:t>
+              <a:t>MANAGEMENT · INTERVENTIONAL</a:t>
             </a:r>
             <a:endParaRPr lang="en-US" sz="1250" dirty="0"/>
           </a:p>
@@ -8626,7 +8067,7 @@
                 <a:ea typeface="Cambria" pitchFamily="34" charset="-122"/>
                 <a:cs typeface="Cambria" pitchFamily="34" charset="-120"/>
               </a:rPr>
-              <a:t>The ABC Pathway</a:t>
+              <a:t>Surgical Treatment of AF</a:t>
             </a:r>
             <a:endParaRPr lang="en-US" sz="3000" dirty="0"/>
           </a:p>
@@ -8640,18 +8081,23 @@
         </p:nvSpPr>
         <p:spPr>
           <a:xfrm>
-            <a:off x="502920" y="1920240"/>
-            <a:ext cx="3611880" cy="4023360"/>
+            <a:off x="502920" y="1828800"/>
+            <a:ext cx="5486400" cy="1783080"/>
           </a:xfrm>
           <a:prstGeom prst="roundRect">
             <a:avLst>
-              <a:gd name="adj" fmla="val 3038"/>
+              <a:gd name="adj" fmla="val 6154"/>
             </a:avLst>
           </a:prstGeom>
           <a:solidFill>
-            <a:srgbClr val="590D22"/>
+            <a:srgbClr val="FFF0F3"/>
           </a:solidFill>
-          <a:ln/>
+          <a:ln w="12700">
+            <a:solidFill>
+              <a:srgbClr val="FBD8DF"/>
+            </a:solidFill>
+            <a:prstDash val="solid"/>
+          </a:ln>
           <a:effectLst>
             <a:outerShdw sx="100000" sy="100000" kx="0" ky="0" algn="bl" rotWithShape="0" blurRad="127000" dist="50800" dir="5400000">
               <a:srgbClr val="C9A3AC">
@@ -8663,66 +8109,32 @@
       </p:sp>
       <p:sp>
         <p:nvSpPr>
-          <p:cNvPr id="7" name="Text 4"/>
-          <p:cNvSpPr/>
-          <p:nvPr/>
-        </p:nvSpPr>
-        <p:spPr>
-          <a:xfrm>
-            <a:off x="777240" y="2194560"/>
-            <a:ext cx="1463040" cy="1280160"/>
-          </a:xfrm>
-          <a:prstGeom prst="rect">
-            <a:avLst/>
-          </a:prstGeom>
-          <a:noFill/>
-          <a:ln/>
-        </p:spPr>
-        <p:txBody>
-          <a:bodyPr wrap="square" lIns="0" tIns="0" rIns="0" bIns="0" rtlCol="0" anchor="t"/>
-          <a:lstStyle/>
-          <a:p>
-            <a:pPr algn="l" indent="0" marL="0">
-              <a:buNone/>
-            </a:pPr>
-            <a:r>
-              <a:rPr lang="en-US" sz="7400" b="1" dirty="0">
-                <a:solidFill>
-                  <a:srgbClr val="FF4D6D"/>
-                </a:solidFill>
-                <a:latin typeface="Cambria" pitchFamily="34" charset="0"/>
-                <a:ea typeface="Cambria" pitchFamily="34" charset="-122"/>
-                <a:cs typeface="Cambria" pitchFamily="34" charset="-120"/>
-              </a:rPr>
-              <a:t>A</a:t>
-            </a:r>
-            <a:endParaRPr lang="en-US" sz="7400" dirty="0"/>
-          </a:p>
-        </p:txBody>
-      </p:sp>
-      <p:sp>
-        <p:nvSpPr>
-          <p:cNvPr id="8" name="Shape 5"/>
-          <p:cNvSpPr/>
-          <p:nvPr/>
-        </p:nvSpPr>
-        <p:spPr>
-          <a:xfrm>
-            <a:off x="2788920" y="2377440"/>
-            <a:ext cx="914400" cy="914400"/>
+          <p:cNvPr id="7" name="Shape 4"/>
+          <p:cNvSpPr/>
+          <p:nvPr/>
+        </p:nvSpPr>
+        <p:spPr>
+          <a:xfrm>
+            <a:off x="822960" y="2103120"/>
+            <a:ext cx="777240" cy="777240"/>
           </a:xfrm>
           <a:prstGeom prst="ellipse">
             <a:avLst/>
           </a:prstGeom>
           <a:solidFill>
-            <a:srgbClr val="A4133C"/>
+            <a:srgbClr val="FFFFFF"/>
           </a:solidFill>
-          <a:ln/>
+          <a:ln w="12700">
+            <a:solidFill>
+              <a:srgbClr val="FBD8DF"/>
+            </a:solidFill>
+            <a:prstDash val="solid"/>
+          </a:ln>
         </p:spPr>
       </p:sp>
       <p:pic>
         <p:nvPicPr>
-          <p:cNvPr id="9" name="Image 1" descr="preencoded.png">    </p:cNvPr>
+          <p:cNvPr id="8" name="Image 1" descr="preencoded.png">    </p:cNvPr>
           <p:cNvPicPr>
             <a:picLocks noChangeAspect="1"/>
           </p:cNvPicPr>
@@ -8736,8 +8148,8 @@
         </p:blipFill>
         <p:spPr>
           <a:xfrm>
-            <a:off x="3026664" y="2615184"/>
-            <a:ext cx="438912" cy="438912"/>
+            <a:off x="1014984" y="2295144"/>
+            <a:ext cx="393192" cy="393192"/>
           </a:xfrm>
           <a:prstGeom prst="rect">
             <a:avLst/>
@@ -8746,108 +8158,113 @@
       </p:pic>
       <p:sp>
         <p:nvSpPr>
-          <p:cNvPr id="10" name="Text 6"/>
-          <p:cNvSpPr/>
-          <p:nvPr/>
-        </p:nvSpPr>
-        <p:spPr>
-          <a:xfrm>
-            <a:off x="822960" y="3749040"/>
-            <a:ext cx="2971800" cy="822960"/>
-          </a:xfrm>
-          <a:prstGeom prst="rect">
-            <a:avLst/>
-          </a:prstGeom>
-          <a:noFill/>
-          <a:ln/>
-        </p:spPr>
-        <p:txBody>
-          <a:bodyPr wrap="square" rtlCol="0" anchor="t"/>
+          <p:cNvPr id="9" name="Text 5"/>
+          <p:cNvSpPr/>
+          <p:nvPr/>
+        </p:nvSpPr>
+        <p:spPr>
+          <a:xfrm>
+            <a:off x="1783080" y="2084832"/>
+            <a:ext cx="3977640" cy="822960"/>
+          </a:xfrm>
+          <a:prstGeom prst="rect">
+            <a:avLst/>
+          </a:prstGeom>
+          <a:noFill/>
+          <a:ln/>
+        </p:spPr>
+        <p:txBody>
+          <a:bodyPr wrap="square" lIns="0" tIns="0" rIns="0" bIns="0" rtlCol="0" anchor="ctr"/>
           <a:lstStyle/>
           <a:p>
             <a:pPr algn="l" indent="0" marL="0">
               <a:lnSpc>
-                <a:spcPct val="102000"/>
+                <a:spcPct val="100000"/>
               </a:lnSpc>
               <a:buNone/>
             </a:pPr>
             <a:r>
-              <a:rPr lang="en-US" sz="2000" b="1" dirty="0">
-                <a:solidFill>
-                  <a:srgbClr val="FFFFFF"/>
+              <a:rPr lang="en-US" sz="1700" b="1" dirty="0">
+                <a:solidFill>
+                  <a:srgbClr val="2B2B33"/>
                 </a:solidFill>
                 <a:latin typeface="Cambria" pitchFamily="34" charset="0"/>
                 <a:ea typeface="Cambria" pitchFamily="34" charset="-122"/>
                 <a:cs typeface="Cambria" pitchFamily="34" charset="-120"/>
               </a:rPr>
-              <a:t>Anticoagulation</a:t>
-            </a:r>
-            <a:endParaRPr lang="en-US" sz="2000" dirty="0"/>
-          </a:p>
-        </p:txBody>
-      </p:sp>
-      <p:sp>
-        <p:nvSpPr>
-          <p:cNvPr id="11" name="Text 7"/>
-          <p:cNvSpPr/>
-          <p:nvPr/>
-        </p:nvSpPr>
-        <p:spPr>
-          <a:xfrm>
-            <a:off x="822960" y="4617720"/>
-            <a:ext cx="2971800" cy="1234440"/>
-          </a:xfrm>
-          <a:prstGeom prst="rect">
-            <a:avLst/>
-          </a:prstGeom>
-          <a:noFill/>
-          <a:ln/>
-        </p:spPr>
-        <p:txBody>
-          <a:bodyPr wrap="square" rtlCol="0" anchor="t"/>
+              <a:t>Catheter Ablation (PVI)</a:t>
+            </a:r>
+            <a:endParaRPr lang="en-US" sz="1700" dirty="0"/>
+          </a:p>
+        </p:txBody>
+      </p:sp>
+      <p:sp>
+        <p:nvSpPr>
+          <p:cNvPr id="10" name="Text 6"/>
+          <p:cNvSpPr/>
+          <p:nvPr/>
+        </p:nvSpPr>
+        <p:spPr>
+          <a:xfrm>
+            <a:off x="868680" y="2944368"/>
+            <a:ext cx="4754880" cy="603504"/>
+          </a:xfrm>
+          <a:prstGeom prst="rect">
+            <a:avLst/>
+          </a:prstGeom>
+          <a:noFill/>
+          <a:ln/>
+        </p:spPr>
+        <p:txBody>
+          <a:bodyPr wrap="square" lIns="0" tIns="0" rIns="0" bIns="0" rtlCol="0" anchor="t"/>
           <a:lstStyle/>
           <a:p>
             <a:pPr algn="l" indent="0" marL="0">
               <a:lnSpc>
-                <a:spcPct val="115000"/>
+                <a:spcPct val="110000"/>
               </a:lnSpc>
               <a:buNone/>
             </a:pPr>
             <a:r>
-              <a:rPr lang="en-US" sz="1400" dirty="0">
-                <a:solidFill>
-                  <a:srgbClr val="FBD8DF"/>
+              <a:rPr lang="en-US" sz="1250" dirty="0">
+                <a:solidFill>
+                  <a:srgbClr val="6B6B76"/>
                 </a:solidFill>
                 <a:latin typeface="Calibri" pitchFamily="34" charset="0"/>
                 <a:ea typeface="Calibri" pitchFamily="34" charset="-122"/>
                 <a:cs typeface="Calibri" pitchFamily="34" charset="-120"/>
               </a:rPr>
-              <a:t>Avoid stroke — assess with CHA₂DS₂-VASc, then a DOAC (or warfarin where indicated)</a:t>
-            </a:r>
-            <a:endParaRPr lang="en-US" sz="1400" dirty="0"/>
-          </a:p>
-        </p:txBody>
-      </p:sp>
-      <p:sp>
-        <p:nvSpPr>
-          <p:cNvPr id="12" name="Shape 8"/>
-          <p:cNvSpPr/>
-          <p:nvPr/>
-        </p:nvSpPr>
-        <p:spPr>
-          <a:xfrm>
-            <a:off x="4288536" y="1920240"/>
-            <a:ext cx="3611880" cy="4023360"/>
+              <a:t>Pulmonary vein isolation ablates the triggering foci — first-line interventional rhythm control.</a:t>
+            </a:r>
+            <a:endParaRPr lang="en-US" sz="1250" dirty="0"/>
+          </a:p>
+        </p:txBody>
+      </p:sp>
+      <p:sp>
+        <p:nvSpPr>
+          <p:cNvPr id="11" name="Shape 7"/>
+          <p:cNvSpPr/>
+          <p:nvPr/>
+        </p:nvSpPr>
+        <p:spPr>
+          <a:xfrm>
+            <a:off x="6199632" y="1828800"/>
+            <a:ext cx="5486400" cy="1783080"/>
           </a:xfrm>
           <a:prstGeom prst="roundRect">
             <a:avLst>
-              <a:gd name="adj" fmla="val 3038"/>
+              <a:gd name="adj" fmla="val 6154"/>
             </a:avLst>
           </a:prstGeom>
           <a:solidFill>
-            <a:srgbClr val="590D22"/>
+            <a:srgbClr val="FFF0F3"/>
           </a:solidFill>
-          <a:ln/>
+          <a:ln w="12700">
+            <a:solidFill>
+              <a:srgbClr val="FBD8DF"/>
+            </a:solidFill>
+            <a:prstDash val="solid"/>
+          </a:ln>
           <a:effectLst>
             <a:outerShdw sx="100000" sy="100000" kx="0" ky="0" algn="bl" rotWithShape="0" blurRad="127000" dist="50800" dir="5400000">
               <a:srgbClr val="C9A3AC">
@@ -8859,66 +8276,32 @@
       </p:sp>
       <p:sp>
         <p:nvSpPr>
-          <p:cNvPr id="13" name="Text 9"/>
-          <p:cNvSpPr/>
-          <p:nvPr/>
-        </p:nvSpPr>
-        <p:spPr>
-          <a:xfrm>
-            <a:off x="4562856" y="2194560"/>
-            <a:ext cx="1463040" cy="1280160"/>
-          </a:xfrm>
-          <a:prstGeom prst="rect">
-            <a:avLst/>
-          </a:prstGeom>
-          <a:noFill/>
-          <a:ln/>
-        </p:spPr>
-        <p:txBody>
-          <a:bodyPr wrap="square" lIns="0" tIns="0" rIns="0" bIns="0" rtlCol="0" anchor="t"/>
-          <a:lstStyle/>
-          <a:p>
-            <a:pPr algn="l" indent="0" marL="0">
-              <a:buNone/>
-            </a:pPr>
-            <a:r>
-              <a:rPr lang="en-US" sz="7400" b="1" dirty="0">
-                <a:solidFill>
-                  <a:srgbClr val="FF4D6D"/>
-                </a:solidFill>
-                <a:latin typeface="Cambria" pitchFamily="34" charset="0"/>
-                <a:ea typeface="Cambria" pitchFamily="34" charset="-122"/>
-                <a:cs typeface="Cambria" pitchFamily="34" charset="-120"/>
-              </a:rPr>
-              <a:t>B</a:t>
-            </a:r>
-            <a:endParaRPr lang="en-US" sz="7400" dirty="0"/>
-          </a:p>
-        </p:txBody>
-      </p:sp>
-      <p:sp>
-        <p:nvSpPr>
-          <p:cNvPr id="14" name="Shape 10"/>
-          <p:cNvSpPr/>
-          <p:nvPr/>
-        </p:nvSpPr>
-        <p:spPr>
-          <a:xfrm>
-            <a:off x="6574536" y="2377440"/>
-            <a:ext cx="914400" cy="914400"/>
+          <p:cNvPr id="12" name="Shape 8"/>
+          <p:cNvSpPr/>
+          <p:nvPr/>
+        </p:nvSpPr>
+        <p:spPr>
+          <a:xfrm>
+            <a:off x="6519672" y="2103120"/>
+            <a:ext cx="777240" cy="777240"/>
           </a:xfrm>
           <a:prstGeom prst="ellipse">
             <a:avLst/>
           </a:prstGeom>
           <a:solidFill>
-            <a:srgbClr val="A4133C"/>
+            <a:srgbClr val="FFFFFF"/>
           </a:solidFill>
-          <a:ln/>
+          <a:ln w="12700">
+            <a:solidFill>
+              <a:srgbClr val="FBD8DF"/>
+            </a:solidFill>
+            <a:prstDash val="solid"/>
+          </a:ln>
         </p:spPr>
       </p:sp>
       <p:pic>
         <p:nvPicPr>
-          <p:cNvPr id="15" name="Image 2" descr="preencoded.png">    </p:cNvPr>
+          <p:cNvPr id="13" name="Image 2" descr="preencoded.png">    </p:cNvPr>
           <p:cNvPicPr>
             <a:picLocks noChangeAspect="1"/>
           </p:cNvPicPr>
@@ -8932,8 +8315,8 @@
         </p:blipFill>
         <p:spPr>
           <a:xfrm>
-            <a:off x="6812280" y="2615184"/>
-            <a:ext cx="438912" cy="438912"/>
+            <a:off x="6711696" y="2295144"/>
+            <a:ext cx="393192" cy="393192"/>
           </a:xfrm>
           <a:prstGeom prst="rect">
             <a:avLst/>
@@ -8942,108 +8325,113 @@
       </p:pic>
       <p:sp>
         <p:nvSpPr>
-          <p:cNvPr id="16" name="Text 11"/>
-          <p:cNvSpPr/>
-          <p:nvPr/>
-        </p:nvSpPr>
-        <p:spPr>
-          <a:xfrm>
-            <a:off x="4608576" y="3749040"/>
-            <a:ext cx="2971800" cy="822960"/>
-          </a:xfrm>
-          <a:prstGeom prst="rect">
-            <a:avLst/>
-          </a:prstGeom>
-          <a:noFill/>
-          <a:ln/>
-        </p:spPr>
-        <p:txBody>
-          <a:bodyPr wrap="square" rtlCol="0" anchor="t"/>
+          <p:cNvPr id="14" name="Text 9"/>
+          <p:cNvSpPr/>
+          <p:nvPr/>
+        </p:nvSpPr>
+        <p:spPr>
+          <a:xfrm>
+            <a:off x="7479792" y="2084832"/>
+            <a:ext cx="3977640" cy="822960"/>
+          </a:xfrm>
+          <a:prstGeom prst="rect">
+            <a:avLst/>
+          </a:prstGeom>
+          <a:noFill/>
+          <a:ln/>
+        </p:spPr>
+        <p:txBody>
+          <a:bodyPr wrap="square" lIns="0" tIns="0" rIns="0" bIns="0" rtlCol="0" anchor="ctr"/>
           <a:lstStyle/>
           <a:p>
             <a:pPr algn="l" indent="0" marL="0">
               <a:lnSpc>
-                <a:spcPct val="102000"/>
+                <a:spcPct val="100000"/>
               </a:lnSpc>
               <a:buNone/>
             </a:pPr>
             <a:r>
-              <a:rPr lang="en-US" sz="2000" b="1" dirty="0">
-                <a:solidFill>
-                  <a:srgbClr val="FFFFFF"/>
+              <a:rPr lang="en-US" sz="1700" b="1" dirty="0">
+                <a:solidFill>
+                  <a:srgbClr val="2B2B33"/>
                 </a:solidFill>
                 <a:latin typeface="Cambria" pitchFamily="34" charset="0"/>
                 <a:ea typeface="Cambria" pitchFamily="34" charset="-122"/>
                 <a:cs typeface="Cambria" pitchFamily="34" charset="-120"/>
               </a:rPr>
-              <a:t>Better symptom control</a:t>
-            </a:r>
-            <a:endParaRPr lang="en-US" sz="2000" dirty="0"/>
-          </a:p>
-        </p:txBody>
-      </p:sp>
-      <p:sp>
-        <p:nvSpPr>
-          <p:cNvPr id="17" name="Text 12"/>
-          <p:cNvSpPr/>
-          <p:nvPr/>
-        </p:nvSpPr>
-        <p:spPr>
-          <a:xfrm>
-            <a:off x="4608576" y="4617720"/>
-            <a:ext cx="2971800" cy="1234440"/>
-          </a:xfrm>
-          <a:prstGeom prst="rect">
-            <a:avLst/>
-          </a:prstGeom>
-          <a:noFill/>
-          <a:ln/>
-        </p:spPr>
-        <p:txBody>
-          <a:bodyPr wrap="square" rtlCol="0" anchor="t"/>
+              <a:t>Surgical Maze (Cox-Maze IV)</a:t>
+            </a:r>
+            <a:endParaRPr lang="en-US" sz="1700" dirty="0"/>
+          </a:p>
+        </p:txBody>
+      </p:sp>
+      <p:sp>
+        <p:nvSpPr>
+          <p:cNvPr id="15" name="Text 10"/>
+          <p:cNvSpPr/>
+          <p:nvPr/>
+        </p:nvSpPr>
+        <p:spPr>
+          <a:xfrm>
+            <a:off x="6565392" y="2944368"/>
+            <a:ext cx="4754880" cy="603504"/>
+          </a:xfrm>
+          <a:prstGeom prst="rect">
+            <a:avLst/>
+          </a:prstGeom>
+          <a:noFill/>
+          <a:ln/>
+        </p:spPr>
+        <p:txBody>
+          <a:bodyPr wrap="square" lIns="0" tIns="0" rIns="0" bIns="0" rtlCol="0" anchor="t"/>
           <a:lstStyle/>
           <a:p>
             <a:pPr algn="l" indent="0" marL="0">
               <a:lnSpc>
-                <a:spcPct val="115000"/>
+                <a:spcPct val="110000"/>
               </a:lnSpc>
               <a:buNone/>
             </a:pPr>
             <a:r>
-              <a:rPr lang="en-US" sz="1400" dirty="0">
-                <a:solidFill>
-                  <a:srgbClr val="FBD8DF"/>
+              <a:rPr lang="en-US" sz="1250" dirty="0">
+                <a:solidFill>
+                  <a:srgbClr val="6B6B76"/>
                 </a:solidFill>
                 <a:latin typeface="Calibri" pitchFamily="34" charset="0"/>
                 <a:ea typeface="Calibri" pitchFamily="34" charset="-122"/>
                 <a:cs typeface="Calibri" pitchFamily="34" charset="-120"/>
               </a:rPr>
-              <a:t>Rate control and/or rhythm control to relieve symptoms</a:t>
-            </a:r>
-            <a:endParaRPr lang="en-US" sz="1400" dirty="0"/>
-          </a:p>
-        </p:txBody>
-      </p:sp>
-      <p:sp>
-        <p:nvSpPr>
-          <p:cNvPr id="18" name="Shape 13"/>
-          <p:cNvSpPr/>
-          <p:nvPr/>
-        </p:nvSpPr>
-        <p:spPr>
-          <a:xfrm>
-            <a:off x="8074152" y="1920240"/>
-            <a:ext cx="3611880" cy="4023360"/>
+              <a:t>Surgical lesion lines block re-entry, usually with concomitant cardiac surgery — highest rhythm success.</a:t>
+            </a:r>
+            <a:endParaRPr lang="en-US" sz="1250" dirty="0"/>
+          </a:p>
+        </p:txBody>
+      </p:sp>
+      <p:sp>
+        <p:nvSpPr>
+          <p:cNvPr id="16" name="Shape 11"/>
+          <p:cNvSpPr/>
+          <p:nvPr/>
+        </p:nvSpPr>
+        <p:spPr>
+          <a:xfrm>
+            <a:off x="502920" y="3794760"/>
+            <a:ext cx="5486400" cy="1783080"/>
           </a:xfrm>
           <a:prstGeom prst="roundRect">
             <a:avLst>
-              <a:gd name="adj" fmla="val 3038"/>
+              <a:gd name="adj" fmla="val 6154"/>
             </a:avLst>
           </a:prstGeom>
           <a:solidFill>
-            <a:srgbClr val="590D22"/>
+            <a:srgbClr val="FFF0F3"/>
           </a:solidFill>
-          <a:ln/>
+          <a:ln w="12700">
+            <a:solidFill>
+              <a:srgbClr val="FBD8DF"/>
+            </a:solidFill>
+            <a:prstDash val="solid"/>
+          </a:ln>
           <a:effectLst>
             <a:outerShdw sx="100000" sy="100000" kx="0" ky="0" algn="bl" rotWithShape="0" blurRad="127000" dist="50800" dir="5400000">
               <a:srgbClr val="C9A3AC">
@@ -9055,66 +8443,32 @@
       </p:sp>
       <p:sp>
         <p:nvSpPr>
-          <p:cNvPr id="19" name="Text 14"/>
-          <p:cNvSpPr/>
-          <p:nvPr/>
-        </p:nvSpPr>
-        <p:spPr>
-          <a:xfrm>
-            <a:off x="8348472" y="2194560"/>
-            <a:ext cx="1463040" cy="1280160"/>
-          </a:xfrm>
-          <a:prstGeom prst="rect">
-            <a:avLst/>
-          </a:prstGeom>
-          <a:noFill/>
-          <a:ln/>
-        </p:spPr>
-        <p:txBody>
-          <a:bodyPr wrap="square" lIns="0" tIns="0" rIns="0" bIns="0" rtlCol="0" anchor="t"/>
-          <a:lstStyle/>
-          <a:p>
-            <a:pPr algn="l" indent="0" marL="0">
-              <a:buNone/>
-            </a:pPr>
-            <a:r>
-              <a:rPr lang="en-US" sz="7400" b="1" dirty="0">
-                <a:solidFill>
-                  <a:srgbClr val="FF4D6D"/>
-                </a:solidFill>
-                <a:latin typeface="Cambria" pitchFamily="34" charset="0"/>
-                <a:ea typeface="Cambria" pitchFamily="34" charset="-122"/>
-                <a:cs typeface="Cambria" pitchFamily="34" charset="-120"/>
-              </a:rPr>
-              <a:t>C</a:t>
-            </a:r>
-            <a:endParaRPr lang="en-US" sz="7400" dirty="0"/>
-          </a:p>
-        </p:txBody>
-      </p:sp>
-      <p:sp>
-        <p:nvSpPr>
-          <p:cNvPr id="20" name="Shape 15"/>
-          <p:cNvSpPr/>
-          <p:nvPr/>
-        </p:nvSpPr>
-        <p:spPr>
-          <a:xfrm>
-            <a:off x="10360152" y="2377440"/>
-            <a:ext cx="914400" cy="914400"/>
+          <p:cNvPr id="17" name="Shape 12"/>
+          <p:cNvSpPr/>
+          <p:nvPr/>
+        </p:nvSpPr>
+        <p:spPr>
+          <a:xfrm>
+            <a:off x="822960" y="4069080"/>
+            <a:ext cx="777240" cy="777240"/>
           </a:xfrm>
           <a:prstGeom prst="ellipse">
             <a:avLst/>
           </a:prstGeom>
           <a:solidFill>
-            <a:srgbClr val="A4133C"/>
+            <a:srgbClr val="FFFFFF"/>
           </a:solidFill>
-          <a:ln/>
+          <a:ln w="12700">
+            <a:solidFill>
+              <a:srgbClr val="FBD8DF"/>
+            </a:solidFill>
+            <a:prstDash val="solid"/>
+          </a:ln>
         </p:spPr>
       </p:sp>
       <p:pic>
         <p:nvPicPr>
-          <p:cNvPr id="21" name="Image 3" descr="preencoded.png">    </p:cNvPr>
+          <p:cNvPr id="18" name="Image 3" descr="preencoded.png">    </p:cNvPr>
           <p:cNvPicPr>
             <a:picLocks noChangeAspect="1"/>
           </p:cNvPicPr>
@@ -9128,8 +8482,8 @@
         </p:blipFill>
         <p:spPr>
           <a:xfrm>
-            <a:off x="10597896" y="2615184"/>
-            <a:ext cx="438912" cy="438912"/>
+            <a:off x="1014984" y="4261104"/>
+            <a:ext cx="393192" cy="393192"/>
           </a:xfrm>
           <a:prstGeom prst="rect">
             <a:avLst/>
@@ -9138,114 +8492,242 @@
       </p:pic>
       <p:sp>
         <p:nvSpPr>
-          <p:cNvPr id="22" name="Text 16"/>
-          <p:cNvSpPr/>
-          <p:nvPr/>
-        </p:nvSpPr>
-        <p:spPr>
-          <a:xfrm>
-            <a:off x="8394192" y="3749040"/>
-            <a:ext cx="2971800" cy="822960"/>
-          </a:xfrm>
-          <a:prstGeom prst="rect">
-            <a:avLst/>
-          </a:prstGeom>
-          <a:noFill/>
-          <a:ln/>
-        </p:spPr>
-        <p:txBody>
-          <a:bodyPr wrap="square" rtlCol="0" anchor="t"/>
+          <p:cNvPr id="19" name="Text 13"/>
+          <p:cNvSpPr/>
+          <p:nvPr/>
+        </p:nvSpPr>
+        <p:spPr>
+          <a:xfrm>
+            <a:off x="1783080" y="4050792"/>
+            <a:ext cx="3977640" cy="822960"/>
+          </a:xfrm>
+          <a:prstGeom prst="rect">
+            <a:avLst/>
+          </a:prstGeom>
+          <a:noFill/>
+          <a:ln/>
+        </p:spPr>
+        <p:txBody>
+          <a:bodyPr wrap="square" lIns="0" tIns="0" rIns="0" bIns="0" rtlCol="0" anchor="ctr"/>
           <a:lstStyle/>
           <a:p>
             <a:pPr algn="l" indent="0" marL="0">
               <a:lnSpc>
-                <a:spcPct val="102000"/>
+                <a:spcPct val="100000"/>
               </a:lnSpc>
               <a:buNone/>
             </a:pPr>
             <a:r>
-              <a:rPr lang="en-US" sz="2000" b="1" dirty="0">
-                <a:solidFill>
-                  <a:srgbClr val="FFFFFF"/>
+              <a:rPr lang="en-US" sz="1700" b="1" dirty="0">
+                <a:solidFill>
+                  <a:srgbClr val="2B2B33"/>
                 </a:solidFill>
                 <a:latin typeface="Cambria" pitchFamily="34" charset="0"/>
                 <a:ea typeface="Cambria" pitchFamily="34" charset="-122"/>
                 <a:cs typeface="Cambria" pitchFamily="34" charset="-120"/>
               </a:rPr>
-              <a:t>Comorbidities &amp; risk factors</a:t>
-            </a:r>
-            <a:endParaRPr lang="en-US" sz="2000" dirty="0"/>
-          </a:p>
-        </p:txBody>
-      </p:sp>
-      <p:sp>
-        <p:nvSpPr>
-          <p:cNvPr id="23" name="Text 17"/>
-          <p:cNvSpPr/>
-          <p:nvPr/>
-        </p:nvSpPr>
-        <p:spPr>
-          <a:xfrm>
-            <a:off x="8394192" y="4617720"/>
-            <a:ext cx="2971800" cy="1234440"/>
-          </a:xfrm>
-          <a:prstGeom prst="rect">
-            <a:avLst/>
-          </a:prstGeom>
-          <a:noFill/>
-          <a:ln/>
-        </p:spPr>
-        <p:txBody>
-          <a:bodyPr wrap="square" rtlCol="0" anchor="t"/>
+              <a:t>AV Node Ablation + Pacemaker</a:t>
+            </a:r>
+            <a:endParaRPr lang="en-US" sz="1700" dirty="0"/>
+          </a:p>
+        </p:txBody>
+      </p:sp>
+      <p:sp>
+        <p:nvSpPr>
+          <p:cNvPr id="20" name="Text 14"/>
+          <p:cNvSpPr/>
+          <p:nvPr/>
+        </p:nvSpPr>
+        <p:spPr>
+          <a:xfrm>
+            <a:off x="868680" y="4910328"/>
+            <a:ext cx="4754880" cy="603504"/>
+          </a:xfrm>
+          <a:prstGeom prst="rect">
+            <a:avLst/>
+          </a:prstGeom>
+          <a:noFill/>
+          <a:ln/>
+        </p:spPr>
+        <p:txBody>
+          <a:bodyPr wrap="square" lIns="0" tIns="0" rIns="0" bIns="0" rtlCol="0" anchor="t"/>
           <a:lstStyle/>
           <a:p>
             <a:pPr algn="l" indent="0" marL="0">
               <a:lnSpc>
-                <a:spcPct val="115000"/>
+                <a:spcPct val="110000"/>
               </a:lnSpc>
               <a:buNone/>
             </a:pPr>
             <a:r>
-              <a:rPr lang="en-US" sz="1400" dirty="0">
-                <a:solidFill>
-                  <a:srgbClr val="FBD8DF"/>
+              <a:rPr lang="en-US" sz="1250" dirty="0">
+                <a:solidFill>
+                  <a:srgbClr val="6B6B76"/>
                 </a:solidFill>
                 <a:latin typeface="Calibri" pitchFamily="34" charset="0"/>
                 <a:ea typeface="Calibri" pitchFamily="34" charset="-122"/>
                 <a:cs typeface="Calibri" pitchFamily="34" charset="-120"/>
               </a:rPr>
-              <a:t>Treat HTN, sleep apnoea, obesity, alcohol excess, diabetes</a:t>
-            </a:r>
-            <a:endParaRPr lang="en-US" sz="1400" dirty="0"/>
-          </a:p>
-        </p:txBody>
-      </p:sp>
-      <p:sp>
-        <p:nvSpPr>
-          <p:cNvPr id="24" name="Text 18"/>
-          <p:cNvSpPr/>
-          <p:nvPr/>
-        </p:nvSpPr>
-        <p:spPr>
-          <a:xfrm>
-            <a:off x="11277295" y="6355080"/>
-            <a:ext cx="548640" cy="320040"/>
-          </a:xfrm>
-          <a:prstGeom prst="rect">
-            <a:avLst/>
-          </a:prstGeom>
-          <a:noFill/>
-          <a:ln/>
-        </p:spPr>
-        <p:txBody>
-          <a:bodyPr wrap="square" rtlCol="0" anchor="t"/>
-          <a:lstStyle/>
-          <a:p>
-            <a:pPr algn="r" indent="0" marL="0">
-              <a:buNone/>
-            </a:pPr>
-            <a:r>
-              <a:rPr lang="en-US" sz="1100" b="1" dirty="0">
+              <a:t>“Ablate &amp; pace” for refractory rate control; requires a permanent pacemaker.</a:t>
+            </a:r>
+            <a:endParaRPr lang="en-US" sz="1250" dirty="0"/>
+          </a:p>
+        </p:txBody>
+      </p:sp>
+      <p:sp>
+        <p:nvSpPr>
+          <p:cNvPr id="21" name="Shape 15"/>
+          <p:cNvSpPr/>
+          <p:nvPr/>
+        </p:nvSpPr>
+        <p:spPr>
+          <a:xfrm>
+            <a:off x="6199632" y="3794760"/>
+            <a:ext cx="5486400" cy="1783080"/>
+          </a:xfrm>
+          <a:prstGeom prst="roundRect">
+            <a:avLst>
+              <a:gd name="adj" fmla="val 6154"/>
+            </a:avLst>
+          </a:prstGeom>
+          <a:solidFill>
+            <a:srgbClr val="FFF0F3"/>
+          </a:solidFill>
+          <a:ln w="12700">
+            <a:solidFill>
+              <a:srgbClr val="FBD8DF"/>
+            </a:solidFill>
+            <a:prstDash val="solid"/>
+          </a:ln>
+          <a:effectLst>
+            <a:outerShdw sx="100000" sy="100000" kx="0" ky="0" algn="bl" rotWithShape="0" blurRad="127000" dist="50800" dir="5400000">
+              <a:srgbClr val="C9A3AC">
+                <a:alpha val="45000"/>
+              </a:srgbClr>
+            </a:outerShdw>
+          </a:effectLst>
+        </p:spPr>
+      </p:sp>
+      <p:sp>
+        <p:nvSpPr>
+          <p:cNvPr id="22" name="Shape 16"/>
+          <p:cNvSpPr/>
+          <p:nvPr/>
+        </p:nvSpPr>
+        <p:spPr>
+          <a:xfrm>
+            <a:off x="6519672" y="4069080"/>
+            <a:ext cx="777240" cy="777240"/>
+          </a:xfrm>
+          <a:prstGeom prst="ellipse">
+            <a:avLst/>
+          </a:prstGeom>
+          <a:solidFill>
+            <a:srgbClr val="FFFFFF"/>
+          </a:solidFill>
+          <a:ln w="12700">
+            <a:solidFill>
+              <a:srgbClr val="FBD8DF"/>
+            </a:solidFill>
+            <a:prstDash val="solid"/>
+          </a:ln>
+        </p:spPr>
+      </p:sp>
+      <p:pic>
+        <p:nvPicPr>
+          <p:cNvPr id="23" name="Image 4" descr="preencoded.png">    </p:cNvPr>
+          <p:cNvPicPr>
+            <a:picLocks noChangeAspect="1"/>
+          </p:cNvPicPr>
+          <p:nvPr/>
+        </p:nvPicPr>
+        <p:blipFill>
+          <a:blip r:embed="rId5"/>
+          <a:stretch>
+            <a:fillRect/>
+          </a:stretch>
+        </p:blipFill>
+        <p:spPr>
+          <a:xfrm>
+            <a:off x="6711696" y="4261104"/>
+            <a:ext cx="393192" cy="393192"/>
+          </a:xfrm>
+          <a:prstGeom prst="rect">
+            <a:avLst/>
+          </a:prstGeom>
+        </p:spPr>
+      </p:pic>
+      <p:sp>
+        <p:nvSpPr>
+          <p:cNvPr id="24" name="Text 17"/>
+          <p:cNvSpPr/>
+          <p:nvPr/>
+        </p:nvSpPr>
+        <p:spPr>
+          <a:xfrm>
+            <a:off x="7479792" y="4050792"/>
+            <a:ext cx="3977640" cy="822960"/>
+          </a:xfrm>
+          <a:prstGeom prst="rect">
+            <a:avLst/>
+          </a:prstGeom>
+          <a:noFill/>
+          <a:ln/>
+        </p:spPr>
+        <p:txBody>
+          <a:bodyPr wrap="square" lIns="0" tIns="0" rIns="0" bIns="0" rtlCol="0" anchor="ctr"/>
+          <a:lstStyle/>
+          <a:p>
+            <a:pPr algn="l" indent="0" marL="0">
+              <a:lnSpc>
+                <a:spcPct val="100000"/>
+              </a:lnSpc>
+              <a:buNone/>
+            </a:pPr>
+            <a:r>
+              <a:rPr lang="en-US" sz="1700" b="1" dirty="0">
+                <a:solidFill>
+                  <a:srgbClr val="2B2B33"/>
+                </a:solidFill>
+                <a:latin typeface="Cambria" pitchFamily="34" charset="0"/>
+                <a:ea typeface="Cambria" pitchFamily="34" charset="-122"/>
+                <a:cs typeface="Cambria" pitchFamily="34" charset="-120"/>
+              </a:rPr>
+              <a:t>LAA Occlusion / Exclusion</a:t>
+            </a:r>
+            <a:endParaRPr lang="en-US" sz="1700" dirty="0"/>
+          </a:p>
+        </p:txBody>
+      </p:sp>
+      <p:sp>
+        <p:nvSpPr>
+          <p:cNvPr id="25" name="Text 18"/>
+          <p:cNvSpPr/>
+          <p:nvPr/>
+        </p:nvSpPr>
+        <p:spPr>
+          <a:xfrm>
+            <a:off x="6565392" y="4910328"/>
+            <a:ext cx="4754880" cy="603504"/>
+          </a:xfrm>
+          <a:prstGeom prst="rect">
+            <a:avLst/>
+          </a:prstGeom>
+          <a:noFill/>
+          <a:ln/>
+        </p:spPr>
+        <p:txBody>
+          <a:bodyPr wrap="square" lIns="0" tIns="0" rIns="0" bIns="0" rtlCol="0" anchor="t"/>
+          <a:lstStyle/>
+          <a:p>
+            <a:pPr algn="l" indent="0" marL="0">
+              <a:lnSpc>
+                <a:spcPct val="110000"/>
+              </a:lnSpc>
+              <a:buNone/>
+            </a:pPr>
+            <a:r>
+              <a:rPr lang="en-US" sz="1250" dirty="0">
                 <a:solidFill>
                   <a:srgbClr val="6B6B76"/>
                 </a:solidFill>
@@ -9253,6 +8735,120 @@
                 <a:ea typeface="Calibri" pitchFamily="34" charset="-122"/>
                 <a:cs typeface="Calibri" pitchFamily="34" charset="-120"/>
               </a:rPr>
+              <a:t>Watchman device or surgical clip prevents stroke when anticoagulation is unsuitable.</a:t>
+            </a:r>
+            <a:endParaRPr lang="en-US" sz="1250" dirty="0"/>
+          </a:p>
+        </p:txBody>
+      </p:sp>
+      <p:sp>
+        <p:nvSpPr>
+          <p:cNvPr id="26" name="Shape 19"/>
+          <p:cNvSpPr/>
+          <p:nvPr/>
+        </p:nvSpPr>
+        <p:spPr>
+          <a:xfrm>
+            <a:off x="502920" y="5669280"/>
+            <a:ext cx="11183112" cy="502920"/>
+          </a:xfrm>
+          <a:prstGeom prst="roundRect">
+            <a:avLst>
+              <a:gd name="adj" fmla="val 18182"/>
+            </a:avLst>
+          </a:prstGeom>
+          <a:solidFill>
+            <a:srgbClr val="590D22"/>
+          </a:solidFill>
+          <a:ln/>
+        </p:spPr>
+      </p:sp>
+      <p:sp>
+        <p:nvSpPr>
+          <p:cNvPr id="27" name="Text 20"/>
+          <p:cNvSpPr/>
+          <p:nvPr/>
+        </p:nvSpPr>
+        <p:spPr>
+          <a:xfrm>
+            <a:off x="868680" y="5669280"/>
+            <a:ext cx="10515600" cy="502920"/>
+          </a:xfrm>
+          <a:prstGeom prst="rect">
+            <a:avLst/>
+          </a:prstGeom>
+          <a:noFill/>
+          <a:ln/>
+        </p:spPr>
+        <p:txBody>
+          <a:bodyPr wrap="square" rtlCol="0" anchor="ctr"/>
+          <a:lstStyle/>
+          <a:p>
+            <a:pPr algn="l" indent="0" marL="0">
+              <a:buNone/>
+            </a:pPr>
+            <a:r>
+              <a:rPr lang="en-US" sz="1300" b="1" dirty="0">
+                <a:solidFill>
+                  <a:srgbClr val="FF4D6D"/>
+                </a:solidFill>
+                <a:latin typeface="Calibri" pitchFamily="34" charset="0"/>
+                <a:ea typeface="Calibri" pitchFamily="34" charset="-122"/>
+                <a:cs typeface="Calibri" pitchFamily="34" charset="-120"/>
+              </a:rPr>
+              <a:t>Hybrid / convergent ablation  </a:t>
+            </a:r>
+            <a:pPr algn="l" indent="0" marL="0">
+              <a:buNone/>
+            </a:pPr>
+            <a:r>
+              <a:rPr lang="en-US" sz="1300" dirty="0">
+                <a:solidFill>
+                  <a:srgbClr val="FBD8DF"/>
+                </a:solidFill>
+                <a:latin typeface="Calibri" pitchFamily="34" charset="0"/>
+                <a:ea typeface="Calibri" pitchFamily="34" charset="-122"/>
+                <a:cs typeface="Calibri" pitchFamily="34" charset="-120"/>
+              </a:rPr>
+              <a:t>combines catheter and minimally-invasive epicardial approaches for persistent AF.</a:t>
+            </a:r>
+            <a:endParaRPr lang="en-US" sz="1300" dirty="0"/>
+          </a:p>
+        </p:txBody>
+      </p:sp>
+      <p:sp>
+        <p:nvSpPr>
+          <p:cNvPr id="28" name="Text 21"/>
+          <p:cNvSpPr/>
+          <p:nvPr/>
+        </p:nvSpPr>
+        <p:spPr>
+          <a:xfrm>
+            <a:off x="11277295" y="6355080"/>
+            <a:ext cx="548640" cy="320040"/>
+          </a:xfrm>
+          <a:prstGeom prst="rect">
+            <a:avLst/>
+          </a:prstGeom>
+          <a:noFill/>
+          <a:ln/>
+        </p:spPr>
+        <p:txBody>
+          <a:bodyPr wrap="square" rtlCol="0" anchor="t"/>
+          <a:lstStyle/>
+          <a:p>
+            <a:pPr algn="r" indent="0" marL="0">
+              <a:buNone/>
+            </a:pPr>
+            <a:r>
+              <a:rPr lang="en-US" sz="1100" b="1" dirty="0">
+                <a:solidFill>
+                  <a:srgbClr val="6B6B76"/>
+                </a:solidFill>
+                <a:latin typeface="Calibri" pitchFamily="34" charset="0"/>
+                <a:ea typeface="Calibri" pitchFamily="34" charset="-122"/>
+                <a:cs typeface="Calibri" pitchFamily="34" charset="-120"/>
+              </a:rPr>
               <a:t>13</a:t>
             </a:r>
             <a:endParaRPr lang="en-US" sz="1100" dirty="0"/>
@@ -9261,7 +8857,7 @@
       </p:sp>
       <p:sp>
         <p:nvSpPr>
-          <p:cNvPr id="25" name="Text 19"/>
+          <p:cNvPr id="29" name="Text 22"/>
           <p:cNvSpPr/>
           <p:nvPr/>
         </p:nvSpPr>
@@ -23773,7 +23369,7 @@
                 <a:ea typeface="Cambria" pitchFamily="34" charset="-122"/>
                 <a:cs typeface="Cambria" pitchFamily="34" charset="-120"/>
               </a:rPr>
-              <a:t>Common Mimics of AF</a:t>
+              <a:t>Telling the Irregular Rhythms Apart</a:t>
             </a:r>
             <a:endParaRPr lang="en-US" sz="3000" dirty="0"/>
           </a:p>
@@ -23787,12 +23383,325 @@
         </p:nvSpPr>
         <p:spPr>
           <a:xfrm>
-            <a:off x="502920" y="1874520"/>
-            <a:ext cx="3611880" cy="1874520"/>
+            <a:off x="502920" y="1965960"/>
+            <a:ext cx="2231136" cy="548640"/>
           </a:xfrm>
           <a:prstGeom prst="roundRect">
             <a:avLst>
-              <a:gd name="adj" fmla="val 4878"/>
+              <a:gd name="adj" fmla="val 10000"/>
+            </a:avLst>
+          </a:prstGeom>
+          <a:solidFill>
+            <a:srgbClr val="A4133C"/>
+          </a:solidFill>
+          <a:ln/>
+        </p:spPr>
+      </p:sp>
+      <p:sp>
+        <p:nvSpPr>
+          <p:cNvPr id="7" name="Text 4"/>
+          <p:cNvSpPr/>
+          <p:nvPr/>
+        </p:nvSpPr>
+        <p:spPr>
+          <a:xfrm>
+            <a:off x="640080" y="1965960"/>
+            <a:ext cx="2011680" cy="548640"/>
+          </a:xfrm>
+          <a:prstGeom prst="rect">
+            <a:avLst/>
+          </a:prstGeom>
+          <a:noFill/>
+          <a:ln/>
+        </p:spPr>
+        <p:txBody>
+          <a:bodyPr wrap="square" lIns="0" tIns="0" rIns="0" bIns="0" rtlCol="0" anchor="ctr"/>
+          <a:lstStyle/>
+          <a:p>
+            <a:pPr algn="l" indent="0" marL="0">
+              <a:buNone/>
+            </a:pPr>
+            <a:r>
+              <a:rPr lang="en-US" sz="1300" b="1" dirty="0">
+                <a:solidFill>
+                  <a:srgbClr val="FFFFFF"/>
+                </a:solidFill>
+                <a:latin typeface="Calibri" pitchFamily="34" charset="0"/>
+                <a:ea typeface="Calibri" pitchFamily="34" charset="-122"/>
+                <a:cs typeface="Calibri" pitchFamily="34" charset="-120"/>
+              </a:rPr>
+              <a:t>Rhythm</a:t>
+            </a:r>
+            <a:endParaRPr lang="en-US" sz="1300" dirty="0"/>
+          </a:p>
+        </p:txBody>
+      </p:sp>
+      <p:sp>
+        <p:nvSpPr>
+          <p:cNvPr id="8" name="Shape 5"/>
+          <p:cNvSpPr/>
+          <p:nvPr/>
+        </p:nvSpPr>
+        <p:spPr>
+          <a:xfrm>
+            <a:off x="2843784" y="1965960"/>
+            <a:ext cx="2779776" cy="548640"/>
+          </a:xfrm>
+          <a:prstGeom prst="roundRect">
+            <a:avLst>
+              <a:gd name="adj" fmla="val 10000"/>
+            </a:avLst>
+          </a:prstGeom>
+          <a:solidFill>
+            <a:srgbClr val="A4133C"/>
+          </a:solidFill>
+          <a:ln/>
+        </p:spPr>
+      </p:sp>
+      <p:sp>
+        <p:nvSpPr>
+          <p:cNvPr id="9" name="Text 6"/>
+          <p:cNvSpPr/>
+          <p:nvPr/>
+        </p:nvSpPr>
+        <p:spPr>
+          <a:xfrm>
+            <a:off x="2926080" y="1965960"/>
+            <a:ext cx="2560320" cy="548640"/>
+          </a:xfrm>
+          <a:prstGeom prst="rect">
+            <a:avLst/>
+          </a:prstGeom>
+          <a:noFill/>
+          <a:ln/>
+        </p:spPr>
+        <p:txBody>
+          <a:bodyPr wrap="square" lIns="0" tIns="0" rIns="0" bIns="0" rtlCol="0" anchor="ctr"/>
+          <a:lstStyle/>
+          <a:p>
+            <a:pPr algn="l" indent="0" marL="0">
+              <a:buNone/>
+            </a:pPr>
+            <a:r>
+              <a:rPr lang="en-US" sz="1300" b="1" dirty="0">
+                <a:solidFill>
+                  <a:srgbClr val="FFFFFF"/>
+                </a:solidFill>
+                <a:latin typeface="Calibri" pitchFamily="34" charset="0"/>
+                <a:ea typeface="Calibri" pitchFamily="34" charset="-122"/>
+                <a:cs typeface="Calibri" pitchFamily="34" charset="-120"/>
+              </a:rPr>
+              <a:t>Atrial activity</a:t>
+            </a:r>
+            <a:endParaRPr lang="en-US" sz="1300" dirty="0"/>
+          </a:p>
+        </p:txBody>
+      </p:sp>
+      <p:sp>
+        <p:nvSpPr>
+          <p:cNvPr id="10" name="Shape 7"/>
+          <p:cNvSpPr/>
+          <p:nvPr/>
+        </p:nvSpPr>
+        <p:spPr>
+          <a:xfrm>
+            <a:off x="5678424" y="1965960"/>
+            <a:ext cx="2322576" cy="548640"/>
+          </a:xfrm>
+          <a:prstGeom prst="roundRect">
+            <a:avLst>
+              <a:gd name="adj" fmla="val 10000"/>
+            </a:avLst>
+          </a:prstGeom>
+          <a:solidFill>
+            <a:srgbClr val="A4133C"/>
+          </a:solidFill>
+          <a:ln/>
+        </p:spPr>
+      </p:sp>
+      <p:sp>
+        <p:nvSpPr>
+          <p:cNvPr id="11" name="Text 8"/>
+          <p:cNvSpPr/>
+          <p:nvPr/>
+        </p:nvSpPr>
+        <p:spPr>
+          <a:xfrm>
+            <a:off x="5760720" y="1965960"/>
+            <a:ext cx="2103120" cy="548640"/>
+          </a:xfrm>
+          <a:prstGeom prst="rect">
+            <a:avLst/>
+          </a:prstGeom>
+          <a:noFill/>
+          <a:ln/>
+        </p:spPr>
+        <p:txBody>
+          <a:bodyPr wrap="square" lIns="0" tIns="0" rIns="0" bIns="0" rtlCol="0" anchor="ctr"/>
+          <a:lstStyle/>
+          <a:p>
+            <a:pPr algn="l" indent="0" marL="0">
+              <a:buNone/>
+            </a:pPr>
+            <a:r>
+              <a:rPr lang="en-US" sz="1300" b="1" dirty="0">
+                <a:solidFill>
+                  <a:srgbClr val="FFFFFF"/>
+                </a:solidFill>
+                <a:latin typeface="Calibri" pitchFamily="34" charset="0"/>
+                <a:ea typeface="Calibri" pitchFamily="34" charset="-122"/>
+                <a:cs typeface="Calibri" pitchFamily="34" charset="-120"/>
+              </a:rPr>
+              <a:t>Ventricular rate</a:t>
+            </a:r>
+            <a:endParaRPr lang="en-US" sz="1300" dirty="0"/>
+          </a:p>
+        </p:txBody>
+      </p:sp>
+      <p:sp>
+        <p:nvSpPr>
+          <p:cNvPr id="12" name="Shape 9"/>
+          <p:cNvSpPr/>
+          <p:nvPr/>
+        </p:nvSpPr>
+        <p:spPr>
+          <a:xfrm>
+            <a:off x="8055864" y="1965960"/>
+            <a:ext cx="3630168" cy="548640"/>
+          </a:xfrm>
+          <a:prstGeom prst="roundRect">
+            <a:avLst>
+              <a:gd name="adj" fmla="val 10000"/>
+            </a:avLst>
+          </a:prstGeom>
+          <a:solidFill>
+            <a:srgbClr val="A4133C"/>
+          </a:solidFill>
+          <a:ln/>
+        </p:spPr>
+      </p:sp>
+      <p:sp>
+        <p:nvSpPr>
+          <p:cNvPr id="13" name="Text 10"/>
+          <p:cNvSpPr/>
+          <p:nvPr/>
+        </p:nvSpPr>
+        <p:spPr>
+          <a:xfrm>
+            <a:off x="8138160" y="1965960"/>
+            <a:ext cx="3410712" cy="548640"/>
+          </a:xfrm>
+          <a:prstGeom prst="rect">
+            <a:avLst/>
+          </a:prstGeom>
+          <a:noFill/>
+          <a:ln/>
+        </p:spPr>
+        <p:txBody>
+          <a:bodyPr wrap="square" lIns="0" tIns="0" rIns="0" bIns="0" rtlCol="0" anchor="ctr"/>
+          <a:lstStyle/>
+          <a:p>
+            <a:pPr algn="l" indent="0" marL="0">
+              <a:buNone/>
+            </a:pPr>
+            <a:r>
+              <a:rPr lang="en-US" sz="1300" b="1" dirty="0">
+                <a:solidFill>
+                  <a:srgbClr val="FFFFFF"/>
+                </a:solidFill>
+                <a:latin typeface="Calibri" pitchFamily="34" charset="0"/>
+                <a:ea typeface="Calibri" pitchFamily="34" charset="-122"/>
+                <a:cs typeface="Calibri" pitchFamily="34" charset="-120"/>
+              </a:rPr>
+              <a:t>Key distinguishing clue</a:t>
+            </a:r>
+            <a:endParaRPr lang="en-US" sz="1300" dirty="0"/>
+          </a:p>
+        </p:txBody>
+      </p:sp>
+      <p:sp>
+        <p:nvSpPr>
+          <p:cNvPr id="14" name="Shape 11"/>
+          <p:cNvSpPr/>
+          <p:nvPr/>
+        </p:nvSpPr>
+        <p:spPr>
+          <a:xfrm>
+            <a:off x="502920" y="2606040"/>
+            <a:ext cx="2231136" cy="1051560"/>
+          </a:xfrm>
+          <a:prstGeom prst="roundRect">
+            <a:avLst>
+              <a:gd name="adj" fmla="val 5217"/>
+            </a:avLst>
+          </a:prstGeom>
+          <a:solidFill>
+            <a:srgbClr val="590D22"/>
+          </a:solidFill>
+          <a:ln w="12700">
+            <a:solidFill>
+              <a:srgbClr val="FBD8DF"/>
+            </a:solidFill>
+            <a:prstDash val="solid"/>
+          </a:ln>
+        </p:spPr>
+      </p:sp>
+      <p:sp>
+        <p:nvSpPr>
+          <p:cNvPr id="15" name="Text 12"/>
+          <p:cNvSpPr/>
+          <p:nvPr/>
+        </p:nvSpPr>
+        <p:spPr>
+          <a:xfrm>
+            <a:off x="667512" y="2651760"/>
+            <a:ext cx="1975104" cy="960120"/>
+          </a:xfrm>
+          <a:prstGeom prst="rect">
+            <a:avLst/>
+          </a:prstGeom>
+          <a:noFill/>
+          <a:ln/>
+        </p:spPr>
+        <p:txBody>
+          <a:bodyPr wrap="square" lIns="0" tIns="0" rIns="0" bIns="0" rtlCol="0" anchor="ctr"/>
+          <a:lstStyle/>
+          <a:p>
+            <a:pPr algn="l" indent="0" marL="0">
+              <a:lnSpc>
+                <a:spcPct val="108000"/>
+              </a:lnSpc>
+              <a:buNone/>
+            </a:pPr>
+            <a:r>
+              <a:rPr lang="en-US" sz="1500" b="1" dirty="0">
+                <a:solidFill>
+                  <a:srgbClr val="FFFFFF"/>
+                </a:solidFill>
+                <a:latin typeface="Cambria" pitchFamily="34" charset="0"/>
+                <a:ea typeface="Cambria" pitchFamily="34" charset="-122"/>
+                <a:cs typeface="Cambria" pitchFamily="34" charset="-120"/>
+              </a:rPr>
+              <a:t>Atrial Fibrillation</a:t>
+            </a:r>
+            <a:endParaRPr lang="en-US" sz="1500" dirty="0"/>
+          </a:p>
+        </p:txBody>
+      </p:sp>
+      <p:sp>
+        <p:nvSpPr>
+          <p:cNvPr id="16" name="Shape 13"/>
+          <p:cNvSpPr/>
+          <p:nvPr/>
+        </p:nvSpPr>
+        <p:spPr>
+          <a:xfrm>
+            <a:off x="2843784" y="2606040"/>
+            <a:ext cx="2779776" cy="1051560"/>
+          </a:xfrm>
+          <a:prstGeom prst="roundRect">
+            <a:avLst>
+              <a:gd name="adj" fmla="val 5217"/>
             </a:avLst>
           </a:prstGeom>
           <a:solidFill>
@@ -23804,74 +23713,18 @@
             </a:solidFill>
             <a:prstDash val="solid"/>
           </a:ln>
-          <a:effectLst>
-            <a:outerShdw sx="100000" sy="100000" kx="0" ky="0" algn="bl" rotWithShape="0" blurRad="127000" dist="50800" dir="5400000">
-              <a:srgbClr val="C9A3AC">
-                <a:alpha val="45000"/>
-              </a:srgbClr>
-            </a:outerShdw>
-          </a:effectLst>
-        </p:spPr>
-      </p:sp>
-      <p:sp>
-        <p:nvSpPr>
-          <p:cNvPr id="7" name="Shape 4"/>
-          <p:cNvSpPr/>
-          <p:nvPr/>
-        </p:nvSpPr>
-        <p:spPr>
-          <a:xfrm>
-            <a:off x="795528" y="2167128"/>
-            <a:ext cx="640080" cy="640080"/>
-          </a:xfrm>
-          <a:prstGeom prst="ellipse">
-            <a:avLst/>
-          </a:prstGeom>
-          <a:solidFill>
-            <a:srgbClr val="FFFFFF"/>
-          </a:solidFill>
-          <a:ln w="12700">
-            <a:solidFill>
-              <a:srgbClr val="FBD8DF"/>
-            </a:solidFill>
-            <a:prstDash val="solid"/>
-          </a:ln>
-        </p:spPr>
-      </p:sp>
-      <p:pic>
-        <p:nvPicPr>
-          <p:cNvPr id="8" name="Image 1" descr="preencoded.png">    </p:cNvPr>
-          <p:cNvPicPr>
-            <a:picLocks noChangeAspect="1"/>
-          </p:cNvPicPr>
-          <p:nvPr/>
-        </p:nvPicPr>
-        <p:blipFill>
-          <a:blip r:embed="rId2"/>
-          <a:stretch>
-            <a:fillRect/>
-          </a:stretch>
-        </p:blipFill>
-        <p:spPr>
-          <a:xfrm>
-            <a:off x="950976" y="2322576"/>
-            <a:ext cx="329184" cy="329184"/>
-          </a:xfrm>
-          <a:prstGeom prst="rect">
-            <a:avLst/>
-          </a:prstGeom>
-        </p:spPr>
-      </p:pic>
-      <p:sp>
-        <p:nvSpPr>
-          <p:cNvPr id="9" name="Text 5"/>
-          <p:cNvSpPr/>
-          <p:nvPr/>
-        </p:nvSpPr>
-        <p:spPr>
-          <a:xfrm>
-            <a:off x="1600200" y="2130552"/>
-            <a:ext cx="2331720" cy="713232"/>
+        </p:spPr>
+      </p:sp>
+      <p:sp>
+        <p:nvSpPr>
+          <p:cNvPr id="17" name="Text 14"/>
+          <p:cNvSpPr/>
+          <p:nvPr/>
+        </p:nvSpPr>
+        <p:spPr>
+          <a:xfrm>
+            <a:off x="2953512" y="2651760"/>
+            <a:ext cx="2523744" cy="960120"/>
           </a:xfrm>
           <a:prstGeom prst="rect">
             <a:avLst/>
@@ -23885,81 +23738,39 @@
           <a:p>
             <a:pPr algn="l" indent="0" marL="0">
               <a:lnSpc>
-                <a:spcPct val="100000"/>
+                <a:spcPct val="108000"/>
               </a:lnSpc>
               <a:buNone/>
             </a:pPr>
             <a:r>
-              <a:rPr lang="en-US" sz="1650" b="1" dirty="0">
+              <a:rPr lang="en-US" sz="1300" dirty="0">
                 <a:solidFill>
                   <a:srgbClr val="2B2B33"/>
-                </a:solidFill>
-                <a:latin typeface="Cambria" pitchFamily="34" charset="0"/>
-                <a:ea typeface="Cambria" pitchFamily="34" charset="-122"/>
-                <a:cs typeface="Cambria" pitchFamily="34" charset="-120"/>
-              </a:rPr>
-              <a:t>Atrial Flutter</a:t>
-            </a:r>
-            <a:endParaRPr lang="en-US" sz="1650" dirty="0"/>
-          </a:p>
-        </p:txBody>
-      </p:sp>
-      <p:sp>
-        <p:nvSpPr>
-          <p:cNvPr id="10" name="Text 6"/>
-          <p:cNvSpPr/>
-          <p:nvPr/>
-        </p:nvSpPr>
-        <p:spPr>
-          <a:xfrm>
-            <a:off x="822960" y="2971800"/>
-            <a:ext cx="3044952" cy="685800"/>
-          </a:xfrm>
-          <a:prstGeom prst="rect">
-            <a:avLst/>
-          </a:prstGeom>
-          <a:noFill/>
-          <a:ln/>
-        </p:spPr>
-        <p:txBody>
-          <a:bodyPr wrap="square" rtlCol="0" anchor="t"/>
-          <a:lstStyle/>
-          <a:p>
-            <a:pPr algn="l" indent="0" marL="0">
-              <a:lnSpc>
-                <a:spcPct val="110000"/>
-              </a:lnSpc>
-              <a:buNone/>
-            </a:pPr>
-            <a:r>
-              <a:rPr lang="en-US" sz="1250" dirty="0">
-                <a:solidFill>
-                  <a:srgbClr val="6B6B76"/>
                 </a:solidFill>
                 <a:latin typeface="Calibri" pitchFamily="34" charset="0"/>
                 <a:ea typeface="Calibri" pitchFamily="34" charset="-122"/>
                 <a:cs typeface="Calibri" pitchFamily="34" charset="-120"/>
               </a:rPr>
-              <a:t>Regular sawtooth flutter waves; often 2:1 (ventricular ~150)</a:t>
-            </a:r>
-            <a:endParaRPr lang="en-US" sz="1250" dirty="0"/>
-          </a:p>
-        </p:txBody>
-      </p:sp>
-      <p:sp>
-        <p:nvSpPr>
-          <p:cNvPr id="11" name="Shape 7"/>
-          <p:cNvSpPr/>
-          <p:nvPr/>
-        </p:nvSpPr>
-        <p:spPr>
-          <a:xfrm>
-            <a:off x="4288536" y="1874520"/>
-            <a:ext cx="3611880" cy="1874520"/>
+              <a:t>No P waves; fibrillatory baseline</a:t>
+            </a:r>
+            <a:endParaRPr lang="en-US" sz="1300" dirty="0"/>
+          </a:p>
+        </p:txBody>
+      </p:sp>
+      <p:sp>
+        <p:nvSpPr>
+          <p:cNvPr id="18" name="Shape 15"/>
+          <p:cNvSpPr/>
+          <p:nvPr/>
+        </p:nvSpPr>
+        <p:spPr>
+          <a:xfrm>
+            <a:off x="5678424" y="2606040"/>
+            <a:ext cx="2322576" cy="1051560"/>
           </a:xfrm>
           <a:prstGeom prst="roundRect">
             <a:avLst>
-              <a:gd name="adj" fmla="val 4878"/>
+              <a:gd name="adj" fmla="val 5217"/>
             </a:avLst>
           </a:prstGeom>
           <a:solidFill>
@@ -23971,74 +23782,18 @@
             </a:solidFill>
             <a:prstDash val="solid"/>
           </a:ln>
-          <a:effectLst>
-            <a:outerShdw sx="100000" sy="100000" kx="0" ky="0" algn="bl" rotWithShape="0" blurRad="127000" dist="50800" dir="5400000">
-              <a:srgbClr val="C9A3AC">
-                <a:alpha val="45000"/>
-              </a:srgbClr>
-            </a:outerShdw>
-          </a:effectLst>
-        </p:spPr>
-      </p:sp>
-      <p:sp>
-        <p:nvSpPr>
-          <p:cNvPr id="12" name="Shape 8"/>
-          <p:cNvSpPr/>
-          <p:nvPr/>
-        </p:nvSpPr>
-        <p:spPr>
-          <a:xfrm>
-            <a:off x="4581144" y="2167128"/>
-            <a:ext cx="640080" cy="640080"/>
-          </a:xfrm>
-          <a:prstGeom prst="ellipse">
-            <a:avLst/>
-          </a:prstGeom>
-          <a:solidFill>
-            <a:srgbClr val="FFFFFF"/>
-          </a:solidFill>
-          <a:ln w="12700">
-            <a:solidFill>
-              <a:srgbClr val="FBD8DF"/>
-            </a:solidFill>
-            <a:prstDash val="solid"/>
-          </a:ln>
-        </p:spPr>
-      </p:sp>
-      <p:pic>
-        <p:nvPicPr>
-          <p:cNvPr id="13" name="Image 2" descr="preencoded.png">    </p:cNvPr>
-          <p:cNvPicPr>
-            <a:picLocks noChangeAspect="1"/>
-          </p:cNvPicPr>
-          <p:nvPr/>
-        </p:nvPicPr>
-        <p:blipFill>
-          <a:blip r:embed="rId3"/>
-          <a:stretch>
-            <a:fillRect/>
-          </a:stretch>
-        </p:blipFill>
-        <p:spPr>
-          <a:xfrm>
-            <a:off x="4736592" y="2322576"/>
-            <a:ext cx="329184" cy="329184"/>
-          </a:xfrm>
-          <a:prstGeom prst="rect">
-            <a:avLst/>
-          </a:prstGeom>
-        </p:spPr>
-      </p:pic>
-      <p:sp>
-        <p:nvSpPr>
-          <p:cNvPr id="14" name="Text 9"/>
-          <p:cNvSpPr/>
-          <p:nvPr/>
-        </p:nvSpPr>
-        <p:spPr>
-          <a:xfrm>
-            <a:off x="5385816" y="2130552"/>
-            <a:ext cx="2331720" cy="713232"/>
+        </p:spPr>
+      </p:sp>
+      <p:sp>
+        <p:nvSpPr>
+          <p:cNvPr id="19" name="Text 16"/>
+          <p:cNvSpPr/>
+          <p:nvPr/>
+        </p:nvSpPr>
+        <p:spPr>
+          <a:xfrm>
+            <a:off x="5788152" y="2651760"/>
+            <a:ext cx="2066544" cy="960120"/>
           </a:xfrm>
           <a:prstGeom prst="rect">
             <a:avLst/>
@@ -24052,81 +23807,39 @@
           <a:p>
             <a:pPr algn="l" indent="0" marL="0">
               <a:lnSpc>
-                <a:spcPct val="100000"/>
+                <a:spcPct val="108000"/>
               </a:lnSpc>
               <a:buNone/>
             </a:pPr>
             <a:r>
-              <a:rPr lang="en-US" sz="1650" b="1" dirty="0">
+              <a:rPr lang="en-US" sz="1300" dirty="0">
                 <a:solidFill>
                   <a:srgbClr val="2B2B33"/>
-                </a:solidFill>
-                <a:latin typeface="Cambria" pitchFamily="34" charset="0"/>
-                <a:ea typeface="Cambria" pitchFamily="34" charset="-122"/>
-                <a:cs typeface="Cambria" pitchFamily="34" charset="-120"/>
-              </a:rPr>
-              <a:t>Multifocal Atrial Tachycardia</a:t>
-            </a:r>
-            <a:endParaRPr lang="en-US" sz="1650" dirty="0"/>
-          </a:p>
-        </p:txBody>
-      </p:sp>
-      <p:sp>
-        <p:nvSpPr>
-          <p:cNvPr id="15" name="Text 10"/>
-          <p:cNvSpPr/>
-          <p:nvPr/>
-        </p:nvSpPr>
-        <p:spPr>
-          <a:xfrm>
-            <a:off x="4608576" y="2971800"/>
-            <a:ext cx="3044952" cy="685800"/>
-          </a:xfrm>
-          <a:prstGeom prst="rect">
-            <a:avLst/>
-          </a:prstGeom>
-          <a:noFill/>
-          <a:ln/>
-        </p:spPr>
-        <p:txBody>
-          <a:bodyPr wrap="square" rtlCol="0" anchor="t"/>
-          <a:lstStyle/>
-          <a:p>
-            <a:pPr algn="l" indent="0" marL="0">
-              <a:lnSpc>
-                <a:spcPct val="110000"/>
-              </a:lnSpc>
-              <a:buNone/>
-            </a:pPr>
-            <a:r>
-              <a:rPr lang="en-US" sz="1250" dirty="0">
-                <a:solidFill>
-                  <a:srgbClr val="6B6B76"/>
                 </a:solidFill>
                 <a:latin typeface="Calibri" pitchFamily="34" charset="0"/>
                 <a:ea typeface="Calibri" pitchFamily="34" charset="-122"/>
                 <a:cs typeface="Calibri" pitchFamily="34" charset="-120"/>
               </a:rPr>
-              <a:t>≥ 3 P-wave morphologies; irregular; linked to COPD</a:t>
-            </a:r>
-            <a:endParaRPr lang="en-US" sz="1250" dirty="0"/>
-          </a:p>
-        </p:txBody>
-      </p:sp>
-      <p:sp>
-        <p:nvSpPr>
-          <p:cNvPr id="16" name="Shape 11"/>
-          <p:cNvSpPr/>
-          <p:nvPr/>
-        </p:nvSpPr>
-        <p:spPr>
-          <a:xfrm>
-            <a:off x="8074152" y="1874520"/>
-            <a:ext cx="3611880" cy="1874520"/>
+              <a:t>Irregularly irregular</a:t>
+            </a:r>
+            <a:endParaRPr lang="en-US" sz="1300" dirty="0"/>
+          </a:p>
+        </p:txBody>
+      </p:sp>
+      <p:sp>
+        <p:nvSpPr>
+          <p:cNvPr id="20" name="Shape 17"/>
+          <p:cNvSpPr/>
+          <p:nvPr/>
+        </p:nvSpPr>
+        <p:spPr>
+          <a:xfrm>
+            <a:off x="8055864" y="2606040"/>
+            <a:ext cx="3630168" cy="1051560"/>
           </a:xfrm>
           <a:prstGeom prst="roundRect">
             <a:avLst>
-              <a:gd name="adj" fmla="val 4878"/>
+              <a:gd name="adj" fmla="val 5217"/>
             </a:avLst>
           </a:prstGeom>
           <a:solidFill>
@@ -24138,31 +23851,68 @@
             </a:solidFill>
             <a:prstDash val="solid"/>
           </a:ln>
-          <a:effectLst>
-            <a:outerShdw sx="100000" sy="100000" kx="0" ky="0" algn="bl" rotWithShape="0" blurRad="127000" dist="50800" dir="5400000">
-              <a:srgbClr val="C9A3AC">
-                <a:alpha val="45000"/>
-              </a:srgbClr>
-            </a:outerShdw>
-          </a:effectLst>
-        </p:spPr>
-      </p:sp>
-      <p:sp>
-        <p:nvSpPr>
-          <p:cNvPr id="17" name="Shape 12"/>
-          <p:cNvSpPr/>
-          <p:nvPr/>
-        </p:nvSpPr>
-        <p:spPr>
-          <a:xfrm>
-            <a:off x="8366760" y="2167128"/>
-            <a:ext cx="640080" cy="640080"/>
-          </a:xfrm>
-          <a:prstGeom prst="ellipse">
-            <a:avLst/>
+        </p:spPr>
+      </p:sp>
+      <p:sp>
+        <p:nvSpPr>
+          <p:cNvPr id="21" name="Text 18"/>
+          <p:cNvSpPr/>
+          <p:nvPr/>
+        </p:nvSpPr>
+        <p:spPr>
+          <a:xfrm>
+            <a:off x="8165592" y="2651760"/>
+            <a:ext cx="3374136" cy="960120"/>
+          </a:xfrm>
+          <a:prstGeom prst="rect">
+            <a:avLst/>
+          </a:prstGeom>
+          <a:noFill/>
+          <a:ln/>
+        </p:spPr>
+        <p:txBody>
+          <a:bodyPr wrap="square" lIns="0" tIns="0" rIns="0" bIns="0" rtlCol="0" anchor="ctr"/>
+          <a:lstStyle/>
+          <a:p>
+            <a:pPr algn="l" indent="0" marL="0">
+              <a:lnSpc>
+                <a:spcPct val="108000"/>
+              </a:lnSpc>
+              <a:buNone/>
+            </a:pPr>
+            <a:r>
+              <a:rPr lang="en-US" sz="1300" dirty="0">
+                <a:solidFill>
+                  <a:srgbClr val="2B2B33"/>
+                </a:solidFill>
+                <a:latin typeface="Calibri" pitchFamily="34" charset="0"/>
+                <a:ea typeface="Calibri" pitchFamily="34" charset="-122"/>
+                <a:cs typeface="Calibri" pitchFamily="34" charset="-120"/>
+              </a:rPr>
+              <a:t>Chaotic — no organised atrial activity</a:t>
+            </a:r>
+            <a:endParaRPr lang="en-US" sz="1300" dirty="0"/>
+          </a:p>
+        </p:txBody>
+      </p:sp>
+      <p:sp>
+        <p:nvSpPr>
+          <p:cNvPr id="22" name="Shape 19"/>
+          <p:cNvSpPr/>
+          <p:nvPr/>
+        </p:nvSpPr>
+        <p:spPr>
+          <a:xfrm>
+            <a:off x="502920" y="3703320"/>
+            <a:ext cx="2231136" cy="1051560"/>
+          </a:xfrm>
+          <a:prstGeom prst="roundRect">
+            <a:avLst>
+              <a:gd name="adj" fmla="val 5217"/>
+            </a:avLst>
           </a:prstGeom>
           <a:solidFill>
-            <a:srgbClr val="FFFFFF"/>
+            <a:srgbClr val="FBD8DF"/>
           </a:solidFill>
           <a:ln w="12700">
             <a:solidFill>
@@ -24172,40 +23922,16 @@
           </a:ln>
         </p:spPr>
       </p:sp>
-      <p:pic>
-        <p:nvPicPr>
-          <p:cNvPr id="18" name="Image 3" descr="preencoded.png">    </p:cNvPr>
-          <p:cNvPicPr>
-            <a:picLocks noChangeAspect="1"/>
-          </p:cNvPicPr>
-          <p:nvPr/>
-        </p:nvPicPr>
-        <p:blipFill>
-          <a:blip r:embed="rId4"/>
-          <a:stretch>
-            <a:fillRect/>
-          </a:stretch>
-        </p:blipFill>
-        <p:spPr>
-          <a:xfrm>
-            <a:off x="8522208" y="2322576"/>
-            <a:ext cx="329184" cy="329184"/>
-          </a:xfrm>
-          <a:prstGeom prst="rect">
-            <a:avLst/>
-          </a:prstGeom>
-        </p:spPr>
-      </p:pic>
-      <p:sp>
-        <p:nvSpPr>
-          <p:cNvPr id="19" name="Text 13"/>
-          <p:cNvSpPr/>
-          <p:nvPr/>
-        </p:nvSpPr>
-        <p:spPr>
-          <a:xfrm>
-            <a:off x="9171432" y="2130552"/>
-            <a:ext cx="2331720" cy="713232"/>
+      <p:sp>
+        <p:nvSpPr>
+          <p:cNvPr id="23" name="Text 20"/>
+          <p:cNvSpPr/>
+          <p:nvPr/>
+        </p:nvSpPr>
+        <p:spPr>
+          <a:xfrm>
+            <a:off x="667512" y="3749040"/>
+            <a:ext cx="1975104" cy="960120"/>
           </a:xfrm>
           <a:prstGeom prst="rect">
             <a:avLst/>
@@ -24219,12 +23945,12 @@
           <a:p>
             <a:pPr algn="l" indent="0" marL="0">
               <a:lnSpc>
-                <a:spcPct val="100000"/>
+                <a:spcPct val="108000"/>
               </a:lnSpc>
               <a:buNone/>
             </a:pPr>
             <a:r>
-              <a:rPr lang="en-US" sz="1650" b="1" dirty="0">
+              <a:rPr lang="en-US" sz="1500" b="1" dirty="0">
                 <a:solidFill>
                   <a:srgbClr val="2B2B33"/>
                 </a:solidFill>
@@ -24232,68 +23958,26 @@
                 <a:ea typeface="Cambria" pitchFamily="34" charset="-122"/>
                 <a:cs typeface="Cambria" pitchFamily="34" charset="-120"/>
               </a:rPr>
-              <a:t>Frequent Atrial Ectopics</a:t>
-            </a:r>
-            <a:endParaRPr lang="en-US" sz="1650" dirty="0"/>
-          </a:p>
-        </p:txBody>
-      </p:sp>
-      <p:sp>
-        <p:nvSpPr>
-          <p:cNvPr id="20" name="Text 14"/>
-          <p:cNvSpPr/>
-          <p:nvPr/>
-        </p:nvSpPr>
-        <p:spPr>
-          <a:xfrm>
-            <a:off x="8394192" y="2971800"/>
-            <a:ext cx="3044952" cy="685800"/>
-          </a:xfrm>
-          <a:prstGeom prst="rect">
-            <a:avLst/>
-          </a:prstGeom>
-          <a:noFill/>
-          <a:ln/>
-        </p:spPr>
-        <p:txBody>
-          <a:bodyPr wrap="square" rtlCol="0" anchor="t"/>
-          <a:lstStyle/>
-          <a:p>
-            <a:pPr algn="l" indent="0" marL="0">
-              <a:lnSpc>
-                <a:spcPct val="110000"/>
-              </a:lnSpc>
-              <a:buNone/>
-            </a:pPr>
-            <a:r>
-              <a:rPr lang="en-US" sz="1250" dirty="0">
-                <a:solidFill>
-                  <a:srgbClr val="6B6B76"/>
-                </a:solidFill>
-                <a:latin typeface="Calibri" pitchFamily="34" charset="0"/>
-                <a:ea typeface="Calibri" pitchFamily="34" charset="-122"/>
-                <a:cs typeface="Calibri" pitchFamily="34" charset="-120"/>
-              </a:rPr>
-              <a:t>Irregular, but discrete P waves precede each QRS</a:t>
-            </a:r>
-            <a:endParaRPr lang="en-US" sz="1250" dirty="0"/>
-          </a:p>
-        </p:txBody>
-      </p:sp>
-      <p:sp>
-        <p:nvSpPr>
-          <p:cNvPr id="21" name="Shape 15"/>
-          <p:cNvSpPr/>
-          <p:nvPr/>
-        </p:nvSpPr>
-        <p:spPr>
-          <a:xfrm>
-            <a:off x="502920" y="3931920"/>
-            <a:ext cx="3611880" cy="1874520"/>
+              <a:t>Atrial Flutter</a:t>
+            </a:r>
+            <a:endParaRPr lang="en-US" sz="1500" dirty="0"/>
+          </a:p>
+        </p:txBody>
+      </p:sp>
+      <p:sp>
+        <p:nvSpPr>
+          <p:cNvPr id="24" name="Shape 21"/>
+          <p:cNvSpPr/>
+          <p:nvPr/>
+        </p:nvSpPr>
+        <p:spPr>
+          <a:xfrm>
+            <a:off x="2843784" y="3703320"/>
+            <a:ext cx="2779776" cy="1051560"/>
           </a:xfrm>
           <a:prstGeom prst="roundRect">
             <a:avLst>
-              <a:gd name="adj" fmla="val 4878"/>
+              <a:gd name="adj" fmla="val 5217"/>
             </a:avLst>
           </a:prstGeom>
           <a:solidFill>
@@ -24305,74 +23989,18 @@
             </a:solidFill>
             <a:prstDash val="solid"/>
           </a:ln>
-          <a:effectLst>
-            <a:outerShdw sx="100000" sy="100000" kx="0" ky="0" algn="bl" rotWithShape="0" blurRad="127000" dist="50800" dir="5400000">
-              <a:srgbClr val="C9A3AC">
-                <a:alpha val="45000"/>
-              </a:srgbClr>
-            </a:outerShdw>
-          </a:effectLst>
-        </p:spPr>
-      </p:sp>
-      <p:sp>
-        <p:nvSpPr>
-          <p:cNvPr id="22" name="Shape 16"/>
-          <p:cNvSpPr/>
-          <p:nvPr/>
-        </p:nvSpPr>
-        <p:spPr>
-          <a:xfrm>
-            <a:off x="795528" y="4224528"/>
-            <a:ext cx="640080" cy="640080"/>
-          </a:xfrm>
-          <a:prstGeom prst="ellipse">
-            <a:avLst/>
-          </a:prstGeom>
-          <a:solidFill>
-            <a:srgbClr val="FFFFFF"/>
-          </a:solidFill>
-          <a:ln w="12700">
-            <a:solidFill>
-              <a:srgbClr val="FBD8DF"/>
-            </a:solidFill>
-            <a:prstDash val="solid"/>
-          </a:ln>
-        </p:spPr>
-      </p:sp>
-      <p:pic>
-        <p:nvPicPr>
-          <p:cNvPr id="23" name="Image 4" descr="preencoded.png">    </p:cNvPr>
-          <p:cNvPicPr>
-            <a:picLocks noChangeAspect="1"/>
-          </p:cNvPicPr>
-          <p:nvPr/>
-        </p:nvPicPr>
-        <p:blipFill>
-          <a:blip r:embed="rId5"/>
-          <a:stretch>
-            <a:fillRect/>
-          </a:stretch>
-        </p:blipFill>
-        <p:spPr>
-          <a:xfrm>
-            <a:off x="950976" y="4379976"/>
-            <a:ext cx="329184" cy="329184"/>
-          </a:xfrm>
-          <a:prstGeom prst="rect">
-            <a:avLst/>
-          </a:prstGeom>
-        </p:spPr>
-      </p:pic>
-      <p:sp>
-        <p:nvSpPr>
-          <p:cNvPr id="24" name="Text 17"/>
-          <p:cNvSpPr/>
-          <p:nvPr/>
-        </p:nvSpPr>
-        <p:spPr>
-          <a:xfrm>
-            <a:off x="1600200" y="4187952"/>
-            <a:ext cx="2331720" cy="713232"/>
+        </p:spPr>
+      </p:sp>
+      <p:sp>
+        <p:nvSpPr>
+          <p:cNvPr id="25" name="Text 22"/>
+          <p:cNvSpPr/>
+          <p:nvPr/>
+        </p:nvSpPr>
+        <p:spPr>
+          <a:xfrm>
+            <a:off x="2953512" y="3749040"/>
+            <a:ext cx="2523744" cy="960120"/>
           </a:xfrm>
           <a:prstGeom prst="rect">
             <a:avLst/>
@@ -24386,81 +24014,39 @@
           <a:p>
             <a:pPr algn="l" indent="0" marL="0">
               <a:lnSpc>
-                <a:spcPct val="100000"/>
+                <a:spcPct val="108000"/>
               </a:lnSpc>
               <a:buNone/>
             </a:pPr>
             <a:r>
-              <a:rPr lang="en-US" sz="1650" b="1" dirty="0">
+              <a:rPr lang="en-US" sz="1300" dirty="0">
                 <a:solidFill>
                   <a:srgbClr val="2B2B33"/>
-                </a:solidFill>
-                <a:latin typeface="Cambria" pitchFamily="34" charset="0"/>
-                <a:ea typeface="Cambria" pitchFamily="34" charset="-122"/>
-                <a:cs typeface="Cambria" pitchFamily="34" charset="-120"/>
-              </a:rPr>
-              <a:t>AVNRT / AVRT (SVT)</a:t>
-            </a:r>
-            <a:endParaRPr lang="en-US" sz="1650" dirty="0"/>
-          </a:p>
-        </p:txBody>
-      </p:sp>
-      <p:sp>
-        <p:nvSpPr>
-          <p:cNvPr id="25" name="Text 18"/>
-          <p:cNvSpPr/>
-          <p:nvPr/>
-        </p:nvSpPr>
-        <p:spPr>
-          <a:xfrm>
-            <a:off x="822960" y="5029200"/>
-            <a:ext cx="3044952" cy="685800"/>
-          </a:xfrm>
-          <a:prstGeom prst="rect">
-            <a:avLst/>
-          </a:prstGeom>
-          <a:noFill/>
-          <a:ln/>
-        </p:spPr>
-        <p:txBody>
-          <a:bodyPr wrap="square" rtlCol="0" anchor="t"/>
-          <a:lstStyle/>
-          <a:p>
-            <a:pPr algn="l" indent="0" marL="0">
-              <a:lnSpc>
-                <a:spcPct val="110000"/>
-              </a:lnSpc>
-              <a:buNone/>
-            </a:pPr>
-            <a:r>
-              <a:rPr lang="en-US" sz="1250" dirty="0">
-                <a:solidFill>
-                  <a:srgbClr val="6B6B76"/>
                 </a:solidFill>
                 <a:latin typeface="Calibri" pitchFamily="34" charset="0"/>
                 <a:ea typeface="Calibri" pitchFamily="34" charset="-122"/>
                 <a:cs typeface="Calibri" pitchFamily="34" charset="-120"/>
               </a:rPr>
-              <a:t>Regular narrow-complex tachycardia; abrupt onset/offset</a:t>
-            </a:r>
-            <a:endParaRPr lang="en-US" sz="1250" dirty="0"/>
-          </a:p>
-        </p:txBody>
-      </p:sp>
-      <p:sp>
-        <p:nvSpPr>
-          <p:cNvPr id="26" name="Shape 19"/>
-          <p:cNvSpPr/>
-          <p:nvPr/>
-        </p:nvSpPr>
-        <p:spPr>
-          <a:xfrm>
-            <a:off x="4288536" y="3931920"/>
-            <a:ext cx="3611880" cy="1874520"/>
+              <a:t>Sawtooth flutter waves (~300/min)</a:t>
+            </a:r>
+            <a:endParaRPr lang="en-US" sz="1300" dirty="0"/>
+          </a:p>
+        </p:txBody>
+      </p:sp>
+      <p:sp>
+        <p:nvSpPr>
+          <p:cNvPr id="26" name="Shape 23"/>
+          <p:cNvSpPr/>
+          <p:nvPr/>
+        </p:nvSpPr>
+        <p:spPr>
+          <a:xfrm>
+            <a:off x="5678424" y="3703320"/>
+            <a:ext cx="2322576" cy="1051560"/>
           </a:xfrm>
           <a:prstGeom prst="roundRect">
             <a:avLst>
-              <a:gd name="adj" fmla="val 4878"/>
+              <a:gd name="adj" fmla="val 5217"/>
             </a:avLst>
           </a:prstGeom>
           <a:solidFill>
@@ -24472,31 +24058,68 @@
             </a:solidFill>
             <a:prstDash val="solid"/>
           </a:ln>
-          <a:effectLst>
-            <a:outerShdw sx="100000" sy="100000" kx="0" ky="0" algn="bl" rotWithShape="0" blurRad="127000" dist="50800" dir="5400000">
-              <a:srgbClr val="C9A3AC">
-                <a:alpha val="45000"/>
-              </a:srgbClr>
-            </a:outerShdw>
-          </a:effectLst>
-        </p:spPr>
-      </p:sp>
-      <p:sp>
-        <p:nvSpPr>
-          <p:cNvPr id="27" name="Shape 20"/>
-          <p:cNvSpPr/>
-          <p:nvPr/>
-        </p:nvSpPr>
-        <p:spPr>
-          <a:xfrm>
-            <a:off x="4581144" y="4224528"/>
-            <a:ext cx="640080" cy="640080"/>
-          </a:xfrm>
-          <a:prstGeom prst="ellipse">
-            <a:avLst/>
+        </p:spPr>
+      </p:sp>
+      <p:sp>
+        <p:nvSpPr>
+          <p:cNvPr id="27" name="Text 24"/>
+          <p:cNvSpPr/>
+          <p:nvPr/>
+        </p:nvSpPr>
+        <p:spPr>
+          <a:xfrm>
+            <a:off x="5788152" y="3749040"/>
+            <a:ext cx="2066544" cy="960120"/>
+          </a:xfrm>
+          <a:prstGeom prst="rect">
+            <a:avLst/>
+          </a:prstGeom>
+          <a:noFill/>
+          <a:ln/>
+        </p:spPr>
+        <p:txBody>
+          <a:bodyPr wrap="square" lIns="0" tIns="0" rIns="0" bIns="0" rtlCol="0" anchor="ctr"/>
+          <a:lstStyle/>
+          <a:p>
+            <a:pPr algn="l" indent="0" marL="0">
+              <a:lnSpc>
+                <a:spcPct val="108000"/>
+              </a:lnSpc>
+              <a:buNone/>
+            </a:pPr>
+            <a:r>
+              <a:rPr lang="en-US" sz="1300" dirty="0">
+                <a:solidFill>
+                  <a:srgbClr val="2B2B33"/>
+                </a:solidFill>
+                <a:latin typeface="Calibri" pitchFamily="34" charset="0"/>
+                <a:ea typeface="Calibri" pitchFamily="34" charset="-122"/>
+                <a:cs typeface="Calibri" pitchFamily="34" charset="-120"/>
+              </a:rPr>
+              <a:t>Often regular (2:1, 3:1)</a:t>
+            </a:r>
+            <a:endParaRPr lang="en-US" sz="1300" dirty="0"/>
+          </a:p>
+        </p:txBody>
+      </p:sp>
+      <p:sp>
+        <p:nvSpPr>
+          <p:cNvPr id="28" name="Shape 25"/>
+          <p:cNvSpPr/>
+          <p:nvPr/>
+        </p:nvSpPr>
+        <p:spPr>
+          <a:xfrm>
+            <a:off x="8055864" y="3703320"/>
+            <a:ext cx="3630168" cy="1051560"/>
+          </a:xfrm>
+          <a:prstGeom prst="roundRect">
+            <a:avLst>
+              <a:gd name="adj" fmla="val 5217"/>
+            </a:avLst>
           </a:prstGeom>
           <a:solidFill>
-            <a:srgbClr val="FFFFFF"/>
+            <a:srgbClr val="FFF0F3"/>
           </a:solidFill>
           <a:ln w="12700">
             <a:solidFill>
@@ -24506,40 +24129,16 @@
           </a:ln>
         </p:spPr>
       </p:sp>
-      <p:pic>
-        <p:nvPicPr>
-          <p:cNvPr id="28" name="Image 5" descr="preencoded.png">    </p:cNvPr>
-          <p:cNvPicPr>
-            <a:picLocks noChangeAspect="1"/>
-          </p:cNvPicPr>
-          <p:nvPr/>
-        </p:nvPicPr>
-        <p:blipFill>
-          <a:blip r:embed="rId6"/>
-          <a:stretch>
-            <a:fillRect/>
-          </a:stretch>
-        </p:blipFill>
-        <p:spPr>
-          <a:xfrm>
-            <a:off x="4736592" y="4379976"/>
-            <a:ext cx="329184" cy="329184"/>
-          </a:xfrm>
-          <a:prstGeom prst="rect">
-            <a:avLst/>
-          </a:prstGeom>
-        </p:spPr>
-      </p:pic>
-      <p:sp>
-        <p:nvSpPr>
-          <p:cNvPr id="29" name="Text 21"/>
-          <p:cNvSpPr/>
-          <p:nvPr/>
-        </p:nvSpPr>
-        <p:spPr>
-          <a:xfrm>
-            <a:off x="5385816" y="4187952"/>
-            <a:ext cx="2331720" cy="713232"/>
+      <p:sp>
+        <p:nvSpPr>
+          <p:cNvPr id="29" name="Text 26"/>
+          <p:cNvSpPr/>
+          <p:nvPr/>
+        </p:nvSpPr>
+        <p:spPr>
+          <a:xfrm>
+            <a:off x="8165592" y="3749040"/>
+            <a:ext cx="3374136" cy="960120"/>
           </a:xfrm>
           <a:prstGeom prst="rect">
             <a:avLst/>
@@ -24553,85 +24152,43 @@
           <a:p>
             <a:pPr algn="l" indent="0" marL="0">
               <a:lnSpc>
-                <a:spcPct val="100000"/>
+                <a:spcPct val="108000"/>
               </a:lnSpc>
               <a:buNone/>
             </a:pPr>
             <a:r>
-              <a:rPr lang="en-US" sz="1650" b="1" dirty="0">
+              <a:rPr lang="en-US" sz="1300" dirty="0">
                 <a:solidFill>
                   <a:srgbClr val="2B2B33"/>
-                </a:solidFill>
-                <a:latin typeface="Cambria" pitchFamily="34" charset="0"/>
-                <a:ea typeface="Cambria" pitchFamily="34" charset="-122"/>
-                <a:cs typeface="Cambria" pitchFamily="34" charset="-120"/>
-              </a:rPr>
-              <a:t>Atrial Tachycardia</a:t>
-            </a:r>
-            <a:endParaRPr lang="en-US" sz="1650" dirty="0"/>
-          </a:p>
-        </p:txBody>
-      </p:sp>
-      <p:sp>
-        <p:nvSpPr>
-          <p:cNvPr id="30" name="Text 22"/>
-          <p:cNvSpPr/>
-          <p:nvPr/>
-        </p:nvSpPr>
-        <p:spPr>
-          <a:xfrm>
-            <a:off x="4608576" y="5029200"/>
-            <a:ext cx="3044952" cy="685800"/>
-          </a:xfrm>
-          <a:prstGeom prst="rect">
-            <a:avLst/>
-          </a:prstGeom>
-          <a:noFill/>
-          <a:ln/>
-        </p:spPr>
-        <p:txBody>
-          <a:bodyPr wrap="square" rtlCol="0" anchor="t"/>
-          <a:lstStyle/>
-          <a:p>
-            <a:pPr algn="l" indent="0" marL="0">
-              <a:lnSpc>
-                <a:spcPct val="110000"/>
-              </a:lnSpc>
-              <a:buNone/>
-            </a:pPr>
-            <a:r>
-              <a:rPr lang="en-US" sz="1250" dirty="0">
-                <a:solidFill>
-                  <a:srgbClr val="6B6B76"/>
                 </a:solidFill>
                 <a:latin typeface="Calibri" pitchFamily="34" charset="0"/>
                 <a:ea typeface="Calibri" pitchFamily="34" charset="-122"/>
                 <a:cs typeface="Calibri" pitchFamily="34" charset="-120"/>
               </a:rPr>
-              <a:t>Regular; abnormal P-wave axis, may have variable block</a:t>
-            </a:r>
-            <a:endParaRPr lang="en-US" sz="1250" dirty="0"/>
-          </a:p>
-        </p:txBody>
-      </p:sp>
-      <p:sp>
-        <p:nvSpPr>
-          <p:cNvPr id="31" name="Shape 23"/>
-          <p:cNvSpPr/>
-          <p:nvPr/>
-        </p:nvSpPr>
-        <p:spPr>
-          <a:xfrm>
-            <a:off x="8074152" y="3931920"/>
-            <a:ext cx="3611880" cy="1874520"/>
+              <a:t>Regular “picket-fence” baseline</a:t>
+            </a:r>
+            <a:endParaRPr lang="en-US" sz="1300" dirty="0"/>
+          </a:p>
+        </p:txBody>
+      </p:sp>
+      <p:sp>
+        <p:nvSpPr>
+          <p:cNvPr id="30" name="Shape 27"/>
+          <p:cNvSpPr/>
+          <p:nvPr/>
+        </p:nvSpPr>
+        <p:spPr>
+          <a:xfrm>
+            <a:off x="502920" y="4800600"/>
+            <a:ext cx="2231136" cy="1051560"/>
           </a:xfrm>
           <a:prstGeom prst="roundRect">
             <a:avLst>
-              <a:gd name="adj" fmla="val 4878"/>
+              <a:gd name="adj" fmla="val 5217"/>
             </a:avLst>
           </a:prstGeom>
           <a:solidFill>
-            <a:srgbClr val="590D22"/>
+            <a:srgbClr val="FBD8DF"/>
           </a:solidFill>
           <a:ln w="12700">
             <a:solidFill>
@@ -24639,31 +24196,68 @@
             </a:solidFill>
             <a:prstDash val="solid"/>
           </a:ln>
-          <a:effectLst>
-            <a:outerShdw sx="100000" sy="100000" kx="0" ky="0" algn="bl" rotWithShape="0" blurRad="127000" dist="50800" dir="5400000">
-              <a:srgbClr val="C9A3AC">
-                <a:alpha val="45000"/>
-              </a:srgbClr>
-            </a:outerShdw>
-          </a:effectLst>
-        </p:spPr>
-      </p:sp>
-      <p:sp>
-        <p:nvSpPr>
-          <p:cNvPr id="32" name="Shape 24"/>
-          <p:cNvSpPr/>
-          <p:nvPr/>
-        </p:nvSpPr>
-        <p:spPr>
-          <a:xfrm>
-            <a:off x="8366760" y="4224528"/>
-            <a:ext cx="640080" cy="640080"/>
-          </a:xfrm>
-          <a:prstGeom prst="ellipse">
-            <a:avLst/>
+        </p:spPr>
+      </p:sp>
+      <p:sp>
+        <p:nvSpPr>
+          <p:cNvPr id="31" name="Text 28"/>
+          <p:cNvSpPr/>
+          <p:nvPr/>
+        </p:nvSpPr>
+        <p:spPr>
+          <a:xfrm>
+            <a:off x="667512" y="4846320"/>
+            <a:ext cx="1975104" cy="960120"/>
+          </a:xfrm>
+          <a:prstGeom prst="rect">
+            <a:avLst/>
+          </a:prstGeom>
+          <a:noFill/>
+          <a:ln/>
+        </p:spPr>
+        <p:txBody>
+          <a:bodyPr wrap="square" lIns="0" tIns="0" rIns="0" bIns="0" rtlCol="0" anchor="ctr"/>
+          <a:lstStyle/>
+          <a:p>
+            <a:pPr algn="l" indent="0" marL="0">
+              <a:lnSpc>
+                <a:spcPct val="108000"/>
+              </a:lnSpc>
+              <a:buNone/>
+            </a:pPr>
+            <a:r>
+              <a:rPr lang="en-US" sz="1500" b="1" dirty="0">
+                <a:solidFill>
+                  <a:srgbClr val="2B2B33"/>
+                </a:solidFill>
+                <a:latin typeface="Cambria" pitchFamily="34" charset="0"/>
+                <a:ea typeface="Cambria" pitchFamily="34" charset="-122"/>
+                <a:cs typeface="Cambria" pitchFamily="34" charset="-120"/>
+              </a:rPr>
+              <a:t>Multifocal Atrial Tach.</a:t>
+            </a:r>
+            <a:endParaRPr lang="en-US" sz="1500" dirty="0"/>
+          </a:p>
+        </p:txBody>
+      </p:sp>
+      <p:sp>
+        <p:nvSpPr>
+          <p:cNvPr id="32" name="Shape 29"/>
+          <p:cNvSpPr/>
+          <p:nvPr/>
+        </p:nvSpPr>
+        <p:spPr>
+          <a:xfrm>
+            <a:off x="2843784" y="4800600"/>
+            <a:ext cx="2779776" cy="1051560"/>
+          </a:xfrm>
+          <a:prstGeom prst="roundRect">
+            <a:avLst>
+              <a:gd name="adj" fmla="val 5217"/>
+            </a:avLst>
           </a:prstGeom>
           <a:solidFill>
-            <a:srgbClr val="A4133C"/>
+            <a:srgbClr val="FFF0F3"/>
           </a:solidFill>
           <a:ln w="12700">
             <a:solidFill>
@@ -24673,40 +24267,16 @@
           </a:ln>
         </p:spPr>
       </p:sp>
-      <p:pic>
-        <p:nvPicPr>
-          <p:cNvPr id="33" name="Image 6" descr="preencoded.png">    </p:cNvPr>
-          <p:cNvPicPr>
-            <a:picLocks noChangeAspect="1"/>
-          </p:cNvPicPr>
-          <p:nvPr/>
-        </p:nvPicPr>
-        <p:blipFill>
-          <a:blip r:embed="rId7"/>
-          <a:stretch>
-            <a:fillRect/>
-          </a:stretch>
-        </p:blipFill>
-        <p:spPr>
-          <a:xfrm>
-            <a:off x="8522208" y="4379976"/>
-            <a:ext cx="329184" cy="329184"/>
-          </a:xfrm>
-          <a:prstGeom prst="rect">
-            <a:avLst/>
-          </a:prstGeom>
-        </p:spPr>
-      </p:pic>
-      <p:sp>
-        <p:nvSpPr>
-          <p:cNvPr id="34" name="Text 25"/>
-          <p:cNvSpPr/>
-          <p:nvPr/>
-        </p:nvSpPr>
-        <p:spPr>
-          <a:xfrm>
-            <a:off x="9171432" y="4187952"/>
-            <a:ext cx="2331720" cy="713232"/>
+      <p:sp>
+        <p:nvSpPr>
+          <p:cNvPr id="33" name="Text 30"/>
+          <p:cNvSpPr/>
+          <p:nvPr/>
+        </p:nvSpPr>
+        <p:spPr>
+          <a:xfrm>
+            <a:off x="2953512" y="4846320"/>
+            <a:ext cx="2523744" cy="960120"/>
           </a:xfrm>
           <a:prstGeom prst="rect">
             <a:avLst/>
@@ -24720,100 +24290,271 @@
           <a:p>
             <a:pPr algn="l" indent="0" marL="0">
               <a:lnSpc>
-                <a:spcPct val="100000"/>
+                <a:spcPct val="108000"/>
               </a:lnSpc>
               <a:buNone/>
             </a:pPr>
             <a:r>
-              <a:rPr lang="en-US" sz="1650" b="1" dirty="0">
-                <a:solidFill>
-                  <a:srgbClr val="FFFFFF"/>
-                </a:solidFill>
-                <a:latin typeface="Cambria" pitchFamily="34" charset="0"/>
-                <a:ea typeface="Cambria" pitchFamily="34" charset="-122"/>
-                <a:cs typeface="Cambria" pitchFamily="34" charset="-120"/>
-              </a:rPr>
-              <a:t>Pre-excited AF (WPW) / VT</a:t>
-            </a:r>
-            <a:endParaRPr lang="en-US" sz="1650" dirty="0"/>
-          </a:p>
-        </p:txBody>
-      </p:sp>
-      <p:sp>
-        <p:nvSpPr>
-          <p:cNvPr id="35" name="Text 26"/>
-          <p:cNvSpPr/>
-          <p:nvPr/>
-        </p:nvSpPr>
-        <p:spPr>
-          <a:xfrm>
-            <a:off x="8394192" y="5029200"/>
-            <a:ext cx="3044952" cy="685800"/>
-          </a:xfrm>
-          <a:prstGeom prst="rect">
-            <a:avLst/>
-          </a:prstGeom>
-          <a:noFill/>
-          <a:ln/>
-        </p:spPr>
-        <p:txBody>
-          <a:bodyPr wrap="square" rtlCol="0" anchor="t"/>
-          <a:lstStyle/>
-          <a:p>
-            <a:pPr algn="l" indent="0" marL="0">
-              <a:lnSpc>
-                <a:spcPct val="110000"/>
-              </a:lnSpc>
-              <a:buNone/>
-            </a:pPr>
-            <a:r>
-              <a:rPr lang="en-US" sz="1250" dirty="0">
-                <a:solidFill>
-                  <a:srgbClr val="FBD8DF"/>
+              <a:rPr lang="en-US" sz="1300" dirty="0">
+                <a:solidFill>
+                  <a:srgbClr val="2B2B33"/>
                 </a:solidFill>
                 <a:latin typeface="Calibri" pitchFamily="34" charset="0"/>
                 <a:ea typeface="Calibri" pitchFamily="34" charset="-122"/>
                 <a:cs typeface="Calibri" pitchFamily="34" charset="-120"/>
               </a:rPr>
-              <a:t>Irregular but broad &amp; very fast — a red flag</a:t>
-            </a:r>
-            <a:endParaRPr lang="en-US" sz="1250" dirty="0"/>
-          </a:p>
-        </p:txBody>
-      </p:sp>
-      <p:sp>
-        <p:nvSpPr>
-          <p:cNvPr id="36" name="Text 27"/>
-          <p:cNvSpPr/>
-          <p:nvPr/>
-        </p:nvSpPr>
-        <p:spPr>
-          <a:xfrm>
-            <a:off x="11277295" y="6355080"/>
-            <a:ext cx="548640" cy="320040"/>
-          </a:xfrm>
-          <a:prstGeom prst="rect">
-            <a:avLst/>
-          </a:prstGeom>
-          <a:noFill/>
-          <a:ln/>
-        </p:spPr>
-        <p:txBody>
-          <a:bodyPr wrap="square" rtlCol="0" anchor="t"/>
-          <a:lstStyle/>
-          <a:p>
-            <a:pPr algn="r" indent="0" marL="0">
-              <a:buNone/>
-            </a:pPr>
-            <a:r>
-              <a:rPr lang="en-US" sz="1100" b="1" dirty="0">
-                <a:solidFill>
-                  <a:srgbClr val="6B6B76"/>
+              <a:t>≥ 3 distinct P-wave shapes</a:t>
+            </a:r>
+            <a:endParaRPr lang="en-US" sz="1300" dirty="0"/>
+          </a:p>
+        </p:txBody>
+      </p:sp>
+      <p:sp>
+        <p:nvSpPr>
+          <p:cNvPr id="34" name="Shape 31"/>
+          <p:cNvSpPr/>
+          <p:nvPr/>
+        </p:nvSpPr>
+        <p:spPr>
+          <a:xfrm>
+            <a:off x="5678424" y="4800600"/>
+            <a:ext cx="2322576" cy="1051560"/>
+          </a:xfrm>
+          <a:prstGeom prst="roundRect">
+            <a:avLst>
+              <a:gd name="adj" fmla="val 5217"/>
+            </a:avLst>
+          </a:prstGeom>
+          <a:solidFill>
+            <a:srgbClr val="FFF0F3"/>
+          </a:solidFill>
+          <a:ln w="12700">
+            <a:solidFill>
+              <a:srgbClr val="FBD8DF"/>
+            </a:solidFill>
+            <a:prstDash val="solid"/>
+          </a:ln>
+        </p:spPr>
+      </p:sp>
+      <p:sp>
+        <p:nvSpPr>
+          <p:cNvPr id="35" name="Text 32"/>
+          <p:cNvSpPr/>
+          <p:nvPr/>
+        </p:nvSpPr>
+        <p:spPr>
+          <a:xfrm>
+            <a:off x="5788152" y="4846320"/>
+            <a:ext cx="2066544" cy="960120"/>
+          </a:xfrm>
+          <a:prstGeom prst="rect">
+            <a:avLst/>
+          </a:prstGeom>
+          <a:noFill/>
+          <a:ln/>
+        </p:spPr>
+        <p:txBody>
+          <a:bodyPr wrap="square" lIns="0" tIns="0" rIns="0" bIns="0" rtlCol="0" anchor="ctr"/>
+          <a:lstStyle/>
+          <a:p>
+            <a:pPr algn="l" indent="0" marL="0">
+              <a:lnSpc>
+                <a:spcPct val="108000"/>
+              </a:lnSpc>
+              <a:buNone/>
+            </a:pPr>
+            <a:r>
+              <a:rPr lang="en-US" sz="1300" dirty="0">
+                <a:solidFill>
+                  <a:srgbClr val="2B2B33"/>
                 </a:solidFill>
                 <a:latin typeface="Calibri" pitchFamily="34" charset="0"/>
                 <a:ea typeface="Calibri" pitchFamily="34" charset="-122"/>
                 <a:cs typeface="Calibri" pitchFamily="34" charset="-120"/>
               </a:rPr>
+              <a:t>Irregular</a:t>
+            </a:r>
+            <a:endParaRPr lang="en-US" sz="1300" dirty="0"/>
+          </a:p>
+        </p:txBody>
+      </p:sp>
+      <p:sp>
+        <p:nvSpPr>
+          <p:cNvPr id="36" name="Shape 33"/>
+          <p:cNvSpPr/>
+          <p:nvPr/>
+        </p:nvSpPr>
+        <p:spPr>
+          <a:xfrm>
+            <a:off x="8055864" y="4800600"/>
+            <a:ext cx="3630168" cy="1051560"/>
+          </a:xfrm>
+          <a:prstGeom prst="roundRect">
+            <a:avLst>
+              <a:gd name="adj" fmla="val 5217"/>
+            </a:avLst>
+          </a:prstGeom>
+          <a:solidFill>
+            <a:srgbClr val="FFF0F3"/>
+          </a:solidFill>
+          <a:ln w="12700">
+            <a:solidFill>
+              <a:srgbClr val="FBD8DF"/>
+            </a:solidFill>
+            <a:prstDash val="solid"/>
+          </a:ln>
+        </p:spPr>
+      </p:sp>
+      <p:sp>
+        <p:nvSpPr>
+          <p:cNvPr id="37" name="Text 34"/>
+          <p:cNvSpPr/>
+          <p:nvPr/>
+        </p:nvSpPr>
+        <p:spPr>
+          <a:xfrm>
+            <a:off x="8165592" y="4846320"/>
+            <a:ext cx="3374136" cy="960120"/>
+          </a:xfrm>
+          <a:prstGeom prst="rect">
+            <a:avLst/>
+          </a:prstGeom>
+          <a:noFill/>
+          <a:ln/>
+        </p:spPr>
+        <p:txBody>
+          <a:bodyPr wrap="square" lIns="0" tIns="0" rIns="0" bIns="0" rtlCol="0" anchor="ctr"/>
+          <a:lstStyle/>
+          <a:p>
+            <a:pPr algn="l" indent="0" marL="0">
+              <a:lnSpc>
+                <a:spcPct val="108000"/>
+              </a:lnSpc>
+              <a:buNone/>
+            </a:pPr>
+            <a:r>
+              <a:rPr lang="en-US" sz="1300" dirty="0">
+                <a:solidFill>
+                  <a:srgbClr val="2B2B33"/>
+                </a:solidFill>
+                <a:latin typeface="Calibri" pitchFamily="34" charset="0"/>
+                <a:ea typeface="Calibri" pitchFamily="34" charset="-122"/>
+                <a:cs typeface="Calibri" pitchFamily="34" charset="-120"/>
+              </a:rPr>
+              <a:t>Discrete varying P waves; COPD</a:t>
+            </a:r>
+            <a:endParaRPr lang="en-US" sz="1300" dirty="0"/>
+          </a:p>
+        </p:txBody>
+      </p:sp>
+      <p:sp>
+        <p:nvSpPr>
+          <p:cNvPr id="38" name="Shape 35"/>
+          <p:cNvSpPr/>
+          <p:nvPr/>
+        </p:nvSpPr>
+        <p:spPr>
+          <a:xfrm>
+            <a:off x="502920" y="5806440"/>
+            <a:ext cx="11183112" cy="457200"/>
+          </a:xfrm>
+          <a:prstGeom prst="roundRect">
+            <a:avLst>
+              <a:gd name="adj" fmla="val 16000"/>
+            </a:avLst>
+          </a:prstGeom>
+          <a:solidFill>
+            <a:srgbClr val="FFF0F3"/>
+          </a:solidFill>
+          <a:ln/>
+        </p:spPr>
+      </p:sp>
+      <p:sp>
+        <p:nvSpPr>
+          <p:cNvPr id="39" name="Text 36"/>
+          <p:cNvSpPr/>
+          <p:nvPr/>
+        </p:nvSpPr>
+        <p:spPr>
+          <a:xfrm>
+            <a:off x="822960" y="5806440"/>
+            <a:ext cx="10607040" cy="457200"/>
+          </a:xfrm>
+          <a:prstGeom prst="rect">
+            <a:avLst/>
+          </a:prstGeom>
+          <a:noFill/>
+          <a:ln/>
+        </p:spPr>
+        <p:txBody>
+          <a:bodyPr wrap="square" rtlCol="0" anchor="ctr"/>
+          <a:lstStyle/>
+          <a:p>
+            <a:pPr algn="l" indent="0" marL="0">
+              <a:buNone/>
+            </a:pPr>
+            <a:r>
+              <a:rPr lang="en-US" sz="1300" b="1" dirty="0">
+                <a:solidFill>
+                  <a:srgbClr val="A4133C"/>
+                </a:solidFill>
+                <a:latin typeface="Calibri" pitchFamily="34" charset="0"/>
+                <a:ea typeface="Calibri" pitchFamily="34" charset="-122"/>
+                <a:cs typeface="Calibri" pitchFamily="34" charset="-120"/>
+              </a:rPr>
+              <a:t>First question:  </a:t>
+            </a:r>
+            <a:pPr algn="l" indent="0" marL="0">
+              <a:buNone/>
+            </a:pPr>
+            <a:r>
+              <a:rPr lang="en-US" sz="1300" dirty="0">
+                <a:solidFill>
+                  <a:srgbClr val="2B2B33"/>
+                </a:solidFill>
+                <a:latin typeface="Calibri" pitchFamily="34" charset="0"/>
+                <a:ea typeface="Calibri" pitchFamily="34" charset="-122"/>
+                <a:cs typeface="Calibri" pitchFamily="34" charset="-120"/>
+              </a:rPr>
+              <a:t>is the rhythm regular or irregular?  Then look at the atrial activity — P waves, flutter waves, or fibrillation.</a:t>
+            </a:r>
+            <a:endParaRPr lang="en-US" sz="1300" dirty="0"/>
+          </a:p>
+        </p:txBody>
+      </p:sp>
+      <p:sp>
+        <p:nvSpPr>
+          <p:cNvPr id="40" name="Text 37"/>
+          <p:cNvSpPr/>
+          <p:nvPr/>
+        </p:nvSpPr>
+        <p:spPr>
+          <a:xfrm>
+            <a:off x="11277295" y="6355080"/>
+            <a:ext cx="548640" cy="320040"/>
+          </a:xfrm>
+          <a:prstGeom prst="rect">
+            <a:avLst/>
+          </a:prstGeom>
+          <a:noFill/>
+          <a:ln/>
+        </p:spPr>
+        <p:txBody>
+          <a:bodyPr wrap="square" rtlCol="0" anchor="t"/>
+          <a:lstStyle/>
+          <a:p>
+            <a:pPr algn="r" indent="0" marL="0">
+              <a:buNone/>
+            </a:pPr>
+            <a:r>
+              <a:rPr lang="en-US" sz="1100" b="1" dirty="0">
+                <a:solidFill>
+                  <a:srgbClr val="6B6B76"/>
+                </a:solidFill>
+                <a:latin typeface="Calibri" pitchFamily="34" charset="0"/>
+                <a:ea typeface="Calibri" pitchFamily="34" charset="-122"/>
+                <a:cs typeface="Calibri" pitchFamily="34" charset="-120"/>
+              </a:rPr>
               <a:t>09</a:t>
             </a:r>
             <a:endParaRPr lang="en-US" sz="1100" dirty="0"/>
@@ -24822,7 +24563,7 @@
       </p:sp>
       <p:sp>
         <p:nvSpPr>
-          <p:cNvPr id="37" name="Text 28"/>
+          <p:cNvPr id="41" name="Text 38"/>
           <p:cNvSpPr/>
           <p:nvPr/>
         </p:nvSpPr>

--- a/presentations/Atrial-Fibrillation-Topic-Review.pptx
+++ b/presentations/Atrial-Fibrillation-Topic-Review.pptx
@@ -24,9 +24,10 @@
     <p:sldId id="272" r:id="rId18"/>
     <p:sldId id="273" r:id="rId19"/>
     <p:sldId id="274" r:id="rId20"/>
+    <p:sldId id="275" r:id="rId21"/>
   </p:sldIdLst>
   <p:notesMasterIdLst>
-    <p:notesMasterId r:id="rId21"/>
+    <p:notesMasterId r:id="rId22"/>
   </p:notesMasterIdLst>
   <p:sldSz cx="12191695" cy="6858000"/>
   <p:notesSz cx="6858000" cy="12191695"/>
@@ -1512,6 +1513,94 @@
             <a:fld id="{F7021451-1387-4CA6-816F-3879F97B5CBC}" type="slidenum">
               <a:rPr lang="en-US"/>
               <a:t>2</a:t>
+            </a:fld>
+            <a:endParaRPr lang="en-US"/>
+          </a:p>
+        </p:txBody>
+      </p:sp>
+    </p:spTree>
+    <p:extLst>
+      <p:ext uri="{BB962C8B-B14F-4D97-AF65-F5344CB8AC3E}">
+        <p14:creationId xmlns:p14="http://schemas.microsoft.com/office/powerpoint/2010/main" val="1024086991"/>
+      </p:ext>
+    </p:extLst>
+  </p:cSld>
+  <p:clrMapOvr>
+    <a:masterClrMapping/>
+  </p:clrMapOvr>
+</p:notes>
+</file>
+
+<file path=ppt/notesSlides/notesSlide20.xml><?xml version="1.0" encoding="utf-8"?>
+<p:notes xmlns:a="http://schemas.openxmlformats.org/drawingml/2006/main" xmlns:r="http://schemas.openxmlformats.org/officeDocument/2006/relationships" xmlns:p="http://schemas.openxmlformats.org/presentationml/2006/main">
+  <p:cSld>
+    <p:spTree>
+      <p:nvGrpSpPr>
+        <p:cNvPr id="1" name=""/>
+        <p:cNvGrpSpPr/>
+        <p:nvPr/>
+      </p:nvGrpSpPr>
+      <p:grpSpPr>
+        <a:xfrm>
+          <a:off x="0" y="0"/>
+          <a:ext cx="0" cy="0"/>
+          <a:chOff x="0" y="0"/>
+          <a:chExt cx="0" cy="0"/>
+        </a:xfrm>
+      </p:grpSpPr>
+      <p:sp>
+        <p:nvSpPr>
+          <p:cNvPr id="2" name="Slide Image Placeholder 1"/>
+          <p:cNvSpPr>
+            <a:spLocks noGrp="1" noRot="1" noChangeAspect="1"/>
+          </p:cNvSpPr>
+          <p:nvPr>
+            <p:ph type="sldImg"/>
+          </p:nvPr>
+        </p:nvSpPr>
+        <p:spPr/>
+      </p:sp>
+      <p:sp>
+        <p:nvSpPr>
+          <p:cNvPr id="3" name="Notes Placeholder 2"/>
+          <p:cNvSpPr>
+            <a:spLocks noGrp="1"/>
+          </p:cNvSpPr>
+          <p:nvPr>
+            <p:ph type="body" idx="1"/>
+          </p:nvPr>
+        </p:nvSpPr>
+        <p:spPr/>
+        <p:txBody>
+          <a:bodyPr/>
+          <a:lstStyle/>
+          <a:p>
+            <a:r>
+              <a:rPr lang="en-US" dirty="0"/>
+              <a:t/>
+            </a:r>
+            <a:endParaRPr lang="en-US" dirty="0"/>
+          </a:p>
+        </p:txBody>
+      </p:sp>
+      <p:sp>
+        <p:nvSpPr>
+          <p:cNvPr id="4" name="Slide Number Placeholder 3"/>
+          <p:cNvSpPr>
+            <a:spLocks noGrp="1"/>
+          </p:cNvSpPr>
+          <p:nvPr>
+            <p:ph type="sldNum" sz="quarter" idx="10"/>
+          </p:nvPr>
+        </p:nvSpPr>
+        <p:spPr/>
+        <p:txBody>
+          <a:bodyPr/>
+          <a:lstStyle/>
+          <a:p>
+            <a:fld id="{F7021451-1387-4CA6-816F-3879F97B5CBC}" type="slidenum">
+              <a:rPr lang="en-US"/>
+              <a:t>20</a:t>
             </a:fld>
             <a:endParaRPr lang="en-US"/>
           </a:p>
@@ -8028,7 +8117,7 @@
                 <a:ea typeface="Calibri" pitchFamily="34" charset="-122"/>
                 <a:cs typeface="Calibri" pitchFamily="34" charset="-120"/>
               </a:rPr>
-              <a:t>MANAGEMENT · INTERVENTIONAL</a:t>
+              <a:t>MANAGEMENT · MEDICAL</a:t>
             </a:r>
             <a:endParaRPr lang="en-US" sz="1250" dirty="0"/>
           </a:p>
@@ -8067,7 +8156,7 @@
                 <a:ea typeface="Cambria" pitchFamily="34" charset="-122"/>
                 <a:cs typeface="Cambria" pitchFamily="34" charset="-120"/>
               </a:rPr>
-              <a:t>Surgical Treatment of AF</a:t>
+              <a:t>Medical Treatment of AF</a:t>
             </a:r>
             <a:endParaRPr lang="en-US" sz="3000" dirty="0"/>
           </a:p>
@@ -8081,12 +8170,12 @@
         </p:nvSpPr>
         <p:spPr>
           <a:xfrm>
-            <a:off x="502920" y="1828800"/>
-            <a:ext cx="5486400" cy="1783080"/>
+            <a:off x="502920" y="1783080"/>
+            <a:ext cx="3611880" cy="4206240"/>
           </a:xfrm>
           <a:prstGeom prst="roundRect">
             <a:avLst>
-              <a:gd name="adj" fmla="val 6154"/>
+              <a:gd name="adj" fmla="val 3038"/>
             </a:avLst>
           </a:prstGeom>
           <a:solidFill>
@@ -8115,21 +8204,16 @@
         </p:nvSpPr>
         <p:spPr>
           <a:xfrm>
-            <a:off x="822960" y="2103120"/>
-            <a:ext cx="777240" cy="777240"/>
+            <a:off x="777240" y="2039112"/>
+            <a:ext cx="658368" cy="658368"/>
           </a:xfrm>
           <a:prstGeom prst="ellipse">
             <a:avLst/>
           </a:prstGeom>
           <a:solidFill>
-            <a:srgbClr val="FFFFFF"/>
+            <a:srgbClr val="A4133C"/>
           </a:solidFill>
-          <a:ln w="12700">
-            <a:solidFill>
-              <a:srgbClr val="FBD8DF"/>
-            </a:solidFill>
-            <a:prstDash val="solid"/>
-          </a:ln>
+          <a:ln/>
         </p:spPr>
       </p:sp>
       <p:pic>
@@ -8148,8 +8232,8 @@
         </p:blipFill>
         <p:spPr>
           <a:xfrm>
-            <a:off x="1014984" y="2295144"/>
-            <a:ext cx="393192" cy="393192"/>
+            <a:off x="932688" y="2194560"/>
+            <a:ext cx="347472" cy="347472"/>
           </a:xfrm>
           <a:prstGeom prst="rect">
             <a:avLst/>
@@ -8164,8 +8248,8 @@
         </p:nvSpPr>
         <p:spPr>
           <a:xfrm>
-            <a:off x="1783080" y="2084832"/>
-            <a:ext cx="3977640" cy="822960"/>
+            <a:off x="1554480" y="2039112"/>
+            <a:ext cx="2423160" cy="658368"/>
           </a:xfrm>
           <a:prstGeom prst="rect">
             <a:avLst/>
@@ -8175,6 +8259,104 @@
         </p:spPr>
         <p:txBody>
           <a:bodyPr wrap="square" lIns="0" tIns="0" rIns="0" bIns="0" rtlCol="0" anchor="ctr"/>
+          <a:lstStyle/>
+          <a:p>
+            <a:pPr algn="l" indent="0" marL="0">
+              <a:buNone/>
+            </a:pPr>
+            <a:r>
+              <a:rPr lang="en-US" sz="1800" b="1" dirty="0">
+                <a:solidFill>
+                  <a:srgbClr val="2B2B33"/>
+                </a:solidFill>
+                <a:latin typeface="Cambria" pitchFamily="34" charset="0"/>
+                <a:ea typeface="Cambria" pitchFamily="34" charset="-122"/>
+                <a:cs typeface="Cambria" pitchFamily="34" charset="-120"/>
+              </a:rPr>
+              <a:t>Rate Control</a:t>
+            </a:r>
+            <a:endParaRPr lang="en-US" sz="1800" dirty="0"/>
+          </a:p>
+        </p:txBody>
+      </p:sp>
+      <p:sp>
+        <p:nvSpPr>
+          <p:cNvPr id="10" name="Shape 6"/>
+          <p:cNvSpPr/>
+          <p:nvPr/>
+        </p:nvSpPr>
+        <p:spPr>
+          <a:xfrm>
+            <a:off x="795528" y="2935224"/>
+            <a:ext cx="118872" cy="118872"/>
+          </a:xfrm>
+          <a:prstGeom prst="ellipse">
+            <a:avLst/>
+          </a:prstGeom>
+          <a:solidFill>
+            <a:srgbClr val="FF4D6D"/>
+          </a:solidFill>
+          <a:ln/>
+        </p:spPr>
+      </p:sp>
+      <p:sp>
+        <p:nvSpPr>
+          <p:cNvPr id="11" name="Text 7"/>
+          <p:cNvSpPr/>
+          <p:nvPr/>
+        </p:nvSpPr>
+        <p:spPr>
+          <a:xfrm>
+            <a:off x="1033272" y="2880360"/>
+            <a:ext cx="2834640" cy="274320"/>
+          </a:xfrm>
+          <a:prstGeom prst="rect">
+            <a:avLst/>
+          </a:prstGeom>
+          <a:noFill/>
+          <a:ln/>
+        </p:spPr>
+        <p:txBody>
+          <a:bodyPr wrap="square" lIns="0" tIns="0" rIns="0" bIns="0" rtlCol="0" anchor="t"/>
+          <a:lstStyle/>
+          <a:p>
+            <a:pPr algn="l" indent="0" marL="0">
+              <a:buNone/>
+            </a:pPr>
+            <a:r>
+              <a:rPr lang="en-US" sz="1400" b="1" dirty="0">
+                <a:solidFill>
+                  <a:srgbClr val="A4133C"/>
+                </a:solidFill>
+                <a:latin typeface="Cambria" pitchFamily="34" charset="0"/>
+                <a:ea typeface="Cambria" pitchFamily="34" charset="-122"/>
+                <a:cs typeface="Cambria" pitchFamily="34" charset="-120"/>
+              </a:rPr>
+              <a:t>Beta-blockers</a:t>
+            </a:r>
+            <a:endParaRPr lang="en-US" sz="1400" dirty="0"/>
+          </a:p>
+        </p:txBody>
+      </p:sp>
+      <p:sp>
+        <p:nvSpPr>
+          <p:cNvPr id="12" name="Text 8"/>
+          <p:cNvSpPr/>
+          <p:nvPr/>
+        </p:nvSpPr>
+        <p:spPr>
+          <a:xfrm>
+            <a:off x="1033272" y="3154680"/>
+            <a:ext cx="2834640" cy="457200"/>
+          </a:xfrm>
+          <a:prstGeom prst="rect">
+            <a:avLst/>
+          </a:prstGeom>
+          <a:noFill/>
+          <a:ln/>
+        </p:spPr>
+        <p:txBody>
+          <a:bodyPr wrap="square" lIns="0" tIns="0" rIns="0" bIns="0" rtlCol="0" anchor="t"/>
           <a:lstStyle/>
           <a:p>
             <a:pPr algn="l" indent="0" marL="0">
@@ -8184,30 +8366,89 @@
               <a:buNone/>
             </a:pPr>
             <a:r>
-              <a:rPr lang="en-US" sz="1700" b="1" dirty="0">
-                <a:solidFill>
-                  <a:srgbClr val="2B2B33"/>
+              <a:rPr lang="en-US" sz="1150" dirty="0">
+                <a:solidFill>
+                  <a:srgbClr val="6B6B76"/>
+                </a:solidFill>
+                <a:latin typeface="Calibri" pitchFamily="34" charset="0"/>
+                <a:ea typeface="Calibri" pitchFamily="34" charset="-122"/>
+                <a:cs typeface="Calibri" pitchFamily="34" charset="-120"/>
+              </a:rPr>
+              <a:t>First-line — metoprolol, bisoprolol, carvedilol</a:t>
+            </a:r>
+            <a:endParaRPr lang="en-US" sz="1150" dirty="0"/>
+          </a:p>
+        </p:txBody>
+      </p:sp>
+      <p:sp>
+        <p:nvSpPr>
+          <p:cNvPr id="13" name="Shape 9"/>
+          <p:cNvSpPr/>
+          <p:nvPr/>
+        </p:nvSpPr>
+        <p:spPr>
+          <a:xfrm>
+            <a:off x="795528" y="3685032"/>
+            <a:ext cx="118872" cy="118872"/>
+          </a:xfrm>
+          <a:prstGeom prst="ellipse">
+            <a:avLst/>
+          </a:prstGeom>
+          <a:solidFill>
+            <a:srgbClr val="FF4D6D"/>
+          </a:solidFill>
+          <a:ln/>
+        </p:spPr>
+      </p:sp>
+      <p:sp>
+        <p:nvSpPr>
+          <p:cNvPr id="14" name="Text 10"/>
+          <p:cNvSpPr/>
+          <p:nvPr/>
+        </p:nvSpPr>
+        <p:spPr>
+          <a:xfrm>
+            <a:off x="1033272" y="3630168"/>
+            <a:ext cx="2834640" cy="274320"/>
+          </a:xfrm>
+          <a:prstGeom prst="rect">
+            <a:avLst/>
+          </a:prstGeom>
+          <a:noFill/>
+          <a:ln/>
+        </p:spPr>
+        <p:txBody>
+          <a:bodyPr wrap="square" lIns="0" tIns="0" rIns="0" bIns="0" rtlCol="0" anchor="t"/>
+          <a:lstStyle/>
+          <a:p>
+            <a:pPr algn="l" indent="0" marL="0">
+              <a:buNone/>
+            </a:pPr>
+            <a:r>
+              <a:rPr lang="en-US" sz="1400" b="1" dirty="0">
+                <a:solidFill>
+                  <a:srgbClr val="A4133C"/>
                 </a:solidFill>
                 <a:latin typeface="Cambria" pitchFamily="34" charset="0"/>
                 <a:ea typeface="Cambria" pitchFamily="34" charset="-122"/>
                 <a:cs typeface="Cambria" pitchFamily="34" charset="-120"/>
               </a:rPr>
-              <a:t>Catheter Ablation (PVI)</a:t>
-            </a:r>
-            <a:endParaRPr lang="en-US" sz="1700" dirty="0"/>
-          </a:p>
-        </p:txBody>
-      </p:sp>
-      <p:sp>
-        <p:nvSpPr>
-          <p:cNvPr id="10" name="Text 6"/>
-          <p:cNvSpPr/>
-          <p:nvPr/>
-        </p:nvSpPr>
-        <p:spPr>
-          <a:xfrm>
-            <a:off x="868680" y="2944368"/>
-            <a:ext cx="4754880" cy="603504"/>
+              <a:t>Non-DHP CCB</a:t>
+            </a:r>
+            <a:endParaRPr lang="en-US" sz="1400" dirty="0"/>
+          </a:p>
+        </p:txBody>
+      </p:sp>
+      <p:sp>
+        <p:nvSpPr>
+          <p:cNvPr id="15" name="Text 11"/>
+          <p:cNvSpPr/>
+          <p:nvPr/>
+        </p:nvSpPr>
+        <p:spPr>
+          <a:xfrm>
+            <a:off x="1033272" y="3904488"/>
+            <a:ext cx="2834640" cy="457200"/>
           </a:xfrm>
           <a:prstGeom prst="rect">
             <a:avLst/>
@@ -8221,12 +8462,12 @@
           <a:p>
             <a:pPr algn="l" indent="0" marL="0">
               <a:lnSpc>
-                <a:spcPct val="110000"/>
+                <a:spcPct val="100000"/>
               </a:lnSpc>
               <a:buNone/>
             </a:pPr>
             <a:r>
-              <a:rPr lang="en-US" sz="1250" dirty="0">
+              <a:rPr lang="en-US" sz="1150" dirty="0">
                 <a:solidFill>
                   <a:srgbClr val="6B6B76"/>
                 </a:solidFill>
@@ -8234,26 +8475,228 @@
                 <a:ea typeface="Calibri" pitchFamily="34" charset="-122"/>
                 <a:cs typeface="Calibri" pitchFamily="34" charset="-120"/>
               </a:rPr>
-              <a:t>Pulmonary vein isolation ablates the triggering foci — first-line interventional rhythm control.</a:t>
-            </a:r>
-            <a:endParaRPr lang="en-US" sz="1250" dirty="0"/>
-          </a:p>
-        </p:txBody>
-      </p:sp>
-      <p:sp>
-        <p:nvSpPr>
-          <p:cNvPr id="11" name="Shape 7"/>
-          <p:cNvSpPr/>
-          <p:nvPr/>
-        </p:nvSpPr>
-        <p:spPr>
-          <a:xfrm>
-            <a:off x="6199632" y="1828800"/>
-            <a:ext cx="5486400" cy="1783080"/>
+              <a:t>Diltiazem or verapamil (avoid in decompensated HF)</a:t>
+            </a:r>
+            <a:endParaRPr lang="en-US" sz="1150" dirty="0"/>
+          </a:p>
+        </p:txBody>
+      </p:sp>
+      <p:sp>
+        <p:nvSpPr>
+          <p:cNvPr id="16" name="Shape 12"/>
+          <p:cNvSpPr/>
+          <p:nvPr/>
+        </p:nvSpPr>
+        <p:spPr>
+          <a:xfrm>
+            <a:off x="795528" y="4434840"/>
+            <a:ext cx="118872" cy="118872"/>
+          </a:xfrm>
+          <a:prstGeom prst="ellipse">
+            <a:avLst/>
+          </a:prstGeom>
+          <a:solidFill>
+            <a:srgbClr val="FF4D6D"/>
+          </a:solidFill>
+          <a:ln/>
+        </p:spPr>
+      </p:sp>
+      <p:sp>
+        <p:nvSpPr>
+          <p:cNvPr id="17" name="Text 13"/>
+          <p:cNvSpPr/>
+          <p:nvPr/>
+        </p:nvSpPr>
+        <p:spPr>
+          <a:xfrm>
+            <a:off x="1033272" y="4379976"/>
+            <a:ext cx="2834640" cy="274320"/>
+          </a:xfrm>
+          <a:prstGeom prst="rect">
+            <a:avLst/>
+          </a:prstGeom>
+          <a:noFill/>
+          <a:ln/>
+        </p:spPr>
+        <p:txBody>
+          <a:bodyPr wrap="square" lIns="0" tIns="0" rIns="0" bIns="0" rtlCol="0" anchor="t"/>
+          <a:lstStyle/>
+          <a:p>
+            <a:pPr algn="l" indent="0" marL="0">
+              <a:buNone/>
+            </a:pPr>
+            <a:r>
+              <a:rPr lang="en-US" sz="1400" b="1" dirty="0">
+                <a:solidFill>
+                  <a:srgbClr val="A4133C"/>
+                </a:solidFill>
+                <a:latin typeface="Cambria" pitchFamily="34" charset="0"/>
+                <a:ea typeface="Cambria" pitchFamily="34" charset="-122"/>
+                <a:cs typeface="Cambria" pitchFamily="34" charset="-120"/>
+              </a:rPr>
+              <a:t>Digoxin</a:t>
+            </a:r>
+            <a:endParaRPr lang="en-US" sz="1400" dirty="0"/>
+          </a:p>
+        </p:txBody>
+      </p:sp>
+      <p:sp>
+        <p:nvSpPr>
+          <p:cNvPr id="18" name="Text 14"/>
+          <p:cNvSpPr/>
+          <p:nvPr/>
+        </p:nvSpPr>
+        <p:spPr>
+          <a:xfrm>
+            <a:off x="1033272" y="4654296"/>
+            <a:ext cx="2834640" cy="457200"/>
+          </a:xfrm>
+          <a:prstGeom prst="rect">
+            <a:avLst/>
+          </a:prstGeom>
+          <a:noFill/>
+          <a:ln/>
+        </p:spPr>
+        <p:txBody>
+          <a:bodyPr wrap="square" lIns="0" tIns="0" rIns="0" bIns="0" rtlCol="0" anchor="t"/>
+          <a:lstStyle/>
+          <a:p>
+            <a:pPr algn="l" indent="0" marL="0">
+              <a:lnSpc>
+                <a:spcPct val="100000"/>
+              </a:lnSpc>
+              <a:buNone/>
+            </a:pPr>
+            <a:r>
+              <a:rPr lang="en-US" sz="1150" dirty="0">
+                <a:solidFill>
+                  <a:srgbClr val="6B6B76"/>
+                </a:solidFill>
+                <a:latin typeface="Calibri" pitchFamily="34" charset="0"/>
+                <a:ea typeface="Calibri" pitchFamily="34" charset="-122"/>
+                <a:cs typeface="Calibri" pitchFamily="34" charset="-120"/>
+              </a:rPr>
+              <a:t>Adjunct or LV systolic dysfunction</a:t>
+            </a:r>
+            <a:endParaRPr lang="en-US" sz="1150" dirty="0"/>
+          </a:p>
+        </p:txBody>
+      </p:sp>
+      <p:sp>
+        <p:nvSpPr>
+          <p:cNvPr id="19" name="Shape 15"/>
+          <p:cNvSpPr/>
+          <p:nvPr/>
+        </p:nvSpPr>
+        <p:spPr>
+          <a:xfrm>
+            <a:off x="795528" y="5184648"/>
+            <a:ext cx="118872" cy="118872"/>
+          </a:xfrm>
+          <a:prstGeom prst="ellipse">
+            <a:avLst/>
+          </a:prstGeom>
+          <a:solidFill>
+            <a:srgbClr val="FF4D6D"/>
+          </a:solidFill>
+          <a:ln/>
+        </p:spPr>
+      </p:sp>
+      <p:sp>
+        <p:nvSpPr>
+          <p:cNvPr id="20" name="Text 16"/>
+          <p:cNvSpPr/>
+          <p:nvPr/>
+        </p:nvSpPr>
+        <p:spPr>
+          <a:xfrm>
+            <a:off x="1033272" y="5129784"/>
+            <a:ext cx="2834640" cy="274320"/>
+          </a:xfrm>
+          <a:prstGeom prst="rect">
+            <a:avLst/>
+          </a:prstGeom>
+          <a:noFill/>
+          <a:ln/>
+        </p:spPr>
+        <p:txBody>
+          <a:bodyPr wrap="square" lIns="0" tIns="0" rIns="0" bIns="0" rtlCol="0" anchor="t"/>
+          <a:lstStyle/>
+          <a:p>
+            <a:pPr algn="l" indent="0" marL="0">
+              <a:buNone/>
+            </a:pPr>
+            <a:r>
+              <a:rPr lang="en-US" sz="1400" b="1" dirty="0">
+                <a:solidFill>
+                  <a:srgbClr val="A4133C"/>
+                </a:solidFill>
+                <a:latin typeface="Cambria" pitchFamily="34" charset="0"/>
+                <a:ea typeface="Cambria" pitchFamily="34" charset="-122"/>
+                <a:cs typeface="Cambria" pitchFamily="34" charset="-120"/>
+              </a:rPr>
+              <a:t>Target</a:t>
+            </a:r>
+            <a:endParaRPr lang="en-US" sz="1400" dirty="0"/>
+          </a:p>
+        </p:txBody>
+      </p:sp>
+      <p:sp>
+        <p:nvSpPr>
+          <p:cNvPr id="21" name="Text 17"/>
+          <p:cNvSpPr/>
+          <p:nvPr/>
+        </p:nvSpPr>
+        <p:spPr>
+          <a:xfrm>
+            <a:off x="1033272" y="5404104"/>
+            <a:ext cx="2834640" cy="457200"/>
+          </a:xfrm>
+          <a:prstGeom prst="rect">
+            <a:avLst/>
+          </a:prstGeom>
+          <a:noFill/>
+          <a:ln/>
+        </p:spPr>
+        <p:txBody>
+          <a:bodyPr wrap="square" lIns="0" tIns="0" rIns="0" bIns="0" rtlCol="0" anchor="t"/>
+          <a:lstStyle/>
+          <a:p>
+            <a:pPr algn="l" indent="0" marL="0">
+              <a:lnSpc>
+                <a:spcPct val="100000"/>
+              </a:lnSpc>
+              <a:buNone/>
+            </a:pPr>
+            <a:r>
+              <a:rPr lang="en-US" sz="1150" dirty="0">
+                <a:solidFill>
+                  <a:srgbClr val="6B6B76"/>
+                </a:solidFill>
+                <a:latin typeface="Calibri" pitchFamily="34" charset="0"/>
+                <a:ea typeface="Calibri" pitchFamily="34" charset="-122"/>
+                <a:cs typeface="Calibri" pitchFamily="34" charset="-120"/>
+              </a:rPr>
+              <a:t>Resting HR &lt; 80 bpm (lenient &lt; 110)</a:t>
+            </a:r>
+            <a:endParaRPr lang="en-US" sz="1150" dirty="0"/>
+          </a:p>
+        </p:txBody>
+      </p:sp>
+      <p:sp>
+        <p:nvSpPr>
+          <p:cNvPr id="22" name="Shape 18"/>
+          <p:cNvSpPr/>
+          <p:nvPr/>
+        </p:nvSpPr>
+        <p:spPr>
+          <a:xfrm>
+            <a:off x="4288536" y="1783080"/>
+            <a:ext cx="3611880" cy="4206240"/>
           </a:xfrm>
           <a:prstGeom prst="roundRect">
             <a:avLst>
-              <a:gd name="adj" fmla="val 6154"/>
+              <a:gd name="adj" fmla="val 3038"/>
             </a:avLst>
           </a:prstGeom>
           <a:solidFill>
@@ -8276,32 +8719,27 @@
       </p:sp>
       <p:sp>
         <p:nvSpPr>
-          <p:cNvPr id="12" name="Shape 8"/>
-          <p:cNvSpPr/>
-          <p:nvPr/>
-        </p:nvSpPr>
-        <p:spPr>
-          <a:xfrm>
-            <a:off x="6519672" y="2103120"/>
-            <a:ext cx="777240" cy="777240"/>
+          <p:cNvPr id="23" name="Shape 19"/>
+          <p:cNvSpPr/>
+          <p:nvPr/>
+        </p:nvSpPr>
+        <p:spPr>
+          <a:xfrm>
+            <a:off x="4562856" y="2039112"/>
+            <a:ext cx="658368" cy="658368"/>
           </a:xfrm>
           <a:prstGeom prst="ellipse">
             <a:avLst/>
           </a:prstGeom>
           <a:solidFill>
-            <a:srgbClr val="FFFFFF"/>
+            <a:srgbClr val="A4133C"/>
           </a:solidFill>
-          <a:ln w="12700">
-            <a:solidFill>
-              <a:srgbClr val="FBD8DF"/>
-            </a:solidFill>
-            <a:prstDash val="solid"/>
-          </a:ln>
+          <a:ln/>
         </p:spPr>
       </p:sp>
       <p:pic>
         <p:nvPicPr>
-          <p:cNvPr id="13" name="Image 2" descr="preencoded.png">    </p:cNvPr>
+          <p:cNvPr id="24" name="Image 2" descr="preencoded.png">    </p:cNvPr>
           <p:cNvPicPr>
             <a:picLocks noChangeAspect="1"/>
           </p:cNvPicPr>
@@ -8315,8 +8753,8 @@
         </p:blipFill>
         <p:spPr>
           <a:xfrm>
-            <a:off x="6711696" y="2295144"/>
-            <a:ext cx="393192" cy="393192"/>
+            <a:off x="4718304" y="2194560"/>
+            <a:ext cx="347472" cy="347472"/>
           </a:xfrm>
           <a:prstGeom prst="rect">
             <a:avLst/>
@@ -8325,14 +8763,14 @@
       </p:pic>
       <p:sp>
         <p:nvSpPr>
-          <p:cNvPr id="14" name="Text 9"/>
-          <p:cNvSpPr/>
-          <p:nvPr/>
-        </p:nvSpPr>
-        <p:spPr>
-          <a:xfrm>
-            <a:off x="7479792" y="2084832"/>
-            <a:ext cx="3977640" cy="822960"/>
+          <p:cNvPr id="25" name="Text 20"/>
+          <p:cNvSpPr/>
+          <p:nvPr/>
+        </p:nvSpPr>
+        <p:spPr>
+          <a:xfrm>
+            <a:off x="5340096" y="2039112"/>
+            <a:ext cx="2423160" cy="658368"/>
           </a:xfrm>
           <a:prstGeom prst="rect">
             <a:avLst/>
@@ -8342,6 +8780,104 @@
         </p:spPr>
         <p:txBody>
           <a:bodyPr wrap="square" lIns="0" tIns="0" rIns="0" bIns="0" rtlCol="0" anchor="ctr"/>
+          <a:lstStyle/>
+          <a:p>
+            <a:pPr algn="l" indent="0" marL="0">
+              <a:buNone/>
+            </a:pPr>
+            <a:r>
+              <a:rPr lang="en-US" sz="1800" b="1" dirty="0">
+                <a:solidFill>
+                  <a:srgbClr val="2B2B33"/>
+                </a:solidFill>
+                <a:latin typeface="Cambria" pitchFamily="34" charset="0"/>
+                <a:ea typeface="Cambria" pitchFamily="34" charset="-122"/>
+                <a:cs typeface="Cambria" pitchFamily="34" charset="-120"/>
+              </a:rPr>
+              <a:t>Rhythm Control</a:t>
+            </a:r>
+            <a:endParaRPr lang="en-US" sz="1800" dirty="0"/>
+          </a:p>
+        </p:txBody>
+      </p:sp>
+      <p:sp>
+        <p:nvSpPr>
+          <p:cNvPr id="26" name="Shape 21"/>
+          <p:cNvSpPr/>
+          <p:nvPr/>
+        </p:nvSpPr>
+        <p:spPr>
+          <a:xfrm>
+            <a:off x="4581144" y="2935224"/>
+            <a:ext cx="118872" cy="118872"/>
+          </a:xfrm>
+          <a:prstGeom prst="ellipse">
+            <a:avLst/>
+          </a:prstGeom>
+          <a:solidFill>
+            <a:srgbClr val="FF4D6D"/>
+          </a:solidFill>
+          <a:ln/>
+        </p:spPr>
+      </p:sp>
+      <p:sp>
+        <p:nvSpPr>
+          <p:cNvPr id="27" name="Text 22"/>
+          <p:cNvSpPr/>
+          <p:nvPr/>
+        </p:nvSpPr>
+        <p:spPr>
+          <a:xfrm>
+            <a:off x="4818888" y="2880360"/>
+            <a:ext cx="2834640" cy="274320"/>
+          </a:xfrm>
+          <a:prstGeom prst="rect">
+            <a:avLst/>
+          </a:prstGeom>
+          <a:noFill/>
+          <a:ln/>
+        </p:spPr>
+        <p:txBody>
+          <a:bodyPr wrap="square" lIns="0" tIns="0" rIns="0" bIns="0" rtlCol="0" anchor="t"/>
+          <a:lstStyle/>
+          <a:p>
+            <a:pPr algn="l" indent="0" marL="0">
+              <a:buNone/>
+            </a:pPr>
+            <a:r>
+              <a:rPr lang="en-US" sz="1400" b="1" dirty="0">
+                <a:solidFill>
+                  <a:srgbClr val="A4133C"/>
+                </a:solidFill>
+                <a:latin typeface="Cambria" pitchFamily="34" charset="0"/>
+                <a:ea typeface="Cambria" pitchFamily="34" charset="-122"/>
+                <a:cs typeface="Cambria" pitchFamily="34" charset="-120"/>
+              </a:rPr>
+              <a:t>DC cardioversion</a:t>
+            </a:r>
+            <a:endParaRPr lang="en-US" sz="1400" dirty="0"/>
+          </a:p>
+        </p:txBody>
+      </p:sp>
+      <p:sp>
+        <p:nvSpPr>
+          <p:cNvPr id="28" name="Text 23"/>
+          <p:cNvSpPr/>
+          <p:nvPr/>
+        </p:nvSpPr>
+        <p:spPr>
+          <a:xfrm>
+            <a:off x="4818888" y="3154680"/>
+            <a:ext cx="2834640" cy="457200"/>
+          </a:xfrm>
+          <a:prstGeom prst="rect">
+            <a:avLst/>
+          </a:prstGeom>
+          <a:noFill/>
+          <a:ln/>
+        </p:spPr>
+        <p:txBody>
+          <a:bodyPr wrap="square" lIns="0" tIns="0" rIns="0" bIns="0" rtlCol="0" anchor="t"/>
           <a:lstStyle/>
           <a:p>
             <a:pPr algn="l" indent="0" marL="0">
@@ -8351,30 +8887,89 @@
               <a:buNone/>
             </a:pPr>
             <a:r>
-              <a:rPr lang="en-US" sz="1700" b="1" dirty="0">
-                <a:solidFill>
-                  <a:srgbClr val="2B2B33"/>
+              <a:rPr lang="en-US" sz="1150" dirty="0">
+                <a:solidFill>
+                  <a:srgbClr val="6B6B76"/>
+                </a:solidFill>
+                <a:latin typeface="Calibri" pitchFamily="34" charset="0"/>
+                <a:ea typeface="Calibri" pitchFamily="34" charset="-122"/>
+                <a:cs typeface="Calibri" pitchFamily="34" charset="-120"/>
+              </a:rPr>
+              <a:t>Unstable AF → immediate DCCV</a:t>
+            </a:r>
+            <a:endParaRPr lang="en-US" sz="1150" dirty="0"/>
+          </a:p>
+        </p:txBody>
+      </p:sp>
+      <p:sp>
+        <p:nvSpPr>
+          <p:cNvPr id="29" name="Shape 24"/>
+          <p:cNvSpPr/>
+          <p:nvPr/>
+        </p:nvSpPr>
+        <p:spPr>
+          <a:xfrm>
+            <a:off x="4581144" y="3685032"/>
+            <a:ext cx="118872" cy="118872"/>
+          </a:xfrm>
+          <a:prstGeom prst="ellipse">
+            <a:avLst/>
+          </a:prstGeom>
+          <a:solidFill>
+            <a:srgbClr val="FF4D6D"/>
+          </a:solidFill>
+          <a:ln/>
+        </p:spPr>
+      </p:sp>
+      <p:sp>
+        <p:nvSpPr>
+          <p:cNvPr id="30" name="Text 25"/>
+          <p:cNvSpPr/>
+          <p:nvPr/>
+        </p:nvSpPr>
+        <p:spPr>
+          <a:xfrm>
+            <a:off x="4818888" y="3630168"/>
+            <a:ext cx="2834640" cy="274320"/>
+          </a:xfrm>
+          <a:prstGeom prst="rect">
+            <a:avLst/>
+          </a:prstGeom>
+          <a:noFill/>
+          <a:ln/>
+        </p:spPr>
+        <p:txBody>
+          <a:bodyPr wrap="square" lIns="0" tIns="0" rIns="0" bIns="0" rtlCol="0" anchor="t"/>
+          <a:lstStyle/>
+          <a:p>
+            <a:pPr algn="l" indent="0" marL="0">
+              <a:buNone/>
+            </a:pPr>
+            <a:r>
+              <a:rPr lang="en-US" sz="1400" b="1" dirty="0">
+                <a:solidFill>
+                  <a:srgbClr val="A4133C"/>
                 </a:solidFill>
                 <a:latin typeface="Cambria" pitchFamily="34" charset="0"/>
                 <a:ea typeface="Cambria" pitchFamily="34" charset="-122"/>
                 <a:cs typeface="Cambria" pitchFamily="34" charset="-120"/>
               </a:rPr>
-              <a:t>Surgical Maze (Cox-Maze IV)</a:t>
-            </a:r>
-            <a:endParaRPr lang="en-US" sz="1700" dirty="0"/>
-          </a:p>
-        </p:txBody>
-      </p:sp>
-      <p:sp>
-        <p:nvSpPr>
-          <p:cNvPr id="15" name="Text 10"/>
-          <p:cNvSpPr/>
-          <p:nvPr/>
-        </p:nvSpPr>
-        <p:spPr>
-          <a:xfrm>
-            <a:off x="6565392" y="2944368"/>
-            <a:ext cx="4754880" cy="603504"/>
+              <a:t>No structural disease</a:t>
+            </a:r>
+            <a:endParaRPr lang="en-US" sz="1400" dirty="0"/>
+          </a:p>
+        </p:txBody>
+      </p:sp>
+      <p:sp>
+        <p:nvSpPr>
+          <p:cNvPr id="31" name="Text 26"/>
+          <p:cNvSpPr/>
+          <p:nvPr/>
+        </p:nvSpPr>
+        <p:spPr>
+          <a:xfrm>
+            <a:off x="4818888" y="3904488"/>
+            <a:ext cx="2834640" cy="457200"/>
           </a:xfrm>
           <a:prstGeom prst="rect">
             <a:avLst/>
@@ -8388,12 +8983,12 @@
           <a:p>
             <a:pPr algn="l" indent="0" marL="0">
               <a:lnSpc>
-                <a:spcPct val="110000"/>
+                <a:spcPct val="100000"/>
               </a:lnSpc>
               <a:buNone/>
             </a:pPr>
             <a:r>
-              <a:rPr lang="en-US" sz="1250" dirty="0">
+              <a:rPr lang="en-US" sz="1150" dirty="0">
                 <a:solidFill>
                   <a:srgbClr val="6B6B76"/>
                 </a:solidFill>
@@ -8401,26 +8996,228 @@
                 <a:ea typeface="Calibri" pitchFamily="34" charset="-122"/>
                 <a:cs typeface="Calibri" pitchFamily="34" charset="-120"/>
               </a:rPr>
-              <a:t>Surgical lesion lines block re-entry, usually with concomitant cardiac surgery — highest rhythm success.</a:t>
-            </a:r>
-            <a:endParaRPr lang="en-US" sz="1250" dirty="0"/>
-          </a:p>
-        </p:txBody>
-      </p:sp>
-      <p:sp>
-        <p:nvSpPr>
-          <p:cNvPr id="16" name="Shape 11"/>
-          <p:cNvSpPr/>
-          <p:nvPr/>
-        </p:nvSpPr>
-        <p:spPr>
-          <a:xfrm>
-            <a:off x="502920" y="3794760"/>
-            <a:ext cx="5486400" cy="1783080"/>
+              <a:t>Flecainide, propafenone, sotalol</a:t>
+            </a:r>
+            <a:endParaRPr lang="en-US" sz="1150" dirty="0"/>
+          </a:p>
+        </p:txBody>
+      </p:sp>
+      <p:sp>
+        <p:nvSpPr>
+          <p:cNvPr id="32" name="Shape 27"/>
+          <p:cNvSpPr/>
+          <p:nvPr/>
+        </p:nvSpPr>
+        <p:spPr>
+          <a:xfrm>
+            <a:off x="4581144" y="4434840"/>
+            <a:ext cx="118872" cy="118872"/>
+          </a:xfrm>
+          <a:prstGeom prst="ellipse">
+            <a:avLst/>
+          </a:prstGeom>
+          <a:solidFill>
+            <a:srgbClr val="FF4D6D"/>
+          </a:solidFill>
+          <a:ln/>
+        </p:spPr>
+      </p:sp>
+      <p:sp>
+        <p:nvSpPr>
+          <p:cNvPr id="33" name="Text 28"/>
+          <p:cNvSpPr/>
+          <p:nvPr/>
+        </p:nvSpPr>
+        <p:spPr>
+          <a:xfrm>
+            <a:off x="4818888" y="4379976"/>
+            <a:ext cx="2834640" cy="274320"/>
+          </a:xfrm>
+          <a:prstGeom prst="rect">
+            <a:avLst/>
+          </a:prstGeom>
+          <a:noFill/>
+          <a:ln/>
+        </p:spPr>
+        <p:txBody>
+          <a:bodyPr wrap="square" lIns="0" tIns="0" rIns="0" bIns="0" rtlCol="0" anchor="t"/>
+          <a:lstStyle/>
+          <a:p>
+            <a:pPr algn="l" indent="0" marL="0">
+              <a:buNone/>
+            </a:pPr>
+            <a:r>
+              <a:rPr lang="en-US" sz="1400" b="1" dirty="0">
+                <a:solidFill>
+                  <a:srgbClr val="A4133C"/>
+                </a:solidFill>
+                <a:latin typeface="Cambria" pitchFamily="34" charset="0"/>
+                <a:ea typeface="Cambria" pitchFamily="34" charset="-122"/>
+                <a:cs typeface="Cambria" pitchFamily="34" charset="-120"/>
+              </a:rPr>
+              <a:t>Structural / HF</a:t>
+            </a:r>
+            <a:endParaRPr lang="en-US" sz="1400" dirty="0"/>
+          </a:p>
+        </p:txBody>
+      </p:sp>
+      <p:sp>
+        <p:nvSpPr>
+          <p:cNvPr id="34" name="Text 29"/>
+          <p:cNvSpPr/>
+          <p:nvPr/>
+        </p:nvSpPr>
+        <p:spPr>
+          <a:xfrm>
+            <a:off x="4818888" y="4654296"/>
+            <a:ext cx="2834640" cy="457200"/>
+          </a:xfrm>
+          <a:prstGeom prst="rect">
+            <a:avLst/>
+          </a:prstGeom>
+          <a:noFill/>
+          <a:ln/>
+        </p:spPr>
+        <p:txBody>
+          <a:bodyPr wrap="square" lIns="0" tIns="0" rIns="0" bIns="0" rtlCol="0" anchor="t"/>
+          <a:lstStyle/>
+          <a:p>
+            <a:pPr algn="l" indent="0" marL="0">
+              <a:lnSpc>
+                <a:spcPct val="100000"/>
+              </a:lnSpc>
+              <a:buNone/>
+            </a:pPr>
+            <a:r>
+              <a:rPr lang="en-US" sz="1150" dirty="0">
+                <a:solidFill>
+                  <a:srgbClr val="6B6B76"/>
+                </a:solidFill>
+                <a:latin typeface="Calibri" pitchFamily="34" charset="0"/>
+                <a:ea typeface="Calibri" pitchFamily="34" charset="-122"/>
+                <a:cs typeface="Calibri" pitchFamily="34" charset="-120"/>
+              </a:rPr>
+              <a:t>Amiodarone, dofetilide</a:t>
+            </a:r>
+            <a:endParaRPr lang="en-US" sz="1150" dirty="0"/>
+          </a:p>
+        </p:txBody>
+      </p:sp>
+      <p:sp>
+        <p:nvSpPr>
+          <p:cNvPr id="35" name="Shape 30"/>
+          <p:cNvSpPr/>
+          <p:nvPr/>
+        </p:nvSpPr>
+        <p:spPr>
+          <a:xfrm>
+            <a:off x="4581144" y="5184648"/>
+            <a:ext cx="118872" cy="118872"/>
+          </a:xfrm>
+          <a:prstGeom prst="ellipse">
+            <a:avLst/>
+          </a:prstGeom>
+          <a:solidFill>
+            <a:srgbClr val="FF4D6D"/>
+          </a:solidFill>
+          <a:ln/>
+        </p:spPr>
+      </p:sp>
+      <p:sp>
+        <p:nvSpPr>
+          <p:cNvPr id="36" name="Text 31"/>
+          <p:cNvSpPr/>
+          <p:nvPr/>
+        </p:nvSpPr>
+        <p:spPr>
+          <a:xfrm>
+            <a:off x="4818888" y="5129784"/>
+            <a:ext cx="2834640" cy="274320"/>
+          </a:xfrm>
+          <a:prstGeom prst="rect">
+            <a:avLst/>
+          </a:prstGeom>
+          <a:noFill/>
+          <a:ln/>
+        </p:spPr>
+        <p:txBody>
+          <a:bodyPr wrap="square" lIns="0" tIns="0" rIns="0" bIns="0" rtlCol="0" anchor="t"/>
+          <a:lstStyle/>
+          <a:p>
+            <a:pPr algn="l" indent="0" marL="0">
+              <a:buNone/>
+            </a:pPr>
+            <a:r>
+              <a:rPr lang="en-US" sz="1400" b="1" dirty="0">
+                <a:solidFill>
+                  <a:srgbClr val="A4133C"/>
+                </a:solidFill>
+                <a:latin typeface="Cambria" pitchFamily="34" charset="0"/>
+                <a:ea typeface="Cambria" pitchFamily="34" charset="-122"/>
+                <a:cs typeface="Cambria" pitchFamily="34" charset="-120"/>
+              </a:rPr>
+              <a:t>Catheter ablation</a:t>
+            </a:r>
+            <a:endParaRPr lang="en-US" sz="1400" dirty="0"/>
+          </a:p>
+        </p:txBody>
+      </p:sp>
+      <p:sp>
+        <p:nvSpPr>
+          <p:cNvPr id="37" name="Text 32"/>
+          <p:cNvSpPr/>
+          <p:nvPr/>
+        </p:nvSpPr>
+        <p:spPr>
+          <a:xfrm>
+            <a:off x="4818888" y="5404104"/>
+            <a:ext cx="2834640" cy="457200"/>
+          </a:xfrm>
+          <a:prstGeom prst="rect">
+            <a:avLst/>
+          </a:prstGeom>
+          <a:noFill/>
+          <a:ln/>
+        </p:spPr>
+        <p:txBody>
+          <a:bodyPr wrap="square" lIns="0" tIns="0" rIns="0" bIns="0" rtlCol="0" anchor="t"/>
+          <a:lstStyle/>
+          <a:p>
+            <a:pPr algn="l" indent="0" marL="0">
+              <a:lnSpc>
+                <a:spcPct val="100000"/>
+              </a:lnSpc>
+              <a:buNone/>
+            </a:pPr>
+            <a:r>
+              <a:rPr lang="en-US" sz="1150" dirty="0">
+                <a:solidFill>
+                  <a:srgbClr val="6B6B76"/>
+                </a:solidFill>
+                <a:latin typeface="Calibri" pitchFamily="34" charset="0"/>
+                <a:ea typeface="Calibri" pitchFamily="34" charset="-122"/>
+                <a:cs typeface="Calibri" pitchFamily="34" charset="-120"/>
+              </a:rPr>
+              <a:t>If antiarrhythmic drugs fail</a:t>
+            </a:r>
+            <a:endParaRPr lang="en-US" sz="1150" dirty="0"/>
+          </a:p>
+        </p:txBody>
+      </p:sp>
+      <p:sp>
+        <p:nvSpPr>
+          <p:cNvPr id="38" name="Shape 33"/>
+          <p:cNvSpPr/>
+          <p:nvPr/>
+        </p:nvSpPr>
+        <p:spPr>
+          <a:xfrm>
+            <a:off x="8074152" y="1783080"/>
+            <a:ext cx="3611880" cy="4206240"/>
           </a:xfrm>
           <a:prstGeom prst="roundRect">
             <a:avLst>
-              <a:gd name="adj" fmla="val 6154"/>
+              <a:gd name="adj" fmla="val 3038"/>
             </a:avLst>
           </a:prstGeom>
           <a:solidFill>
@@ -8443,32 +9240,27 @@
       </p:sp>
       <p:sp>
         <p:nvSpPr>
-          <p:cNvPr id="17" name="Shape 12"/>
-          <p:cNvSpPr/>
-          <p:nvPr/>
-        </p:nvSpPr>
-        <p:spPr>
-          <a:xfrm>
-            <a:off x="822960" y="4069080"/>
-            <a:ext cx="777240" cy="777240"/>
+          <p:cNvPr id="39" name="Shape 34"/>
+          <p:cNvSpPr/>
+          <p:nvPr/>
+        </p:nvSpPr>
+        <p:spPr>
+          <a:xfrm>
+            <a:off x="8348472" y="2039112"/>
+            <a:ext cx="658368" cy="658368"/>
           </a:xfrm>
           <a:prstGeom prst="ellipse">
             <a:avLst/>
           </a:prstGeom>
           <a:solidFill>
-            <a:srgbClr val="FFFFFF"/>
+            <a:srgbClr val="A4133C"/>
           </a:solidFill>
-          <a:ln w="12700">
-            <a:solidFill>
-              <a:srgbClr val="FBD8DF"/>
-            </a:solidFill>
-            <a:prstDash val="solid"/>
-          </a:ln>
+          <a:ln/>
         </p:spPr>
       </p:sp>
       <p:pic>
         <p:nvPicPr>
-          <p:cNvPr id="18" name="Image 3" descr="preencoded.png">    </p:cNvPr>
+          <p:cNvPr id="40" name="Image 3" descr="preencoded.png">    </p:cNvPr>
           <p:cNvPicPr>
             <a:picLocks noChangeAspect="1"/>
           </p:cNvPicPr>
@@ -8482,8 +9274,8 @@
         </p:blipFill>
         <p:spPr>
           <a:xfrm>
-            <a:off x="1014984" y="4261104"/>
-            <a:ext cx="393192" cy="393192"/>
+            <a:off x="8503920" y="2194560"/>
+            <a:ext cx="347472" cy="347472"/>
           </a:xfrm>
           <a:prstGeom prst="rect">
             <a:avLst/>
@@ -8492,14 +9284,14 @@
       </p:pic>
       <p:sp>
         <p:nvSpPr>
-          <p:cNvPr id="19" name="Text 13"/>
-          <p:cNvSpPr/>
-          <p:nvPr/>
-        </p:nvSpPr>
-        <p:spPr>
-          <a:xfrm>
-            <a:off x="1783080" y="4050792"/>
-            <a:ext cx="3977640" cy="822960"/>
+          <p:cNvPr id="41" name="Text 35"/>
+          <p:cNvSpPr/>
+          <p:nvPr/>
+        </p:nvSpPr>
+        <p:spPr>
+          <a:xfrm>
+            <a:off x="9125712" y="2039112"/>
+            <a:ext cx="2423160" cy="658368"/>
           </a:xfrm>
           <a:prstGeom prst="rect">
             <a:avLst/>
@@ -8509,6 +9301,104 @@
         </p:spPr>
         <p:txBody>
           <a:bodyPr wrap="square" lIns="0" tIns="0" rIns="0" bIns="0" rtlCol="0" anchor="ctr"/>
+          <a:lstStyle/>
+          <a:p>
+            <a:pPr algn="l" indent="0" marL="0">
+              <a:buNone/>
+            </a:pPr>
+            <a:r>
+              <a:rPr lang="en-US" sz="1800" b="1" dirty="0">
+                <a:solidFill>
+                  <a:srgbClr val="2B2B33"/>
+                </a:solidFill>
+                <a:latin typeface="Cambria" pitchFamily="34" charset="0"/>
+                <a:ea typeface="Cambria" pitchFamily="34" charset="-122"/>
+                <a:cs typeface="Cambria" pitchFamily="34" charset="-120"/>
+              </a:rPr>
+              <a:t>Anticoagulation</a:t>
+            </a:r>
+            <a:endParaRPr lang="en-US" sz="1800" dirty="0"/>
+          </a:p>
+        </p:txBody>
+      </p:sp>
+      <p:sp>
+        <p:nvSpPr>
+          <p:cNvPr id="42" name="Shape 36"/>
+          <p:cNvSpPr/>
+          <p:nvPr/>
+        </p:nvSpPr>
+        <p:spPr>
+          <a:xfrm>
+            <a:off x="8366760" y="2935224"/>
+            <a:ext cx="118872" cy="118872"/>
+          </a:xfrm>
+          <a:prstGeom prst="ellipse">
+            <a:avLst/>
+          </a:prstGeom>
+          <a:solidFill>
+            <a:srgbClr val="FF4D6D"/>
+          </a:solidFill>
+          <a:ln/>
+        </p:spPr>
+      </p:sp>
+      <p:sp>
+        <p:nvSpPr>
+          <p:cNvPr id="43" name="Text 37"/>
+          <p:cNvSpPr/>
+          <p:nvPr/>
+        </p:nvSpPr>
+        <p:spPr>
+          <a:xfrm>
+            <a:off x="8604504" y="2880360"/>
+            <a:ext cx="2834640" cy="274320"/>
+          </a:xfrm>
+          <a:prstGeom prst="rect">
+            <a:avLst/>
+          </a:prstGeom>
+          <a:noFill/>
+          <a:ln/>
+        </p:spPr>
+        <p:txBody>
+          <a:bodyPr wrap="square" lIns="0" tIns="0" rIns="0" bIns="0" rtlCol="0" anchor="t"/>
+          <a:lstStyle/>
+          <a:p>
+            <a:pPr algn="l" indent="0" marL="0">
+              <a:buNone/>
+            </a:pPr>
+            <a:r>
+              <a:rPr lang="en-US" sz="1400" b="1" dirty="0">
+                <a:solidFill>
+                  <a:srgbClr val="A4133C"/>
+                </a:solidFill>
+                <a:latin typeface="Cambria" pitchFamily="34" charset="0"/>
+                <a:ea typeface="Cambria" pitchFamily="34" charset="-122"/>
+                <a:cs typeface="Cambria" pitchFamily="34" charset="-120"/>
+              </a:rPr>
+              <a:t>Assess risk</a:t>
+            </a:r>
+            <a:endParaRPr lang="en-US" sz="1400" dirty="0"/>
+          </a:p>
+        </p:txBody>
+      </p:sp>
+      <p:sp>
+        <p:nvSpPr>
+          <p:cNvPr id="44" name="Text 38"/>
+          <p:cNvSpPr/>
+          <p:nvPr/>
+        </p:nvSpPr>
+        <p:spPr>
+          <a:xfrm>
+            <a:off x="8604504" y="3154680"/>
+            <a:ext cx="2834640" cy="457200"/>
+          </a:xfrm>
+          <a:prstGeom prst="rect">
+            <a:avLst/>
+          </a:prstGeom>
+          <a:noFill/>
+          <a:ln/>
+        </p:spPr>
+        <p:txBody>
+          <a:bodyPr wrap="square" lIns="0" tIns="0" rIns="0" bIns="0" rtlCol="0" anchor="t"/>
           <a:lstStyle/>
           <a:p>
             <a:pPr algn="l" indent="0" marL="0">
@@ -8518,30 +9408,89 @@
               <a:buNone/>
             </a:pPr>
             <a:r>
-              <a:rPr lang="en-US" sz="1700" b="1" dirty="0">
-                <a:solidFill>
-                  <a:srgbClr val="2B2B33"/>
+              <a:rPr lang="en-US" sz="1150" dirty="0">
+                <a:solidFill>
+                  <a:srgbClr val="6B6B76"/>
+                </a:solidFill>
+                <a:latin typeface="Calibri" pitchFamily="34" charset="0"/>
+                <a:ea typeface="Calibri" pitchFamily="34" charset="-122"/>
+                <a:cs typeface="Calibri" pitchFamily="34" charset="-120"/>
+              </a:rPr>
+              <a:t>CHA₂DS₂-VASc score</a:t>
+            </a:r>
+            <a:endParaRPr lang="en-US" sz="1150" dirty="0"/>
+          </a:p>
+        </p:txBody>
+      </p:sp>
+      <p:sp>
+        <p:nvSpPr>
+          <p:cNvPr id="45" name="Shape 39"/>
+          <p:cNvSpPr/>
+          <p:nvPr/>
+        </p:nvSpPr>
+        <p:spPr>
+          <a:xfrm>
+            <a:off x="8366760" y="3685032"/>
+            <a:ext cx="118872" cy="118872"/>
+          </a:xfrm>
+          <a:prstGeom prst="ellipse">
+            <a:avLst/>
+          </a:prstGeom>
+          <a:solidFill>
+            <a:srgbClr val="FF4D6D"/>
+          </a:solidFill>
+          <a:ln/>
+        </p:spPr>
+      </p:sp>
+      <p:sp>
+        <p:nvSpPr>
+          <p:cNvPr id="46" name="Text 40"/>
+          <p:cNvSpPr/>
+          <p:nvPr/>
+        </p:nvSpPr>
+        <p:spPr>
+          <a:xfrm>
+            <a:off x="8604504" y="3630168"/>
+            <a:ext cx="2834640" cy="274320"/>
+          </a:xfrm>
+          <a:prstGeom prst="rect">
+            <a:avLst/>
+          </a:prstGeom>
+          <a:noFill/>
+          <a:ln/>
+        </p:spPr>
+        <p:txBody>
+          <a:bodyPr wrap="square" lIns="0" tIns="0" rIns="0" bIns="0" rtlCol="0" anchor="t"/>
+          <a:lstStyle/>
+          <a:p>
+            <a:pPr algn="l" indent="0" marL="0">
+              <a:buNone/>
+            </a:pPr>
+            <a:r>
+              <a:rPr lang="en-US" sz="1400" b="1" dirty="0">
+                <a:solidFill>
+                  <a:srgbClr val="A4133C"/>
                 </a:solidFill>
                 <a:latin typeface="Cambria" pitchFamily="34" charset="0"/>
                 <a:ea typeface="Cambria" pitchFamily="34" charset="-122"/>
                 <a:cs typeface="Cambria" pitchFamily="34" charset="-120"/>
               </a:rPr>
-              <a:t>AV Node Ablation + Pacemaker</a:t>
-            </a:r>
-            <a:endParaRPr lang="en-US" sz="1700" dirty="0"/>
-          </a:p>
-        </p:txBody>
-      </p:sp>
-      <p:sp>
-        <p:nvSpPr>
-          <p:cNvPr id="20" name="Text 14"/>
-          <p:cNvSpPr/>
-          <p:nvPr/>
-        </p:nvSpPr>
-        <p:spPr>
-          <a:xfrm>
-            <a:off x="868680" y="4910328"/>
-            <a:ext cx="4754880" cy="603504"/>
+              <a:t>DOACs</a:t>
+            </a:r>
+            <a:endParaRPr lang="en-US" sz="1400" dirty="0"/>
+          </a:p>
+        </p:txBody>
+      </p:sp>
+      <p:sp>
+        <p:nvSpPr>
+          <p:cNvPr id="47" name="Text 41"/>
+          <p:cNvSpPr/>
+          <p:nvPr/>
+        </p:nvSpPr>
+        <p:spPr>
+          <a:xfrm>
+            <a:off x="8604504" y="3904488"/>
+            <a:ext cx="2834640" cy="457200"/>
           </a:xfrm>
           <a:prstGeom prst="rect">
             <a:avLst/>
@@ -8555,12 +9504,12 @@
           <a:p>
             <a:pPr algn="l" indent="0" marL="0">
               <a:lnSpc>
-                <a:spcPct val="110000"/>
+                <a:spcPct val="100000"/>
               </a:lnSpc>
               <a:buNone/>
             </a:pPr>
             <a:r>
-              <a:rPr lang="en-US" sz="1250" dirty="0">
+              <a:rPr lang="en-US" sz="1150" dirty="0">
                 <a:solidFill>
                   <a:srgbClr val="6B6B76"/>
                 </a:solidFill>
@@ -8568,114 +9517,90 @@
                 <a:ea typeface="Calibri" pitchFamily="34" charset="-122"/>
                 <a:cs typeface="Calibri" pitchFamily="34" charset="-120"/>
               </a:rPr>
-              <a:t>“Ablate &amp; pace” for refractory rate control; requires a permanent pacemaker.</a:t>
-            </a:r>
-            <a:endParaRPr lang="en-US" sz="1250" dirty="0"/>
-          </a:p>
-        </p:txBody>
-      </p:sp>
-      <p:sp>
-        <p:nvSpPr>
-          <p:cNvPr id="21" name="Shape 15"/>
-          <p:cNvSpPr/>
-          <p:nvPr/>
-        </p:nvSpPr>
-        <p:spPr>
-          <a:xfrm>
-            <a:off x="6199632" y="3794760"/>
-            <a:ext cx="5486400" cy="1783080"/>
-          </a:xfrm>
-          <a:prstGeom prst="roundRect">
-            <a:avLst>
-              <a:gd name="adj" fmla="val 6154"/>
-            </a:avLst>
+              <a:t>Apixaban, rivaroxaban, dabigatran</a:t>
+            </a:r>
+            <a:endParaRPr lang="en-US" sz="1150" dirty="0"/>
+          </a:p>
+        </p:txBody>
+      </p:sp>
+      <p:sp>
+        <p:nvSpPr>
+          <p:cNvPr id="48" name="Shape 42"/>
+          <p:cNvSpPr/>
+          <p:nvPr/>
+        </p:nvSpPr>
+        <p:spPr>
+          <a:xfrm>
+            <a:off x="8366760" y="4434840"/>
+            <a:ext cx="118872" cy="118872"/>
+          </a:xfrm>
+          <a:prstGeom prst="ellipse">
+            <a:avLst/>
           </a:prstGeom>
           <a:solidFill>
-            <a:srgbClr val="FFF0F3"/>
+            <a:srgbClr val="FF4D6D"/>
           </a:solidFill>
-          <a:ln w="12700">
-            <a:solidFill>
-              <a:srgbClr val="FBD8DF"/>
-            </a:solidFill>
-            <a:prstDash val="solid"/>
-          </a:ln>
-          <a:effectLst>
-            <a:outerShdw sx="100000" sy="100000" kx="0" ky="0" algn="bl" rotWithShape="0" blurRad="127000" dist="50800" dir="5400000">
-              <a:srgbClr val="C9A3AC">
-                <a:alpha val="45000"/>
-              </a:srgbClr>
-            </a:outerShdw>
-          </a:effectLst>
-        </p:spPr>
-      </p:sp>
-      <p:sp>
-        <p:nvSpPr>
-          <p:cNvPr id="22" name="Shape 16"/>
-          <p:cNvSpPr/>
-          <p:nvPr/>
-        </p:nvSpPr>
-        <p:spPr>
-          <a:xfrm>
-            <a:off x="6519672" y="4069080"/>
-            <a:ext cx="777240" cy="777240"/>
-          </a:xfrm>
-          <a:prstGeom prst="ellipse">
-            <a:avLst/>
-          </a:prstGeom>
-          <a:solidFill>
-            <a:srgbClr val="FFFFFF"/>
-          </a:solidFill>
-          <a:ln w="12700">
-            <a:solidFill>
-              <a:srgbClr val="FBD8DF"/>
-            </a:solidFill>
-            <a:prstDash val="solid"/>
-          </a:ln>
-        </p:spPr>
-      </p:sp>
-      <p:pic>
-        <p:nvPicPr>
-          <p:cNvPr id="23" name="Image 4" descr="preencoded.png">    </p:cNvPr>
-          <p:cNvPicPr>
-            <a:picLocks noChangeAspect="1"/>
-          </p:cNvPicPr>
-          <p:nvPr/>
-        </p:nvPicPr>
-        <p:blipFill>
-          <a:blip r:embed="rId5"/>
-          <a:stretch>
-            <a:fillRect/>
-          </a:stretch>
-        </p:blipFill>
-        <p:spPr>
-          <a:xfrm>
-            <a:off x="6711696" y="4261104"/>
-            <a:ext cx="393192" cy="393192"/>
-          </a:xfrm>
-          <a:prstGeom prst="rect">
-            <a:avLst/>
-          </a:prstGeom>
-        </p:spPr>
-      </p:pic>
-      <p:sp>
-        <p:nvSpPr>
-          <p:cNvPr id="24" name="Text 17"/>
-          <p:cNvSpPr/>
-          <p:nvPr/>
-        </p:nvSpPr>
-        <p:spPr>
-          <a:xfrm>
-            <a:off x="7479792" y="4050792"/>
-            <a:ext cx="3977640" cy="822960"/>
-          </a:xfrm>
-          <a:prstGeom prst="rect">
-            <a:avLst/>
-          </a:prstGeom>
-          <a:noFill/>
-          <a:ln/>
-        </p:spPr>
-        <p:txBody>
-          <a:bodyPr wrap="square" lIns="0" tIns="0" rIns="0" bIns="0" rtlCol="0" anchor="ctr"/>
+          <a:ln/>
+        </p:spPr>
+      </p:sp>
+      <p:sp>
+        <p:nvSpPr>
+          <p:cNvPr id="49" name="Text 43"/>
+          <p:cNvSpPr/>
+          <p:nvPr/>
+        </p:nvSpPr>
+        <p:spPr>
+          <a:xfrm>
+            <a:off x="8604504" y="4379976"/>
+            <a:ext cx="2834640" cy="274320"/>
+          </a:xfrm>
+          <a:prstGeom prst="rect">
+            <a:avLst/>
+          </a:prstGeom>
+          <a:noFill/>
+          <a:ln/>
+        </p:spPr>
+        <p:txBody>
+          <a:bodyPr wrap="square" lIns="0" tIns="0" rIns="0" bIns="0" rtlCol="0" anchor="t"/>
+          <a:lstStyle/>
+          <a:p>
+            <a:pPr algn="l" indent="0" marL="0">
+              <a:buNone/>
+            </a:pPr>
+            <a:r>
+              <a:rPr lang="en-US" sz="1400" b="1" dirty="0">
+                <a:solidFill>
+                  <a:srgbClr val="A4133C"/>
+                </a:solidFill>
+                <a:latin typeface="Cambria" pitchFamily="34" charset="0"/>
+                <a:ea typeface="Cambria" pitchFamily="34" charset="-122"/>
+                <a:cs typeface="Cambria" pitchFamily="34" charset="-120"/>
+              </a:rPr>
+              <a:t>Warfarin</a:t>
+            </a:r>
+            <a:endParaRPr lang="en-US" sz="1400" dirty="0"/>
+          </a:p>
+        </p:txBody>
+      </p:sp>
+      <p:sp>
+        <p:nvSpPr>
+          <p:cNvPr id="50" name="Text 44"/>
+          <p:cNvSpPr/>
+          <p:nvPr/>
+        </p:nvSpPr>
+        <p:spPr>
+          <a:xfrm>
+            <a:off x="8604504" y="4654296"/>
+            <a:ext cx="2834640" cy="457200"/>
+          </a:xfrm>
+          <a:prstGeom prst="rect">
+            <a:avLst/>
+          </a:prstGeom>
+          <a:noFill/>
+          <a:ln/>
+        </p:spPr>
+        <p:txBody>
+          <a:bodyPr wrap="square" lIns="0" tIns="0" rIns="0" bIns="0" rtlCol="0" anchor="t"/>
           <a:lstStyle/>
           <a:p>
             <a:pPr algn="l" indent="0" marL="0">
@@ -8685,30 +9610,89 @@
               <a:buNone/>
             </a:pPr>
             <a:r>
-              <a:rPr lang="en-US" sz="1700" b="1" dirty="0">
-                <a:solidFill>
-                  <a:srgbClr val="2B2B33"/>
+              <a:rPr lang="en-US" sz="1150" dirty="0">
+                <a:solidFill>
+                  <a:srgbClr val="6B6B76"/>
+                </a:solidFill>
+                <a:latin typeface="Calibri" pitchFamily="34" charset="0"/>
+                <a:ea typeface="Calibri" pitchFamily="34" charset="-122"/>
+                <a:cs typeface="Calibri" pitchFamily="34" charset="-120"/>
+              </a:rPr>
+              <a:t>Mitral stenosis / mechanical valve</a:t>
+            </a:r>
+            <a:endParaRPr lang="en-US" sz="1150" dirty="0"/>
+          </a:p>
+        </p:txBody>
+      </p:sp>
+      <p:sp>
+        <p:nvSpPr>
+          <p:cNvPr id="51" name="Shape 45"/>
+          <p:cNvSpPr/>
+          <p:nvPr/>
+        </p:nvSpPr>
+        <p:spPr>
+          <a:xfrm>
+            <a:off x="8366760" y="5184648"/>
+            <a:ext cx="118872" cy="118872"/>
+          </a:xfrm>
+          <a:prstGeom prst="ellipse">
+            <a:avLst/>
+          </a:prstGeom>
+          <a:solidFill>
+            <a:srgbClr val="FF4D6D"/>
+          </a:solidFill>
+          <a:ln/>
+        </p:spPr>
+      </p:sp>
+      <p:sp>
+        <p:nvSpPr>
+          <p:cNvPr id="52" name="Text 46"/>
+          <p:cNvSpPr/>
+          <p:nvPr/>
+        </p:nvSpPr>
+        <p:spPr>
+          <a:xfrm>
+            <a:off x="8604504" y="5129784"/>
+            <a:ext cx="2834640" cy="274320"/>
+          </a:xfrm>
+          <a:prstGeom prst="rect">
+            <a:avLst/>
+          </a:prstGeom>
+          <a:noFill/>
+          <a:ln/>
+        </p:spPr>
+        <p:txBody>
+          <a:bodyPr wrap="square" lIns="0" tIns="0" rIns="0" bIns="0" rtlCol="0" anchor="t"/>
+          <a:lstStyle/>
+          <a:p>
+            <a:pPr algn="l" indent="0" marL="0">
+              <a:buNone/>
+            </a:pPr>
+            <a:r>
+              <a:rPr lang="en-US" sz="1400" b="1" dirty="0">
+                <a:solidFill>
+                  <a:srgbClr val="A4133C"/>
                 </a:solidFill>
                 <a:latin typeface="Cambria" pitchFamily="34" charset="0"/>
                 <a:ea typeface="Cambria" pitchFamily="34" charset="-122"/>
                 <a:cs typeface="Cambria" pitchFamily="34" charset="-120"/>
               </a:rPr>
-              <a:t>LAA Occlusion / Exclusion</a:t>
-            </a:r>
-            <a:endParaRPr lang="en-US" sz="1700" dirty="0"/>
-          </a:p>
-        </p:txBody>
-      </p:sp>
-      <p:sp>
-        <p:nvSpPr>
-          <p:cNvPr id="25" name="Text 18"/>
-          <p:cNvSpPr/>
-          <p:nvPr/>
-        </p:nvSpPr>
-        <p:spPr>
-          <a:xfrm>
-            <a:off x="6565392" y="4910328"/>
-            <a:ext cx="4754880" cy="603504"/>
+              <a:t>AF &gt; 48 h</a:t>
+            </a:r>
+            <a:endParaRPr lang="en-US" sz="1400" dirty="0"/>
+          </a:p>
+        </p:txBody>
+      </p:sp>
+      <p:sp>
+        <p:nvSpPr>
+          <p:cNvPr id="53" name="Text 47"/>
+          <p:cNvSpPr/>
+          <p:nvPr/>
+        </p:nvSpPr>
+        <p:spPr>
+          <a:xfrm>
+            <a:off x="8604504" y="5404104"/>
+            <a:ext cx="2834640" cy="457200"/>
           </a:xfrm>
           <a:prstGeom prst="rect">
             <a:avLst/>
@@ -8722,12 +9706,12 @@
           <a:p>
             <a:pPr algn="l" indent="0" marL="0">
               <a:lnSpc>
-                <a:spcPct val="110000"/>
+                <a:spcPct val="100000"/>
               </a:lnSpc>
               <a:buNone/>
             </a:pPr>
             <a:r>
-              <a:rPr lang="en-US" sz="1250" dirty="0">
+              <a:rPr lang="en-US" sz="1150" dirty="0">
                 <a:solidFill>
                   <a:srgbClr val="6B6B76"/>
                 </a:solidFill>
@@ -8735,120 +9719,45 @@
                 <a:ea typeface="Calibri" pitchFamily="34" charset="-122"/>
                 <a:cs typeface="Calibri" pitchFamily="34" charset="-120"/>
               </a:rPr>
-              <a:t>Watchman device or surgical clip prevents stroke when anticoagulation is unsuitable.</a:t>
-            </a:r>
-            <a:endParaRPr lang="en-US" sz="1250" dirty="0"/>
-          </a:p>
-        </p:txBody>
-      </p:sp>
-      <p:sp>
-        <p:nvSpPr>
-          <p:cNvPr id="26" name="Shape 19"/>
-          <p:cNvSpPr/>
-          <p:nvPr/>
-        </p:nvSpPr>
-        <p:spPr>
-          <a:xfrm>
-            <a:off x="502920" y="5669280"/>
-            <a:ext cx="11183112" cy="502920"/>
-          </a:xfrm>
-          <a:prstGeom prst="roundRect">
-            <a:avLst>
-              <a:gd name="adj" fmla="val 18182"/>
-            </a:avLst>
-          </a:prstGeom>
-          <a:solidFill>
-            <a:srgbClr val="590D22"/>
-          </a:solidFill>
-          <a:ln/>
-        </p:spPr>
-      </p:sp>
-      <p:sp>
-        <p:nvSpPr>
-          <p:cNvPr id="27" name="Text 20"/>
-          <p:cNvSpPr/>
-          <p:nvPr/>
-        </p:nvSpPr>
-        <p:spPr>
-          <a:xfrm>
-            <a:off x="868680" y="5669280"/>
-            <a:ext cx="10515600" cy="502920"/>
-          </a:xfrm>
-          <a:prstGeom prst="rect">
-            <a:avLst/>
-          </a:prstGeom>
-          <a:noFill/>
-          <a:ln/>
-        </p:spPr>
-        <p:txBody>
-          <a:bodyPr wrap="square" rtlCol="0" anchor="ctr"/>
-          <a:lstStyle/>
-          <a:p>
-            <a:pPr algn="l" indent="0" marL="0">
-              <a:buNone/>
-            </a:pPr>
-            <a:r>
-              <a:rPr lang="en-US" sz="1300" b="1" dirty="0">
-                <a:solidFill>
-                  <a:srgbClr val="FF4D6D"/>
+              <a:t>TEE or 3 weeks before cardioversion</a:t>
+            </a:r>
+            <a:endParaRPr lang="en-US" sz="1150" dirty="0"/>
+          </a:p>
+        </p:txBody>
+      </p:sp>
+      <p:sp>
+        <p:nvSpPr>
+          <p:cNvPr id="54" name="Text 48"/>
+          <p:cNvSpPr/>
+          <p:nvPr/>
+        </p:nvSpPr>
+        <p:spPr>
+          <a:xfrm>
+            <a:off x="11277295" y="6355080"/>
+            <a:ext cx="548640" cy="320040"/>
+          </a:xfrm>
+          <a:prstGeom prst="rect">
+            <a:avLst/>
+          </a:prstGeom>
+          <a:noFill/>
+          <a:ln/>
+        </p:spPr>
+        <p:txBody>
+          <a:bodyPr wrap="square" rtlCol="0" anchor="t"/>
+          <a:lstStyle/>
+          <a:p>
+            <a:pPr algn="r" indent="0" marL="0">
+              <a:buNone/>
+            </a:pPr>
+            <a:r>
+              <a:rPr lang="en-US" sz="1100" b="1" dirty="0">
+                <a:solidFill>
+                  <a:srgbClr val="6B6B76"/>
                 </a:solidFill>
                 <a:latin typeface="Calibri" pitchFamily="34" charset="0"/>
                 <a:ea typeface="Calibri" pitchFamily="34" charset="-122"/>
                 <a:cs typeface="Calibri" pitchFamily="34" charset="-120"/>
               </a:rPr>
-              <a:t>Hybrid / convergent ablation  </a:t>
-            </a:r>
-            <a:pPr algn="l" indent="0" marL="0">
-              <a:buNone/>
-            </a:pPr>
-            <a:r>
-              <a:rPr lang="en-US" sz="1300" dirty="0">
-                <a:solidFill>
-                  <a:srgbClr val="FBD8DF"/>
-                </a:solidFill>
-                <a:latin typeface="Calibri" pitchFamily="34" charset="0"/>
-                <a:ea typeface="Calibri" pitchFamily="34" charset="-122"/>
-                <a:cs typeface="Calibri" pitchFamily="34" charset="-120"/>
-              </a:rPr>
-              <a:t>combines catheter and minimally-invasive epicardial approaches for persistent AF.</a:t>
-            </a:r>
-            <a:endParaRPr lang="en-US" sz="1300" dirty="0"/>
-          </a:p>
-        </p:txBody>
-      </p:sp>
-      <p:sp>
-        <p:nvSpPr>
-          <p:cNvPr id="28" name="Text 21"/>
-          <p:cNvSpPr/>
-          <p:nvPr/>
-        </p:nvSpPr>
-        <p:spPr>
-          <a:xfrm>
-            <a:off x="11277295" y="6355080"/>
-            <a:ext cx="548640" cy="320040"/>
-          </a:xfrm>
-          <a:prstGeom prst="rect">
-            <a:avLst/>
-          </a:prstGeom>
-          <a:noFill/>
-          <a:ln/>
-        </p:spPr>
-        <p:txBody>
-          <a:bodyPr wrap="square" rtlCol="0" anchor="t"/>
-          <a:lstStyle/>
-          <a:p>
-            <a:pPr algn="r" indent="0" marL="0">
-              <a:buNone/>
-            </a:pPr>
-            <a:r>
-              <a:rPr lang="en-US" sz="1100" b="1" dirty="0">
-                <a:solidFill>
-                  <a:srgbClr val="6B6B76"/>
-                </a:solidFill>
-                <a:latin typeface="Calibri" pitchFamily="34" charset="0"/>
-                <a:ea typeface="Calibri" pitchFamily="34" charset="-122"/>
-                <a:cs typeface="Calibri" pitchFamily="34" charset="-120"/>
-              </a:rPr>
               <a:t>13</a:t>
             </a:r>
             <a:endParaRPr lang="en-US" sz="1100" dirty="0"/>
@@ -8857,7 +9766,7 @@
       </p:sp>
       <p:sp>
         <p:nvSpPr>
-          <p:cNvPr id="29" name="Text 22"/>
+          <p:cNvPr id="55" name="Text 49"/>
           <p:cNvSpPr/>
           <p:nvPr/>
         </p:nvSpPr>
@@ -9008,7 +9917,7 @@
                 <a:ea typeface="Calibri" pitchFamily="34" charset="-122"/>
                 <a:cs typeface="Calibri" pitchFamily="34" charset="-120"/>
               </a:rPr>
-              <a:t>SYMPTOM CONTROL</a:t>
+              <a:t>MANAGEMENT · INTERVENTIONAL</a:t>
             </a:r>
             <a:endParaRPr lang="en-US" sz="1250" dirty="0"/>
           </a:p>
@@ -9047,7 +9956,7 @@
                 <a:ea typeface="Cambria" pitchFamily="34" charset="-122"/>
                 <a:cs typeface="Cambria" pitchFamily="34" charset="-120"/>
               </a:rPr>
-              <a:t>Rate vs Rhythm Control</a:t>
+              <a:t>Surgical Treatment of AF</a:t>
             </a:r>
             <a:endParaRPr lang="en-US" sz="3000" dirty="0"/>
           </a:p>
@@ -9062,11 +9971,11 @@
         <p:spPr>
           <a:xfrm>
             <a:off x="502920" y="1828800"/>
-            <a:ext cx="5532120" cy="4206240"/>
+            <a:ext cx="5486400" cy="1783080"/>
           </a:xfrm>
           <a:prstGeom prst="roundRect">
             <a:avLst>
-              <a:gd name="adj" fmla="val 2609"/>
+              <a:gd name="adj" fmla="val 6154"/>
             </a:avLst>
           </a:prstGeom>
           <a:solidFill>
@@ -9095,16 +10004,21 @@
         </p:nvSpPr>
         <p:spPr>
           <a:xfrm>
-            <a:off x="822960" y="2121408"/>
-            <a:ext cx="822960" cy="822960"/>
+            <a:off x="822960" y="2103120"/>
+            <a:ext cx="777240" cy="777240"/>
           </a:xfrm>
           <a:prstGeom prst="ellipse">
             <a:avLst/>
           </a:prstGeom>
           <a:solidFill>
-            <a:srgbClr val="A4133C"/>
+            <a:srgbClr val="FFFFFF"/>
           </a:solidFill>
-          <a:ln/>
+          <a:ln w="12700">
+            <a:solidFill>
+              <a:srgbClr val="FBD8DF"/>
+            </a:solidFill>
+            <a:prstDash val="solid"/>
+          </a:ln>
         </p:spPr>
       </p:sp>
       <p:pic>
@@ -9123,8 +10037,8 @@
         </p:blipFill>
         <p:spPr>
           <a:xfrm>
-            <a:off x="1005840" y="2304288"/>
-            <a:ext cx="457200" cy="457200"/>
+            <a:off x="1014984" y="2295144"/>
+            <a:ext cx="393192" cy="393192"/>
           </a:xfrm>
           <a:prstGeom prst="rect">
             <a:avLst/>
@@ -9139,24 +10053,27 @@
         </p:nvSpPr>
         <p:spPr>
           <a:xfrm>
-            <a:off x="1783080" y="2194560"/>
-            <a:ext cx="4023360" cy="640080"/>
-          </a:xfrm>
-          <a:prstGeom prst="rect">
-            <a:avLst/>
-          </a:prstGeom>
-          <a:noFill/>
-          <a:ln/>
-        </p:spPr>
-        <p:txBody>
-          <a:bodyPr wrap="square" rtlCol="0" anchor="ctr"/>
-          <a:lstStyle/>
-          <a:p>
-            <a:pPr algn="l" indent="0" marL="0">
-              <a:buNone/>
-            </a:pPr>
-            <a:r>
-              <a:rPr lang="en-US" sz="2300" b="1" dirty="0">
+            <a:off x="1783080" y="2084832"/>
+            <a:ext cx="3977640" cy="822960"/>
+          </a:xfrm>
+          <a:prstGeom prst="rect">
+            <a:avLst/>
+          </a:prstGeom>
+          <a:noFill/>
+          <a:ln/>
+        </p:spPr>
+        <p:txBody>
+          <a:bodyPr wrap="square" lIns="0" tIns="0" rIns="0" bIns="0" rtlCol="0" anchor="ctr"/>
+          <a:lstStyle/>
+          <a:p>
+            <a:pPr algn="l" indent="0" marL="0">
+              <a:lnSpc>
+                <a:spcPct val="100000"/>
+              </a:lnSpc>
+              <a:buNone/>
+            </a:pPr>
+            <a:r>
+              <a:rPr lang="en-US" sz="1700" b="1" dirty="0">
                 <a:solidFill>
                   <a:srgbClr val="2B2B33"/>
                 </a:solidFill>
@@ -9164,9 +10081,9 @@
                 <a:ea typeface="Cambria" pitchFamily="34" charset="-122"/>
                 <a:cs typeface="Cambria" pitchFamily="34" charset="-120"/>
               </a:rPr>
-              <a:t>Rate Control</a:t>
-            </a:r>
-            <a:endParaRPr lang="en-US" sz="2300" dirty="0"/>
+              <a:t>Catheter Ablation (PVI)</a:t>
+            </a:r>
+            <a:endParaRPr lang="en-US" sz="1700" dirty="0"/>
           </a:p>
         </p:txBody>
       </p:sp>
@@ -9178,45 +10095,27 @@
         </p:nvSpPr>
         <p:spPr>
           <a:xfrm>
-            <a:off x="914400" y="3200400"/>
-            <a:ext cx="4846320" cy="822960"/>
-          </a:xfrm>
-          <a:prstGeom prst="rect">
-            <a:avLst/>
-          </a:prstGeom>
-          <a:noFill/>
-          <a:ln/>
-        </p:spPr>
-        <p:txBody>
-          <a:bodyPr wrap="square" rtlCol="0" anchor="t"/>
+            <a:off x="868680" y="2944368"/>
+            <a:ext cx="4754880" cy="603504"/>
+          </a:xfrm>
+          <a:prstGeom prst="rect">
+            <a:avLst/>
+          </a:prstGeom>
+          <a:noFill/>
+          <a:ln/>
+        </p:spPr>
+        <p:txBody>
+          <a:bodyPr wrap="square" lIns="0" tIns="0" rIns="0" bIns="0" rtlCol="0" anchor="t"/>
           <a:lstStyle/>
           <a:p>
             <a:pPr algn="l" indent="0" marL="0">
               <a:lnSpc>
-                <a:spcPct val="112000"/>
+                <a:spcPct val="110000"/>
               </a:lnSpc>
               <a:buNone/>
             </a:pPr>
             <a:r>
-              <a:rPr lang="en-US" sz="1600" b="1" dirty="0">
-                <a:solidFill>
-                  <a:srgbClr val="A4133C"/>
-                </a:solidFill>
-                <a:latin typeface="Cambria" pitchFamily="34" charset="0"/>
-                <a:ea typeface="Cambria" pitchFamily="34" charset="-122"/>
-                <a:cs typeface="Cambria" pitchFamily="34" charset="-120"/>
-              </a:rPr>
-              <a:t>Beta-blockers
-</a:t>
-            </a:r>
-            <a:pPr algn="l" indent="0" marL="0">
-              <a:lnSpc>
-                <a:spcPct val="112000"/>
-              </a:lnSpc>
-              <a:buNone/>
-            </a:pPr>
-            <a:r>
-              <a:rPr lang="en-US" sz="1300" dirty="0">
+              <a:rPr lang="en-US" sz="1250" dirty="0">
                 <a:solidFill>
                   <a:srgbClr val="6B6B76"/>
                 </a:solidFill>
@@ -9224,152 +10123,37 @@
                 <a:ea typeface="Calibri" pitchFamily="34" charset="-122"/>
                 <a:cs typeface="Calibri" pitchFamily="34" charset="-120"/>
               </a:rPr>
-              <a:t>First-line (e.g. bisoprolol, metoprolol)</a:t>
-            </a:r>
-            <a:endParaRPr lang="en-US" sz="1600" dirty="0"/>
-          </a:p>
-        </p:txBody>
-      </p:sp>
-      <p:sp>
-        <p:nvSpPr>
-          <p:cNvPr id="11" name="Text 7"/>
-          <p:cNvSpPr/>
-          <p:nvPr/>
-        </p:nvSpPr>
-        <p:spPr>
-          <a:xfrm>
-            <a:off x="914400" y="4114800"/>
-            <a:ext cx="4846320" cy="822960"/>
-          </a:xfrm>
-          <a:prstGeom prst="rect">
-            <a:avLst/>
-          </a:prstGeom>
-          <a:noFill/>
-          <a:ln/>
-        </p:spPr>
-        <p:txBody>
-          <a:bodyPr wrap="square" rtlCol="0" anchor="t"/>
-          <a:lstStyle/>
-          <a:p>
-            <a:pPr algn="l" indent="0" marL="0">
-              <a:lnSpc>
-                <a:spcPct val="112000"/>
-              </a:lnSpc>
-              <a:buNone/>
-            </a:pPr>
-            <a:r>
-              <a:rPr lang="en-US" sz="1600" b="1" dirty="0">
-                <a:solidFill>
-                  <a:srgbClr val="A4133C"/>
-                </a:solidFill>
-                <a:latin typeface="Cambria" pitchFamily="34" charset="0"/>
-                <a:ea typeface="Cambria" pitchFamily="34" charset="-122"/>
-                <a:cs typeface="Cambria" pitchFamily="34" charset="-120"/>
-              </a:rPr>
-              <a:t>Non-DHP calcium blockers
-</a:t>
-            </a:r>
-            <a:pPr algn="l" indent="0" marL="0">
-              <a:lnSpc>
-                <a:spcPct val="112000"/>
-              </a:lnSpc>
-              <a:buNone/>
-            </a:pPr>
-            <a:r>
-              <a:rPr lang="en-US" sz="1300" dirty="0">
-                <a:solidFill>
-                  <a:srgbClr val="6B6B76"/>
-                </a:solidFill>
-                <a:latin typeface="Calibri" pitchFamily="34" charset="0"/>
-                <a:ea typeface="Calibri" pitchFamily="34" charset="-122"/>
-                <a:cs typeface="Calibri" pitchFamily="34" charset="-120"/>
-              </a:rPr>
-              <a:t>Diltiazem or verapamil</a:t>
-            </a:r>
-            <a:endParaRPr lang="en-US" sz="1600" dirty="0"/>
-          </a:p>
-        </p:txBody>
-      </p:sp>
-      <p:sp>
-        <p:nvSpPr>
-          <p:cNvPr id="12" name="Text 8"/>
-          <p:cNvSpPr/>
-          <p:nvPr/>
-        </p:nvSpPr>
-        <p:spPr>
-          <a:xfrm>
-            <a:off x="914400" y="5029200"/>
-            <a:ext cx="4846320" cy="822960"/>
-          </a:xfrm>
-          <a:prstGeom prst="rect">
-            <a:avLst/>
-          </a:prstGeom>
-          <a:noFill/>
-          <a:ln/>
-        </p:spPr>
-        <p:txBody>
-          <a:bodyPr wrap="square" rtlCol="0" anchor="t"/>
-          <a:lstStyle/>
-          <a:p>
-            <a:pPr algn="l" indent="0" marL="0">
-              <a:lnSpc>
-                <a:spcPct val="112000"/>
-              </a:lnSpc>
-              <a:buNone/>
-            </a:pPr>
-            <a:r>
-              <a:rPr lang="en-US" sz="1600" b="1" dirty="0">
-                <a:solidFill>
-                  <a:srgbClr val="A4133C"/>
-                </a:solidFill>
-                <a:latin typeface="Cambria" pitchFamily="34" charset="0"/>
-                <a:ea typeface="Cambria" pitchFamily="34" charset="-122"/>
-                <a:cs typeface="Cambria" pitchFamily="34" charset="-120"/>
-              </a:rPr>
-              <a:t>Digoxin
-</a:t>
-            </a:r>
-            <a:pPr algn="l" indent="0" marL="0">
-              <a:lnSpc>
-                <a:spcPct val="112000"/>
-              </a:lnSpc>
-              <a:buNone/>
-            </a:pPr>
-            <a:r>
-              <a:rPr lang="en-US" sz="1300" dirty="0">
-                <a:solidFill>
-                  <a:srgbClr val="6B6B76"/>
-                </a:solidFill>
-                <a:latin typeface="Calibri" pitchFamily="34" charset="0"/>
-                <a:ea typeface="Calibri" pitchFamily="34" charset="-122"/>
-                <a:cs typeface="Calibri" pitchFamily="34" charset="-120"/>
-              </a:rPr>
-              <a:t>Add-on; sedentary patients or heart failure</a:t>
-            </a:r>
-            <a:endParaRPr lang="en-US" sz="1600" dirty="0"/>
-          </a:p>
-        </p:txBody>
-      </p:sp>
-      <p:sp>
-        <p:nvSpPr>
-          <p:cNvPr id="13" name="Shape 9"/>
-          <p:cNvSpPr/>
-          <p:nvPr/>
-        </p:nvSpPr>
-        <p:spPr>
-          <a:xfrm>
-            <a:off x="6172200" y="1828800"/>
-            <a:ext cx="5532120" cy="4206240"/>
+              <a:t>Pulmonary vein isolation ablates the triggering foci — first-line interventional rhythm control.</a:t>
+            </a:r>
+            <a:endParaRPr lang="en-US" sz="1250" dirty="0"/>
+          </a:p>
+        </p:txBody>
+      </p:sp>
+      <p:sp>
+        <p:nvSpPr>
+          <p:cNvPr id="11" name="Shape 7"/>
+          <p:cNvSpPr/>
+          <p:nvPr/>
+        </p:nvSpPr>
+        <p:spPr>
+          <a:xfrm>
+            <a:off x="6199632" y="1828800"/>
+            <a:ext cx="5486400" cy="1783080"/>
           </a:xfrm>
           <a:prstGeom prst="roundRect">
             <a:avLst>
-              <a:gd name="adj" fmla="val 2609"/>
+              <a:gd name="adj" fmla="val 6154"/>
             </a:avLst>
           </a:prstGeom>
           <a:solidFill>
-            <a:srgbClr val="590D22"/>
+            <a:srgbClr val="FFF0F3"/>
           </a:solidFill>
-          <a:ln/>
+          <a:ln w="12700">
+            <a:solidFill>
+              <a:srgbClr val="FBD8DF"/>
+            </a:solidFill>
+            <a:prstDash val="solid"/>
+          </a:ln>
           <a:effectLst>
             <a:outerShdw sx="100000" sy="100000" kx="0" ky="0" algn="bl" rotWithShape="0" blurRad="127000" dist="50800" dir="5400000">
               <a:srgbClr val="C9A3AC">
@@ -9381,27 +10165,32 @@
       </p:sp>
       <p:sp>
         <p:nvSpPr>
-          <p:cNvPr id="14" name="Shape 10"/>
-          <p:cNvSpPr/>
-          <p:nvPr/>
-        </p:nvSpPr>
-        <p:spPr>
-          <a:xfrm>
-            <a:off x="6492240" y="2121408"/>
-            <a:ext cx="822960" cy="822960"/>
+          <p:cNvPr id="12" name="Shape 8"/>
+          <p:cNvSpPr/>
+          <p:nvPr/>
+        </p:nvSpPr>
+        <p:spPr>
+          <a:xfrm>
+            <a:off x="6519672" y="2103120"/>
+            <a:ext cx="777240" cy="777240"/>
           </a:xfrm>
           <a:prstGeom prst="ellipse">
             <a:avLst/>
           </a:prstGeom>
           <a:solidFill>
-            <a:srgbClr val="A4133C"/>
+            <a:srgbClr val="FFFFFF"/>
           </a:solidFill>
-          <a:ln/>
+          <a:ln w="12700">
+            <a:solidFill>
+              <a:srgbClr val="FBD8DF"/>
+            </a:solidFill>
+            <a:prstDash val="solid"/>
+          </a:ln>
         </p:spPr>
       </p:sp>
       <p:pic>
         <p:nvPicPr>
-          <p:cNvPr id="15" name="Image 2" descr="preencoded.png">    </p:cNvPr>
+          <p:cNvPr id="13" name="Image 2" descr="preencoded.png">    </p:cNvPr>
           <p:cNvPicPr>
             <a:picLocks noChangeAspect="1"/>
           </p:cNvPicPr>
@@ -9415,8 +10204,8 @@
         </p:blipFill>
         <p:spPr>
           <a:xfrm>
-            <a:off x="6675120" y="2304288"/>
-            <a:ext cx="457200" cy="457200"/>
+            <a:off x="6711696" y="2295144"/>
+            <a:ext cx="393192" cy="393192"/>
           </a:xfrm>
           <a:prstGeom prst="rect">
             <a:avLst/>
@@ -9425,256 +10214,530 @@
       </p:pic>
       <p:sp>
         <p:nvSpPr>
-          <p:cNvPr id="16" name="Text 11"/>
-          <p:cNvSpPr/>
-          <p:nvPr/>
-        </p:nvSpPr>
-        <p:spPr>
-          <a:xfrm>
-            <a:off x="7452360" y="2194560"/>
-            <a:ext cx="4023360" cy="640080"/>
-          </a:xfrm>
-          <a:prstGeom prst="rect">
-            <a:avLst/>
-          </a:prstGeom>
-          <a:noFill/>
-          <a:ln/>
-        </p:spPr>
-        <p:txBody>
-          <a:bodyPr wrap="square" rtlCol="0" anchor="ctr"/>
-          <a:lstStyle/>
-          <a:p>
-            <a:pPr algn="l" indent="0" marL="0">
-              <a:buNone/>
-            </a:pPr>
-            <a:r>
-              <a:rPr lang="en-US" sz="2300" b="1" dirty="0">
-                <a:solidFill>
-                  <a:srgbClr val="FFFFFF"/>
+          <p:cNvPr id="14" name="Text 9"/>
+          <p:cNvSpPr/>
+          <p:nvPr/>
+        </p:nvSpPr>
+        <p:spPr>
+          <a:xfrm>
+            <a:off x="7479792" y="2084832"/>
+            <a:ext cx="3977640" cy="822960"/>
+          </a:xfrm>
+          <a:prstGeom prst="rect">
+            <a:avLst/>
+          </a:prstGeom>
+          <a:noFill/>
+          <a:ln/>
+        </p:spPr>
+        <p:txBody>
+          <a:bodyPr wrap="square" lIns="0" tIns="0" rIns="0" bIns="0" rtlCol="0" anchor="ctr"/>
+          <a:lstStyle/>
+          <a:p>
+            <a:pPr algn="l" indent="0" marL="0">
+              <a:lnSpc>
+                <a:spcPct val="100000"/>
+              </a:lnSpc>
+              <a:buNone/>
+            </a:pPr>
+            <a:r>
+              <a:rPr lang="en-US" sz="1700" b="1" dirty="0">
+                <a:solidFill>
+                  <a:srgbClr val="2B2B33"/>
                 </a:solidFill>
                 <a:latin typeface="Cambria" pitchFamily="34" charset="0"/>
                 <a:ea typeface="Cambria" pitchFamily="34" charset="-122"/>
                 <a:cs typeface="Cambria" pitchFamily="34" charset="-120"/>
               </a:rPr>
-              <a:t>Rhythm Control</a:t>
-            </a:r>
-            <a:endParaRPr lang="en-US" sz="2300" dirty="0"/>
-          </a:p>
-        </p:txBody>
-      </p:sp>
-      <p:sp>
-        <p:nvSpPr>
-          <p:cNvPr id="17" name="Text 12"/>
-          <p:cNvSpPr/>
-          <p:nvPr/>
-        </p:nvSpPr>
-        <p:spPr>
-          <a:xfrm>
-            <a:off x="6583680" y="3200400"/>
-            <a:ext cx="4892040" cy="868680"/>
-          </a:xfrm>
-          <a:prstGeom prst="rect">
-            <a:avLst/>
-          </a:prstGeom>
-          <a:noFill/>
-          <a:ln/>
-        </p:spPr>
-        <p:txBody>
-          <a:bodyPr wrap="square" rtlCol="0" anchor="t"/>
+              <a:t>Surgical Maze (Cox-Maze IV)</a:t>
+            </a:r>
+            <a:endParaRPr lang="en-US" sz="1700" dirty="0"/>
+          </a:p>
+        </p:txBody>
+      </p:sp>
+      <p:sp>
+        <p:nvSpPr>
+          <p:cNvPr id="15" name="Text 10"/>
+          <p:cNvSpPr/>
+          <p:nvPr/>
+        </p:nvSpPr>
+        <p:spPr>
+          <a:xfrm>
+            <a:off x="6565392" y="2944368"/>
+            <a:ext cx="4754880" cy="603504"/>
+          </a:xfrm>
+          <a:prstGeom prst="rect">
+            <a:avLst/>
+          </a:prstGeom>
+          <a:noFill/>
+          <a:ln/>
+        </p:spPr>
+        <p:txBody>
+          <a:bodyPr wrap="square" lIns="0" tIns="0" rIns="0" bIns="0" rtlCol="0" anchor="t"/>
           <a:lstStyle/>
           <a:p>
             <a:pPr algn="l" indent="0" marL="0">
               <a:lnSpc>
-                <a:spcPct val="112000"/>
+                <a:spcPct val="110000"/>
               </a:lnSpc>
               <a:buNone/>
             </a:pPr>
             <a:r>
-              <a:rPr lang="en-US" sz="1600" b="1" dirty="0">
-                <a:solidFill>
-                  <a:srgbClr val="FF4D6D"/>
+              <a:rPr lang="en-US" sz="1250" dirty="0">
+                <a:solidFill>
+                  <a:srgbClr val="6B6B76"/>
+                </a:solidFill>
+                <a:latin typeface="Calibri" pitchFamily="34" charset="0"/>
+                <a:ea typeface="Calibri" pitchFamily="34" charset="-122"/>
+                <a:cs typeface="Calibri" pitchFamily="34" charset="-120"/>
+              </a:rPr>
+              <a:t>Surgical lesion lines block re-entry, usually with concomitant cardiac surgery — highest rhythm success.</a:t>
+            </a:r>
+            <a:endParaRPr lang="en-US" sz="1250" dirty="0"/>
+          </a:p>
+        </p:txBody>
+      </p:sp>
+      <p:sp>
+        <p:nvSpPr>
+          <p:cNvPr id="16" name="Shape 11"/>
+          <p:cNvSpPr/>
+          <p:nvPr/>
+        </p:nvSpPr>
+        <p:spPr>
+          <a:xfrm>
+            <a:off x="502920" y="3794760"/>
+            <a:ext cx="5486400" cy="1783080"/>
+          </a:xfrm>
+          <a:prstGeom prst="roundRect">
+            <a:avLst>
+              <a:gd name="adj" fmla="val 6154"/>
+            </a:avLst>
+          </a:prstGeom>
+          <a:solidFill>
+            <a:srgbClr val="FFF0F3"/>
+          </a:solidFill>
+          <a:ln w="12700">
+            <a:solidFill>
+              <a:srgbClr val="FBD8DF"/>
+            </a:solidFill>
+            <a:prstDash val="solid"/>
+          </a:ln>
+          <a:effectLst>
+            <a:outerShdw sx="100000" sy="100000" kx="0" ky="0" algn="bl" rotWithShape="0" blurRad="127000" dist="50800" dir="5400000">
+              <a:srgbClr val="C9A3AC">
+                <a:alpha val="45000"/>
+              </a:srgbClr>
+            </a:outerShdw>
+          </a:effectLst>
+        </p:spPr>
+      </p:sp>
+      <p:sp>
+        <p:nvSpPr>
+          <p:cNvPr id="17" name="Shape 12"/>
+          <p:cNvSpPr/>
+          <p:nvPr/>
+        </p:nvSpPr>
+        <p:spPr>
+          <a:xfrm>
+            <a:off x="822960" y="4069080"/>
+            <a:ext cx="777240" cy="777240"/>
+          </a:xfrm>
+          <a:prstGeom prst="ellipse">
+            <a:avLst/>
+          </a:prstGeom>
+          <a:solidFill>
+            <a:srgbClr val="FFFFFF"/>
+          </a:solidFill>
+          <a:ln w="12700">
+            <a:solidFill>
+              <a:srgbClr val="FBD8DF"/>
+            </a:solidFill>
+            <a:prstDash val="solid"/>
+          </a:ln>
+        </p:spPr>
+      </p:sp>
+      <p:pic>
+        <p:nvPicPr>
+          <p:cNvPr id="18" name="Image 3" descr="preencoded.png">    </p:cNvPr>
+          <p:cNvPicPr>
+            <a:picLocks noChangeAspect="1"/>
+          </p:cNvPicPr>
+          <p:nvPr/>
+        </p:nvPicPr>
+        <p:blipFill>
+          <a:blip r:embed="rId4"/>
+          <a:stretch>
+            <a:fillRect/>
+          </a:stretch>
+        </p:blipFill>
+        <p:spPr>
+          <a:xfrm>
+            <a:off x="1014984" y="4261104"/>
+            <a:ext cx="393192" cy="393192"/>
+          </a:xfrm>
+          <a:prstGeom prst="rect">
+            <a:avLst/>
+          </a:prstGeom>
+        </p:spPr>
+      </p:pic>
+      <p:sp>
+        <p:nvSpPr>
+          <p:cNvPr id="19" name="Text 13"/>
+          <p:cNvSpPr/>
+          <p:nvPr/>
+        </p:nvSpPr>
+        <p:spPr>
+          <a:xfrm>
+            <a:off x="1783080" y="4050792"/>
+            <a:ext cx="3977640" cy="822960"/>
+          </a:xfrm>
+          <a:prstGeom prst="rect">
+            <a:avLst/>
+          </a:prstGeom>
+          <a:noFill/>
+          <a:ln/>
+        </p:spPr>
+        <p:txBody>
+          <a:bodyPr wrap="square" lIns="0" tIns="0" rIns="0" bIns="0" rtlCol="0" anchor="ctr"/>
+          <a:lstStyle/>
+          <a:p>
+            <a:pPr algn="l" indent="0" marL="0">
+              <a:lnSpc>
+                <a:spcPct val="100000"/>
+              </a:lnSpc>
+              <a:buNone/>
+            </a:pPr>
+            <a:r>
+              <a:rPr lang="en-US" sz="1700" b="1" dirty="0">
+                <a:solidFill>
+                  <a:srgbClr val="2B2B33"/>
                 </a:solidFill>
                 <a:latin typeface="Cambria" pitchFamily="34" charset="0"/>
                 <a:ea typeface="Cambria" pitchFamily="34" charset="-122"/>
                 <a:cs typeface="Cambria" pitchFamily="34" charset="-120"/>
               </a:rPr>
-              <a:t>Cardioversion
-</a:t>
-            </a:r>
+              <a:t>AV Node Ablation + Pacemaker</a:t>
+            </a:r>
+            <a:endParaRPr lang="en-US" sz="1700" dirty="0"/>
+          </a:p>
+        </p:txBody>
+      </p:sp>
+      <p:sp>
+        <p:nvSpPr>
+          <p:cNvPr id="20" name="Text 14"/>
+          <p:cNvSpPr/>
+          <p:nvPr/>
+        </p:nvSpPr>
+        <p:spPr>
+          <a:xfrm>
+            <a:off x="868680" y="4910328"/>
+            <a:ext cx="4754880" cy="603504"/>
+          </a:xfrm>
+          <a:prstGeom prst="rect">
+            <a:avLst/>
+          </a:prstGeom>
+          <a:noFill/>
+          <a:ln/>
+        </p:spPr>
+        <p:txBody>
+          <a:bodyPr wrap="square" lIns="0" tIns="0" rIns="0" bIns="0" rtlCol="0" anchor="t"/>
+          <a:lstStyle/>
+          <a:p>
             <a:pPr algn="l" indent="0" marL="0">
               <a:lnSpc>
-                <a:spcPct val="112000"/>
+                <a:spcPct val="110000"/>
               </a:lnSpc>
               <a:buNone/>
             </a:pPr>
             <a:r>
-              <a:rPr lang="en-US" sz="1300" dirty="0">
-                <a:solidFill>
-                  <a:srgbClr val="FBD8DF"/>
+              <a:rPr lang="en-US" sz="1250" dirty="0">
+                <a:solidFill>
+                  <a:srgbClr val="6B6B76"/>
                 </a:solidFill>
                 <a:latin typeface="Calibri" pitchFamily="34" charset="0"/>
                 <a:ea typeface="Calibri" pitchFamily="34" charset="-122"/>
                 <a:cs typeface="Calibri" pitchFamily="34" charset="-120"/>
               </a:rPr>
-              <a:t>DC (electrical) or pharmacological — flecainide, amiodarone</a:t>
-            </a:r>
-            <a:endParaRPr lang="en-US" sz="1600" dirty="0"/>
-          </a:p>
-        </p:txBody>
-      </p:sp>
-      <p:sp>
-        <p:nvSpPr>
-          <p:cNvPr id="18" name="Text 13"/>
-          <p:cNvSpPr/>
-          <p:nvPr/>
-        </p:nvSpPr>
-        <p:spPr>
-          <a:xfrm>
-            <a:off x="6583680" y="4114800"/>
-            <a:ext cx="4892040" cy="868680"/>
-          </a:xfrm>
-          <a:prstGeom prst="rect">
-            <a:avLst/>
-          </a:prstGeom>
-          <a:noFill/>
-          <a:ln/>
-        </p:spPr>
-        <p:txBody>
-          <a:bodyPr wrap="square" rtlCol="0" anchor="t"/>
+              <a:t>“Ablate &amp; pace” for refractory rate control; requires a permanent pacemaker.</a:t>
+            </a:r>
+            <a:endParaRPr lang="en-US" sz="1250" dirty="0"/>
+          </a:p>
+        </p:txBody>
+      </p:sp>
+      <p:sp>
+        <p:nvSpPr>
+          <p:cNvPr id="21" name="Shape 15"/>
+          <p:cNvSpPr/>
+          <p:nvPr/>
+        </p:nvSpPr>
+        <p:spPr>
+          <a:xfrm>
+            <a:off x="6199632" y="3794760"/>
+            <a:ext cx="5486400" cy="1783080"/>
+          </a:xfrm>
+          <a:prstGeom prst="roundRect">
+            <a:avLst>
+              <a:gd name="adj" fmla="val 6154"/>
+            </a:avLst>
+          </a:prstGeom>
+          <a:solidFill>
+            <a:srgbClr val="FFF0F3"/>
+          </a:solidFill>
+          <a:ln w="12700">
+            <a:solidFill>
+              <a:srgbClr val="FBD8DF"/>
+            </a:solidFill>
+            <a:prstDash val="solid"/>
+          </a:ln>
+          <a:effectLst>
+            <a:outerShdw sx="100000" sy="100000" kx="0" ky="0" algn="bl" rotWithShape="0" blurRad="127000" dist="50800" dir="5400000">
+              <a:srgbClr val="C9A3AC">
+                <a:alpha val="45000"/>
+              </a:srgbClr>
+            </a:outerShdw>
+          </a:effectLst>
+        </p:spPr>
+      </p:sp>
+      <p:sp>
+        <p:nvSpPr>
+          <p:cNvPr id="22" name="Shape 16"/>
+          <p:cNvSpPr/>
+          <p:nvPr/>
+        </p:nvSpPr>
+        <p:spPr>
+          <a:xfrm>
+            <a:off x="6519672" y="4069080"/>
+            <a:ext cx="777240" cy="777240"/>
+          </a:xfrm>
+          <a:prstGeom prst="ellipse">
+            <a:avLst/>
+          </a:prstGeom>
+          <a:solidFill>
+            <a:srgbClr val="FFFFFF"/>
+          </a:solidFill>
+          <a:ln w="12700">
+            <a:solidFill>
+              <a:srgbClr val="FBD8DF"/>
+            </a:solidFill>
+            <a:prstDash val="solid"/>
+          </a:ln>
+        </p:spPr>
+      </p:sp>
+      <p:pic>
+        <p:nvPicPr>
+          <p:cNvPr id="23" name="Image 4" descr="preencoded.png">    </p:cNvPr>
+          <p:cNvPicPr>
+            <a:picLocks noChangeAspect="1"/>
+          </p:cNvPicPr>
+          <p:nvPr/>
+        </p:nvPicPr>
+        <p:blipFill>
+          <a:blip r:embed="rId5"/>
+          <a:stretch>
+            <a:fillRect/>
+          </a:stretch>
+        </p:blipFill>
+        <p:spPr>
+          <a:xfrm>
+            <a:off x="6711696" y="4261104"/>
+            <a:ext cx="393192" cy="393192"/>
+          </a:xfrm>
+          <a:prstGeom prst="rect">
+            <a:avLst/>
+          </a:prstGeom>
+        </p:spPr>
+      </p:pic>
+      <p:sp>
+        <p:nvSpPr>
+          <p:cNvPr id="24" name="Text 17"/>
+          <p:cNvSpPr/>
+          <p:nvPr/>
+        </p:nvSpPr>
+        <p:spPr>
+          <a:xfrm>
+            <a:off x="7479792" y="4050792"/>
+            <a:ext cx="3977640" cy="822960"/>
+          </a:xfrm>
+          <a:prstGeom prst="rect">
+            <a:avLst/>
+          </a:prstGeom>
+          <a:noFill/>
+          <a:ln/>
+        </p:spPr>
+        <p:txBody>
+          <a:bodyPr wrap="square" lIns="0" tIns="0" rIns="0" bIns="0" rtlCol="0" anchor="ctr"/>
           <a:lstStyle/>
           <a:p>
             <a:pPr algn="l" indent="0" marL="0">
               <a:lnSpc>
-                <a:spcPct val="112000"/>
+                <a:spcPct val="100000"/>
               </a:lnSpc>
               <a:buNone/>
             </a:pPr>
             <a:r>
-              <a:rPr lang="en-US" sz="1600" b="1" dirty="0">
-                <a:solidFill>
-                  <a:srgbClr val="FF4D6D"/>
+              <a:rPr lang="en-US" sz="1700" b="1" dirty="0">
+                <a:solidFill>
+                  <a:srgbClr val="2B2B33"/>
                 </a:solidFill>
                 <a:latin typeface="Cambria" pitchFamily="34" charset="0"/>
                 <a:ea typeface="Cambria" pitchFamily="34" charset="-122"/>
                 <a:cs typeface="Cambria" pitchFamily="34" charset="-120"/>
               </a:rPr>
-              <a:t>Antiarrhythmic drugs
-</a:t>
-            </a:r>
+              <a:t>LAA Occlusion / Exclusion</a:t>
+            </a:r>
+            <a:endParaRPr lang="en-US" sz="1700" dirty="0"/>
+          </a:p>
+        </p:txBody>
+      </p:sp>
+      <p:sp>
+        <p:nvSpPr>
+          <p:cNvPr id="25" name="Text 18"/>
+          <p:cNvSpPr/>
+          <p:nvPr/>
+        </p:nvSpPr>
+        <p:spPr>
+          <a:xfrm>
+            <a:off x="6565392" y="4910328"/>
+            <a:ext cx="4754880" cy="603504"/>
+          </a:xfrm>
+          <a:prstGeom prst="rect">
+            <a:avLst/>
+          </a:prstGeom>
+          <a:noFill/>
+          <a:ln/>
+        </p:spPr>
+        <p:txBody>
+          <a:bodyPr wrap="square" lIns="0" tIns="0" rIns="0" bIns="0" rtlCol="0" anchor="t"/>
+          <a:lstStyle/>
+          <a:p>
             <a:pPr algn="l" indent="0" marL="0">
               <a:lnSpc>
-                <a:spcPct val="112000"/>
+                <a:spcPct val="110000"/>
               </a:lnSpc>
               <a:buNone/>
             </a:pPr>
             <a:r>
-              <a:rPr lang="en-US" sz="1300" dirty="0">
-                <a:solidFill>
-                  <a:srgbClr val="FBD8DF"/>
+              <a:rPr lang="en-US" sz="1250" dirty="0">
+                <a:solidFill>
+                  <a:srgbClr val="6B6B76"/>
                 </a:solidFill>
                 <a:latin typeface="Calibri" pitchFamily="34" charset="0"/>
                 <a:ea typeface="Calibri" pitchFamily="34" charset="-122"/>
                 <a:cs typeface="Calibri" pitchFamily="34" charset="-120"/>
               </a:rPr>
-              <a:t>Flecainide/propafenone (no structural disease), amiodarone, sotalol</a:t>
-            </a:r>
-            <a:endParaRPr lang="en-US" sz="1600" dirty="0"/>
-          </a:p>
-        </p:txBody>
-      </p:sp>
-      <p:sp>
-        <p:nvSpPr>
-          <p:cNvPr id="19" name="Text 14"/>
-          <p:cNvSpPr/>
-          <p:nvPr/>
-        </p:nvSpPr>
-        <p:spPr>
-          <a:xfrm>
-            <a:off x="6583680" y="5029200"/>
-            <a:ext cx="4892040" cy="868680"/>
-          </a:xfrm>
-          <a:prstGeom prst="rect">
-            <a:avLst/>
-          </a:prstGeom>
-          <a:noFill/>
-          <a:ln/>
-        </p:spPr>
-        <p:txBody>
-          <a:bodyPr wrap="square" rtlCol="0" anchor="t"/>
-          <a:lstStyle/>
-          <a:p>
-            <a:pPr algn="l" indent="0" marL="0">
-              <a:lnSpc>
-                <a:spcPct val="112000"/>
-              </a:lnSpc>
-              <a:buNone/>
-            </a:pPr>
-            <a:r>
-              <a:rPr lang="en-US" sz="1600" b="1" dirty="0">
+              <a:t>Watchman device or surgical clip prevents stroke when anticoagulation is unsuitable.</a:t>
+            </a:r>
+            <a:endParaRPr lang="en-US" sz="1250" dirty="0"/>
+          </a:p>
+        </p:txBody>
+      </p:sp>
+      <p:sp>
+        <p:nvSpPr>
+          <p:cNvPr id="26" name="Shape 19"/>
+          <p:cNvSpPr/>
+          <p:nvPr/>
+        </p:nvSpPr>
+        <p:spPr>
+          <a:xfrm>
+            <a:off x="502920" y="5669280"/>
+            <a:ext cx="11183112" cy="502920"/>
+          </a:xfrm>
+          <a:prstGeom prst="roundRect">
+            <a:avLst>
+              <a:gd name="adj" fmla="val 18182"/>
+            </a:avLst>
+          </a:prstGeom>
+          <a:solidFill>
+            <a:srgbClr val="590D22"/>
+          </a:solidFill>
+          <a:ln/>
+        </p:spPr>
+      </p:sp>
+      <p:sp>
+        <p:nvSpPr>
+          <p:cNvPr id="27" name="Text 20"/>
+          <p:cNvSpPr/>
+          <p:nvPr/>
+        </p:nvSpPr>
+        <p:spPr>
+          <a:xfrm>
+            <a:off x="868680" y="5669280"/>
+            <a:ext cx="10515600" cy="502920"/>
+          </a:xfrm>
+          <a:prstGeom prst="rect">
+            <a:avLst/>
+          </a:prstGeom>
+          <a:noFill/>
+          <a:ln/>
+        </p:spPr>
+        <p:txBody>
+          <a:bodyPr wrap="square" rtlCol="0" anchor="ctr"/>
+          <a:lstStyle/>
+          <a:p>
+            <a:pPr algn="l" indent="0" marL="0">
+              <a:buNone/>
+            </a:pPr>
+            <a:r>
+              <a:rPr lang="en-US" sz="1300" b="1" dirty="0">
                 <a:solidFill>
                   <a:srgbClr val="FF4D6D"/>
-                </a:solidFill>
-                <a:latin typeface="Cambria" pitchFamily="34" charset="0"/>
-                <a:ea typeface="Cambria" pitchFamily="34" charset="-122"/>
-                <a:cs typeface="Cambria" pitchFamily="34" charset="-120"/>
-              </a:rPr>
-              <a:t>Catheter ablation
-</a:t>
-            </a:r>
-            <a:pPr algn="l" indent="0" marL="0">
-              <a:lnSpc>
-                <a:spcPct val="112000"/>
-              </a:lnSpc>
-              <a:buNone/>
-            </a:pPr>
-            <a:r>
-              <a:rPr lang="en-US" sz="1300" dirty="0">
-                <a:solidFill>
-                  <a:srgbClr val="FBD8DF"/>
                 </a:solidFill>
                 <a:latin typeface="Calibri" pitchFamily="34" charset="0"/>
                 <a:ea typeface="Calibri" pitchFamily="34" charset="-122"/>
                 <a:cs typeface="Calibri" pitchFamily="34" charset="-120"/>
               </a:rPr>
-              <a:t>Pulmonary vein isolation for refractory cases</a:t>
-            </a:r>
-            <a:endParaRPr lang="en-US" sz="1600" dirty="0"/>
-          </a:p>
-        </p:txBody>
-      </p:sp>
-      <p:sp>
-        <p:nvSpPr>
-          <p:cNvPr id="20" name="Text 15"/>
-          <p:cNvSpPr/>
-          <p:nvPr/>
-        </p:nvSpPr>
-        <p:spPr>
-          <a:xfrm>
-            <a:off x="11277295" y="6355080"/>
-            <a:ext cx="548640" cy="320040"/>
-          </a:xfrm>
-          <a:prstGeom prst="rect">
-            <a:avLst/>
-          </a:prstGeom>
-          <a:noFill/>
-          <a:ln/>
-        </p:spPr>
-        <p:txBody>
-          <a:bodyPr wrap="square" rtlCol="0" anchor="t"/>
-          <a:lstStyle/>
-          <a:p>
-            <a:pPr algn="r" indent="0" marL="0">
-              <a:buNone/>
-            </a:pPr>
-            <a:r>
-              <a:rPr lang="en-US" sz="1100" b="1" dirty="0">
-                <a:solidFill>
-                  <a:srgbClr val="6B6B76"/>
+              <a:t>Hybrid / convergent ablation  </a:t>
+            </a:r>
+            <a:pPr algn="l" indent="0" marL="0">
+              <a:buNone/>
+            </a:pPr>
+            <a:r>
+              <a:rPr lang="en-US" sz="1300" dirty="0">
+                <a:solidFill>
+                  <a:srgbClr val="FBD8DF"/>
                 </a:solidFill>
                 <a:latin typeface="Calibri" pitchFamily="34" charset="0"/>
                 <a:ea typeface="Calibri" pitchFamily="34" charset="-122"/>
                 <a:cs typeface="Calibri" pitchFamily="34" charset="-120"/>
               </a:rPr>
+              <a:t>combines catheter and minimally-invasive epicardial approaches for persistent AF.</a:t>
+            </a:r>
+            <a:endParaRPr lang="en-US" sz="1300" dirty="0"/>
+          </a:p>
+        </p:txBody>
+      </p:sp>
+      <p:sp>
+        <p:nvSpPr>
+          <p:cNvPr id="28" name="Text 21"/>
+          <p:cNvSpPr/>
+          <p:nvPr/>
+        </p:nvSpPr>
+        <p:spPr>
+          <a:xfrm>
+            <a:off x="11277295" y="6355080"/>
+            <a:ext cx="548640" cy="320040"/>
+          </a:xfrm>
+          <a:prstGeom prst="rect">
+            <a:avLst/>
+          </a:prstGeom>
+          <a:noFill/>
+          <a:ln/>
+        </p:spPr>
+        <p:txBody>
+          <a:bodyPr wrap="square" rtlCol="0" anchor="t"/>
+          <a:lstStyle/>
+          <a:p>
+            <a:pPr algn="r" indent="0" marL="0">
+              <a:buNone/>
+            </a:pPr>
+            <a:r>
+              <a:rPr lang="en-US" sz="1100" b="1" dirty="0">
+                <a:solidFill>
+                  <a:srgbClr val="6B6B76"/>
+                </a:solidFill>
+                <a:latin typeface="Calibri" pitchFamily="34" charset="0"/>
+                <a:ea typeface="Calibri" pitchFamily="34" charset="-122"/>
+                <a:cs typeface="Calibri" pitchFamily="34" charset="-120"/>
+              </a:rPr>
               <a:t>14</a:t>
             </a:r>
             <a:endParaRPr lang="en-US" sz="1100" dirty="0"/>
@@ -9683,7 +10746,7 @@
       </p:sp>
       <p:sp>
         <p:nvSpPr>
-          <p:cNvPr id="21" name="Text 16"/>
+          <p:cNvPr id="29" name="Text 22"/>
           <p:cNvSpPr/>
           <p:nvPr/>
         </p:nvSpPr>
@@ -9834,7 +10897,7 @@
                 <a:ea typeface="Calibri" pitchFamily="34" charset="-122"/>
                 <a:cs typeface="Calibri" pitchFamily="34" charset="-120"/>
               </a:rPr>
-              <a:t>STROKE PREVENTION</a:t>
+              <a:t>SYMPTOM CONTROL</a:t>
             </a:r>
             <a:endParaRPr lang="en-US" sz="1250" dirty="0"/>
           </a:p>
@@ -9873,7 +10936,7 @@
                 <a:ea typeface="Cambria" pitchFamily="34" charset="-122"/>
                 <a:cs typeface="Cambria" pitchFamily="34" charset="-120"/>
               </a:rPr>
-              <a:t>Anticoagulation</a:t>
+              <a:t>Rate vs Rhythm Control</a:t>
             </a:r>
             <a:endParaRPr lang="en-US" sz="3000" dirty="0"/>
           </a:p>
@@ -9887,12 +10950,12 @@
         </p:nvSpPr>
         <p:spPr>
           <a:xfrm>
-            <a:off x="502920" y="1874520"/>
-            <a:ext cx="11183112" cy="914400"/>
+            <a:off x="502920" y="1828800"/>
+            <a:ext cx="5532120" cy="4206240"/>
           </a:xfrm>
           <a:prstGeom prst="roundRect">
             <a:avLst>
-              <a:gd name="adj" fmla="val 10000"/>
+              <a:gd name="adj" fmla="val 2609"/>
             </a:avLst>
           </a:prstGeom>
           <a:solidFill>
@@ -9921,14 +10984,14 @@
         </p:nvSpPr>
         <p:spPr>
           <a:xfrm>
-            <a:off x="777240" y="2075688"/>
-            <a:ext cx="512064" cy="512064"/>
+            <a:off x="822960" y="2121408"/>
+            <a:ext cx="822960" cy="822960"/>
           </a:xfrm>
           <a:prstGeom prst="ellipse">
             <a:avLst/>
           </a:prstGeom>
           <a:solidFill>
-            <a:srgbClr val="2E7D32"/>
+            <a:srgbClr val="A4133C"/>
           </a:solidFill>
           <a:ln/>
         </p:spPr>
@@ -9949,8 +11012,8 @@
         </p:blipFill>
         <p:spPr>
           <a:xfrm>
-            <a:off x="905256" y="2203704"/>
-            <a:ext cx="256032" cy="256032"/>
+            <a:off x="1005840" y="2304288"/>
+            <a:ext cx="457200" cy="457200"/>
           </a:xfrm>
           <a:prstGeom prst="rect">
             <a:avLst/>
@@ -9965,24 +11028,24 @@
         </p:nvSpPr>
         <p:spPr>
           <a:xfrm>
-            <a:off x="1463040" y="1874520"/>
-            <a:ext cx="3291840" cy="914400"/>
-          </a:xfrm>
-          <a:prstGeom prst="rect">
-            <a:avLst/>
-          </a:prstGeom>
-          <a:noFill/>
-          <a:ln/>
-        </p:spPr>
-        <p:txBody>
-          <a:bodyPr wrap="square" lIns="0" tIns="0" rIns="0" bIns="0" rtlCol="0" anchor="ctr"/>
-          <a:lstStyle/>
-          <a:p>
-            <a:pPr algn="l" indent="0" marL="0">
-              <a:buNone/>
-            </a:pPr>
-            <a:r>
-              <a:rPr lang="en-US" sz="1800" b="1" dirty="0">
+            <a:off x="1783080" y="2194560"/>
+            <a:ext cx="4023360" cy="640080"/>
+          </a:xfrm>
+          <a:prstGeom prst="rect">
+            <a:avLst/>
+          </a:prstGeom>
+          <a:noFill/>
+          <a:ln/>
+        </p:spPr>
+        <p:txBody>
+          <a:bodyPr wrap="square" rtlCol="0" anchor="ctr"/>
+          <a:lstStyle/>
+          <a:p>
+            <a:pPr algn="l" indent="0" marL="0">
+              <a:buNone/>
+            </a:pPr>
+            <a:r>
+              <a:rPr lang="en-US" sz="2300" b="1" dirty="0">
                 <a:solidFill>
                   <a:srgbClr val="2B2B33"/>
                 </a:solidFill>
@@ -9990,9 +11053,9 @@
                 <a:ea typeface="Cambria" pitchFamily="34" charset="-122"/>
                 <a:cs typeface="Cambria" pitchFamily="34" charset="-120"/>
               </a:rPr>
-              <a:t>DOACs — first-line</a:t>
-            </a:r>
-            <a:endParaRPr lang="en-US" sz="1800" dirty="0"/>
+              <a:t>Rate Control</a:t>
+            </a:r>
+            <a:endParaRPr lang="en-US" sz="2300" dirty="0"/>
           </a:p>
         </p:txBody>
       </p:sp>
@@ -10004,27 +11067,45 @@
         </p:nvSpPr>
         <p:spPr>
           <a:xfrm>
-            <a:off x="4846320" y="1874520"/>
-            <a:ext cx="6583680" cy="914400"/>
-          </a:xfrm>
-          <a:prstGeom prst="rect">
-            <a:avLst/>
-          </a:prstGeom>
-          <a:noFill/>
-          <a:ln/>
-        </p:spPr>
-        <p:txBody>
-          <a:bodyPr wrap="square" lIns="0" tIns="0" rIns="0" bIns="0" rtlCol="0" anchor="ctr"/>
+            <a:off x="914400" y="3200400"/>
+            <a:ext cx="4846320" cy="822960"/>
+          </a:xfrm>
+          <a:prstGeom prst="rect">
+            <a:avLst/>
+          </a:prstGeom>
+          <a:noFill/>
+          <a:ln/>
+        </p:spPr>
+        <p:txBody>
+          <a:bodyPr wrap="square" rtlCol="0" anchor="t"/>
           <a:lstStyle/>
           <a:p>
             <a:pPr algn="l" indent="0" marL="0">
               <a:lnSpc>
-                <a:spcPct val="110000"/>
+                <a:spcPct val="112000"/>
               </a:lnSpc>
               <a:buNone/>
             </a:pPr>
             <a:r>
-              <a:rPr lang="en-US" sz="1450" dirty="0">
+              <a:rPr lang="en-US" sz="1600" b="1" dirty="0">
+                <a:solidFill>
+                  <a:srgbClr val="A4133C"/>
+                </a:solidFill>
+                <a:latin typeface="Cambria" pitchFamily="34" charset="0"/>
+                <a:ea typeface="Cambria" pitchFamily="34" charset="-122"/>
+                <a:cs typeface="Cambria" pitchFamily="34" charset="-120"/>
+              </a:rPr>
+              <a:t>Beta-blockers
+</a:t>
+            </a:r>
+            <a:pPr algn="l" indent="0" marL="0">
+              <a:lnSpc>
+                <a:spcPct val="112000"/>
+              </a:lnSpc>
+              <a:buNone/>
+            </a:pPr>
+            <a:r>
+              <a:rPr lang="en-US" sz="1300" dirty="0">
                 <a:solidFill>
                   <a:srgbClr val="6B6B76"/>
                 </a:solidFill>
@@ -10032,37 +11113,152 @@
                 <a:ea typeface="Calibri" pitchFamily="34" charset="-122"/>
                 <a:cs typeface="Calibri" pitchFamily="34" charset="-120"/>
               </a:rPr>
-              <a:t>Apixaban, rivaroxaban, dabigatran, edoxaban — preferred for most patients</a:t>
-            </a:r>
-            <a:endParaRPr lang="en-US" sz="1450" dirty="0"/>
-          </a:p>
-        </p:txBody>
-      </p:sp>
-      <p:sp>
-        <p:nvSpPr>
-          <p:cNvPr id="11" name="Shape 7"/>
-          <p:cNvSpPr/>
-          <p:nvPr/>
-        </p:nvSpPr>
-        <p:spPr>
-          <a:xfrm>
-            <a:off x="502920" y="2926080"/>
-            <a:ext cx="11183112" cy="914400"/>
+              <a:t>First-line (e.g. bisoprolol, metoprolol)</a:t>
+            </a:r>
+            <a:endParaRPr lang="en-US" sz="1600" dirty="0"/>
+          </a:p>
+        </p:txBody>
+      </p:sp>
+      <p:sp>
+        <p:nvSpPr>
+          <p:cNvPr id="11" name="Text 7"/>
+          <p:cNvSpPr/>
+          <p:nvPr/>
+        </p:nvSpPr>
+        <p:spPr>
+          <a:xfrm>
+            <a:off x="914400" y="4114800"/>
+            <a:ext cx="4846320" cy="822960"/>
+          </a:xfrm>
+          <a:prstGeom prst="rect">
+            <a:avLst/>
+          </a:prstGeom>
+          <a:noFill/>
+          <a:ln/>
+        </p:spPr>
+        <p:txBody>
+          <a:bodyPr wrap="square" rtlCol="0" anchor="t"/>
+          <a:lstStyle/>
+          <a:p>
+            <a:pPr algn="l" indent="0" marL="0">
+              <a:lnSpc>
+                <a:spcPct val="112000"/>
+              </a:lnSpc>
+              <a:buNone/>
+            </a:pPr>
+            <a:r>
+              <a:rPr lang="en-US" sz="1600" b="1" dirty="0">
+                <a:solidFill>
+                  <a:srgbClr val="A4133C"/>
+                </a:solidFill>
+                <a:latin typeface="Cambria" pitchFamily="34" charset="0"/>
+                <a:ea typeface="Cambria" pitchFamily="34" charset="-122"/>
+                <a:cs typeface="Cambria" pitchFamily="34" charset="-120"/>
+              </a:rPr>
+              <a:t>Non-DHP calcium blockers
+</a:t>
+            </a:r>
+            <a:pPr algn="l" indent="0" marL="0">
+              <a:lnSpc>
+                <a:spcPct val="112000"/>
+              </a:lnSpc>
+              <a:buNone/>
+            </a:pPr>
+            <a:r>
+              <a:rPr lang="en-US" sz="1300" dirty="0">
+                <a:solidFill>
+                  <a:srgbClr val="6B6B76"/>
+                </a:solidFill>
+                <a:latin typeface="Calibri" pitchFamily="34" charset="0"/>
+                <a:ea typeface="Calibri" pitchFamily="34" charset="-122"/>
+                <a:cs typeface="Calibri" pitchFamily="34" charset="-120"/>
+              </a:rPr>
+              <a:t>Diltiazem or verapamil</a:t>
+            </a:r>
+            <a:endParaRPr lang="en-US" sz="1600" dirty="0"/>
+          </a:p>
+        </p:txBody>
+      </p:sp>
+      <p:sp>
+        <p:nvSpPr>
+          <p:cNvPr id="12" name="Text 8"/>
+          <p:cNvSpPr/>
+          <p:nvPr/>
+        </p:nvSpPr>
+        <p:spPr>
+          <a:xfrm>
+            <a:off x="914400" y="5029200"/>
+            <a:ext cx="4846320" cy="822960"/>
+          </a:xfrm>
+          <a:prstGeom prst="rect">
+            <a:avLst/>
+          </a:prstGeom>
+          <a:noFill/>
+          <a:ln/>
+        </p:spPr>
+        <p:txBody>
+          <a:bodyPr wrap="square" rtlCol="0" anchor="t"/>
+          <a:lstStyle/>
+          <a:p>
+            <a:pPr algn="l" indent="0" marL="0">
+              <a:lnSpc>
+                <a:spcPct val="112000"/>
+              </a:lnSpc>
+              <a:buNone/>
+            </a:pPr>
+            <a:r>
+              <a:rPr lang="en-US" sz="1600" b="1" dirty="0">
+                <a:solidFill>
+                  <a:srgbClr val="A4133C"/>
+                </a:solidFill>
+                <a:latin typeface="Cambria" pitchFamily="34" charset="0"/>
+                <a:ea typeface="Cambria" pitchFamily="34" charset="-122"/>
+                <a:cs typeface="Cambria" pitchFamily="34" charset="-120"/>
+              </a:rPr>
+              <a:t>Digoxin
+</a:t>
+            </a:r>
+            <a:pPr algn="l" indent="0" marL="0">
+              <a:lnSpc>
+                <a:spcPct val="112000"/>
+              </a:lnSpc>
+              <a:buNone/>
+            </a:pPr>
+            <a:r>
+              <a:rPr lang="en-US" sz="1300" dirty="0">
+                <a:solidFill>
+                  <a:srgbClr val="6B6B76"/>
+                </a:solidFill>
+                <a:latin typeface="Calibri" pitchFamily="34" charset="0"/>
+                <a:ea typeface="Calibri" pitchFamily="34" charset="-122"/>
+                <a:cs typeface="Calibri" pitchFamily="34" charset="-120"/>
+              </a:rPr>
+              <a:t>Add-on; sedentary patients or heart failure</a:t>
+            </a:r>
+            <a:endParaRPr lang="en-US" sz="1600" dirty="0"/>
+          </a:p>
+        </p:txBody>
+      </p:sp>
+      <p:sp>
+        <p:nvSpPr>
+          <p:cNvPr id="13" name="Shape 9"/>
+          <p:cNvSpPr/>
+          <p:nvPr/>
+        </p:nvSpPr>
+        <p:spPr>
+          <a:xfrm>
+            <a:off x="6172200" y="1828800"/>
+            <a:ext cx="5532120" cy="4206240"/>
           </a:xfrm>
           <a:prstGeom prst="roundRect">
             <a:avLst>
-              <a:gd name="adj" fmla="val 10000"/>
+              <a:gd name="adj" fmla="val 2609"/>
             </a:avLst>
           </a:prstGeom>
           <a:solidFill>
-            <a:srgbClr val="FFF0F3"/>
+            <a:srgbClr val="590D22"/>
           </a:solidFill>
-          <a:ln w="12700">
-            <a:solidFill>
-              <a:srgbClr val="FBD8DF"/>
-            </a:solidFill>
-            <a:prstDash val="solid"/>
-          </a:ln>
+          <a:ln/>
           <a:effectLst>
             <a:outerShdw sx="100000" sy="100000" kx="0" ky="0" algn="bl" rotWithShape="0" blurRad="127000" dist="50800" dir="5400000">
               <a:srgbClr val="C9A3AC">
@@ -10074,14 +11270,14 @@
       </p:sp>
       <p:sp>
         <p:nvSpPr>
-          <p:cNvPr id="12" name="Shape 8"/>
-          <p:cNvSpPr/>
-          <p:nvPr/>
-        </p:nvSpPr>
-        <p:spPr>
-          <a:xfrm>
-            <a:off x="777240" y="3127248"/>
-            <a:ext cx="512064" cy="512064"/>
+          <p:cNvPr id="14" name="Shape 10"/>
+          <p:cNvSpPr/>
+          <p:nvPr/>
+        </p:nvSpPr>
+        <p:spPr>
+          <a:xfrm>
+            <a:off x="6492240" y="2121408"/>
+            <a:ext cx="822960" cy="822960"/>
           </a:xfrm>
           <a:prstGeom prst="ellipse">
             <a:avLst/>
@@ -10094,7 +11290,7 @@
       </p:sp>
       <p:pic>
         <p:nvPicPr>
-          <p:cNvPr id="13" name="Image 2" descr="preencoded.png">    </p:cNvPr>
+          <p:cNvPr id="15" name="Image 2" descr="preencoded.png">    </p:cNvPr>
           <p:cNvPicPr>
             <a:picLocks noChangeAspect="1"/>
           </p:cNvPicPr>
@@ -10108,8 +11304,8 @@
         </p:blipFill>
         <p:spPr>
           <a:xfrm>
-            <a:off x="905256" y="3255264"/>
-            <a:ext cx="256032" cy="256032"/>
+            <a:off x="6675120" y="2304288"/>
+            <a:ext cx="457200" cy="457200"/>
           </a:xfrm>
           <a:prstGeom prst="rect">
             <a:avLst/>
@@ -10118,423 +11314,256 @@
       </p:pic>
       <p:sp>
         <p:nvSpPr>
-          <p:cNvPr id="14" name="Text 9"/>
-          <p:cNvSpPr/>
-          <p:nvPr/>
-        </p:nvSpPr>
-        <p:spPr>
-          <a:xfrm>
-            <a:off x="1463040" y="2926080"/>
-            <a:ext cx="3291840" cy="914400"/>
-          </a:xfrm>
-          <a:prstGeom prst="rect">
-            <a:avLst/>
-          </a:prstGeom>
-          <a:noFill/>
-          <a:ln/>
-        </p:spPr>
-        <p:txBody>
-          <a:bodyPr wrap="square" lIns="0" tIns="0" rIns="0" bIns="0" rtlCol="0" anchor="ctr"/>
-          <a:lstStyle/>
-          <a:p>
-            <a:pPr algn="l" indent="0" marL="0">
-              <a:buNone/>
-            </a:pPr>
-            <a:r>
-              <a:rPr lang="en-US" sz="1800" b="1" dirty="0">
-                <a:solidFill>
-                  <a:srgbClr val="2B2B33"/>
+          <p:cNvPr id="16" name="Text 11"/>
+          <p:cNvSpPr/>
+          <p:nvPr/>
+        </p:nvSpPr>
+        <p:spPr>
+          <a:xfrm>
+            <a:off x="7452360" y="2194560"/>
+            <a:ext cx="4023360" cy="640080"/>
+          </a:xfrm>
+          <a:prstGeom prst="rect">
+            <a:avLst/>
+          </a:prstGeom>
+          <a:noFill/>
+          <a:ln/>
+        </p:spPr>
+        <p:txBody>
+          <a:bodyPr wrap="square" rtlCol="0" anchor="ctr"/>
+          <a:lstStyle/>
+          <a:p>
+            <a:pPr algn="l" indent="0" marL="0">
+              <a:buNone/>
+            </a:pPr>
+            <a:r>
+              <a:rPr lang="en-US" sz="2300" b="1" dirty="0">
+                <a:solidFill>
+                  <a:srgbClr val="FFFFFF"/>
                 </a:solidFill>
                 <a:latin typeface="Cambria" pitchFamily="34" charset="0"/>
                 <a:ea typeface="Cambria" pitchFamily="34" charset="-122"/>
                 <a:cs typeface="Cambria" pitchFamily="34" charset="-120"/>
               </a:rPr>
-              <a:t>Warfarin (VKA)</a:t>
-            </a:r>
-            <a:endParaRPr lang="en-US" sz="1800" dirty="0"/>
-          </a:p>
-        </p:txBody>
-      </p:sp>
-      <p:sp>
-        <p:nvSpPr>
-          <p:cNvPr id="15" name="Text 10"/>
-          <p:cNvSpPr/>
-          <p:nvPr/>
-        </p:nvSpPr>
-        <p:spPr>
-          <a:xfrm>
-            <a:off x="4846320" y="2926080"/>
-            <a:ext cx="6583680" cy="914400"/>
-          </a:xfrm>
-          <a:prstGeom prst="rect">
-            <a:avLst/>
-          </a:prstGeom>
-          <a:noFill/>
-          <a:ln/>
-        </p:spPr>
-        <p:txBody>
-          <a:bodyPr wrap="square" lIns="0" tIns="0" rIns="0" bIns="0" rtlCol="0" anchor="ctr"/>
+              <a:t>Rhythm Control</a:t>
+            </a:r>
+            <a:endParaRPr lang="en-US" sz="2300" dirty="0"/>
+          </a:p>
+        </p:txBody>
+      </p:sp>
+      <p:sp>
+        <p:nvSpPr>
+          <p:cNvPr id="17" name="Text 12"/>
+          <p:cNvSpPr/>
+          <p:nvPr/>
+        </p:nvSpPr>
+        <p:spPr>
+          <a:xfrm>
+            <a:off x="6583680" y="3200400"/>
+            <a:ext cx="4892040" cy="868680"/>
+          </a:xfrm>
+          <a:prstGeom prst="rect">
+            <a:avLst/>
+          </a:prstGeom>
+          <a:noFill/>
+          <a:ln/>
+        </p:spPr>
+        <p:txBody>
+          <a:bodyPr wrap="square" rtlCol="0" anchor="t"/>
           <a:lstStyle/>
           <a:p>
             <a:pPr algn="l" indent="0" marL="0">
               <a:lnSpc>
-                <a:spcPct val="110000"/>
+                <a:spcPct val="112000"/>
               </a:lnSpc>
               <a:buNone/>
             </a:pPr>
             <a:r>
-              <a:rPr lang="en-US" sz="1450" dirty="0">
-                <a:solidFill>
-                  <a:srgbClr val="6B6B76"/>
+              <a:rPr lang="en-US" sz="1600" b="1" dirty="0">
+                <a:solidFill>
+                  <a:srgbClr val="FF4D6D"/>
+                </a:solidFill>
+                <a:latin typeface="Cambria" pitchFamily="34" charset="0"/>
+                <a:ea typeface="Cambria" pitchFamily="34" charset="-122"/>
+                <a:cs typeface="Cambria" pitchFamily="34" charset="-120"/>
+              </a:rPr>
+              <a:t>Cardioversion
+</a:t>
+            </a:r>
+            <a:pPr algn="l" indent="0" marL="0">
+              <a:lnSpc>
+                <a:spcPct val="112000"/>
+              </a:lnSpc>
+              <a:buNone/>
+            </a:pPr>
+            <a:r>
+              <a:rPr lang="en-US" sz="1300" dirty="0">
+                <a:solidFill>
+                  <a:srgbClr val="FBD8DF"/>
                 </a:solidFill>
                 <a:latin typeface="Calibri" pitchFamily="34" charset="0"/>
                 <a:ea typeface="Calibri" pitchFamily="34" charset="-122"/>
                 <a:cs typeface="Calibri" pitchFamily="34" charset="-120"/>
               </a:rPr>
-              <a:t>For mechanical heart valves and moderate–severe mitral stenosis</a:t>
-            </a:r>
-            <a:endParaRPr lang="en-US" sz="1450" dirty="0"/>
-          </a:p>
-        </p:txBody>
-      </p:sp>
-      <p:sp>
-        <p:nvSpPr>
-          <p:cNvPr id="16" name="Shape 11"/>
-          <p:cNvSpPr/>
-          <p:nvPr/>
-        </p:nvSpPr>
-        <p:spPr>
-          <a:xfrm>
-            <a:off x="502920" y="3977640"/>
-            <a:ext cx="11183112" cy="914400"/>
-          </a:xfrm>
-          <a:prstGeom prst="roundRect">
-            <a:avLst>
-              <a:gd name="adj" fmla="val 10000"/>
-            </a:avLst>
-          </a:prstGeom>
-          <a:solidFill>
-            <a:srgbClr val="FFF0F3"/>
-          </a:solidFill>
-          <a:ln w="12700">
-            <a:solidFill>
-              <a:srgbClr val="FBD8DF"/>
-            </a:solidFill>
-            <a:prstDash val="solid"/>
-          </a:ln>
-          <a:effectLst>
-            <a:outerShdw sx="100000" sy="100000" kx="0" ky="0" algn="bl" rotWithShape="0" blurRad="127000" dist="50800" dir="5400000">
-              <a:srgbClr val="C9A3AC">
-                <a:alpha val="45000"/>
-              </a:srgbClr>
-            </a:outerShdw>
-          </a:effectLst>
-        </p:spPr>
-      </p:sp>
-      <p:sp>
-        <p:nvSpPr>
-          <p:cNvPr id="17" name="Shape 12"/>
-          <p:cNvSpPr/>
-          <p:nvPr/>
-        </p:nvSpPr>
-        <p:spPr>
-          <a:xfrm>
-            <a:off x="777240" y="4178808"/>
-            <a:ext cx="512064" cy="512064"/>
-          </a:xfrm>
-          <a:prstGeom prst="ellipse">
-            <a:avLst/>
-          </a:prstGeom>
-          <a:solidFill>
-            <a:srgbClr val="A4133C"/>
-          </a:solidFill>
-          <a:ln/>
-        </p:spPr>
-      </p:sp>
-      <p:pic>
-        <p:nvPicPr>
-          <p:cNvPr id="18" name="Image 3" descr="preencoded.png">    </p:cNvPr>
-          <p:cNvPicPr>
-            <a:picLocks noChangeAspect="1"/>
-          </p:cNvPicPr>
-          <p:nvPr/>
-        </p:nvPicPr>
-        <p:blipFill>
-          <a:blip r:embed="rId4"/>
-          <a:stretch>
-            <a:fillRect/>
-          </a:stretch>
-        </p:blipFill>
-        <p:spPr>
-          <a:xfrm>
-            <a:off x="905256" y="4306824"/>
-            <a:ext cx="256032" cy="256032"/>
-          </a:xfrm>
-          <a:prstGeom prst="rect">
-            <a:avLst/>
-          </a:prstGeom>
-        </p:spPr>
-      </p:pic>
-      <p:sp>
-        <p:nvSpPr>
-          <p:cNvPr id="19" name="Text 13"/>
-          <p:cNvSpPr/>
-          <p:nvPr/>
-        </p:nvSpPr>
-        <p:spPr>
-          <a:xfrm>
-            <a:off x="1463040" y="3977640"/>
-            <a:ext cx="3291840" cy="914400"/>
-          </a:xfrm>
-          <a:prstGeom prst="rect">
-            <a:avLst/>
-          </a:prstGeom>
-          <a:noFill/>
-          <a:ln/>
-        </p:spPr>
-        <p:txBody>
-          <a:bodyPr wrap="square" lIns="0" tIns="0" rIns="0" bIns="0" rtlCol="0" anchor="ctr"/>
-          <a:lstStyle/>
-          <a:p>
-            <a:pPr algn="l" indent="0" marL="0">
-              <a:buNone/>
-            </a:pPr>
-            <a:r>
-              <a:rPr lang="en-US" sz="1800" b="1" dirty="0">
-                <a:solidFill>
-                  <a:srgbClr val="2B2B33"/>
+              <a:t>DC (electrical) or pharmacological — flecainide, amiodarone</a:t>
+            </a:r>
+            <a:endParaRPr lang="en-US" sz="1600" dirty="0"/>
+          </a:p>
+        </p:txBody>
+      </p:sp>
+      <p:sp>
+        <p:nvSpPr>
+          <p:cNvPr id="18" name="Text 13"/>
+          <p:cNvSpPr/>
+          <p:nvPr/>
+        </p:nvSpPr>
+        <p:spPr>
+          <a:xfrm>
+            <a:off x="6583680" y="4114800"/>
+            <a:ext cx="4892040" cy="868680"/>
+          </a:xfrm>
+          <a:prstGeom prst="rect">
+            <a:avLst/>
+          </a:prstGeom>
+          <a:noFill/>
+          <a:ln/>
+        </p:spPr>
+        <p:txBody>
+          <a:bodyPr wrap="square" rtlCol="0" anchor="t"/>
+          <a:lstStyle/>
+          <a:p>
+            <a:pPr algn="l" indent="0" marL="0">
+              <a:lnSpc>
+                <a:spcPct val="112000"/>
+              </a:lnSpc>
+              <a:buNone/>
+            </a:pPr>
+            <a:r>
+              <a:rPr lang="en-US" sz="1600" b="1" dirty="0">
+                <a:solidFill>
+                  <a:srgbClr val="FF4D6D"/>
                 </a:solidFill>
                 <a:latin typeface="Cambria" pitchFamily="34" charset="0"/>
                 <a:ea typeface="Cambria" pitchFamily="34" charset="-122"/>
                 <a:cs typeface="Cambria" pitchFamily="34" charset="-120"/>
               </a:rPr>
-              <a:t>LAA occlusion</a:t>
-            </a:r>
-            <a:endParaRPr lang="en-US" sz="1800" dirty="0"/>
-          </a:p>
-        </p:txBody>
-      </p:sp>
-      <p:sp>
-        <p:nvSpPr>
-          <p:cNvPr id="20" name="Text 14"/>
-          <p:cNvSpPr/>
-          <p:nvPr/>
-        </p:nvSpPr>
-        <p:spPr>
-          <a:xfrm>
-            <a:off x="4846320" y="3977640"/>
-            <a:ext cx="6583680" cy="914400"/>
-          </a:xfrm>
-          <a:prstGeom prst="rect">
-            <a:avLst/>
-          </a:prstGeom>
-          <a:noFill/>
-          <a:ln/>
-        </p:spPr>
-        <p:txBody>
-          <a:bodyPr wrap="square" lIns="0" tIns="0" rIns="0" bIns="0" rtlCol="0" anchor="ctr"/>
-          <a:lstStyle/>
-          <a:p>
+              <a:t>Antiarrhythmic drugs
+</a:t>
+            </a:r>
             <a:pPr algn="l" indent="0" marL="0">
               <a:lnSpc>
-                <a:spcPct val="110000"/>
+                <a:spcPct val="112000"/>
               </a:lnSpc>
               <a:buNone/>
             </a:pPr>
             <a:r>
-              <a:rPr lang="en-US" sz="1450" dirty="0">
-                <a:solidFill>
-                  <a:srgbClr val="6B6B76"/>
+              <a:rPr lang="en-US" sz="1300" dirty="0">
+                <a:solidFill>
+                  <a:srgbClr val="FBD8DF"/>
                 </a:solidFill>
                 <a:latin typeface="Calibri" pitchFamily="34" charset="0"/>
                 <a:ea typeface="Calibri" pitchFamily="34" charset="-122"/>
                 <a:cs typeface="Calibri" pitchFamily="34" charset="-120"/>
               </a:rPr>
-              <a:t>Device closure when long-term anticoagulation is contraindicated</a:t>
-            </a:r>
-            <a:endParaRPr lang="en-US" sz="1450" dirty="0"/>
-          </a:p>
-        </p:txBody>
-      </p:sp>
-      <p:sp>
-        <p:nvSpPr>
-          <p:cNvPr id="21" name="Shape 15"/>
-          <p:cNvSpPr/>
-          <p:nvPr/>
-        </p:nvSpPr>
-        <p:spPr>
-          <a:xfrm>
-            <a:off x="502920" y="5120640"/>
-            <a:ext cx="11183112" cy="914400"/>
-          </a:xfrm>
-          <a:prstGeom prst="roundRect">
-            <a:avLst>
-              <a:gd name="adj" fmla="val 10000"/>
-            </a:avLst>
-          </a:prstGeom>
-          <a:solidFill>
-            <a:srgbClr val="590D22"/>
-          </a:solidFill>
-          <a:ln/>
-          <a:effectLst>
-            <a:outerShdw sx="100000" sy="100000" kx="0" ky="0" algn="bl" rotWithShape="0" blurRad="127000" dist="50800" dir="5400000">
-              <a:srgbClr val="C9A3AC">
-                <a:alpha val="45000"/>
-              </a:srgbClr>
-            </a:outerShdw>
-          </a:effectLst>
-        </p:spPr>
-      </p:sp>
-      <p:pic>
-        <p:nvPicPr>
-          <p:cNvPr id="22" name="Image 4" descr="preencoded.png">    </p:cNvPr>
-          <p:cNvPicPr>
-            <a:picLocks noChangeAspect="1"/>
-          </p:cNvPicPr>
-          <p:nvPr/>
-        </p:nvPicPr>
-        <p:blipFill>
-          <a:blip r:embed="rId5"/>
-          <a:stretch>
-            <a:fillRect/>
-          </a:stretch>
-        </p:blipFill>
-        <p:spPr>
-          <a:xfrm>
-            <a:off x="868680" y="5394960"/>
-            <a:ext cx="384048" cy="384048"/>
-          </a:xfrm>
-          <a:prstGeom prst="rect">
-            <a:avLst/>
-          </a:prstGeom>
-        </p:spPr>
-      </p:pic>
-      <p:sp>
-        <p:nvSpPr>
-          <p:cNvPr id="23" name="Text 16"/>
-          <p:cNvSpPr/>
-          <p:nvPr/>
-        </p:nvSpPr>
-        <p:spPr>
-          <a:xfrm>
-            <a:off x="1463040" y="5120640"/>
-            <a:ext cx="9966960" cy="914400"/>
-          </a:xfrm>
-          <a:prstGeom prst="rect">
-            <a:avLst/>
-          </a:prstGeom>
-          <a:noFill/>
-          <a:ln/>
-        </p:spPr>
-        <p:txBody>
-          <a:bodyPr wrap="square" rtlCol="0" anchor="ctr"/>
+              <a:t>Flecainide/propafenone (no structural disease), amiodarone, sotalol</a:t>
+            </a:r>
+            <a:endParaRPr lang="en-US" sz="1600" dirty="0"/>
+          </a:p>
+        </p:txBody>
+      </p:sp>
+      <p:sp>
+        <p:nvSpPr>
+          <p:cNvPr id="19" name="Text 14"/>
+          <p:cNvSpPr/>
+          <p:nvPr/>
+        </p:nvSpPr>
+        <p:spPr>
+          <a:xfrm>
+            <a:off x="6583680" y="5029200"/>
+            <a:ext cx="4892040" cy="868680"/>
+          </a:xfrm>
+          <a:prstGeom prst="rect">
+            <a:avLst/>
+          </a:prstGeom>
+          <a:noFill/>
+          <a:ln/>
+        </p:spPr>
+        <p:txBody>
+          <a:bodyPr wrap="square" rtlCol="0" anchor="t"/>
           <a:lstStyle/>
           <a:p>
             <a:pPr algn="l" indent="0" marL="0">
               <a:lnSpc>
-                <a:spcPct val="110000"/>
+                <a:spcPct val="112000"/>
               </a:lnSpc>
               <a:buNone/>
             </a:pPr>
             <a:r>
-              <a:rPr lang="en-US" sz="1450" b="1" dirty="0">
+              <a:rPr lang="en-US" sz="1600" b="1" dirty="0">
                 <a:solidFill>
                   <a:srgbClr val="FF4D6D"/>
+                </a:solidFill>
+                <a:latin typeface="Cambria" pitchFamily="34" charset="0"/>
+                <a:ea typeface="Cambria" pitchFamily="34" charset="-122"/>
+                <a:cs typeface="Cambria" pitchFamily="34" charset="-120"/>
+              </a:rPr>
+              <a:t>Catheter ablation
+</a:t>
+            </a:r>
+            <a:pPr algn="l" indent="0" marL="0">
+              <a:lnSpc>
+                <a:spcPct val="112000"/>
+              </a:lnSpc>
+              <a:buNone/>
+            </a:pPr>
+            <a:r>
+              <a:rPr lang="en-US" sz="1300" dirty="0">
+                <a:solidFill>
+                  <a:srgbClr val="FBD8DF"/>
                 </a:solidFill>
                 <a:latin typeface="Calibri" pitchFamily="34" charset="0"/>
                 <a:ea typeface="Calibri" pitchFamily="34" charset="-122"/>
                 <a:cs typeface="Calibri" pitchFamily="34" charset="-120"/>
               </a:rPr>
-              <a:t>Remember:  </a:t>
-            </a:r>
-            <a:pPr algn="l" indent="0" marL="0">
-              <a:lnSpc>
-                <a:spcPct val="110000"/>
-              </a:lnSpc>
-              <a:buNone/>
-            </a:pPr>
-            <a:r>
-              <a:rPr lang="en-US" sz="1450" dirty="0">
-                <a:solidFill>
-                  <a:srgbClr val="FBD8DF"/>
+              <a:t>Pulmonary vein isolation for refractory cases</a:t>
+            </a:r>
+            <a:endParaRPr lang="en-US" sz="1600" dirty="0"/>
+          </a:p>
+        </p:txBody>
+      </p:sp>
+      <p:sp>
+        <p:nvSpPr>
+          <p:cNvPr id="20" name="Text 15"/>
+          <p:cNvSpPr/>
+          <p:nvPr/>
+        </p:nvSpPr>
+        <p:spPr>
+          <a:xfrm>
+            <a:off x="11277295" y="6355080"/>
+            <a:ext cx="548640" cy="320040"/>
+          </a:xfrm>
+          <a:prstGeom prst="rect">
+            <a:avLst/>
+          </a:prstGeom>
+          <a:noFill/>
+          <a:ln/>
+        </p:spPr>
+        <p:txBody>
+          <a:bodyPr wrap="square" rtlCol="0" anchor="t"/>
+          <a:lstStyle/>
+          <a:p>
+            <a:pPr algn="r" indent="0" marL="0">
+              <a:buNone/>
+            </a:pPr>
+            <a:r>
+              <a:rPr lang="en-US" sz="1100" b="1" dirty="0">
+                <a:solidFill>
+                  <a:srgbClr val="6B6B76"/>
                 </a:solidFill>
                 <a:latin typeface="Calibri" pitchFamily="34" charset="0"/>
                 <a:ea typeface="Calibri" pitchFamily="34" charset="-122"/>
                 <a:cs typeface="Calibri" pitchFamily="34" charset="-120"/>
               </a:rPr>
-              <a:t>base the decision on CHA₂DS₂-VASc, weigh bleeding risk (HAS-BLED), and note that antiplatelets alone are </a:t>
-            </a:r>
-            <a:pPr algn="l" indent="0" marL="0">
-              <a:lnSpc>
-                <a:spcPct val="110000"/>
-              </a:lnSpc>
-              <a:buNone/>
-            </a:pPr>
-            <a:r>
-              <a:rPr lang="en-US" sz="1450" b="1" dirty="0">
-                <a:solidFill>
-                  <a:srgbClr val="FFFFFF"/>
-                </a:solidFill>
-                <a:latin typeface="Calibri" pitchFamily="34" charset="0"/>
-                <a:ea typeface="Calibri" pitchFamily="34" charset="-122"/>
-                <a:cs typeface="Calibri" pitchFamily="34" charset="-120"/>
-              </a:rPr>
-              <a:t>not</a:t>
-            </a:r>
-            <a:pPr algn="l" indent="0" marL="0">
-              <a:lnSpc>
-                <a:spcPct val="110000"/>
-              </a:lnSpc>
-              <a:buNone/>
-            </a:pPr>
-            <a:r>
-              <a:rPr lang="en-US" sz="1450" dirty="0">
-                <a:solidFill>
-                  <a:srgbClr val="FBD8DF"/>
-                </a:solidFill>
-                <a:latin typeface="Calibri" pitchFamily="34" charset="0"/>
-                <a:ea typeface="Calibri" pitchFamily="34" charset="-122"/>
-                <a:cs typeface="Calibri" pitchFamily="34" charset="-120"/>
-              </a:rPr>
-              <a:t> adequate stroke prevention.</a:t>
-            </a:r>
-            <a:endParaRPr lang="en-US" sz="1450" dirty="0"/>
-          </a:p>
-        </p:txBody>
-      </p:sp>
-      <p:sp>
-        <p:nvSpPr>
-          <p:cNvPr id="24" name="Text 17"/>
-          <p:cNvSpPr/>
-          <p:nvPr/>
-        </p:nvSpPr>
-        <p:spPr>
-          <a:xfrm>
-            <a:off x="11277295" y="6355080"/>
-            <a:ext cx="548640" cy="320040"/>
-          </a:xfrm>
-          <a:prstGeom prst="rect">
-            <a:avLst/>
-          </a:prstGeom>
-          <a:noFill/>
-          <a:ln/>
-        </p:spPr>
-        <p:txBody>
-          <a:bodyPr wrap="square" rtlCol="0" anchor="t"/>
-          <a:lstStyle/>
-          <a:p>
-            <a:pPr algn="r" indent="0" marL="0">
-              <a:buNone/>
-            </a:pPr>
-            <a:r>
-              <a:rPr lang="en-US" sz="1100" b="1" dirty="0">
-                <a:solidFill>
-                  <a:srgbClr val="6B6B76"/>
-                </a:solidFill>
-                <a:latin typeface="Calibri" pitchFamily="34" charset="0"/>
-                <a:ea typeface="Calibri" pitchFamily="34" charset="-122"/>
-                <a:cs typeface="Calibri" pitchFamily="34" charset="-120"/>
-              </a:rPr>
               <a:t>15</a:t>
             </a:r>
             <a:endParaRPr lang="en-US" sz="1100" dirty="0"/>
@@ -10543,7 +11572,7 @@
       </p:sp>
       <p:sp>
         <p:nvSpPr>
-          <p:cNvPr id="25" name="Text 18"/>
+          <p:cNvPr id="21" name="Text 16"/>
           <p:cNvSpPr/>
           <p:nvPr/>
         </p:nvSpPr>
@@ -10694,7 +11723,7 @@
                 <a:ea typeface="Calibri" pitchFamily="34" charset="-122"/>
                 <a:cs typeface="Calibri" pitchFamily="34" charset="-120"/>
               </a:rPr>
-              <a:t>SPECIAL POPULATIONS · PREGNANCY</a:t>
+              <a:t>STROKE PREVENTION</a:t>
             </a:r>
             <a:endParaRPr lang="en-US" sz="1250" dirty="0"/>
           </a:p>
@@ -10733,7 +11762,7 @@
                 <a:ea typeface="Cambria" pitchFamily="34" charset="-122"/>
                 <a:cs typeface="Cambria" pitchFamily="34" charset="-120"/>
               </a:rPr>
-              <a:t>Anticoagulation in Pregnancy</a:t>
+              <a:t>Anticoagulation</a:t>
             </a:r>
             <a:endParaRPr lang="en-US" sz="3000" dirty="0"/>
           </a:p>
@@ -10747,12 +11776,12 @@
         </p:nvSpPr>
         <p:spPr>
           <a:xfrm>
-            <a:off x="502920" y="1783080"/>
-            <a:ext cx="5532120" cy="2971800"/>
+            <a:off x="502920" y="1874520"/>
+            <a:ext cx="11183112" cy="914400"/>
           </a:xfrm>
           <a:prstGeom prst="roundRect">
             <a:avLst>
-              <a:gd name="adj" fmla="val 3692"/>
+              <a:gd name="adj" fmla="val 10000"/>
             </a:avLst>
           </a:prstGeom>
           <a:solidFill>
@@ -10775,67 +11804,14 @@
       </p:sp>
       <p:sp>
         <p:nvSpPr>
-          <p:cNvPr id="7" name="Text 4"/>
-          <p:cNvSpPr/>
-          <p:nvPr/>
-        </p:nvSpPr>
-        <p:spPr>
-          <a:xfrm>
-            <a:off x="822960" y="2011680"/>
-            <a:ext cx="4846320" cy="274320"/>
-          </a:xfrm>
-          <a:prstGeom prst="rect">
-            <a:avLst/>
-          </a:prstGeom>
-          <a:noFill/>
-          <a:ln/>
-        </p:spPr>
-        <p:txBody>
-          <a:bodyPr wrap="square" rtlCol="0" anchor="t"/>
-          <a:lstStyle/>
-          <a:p>
-            <a:pPr algn="l" indent="0" marL="0">
-              <a:buNone/>
-            </a:pPr>
-            <a:r>
-              <a:rPr lang="en-US" sz="1300" b="1" spc="150" kern="0" dirty="0">
-                <a:solidFill>
-                  <a:srgbClr val="2E7D32"/>
-                </a:solidFill>
-                <a:latin typeface="Calibri" pitchFamily="34" charset="0"/>
-                <a:ea typeface="Calibri" pitchFamily="34" charset="-122"/>
-                <a:cs typeface="Calibri" pitchFamily="34" charset="-120"/>
-              </a:rPr>
-              <a:t>✓  </a:t>
-            </a:r>
-            <a:pPr algn="l" indent="0" marL="0">
-              <a:buNone/>
-            </a:pPr>
-            <a:r>
-              <a:rPr lang="en-US" sz="1300" b="1" spc="150" kern="0" dirty="0">
-                <a:solidFill>
-                  <a:srgbClr val="2E7D32"/>
-                </a:solidFill>
-                <a:latin typeface="Calibri" pitchFamily="34" charset="0"/>
-                <a:ea typeface="Calibri" pitchFamily="34" charset="-122"/>
-                <a:cs typeface="Calibri" pitchFamily="34" charset="-120"/>
-              </a:rPr>
-              <a:t>PREFERRED</a:t>
-            </a:r>
-            <a:endParaRPr lang="en-US" sz="1300" dirty="0"/>
-          </a:p>
-        </p:txBody>
-      </p:sp>
-      <p:sp>
-        <p:nvSpPr>
-          <p:cNvPr id="8" name="Shape 5"/>
-          <p:cNvSpPr/>
-          <p:nvPr/>
-        </p:nvSpPr>
-        <p:spPr>
-          <a:xfrm>
-            <a:off x="822960" y="2395728"/>
-            <a:ext cx="548640" cy="548640"/>
+          <p:cNvPr id="7" name="Shape 4"/>
+          <p:cNvSpPr/>
+          <p:nvPr/>
+        </p:nvSpPr>
+        <p:spPr>
+          <a:xfrm>
+            <a:off x="777240" y="2075688"/>
+            <a:ext cx="512064" cy="512064"/>
           </a:xfrm>
           <a:prstGeom prst="ellipse">
             <a:avLst/>
@@ -10848,7 +11824,7 @@
       </p:sp>
       <p:pic>
         <p:nvPicPr>
-          <p:cNvPr id="9" name="Image 1" descr="preencoded.png">    </p:cNvPr>
+          <p:cNvPr id="8" name="Image 1" descr="preencoded.png">    </p:cNvPr>
           <p:cNvPicPr>
             <a:picLocks noChangeAspect="1"/>
           </p:cNvPicPr>
@@ -10862,8 +11838,8 @@
         </p:blipFill>
         <p:spPr>
           <a:xfrm>
-            <a:off x="960120" y="2551176"/>
-            <a:ext cx="283464" cy="246888"/>
+            <a:off x="905256" y="2203704"/>
+            <a:ext cx="256032" cy="256032"/>
           </a:xfrm>
           <a:prstGeom prst="rect">
             <a:avLst/>
@@ -10872,30 +11848,30 @@
       </p:pic>
       <p:sp>
         <p:nvSpPr>
-          <p:cNvPr id="10" name="Text 6"/>
-          <p:cNvSpPr/>
-          <p:nvPr/>
-        </p:nvSpPr>
-        <p:spPr>
-          <a:xfrm>
-            <a:off x="1508760" y="2350008"/>
-            <a:ext cx="4343400" cy="365760"/>
-          </a:xfrm>
-          <a:prstGeom prst="rect">
-            <a:avLst/>
-          </a:prstGeom>
-          <a:noFill/>
-          <a:ln/>
-        </p:spPr>
-        <p:txBody>
-          <a:bodyPr wrap="square" lIns="0" tIns="0" rIns="0" bIns="0" rtlCol="0" anchor="t"/>
-          <a:lstStyle/>
-          <a:p>
-            <a:pPr algn="l" indent="0" marL="0">
-              <a:buNone/>
-            </a:pPr>
-            <a:r>
-              <a:rPr lang="en-US" sz="1650" b="1" dirty="0">
+          <p:cNvPr id="9" name="Text 5"/>
+          <p:cNvSpPr/>
+          <p:nvPr/>
+        </p:nvSpPr>
+        <p:spPr>
+          <a:xfrm>
+            <a:off x="1463040" y="1874520"/>
+            <a:ext cx="3291840" cy="914400"/>
+          </a:xfrm>
+          <a:prstGeom prst="rect">
+            <a:avLst/>
+          </a:prstGeom>
+          <a:noFill/>
+          <a:ln/>
+        </p:spPr>
+        <p:txBody>
+          <a:bodyPr wrap="square" lIns="0" tIns="0" rIns="0" bIns="0" rtlCol="0" anchor="ctr"/>
+          <a:lstStyle/>
+          <a:p>
+            <a:pPr algn="l" indent="0" marL="0">
+              <a:buNone/>
+            </a:pPr>
+            <a:r>
+              <a:rPr lang="en-US" sz="1800" b="1" dirty="0">
                 <a:solidFill>
                   <a:srgbClr val="2B2B33"/>
                 </a:solidFill>
@@ -10903,41 +11879,41 @@
                 <a:ea typeface="Cambria" pitchFamily="34" charset="-122"/>
                 <a:cs typeface="Cambria" pitchFamily="34" charset="-120"/>
               </a:rPr>
-              <a:t>LMWH (enoxaparin)</a:t>
-            </a:r>
-            <a:endParaRPr lang="en-US" sz="1650" dirty="0"/>
-          </a:p>
-        </p:txBody>
-      </p:sp>
-      <p:sp>
-        <p:nvSpPr>
-          <p:cNvPr id="11" name="Text 7"/>
-          <p:cNvSpPr/>
-          <p:nvPr/>
-        </p:nvSpPr>
-        <p:spPr>
-          <a:xfrm>
-            <a:off x="1508760" y="2706624"/>
-            <a:ext cx="4389120" cy="685800"/>
-          </a:xfrm>
-          <a:prstGeom prst="rect">
-            <a:avLst/>
-          </a:prstGeom>
-          <a:noFill/>
-          <a:ln/>
-        </p:spPr>
-        <p:txBody>
-          <a:bodyPr wrap="square" lIns="0" tIns="0" rIns="0" bIns="0" rtlCol="0" anchor="t"/>
+              <a:t>DOACs — first-line</a:t>
+            </a:r>
+            <a:endParaRPr lang="en-US" sz="1800" dirty="0"/>
+          </a:p>
+        </p:txBody>
+      </p:sp>
+      <p:sp>
+        <p:nvSpPr>
+          <p:cNvPr id="10" name="Text 6"/>
+          <p:cNvSpPr/>
+          <p:nvPr/>
+        </p:nvSpPr>
+        <p:spPr>
+          <a:xfrm>
+            <a:off x="4846320" y="1874520"/>
+            <a:ext cx="6583680" cy="914400"/>
+          </a:xfrm>
+          <a:prstGeom prst="rect">
+            <a:avLst/>
+          </a:prstGeom>
+          <a:noFill/>
+          <a:ln/>
+        </p:spPr>
+        <p:txBody>
+          <a:bodyPr wrap="square" lIns="0" tIns="0" rIns="0" bIns="0" rtlCol="0" anchor="ctr"/>
           <a:lstStyle/>
           <a:p>
             <a:pPr algn="l" indent="0" marL="0">
               <a:lnSpc>
-                <a:spcPct val="108000"/>
+                <a:spcPct val="110000"/>
               </a:lnSpc>
               <a:buNone/>
             </a:pPr>
             <a:r>
-              <a:rPr lang="en-US" sz="1250" dirty="0">
+              <a:rPr lang="en-US" sz="1450" dirty="0">
                 <a:solidFill>
                   <a:srgbClr val="6B6B76"/>
                 </a:solidFill>
@@ -10945,11 +11921,45 @@
                 <a:ea typeface="Calibri" pitchFamily="34" charset="-122"/>
                 <a:cs typeface="Calibri" pitchFamily="34" charset="-120"/>
               </a:rPr>
-              <a:t>Does not cross the placenta — the agent of choice; weight-adjusted, monitor anti-Xa</a:t>
-            </a:r>
-            <a:endParaRPr lang="en-US" sz="1250" dirty="0"/>
-          </a:p>
-        </p:txBody>
+              <a:t>Apixaban, rivaroxaban, dabigatran, edoxaban — preferred for most patients</a:t>
+            </a:r>
+            <a:endParaRPr lang="en-US" sz="1450" dirty="0"/>
+          </a:p>
+        </p:txBody>
+      </p:sp>
+      <p:sp>
+        <p:nvSpPr>
+          <p:cNvPr id="11" name="Shape 7"/>
+          <p:cNvSpPr/>
+          <p:nvPr/>
+        </p:nvSpPr>
+        <p:spPr>
+          <a:xfrm>
+            <a:off x="502920" y="2926080"/>
+            <a:ext cx="11183112" cy="914400"/>
+          </a:xfrm>
+          <a:prstGeom prst="roundRect">
+            <a:avLst>
+              <a:gd name="adj" fmla="val 10000"/>
+            </a:avLst>
+          </a:prstGeom>
+          <a:solidFill>
+            <a:srgbClr val="FFF0F3"/>
+          </a:solidFill>
+          <a:ln w="12700">
+            <a:solidFill>
+              <a:srgbClr val="FBD8DF"/>
+            </a:solidFill>
+            <a:prstDash val="solid"/>
+          </a:ln>
+          <a:effectLst>
+            <a:outerShdw sx="100000" sy="100000" kx="0" ky="0" algn="bl" rotWithShape="0" blurRad="127000" dist="50800" dir="5400000">
+              <a:srgbClr val="C9A3AC">
+                <a:alpha val="45000"/>
+              </a:srgbClr>
+            </a:outerShdw>
+          </a:effectLst>
+        </p:spPr>
       </p:sp>
       <p:sp>
         <p:nvSpPr>
@@ -10959,14 +11969,14 @@
         </p:nvSpPr>
         <p:spPr>
           <a:xfrm>
-            <a:off x="822960" y="3511296"/>
-            <a:ext cx="548640" cy="548640"/>
+            <a:off x="777240" y="3127248"/>
+            <a:ext cx="512064" cy="512064"/>
           </a:xfrm>
           <a:prstGeom prst="ellipse">
             <a:avLst/>
           </a:prstGeom>
           <a:solidFill>
-            <a:srgbClr val="2E7D32"/>
+            <a:srgbClr val="A4133C"/>
           </a:solidFill>
           <a:ln/>
         </p:spPr>
@@ -10987,8 +11997,8 @@
         </p:blipFill>
         <p:spPr>
           <a:xfrm>
-            <a:off x="960120" y="3666744"/>
-            <a:ext cx="283464" cy="246888"/>
+            <a:off x="905256" y="3255264"/>
+            <a:ext cx="256032" cy="256032"/>
           </a:xfrm>
           <a:prstGeom prst="rect">
             <a:avLst/>
@@ -11003,24 +12013,24 @@
         </p:nvSpPr>
         <p:spPr>
           <a:xfrm>
-            <a:off x="1508760" y="3465576"/>
-            <a:ext cx="4343400" cy="365760"/>
-          </a:xfrm>
-          <a:prstGeom prst="rect">
-            <a:avLst/>
-          </a:prstGeom>
-          <a:noFill/>
-          <a:ln/>
-        </p:spPr>
-        <p:txBody>
-          <a:bodyPr wrap="square" lIns="0" tIns="0" rIns="0" bIns="0" rtlCol="0" anchor="t"/>
-          <a:lstStyle/>
-          <a:p>
-            <a:pPr algn="l" indent="0" marL="0">
-              <a:buNone/>
-            </a:pPr>
-            <a:r>
-              <a:rPr lang="en-US" sz="1650" b="1" dirty="0">
+            <a:off x="1463040" y="2926080"/>
+            <a:ext cx="3291840" cy="914400"/>
+          </a:xfrm>
+          <a:prstGeom prst="rect">
+            <a:avLst/>
+          </a:prstGeom>
+          <a:noFill/>
+          <a:ln/>
+        </p:spPr>
+        <p:txBody>
+          <a:bodyPr wrap="square" lIns="0" tIns="0" rIns="0" bIns="0" rtlCol="0" anchor="ctr"/>
+          <a:lstStyle/>
+          <a:p>
+            <a:pPr algn="l" indent="0" marL="0">
+              <a:buNone/>
+            </a:pPr>
+            <a:r>
+              <a:rPr lang="en-US" sz="1800" b="1" dirty="0">
                 <a:solidFill>
                   <a:srgbClr val="2B2B33"/>
                 </a:solidFill>
@@ -11028,9 +12038,9 @@
                 <a:ea typeface="Cambria" pitchFamily="34" charset="-122"/>
                 <a:cs typeface="Cambria" pitchFamily="34" charset="-120"/>
               </a:rPr>
-              <a:t>Unfractionated heparin</a:t>
-            </a:r>
-            <a:endParaRPr lang="en-US" sz="1650" dirty="0"/>
+              <a:t>Warfarin (VKA)</a:t>
+            </a:r>
+            <a:endParaRPr lang="en-US" sz="1800" dirty="0"/>
           </a:p>
         </p:txBody>
       </p:sp>
@@ -11042,27 +12052,27 @@
         </p:nvSpPr>
         <p:spPr>
           <a:xfrm>
-            <a:off x="1508760" y="3822192"/>
-            <a:ext cx="4389120" cy="685800"/>
-          </a:xfrm>
-          <a:prstGeom prst="rect">
-            <a:avLst/>
-          </a:prstGeom>
-          <a:noFill/>
-          <a:ln/>
-        </p:spPr>
-        <p:txBody>
-          <a:bodyPr wrap="square" lIns="0" tIns="0" rIns="0" bIns="0" rtlCol="0" anchor="t"/>
+            <a:off x="4846320" y="2926080"/>
+            <a:ext cx="6583680" cy="914400"/>
+          </a:xfrm>
+          <a:prstGeom prst="rect">
+            <a:avLst/>
+          </a:prstGeom>
+          <a:noFill/>
+          <a:ln/>
+        </p:spPr>
+        <p:txBody>
+          <a:bodyPr wrap="square" lIns="0" tIns="0" rIns="0" bIns="0" rtlCol="0" anchor="ctr"/>
           <a:lstStyle/>
           <a:p>
             <a:pPr algn="l" indent="0" marL="0">
               <a:lnSpc>
-                <a:spcPct val="108000"/>
+                <a:spcPct val="110000"/>
               </a:lnSpc>
               <a:buNone/>
             </a:pPr>
             <a:r>
-              <a:rPr lang="en-US" sz="1250" dirty="0">
+              <a:rPr lang="en-US" sz="1450" dirty="0">
                 <a:solidFill>
                   <a:srgbClr val="6B6B76"/>
                 </a:solidFill>
@@ -11070,9 +12080,9 @@
                 <a:ea typeface="Calibri" pitchFamily="34" charset="-122"/>
                 <a:cs typeface="Calibri" pitchFamily="34" charset="-120"/>
               </a:rPr>
-              <a:t>Also placenta-safe; useful peri-delivery — short-acting &amp; reversible</a:t>
-            </a:r>
-            <a:endParaRPr lang="en-US" sz="1250" dirty="0"/>
+              <a:t>For mechanical heart valves and moderate–severe mitral stenosis</a:t>
+            </a:r>
+            <a:endParaRPr lang="en-US" sz="1450" dirty="0"/>
           </a:p>
         </p:txBody>
       </p:sp>
@@ -11084,18 +12094,23 @@
         </p:nvSpPr>
         <p:spPr>
           <a:xfrm>
-            <a:off x="6172200" y="1783080"/>
-            <a:ext cx="5532120" cy="2971800"/>
+            <a:off x="502920" y="3977640"/>
+            <a:ext cx="11183112" cy="914400"/>
           </a:xfrm>
           <a:prstGeom prst="roundRect">
             <a:avLst>
-              <a:gd name="adj" fmla="val 3692"/>
+              <a:gd name="adj" fmla="val 10000"/>
             </a:avLst>
           </a:prstGeom>
           <a:solidFill>
-            <a:srgbClr val="590D22"/>
+            <a:srgbClr val="FFF0F3"/>
           </a:solidFill>
-          <a:ln/>
+          <a:ln w="12700">
+            <a:solidFill>
+              <a:srgbClr val="FBD8DF"/>
+            </a:solidFill>
+            <a:prstDash val="solid"/>
+          </a:ln>
           <a:effectLst>
             <a:outerShdw sx="100000" sy="100000" kx="0" ky="0" algn="bl" rotWithShape="0" blurRad="127000" dist="50800" dir="5400000">
               <a:srgbClr val="C9A3AC">
@@ -11107,67 +12122,14 @@
       </p:sp>
       <p:sp>
         <p:nvSpPr>
-          <p:cNvPr id="17" name="Text 12"/>
-          <p:cNvSpPr/>
-          <p:nvPr/>
-        </p:nvSpPr>
-        <p:spPr>
-          <a:xfrm>
-            <a:off x="6492240" y="2011680"/>
-            <a:ext cx="4846320" cy="274320"/>
-          </a:xfrm>
-          <a:prstGeom prst="rect">
-            <a:avLst/>
-          </a:prstGeom>
-          <a:noFill/>
-          <a:ln/>
-        </p:spPr>
-        <p:txBody>
-          <a:bodyPr wrap="square" rtlCol="0" anchor="t"/>
-          <a:lstStyle/>
-          <a:p>
-            <a:pPr algn="l" indent="0" marL="0">
-              <a:buNone/>
-            </a:pPr>
-            <a:r>
-              <a:rPr lang="en-US" sz="1300" b="1" spc="150" kern="0" dirty="0">
-                <a:solidFill>
-                  <a:srgbClr val="FF4D6D"/>
-                </a:solidFill>
-                <a:latin typeface="Calibri" pitchFamily="34" charset="0"/>
-                <a:ea typeface="Calibri" pitchFamily="34" charset="-122"/>
-                <a:cs typeface="Calibri" pitchFamily="34" charset="-120"/>
-              </a:rPr>
-              <a:t>✕  </a:t>
-            </a:r>
-            <a:pPr algn="l" indent="0" marL="0">
-              <a:buNone/>
-            </a:pPr>
-            <a:r>
-              <a:rPr lang="en-US" sz="1300" b="1" spc="150" kern="0" dirty="0">
-                <a:solidFill>
-                  <a:srgbClr val="FFFFFF"/>
-                </a:solidFill>
-                <a:latin typeface="Calibri" pitchFamily="34" charset="0"/>
-                <a:ea typeface="Calibri" pitchFamily="34" charset="-122"/>
-                <a:cs typeface="Calibri" pitchFamily="34" charset="-120"/>
-              </a:rPr>
-              <a:t>AVOID</a:t>
-            </a:r>
-            <a:endParaRPr lang="en-US" sz="1300" dirty="0"/>
-          </a:p>
-        </p:txBody>
-      </p:sp>
-      <p:sp>
-        <p:nvSpPr>
-          <p:cNvPr id="18" name="Shape 13"/>
-          <p:cNvSpPr/>
-          <p:nvPr/>
-        </p:nvSpPr>
-        <p:spPr>
-          <a:xfrm>
-            <a:off x="6492240" y="2395728"/>
-            <a:ext cx="548640" cy="548640"/>
+          <p:cNvPr id="17" name="Shape 12"/>
+          <p:cNvSpPr/>
+          <p:nvPr/>
+        </p:nvSpPr>
+        <p:spPr>
+          <a:xfrm>
+            <a:off x="777240" y="4178808"/>
+            <a:ext cx="512064" cy="512064"/>
           </a:xfrm>
           <a:prstGeom prst="ellipse">
             <a:avLst/>
@@ -11180,7 +12142,7 @@
       </p:sp>
       <p:pic>
         <p:nvPicPr>
-          <p:cNvPr id="19" name="Image 3" descr="preencoded.png">    </p:cNvPr>
+          <p:cNvPr id="18" name="Image 3" descr="preencoded.png">    </p:cNvPr>
           <p:cNvPicPr>
             <a:picLocks noChangeAspect="1"/>
           </p:cNvPicPr>
@@ -11194,7 +12156,7 @@
         </p:blipFill>
         <p:spPr>
           <a:xfrm>
-            <a:off x="6638544" y="2551176"/>
+            <a:off x="905256" y="4306824"/>
             <a:ext cx="256032" cy="256032"/>
           </a:xfrm>
           <a:prstGeom prst="rect">
@@ -11204,108 +12166,117 @@
       </p:pic>
       <p:sp>
         <p:nvSpPr>
-          <p:cNvPr id="20" name="Text 14"/>
-          <p:cNvSpPr/>
-          <p:nvPr/>
-        </p:nvSpPr>
-        <p:spPr>
-          <a:xfrm>
-            <a:off x="7178040" y="2350008"/>
-            <a:ext cx="4297680" cy="365760"/>
-          </a:xfrm>
-          <a:prstGeom prst="rect">
-            <a:avLst/>
-          </a:prstGeom>
-          <a:noFill/>
-          <a:ln/>
-        </p:spPr>
-        <p:txBody>
-          <a:bodyPr wrap="square" lIns="0" tIns="0" rIns="0" bIns="0" rtlCol="0" anchor="t"/>
-          <a:lstStyle/>
-          <a:p>
-            <a:pPr algn="l" indent="0" marL="0">
-              <a:buNone/>
-            </a:pPr>
-            <a:r>
-              <a:rPr lang="en-US" sz="1650" b="1" dirty="0">
-                <a:solidFill>
-                  <a:srgbClr val="FFFFFF"/>
+          <p:cNvPr id="19" name="Text 13"/>
+          <p:cNvSpPr/>
+          <p:nvPr/>
+        </p:nvSpPr>
+        <p:spPr>
+          <a:xfrm>
+            <a:off x="1463040" y="3977640"/>
+            <a:ext cx="3291840" cy="914400"/>
+          </a:xfrm>
+          <a:prstGeom prst="rect">
+            <a:avLst/>
+          </a:prstGeom>
+          <a:noFill/>
+          <a:ln/>
+        </p:spPr>
+        <p:txBody>
+          <a:bodyPr wrap="square" lIns="0" tIns="0" rIns="0" bIns="0" rtlCol="0" anchor="ctr"/>
+          <a:lstStyle/>
+          <a:p>
+            <a:pPr algn="l" indent="0" marL="0">
+              <a:buNone/>
+            </a:pPr>
+            <a:r>
+              <a:rPr lang="en-US" sz="1800" b="1" dirty="0">
+                <a:solidFill>
+                  <a:srgbClr val="2B2B33"/>
                 </a:solidFill>
                 <a:latin typeface="Cambria" pitchFamily="34" charset="0"/>
                 <a:ea typeface="Cambria" pitchFamily="34" charset="-122"/>
                 <a:cs typeface="Cambria" pitchFamily="34" charset="-120"/>
               </a:rPr>
-              <a:t>Warfarin (VKA)</a:t>
-            </a:r>
-            <a:endParaRPr lang="en-US" sz="1650" dirty="0"/>
-          </a:p>
-        </p:txBody>
-      </p:sp>
-      <p:sp>
-        <p:nvSpPr>
-          <p:cNvPr id="21" name="Text 15"/>
-          <p:cNvSpPr/>
-          <p:nvPr/>
-        </p:nvSpPr>
-        <p:spPr>
-          <a:xfrm>
-            <a:off x="7178040" y="2706624"/>
-            <a:ext cx="4343400" cy="685800"/>
-          </a:xfrm>
-          <a:prstGeom prst="rect">
-            <a:avLst/>
-          </a:prstGeom>
-          <a:noFill/>
-          <a:ln/>
-        </p:spPr>
-        <p:txBody>
-          <a:bodyPr wrap="square" lIns="0" tIns="0" rIns="0" bIns="0" rtlCol="0" anchor="t"/>
+              <a:t>LAA occlusion</a:t>
+            </a:r>
+            <a:endParaRPr lang="en-US" sz="1800" dirty="0"/>
+          </a:p>
+        </p:txBody>
+      </p:sp>
+      <p:sp>
+        <p:nvSpPr>
+          <p:cNvPr id="20" name="Text 14"/>
+          <p:cNvSpPr/>
+          <p:nvPr/>
+        </p:nvSpPr>
+        <p:spPr>
+          <a:xfrm>
+            <a:off x="4846320" y="3977640"/>
+            <a:ext cx="6583680" cy="914400"/>
+          </a:xfrm>
+          <a:prstGeom prst="rect">
+            <a:avLst/>
+          </a:prstGeom>
+          <a:noFill/>
+          <a:ln/>
+        </p:spPr>
+        <p:txBody>
+          <a:bodyPr wrap="square" lIns="0" tIns="0" rIns="0" bIns="0" rtlCol="0" anchor="ctr"/>
           <a:lstStyle/>
           <a:p>
             <a:pPr algn="l" indent="0" marL="0">
               <a:lnSpc>
-                <a:spcPct val="108000"/>
+                <a:spcPct val="110000"/>
               </a:lnSpc>
               <a:buNone/>
             </a:pPr>
             <a:r>
-              <a:rPr lang="en-US" sz="1250" dirty="0">
-                <a:solidFill>
-                  <a:srgbClr val="FBD8DF"/>
+              <a:rPr lang="en-US" sz="1450" dirty="0">
+                <a:solidFill>
+                  <a:srgbClr val="6B6B76"/>
                 </a:solidFill>
                 <a:latin typeface="Calibri" pitchFamily="34" charset="0"/>
                 <a:ea typeface="Calibri" pitchFamily="34" charset="-122"/>
                 <a:cs typeface="Calibri" pitchFamily="34" charset="-120"/>
               </a:rPr>
-              <a:t>Teratogenic — embryopathy at weeks 6–12 and fetal bleeding near term</a:t>
-            </a:r>
-            <a:endParaRPr lang="en-US" sz="1250" dirty="0"/>
-          </a:p>
-        </p:txBody>
-      </p:sp>
-      <p:sp>
-        <p:nvSpPr>
-          <p:cNvPr id="22" name="Shape 16"/>
-          <p:cNvSpPr/>
-          <p:nvPr/>
-        </p:nvSpPr>
-        <p:spPr>
-          <a:xfrm>
-            <a:off x="6492240" y="3511296"/>
-            <a:ext cx="548640" cy="548640"/>
-          </a:xfrm>
-          <a:prstGeom prst="ellipse">
-            <a:avLst/>
+              <a:t>Device closure when long-term anticoagulation is contraindicated</a:t>
+            </a:r>
+            <a:endParaRPr lang="en-US" sz="1450" dirty="0"/>
+          </a:p>
+        </p:txBody>
+      </p:sp>
+      <p:sp>
+        <p:nvSpPr>
+          <p:cNvPr id="21" name="Shape 15"/>
+          <p:cNvSpPr/>
+          <p:nvPr/>
+        </p:nvSpPr>
+        <p:spPr>
+          <a:xfrm>
+            <a:off x="502920" y="5120640"/>
+            <a:ext cx="11183112" cy="914400"/>
+          </a:xfrm>
+          <a:prstGeom prst="roundRect">
+            <a:avLst>
+              <a:gd name="adj" fmla="val 10000"/>
+            </a:avLst>
           </a:prstGeom>
           <a:solidFill>
-            <a:srgbClr val="A4133C"/>
+            <a:srgbClr val="590D22"/>
           </a:solidFill>
           <a:ln/>
+          <a:effectLst>
+            <a:outerShdw sx="100000" sy="100000" kx="0" ky="0" algn="bl" rotWithShape="0" blurRad="127000" dist="50800" dir="5400000">
+              <a:srgbClr val="C9A3AC">
+                <a:alpha val="45000"/>
+              </a:srgbClr>
+            </a:outerShdw>
+          </a:effectLst>
         </p:spPr>
       </p:sp>
       <p:pic>
         <p:nvPicPr>
-          <p:cNvPr id="23" name="Image 4" descr="preencoded.png">    </p:cNvPr>
+          <p:cNvPr id="22" name="Image 4" descr="preencoded.png">    </p:cNvPr>
           <p:cNvPicPr>
             <a:picLocks noChangeAspect="1"/>
           </p:cNvPicPr>
@@ -11319,8 +12290,8 @@
         </p:blipFill>
         <p:spPr>
           <a:xfrm>
-            <a:off x="6638544" y="3666744"/>
-            <a:ext cx="256032" cy="256032"/>
+            <a:off x="868680" y="5394960"/>
+            <a:ext cx="384048" cy="384048"/>
           </a:xfrm>
           <a:prstGeom prst="rect">
             <a:avLst/>
@@ -11329,246 +12300,130 @@
       </p:pic>
       <p:sp>
         <p:nvSpPr>
-          <p:cNvPr id="24" name="Text 17"/>
-          <p:cNvSpPr/>
-          <p:nvPr/>
-        </p:nvSpPr>
-        <p:spPr>
-          <a:xfrm>
-            <a:off x="7178040" y="3465576"/>
-            <a:ext cx="4297680" cy="365760"/>
-          </a:xfrm>
-          <a:prstGeom prst="rect">
-            <a:avLst/>
-          </a:prstGeom>
-          <a:noFill/>
-          <a:ln/>
-        </p:spPr>
-        <p:txBody>
-          <a:bodyPr wrap="square" lIns="0" tIns="0" rIns="0" bIns="0" rtlCol="0" anchor="t"/>
-          <a:lstStyle/>
-          <a:p>
-            <a:pPr algn="l" indent="0" marL="0">
-              <a:buNone/>
-            </a:pPr>
-            <a:r>
-              <a:rPr lang="en-US" sz="1650" b="1" dirty="0">
-                <a:solidFill>
-                  <a:srgbClr val="FFFFFF"/>
-                </a:solidFill>
-                <a:latin typeface="Cambria" pitchFamily="34" charset="0"/>
-                <a:ea typeface="Cambria" pitchFamily="34" charset="-122"/>
-                <a:cs typeface="Cambria" pitchFamily="34" charset="-120"/>
-              </a:rPr>
-              <a:t>DOACs</a:t>
-            </a:r>
-            <a:endParaRPr lang="en-US" sz="1650" dirty="0"/>
-          </a:p>
-        </p:txBody>
-      </p:sp>
-      <p:sp>
-        <p:nvSpPr>
-          <p:cNvPr id="25" name="Text 18"/>
-          <p:cNvSpPr/>
-          <p:nvPr/>
-        </p:nvSpPr>
-        <p:spPr>
-          <a:xfrm>
-            <a:off x="7178040" y="3822192"/>
-            <a:ext cx="4343400" cy="685800"/>
-          </a:xfrm>
-          <a:prstGeom prst="rect">
-            <a:avLst/>
-          </a:prstGeom>
-          <a:noFill/>
-          <a:ln/>
-        </p:spPr>
-        <p:txBody>
-          <a:bodyPr wrap="square" lIns="0" tIns="0" rIns="0" bIns="0" rtlCol="0" anchor="t"/>
+          <p:cNvPr id="23" name="Text 16"/>
+          <p:cNvSpPr/>
+          <p:nvPr/>
+        </p:nvSpPr>
+        <p:spPr>
+          <a:xfrm>
+            <a:off x="1463040" y="5120640"/>
+            <a:ext cx="9966960" cy="914400"/>
+          </a:xfrm>
+          <a:prstGeom prst="rect">
+            <a:avLst/>
+          </a:prstGeom>
+          <a:noFill/>
+          <a:ln/>
+        </p:spPr>
+        <p:txBody>
+          <a:bodyPr wrap="square" rtlCol="0" anchor="ctr"/>
           <a:lstStyle/>
           <a:p>
             <a:pPr algn="l" indent="0" marL="0">
               <a:lnSpc>
-                <a:spcPct val="108000"/>
+                <a:spcPct val="110000"/>
               </a:lnSpc>
               <a:buNone/>
             </a:pPr>
             <a:r>
-              <a:rPr lang="en-US" sz="1250" dirty="0">
-                <a:solidFill>
-                  <a:srgbClr val="FBD8DF"/>
+              <a:rPr lang="en-US" sz="1450" b="1" dirty="0">
+                <a:solidFill>
+                  <a:srgbClr val="FF4D6D"/>
                 </a:solidFill>
                 <a:latin typeface="Calibri" pitchFamily="34" charset="0"/>
                 <a:ea typeface="Calibri" pitchFamily="34" charset="-122"/>
                 <a:cs typeface="Calibri" pitchFamily="34" charset="-120"/>
               </a:rPr>
-              <a:t>Not recommended — cross the placenta with limited safety data</a:t>
-            </a:r>
-            <a:endParaRPr lang="en-US" sz="1250" dirty="0"/>
-          </a:p>
-        </p:txBody>
-      </p:sp>
-      <p:sp>
-        <p:nvSpPr>
-          <p:cNvPr id="26" name="Shape 19"/>
-          <p:cNvSpPr/>
-          <p:nvPr/>
-        </p:nvSpPr>
-        <p:spPr>
-          <a:xfrm>
-            <a:off x="502920" y="4937760"/>
-            <a:ext cx="11183112" cy="1051560"/>
-          </a:xfrm>
-          <a:prstGeom prst="roundRect">
-            <a:avLst>
-              <a:gd name="adj" fmla="val 10435"/>
-            </a:avLst>
-          </a:prstGeom>
-          <a:solidFill>
-            <a:srgbClr val="FBD8DF"/>
-          </a:solidFill>
-          <a:ln/>
-        </p:spPr>
-      </p:sp>
-      <p:sp>
-        <p:nvSpPr>
-          <p:cNvPr id="27" name="Text 20"/>
-          <p:cNvSpPr/>
-          <p:nvPr/>
-        </p:nvSpPr>
-        <p:spPr>
-          <a:xfrm>
-            <a:off x="914400" y="5084064"/>
-            <a:ext cx="10424160" cy="365760"/>
-          </a:xfrm>
-          <a:prstGeom prst="rect">
-            <a:avLst/>
-          </a:prstGeom>
-          <a:noFill/>
-          <a:ln/>
-        </p:spPr>
-        <p:txBody>
-          <a:bodyPr wrap="square" lIns="0" tIns="0" rIns="0" bIns="0" rtlCol="0" anchor="ctr"/>
-          <a:lstStyle/>
-          <a:p>
-            <a:pPr algn="l" indent="0" marL="0">
-              <a:buNone/>
-            </a:pPr>
-            <a:r>
-              <a:rPr lang="en-US" sz="1350" b="1" dirty="0">
-                <a:solidFill>
-                  <a:srgbClr val="A4133C"/>
+              <a:t>Remember:  </a:t>
+            </a:r>
+            <a:pPr algn="l" indent="0" marL="0">
+              <a:lnSpc>
+                <a:spcPct val="110000"/>
+              </a:lnSpc>
+              <a:buNone/>
+            </a:pPr>
+            <a:r>
+              <a:rPr lang="en-US" sz="1450" dirty="0">
+                <a:solidFill>
+                  <a:srgbClr val="FBD8DF"/>
                 </a:solidFill>
                 <a:latin typeface="Calibri" pitchFamily="34" charset="0"/>
                 <a:ea typeface="Calibri" pitchFamily="34" charset="-122"/>
                 <a:cs typeface="Calibri" pitchFamily="34" charset="-120"/>
               </a:rPr>
-              <a:t>Peri-delivery   </a:t>
-            </a:r>
-            <a:pPr algn="l" indent="0" marL="0">
-              <a:buNone/>
-            </a:pPr>
-            <a:r>
-              <a:rPr lang="en-US" sz="1350" dirty="0">
-                <a:solidFill>
-                  <a:srgbClr val="2B2B33"/>
+              <a:t>base the decision on CHA₂DS₂-VASc, weigh bleeding risk (HAS-BLED), and note that antiplatelets alone are </a:t>
+            </a:r>
+            <a:pPr algn="l" indent="0" marL="0">
+              <a:lnSpc>
+                <a:spcPct val="110000"/>
+              </a:lnSpc>
+              <a:buNone/>
+            </a:pPr>
+            <a:r>
+              <a:rPr lang="en-US" sz="1450" b="1" dirty="0">
+                <a:solidFill>
+                  <a:srgbClr val="FFFFFF"/>
                 </a:solidFill>
                 <a:latin typeface="Calibri" pitchFamily="34" charset="0"/>
                 <a:ea typeface="Calibri" pitchFamily="34" charset="-122"/>
                 <a:cs typeface="Calibri" pitchFamily="34" charset="-120"/>
               </a:rPr>
-              <a:t>switch LMWH → UFH (or briefly hold) to allow neuraxial anaesthesia and limit bleeding.</a:t>
-            </a:r>
-            <a:endParaRPr lang="en-US" sz="1350" dirty="0"/>
-          </a:p>
-        </p:txBody>
-      </p:sp>
-      <p:sp>
-        <p:nvSpPr>
-          <p:cNvPr id="28" name="Text 21"/>
-          <p:cNvSpPr/>
-          <p:nvPr/>
-        </p:nvSpPr>
-        <p:spPr>
-          <a:xfrm>
-            <a:off x="914400" y="5468112"/>
-            <a:ext cx="10607040" cy="365760"/>
-          </a:xfrm>
-          <a:prstGeom prst="rect">
-            <a:avLst/>
-          </a:prstGeom>
-          <a:noFill/>
-          <a:ln/>
-        </p:spPr>
-        <p:txBody>
-          <a:bodyPr wrap="square" lIns="0" tIns="0" rIns="0" bIns="0" rtlCol="0" anchor="ctr"/>
-          <a:lstStyle/>
-          <a:p>
-            <a:pPr algn="l" indent="0" marL="0">
-              <a:buNone/>
-            </a:pPr>
-            <a:r>
-              <a:rPr lang="en-US" sz="1350" b="1" dirty="0">
-                <a:solidFill>
-                  <a:srgbClr val="A4133C"/>
+              <a:t>not</a:t>
+            </a:r>
+            <a:pPr algn="l" indent="0" marL="0">
+              <a:lnSpc>
+                <a:spcPct val="110000"/>
+              </a:lnSpc>
+              <a:buNone/>
+            </a:pPr>
+            <a:r>
+              <a:rPr lang="en-US" sz="1450" dirty="0">
+                <a:solidFill>
+                  <a:srgbClr val="FBD8DF"/>
                 </a:solidFill>
                 <a:latin typeface="Calibri" pitchFamily="34" charset="0"/>
                 <a:ea typeface="Calibri" pitchFamily="34" charset="-122"/>
                 <a:cs typeface="Calibri" pitchFamily="34" charset="-120"/>
               </a:rPr>
-              <a:t>Breastfeeding   </a:t>
-            </a:r>
-            <a:pPr algn="l" indent="0" marL="0">
-              <a:buNone/>
-            </a:pPr>
-            <a:r>
-              <a:rPr lang="en-US" sz="1350" dirty="0">
-                <a:solidFill>
-                  <a:srgbClr val="2B2B33"/>
+              <a:t> adequate stroke prevention.</a:t>
+            </a:r>
+            <a:endParaRPr lang="en-US" sz="1450" dirty="0"/>
+          </a:p>
+        </p:txBody>
+      </p:sp>
+      <p:sp>
+        <p:nvSpPr>
+          <p:cNvPr id="24" name="Text 17"/>
+          <p:cNvSpPr/>
+          <p:nvPr/>
+        </p:nvSpPr>
+        <p:spPr>
+          <a:xfrm>
+            <a:off x="11277295" y="6355080"/>
+            <a:ext cx="548640" cy="320040"/>
+          </a:xfrm>
+          <a:prstGeom prst="rect">
+            <a:avLst/>
+          </a:prstGeom>
+          <a:noFill/>
+          <a:ln/>
+        </p:spPr>
+        <p:txBody>
+          <a:bodyPr wrap="square" rtlCol="0" anchor="t"/>
+          <a:lstStyle/>
+          <a:p>
+            <a:pPr algn="r" indent="0" marL="0">
+              <a:buNone/>
+            </a:pPr>
+            <a:r>
+              <a:rPr lang="en-US" sz="1100" b="1" dirty="0">
+                <a:solidFill>
+                  <a:srgbClr val="6B6B76"/>
                 </a:solidFill>
                 <a:latin typeface="Calibri" pitchFamily="34" charset="0"/>
                 <a:ea typeface="Calibri" pitchFamily="34" charset="-122"/>
                 <a:cs typeface="Calibri" pitchFamily="34" charset="-120"/>
               </a:rPr>
-              <a:t>warfarin, LMWH and UFH are compatible; DOACs are avoided. Plan with a specialist team.</a:t>
-            </a:r>
-            <a:endParaRPr lang="en-US" sz="1350" dirty="0"/>
-          </a:p>
-        </p:txBody>
-      </p:sp>
-      <p:sp>
-        <p:nvSpPr>
-          <p:cNvPr id="29" name="Text 22"/>
-          <p:cNvSpPr/>
-          <p:nvPr/>
-        </p:nvSpPr>
-        <p:spPr>
-          <a:xfrm>
-            <a:off x="11277295" y="6355080"/>
-            <a:ext cx="548640" cy="320040"/>
-          </a:xfrm>
-          <a:prstGeom prst="rect">
-            <a:avLst/>
-          </a:prstGeom>
-          <a:noFill/>
-          <a:ln/>
-        </p:spPr>
-        <p:txBody>
-          <a:bodyPr wrap="square" rtlCol="0" anchor="t"/>
-          <a:lstStyle/>
-          <a:p>
-            <a:pPr algn="r" indent="0" marL="0">
-              <a:buNone/>
-            </a:pPr>
-            <a:r>
-              <a:rPr lang="en-US" sz="1100" b="1" dirty="0">
-                <a:solidFill>
-                  <a:srgbClr val="6B6B76"/>
-                </a:solidFill>
-                <a:latin typeface="Calibri" pitchFamily="34" charset="0"/>
-                <a:ea typeface="Calibri" pitchFamily="34" charset="-122"/>
-                <a:cs typeface="Calibri" pitchFamily="34" charset="-120"/>
-              </a:rPr>
               <a:t>16</a:t>
             </a:r>
             <a:endParaRPr lang="en-US" sz="1100" dirty="0"/>
@@ -11577,7 +12432,7 @@
       </p:sp>
       <p:sp>
         <p:nvSpPr>
-          <p:cNvPr id="30" name="Text 23"/>
+          <p:cNvPr id="25" name="Text 18"/>
           <p:cNvSpPr/>
           <p:nvPr/>
         </p:nvSpPr>
@@ -11767,7 +12622,7 @@
                 <a:ea typeface="Cambria" pitchFamily="34" charset="-122"/>
                 <a:cs typeface="Cambria" pitchFamily="34" charset="-120"/>
               </a:rPr>
-              <a:t>Rhythm &amp; Rate Control in Pregnancy</a:t>
+              <a:t>Anticoagulation in Pregnancy</a:t>
             </a:r>
             <a:endParaRPr lang="en-US" sz="3000" dirty="0"/>
           </a:p>
@@ -11782,11 +12637,11 @@
         <p:spPr>
           <a:xfrm>
             <a:off x="502920" y="1783080"/>
-            <a:ext cx="5532120" cy="4206240"/>
+            <a:ext cx="5532120" cy="2971800"/>
           </a:xfrm>
           <a:prstGeom prst="roundRect">
             <a:avLst>
-              <a:gd name="adj" fmla="val 2609"/>
+              <a:gd name="adj" fmla="val 3692"/>
             </a:avLst>
           </a:prstGeom>
           <a:solidFill>
@@ -11815,7 +12670,7 @@
         </p:nvSpPr>
         <p:spPr>
           <a:xfrm>
-            <a:off x="868680" y="2057400"/>
+            <a:off x="822960" y="2011680"/>
             <a:ext cx="4846320" cy="274320"/>
           </a:xfrm>
           <a:prstGeom prst="rect">
@@ -11854,7 +12709,7 @@
                 <a:ea typeface="Calibri" pitchFamily="34" charset="-122"/>
                 <a:cs typeface="Calibri" pitchFamily="34" charset="-120"/>
               </a:rPr>
-              <a:t>GENERALLY SAFE</a:t>
+              <a:t>PREFERRED</a:t>
             </a:r>
             <a:endParaRPr lang="en-US" sz="1300" dirty="0"/>
           </a:p>
@@ -11868,21 +12723,16 @@
         </p:nvSpPr>
         <p:spPr>
           <a:xfrm>
-            <a:off x="868680" y="2542032"/>
-            <a:ext cx="566928" cy="566928"/>
+            <a:off x="822960" y="2395728"/>
+            <a:ext cx="548640" cy="548640"/>
           </a:xfrm>
           <a:prstGeom prst="ellipse">
             <a:avLst/>
           </a:prstGeom>
           <a:solidFill>
-            <a:srgbClr val="FFFFFF"/>
+            <a:srgbClr val="2E7D32"/>
           </a:solidFill>
-          <a:ln w="12700">
-            <a:solidFill>
-              <a:srgbClr val="FBD8DF"/>
-            </a:solidFill>
-            <a:prstDash val="solid"/>
-          </a:ln>
+          <a:ln/>
         </p:spPr>
       </p:sp>
       <p:pic>
@@ -11901,8 +12751,8 @@
         </p:blipFill>
         <p:spPr>
           <a:xfrm>
-            <a:off x="1014984" y="2688336"/>
-            <a:ext cx="274320" cy="274320"/>
+            <a:off x="960120" y="2551176"/>
+            <a:ext cx="283464" cy="246888"/>
           </a:xfrm>
           <a:prstGeom prst="rect">
             <a:avLst/>
@@ -11917,8 +12767,8 @@
         </p:nvSpPr>
         <p:spPr>
           <a:xfrm>
-            <a:off x="1618488" y="2505456"/>
-            <a:ext cx="4233672" cy="292608"/>
+            <a:off x="1508760" y="2350008"/>
+            <a:ext cx="4343400" cy="365760"/>
           </a:xfrm>
           <a:prstGeom prst="rect">
             <a:avLst/>
@@ -11934,7 +12784,7 @@
               <a:buNone/>
             </a:pPr>
             <a:r>
-              <a:rPr lang="en-US" sz="1600" b="1" dirty="0">
+              <a:rPr lang="en-US" sz="1650" b="1" dirty="0">
                 <a:solidFill>
                   <a:srgbClr val="2B2B33"/>
                 </a:solidFill>
@@ -11942,9 +12792,9 @@
                 <a:ea typeface="Cambria" pitchFamily="34" charset="-122"/>
                 <a:cs typeface="Cambria" pitchFamily="34" charset="-120"/>
               </a:rPr>
-              <a:t>Beta-blockers</a:t>
-            </a:r>
-            <a:endParaRPr lang="en-US" sz="1600" dirty="0"/>
+              <a:t>LMWH (enoxaparin)</a:t>
+            </a:r>
+            <a:endParaRPr lang="en-US" sz="1650" dirty="0"/>
           </a:p>
         </p:txBody>
       </p:sp>
@@ -11956,8 +12806,8 @@
         </p:nvSpPr>
         <p:spPr>
           <a:xfrm>
-            <a:off x="1618488" y="2816352"/>
-            <a:ext cx="4233672" cy="365760"/>
+            <a:off x="1508760" y="2706624"/>
+            <a:ext cx="4389120" cy="685800"/>
           </a:xfrm>
           <a:prstGeom prst="rect">
             <a:avLst/>
@@ -11970,6 +12820,9 @@
           <a:lstStyle/>
           <a:p>
             <a:pPr algn="l" indent="0" marL="0">
+              <a:lnSpc>
+                <a:spcPct val="108000"/>
+              </a:lnSpc>
               <a:buNone/>
             </a:pPr>
             <a:r>
@@ -11981,7 +12834,7 @@
                 <a:ea typeface="Calibri" pitchFamily="34" charset="-122"/>
                 <a:cs typeface="Calibri" pitchFamily="34" charset="-120"/>
               </a:rPr>
-              <a:t>First-line rate control (metoprolol, bisoprolol) — avoid atenolol</a:t>
+              <a:t>Does not cross the placenta — the agent of choice; weight-adjusted, monitor anti-Xa</a:t>
             </a:r>
             <a:endParaRPr lang="en-US" sz="1250" dirty="0"/>
           </a:p>
@@ -11995,21 +12848,16 @@
         </p:nvSpPr>
         <p:spPr>
           <a:xfrm>
-            <a:off x="868680" y="3621024"/>
-            <a:ext cx="566928" cy="566928"/>
+            <a:off x="822960" y="3511296"/>
+            <a:ext cx="548640" cy="548640"/>
           </a:xfrm>
           <a:prstGeom prst="ellipse">
             <a:avLst/>
           </a:prstGeom>
           <a:solidFill>
-            <a:srgbClr val="FFFFFF"/>
+            <a:srgbClr val="2E7D32"/>
           </a:solidFill>
-          <a:ln w="12700">
-            <a:solidFill>
-              <a:srgbClr val="FBD8DF"/>
-            </a:solidFill>
-            <a:prstDash val="solid"/>
-          </a:ln>
+          <a:ln/>
         </p:spPr>
       </p:sp>
       <p:pic>
@@ -12028,8 +12876,8 @@
         </p:blipFill>
         <p:spPr>
           <a:xfrm>
-            <a:off x="1014984" y="3767328"/>
-            <a:ext cx="274320" cy="274320"/>
+            <a:off x="960120" y="3666744"/>
+            <a:ext cx="283464" cy="246888"/>
           </a:xfrm>
           <a:prstGeom prst="rect">
             <a:avLst/>
@@ -12044,8 +12892,8 @@
         </p:nvSpPr>
         <p:spPr>
           <a:xfrm>
-            <a:off x="1618488" y="3584448"/>
-            <a:ext cx="4233672" cy="292608"/>
+            <a:off x="1508760" y="3465576"/>
+            <a:ext cx="4343400" cy="365760"/>
           </a:xfrm>
           <a:prstGeom prst="rect">
             <a:avLst/>
@@ -12061,7 +12909,7 @@
               <a:buNone/>
             </a:pPr>
             <a:r>
-              <a:rPr lang="en-US" sz="1600" b="1" dirty="0">
+              <a:rPr lang="en-US" sz="1650" b="1" dirty="0">
                 <a:solidFill>
                   <a:srgbClr val="2B2B33"/>
                 </a:solidFill>
@@ -12069,9 +12917,9 @@
                 <a:ea typeface="Cambria" pitchFamily="34" charset="-122"/>
                 <a:cs typeface="Cambria" pitchFamily="34" charset="-120"/>
               </a:rPr>
-              <a:t>Digoxin</a:t>
-            </a:r>
-            <a:endParaRPr lang="en-US" sz="1600" dirty="0"/>
+              <a:t>Unfractionated heparin</a:t>
+            </a:r>
+            <a:endParaRPr lang="en-US" sz="1650" dirty="0"/>
           </a:p>
         </p:txBody>
       </p:sp>
@@ -12083,8 +12931,8 @@
         </p:nvSpPr>
         <p:spPr>
           <a:xfrm>
-            <a:off x="1618488" y="3895344"/>
-            <a:ext cx="4233672" cy="365760"/>
+            <a:off x="1508760" y="3822192"/>
+            <a:ext cx="4389120" cy="685800"/>
           </a:xfrm>
           <a:prstGeom prst="rect">
             <a:avLst/>
@@ -12097,6 +12945,9 @@
           <a:lstStyle/>
           <a:p>
             <a:pPr algn="l" indent="0" marL="0">
+              <a:lnSpc>
+                <a:spcPct val="108000"/>
+              </a:lnSpc>
               <a:buNone/>
             </a:pPr>
             <a:r>
@@ -12108,7 +12959,7 @@
                 <a:ea typeface="Calibri" pitchFamily="34" charset="-122"/>
                 <a:cs typeface="Calibri" pitchFamily="34" charset="-120"/>
               </a:rPr>
-              <a:t>Safe option for rate control</a:t>
+              <a:t>Also placenta-safe; useful peri-delivery — short-acting &amp; reversible</a:t>
             </a:r>
             <a:endParaRPr lang="en-US" sz="1250" dirty="0"/>
           </a:p>
@@ -12122,26 +12973,103 @@
         </p:nvSpPr>
         <p:spPr>
           <a:xfrm>
-            <a:off x="868680" y="4700016"/>
-            <a:ext cx="566928" cy="566928"/>
+            <a:off x="6172200" y="1783080"/>
+            <a:ext cx="5532120" cy="2971800"/>
+          </a:xfrm>
+          <a:prstGeom prst="roundRect">
+            <a:avLst>
+              <a:gd name="adj" fmla="val 3692"/>
+            </a:avLst>
+          </a:prstGeom>
+          <a:solidFill>
+            <a:srgbClr val="590D22"/>
+          </a:solidFill>
+          <a:ln/>
+          <a:effectLst>
+            <a:outerShdw sx="100000" sy="100000" kx="0" ky="0" algn="bl" rotWithShape="0" blurRad="127000" dist="50800" dir="5400000">
+              <a:srgbClr val="C9A3AC">
+                <a:alpha val="45000"/>
+              </a:srgbClr>
+            </a:outerShdw>
+          </a:effectLst>
+        </p:spPr>
+      </p:sp>
+      <p:sp>
+        <p:nvSpPr>
+          <p:cNvPr id="17" name="Text 12"/>
+          <p:cNvSpPr/>
+          <p:nvPr/>
+        </p:nvSpPr>
+        <p:spPr>
+          <a:xfrm>
+            <a:off x="6492240" y="2011680"/>
+            <a:ext cx="4846320" cy="274320"/>
+          </a:xfrm>
+          <a:prstGeom prst="rect">
+            <a:avLst/>
+          </a:prstGeom>
+          <a:noFill/>
+          <a:ln/>
+        </p:spPr>
+        <p:txBody>
+          <a:bodyPr wrap="square" rtlCol="0" anchor="t"/>
+          <a:lstStyle/>
+          <a:p>
+            <a:pPr algn="l" indent="0" marL="0">
+              <a:buNone/>
+            </a:pPr>
+            <a:r>
+              <a:rPr lang="en-US" sz="1300" b="1" spc="150" kern="0" dirty="0">
+                <a:solidFill>
+                  <a:srgbClr val="FF4D6D"/>
+                </a:solidFill>
+                <a:latin typeface="Calibri" pitchFamily="34" charset="0"/>
+                <a:ea typeface="Calibri" pitchFamily="34" charset="-122"/>
+                <a:cs typeface="Calibri" pitchFamily="34" charset="-120"/>
+              </a:rPr>
+              <a:t>✕  </a:t>
+            </a:r>
+            <a:pPr algn="l" indent="0" marL="0">
+              <a:buNone/>
+            </a:pPr>
+            <a:r>
+              <a:rPr lang="en-US" sz="1300" b="1" spc="150" kern="0" dirty="0">
+                <a:solidFill>
+                  <a:srgbClr val="FFFFFF"/>
+                </a:solidFill>
+                <a:latin typeface="Calibri" pitchFamily="34" charset="0"/>
+                <a:ea typeface="Calibri" pitchFamily="34" charset="-122"/>
+                <a:cs typeface="Calibri" pitchFamily="34" charset="-120"/>
+              </a:rPr>
+              <a:t>AVOID</a:t>
+            </a:r>
+            <a:endParaRPr lang="en-US" sz="1300" dirty="0"/>
+          </a:p>
+        </p:txBody>
+      </p:sp>
+      <p:sp>
+        <p:nvSpPr>
+          <p:cNvPr id="18" name="Shape 13"/>
+          <p:cNvSpPr/>
+          <p:nvPr/>
+        </p:nvSpPr>
+        <p:spPr>
+          <a:xfrm>
+            <a:off x="6492240" y="2395728"/>
+            <a:ext cx="548640" cy="548640"/>
           </a:xfrm>
           <a:prstGeom prst="ellipse">
             <a:avLst/>
           </a:prstGeom>
           <a:solidFill>
-            <a:srgbClr val="FFFFFF"/>
+            <a:srgbClr val="A4133C"/>
           </a:solidFill>
-          <a:ln w="12700">
-            <a:solidFill>
-              <a:srgbClr val="FBD8DF"/>
-            </a:solidFill>
-            <a:prstDash val="solid"/>
-          </a:ln>
+          <a:ln/>
         </p:spPr>
       </p:sp>
       <p:pic>
         <p:nvPicPr>
-          <p:cNvPr id="17" name="Image 3" descr="preencoded.png">    </p:cNvPr>
+          <p:cNvPr id="19" name="Image 3" descr="preencoded.png">    </p:cNvPr>
           <p:cNvPicPr>
             <a:picLocks noChangeAspect="1"/>
           </p:cNvPicPr>
@@ -12155,8 +13083,8 @@
         </p:blipFill>
         <p:spPr>
           <a:xfrm>
-            <a:off x="1014984" y="4846320"/>
-            <a:ext cx="274320" cy="274320"/>
+            <a:off x="6638544" y="2551176"/>
+            <a:ext cx="256032" cy="256032"/>
           </a:xfrm>
           <a:prstGeom prst="rect">
             <a:avLst/>
@@ -12165,14 +13093,14 @@
       </p:pic>
       <p:sp>
         <p:nvSpPr>
-          <p:cNvPr id="18" name="Text 12"/>
-          <p:cNvSpPr/>
-          <p:nvPr/>
-        </p:nvSpPr>
-        <p:spPr>
-          <a:xfrm>
-            <a:off x="1618488" y="4663440"/>
-            <a:ext cx="4233672" cy="292608"/>
+          <p:cNvPr id="20" name="Text 14"/>
+          <p:cNvSpPr/>
+          <p:nvPr/>
+        </p:nvSpPr>
+        <p:spPr>
+          <a:xfrm>
+            <a:off x="7178040" y="2350008"/>
+            <a:ext cx="4297680" cy="365760"/>
           </a:xfrm>
           <a:prstGeom prst="rect">
             <a:avLst/>
@@ -12188,30 +13116,30 @@
               <a:buNone/>
             </a:pPr>
             <a:r>
-              <a:rPr lang="en-US" sz="1600" b="1" dirty="0">
-                <a:solidFill>
-                  <a:srgbClr val="2B2B33"/>
+              <a:rPr lang="en-US" sz="1650" b="1" dirty="0">
+                <a:solidFill>
+                  <a:srgbClr val="FFFFFF"/>
                 </a:solidFill>
                 <a:latin typeface="Cambria" pitchFamily="34" charset="0"/>
                 <a:ea typeface="Cambria" pitchFamily="34" charset="-122"/>
                 <a:cs typeface="Cambria" pitchFamily="34" charset="-120"/>
               </a:rPr>
-              <a:t>Flecainide / sotalol</a:t>
-            </a:r>
-            <a:endParaRPr lang="en-US" sz="1600" dirty="0"/>
-          </a:p>
-        </p:txBody>
-      </p:sp>
-      <p:sp>
-        <p:nvSpPr>
-          <p:cNvPr id="19" name="Text 13"/>
-          <p:cNvSpPr/>
-          <p:nvPr/>
-        </p:nvSpPr>
-        <p:spPr>
-          <a:xfrm>
-            <a:off x="1618488" y="4974336"/>
-            <a:ext cx="4233672" cy="365760"/>
+              <a:t>Warfarin (VKA)</a:t>
+            </a:r>
+            <a:endParaRPr lang="en-US" sz="1650" dirty="0"/>
+          </a:p>
+        </p:txBody>
+      </p:sp>
+      <p:sp>
+        <p:nvSpPr>
+          <p:cNvPr id="21" name="Text 15"/>
+          <p:cNvSpPr/>
+          <p:nvPr/>
+        </p:nvSpPr>
+        <p:spPr>
+          <a:xfrm>
+            <a:off x="7178040" y="2706624"/>
+            <a:ext cx="4343400" cy="685800"/>
           </a:xfrm>
           <a:prstGeom prst="rect">
             <a:avLst/>
@@ -12224,18 +13152,21 @@
           <a:lstStyle/>
           <a:p>
             <a:pPr algn="l" indent="0" marL="0">
+              <a:lnSpc>
+                <a:spcPct val="108000"/>
+              </a:lnSpc>
               <a:buNone/>
             </a:pPr>
             <a:r>
               <a:rPr lang="en-US" sz="1250" dirty="0">
                 <a:solidFill>
-                  <a:srgbClr val="6B6B76"/>
+                  <a:srgbClr val="FBD8DF"/>
                 </a:solidFill>
                 <a:latin typeface="Calibri" pitchFamily="34" charset="0"/>
                 <a:ea typeface="Calibri" pitchFamily="34" charset="-122"/>
                 <a:cs typeface="Calibri" pitchFamily="34" charset="-120"/>
               </a:rPr>
-              <a:t>For rhythm control when needed</a:t>
+              <a:t>Teratogenic — embryopathy at weeks 6–12 and fetal bleeding near term</a:t>
             </a:r>
             <a:endParaRPr lang="en-US" sz="1250" dirty="0"/>
           </a:p>
@@ -12243,43 +13174,14 @@
       </p:sp>
       <p:sp>
         <p:nvSpPr>
-          <p:cNvPr id="20" name="Shape 14"/>
-          <p:cNvSpPr/>
-          <p:nvPr/>
-        </p:nvSpPr>
-        <p:spPr>
-          <a:xfrm>
-            <a:off x="6172200" y="1783080"/>
-            <a:ext cx="5532120" cy="2011680"/>
-          </a:xfrm>
-          <a:prstGeom prst="roundRect">
-            <a:avLst>
-              <a:gd name="adj" fmla="val 5455"/>
-            </a:avLst>
-          </a:prstGeom>
-          <a:solidFill>
-            <a:srgbClr val="590D22"/>
-          </a:solidFill>
-          <a:ln/>
-          <a:effectLst>
-            <a:outerShdw sx="100000" sy="100000" kx="0" ky="0" algn="bl" rotWithShape="0" blurRad="127000" dist="50800" dir="5400000">
-              <a:srgbClr val="C9A3AC">
-                <a:alpha val="45000"/>
-              </a:srgbClr>
-            </a:outerShdw>
-          </a:effectLst>
-        </p:spPr>
-      </p:sp>
-      <p:sp>
-        <p:nvSpPr>
-          <p:cNvPr id="21" name="Shape 15"/>
-          <p:cNvSpPr/>
-          <p:nvPr/>
-        </p:nvSpPr>
-        <p:spPr>
-          <a:xfrm>
-            <a:off x="6492240" y="2148840"/>
-            <a:ext cx="868680" cy="868680"/>
+          <p:cNvPr id="22" name="Shape 16"/>
+          <p:cNvSpPr/>
+          <p:nvPr/>
+        </p:nvSpPr>
+        <p:spPr>
+          <a:xfrm>
+            <a:off x="6492240" y="3511296"/>
+            <a:ext cx="548640" cy="548640"/>
           </a:xfrm>
           <a:prstGeom prst="ellipse">
             <a:avLst/>
@@ -12292,7 +13194,7 @@
       </p:sp>
       <p:pic>
         <p:nvPicPr>
-          <p:cNvPr id="22" name="Image 4" descr="preencoded.png">    </p:cNvPr>
+          <p:cNvPr id="23" name="Image 4" descr="preencoded.png">    </p:cNvPr>
           <p:cNvPicPr>
             <a:picLocks noChangeAspect="1"/>
           </p:cNvPicPr>
@@ -12306,8 +13208,8 @@
         </p:blipFill>
         <p:spPr>
           <a:xfrm>
-            <a:off x="6729984" y="2377440"/>
-            <a:ext cx="402336" cy="402336"/>
+            <a:off x="6638544" y="3666744"/>
+            <a:ext cx="256032" cy="256032"/>
           </a:xfrm>
           <a:prstGeom prst="rect">
             <a:avLst/>
@@ -12316,30 +13218,30 @@
       </p:pic>
       <p:sp>
         <p:nvSpPr>
-          <p:cNvPr id="23" name="Text 16"/>
-          <p:cNvSpPr/>
-          <p:nvPr/>
-        </p:nvSpPr>
-        <p:spPr>
-          <a:xfrm>
-            <a:off x="7498080" y="2194560"/>
-            <a:ext cx="4023360" cy="457200"/>
-          </a:xfrm>
-          <a:prstGeom prst="rect">
-            <a:avLst/>
-          </a:prstGeom>
-          <a:noFill/>
-          <a:ln/>
-        </p:spPr>
-        <p:txBody>
-          <a:bodyPr wrap="square" rtlCol="0" anchor="ctr"/>
-          <a:lstStyle/>
-          <a:p>
-            <a:pPr algn="l" indent="0" marL="0">
-              <a:buNone/>
-            </a:pPr>
-            <a:r>
-              <a:rPr lang="en-US" sz="2100" b="1" dirty="0">
+          <p:cNvPr id="24" name="Text 17"/>
+          <p:cNvSpPr/>
+          <p:nvPr/>
+        </p:nvSpPr>
+        <p:spPr>
+          <a:xfrm>
+            <a:off x="7178040" y="3465576"/>
+            <a:ext cx="4297680" cy="365760"/>
+          </a:xfrm>
+          <a:prstGeom prst="rect">
+            <a:avLst/>
+          </a:prstGeom>
+          <a:noFill/>
+          <a:ln/>
+        </p:spPr>
+        <p:txBody>
+          <a:bodyPr wrap="square" lIns="0" tIns="0" rIns="0" bIns="0" rtlCol="0" anchor="t"/>
+          <a:lstStyle/>
+          <a:p>
+            <a:pPr algn="l" indent="0" marL="0">
+              <a:buNone/>
+            </a:pPr>
+            <a:r>
+              <a:rPr lang="en-US" sz="1650" b="1" dirty="0">
                 <a:solidFill>
                   <a:srgbClr val="FFFFFF"/>
                 </a:solidFill>
@@ -12347,41 +13249,41 @@
                 <a:ea typeface="Cambria" pitchFamily="34" charset="-122"/>
                 <a:cs typeface="Cambria" pitchFamily="34" charset="-120"/>
               </a:rPr>
-              <a:t>Cardioversion</a:t>
-            </a:r>
-            <a:endParaRPr lang="en-US" sz="2100" dirty="0"/>
-          </a:p>
-        </p:txBody>
-      </p:sp>
-      <p:sp>
-        <p:nvSpPr>
-          <p:cNvPr id="24" name="Text 17"/>
-          <p:cNvSpPr/>
-          <p:nvPr/>
-        </p:nvSpPr>
-        <p:spPr>
-          <a:xfrm>
-            <a:off x="6537960" y="2852928"/>
-            <a:ext cx="5029200" cy="822960"/>
-          </a:xfrm>
-          <a:prstGeom prst="rect">
-            <a:avLst/>
-          </a:prstGeom>
-          <a:noFill/>
-          <a:ln/>
-        </p:spPr>
-        <p:txBody>
-          <a:bodyPr wrap="square" rtlCol="0" anchor="t"/>
+              <a:t>DOACs</a:t>
+            </a:r>
+            <a:endParaRPr lang="en-US" sz="1650" dirty="0"/>
+          </a:p>
+        </p:txBody>
+      </p:sp>
+      <p:sp>
+        <p:nvSpPr>
+          <p:cNvPr id="25" name="Text 18"/>
+          <p:cNvSpPr/>
+          <p:nvPr/>
+        </p:nvSpPr>
+        <p:spPr>
+          <a:xfrm>
+            <a:off x="7178040" y="3822192"/>
+            <a:ext cx="4343400" cy="685800"/>
+          </a:xfrm>
+          <a:prstGeom prst="rect">
+            <a:avLst/>
+          </a:prstGeom>
+          <a:noFill/>
+          <a:ln/>
+        </p:spPr>
+        <p:txBody>
+          <a:bodyPr wrap="square" lIns="0" tIns="0" rIns="0" bIns="0" rtlCol="0" anchor="t"/>
           <a:lstStyle/>
           <a:p>
             <a:pPr algn="l" indent="0" marL="0">
               <a:lnSpc>
-                <a:spcPct val="112000"/>
+                <a:spcPct val="108000"/>
               </a:lnSpc>
               <a:buNone/>
             </a:pPr>
             <a:r>
-              <a:rPr lang="en-US" sz="1400" dirty="0">
+              <a:rPr lang="en-US" sz="1250" dirty="0">
                 <a:solidFill>
                   <a:srgbClr val="FBD8DF"/>
                 </a:solidFill>
@@ -12389,72 +13291,60 @@
                 <a:ea typeface="Calibri" pitchFamily="34" charset="-122"/>
                 <a:cs typeface="Calibri" pitchFamily="34" charset="-120"/>
               </a:rPr>
-              <a:t>DC cardioversion is safe in all trimesters — perform with fetal monitoring.</a:t>
-            </a:r>
-            <a:endParaRPr lang="en-US" sz="1400" dirty="0"/>
-          </a:p>
-        </p:txBody>
-      </p:sp>
-      <p:sp>
-        <p:nvSpPr>
-          <p:cNvPr id="25" name="Shape 18"/>
-          <p:cNvSpPr/>
-          <p:nvPr/>
-        </p:nvSpPr>
-        <p:spPr>
-          <a:xfrm>
-            <a:off x="6172200" y="3977640"/>
-            <a:ext cx="5532120" cy="2011680"/>
+              <a:t>Not recommended — cross the placenta with limited safety data</a:t>
+            </a:r>
+            <a:endParaRPr lang="en-US" sz="1250" dirty="0"/>
+          </a:p>
+        </p:txBody>
+      </p:sp>
+      <p:sp>
+        <p:nvSpPr>
+          <p:cNvPr id="26" name="Shape 19"/>
+          <p:cNvSpPr/>
+          <p:nvPr/>
+        </p:nvSpPr>
+        <p:spPr>
+          <a:xfrm>
+            <a:off x="502920" y="4937760"/>
+            <a:ext cx="11183112" cy="1051560"/>
           </a:xfrm>
           <a:prstGeom prst="roundRect">
             <a:avLst>
-              <a:gd name="adj" fmla="val 5455"/>
+              <a:gd name="adj" fmla="val 10435"/>
             </a:avLst>
           </a:prstGeom>
           <a:solidFill>
-            <a:srgbClr val="FFF0F3"/>
+            <a:srgbClr val="FBD8DF"/>
           </a:solidFill>
-          <a:ln w="12700">
-            <a:solidFill>
-              <a:srgbClr val="FBD8DF"/>
-            </a:solidFill>
-            <a:prstDash val="solid"/>
-          </a:ln>
-          <a:effectLst>
-            <a:outerShdw sx="100000" sy="100000" kx="0" ky="0" algn="bl" rotWithShape="0" blurRad="127000" dist="50800" dir="5400000">
-              <a:srgbClr val="C9A3AC">
-                <a:alpha val="45000"/>
-              </a:srgbClr>
-            </a:outerShdw>
-          </a:effectLst>
-        </p:spPr>
-      </p:sp>
-      <p:sp>
-        <p:nvSpPr>
-          <p:cNvPr id="26" name="Text 19"/>
-          <p:cNvSpPr/>
-          <p:nvPr/>
-        </p:nvSpPr>
-        <p:spPr>
-          <a:xfrm>
-            <a:off x="6537960" y="4206240"/>
-            <a:ext cx="4937760" cy="274320"/>
-          </a:xfrm>
-          <a:prstGeom prst="rect">
-            <a:avLst/>
-          </a:prstGeom>
-          <a:noFill/>
-          <a:ln/>
-        </p:spPr>
-        <p:txBody>
-          <a:bodyPr wrap="square" rtlCol="0" anchor="t"/>
-          <a:lstStyle/>
-          <a:p>
-            <a:pPr algn="l" indent="0" marL="0">
-              <a:buNone/>
-            </a:pPr>
-            <a:r>
-              <a:rPr lang="en-US" sz="1300" b="1" spc="120" kern="0" dirty="0">
+          <a:ln/>
+        </p:spPr>
+      </p:sp>
+      <p:sp>
+        <p:nvSpPr>
+          <p:cNvPr id="27" name="Text 20"/>
+          <p:cNvSpPr/>
+          <p:nvPr/>
+        </p:nvSpPr>
+        <p:spPr>
+          <a:xfrm>
+            <a:off x="914400" y="5084064"/>
+            <a:ext cx="10424160" cy="365760"/>
+          </a:xfrm>
+          <a:prstGeom prst="rect">
+            <a:avLst/>
+          </a:prstGeom>
+          <a:noFill/>
+          <a:ln/>
+        </p:spPr>
+        <p:txBody>
+          <a:bodyPr wrap="square" lIns="0" tIns="0" rIns="0" bIns="0" rtlCol="0" anchor="ctr"/>
+          <a:lstStyle/>
+          <a:p>
+            <a:pPr algn="l" indent="0" marL="0">
+              <a:buNone/>
+            </a:pPr>
+            <a:r>
+              <a:rPr lang="en-US" sz="1350" b="1" dirty="0">
                 <a:solidFill>
                   <a:srgbClr val="A4133C"/>
                 </a:solidFill>
@@ -12462,133 +13352,74 @@
                 <a:ea typeface="Calibri" pitchFamily="34" charset="-122"/>
                 <a:cs typeface="Calibri" pitchFamily="34" charset="-120"/>
               </a:rPr>
-              <a:t>✕  </a:t>
-            </a:r>
-            <a:pPr algn="l" indent="0" marL="0">
-              <a:buNone/>
-            </a:pPr>
-            <a:r>
-              <a:rPr lang="en-US" sz="1300" b="1" spc="120" kern="0" dirty="0">
-                <a:solidFill>
-                  <a:srgbClr val="A4133C"/>
+              <a:t>Peri-delivery   </a:t>
+            </a:r>
+            <a:pPr algn="l" indent="0" marL="0">
+              <a:buNone/>
+            </a:pPr>
+            <a:r>
+              <a:rPr lang="en-US" sz="1350" dirty="0">
+                <a:solidFill>
+                  <a:srgbClr val="2B2B33"/>
                 </a:solidFill>
                 <a:latin typeface="Calibri" pitchFamily="34" charset="0"/>
                 <a:ea typeface="Calibri" pitchFamily="34" charset="-122"/>
                 <a:cs typeface="Calibri" pitchFamily="34" charset="-120"/>
               </a:rPr>
-              <a:t>USE WITH CAUTION / AVOID</a:t>
-            </a:r>
-            <a:endParaRPr lang="en-US" sz="1300" dirty="0"/>
-          </a:p>
-        </p:txBody>
-      </p:sp>
-      <p:sp>
-        <p:nvSpPr>
-          <p:cNvPr id="27" name="Text 20"/>
-          <p:cNvSpPr/>
-          <p:nvPr/>
-        </p:nvSpPr>
-        <p:spPr>
-          <a:xfrm>
-            <a:off x="6537960" y="4645152"/>
-            <a:ext cx="5029200" cy="594360"/>
-          </a:xfrm>
-          <a:prstGeom prst="rect">
-            <a:avLst/>
-          </a:prstGeom>
-          <a:noFill/>
-          <a:ln/>
-        </p:spPr>
-        <p:txBody>
-          <a:bodyPr wrap="square" lIns="0" tIns="0" rIns="0" bIns="0" rtlCol="0" anchor="t"/>
-          <a:lstStyle/>
-          <a:p>
-            <a:pPr algn="l" indent="0" marL="0">
-              <a:lnSpc>
-                <a:spcPct val="105000"/>
-              </a:lnSpc>
+              <a:t>switch LMWH → UFH (or briefly hold) to allow neuraxial anaesthesia and limit bleeding.</a:t>
+            </a:r>
+            <a:endParaRPr lang="en-US" sz="1350" dirty="0"/>
+          </a:p>
+        </p:txBody>
+      </p:sp>
+      <p:sp>
+        <p:nvSpPr>
+          <p:cNvPr id="28" name="Text 21"/>
+          <p:cNvSpPr/>
+          <p:nvPr/>
+        </p:nvSpPr>
+        <p:spPr>
+          <a:xfrm>
+            <a:off x="914400" y="5468112"/>
+            <a:ext cx="10607040" cy="365760"/>
+          </a:xfrm>
+          <a:prstGeom prst="rect">
+            <a:avLst/>
+          </a:prstGeom>
+          <a:noFill/>
+          <a:ln/>
+        </p:spPr>
+        <p:txBody>
+          <a:bodyPr wrap="square" lIns="0" tIns="0" rIns="0" bIns="0" rtlCol="0" anchor="ctr"/>
+          <a:lstStyle/>
+          <a:p>
+            <a:pPr algn="l" indent="0" marL="0">
               <a:buNone/>
             </a:pPr>
             <a:r>
               <a:rPr lang="en-US" sz="1350" b="1" dirty="0">
                 <a:solidFill>
-                  <a:srgbClr val="2B2B33"/>
+                  <a:srgbClr val="A4133C"/>
                 </a:solidFill>
                 <a:latin typeface="Calibri" pitchFamily="34" charset="0"/>
                 <a:ea typeface="Calibri" pitchFamily="34" charset="-122"/>
                 <a:cs typeface="Calibri" pitchFamily="34" charset="-120"/>
               </a:rPr>
-              <a:t>Amiodarone  </a:t>
-            </a:r>
-            <a:pPr algn="l" indent="0" marL="0">
-              <a:lnSpc>
-                <a:spcPct val="105000"/>
-              </a:lnSpc>
+              <a:t>Breastfeeding   </a:t>
+            </a:r>
+            <a:pPr algn="l" indent="0" marL="0">
               <a:buNone/>
             </a:pPr>
             <a:r>
               <a:rPr lang="en-US" sz="1350" dirty="0">
                 <a:solidFill>
-                  <a:srgbClr val="6B6B76"/>
+                  <a:srgbClr val="2B2B33"/>
                 </a:solidFill>
                 <a:latin typeface="Calibri" pitchFamily="34" charset="0"/>
                 <a:ea typeface="Calibri" pitchFamily="34" charset="-122"/>
                 <a:cs typeface="Calibri" pitchFamily="34" charset="-120"/>
               </a:rPr>
-              <a:t>— fetal thyroid dysfunction &amp; IUGR; only if life-threatening</a:t>
-            </a:r>
-            <a:endParaRPr lang="en-US" sz="1350" dirty="0"/>
-          </a:p>
-        </p:txBody>
-      </p:sp>
-      <p:sp>
-        <p:nvSpPr>
-          <p:cNvPr id="28" name="Text 21"/>
-          <p:cNvSpPr/>
-          <p:nvPr/>
-        </p:nvSpPr>
-        <p:spPr>
-          <a:xfrm>
-            <a:off x="6537960" y="5285232"/>
-            <a:ext cx="5029200" cy="457200"/>
-          </a:xfrm>
-          <a:prstGeom prst="rect">
-            <a:avLst/>
-          </a:prstGeom>
-          <a:noFill/>
-          <a:ln/>
-        </p:spPr>
-        <p:txBody>
-          <a:bodyPr wrap="square" lIns="0" tIns="0" rIns="0" bIns="0" rtlCol="0" anchor="t"/>
-          <a:lstStyle/>
-          <a:p>
-            <a:pPr algn="l" indent="0" marL="0">
-              <a:buNone/>
-            </a:pPr>
-            <a:r>
-              <a:rPr lang="en-US" sz="1350" b="1" dirty="0">
-                <a:solidFill>
-                  <a:srgbClr val="2B2B33"/>
-                </a:solidFill>
-                <a:latin typeface="Calibri" pitchFamily="34" charset="0"/>
-                <a:ea typeface="Calibri" pitchFamily="34" charset="-122"/>
-                <a:cs typeface="Calibri" pitchFamily="34" charset="-120"/>
-              </a:rPr>
-              <a:t>Atenolol  </a:t>
-            </a:r>
-            <a:pPr algn="l" indent="0" marL="0">
-              <a:buNone/>
-            </a:pPr>
-            <a:r>
-              <a:rPr lang="en-US" sz="1350" dirty="0">
-                <a:solidFill>
-                  <a:srgbClr val="6B6B76"/>
-                </a:solidFill>
-                <a:latin typeface="Calibri" pitchFamily="34" charset="0"/>
-                <a:ea typeface="Calibri" pitchFamily="34" charset="-122"/>
-                <a:cs typeface="Calibri" pitchFamily="34" charset="-120"/>
-              </a:rPr>
-              <a:t>— linked to fetal growth restriction</a:t>
+              <a:t>warfarin, LMWH and UFH are compatible; DOACs are avoided. Plan with a specialist team.</a:t>
             </a:r>
             <a:endParaRPr lang="en-US" sz="1350" dirty="0"/>
           </a:p>
@@ -12686,7 +13517,7 @@
     <p:bg>
       <p:bgPr>
         <a:solidFill>
-          <a:srgbClr val="590D22"/>
+          <a:srgbClr val="FFFFFF"/>
         </a:solidFill>
       </p:bgPr>
     </p:bg>
@@ -12712,18 +13543,21 @@
         </p:nvSpPr>
         <p:spPr>
           <a:xfrm>
-            <a:off x="0" y="0"/>
-            <a:ext cx="12191695" cy="6858000"/>
-          </a:xfrm>
-          <a:prstGeom prst="rect">
+            <a:off x="502920" y="457200"/>
+            <a:ext cx="868680" cy="868680"/>
+          </a:xfrm>
+          <a:prstGeom prst="ellipse">
             <a:avLst/>
           </a:prstGeom>
           <a:solidFill>
-            <a:srgbClr val="3A0A17">
-              <a:alpha val="65000"/>
-            </a:srgbClr>
+            <a:srgbClr val="FFF0F3"/>
           </a:solidFill>
-          <a:ln/>
+          <a:ln w="12700">
+            <a:solidFill>
+              <a:srgbClr val="FBD8DF"/>
+            </a:solidFill>
+            <a:prstDash val="solid"/>
+          </a:ln>
         </p:spPr>
       </p:sp>
       <p:pic>
@@ -12735,17 +13569,15 @@
           <p:nvPr/>
         </p:nvPicPr>
         <p:blipFill>
-          <a:blip r:embed="rId1">
-            <a:alphaModFix amt="9000"/>
-          </a:blip>
+          <a:blip r:embed="rId1"/>
           <a:stretch>
             <a:fillRect/>
           </a:stretch>
         </p:blipFill>
         <p:spPr>
           <a:xfrm>
-            <a:off x="8321040" y="3291840"/>
-            <a:ext cx="4572000" cy="4572000"/>
+            <a:off x="694944" y="649224"/>
+            <a:ext cx="484632" cy="484632"/>
           </a:xfrm>
           <a:prstGeom prst="rect">
             <a:avLst/>
@@ -12754,27 +13586,197 @@
       </p:pic>
       <p:sp>
         <p:nvSpPr>
-          <p:cNvPr id="4" name="Shape 1"/>
-          <p:cNvSpPr/>
-          <p:nvPr/>
-        </p:nvSpPr>
-        <p:spPr>
-          <a:xfrm>
-            <a:off x="685800" y="685800"/>
-            <a:ext cx="960120" cy="960120"/>
+          <p:cNvPr id="4" name="Text 1"/>
+          <p:cNvSpPr/>
+          <p:nvPr/>
+        </p:nvSpPr>
+        <p:spPr>
+          <a:xfrm>
+            <a:off x="1572768" y="502920"/>
+            <a:ext cx="9966960" cy="274320"/>
+          </a:xfrm>
+          <a:prstGeom prst="rect">
+            <a:avLst/>
+          </a:prstGeom>
+          <a:noFill/>
+          <a:ln/>
+        </p:spPr>
+        <p:txBody>
+          <a:bodyPr wrap="square" rtlCol="0" anchor="t"/>
+          <a:lstStyle/>
+          <a:p>
+            <a:pPr algn="l" indent="0" marL="0">
+              <a:buNone/>
+            </a:pPr>
+            <a:r>
+              <a:rPr lang="en-US" sz="1250" b="1" spc="200" kern="0" dirty="0">
+                <a:solidFill>
+                  <a:srgbClr val="A4133C"/>
+                </a:solidFill>
+                <a:latin typeface="Calibri" pitchFamily="34" charset="0"/>
+                <a:ea typeface="Calibri" pitchFamily="34" charset="-122"/>
+                <a:cs typeface="Calibri" pitchFamily="34" charset="-120"/>
+              </a:rPr>
+              <a:t>SPECIAL POPULATIONS · PREGNANCY</a:t>
+            </a:r>
+            <a:endParaRPr lang="en-US" sz="1250" dirty="0"/>
+          </a:p>
+        </p:txBody>
+      </p:sp>
+      <p:sp>
+        <p:nvSpPr>
+          <p:cNvPr id="5" name="Text 2"/>
+          <p:cNvSpPr/>
+          <p:nvPr/>
+        </p:nvSpPr>
+        <p:spPr>
+          <a:xfrm>
+            <a:off x="1554480" y="749808"/>
+            <a:ext cx="10241280" cy="640080"/>
+          </a:xfrm>
+          <a:prstGeom prst="rect">
+            <a:avLst/>
+          </a:prstGeom>
+          <a:noFill/>
+          <a:ln/>
+        </p:spPr>
+        <p:txBody>
+          <a:bodyPr wrap="square" rtlCol="0" anchor="t"/>
+          <a:lstStyle/>
+          <a:p>
+            <a:pPr algn="l" indent="0" marL="0">
+              <a:buNone/>
+            </a:pPr>
+            <a:r>
+              <a:rPr lang="en-US" sz="3000" b="1" dirty="0">
+                <a:solidFill>
+                  <a:srgbClr val="2B2B33"/>
+                </a:solidFill>
+                <a:latin typeface="Cambria" pitchFamily="34" charset="0"/>
+                <a:ea typeface="Cambria" pitchFamily="34" charset="-122"/>
+                <a:cs typeface="Cambria" pitchFamily="34" charset="-120"/>
+              </a:rPr>
+              <a:t>Rhythm &amp; Rate Control in Pregnancy</a:t>
+            </a:r>
+            <a:endParaRPr lang="en-US" sz="3000" dirty="0"/>
+          </a:p>
+        </p:txBody>
+      </p:sp>
+      <p:sp>
+        <p:nvSpPr>
+          <p:cNvPr id="6" name="Shape 3"/>
+          <p:cNvSpPr/>
+          <p:nvPr/>
+        </p:nvSpPr>
+        <p:spPr>
+          <a:xfrm>
+            <a:off x="502920" y="1783080"/>
+            <a:ext cx="5532120" cy="4206240"/>
+          </a:xfrm>
+          <a:prstGeom prst="roundRect">
+            <a:avLst>
+              <a:gd name="adj" fmla="val 2609"/>
+            </a:avLst>
+          </a:prstGeom>
+          <a:solidFill>
+            <a:srgbClr val="FFF0F3"/>
+          </a:solidFill>
+          <a:ln w="12700">
+            <a:solidFill>
+              <a:srgbClr val="FBD8DF"/>
+            </a:solidFill>
+            <a:prstDash val="solid"/>
+          </a:ln>
+          <a:effectLst>
+            <a:outerShdw sx="100000" sy="100000" kx="0" ky="0" algn="bl" rotWithShape="0" blurRad="127000" dist="50800" dir="5400000">
+              <a:srgbClr val="C9A3AC">
+                <a:alpha val="45000"/>
+              </a:srgbClr>
+            </a:outerShdw>
+          </a:effectLst>
+        </p:spPr>
+      </p:sp>
+      <p:sp>
+        <p:nvSpPr>
+          <p:cNvPr id="7" name="Text 4"/>
+          <p:cNvSpPr/>
+          <p:nvPr/>
+        </p:nvSpPr>
+        <p:spPr>
+          <a:xfrm>
+            <a:off x="868680" y="2057400"/>
+            <a:ext cx="4846320" cy="274320"/>
+          </a:xfrm>
+          <a:prstGeom prst="rect">
+            <a:avLst/>
+          </a:prstGeom>
+          <a:noFill/>
+          <a:ln/>
+        </p:spPr>
+        <p:txBody>
+          <a:bodyPr wrap="square" rtlCol="0" anchor="t"/>
+          <a:lstStyle/>
+          <a:p>
+            <a:pPr algn="l" indent="0" marL="0">
+              <a:buNone/>
+            </a:pPr>
+            <a:r>
+              <a:rPr lang="en-US" sz="1300" b="1" spc="150" kern="0" dirty="0">
+                <a:solidFill>
+                  <a:srgbClr val="2E7D32"/>
+                </a:solidFill>
+                <a:latin typeface="Calibri" pitchFamily="34" charset="0"/>
+                <a:ea typeface="Calibri" pitchFamily="34" charset="-122"/>
+                <a:cs typeface="Calibri" pitchFamily="34" charset="-120"/>
+              </a:rPr>
+              <a:t>✓  </a:t>
+            </a:r>
+            <a:pPr algn="l" indent="0" marL="0">
+              <a:buNone/>
+            </a:pPr>
+            <a:r>
+              <a:rPr lang="en-US" sz="1300" b="1" spc="150" kern="0" dirty="0">
+                <a:solidFill>
+                  <a:srgbClr val="2E7D32"/>
+                </a:solidFill>
+                <a:latin typeface="Calibri" pitchFamily="34" charset="0"/>
+                <a:ea typeface="Calibri" pitchFamily="34" charset="-122"/>
+                <a:cs typeface="Calibri" pitchFamily="34" charset="-120"/>
+              </a:rPr>
+              <a:t>GENERALLY SAFE</a:t>
+            </a:r>
+            <a:endParaRPr lang="en-US" sz="1300" dirty="0"/>
+          </a:p>
+        </p:txBody>
+      </p:sp>
+      <p:sp>
+        <p:nvSpPr>
+          <p:cNvPr id="8" name="Shape 5"/>
+          <p:cNvSpPr/>
+          <p:nvPr/>
+        </p:nvSpPr>
+        <p:spPr>
+          <a:xfrm>
+            <a:off x="868680" y="2542032"/>
+            <a:ext cx="566928" cy="566928"/>
           </a:xfrm>
           <a:prstGeom prst="ellipse">
             <a:avLst/>
           </a:prstGeom>
           <a:solidFill>
-            <a:srgbClr val="A4133C"/>
+            <a:srgbClr val="FFFFFF"/>
           </a:solidFill>
-          <a:ln/>
+          <a:ln w="12700">
+            <a:solidFill>
+              <a:srgbClr val="FBD8DF"/>
+            </a:solidFill>
+            <a:prstDash val="solid"/>
+          </a:ln>
         </p:spPr>
       </p:sp>
       <p:pic>
         <p:nvPicPr>
-          <p:cNvPr id="5" name="Image 1" descr="preencoded.png">    </p:cNvPr>
+          <p:cNvPr id="9" name="Image 1" descr="preencoded.png">    </p:cNvPr>
           <p:cNvPicPr>
             <a:picLocks noChangeAspect="1"/>
           </p:cNvPicPr>
@@ -12788,8 +13790,8 @@
         </p:blipFill>
         <p:spPr>
           <a:xfrm>
-            <a:off x="905256" y="905256"/>
-            <a:ext cx="521208" cy="521208"/>
+            <a:off x="1014984" y="2688336"/>
+            <a:ext cx="274320" cy="274320"/>
           </a:xfrm>
           <a:prstGeom prst="rect">
             <a:avLst/>
@@ -12798,105 +13800,110 @@
       </p:pic>
       <p:sp>
         <p:nvSpPr>
-          <p:cNvPr id="6" name="Text 2"/>
-          <p:cNvSpPr/>
-          <p:nvPr/>
-        </p:nvSpPr>
-        <p:spPr>
-          <a:xfrm>
-            <a:off x="1828800" y="868680"/>
-            <a:ext cx="8229600" cy="548640"/>
-          </a:xfrm>
-          <a:prstGeom prst="rect">
-            <a:avLst/>
-          </a:prstGeom>
-          <a:noFill/>
-          <a:ln/>
-        </p:spPr>
-        <p:txBody>
-          <a:bodyPr wrap="square" rtlCol="0" anchor="ctr"/>
-          <a:lstStyle/>
-          <a:p>
-            <a:pPr algn="l" indent="0" marL="0">
-              <a:buNone/>
-            </a:pPr>
-            <a:r>
-              <a:rPr lang="en-US" sz="1700" b="1" spc="300" kern="0" dirty="0">
-                <a:solidFill>
-                  <a:srgbClr val="FF4D6D"/>
+          <p:cNvPr id="10" name="Text 6"/>
+          <p:cNvSpPr/>
+          <p:nvPr/>
+        </p:nvSpPr>
+        <p:spPr>
+          <a:xfrm>
+            <a:off x="1618488" y="2505456"/>
+            <a:ext cx="4233672" cy="292608"/>
+          </a:xfrm>
+          <a:prstGeom prst="rect">
+            <a:avLst/>
+          </a:prstGeom>
+          <a:noFill/>
+          <a:ln/>
+        </p:spPr>
+        <p:txBody>
+          <a:bodyPr wrap="square" lIns="0" tIns="0" rIns="0" bIns="0" rtlCol="0" anchor="t"/>
+          <a:lstStyle/>
+          <a:p>
+            <a:pPr algn="l" indent="0" marL="0">
+              <a:buNone/>
+            </a:pPr>
+            <a:r>
+              <a:rPr lang="en-US" sz="1600" b="1" dirty="0">
+                <a:solidFill>
+                  <a:srgbClr val="2B2B33"/>
+                </a:solidFill>
+                <a:latin typeface="Cambria" pitchFamily="34" charset="0"/>
+                <a:ea typeface="Cambria" pitchFamily="34" charset="-122"/>
+                <a:cs typeface="Cambria" pitchFamily="34" charset="-120"/>
+              </a:rPr>
+              <a:t>Beta-blockers</a:t>
+            </a:r>
+            <a:endParaRPr lang="en-US" sz="1600" dirty="0"/>
+          </a:p>
+        </p:txBody>
+      </p:sp>
+      <p:sp>
+        <p:nvSpPr>
+          <p:cNvPr id="11" name="Text 7"/>
+          <p:cNvSpPr/>
+          <p:nvPr/>
+        </p:nvSpPr>
+        <p:spPr>
+          <a:xfrm>
+            <a:off x="1618488" y="2816352"/>
+            <a:ext cx="4233672" cy="365760"/>
+          </a:xfrm>
+          <a:prstGeom prst="rect">
+            <a:avLst/>
+          </a:prstGeom>
+          <a:noFill/>
+          <a:ln/>
+        </p:spPr>
+        <p:txBody>
+          <a:bodyPr wrap="square" lIns="0" tIns="0" rIns="0" bIns="0" rtlCol="0" anchor="t"/>
+          <a:lstStyle/>
+          <a:p>
+            <a:pPr algn="l" indent="0" marL="0">
+              <a:buNone/>
+            </a:pPr>
+            <a:r>
+              <a:rPr lang="en-US" sz="1250" dirty="0">
+                <a:solidFill>
+                  <a:srgbClr val="6B6B76"/>
                 </a:solidFill>
                 <a:latin typeface="Calibri" pitchFamily="34" charset="0"/>
                 <a:ea typeface="Calibri" pitchFamily="34" charset="-122"/>
                 <a:cs typeface="Calibri" pitchFamily="34" charset="-120"/>
               </a:rPr>
-              <a:t>SUMMARY</a:t>
-            </a:r>
-            <a:endParaRPr lang="en-US" sz="1700" dirty="0"/>
-          </a:p>
-        </p:txBody>
-      </p:sp>
-      <p:sp>
-        <p:nvSpPr>
-          <p:cNvPr id="7" name="Text 3"/>
-          <p:cNvSpPr/>
-          <p:nvPr/>
-        </p:nvSpPr>
-        <p:spPr>
-          <a:xfrm>
-            <a:off x="640080" y="1691640"/>
-            <a:ext cx="10058400" cy="914400"/>
-          </a:xfrm>
-          <a:prstGeom prst="rect">
-            <a:avLst/>
-          </a:prstGeom>
-          <a:noFill/>
-          <a:ln/>
-        </p:spPr>
-        <p:txBody>
-          <a:bodyPr wrap="square" rtlCol="0" anchor="t"/>
-          <a:lstStyle/>
-          <a:p>
-            <a:pPr algn="l" indent="0" marL="0">
-              <a:buNone/>
-            </a:pPr>
-            <a:r>
-              <a:rPr lang="en-US" sz="4600" b="1" dirty="0">
-                <a:solidFill>
-                  <a:srgbClr val="FFFFFF"/>
-                </a:solidFill>
-                <a:latin typeface="Cambria" pitchFamily="34" charset="0"/>
-                <a:ea typeface="Cambria" pitchFamily="34" charset="-122"/>
-                <a:cs typeface="Cambria" pitchFamily="34" charset="-120"/>
-              </a:rPr>
-              <a:t>Key Points</a:t>
-            </a:r>
-            <a:endParaRPr lang="en-US" sz="4600" dirty="0"/>
-          </a:p>
-        </p:txBody>
-      </p:sp>
-      <p:sp>
-        <p:nvSpPr>
-          <p:cNvPr id="8" name="Shape 4"/>
-          <p:cNvSpPr/>
-          <p:nvPr/>
-        </p:nvSpPr>
-        <p:spPr>
-          <a:xfrm>
-            <a:off x="713232" y="2596896"/>
-            <a:ext cx="292608" cy="292608"/>
+              <a:t>First-line rate control (metoprolol, bisoprolol) — avoid atenolol</a:t>
+            </a:r>
+            <a:endParaRPr lang="en-US" sz="1250" dirty="0"/>
+          </a:p>
+        </p:txBody>
+      </p:sp>
+      <p:sp>
+        <p:nvSpPr>
+          <p:cNvPr id="12" name="Shape 8"/>
+          <p:cNvSpPr/>
+          <p:nvPr/>
+        </p:nvSpPr>
+        <p:spPr>
+          <a:xfrm>
+            <a:off x="868680" y="3621024"/>
+            <a:ext cx="566928" cy="566928"/>
           </a:xfrm>
           <a:prstGeom prst="ellipse">
             <a:avLst/>
           </a:prstGeom>
           <a:solidFill>
-            <a:srgbClr val="A4133C"/>
+            <a:srgbClr val="FFFFFF"/>
           </a:solidFill>
-          <a:ln/>
+          <a:ln w="12700">
+            <a:solidFill>
+              <a:srgbClr val="FBD8DF"/>
+            </a:solidFill>
+            <a:prstDash val="solid"/>
+          </a:ln>
         </p:spPr>
       </p:sp>
       <p:pic>
         <p:nvPicPr>
-          <p:cNvPr id="9" name="Image 2" descr="preencoded.png">    </p:cNvPr>
+          <p:cNvPr id="13" name="Image 2" descr="preencoded.png">    </p:cNvPr>
           <p:cNvPicPr>
             <a:picLocks noChangeAspect="1"/>
           </p:cNvPicPr>
@@ -12910,8 +13917,8 @@
         </p:blipFill>
         <p:spPr>
           <a:xfrm>
-            <a:off x="777240" y="2660904"/>
-            <a:ext cx="164592" cy="164592"/>
+            <a:off x="1014984" y="3767328"/>
+            <a:ext cx="274320" cy="274320"/>
           </a:xfrm>
           <a:prstGeom prst="rect">
             <a:avLst/>
@@ -12920,69 +13927,110 @@
       </p:pic>
       <p:sp>
         <p:nvSpPr>
-          <p:cNvPr id="10" name="Text 5"/>
-          <p:cNvSpPr/>
-          <p:nvPr/>
-        </p:nvSpPr>
-        <p:spPr>
-          <a:xfrm>
-            <a:off x="1188720" y="2578608"/>
-            <a:ext cx="10058400" cy="502920"/>
-          </a:xfrm>
-          <a:prstGeom prst="rect">
-            <a:avLst/>
-          </a:prstGeom>
-          <a:noFill/>
-          <a:ln/>
-        </p:spPr>
-        <p:txBody>
-          <a:bodyPr wrap="square" lIns="0" tIns="0" rIns="0" bIns="0" rtlCol="0" anchor="ctr"/>
-          <a:lstStyle/>
-          <a:p>
-            <a:pPr algn="l" indent="0" marL="0">
-              <a:lnSpc>
-                <a:spcPct val="105000"/>
-              </a:lnSpc>
-              <a:buNone/>
-            </a:pPr>
-            <a:r>
-              <a:rPr lang="en-US" sz="1500" dirty="0">
-                <a:solidFill>
-                  <a:srgbClr val="FBD8DF"/>
+          <p:cNvPr id="14" name="Text 9"/>
+          <p:cNvSpPr/>
+          <p:nvPr/>
+        </p:nvSpPr>
+        <p:spPr>
+          <a:xfrm>
+            <a:off x="1618488" y="3584448"/>
+            <a:ext cx="4233672" cy="292608"/>
+          </a:xfrm>
+          <a:prstGeom prst="rect">
+            <a:avLst/>
+          </a:prstGeom>
+          <a:noFill/>
+          <a:ln/>
+        </p:spPr>
+        <p:txBody>
+          <a:bodyPr wrap="square" lIns="0" tIns="0" rIns="0" bIns="0" rtlCol="0" anchor="t"/>
+          <a:lstStyle/>
+          <a:p>
+            <a:pPr algn="l" indent="0" marL="0">
+              <a:buNone/>
+            </a:pPr>
+            <a:r>
+              <a:rPr lang="en-US" sz="1600" b="1" dirty="0">
+                <a:solidFill>
+                  <a:srgbClr val="2B2B33"/>
+                </a:solidFill>
+                <a:latin typeface="Cambria" pitchFamily="34" charset="0"/>
+                <a:ea typeface="Cambria" pitchFamily="34" charset="-122"/>
+                <a:cs typeface="Cambria" pitchFamily="34" charset="-120"/>
+              </a:rPr>
+              <a:t>Digoxin</a:t>
+            </a:r>
+            <a:endParaRPr lang="en-US" sz="1600" dirty="0"/>
+          </a:p>
+        </p:txBody>
+      </p:sp>
+      <p:sp>
+        <p:nvSpPr>
+          <p:cNvPr id="15" name="Text 10"/>
+          <p:cNvSpPr/>
+          <p:nvPr/>
+        </p:nvSpPr>
+        <p:spPr>
+          <a:xfrm>
+            <a:off x="1618488" y="3895344"/>
+            <a:ext cx="4233672" cy="365760"/>
+          </a:xfrm>
+          <a:prstGeom prst="rect">
+            <a:avLst/>
+          </a:prstGeom>
+          <a:noFill/>
+          <a:ln/>
+        </p:spPr>
+        <p:txBody>
+          <a:bodyPr wrap="square" lIns="0" tIns="0" rIns="0" bIns="0" rtlCol="0" anchor="t"/>
+          <a:lstStyle/>
+          <a:p>
+            <a:pPr algn="l" indent="0" marL="0">
+              <a:buNone/>
+            </a:pPr>
+            <a:r>
+              <a:rPr lang="en-US" sz="1250" dirty="0">
+                <a:solidFill>
+                  <a:srgbClr val="6B6B76"/>
                 </a:solidFill>
                 <a:latin typeface="Calibri" pitchFamily="34" charset="0"/>
                 <a:ea typeface="Calibri" pitchFamily="34" charset="-122"/>
                 <a:cs typeface="Calibri" pitchFamily="34" charset="-120"/>
               </a:rPr>
-              <a:t>AF = irregularly irregular rhythm with absent P waves and a fibrillatory baseline.</a:t>
-            </a:r>
-            <a:endParaRPr lang="en-US" sz="1500" dirty="0"/>
-          </a:p>
-        </p:txBody>
-      </p:sp>
-      <p:sp>
-        <p:nvSpPr>
-          <p:cNvPr id="11" name="Shape 6"/>
-          <p:cNvSpPr/>
-          <p:nvPr/>
-        </p:nvSpPr>
-        <p:spPr>
-          <a:xfrm>
-            <a:off x="713232" y="3145536"/>
-            <a:ext cx="292608" cy="292608"/>
+              <a:t>Safe option for rate control</a:t>
+            </a:r>
+            <a:endParaRPr lang="en-US" sz="1250" dirty="0"/>
+          </a:p>
+        </p:txBody>
+      </p:sp>
+      <p:sp>
+        <p:nvSpPr>
+          <p:cNvPr id="16" name="Shape 11"/>
+          <p:cNvSpPr/>
+          <p:nvPr/>
+        </p:nvSpPr>
+        <p:spPr>
+          <a:xfrm>
+            <a:off x="868680" y="4700016"/>
+            <a:ext cx="566928" cy="566928"/>
           </a:xfrm>
           <a:prstGeom prst="ellipse">
             <a:avLst/>
           </a:prstGeom>
           <a:solidFill>
-            <a:srgbClr val="A4133C"/>
+            <a:srgbClr val="FFFFFF"/>
           </a:solidFill>
-          <a:ln/>
+          <a:ln w="12700">
+            <a:solidFill>
+              <a:srgbClr val="FBD8DF"/>
+            </a:solidFill>
+            <a:prstDash val="solid"/>
+          </a:ln>
         </p:spPr>
       </p:sp>
       <p:pic>
         <p:nvPicPr>
-          <p:cNvPr id="12" name="Image 3" descr="preencoded.png">    </p:cNvPr>
+          <p:cNvPr id="17" name="Image 3" descr="preencoded.png">    </p:cNvPr>
           <p:cNvPicPr>
             <a:picLocks noChangeAspect="1"/>
           </p:cNvPicPr>
@@ -12996,8 +14044,8 @@
         </p:blipFill>
         <p:spPr>
           <a:xfrm>
-            <a:off x="777240" y="3209544"/>
-            <a:ext cx="164592" cy="164592"/>
+            <a:off x="1014984" y="4846320"/>
+            <a:ext cx="274320" cy="274320"/>
           </a:xfrm>
           <a:prstGeom prst="rect">
             <a:avLst/>
@@ -13006,56 +14054,121 @@
       </p:pic>
       <p:sp>
         <p:nvSpPr>
-          <p:cNvPr id="13" name="Text 7"/>
-          <p:cNvSpPr/>
-          <p:nvPr/>
-        </p:nvSpPr>
-        <p:spPr>
-          <a:xfrm>
-            <a:off x="1188720" y="3127248"/>
-            <a:ext cx="10058400" cy="502920"/>
-          </a:xfrm>
-          <a:prstGeom prst="rect">
-            <a:avLst/>
-          </a:prstGeom>
-          <a:noFill/>
-          <a:ln/>
-        </p:spPr>
-        <p:txBody>
-          <a:bodyPr wrap="square" lIns="0" tIns="0" rIns="0" bIns="0" rtlCol="0" anchor="ctr"/>
-          <a:lstStyle/>
-          <a:p>
-            <a:pPr algn="l" indent="0" marL="0">
-              <a:lnSpc>
-                <a:spcPct val="105000"/>
-              </a:lnSpc>
-              <a:buNone/>
-            </a:pPr>
-            <a:r>
-              <a:rPr lang="en-US" sz="1500" dirty="0">
-                <a:solidFill>
-                  <a:srgbClr val="FBD8DF"/>
+          <p:cNvPr id="18" name="Text 12"/>
+          <p:cNvSpPr/>
+          <p:nvPr/>
+        </p:nvSpPr>
+        <p:spPr>
+          <a:xfrm>
+            <a:off x="1618488" y="4663440"/>
+            <a:ext cx="4233672" cy="292608"/>
+          </a:xfrm>
+          <a:prstGeom prst="rect">
+            <a:avLst/>
+          </a:prstGeom>
+          <a:noFill/>
+          <a:ln/>
+        </p:spPr>
+        <p:txBody>
+          <a:bodyPr wrap="square" lIns="0" tIns="0" rIns="0" bIns="0" rtlCol="0" anchor="t"/>
+          <a:lstStyle/>
+          <a:p>
+            <a:pPr algn="l" indent="0" marL="0">
+              <a:buNone/>
+            </a:pPr>
+            <a:r>
+              <a:rPr lang="en-US" sz="1600" b="1" dirty="0">
+                <a:solidFill>
+                  <a:srgbClr val="2B2B33"/>
+                </a:solidFill>
+                <a:latin typeface="Cambria" pitchFamily="34" charset="0"/>
+                <a:ea typeface="Cambria" pitchFamily="34" charset="-122"/>
+                <a:cs typeface="Cambria" pitchFamily="34" charset="-120"/>
+              </a:rPr>
+              <a:t>Flecainide / sotalol</a:t>
+            </a:r>
+            <a:endParaRPr lang="en-US" sz="1600" dirty="0"/>
+          </a:p>
+        </p:txBody>
+      </p:sp>
+      <p:sp>
+        <p:nvSpPr>
+          <p:cNvPr id="19" name="Text 13"/>
+          <p:cNvSpPr/>
+          <p:nvPr/>
+        </p:nvSpPr>
+        <p:spPr>
+          <a:xfrm>
+            <a:off x="1618488" y="4974336"/>
+            <a:ext cx="4233672" cy="365760"/>
+          </a:xfrm>
+          <a:prstGeom prst="rect">
+            <a:avLst/>
+          </a:prstGeom>
+          <a:noFill/>
+          <a:ln/>
+        </p:spPr>
+        <p:txBody>
+          <a:bodyPr wrap="square" lIns="0" tIns="0" rIns="0" bIns="0" rtlCol="0" anchor="t"/>
+          <a:lstStyle/>
+          <a:p>
+            <a:pPr algn="l" indent="0" marL="0">
+              <a:buNone/>
+            </a:pPr>
+            <a:r>
+              <a:rPr lang="en-US" sz="1250" dirty="0">
+                <a:solidFill>
+                  <a:srgbClr val="6B6B76"/>
                 </a:solidFill>
                 <a:latin typeface="Calibri" pitchFamily="34" charset="0"/>
                 <a:ea typeface="Calibri" pitchFamily="34" charset="-122"/>
                 <a:cs typeface="Calibri" pitchFamily="34" charset="-120"/>
               </a:rPr>
-              <a:t>The commonest sustained arrhythmia — linked to hypertension, age and structural heart disease.</a:t>
-            </a:r>
-            <a:endParaRPr lang="en-US" sz="1500" dirty="0"/>
-          </a:p>
-        </p:txBody>
-      </p:sp>
-      <p:sp>
-        <p:nvSpPr>
-          <p:cNvPr id="14" name="Shape 8"/>
-          <p:cNvSpPr/>
-          <p:nvPr/>
-        </p:nvSpPr>
-        <p:spPr>
-          <a:xfrm>
-            <a:off x="713232" y="3694176"/>
-            <a:ext cx="292608" cy="292608"/>
+              <a:t>For rhythm control when needed</a:t>
+            </a:r>
+            <a:endParaRPr lang="en-US" sz="1250" dirty="0"/>
+          </a:p>
+        </p:txBody>
+      </p:sp>
+      <p:sp>
+        <p:nvSpPr>
+          <p:cNvPr id="20" name="Shape 14"/>
+          <p:cNvSpPr/>
+          <p:nvPr/>
+        </p:nvSpPr>
+        <p:spPr>
+          <a:xfrm>
+            <a:off x="6172200" y="1783080"/>
+            <a:ext cx="5532120" cy="2011680"/>
+          </a:xfrm>
+          <a:prstGeom prst="roundRect">
+            <a:avLst>
+              <a:gd name="adj" fmla="val 5455"/>
+            </a:avLst>
+          </a:prstGeom>
+          <a:solidFill>
+            <a:srgbClr val="590D22"/>
+          </a:solidFill>
+          <a:ln/>
+          <a:effectLst>
+            <a:outerShdw sx="100000" sy="100000" kx="0" ky="0" algn="bl" rotWithShape="0" blurRad="127000" dist="50800" dir="5400000">
+              <a:srgbClr val="C9A3AC">
+                <a:alpha val="45000"/>
+              </a:srgbClr>
+            </a:outerShdw>
+          </a:effectLst>
+        </p:spPr>
+      </p:sp>
+      <p:sp>
+        <p:nvSpPr>
+          <p:cNvPr id="21" name="Shape 15"/>
+          <p:cNvSpPr/>
+          <p:nvPr/>
+        </p:nvSpPr>
+        <p:spPr>
+          <a:xfrm>
+            <a:off x="6492240" y="2148840"/>
+            <a:ext cx="868680" cy="868680"/>
           </a:xfrm>
           <a:prstGeom prst="ellipse">
             <a:avLst/>
@@ -13068,7 +14181,7 @@
       </p:sp>
       <p:pic>
         <p:nvPicPr>
-          <p:cNvPr id="15" name="Image 4" descr="preencoded.png">    </p:cNvPr>
+          <p:cNvPr id="22" name="Image 4" descr="preencoded.png">    </p:cNvPr>
           <p:cNvPicPr>
             <a:picLocks noChangeAspect="1"/>
           </p:cNvPicPr>
@@ -13082,8 +14195,8 @@
         </p:blipFill>
         <p:spPr>
           <a:xfrm>
-            <a:off x="777240" y="3758184"/>
-            <a:ext cx="164592" cy="164592"/>
+            <a:off x="6729984" y="2377440"/>
+            <a:ext cx="402336" cy="402336"/>
           </a:xfrm>
           <a:prstGeom prst="rect">
             <a:avLst/>
@@ -13092,23 +14205,191 @@
       </p:pic>
       <p:sp>
         <p:nvSpPr>
-          <p:cNvPr id="16" name="Text 9"/>
-          <p:cNvSpPr/>
-          <p:nvPr/>
-        </p:nvSpPr>
-        <p:spPr>
-          <a:xfrm>
-            <a:off x="1188720" y="3675888"/>
-            <a:ext cx="10058400" cy="502920"/>
-          </a:xfrm>
-          <a:prstGeom prst="rect">
-            <a:avLst/>
-          </a:prstGeom>
-          <a:noFill/>
-          <a:ln/>
-        </p:spPr>
-        <p:txBody>
-          <a:bodyPr wrap="square" lIns="0" tIns="0" rIns="0" bIns="0" rtlCol="0" anchor="ctr"/>
+          <p:cNvPr id="23" name="Text 16"/>
+          <p:cNvSpPr/>
+          <p:nvPr/>
+        </p:nvSpPr>
+        <p:spPr>
+          <a:xfrm>
+            <a:off x="7498080" y="2194560"/>
+            <a:ext cx="4023360" cy="457200"/>
+          </a:xfrm>
+          <a:prstGeom prst="rect">
+            <a:avLst/>
+          </a:prstGeom>
+          <a:noFill/>
+          <a:ln/>
+        </p:spPr>
+        <p:txBody>
+          <a:bodyPr wrap="square" rtlCol="0" anchor="ctr"/>
+          <a:lstStyle/>
+          <a:p>
+            <a:pPr algn="l" indent="0" marL="0">
+              <a:buNone/>
+            </a:pPr>
+            <a:r>
+              <a:rPr lang="en-US" sz="2100" b="1" dirty="0">
+                <a:solidFill>
+                  <a:srgbClr val="FFFFFF"/>
+                </a:solidFill>
+                <a:latin typeface="Cambria" pitchFamily="34" charset="0"/>
+                <a:ea typeface="Cambria" pitchFamily="34" charset="-122"/>
+                <a:cs typeface="Cambria" pitchFamily="34" charset="-120"/>
+              </a:rPr>
+              <a:t>Cardioversion</a:t>
+            </a:r>
+            <a:endParaRPr lang="en-US" sz="2100" dirty="0"/>
+          </a:p>
+        </p:txBody>
+      </p:sp>
+      <p:sp>
+        <p:nvSpPr>
+          <p:cNvPr id="24" name="Text 17"/>
+          <p:cNvSpPr/>
+          <p:nvPr/>
+        </p:nvSpPr>
+        <p:spPr>
+          <a:xfrm>
+            <a:off x="6537960" y="2852928"/>
+            <a:ext cx="5029200" cy="822960"/>
+          </a:xfrm>
+          <a:prstGeom prst="rect">
+            <a:avLst/>
+          </a:prstGeom>
+          <a:noFill/>
+          <a:ln/>
+        </p:spPr>
+        <p:txBody>
+          <a:bodyPr wrap="square" rtlCol="0" anchor="t"/>
+          <a:lstStyle/>
+          <a:p>
+            <a:pPr algn="l" indent="0" marL="0">
+              <a:lnSpc>
+                <a:spcPct val="112000"/>
+              </a:lnSpc>
+              <a:buNone/>
+            </a:pPr>
+            <a:r>
+              <a:rPr lang="en-US" sz="1400" dirty="0">
+                <a:solidFill>
+                  <a:srgbClr val="FBD8DF"/>
+                </a:solidFill>
+                <a:latin typeface="Calibri" pitchFamily="34" charset="0"/>
+                <a:ea typeface="Calibri" pitchFamily="34" charset="-122"/>
+                <a:cs typeface="Calibri" pitchFamily="34" charset="-120"/>
+              </a:rPr>
+              <a:t>DC cardioversion is safe in all trimesters — perform with fetal monitoring.</a:t>
+            </a:r>
+            <a:endParaRPr lang="en-US" sz="1400" dirty="0"/>
+          </a:p>
+        </p:txBody>
+      </p:sp>
+      <p:sp>
+        <p:nvSpPr>
+          <p:cNvPr id="25" name="Shape 18"/>
+          <p:cNvSpPr/>
+          <p:nvPr/>
+        </p:nvSpPr>
+        <p:spPr>
+          <a:xfrm>
+            <a:off x="6172200" y="3977640"/>
+            <a:ext cx="5532120" cy="2011680"/>
+          </a:xfrm>
+          <a:prstGeom prst="roundRect">
+            <a:avLst>
+              <a:gd name="adj" fmla="val 5455"/>
+            </a:avLst>
+          </a:prstGeom>
+          <a:solidFill>
+            <a:srgbClr val="FFF0F3"/>
+          </a:solidFill>
+          <a:ln w="12700">
+            <a:solidFill>
+              <a:srgbClr val="FBD8DF"/>
+            </a:solidFill>
+            <a:prstDash val="solid"/>
+          </a:ln>
+          <a:effectLst>
+            <a:outerShdw sx="100000" sy="100000" kx="0" ky="0" algn="bl" rotWithShape="0" blurRad="127000" dist="50800" dir="5400000">
+              <a:srgbClr val="C9A3AC">
+                <a:alpha val="45000"/>
+              </a:srgbClr>
+            </a:outerShdw>
+          </a:effectLst>
+        </p:spPr>
+      </p:sp>
+      <p:sp>
+        <p:nvSpPr>
+          <p:cNvPr id="26" name="Text 19"/>
+          <p:cNvSpPr/>
+          <p:nvPr/>
+        </p:nvSpPr>
+        <p:spPr>
+          <a:xfrm>
+            <a:off x="6537960" y="4206240"/>
+            <a:ext cx="4937760" cy="274320"/>
+          </a:xfrm>
+          <a:prstGeom prst="rect">
+            <a:avLst/>
+          </a:prstGeom>
+          <a:noFill/>
+          <a:ln/>
+        </p:spPr>
+        <p:txBody>
+          <a:bodyPr wrap="square" rtlCol="0" anchor="t"/>
+          <a:lstStyle/>
+          <a:p>
+            <a:pPr algn="l" indent="0" marL="0">
+              <a:buNone/>
+            </a:pPr>
+            <a:r>
+              <a:rPr lang="en-US" sz="1300" b="1" spc="120" kern="0" dirty="0">
+                <a:solidFill>
+                  <a:srgbClr val="A4133C"/>
+                </a:solidFill>
+                <a:latin typeface="Calibri" pitchFamily="34" charset="0"/>
+                <a:ea typeface="Calibri" pitchFamily="34" charset="-122"/>
+                <a:cs typeface="Calibri" pitchFamily="34" charset="-120"/>
+              </a:rPr>
+              <a:t>✕  </a:t>
+            </a:r>
+            <a:pPr algn="l" indent="0" marL="0">
+              <a:buNone/>
+            </a:pPr>
+            <a:r>
+              <a:rPr lang="en-US" sz="1300" b="1" spc="120" kern="0" dirty="0">
+                <a:solidFill>
+                  <a:srgbClr val="A4133C"/>
+                </a:solidFill>
+                <a:latin typeface="Calibri" pitchFamily="34" charset="0"/>
+                <a:ea typeface="Calibri" pitchFamily="34" charset="-122"/>
+                <a:cs typeface="Calibri" pitchFamily="34" charset="-120"/>
+              </a:rPr>
+              <a:t>USE WITH CAUTION / AVOID</a:t>
+            </a:r>
+            <a:endParaRPr lang="en-US" sz="1300" dirty="0"/>
+          </a:p>
+        </p:txBody>
+      </p:sp>
+      <p:sp>
+        <p:nvSpPr>
+          <p:cNvPr id="27" name="Text 20"/>
+          <p:cNvSpPr/>
+          <p:nvPr/>
+        </p:nvSpPr>
+        <p:spPr>
+          <a:xfrm>
+            <a:off x="6537960" y="4645152"/>
+            <a:ext cx="5029200" cy="594360"/>
+          </a:xfrm>
+          <a:prstGeom prst="rect">
+            <a:avLst/>
+          </a:prstGeom>
+          <a:noFill/>
+          <a:ln/>
+        </p:spPr>
+        <p:txBody>
+          <a:bodyPr wrap="square" lIns="0" tIns="0" rIns="0" bIns="0" rtlCol="0" anchor="t"/>
           <a:lstStyle/>
           <a:p>
             <a:pPr algn="l" indent="0" marL="0">
@@ -13118,85 +14399,16 @@
               <a:buNone/>
             </a:pPr>
             <a:r>
-              <a:rPr lang="en-US" sz="1500" dirty="0">
-                <a:solidFill>
-                  <a:srgbClr val="FBD8DF"/>
+              <a:rPr lang="en-US" sz="1350" b="1" dirty="0">
+                <a:solidFill>
+                  <a:srgbClr val="2B2B33"/>
                 </a:solidFill>
                 <a:latin typeface="Calibri" pitchFamily="34" charset="0"/>
                 <a:ea typeface="Calibri" pitchFamily="34" charset="-122"/>
                 <a:cs typeface="Calibri" pitchFamily="34" charset="-120"/>
               </a:rPr>
-              <a:t>Its main danger is thromboembolic stroke — always assess stroke risk (CHA₂DS₂-VASc).</a:t>
-            </a:r>
-            <a:endParaRPr lang="en-US" sz="1500" dirty="0"/>
-          </a:p>
-        </p:txBody>
-      </p:sp>
-      <p:sp>
-        <p:nvSpPr>
-          <p:cNvPr id="17" name="Shape 10"/>
-          <p:cNvSpPr/>
-          <p:nvPr/>
-        </p:nvSpPr>
-        <p:spPr>
-          <a:xfrm>
-            <a:off x="713232" y="4242816"/>
-            <a:ext cx="292608" cy="292608"/>
-          </a:xfrm>
-          <a:prstGeom prst="ellipse">
-            <a:avLst/>
-          </a:prstGeom>
-          <a:solidFill>
-            <a:srgbClr val="A4133C"/>
-          </a:solidFill>
-          <a:ln/>
-        </p:spPr>
-      </p:sp>
-      <p:pic>
-        <p:nvPicPr>
-          <p:cNvPr id="18" name="Image 5" descr="preencoded.png">    </p:cNvPr>
-          <p:cNvPicPr>
-            <a:picLocks noChangeAspect="1"/>
-          </p:cNvPicPr>
-          <p:nvPr/>
-        </p:nvPicPr>
-        <p:blipFill>
-          <a:blip r:embed="rId6"/>
-          <a:stretch>
-            <a:fillRect/>
-          </a:stretch>
-        </p:blipFill>
-        <p:spPr>
-          <a:xfrm>
-            <a:off x="777240" y="4306824"/>
-            <a:ext cx="164592" cy="164592"/>
-          </a:xfrm>
-          <a:prstGeom prst="rect">
-            <a:avLst/>
-          </a:prstGeom>
-        </p:spPr>
-      </p:pic>
-      <p:sp>
-        <p:nvSpPr>
-          <p:cNvPr id="19" name="Text 11"/>
-          <p:cNvSpPr/>
-          <p:nvPr/>
-        </p:nvSpPr>
-        <p:spPr>
-          <a:xfrm>
-            <a:off x="1188720" y="4224528"/>
-            <a:ext cx="10058400" cy="502920"/>
-          </a:xfrm>
-          <a:prstGeom prst="rect">
-            <a:avLst/>
-          </a:prstGeom>
-          <a:noFill/>
-          <a:ln/>
-        </p:spPr>
-        <p:txBody>
-          <a:bodyPr wrap="square" lIns="0" tIns="0" rIns="0" bIns="0" rtlCol="0" anchor="ctr"/>
-          <a:lstStyle/>
-          <a:p>
+              <a:t>Amiodarone  </a:t>
+            </a:r>
             <a:pPr algn="l" indent="0" marL="0">
               <a:lnSpc>
                 <a:spcPct val="105000"/>
@@ -13204,195 +14416,76 @@
               <a:buNone/>
             </a:pPr>
             <a:r>
-              <a:rPr lang="en-US" sz="1500" dirty="0">
-                <a:solidFill>
-                  <a:srgbClr val="FBD8DF"/>
+              <a:rPr lang="en-US" sz="1350" dirty="0">
+                <a:solidFill>
+                  <a:srgbClr val="6B6B76"/>
                 </a:solidFill>
                 <a:latin typeface="Calibri" pitchFamily="34" charset="0"/>
                 <a:ea typeface="Calibri" pitchFamily="34" charset="-122"/>
                 <a:cs typeface="Calibri" pitchFamily="34" charset="-120"/>
               </a:rPr>
-              <a:t>Differentials: atrial flutter, multifocal atrial tachycardia, frequent PACs, SVT, pre-excited AF / VT.</a:t>
-            </a:r>
-            <a:endParaRPr lang="en-US" sz="1500" dirty="0"/>
-          </a:p>
-        </p:txBody>
-      </p:sp>
-      <p:sp>
-        <p:nvSpPr>
-          <p:cNvPr id="20" name="Shape 12"/>
-          <p:cNvSpPr/>
-          <p:nvPr/>
-        </p:nvSpPr>
-        <p:spPr>
-          <a:xfrm>
-            <a:off x="713232" y="4791456"/>
-            <a:ext cx="292608" cy="292608"/>
-          </a:xfrm>
-          <a:prstGeom prst="ellipse">
-            <a:avLst/>
-          </a:prstGeom>
-          <a:solidFill>
-            <a:srgbClr val="A4133C"/>
-          </a:solidFill>
-          <a:ln/>
-        </p:spPr>
-      </p:sp>
-      <p:pic>
-        <p:nvPicPr>
-          <p:cNvPr id="21" name="Image 6" descr="preencoded.png">    </p:cNvPr>
-          <p:cNvPicPr>
-            <a:picLocks noChangeAspect="1"/>
-          </p:cNvPicPr>
-          <p:nvPr/>
-        </p:nvPicPr>
-        <p:blipFill>
-          <a:blip r:embed="rId7"/>
-          <a:stretch>
-            <a:fillRect/>
-          </a:stretch>
-        </p:blipFill>
-        <p:spPr>
-          <a:xfrm>
-            <a:off x="777240" y="4855464"/>
-            <a:ext cx="164592" cy="164592"/>
-          </a:xfrm>
-          <a:prstGeom prst="rect">
-            <a:avLst/>
-          </a:prstGeom>
-        </p:spPr>
-      </p:pic>
-      <p:sp>
-        <p:nvSpPr>
-          <p:cNvPr id="22" name="Text 13"/>
-          <p:cNvSpPr/>
-          <p:nvPr/>
-        </p:nvSpPr>
-        <p:spPr>
-          <a:xfrm>
-            <a:off x="1188720" y="4773168"/>
-            <a:ext cx="10058400" cy="502920"/>
-          </a:xfrm>
-          <a:prstGeom prst="rect">
-            <a:avLst/>
-          </a:prstGeom>
-          <a:noFill/>
-          <a:ln/>
-        </p:spPr>
-        <p:txBody>
-          <a:bodyPr wrap="square" lIns="0" tIns="0" rIns="0" bIns="0" rtlCol="0" anchor="ctr"/>
-          <a:lstStyle/>
-          <a:p>
-            <a:pPr algn="l" indent="0" marL="0">
-              <a:lnSpc>
-                <a:spcPct val="105000"/>
-              </a:lnSpc>
-              <a:buNone/>
-            </a:pPr>
-            <a:r>
-              <a:rPr lang="en-US" sz="1500" dirty="0">
-                <a:solidFill>
-                  <a:srgbClr val="FBD8DF"/>
+              <a:t>— fetal thyroid dysfunction &amp; IUGR; only if life-threatening</a:t>
+            </a:r>
+            <a:endParaRPr lang="en-US" sz="1350" dirty="0"/>
+          </a:p>
+        </p:txBody>
+      </p:sp>
+      <p:sp>
+        <p:nvSpPr>
+          <p:cNvPr id="28" name="Text 21"/>
+          <p:cNvSpPr/>
+          <p:nvPr/>
+        </p:nvSpPr>
+        <p:spPr>
+          <a:xfrm>
+            <a:off x="6537960" y="5285232"/>
+            <a:ext cx="5029200" cy="457200"/>
+          </a:xfrm>
+          <a:prstGeom prst="rect">
+            <a:avLst/>
+          </a:prstGeom>
+          <a:noFill/>
+          <a:ln/>
+        </p:spPr>
+        <p:txBody>
+          <a:bodyPr wrap="square" lIns="0" tIns="0" rIns="0" bIns="0" rtlCol="0" anchor="t"/>
+          <a:lstStyle/>
+          <a:p>
+            <a:pPr algn="l" indent="0" marL="0">
+              <a:buNone/>
+            </a:pPr>
+            <a:r>
+              <a:rPr lang="en-US" sz="1350" b="1" dirty="0">
+                <a:solidFill>
+                  <a:srgbClr val="2B2B33"/>
                 </a:solidFill>
                 <a:latin typeface="Calibri" pitchFamily="34" charset="0"/>
                 <a:ea typeface="Calibri" pitchFamily="34" charset="-122"/>
                 <a:cs typeface="Calibri" pitchFamily="34" charset="-120"/>
               </a:rPr>
-              <a:t>Manage with the ABC pathway: Anticoagulation, Better symptom control, Comorbidities.</a:t>
-            </a:r>
-            <a:endParaRPr lang="en-US" sz="1500" dirty="0"/>
-          </a:p>
-        </p:txBody>
-      </p:sp>
-      <p:sp>
-        <p:nvSpPr>
-          <p:cNvPr id="23" name="Shape 14"/>
-          <p:cNvSpPr/>
-          <p:nvPr/>
-        </p:nvSpPr>
-        <p:spPr>
-          <a:xfrm>
-            <a:off x="713232" y="5340096"/>
-            <a:ext cx="292608" cy="292608"/>
-          </a:xfrm>
-          <a:prstGeom prst="ellipse">
-            <a:avLst/>
-          </a:prstGeom>
-          <a:solidFill>
-            <a:srgbClr val="A4133C"/>
-          </a:solidFill>
-          <a:ln/>
-        </p:spPr>
-      </p:sp>
-      <p:pic>
-        <p:nvPicPr>
-          <p:cNvPr id="24" name="Image 7" descr="preencoded.png">    </p:cNvPr>
-          <p:cNvPicPr>
-            <a:picLocks noChangeAspect="1"/>
-          </p:cNvPicPr>
-          <p:nvPr/>
-        </p:nvPicPr>
-        <p:blipFill>
-          <a:blip r:embed="rId8"/>
-          <a:stretch>
-            <a:fillRect/>
-          </a:stretch>
-        </p:blipFill>
-        <p:spPr>
-          <a:xfrm>
-            <a:off x="777240" y="5404104"/>
-            <a:ext cx="164592" cy="164592"/>
-          </a:xfrm>
-          <a:prstGeom prst="rect">
-            <a:avLst/>
-          </a:prstGeom>
-        </p:spPr>
-      </p:pic>
-      <p:sp>
-        <p:nvSpPr>
-          <p:cNvPr id="25" name="Text 15"/>
-          <p:cNvSpPr/>
-          <p:nvPr/>
-        </p:nvSpPr>
-        <p:spPr>
-          <a:xfrm>
-            <a:off x="1188720" y="5321808"/>
-            <a:ext cx="10058400" cy="502920"/>
-          </a:xfrm>
-          <a:prstGeom prst="rect">
-            <a:avLst/>
-          </a:prstGeom>
-          <a:noFill/>
-          <a:ln/>
-        </p:spPr>
-        <p:txBody>
-          <a:bodyPr wrap="square" lIns="0" tIns="0" rIns="0" bIns="0" rtlCol="0" anchor="ctr"/>
-          <a:lstStyle/>
-          <a:p>
-            <a:pPr algn="l" indent="0" marL="0">
-              <a:lnSpc>
-                <a:spcPct val="105000"/>
-              </a:lnSpc>
-              <a:buNone/>
-            </a:pPr>
-            <a:r>
-              <a:rPr lang="en-US" sz="1500" dirty="0">
-                <a:solidFill>
-                  <a:srgbClr val="FBD8DF"/>
+              <a:t>Atenolol  </a:t>
+            </a:r>
+            <a:pPr algn="l" indent="0" marL="0">
+              <a:buNone/>
+            </a:pPr>
+            <a:r>
+              <a:rPr lang="en-US" sz="1350" dirty="0">
+                <a:solidFill>
+                  <a:srgbClr val="6B6B76"/>
                 </a:solidFill>
                 <a:latin typeface="Calibri" pitchFamily="34" charset="0"/>
                 <a:ea typeface="Calibri" pitchFamily="34" charset="-122"/>
                 <a:cs typeface="Calibri" pitchFamily="34" charset="-120"/>
               </a:rPr>
-              <a:t>In pregnancy: LMWH is the anticoagulant of choice — avoid warfarin and DOACs.</a:t>
-            </a:r>
-            <a:endParaRPr lang="en-US" sz="1500" dirty="0"/>
-          </a:p>
-        </p:txBody>
-      </p:sp>
-      <p:sp>
-        <p:nvSpPr>
-          <p:cNvPr id="26" name="Text 16"/>
+              <a:t>— linked to fetal growth restriction</a:t>
+            </a:r>
+            <a:endParaRPr lang="en-US" sz="1350" dirty="0"/>
+          </a:p>
+        </p:txBody>
+      </p:sp>
+      <p:sp>
+        <p:nvSpPr>
+          <p:cNvPr id="29" name="Text 22"/>
           <p:cNvSpPr/>
           <p:nvPr/>
         </p:nvSpPr>
@@ -13417,7 +14510,7 @@
             <a:r>
               <a:rPr lang="en-US" sz="1100" b="1" dirty="0">
                 <a:solidFill>
-                  <a:srgbClr val="FBD8DF"/>
+                  <a:srgbClr val="6B6B76"/>
                 </a:solidFill>
                 <a:latin typeface="Calibri" pitchFamily="34" charset="0"/>
                 <a:ea typeface="Calibri" pitchFamily="34" charset="-122"/>
@@ -13431,7 +14524,7 @@
       </p:sp>
       <p:sp>
         <p:nvSpPr>
-          <p:cNvPr id="27" name="Text 17"/>
+          <p:cNvPr id="30" name="Text 23"/>
           <p:cNvSpPr/>
           <p:nvPr/>
         </p:nvSpPr>
@@ -13456,7 +14549,7 @@
             <a:r>
               <a:rPr lang="en-US" sz="900" dirty="0">
                 <a:solidFill>
-                  <a:srgbClr val="FBD8DF"/>
+                  <a:srgbClr val="6B6B76"/>
                 </a:solidFill>
                 <a:latin typeface="Calibri" pitchFamily="34" charset="0"/>
                 <a:ea typeface="Calibri" pitchFamily="34" charset="-122"/>
@@ -13516,7 +14609,7 @@
           </a:prstGeom>
           <a:solidFill>
             <a:srgbClr val="3A0A17">
-              <a:alpha val="74000"/>
+              <a:alpha val="65000"/>
             </a:srgbClr>
           </a:solidFill>
           <a:ln/>
@@ -13532,7 +14625,7 @@
         </p:nvPicPr>
         <p:blipFill>
           <a:blip r:embed="rId1">
-            <a:alphaModFix amt="10000"/>
+            <a:alphaModFix amt="9000"/>
           </a:blip>
           <a:stretch>
             <a:fillRect/>
@@ -13540,34 +14633,52 @@
         </p:blipFill>
         <p:spPr>
           <a:xfrm>
-            <a:off x="8092440" y="3063240"/>
-            <a:ext cx="4754880" cy="4754880"/>
+            <a:off x="8321040" y="3291840"/>
+            <a:ext cx="4572000" cy="4572000"/>
           </a:xfrm>
           <a:prstGeom prst="rect">
             <a:avLst/>
           </a:prstGeom>
         </p:spPr>
       </p:pic>
+      <p:sp>
+        <p:nvSpPr>
+          <p:cNvPr id="4" name="Shape 1"/>
+          <p:cNvSpPr/>
+          <p:nvPr/>
+        </p:nvSpPr>
+        <p:spPr>
+          <a:xfrm>
+            <a:off x="685800" y="685800"/>
+            <a:ext cx="960120" cy="960120"/>
+          </a:xfrm>
+          <a:prstGeom prst="ellipse">
+            <a:avLst/>
+          </a:prstGeom>
+          <a:solidFill>
+            <a:srgbClr val="A4133C"/>
+          </a:solidFill>
+          <a:ln/>
+        </p:spPr>
+      </p:sp>
       <p:pic>
         <p:nvPicPr>
-          <p:cNvPr id="4" name="Image 1" descr="preencoded.png">    </p:cNvPr>
+          <p:cNvPr id="5" name="Image 1" descr="preencoded.png">    </p:cNvPr>
           <p:cNvPicPr>
             <a:picLocks noChangeAspect="1"/>
           </p:cNvPicPr>
           <p:nvPr/>
         </p:nvPicPr>
         <p:blipFill>
-          <a:blip r:embed="rId2">
-            <a:alphaModFix amt="7000"/>
-          </a:blip>
+          <a:blip r:embed="rId2"/>
           <a:stretch>
             <a:fillRect/>
           </a:stretch>
         </p:blipFill>
         <p:spPr>
           <a:xfrm>
-            <a:off x="-822960" y="-960120"/>
-            <a:ext cx="4023360" cy="4023360"/>
+            <a:off x="905256" y="905256"/>
+            <a:ext cx="521208" cy="521208"/>
           </a:xfrm>
           <a:prstGeom prst="rect">
             <a:avLst/>
@@ -13576,14 +14687,92 @@
       </p:pic>
       <p:sp>
         <p:nvSpPr>
-          <p:cNvPr id="5" name="Shape 1"/>
-          <p:cNvSpPr/>
-          <p:nvPr/>
-        </p:nvSpPr>
-        <p:spPr>
-          <a:xfrm>
-            <a:off x="5711800" y="1234440"/>
-            <a:ext cx="768096" cy="768096"/>
+          <p:cNvPr id="6" name="Text 2"/>
+          <p:cNvSpPr/>
+          <p:nvPr/>
+        </p:nvSpPr>
+        <p:spPr>
+          <a:xfrm>
+            <a:off x="1828800" y="868680"/>
+            <a:ext cx="8229600" cy="548640"/>
+          </a:xfrm>
+          <a:prstGeom prst="rect">
+            <a:avLst/>
+          </a:prstGeom>
+          <a:noFill/>
+          <a:ln/>
+        </p:spPr>
+        <p:txBody>
+          <a:bodyPr wrap="square" rtlCol="0" anchor="ctr"/>
+          <a:lstStyle/>
+          <a:p>
+            <a:pPr algn="l" indent="0" marL="0">
+              <a:buNone/>
+            </a:pPr>
+            <a:r>
+              <a:rPr lang="en-US" sz="1700" b="1" spc="300" kern="0" dirty="0">
+                <a:solidFill>
+                  <a:srgbClr val="FF4D6D"/>
+                </a:solidFill>
+                <a:latin typeface="Calibri" pitchFamily="34" charset="0"/>
+                <a:ea typeface="Calibri" pitchFamily="34" charset="-122"/>
+                <a:cs typeface="Calibri" pitchFamily="34" charset="-120"/>
+              </a:rPr>
+              <a:t>SUMMARY</a:t>
+            </a:r>
+            <a:endParaRPr lang="en-US" sz="1700" dirty="0"/>
+          </a:p>
+        </p:txBody>
+      </p:sp>
+      <p:sp>
+        <p:nvSpPr>
+          <p:cNvPr id="7" name="Text 3"/>
+          <p:cNvSpPr/>
+          <p:nvPr/>
+        </p:nvSpPr>
+        <p:spPr>
+          <a:xfrm>
+            <a:off x="640080" y="1691640"/>
+            <a:ext cx="10058400" cy="914400"/>
+          </a:xfrm>
+          <a:prstGeom prst="rect">
+            <a:avLst/>
+          </a:prstGeom>
+          <a:noFill/>
+          <a:ln/>
+        </p:spPr>
+        <p:txBody>
+          <a:bodyPr wrap="square" rtlCol="0" anchor="t"/>
+          <a:lstStyle/>
+          <a:p>
+            <a:pPr algn="l" indent="0" marL="0">
+              <a:buNone/>
+            </a:pPr>
+            <a:r>
+              <a:rPr lang="en-US" sz="4600" b="1" dirty="0">
+                <a:solidFill>
+                  <a:srgbClr val="FFFFFF"/>
+                </a:solidFill>
+                <a:latin typeface="Cambria" pitchFamily="34" charset="0"/>
+                <a:ea typeface="Cambria" pitchFamily="34" charset="-122"/>
+                <a:cs typeface="Cambria" pitchFamily="34" charset="-120"/>
+              </a:rPr>
+              <a:t>Key Points</a:t>
+            </a:r>
+            <a:endParaRPr lang="en-US" sz="4600" dirty="0"/>
+          </a:p>
+        </p:txBody>
+      </p:sp>
+      <p:sp>
+        <p:nvSpPr>
+          <p:cNvPr id="8" name="Shape 4"/>
+          <p:cNvSpPr/>
+          <p:nvPr/>
+        </p:nvSpPr>
+        <p:spPr>
+          <a:xfrm>
+            <a:off x="713232" y="2596896"/>
+            <a:ext cx="292608" cy="292608"/>
           </a:xfrm>
           <a:prstGeom prst="ellipse">
             <a:avLst/>
@@ -13596,7 +14785,7 @@
       </p:sp>
       <p:pic>
         <p:nvPicPr>
-          <p:cNvPr id="6" name="Image 2" descr="preencoded.png">    </p:cNvPr>
+          <p:cNvPr id="9" name="Image 2" descr="preencoded.png">    </p:cNvPr>
           <p:cNvPicPr>
             <a:picLocks noChangeAspect="1"/>
           </p:cNvPicPr>
@@ -13610,8 +14799,8 @@
         </p:blipFill>
         <p:spPr>
           <a:xfrm>
-            <a:off x="5867248" y="1399032"/>
-            <a:ext cx="457200" cy="457200"/>
+            <a:off x="777240" y="2660904"/>
+            <a:ext cx="164592" cy="164592"/>
           </a:xfrm>
           <a:prstGeom prst="rect">
             <a:avLst/>
@@ -13620,127 +14809,45 @@
       </p:pic>
       <p:sp>
         <p:nvSpPr>
-          <p:cNvPr id="7" name="Text 2"/>
-          <p:cNvSpPr/>
-          <p:nvPr/>
-        </p:nvSpPr>
-        <p:spPr>
-          <a:xfrm>
-            <a:off x="457200" y="2286000"/>
-            <a:ext cx="11274552" cy="1554480"/>
-          </a:xfrm>
-          <a:prstGeom prst="rect">
-            <a:avLst/>
-          </a:prstGeom>
-          <a:noFill/>
-          <a:ln/>
-        </p:spPr>
-        <p:txBody>
-          <a:bodyPr wrap="square" rtlCol="0" anchor="t"/>
-          <a:lstStyle/>
-          <a:p>
-            <a:pPr algn="ctr" indent="0" marL="0">
-              <a:buNone/>
-            </a:pPr>
-            <a:r>
-              <a:rPr lang="en-US" sz="8800" b="1" dirty="0">
-                <a:solidFill>
-                  <a:srgbClr val="FFFFFF"/>
-                </a:solidFill>
-                <a:latin typeface="Cambria" pitchFamily="34" charset="0"/>
-                <a:ea typeface="Cambria" pitchFamily="34" charset="-122"/>
-                <a:cs typeface="Cambria" pitchFamily="34" charset="-120"/>
-              </a:rPr>
-              <a:t>Thank You</a:t>
-            </a:r>
-            <a:endParaRPr lang="en-US" sz="8800" dirty="0"/>
-          </a:p>
-        </p:txBody>
-      </p:sp>
-      <p:sp>
-        <p:nvSpPr>
-          <p:cNvPr id="8" name="Text 3"/>
-          <p:cNvSpPr/>
-          <p:nvPr/>
-        </p:nvSpPr>
-        <p:spPr>
-          <a:xfrm>
-            <a:off x="457200" y="4114800"/>
-            <a:ext cx="11274552" cy="457200"/>
-          </a:xfrm>
-          <a:prstGeom prst="rect">
-            <a:avLst/>
-          </a:prstGeom>
-          <a:noFill/>
-          <a:ln/>
-        </p:spPr>
-        <p:txBody>
-          <a:bodyPr wrap="square" rtlCol="0" anchor="t"/>
-          <a:lstStyle/>
-          <a:p>
-            <a:pPr algn="ctr" indent="0" marL="0">
-              <a:buNone/>
-            </a:pPr>
-            <a:r>
-              <a:rPr lang="en-US" sz="2200" i="1" dirty="0">
-                <a:solidFill>
-                  <a:srgbClr val="FF4D6D"/>
+          <p:cNvPr id="10" name="Text 5"/>
+          <p:cNvSpPr/>
+          <p:nvPr/>
+        </p:nvSpPr>
+        <p:spPr>
+          <a:xfrm>
+            <a:off x="1188720" y="2578608"/>
+            <a:ext cx="10058400" cy="502920"/>
+          </a:xfrm>
+          <a:prstGeom prst="rect">
+            <a:avLst/>
+          </a:prstGeom>
+          <a:noFill/>
+          <a:ln/>
+        </p:spPr>
+        <p:txBody>
+          <a:bodyPr wrap="square" lIns="0" tIns="0" rIns="0" bIns="0" rtlCol="0" anchor="ctr"/>
+          <a:lstStyle/>
+          <a:p>
+            <a:pPr algn="l" indent="0" marL="0">
+              <a:lnSpc>
+                <a:spcPct val="105000"/>
+              </a:lnSpc>
+              <a:buNone/>
+            </a:pPr>
+            <a:r>
+              <a:rPr lang="en-US" sz="1500" dirty="0">
+                <a:solidFill>
+                  <a:srgbClr val="FBD8DF"/>
                 </a:solidFill>
                 <a:latin typeface="Calibri" pitchFamily="34" charset="0"/>
                 <a:ea typeface="Calibri" pitchFamily="34" charset="-122"/>
                 <a:cs typeface="Calibri" pitchFamily="34" charset="-120"/>
               </a:rPr>
-              <a:t>Questions &amp; Discussion Welcome</a:t>
-            </a:r>
-            <a:endParaRPr lang="en-US" sz="2200" dirty="0"/>
-          </a:p>
-        </p:txBody>
-      </p:sp>
-      <p:sp>
-        <p:nvSpPr>
-          <p:cNvPr id="9" name="Shape 4"/>
-          <p:cNvSpPr/>
-          <p:nvPr/>
-        </p:nvSpPr>
-        <p:spPr>
-          <a:xfrm>
-            <a:off x="3355848" y="5212080"/>
-            <a:ext cx="1865376" cy="0"/>
-          </a:xfrm>
-          <a:prstGeom prst="line">
-            <a:avLst/>
-          </a:prstGeom>
-          <a:noFill/>
-          <a:ln w="28575">
-            <a:solidFill>
-              <a:srgbClr val="FF4D6D"/>
-            </a:solidFill>
-            <a:prstDash val="solid"/>
-          </a:ln>
-        </p:spPr>
-      </p:sp>
-      <p:sp>
-        <p:nvSpPr>
-          <p:cNvPr id="10" name="Shape 5"/>
-          <p:cNvSpPr/>
-          <p:nvPr/>
-        </p:nvSpPr>
-        <p:spPr>
-          <a:xfrm flipV="1">
-            <a:off x="5221224" y="5065776"/>
-            <a:ext cx="329184" cy="146304"/>
-          </a:xfrm>
-          <a:prstGeom prst="line">
-            <a:avLst/>
-          </a:prstGeom>
-          <a:noFill/>
-          <a:ln w="28575">
-            <a:solidFill>
-              <a:srgbClr val="FF4D6D"/>
-            </a:solidFill>
-            <a:prstDash val="solid"/>
-          </a:ln>
-        </p:spPr>
+              <a:t>AF = irregularly irregular rhythm with absent P waves and a fibrillatory baseline.</a:t>
+            </a:r>
+            <a:endParaRPr lang="en-US" sz="1500" dirty="0"/>
+          </a:p>
+        </p:txBody>
       </p:sp>
       <p:sp>
         <p:nvSpPr>
@@ -13750,182 +14857,157 @@
         </p:nvSpPr>
         <p:spPr>
           <a:xfrm>
-            <a:off x="5550408" y="5065776"/>
-            <a:ext cx="329184" cy="457200"/>
-          </a:xfrm>
-          <a:prstGeom prst="line">
-            <a:avLst/>
-          </a:prstGeom>
-          <a:noFill/>
-          <a:ln w="28575">
-            <a:solidFill>
-              <a:srgbClr val="FF4D6D"/>
-            </a:solidFill>
-            <a:prstDash val="solid"/>
-          </a:ln>
-        </p:spPr>
-      </p:sp>
-      <p:sp>
-        <p:nvSpPr>
-          <p:cNvPr id="12" name="Shape 7"/>
-          <p:cNvSpPr/>
-          <p:nvPr/>
-        </p:nvSpPr>
-        <p:spPr>
-          <a:xfrm flipV="1">
-            <a:off x="5879592" y="4709160"/>
-            <a:ext cx="329184" cy="813816"/>
-          </a:xfrm>
-          <a:prstGeom prst="line">
-            <a:avLst/>
-          </a:prstGeom>
-          <a:noFill/>
-          <a:ln w="28575">
-            <a:solidFill>
-              <a:srgbClr val="FF4D6D"/>
-            </a:solidFill>
-            <a:prstDash val="solid"/>
-          </a:ln>
-        </p:spPr>
-      </p:sp>
-      <p:sp>
-        <p:nvSpPr>
-          <p:cNvPr id="13" name="Shape 8"/>
-          <p:cNvSpPr/>
-          <p:nvPr/>
-        </p:nvSpPr>
-        <p:spPr>
-          <a:xfrm>
-            <a:off x="6208776" y="4709160"/>
-            <a:ext cx="329184" cy="685800"/>
-          </a:xfrm>
-          <a:prstGeom prst="line">
-            <a:avLst/>
-          </a:prstGeom>
-          <a:noFill/>
-          <a:ln w="28575">
-            <a:solidFill>
-              <a:srgbClr val="FF4D6D"/>
-            </a:solidFill>
-            <a:prstDash val="solid"/>
-          </a:ln>
-        </p:spPr>
-      </p:sp>
-      <p:sp>
-        <p:nvSpPr>
-          <p:cNvPr id="14" name="Shape 9"/>
-          <p:cNvSpPr/>
-          <p:nvPr/>
-        </p:nvSpPr>
-        <p:spPr>
-          <a:xfrm flipV="1">
-            <a:off x="6537960" y="5212080"/>
-            <a:ext cx="329184" cy="182880"/>
-          </a:xfrm>
-          <a:prstGeom prst="line">
-            <a:avLst/>
-          </a:prstGeom>
-          <a:noFill/>
-          <a:ln w="28575">
-            <a:solidFill>
-              <a:srgbClr val="FF4D6D"/>
-            </a:solidFill>
-            <a:prstDash val="solid"/>
-          </a:ln>
-        </p:spPr>
-      </p:sp>
-      <p:sp>
-        <p:nvSpPr>
-          <p:cNvPr id="15" name="Shape 10"/>
-          <p:cNvSpPr/>
-          <p:nvPr/>
-        </p:nvSpPr>
-        <p:spPr>
-          <a:xfrm>
-            <a:off x="6867144" y="5212080"/>
-            <a:ext cx="1975104" cy="0"/>
-          </a:xfrm>
-          <a:prstGeom prst="line">
-            <a:avLst/>
-          </a:prstGeom>
-          <a:noFill/>
-          <a:ln w="28575">
-            <a:solidFill>
-              <a:srgbClr val="FF4D6D"/>
-            </a:solidFill>
-            <a:prstDash val="solid"/>
-          </a:ln>
-        </p:spPr>
-      </p:sp>
-      <p:sp>
-        <p:nvSpPr>
-          <p:cNvPr id="16" name="Shape 11"/>
-          <p:cNvSpPr/>
-          <p:nvPr/>
-        </p:nvSpPr>
-        <p:spPr>
-          <a:xfrm>
-            <a:off x="2621128" y="5486400"/>
-            <a:ext cx="6949440" cy="658368"/>
-          </a:xfrm>
-          <a:prstGeom prst="roundRect">
-            <a:avLst>
-              <a:gd name="adj" fmla="val 50000"/>
-            </a:avLst>
+            <a:off x="713232" y="3145536"/>
+            <a:ext cx="292608" cy="292608"/>
+          </a:xfrm>
+          <a:prstGeom prst="ellipse">
+            <a:avLst/>
           </a:prstGeom>
           <a:solidFill>
-            <a:srgbClr val="FFFFFF">
-              <a:alpha val="8000"/>
-            </a:srgbClr>
+            <a:srgbClr val="A4133C"/>
           </a:solidFill>
-          <a:ln w="12700">
-            <a:solidFill>
-              <a:srgbClr val="FF4D6D"/>
-            </a:solidFill>
-            <a:prstDash val="solid"/>
-          </a:ln>
-        </p:spPr>
-      </p:sp>
-      <p:sp>
-        <p:nvSpPr>
-          <p:cNvPr id="17" name="Text 12"/>
-          <p:cNvSpPr/>
-          <p:nvPr/>
-        </p:nvSpPr>
-        <p:spPr>
-          <a:xfrm>
-            <a:off x="2621128" y="5486400"/>
-            <a:ext cx="6949440" cy="658368"/>
-          </a:xfrm>
-          <a:prstGeom prst="rect">
-            <a:avLst/>
-          </a:prstGeom>
-          <a:noFill/>
-          <a:ln/>
-        </p:spPr>
-        <p:txBody>
-          <a:bodyPr wrap="square" rtlCol="0" anchor="ctr"/>
-          <a:lstStyle/>
-          <a:p>
-            <a:pPr algn="ctr" indent="0" marL="0">
-              <a:buNone/>
-            </a:pPr>
-            <a:r>
-              <a:rPr lang="en-US" sz="1400" b="1" dirty="0">
-                <a:solidFill>
-                  <a:srgbClr val="FFFFFF"/>
+          <a:ln/>
+        </p:spPr>
+      </p:sp>
+      <p:pic>
+        <p:nvPicPr>
+          <p:cNvPr id="12" name="Image 3" descr="preencoded.png">    </p:cNvPr>
+          <p:cNvPicPr>
+            <a:picLocks noChangeAspect="1"/>
+          </p:cNvPicPr>
+          <p:nvPr/>
+        </p:nvPicPr>
+        <p:blipFill>
+          <a:blip r:embed="rId4"/>
+          <a:stretch>
+            <a:fillRect/>
+          </a:stretch>
+        </p:blipFill>
+        <p:spPr>
+          <a:xfrm>
+            <a:off x="777240" y="3209544"/>
+            <a:ext cx="164592" cy="164592"/>
+          </a:xfrm>
+          <a:prstGeom prst="rect">
+            <a:avLst/>
+          </a:prstGeom>
+        </p:spPr>
+      </p:pic>
+      <p:sp>
+        <p:nvSpPr>
+          <p:cNvPr id="13" name="Text 7"/>
+          <p:cNvSpPr/>
+          <p:nvPr/>
+        </p:nvSpPr>
+        <p:spPr>
+          <a:xfrm>
+            <a:off x="1188720" y="3127248"/>
+            <a:ext cx="10058400" cy="502920"/>
+          </a:xfrm>
+          <a:prstGeom prst="rect">
+            <a:avLst/>
+          </a:prstGeom>
+          <a:noFill/>
+          <a:ln/>
+        </p:spPr>
+        <p:txBody>
+          <a:bodyPr wrap="square" lIns="0" tIns="0" rIns="0" bIns="0" rtlCol="0" anchor="ctr"/>
+          <a:lstStyle/>
+          <a:p>
+            <a:pPr algn="l" indent="0" marL="0">
+              <a:lnSpc>
+                <a:spcPct val="105000"/>
+              </a:lnSpc>
+              <a:buNone/>
+            </a:pPr>
+            <a:r>
+              <a:rPr lang="en-US" sz="1500" dirty="0">
+                <a:solidFill>
+                  <a:srgbClr val="FBD8DF"/>
                 </a:solidFill>
                 <a:latin typeface="Calibri" pitchFamily="34" charset="0"/>
                 <a:ea typeface="Calibri" pitchFamily="34" charset="-122"/>
                 <a:cs typeface="Calibri" pitchFamily="34" charset="-120"/>
               </a:rPr>
-              <a:t>Dr Mubashir Aziz</a:t>
-            </a:r>
-            <a:pPr algn="ctr" indent="0" marL="0">
-              <a:buNone/>
-            </a:pPr>
-            <a:r>
-              <a:rPr lang="en-US" sz="1400" dirty="0">
+              <a:t>The commonest sustained arrhythmia — linked to hypertension, age and structural heart disease.</a:t>
+            </a:r>
+            <a:endParaRPr lang="en-US" sz="1500" dirty="0"/>
+          </a:p>
+        </p:txBody>
+      </p:sp>
+      <p:sp>
+        <p:nvSpPr>
+          <p:cNvPr id="14" name="Shape 8"/>
+          <p:cNvSpPr/>
+          <p:nvPr/>
+        </p:nvSpPr>
+        <p:spPr>
+          <a:xfrm>
+            <a:off x="713232" y="3694176"/>
+            <a:ext cx="292608" cy="292608"/>
+          </a:xfrm>
+          <a:prstGeom prst="ellipse">
+            <a:avLst/>
+          </a:prstGeom>
+          <a:solidFill>
+            <a:srgbClr val="A4133C"/>
+          </a:solidFill>
+          <a:ln/>
+        </p:spPr>
+      </p:sp>
+      <p:pic>
+        <p:nvPicPr>
+          <p:cNvPr id="15" name="Image 4" descr="preencoded.png">    </p:cNvPr>
+          <p:cNvPicPr>
+            <a:picLocks noChangeAspect="1"/>
+          </p:cNvPicPr>
+          <p:nvPr/>
+        </p:nvPicPr>
+        <p:blipFill>
+          <a:blip r:embed="rId5"/>
+          <a:stretch>
+            <a:fillRect/>
+          </a:stretch>
+        </p:blipFill>
+        <p:spPr>
+          <a:xfrm>
+            <a:off x="777240" y="3758184"/>
+            <a:ext cx="164592" cy="164592"/>
+          </a:xfrm>
+          <a:prstGeom prst="rect">
+            <a:avLst/>
+          </a:prstGeom>
+        </p:spPr>
+      </p:pic>
+      <p:sp>
+        <p:nvSpPr>
+          <p:cNvPr id="16" name="Text 9"/>
+          <p:cNvSpPr/>
+          <p:nvPr/>
+        </p:nvSpPr>
+        <p:spPr>
+          <a:xfrm>
+            <a:off x="1188720" y="3675888"/>
+            <a:ext cx="10058400" cy="502920"/>
+          </a:xfrm>
+          <a:prstGeom prst="rect">
+            <a:avLst/>
+          </a:prstGeom>
+          <a:noFill/>
+          <a:ln/>
+        </p:spPr>
+        <p:txBody>
+          <a:bodyPr wrap="square" lIns="0" tIns="0" rIns="0" bIns="0" rtlCol="0" anchor="ctr"/>
+          <a:lstStyle/>
+          <a:p>
+            <a:pPr algn="l" indent="0" marL="0">
+              <a:lnSpc>
+                <a:spcPct val="105000"/>
+              </a:lnSpc>
+              <a:buNone/>
+            </a:pPr>
+            <a:r>
+              <a:rPr lang="en-US" sz="1500" dirty="0">
                 <a:solidFill>
                   <a:srgbClr val="FBD8DF"/>
                 </a:solidFill>
@@ -13933,9 +15015,345 @@
                 <a:ea typeface="Calibri" pitchFamily="34" charset="-122"/>
                 <a:cs typeface="Calibri" pitchFamily="34" charset="-120"/>
               </a:rPr>
-              <a:t>   ·   Department of Cardiology · PEIC, Bahawalpur</a:t>
-            </a:r>
-            <a:endParaRPr lang="en-US" sz="1400" dirty="0"/>
+              <a:t>Its main danger is thromboembolic stroke — always assess stroke risk (CHA₂DS₂-VASc).</a:t>
+            </a:r>
+            <a:endParaRPr lang="en-US" sz="1500" dirty="0"/>
+          </a:p>
+        </p:txBody>
+      </p:sp>
+      <p:sp>
+        <p:nvSpPr>
+          <p:cNvPr id="17" name="Shape 10"/>
+          <p:cNvSpPr/>
+          <p:nvPr/>
+        </p:nvSpPr>
+        <p:spPr>
+          <a:xfrm>
+            <a:off x="713232" y="4242816"/>
+            <a:ext cx="292608" cy="292608"/>
+          </a:xfrm>
+          <a:prstGeom prst="ellipse">
+            <a:avLst/>
+          </a:prstGeom>
+          <a:solidFill>
+            <a:srgbClr val="A4133C"/>
+          </a:solidFill>
+          <a:ln/>
+        </p:spPr>
+      </p:sp>
+      <p:pic>
+        <p:nvPicPr>
+          <p:cNvPr id="18" name="Image 5" descr="preencoded.png">    </p:cNvPr>
+          <p:cNvPicPr>
+            <a:picLocks noChangeAspect="1"/>
+          </p:cNvPicPr>
+          <p:nvPr/>
+        </p:nvPicPr>
+        <p:blipFill>
+          <a:blip r:embed="rId6"/>
+          <a:stretch>
+            <a:fillRect/>
+          </a:stretch>
+        </p:blipFill>
+        <p:spPr>
+          <a:xfrm>
+            <a:off x="777240" y="4306824"/>
+            <a:ext cx="164592" cy="164592"/>
+          </a:xfrm>
+          <a:prstGeom prst="rect">
+            <a:avLst/>
+          </a:prstGeom>
+        </p:spPr>
+      </p:pic>
+      <p:sp>
+        <p:nvSpPr>
+          <p:cNvPr id="19" name="Text 11"/>
+          <p:cNvSpPr/>
+          <p:nvPr/>
+        </p:nvSpPr>
+        <p:spPr>
+          <a:xfrm>
+            <a:off x="1188720" y="4224528"/>
+            <a:ext cx="10058400" cy="502920"/>
+          </a:xfrm>
+          <a:prstGeom prst="rect">
+            <a:avLst/>
+          </a:prstGeom>
+          <a:noFill/>
+          <a:ln/>
+        </p:spPr>
+        <p:txBody>
+          <a:bodyPr wrap="square" lIns="0" tIns="0" rIns="0" bIns="0" rtlCol="0" anchor="ctr"/>
+          <a:lstStyle/>
+          <a:p>
+            <a:pPr algn="l" indent="0" marL="0">
+              <a:lnSpc>
+                <a:spcPct val="105000"/>
+              </a:lnSpc>
+              <a:buNone/>
+            </a:pPr>
+            <a:r>
+              <a:rPr lang="en-US" sz="1500" dirty="0">
+                <a:solidFill>
+                  <a:srgbClr val="FBD8DF"/>
+                </a:solidFill>
+                <a:latin typeface="Calibri" pitchFamily="34" charset="0"/>
+                <a:ea typeface="Calibri" pitchFamily="34" charset="-122"/>
+                <a:cs typeface="Calibri" pitchFamily="34" charset="-120"/>
+              </a:rPr>
+              <a:t>Differentials: atrial flutter, multifocal atrial tachycardia, frequent PACs, SVT, pre-excited AF / VT.</a:t>
+            </a:r>
+            <a:endParaRPr lang="en-US" sz="1500" dirty="0"/>
+          </a:p>
+        </p:txBody>
+      </p:sp>
+      <p:sp>
+        <p:nvSpPr>
+          <p:cNvPr id="20" name="Shape 12"/>
+          <p:cNvSpPr/>
+          <p:nvPr/>
+        </p:nvSpPr>
+        <p:spPr>
+          <a:xfrm>
+            <a:off x="713232" y="4791456"/>
+            <a:ext cx="292608" cy="292608"/>
+          </a:xfrm>
+          <a:prstGeom prst="ellipse">
+            <a:avLst/>
+          </a:prstGeom>
+          <a:solidFill>
+            <a:srgbClr val="A4133C"/>
+          </a:solidFill>
+          <a:ln/>
+        </p:spPr>
+      </p:sp>
+      <p:pic>
+        <p:nvPicPr>
+          <p:cNvPr id="21" name="Image 6" descr="preencoded.png">    </p:cNvPr>
+          <p:cNvPicPr>
+            <a:picLocks noChangeAspect="1"/>
+          </p:cNvPicPr>
+          <p:nvPr/>
+        </p:nvPicPr>
+        <p:blipFill>
+          <a:blip r:embed="rId7"/>
+          <a:stretch>
+            <a:fillRect/>
+          </a:stretch>
+        </p:blipFill>
+        <p:spPr>
+          <a:xfrm>
+            <a:off x="777240" y="4855464"/>
+            <a:ext cx="164592" cy="164592"/>
+          </a:xfrm>
+          <a:prstGeom prst="rect">
+            <a:avLst/>
+          </a:prstGeom>
+        </p:spPr>
+      </p:pic>
+      <p:sp>
+        <p:nvSpPr>
+          <p:cNvPr id="22" name="Text 13"/>
+          <p:cNvSpPr/>
+          <p:nvPr/>
+        </p:nvSpPr>
+        <p:spPr>
+          <a:xfrm>
+            <a:off x="1188720" y="4773168"/>
+            <a:ext cx="10058400" cy="502920"/>
+          </a:xfrm>
+          <a:prstGeom prst="rect">
+            <a:avLst/>
+          </a:prstGeom>
+          <a:noFill/>
+          <a:ln/>
+        </p:spPr>
+        <p:txBody>
+          <a:bodyPr wrap="square" lIns="0" tIns="0" rIns="0" bIns="0" rtlCol="0" anchor="ctr"/>
+          <a:lstStyle/>
+          <a:p>
+            <a:pPr algn="l" indent="0" marL="0">
+              <a:lnSpc>
+                <a:spcPct val="105000"/>
+              </a:lnSpc>
+              <a:buNone/>
+            </a:pPr>
+            <a:r>
+              <a:rPr lang="en-US" sz="1500" dirty="0">
+                <a:solidFill>
+                  <a:srgbClr val="FBD8DF"/>
+                </a:solidFill>
+                <a:latin typeface="Calibri" pitchFamily="34" charset="0"/>
+                <a:ea typeface="Calibri" pitchFamily="34" charset="-122"/>
+                <a:cs typeface="Calibri" pitchFamily="34" charset="-120"/>
+              </a:rPr>
+              <a:t>Manage with the ABC pathway: Anticoagulation, Better symptom control, Comorbidities.</a:t>
+            </a:r>
+            <a:endParaRPr lang="en-US" sz="1500" dirty="0"/>
+          </a:p>
+        </p:txBody>
+      </p:sp>
+      <p:sp>
+        <p:nvSpPr>
+          <p:cNvPr id="23" name="Shape 14"/>
+          <p:cNvSpPr/>
+          <p:nvPr/>
+        </p:nvSpPr>
+        <p:spPr>
+          <a:xfrm>
+            <a:off x="713232" y="5340096"/>
+            <a:ext cx="292608" cy="292608"/>
+          </a:xfrm>
+          <a:prstGeom prst="ellipse">
+            <a:avLst/>
+          </a:prstGeom>
+          <a:solidFill>
+            <a:srgbClr val="A4133C"/>
+          </a:solidFill>
+          <a:ln/>
+        </p:spPr>
+      </p:sp>
+      <p:pic>
+        <p:nvPicPr>
+          <p:cNvPr id="24" name="Image 7" descr="preencoded.png">    </p:cNvPr>
+          <p:cNvPicPr>
+            <a:picLocks noChangeAspect="1"/>
+          </p:cNvPicPr>
+          <p:nvPr/>
+        </p:nvPicPr>
+        <p:blipFill>
+          <a:blip r:embed="rId8"/>
+          <a:stretch>
+            <a:fillRect/>
+          </a:stretch>
+        </p:blipFill>
+        <p:spPr>
+          <a:xfrm>
+            <a:off x="777240" y="5404104"/>
+            <a:ext cx="164592" cy="164592"/>
+          </a:xfrm>
+          <a:prstGeom prst="rect">
+            <a:avLst/>
+          </a:prstGeom>
+        </p:spPr>
+      </p:pic>
+      <p:sp>
+        <p:nvSpPr>
+          <p:cNvPr id="25" name="Text 15"/>
+          <p:cNvSpPr/>
+          <p:nvPr/>
+        </p:nvSpPr>
+        <p:spPr>
+          <a:xfrm>
+            <a:off x="1188720" y="5321808"/>
+            <a:ext cx="10058400" cy="502920"/>
+          </a:xfrm>
+          <a:prstGeom prst="rect">
+            <a:avLst/>
+          </a:prstGeom>
+          <a:noFill/>
+          <a:ln/>
+        </p:spPr>
+        <p:txBody>
+          <a:bodyPr wrap="square" lIns="0" tIns="0" rIns="0" bIns="0" rtlCol="0" anchor="ctr"/>
+          <a:lstStyle/>
+          <a:p>
+            <a:pPr algn="l" indent="0" marL="0">
+              <a:lnSpc>
+                <a:spcPct val="105000"/>
+              </a:lnSpc>
+              <a:buNone/>
+            </a:pPr>
+            <a:r>
+              <a:rPr lang="en-US" sz="1500" dirty="0">
+                <a:solidFill>
+                  <a:srgbClr val="FBD8DF"/>
+                </a:solidFill>
+                <a:latin typeface="Calibri" pitchFamily="34" charset="0"/>
+                <a:ea typeface="Calibri" pitchFamily="34" charset="-122"/>
+                <a:cs typeface="Calibri" pitchFamily="34" charset="-120"/>
+              </a:rPr>
+              <a:t>In pregnancy: LMWH is the anticoagulant of choice — avoid warfarin and DOACs.</a:t>
+            </a:r>
+            <a:endParaRPr lang="en-US" sz="1500" dirty="0"/>
+          </a:p>
+        </p:txBody>
+      </p:sp>
+      <p:sp>
+        <p:nvSpPr>
+          <p:cNvPr id="26" name="Text 16"/>
+          <p:cNvSpPr/>
+          <p:nvPr/>
+        </p:nvSpPr>
+        <p:spPr>
+          <a:xfrm>
+            <a:off x="11277295" y="6355080"/>
+            <a:ext cx="548640" cy="320040"/>
+          </a:xfrm>
+          <a:prstGeom prst="rect">
+            <a:avLst/>
+          </a:prstGeom>
+          <a:noFill/>
+          <a:ln/>
+        </p:spPr>
+        <p:txBody>
+          <a:bodyPr wrap="square" rtlCol="0" anchor="t"/>
+          <a:lstStyle/>
+          <a:p>
+            <a:pPr algn="r" indent="0" marL="0">
+              <a:buNone/>
+            </a:pPr>
+            <a:r>
+              <a:rPr lang="en-US" sz="1100" b="1" dirty="0">
+                <a:solidFill>
+                  <a:srgbClr val="FBD8DF"/>
+                </a:solidFill>
+                <a:latin typeface="Calibri" pitchFamily="34" charset="0"/>
+                <a:ea typeface="Calibri" pitchFamily="34" charset="-122"/>
+                <a:cs typeface="Calibri" pitchFamily="34" charset="-120"/>
+              </a:rPr>
+              <a:t>19</a:t>
+            </a:r>
+            <a:endParaRPr lang="en-US" sz="1100" dirty="0"/>
+          </a:p>
+        </p:txBody>
+      </p:sp>
+      <p:sp>
+        <p:nvSpPr>
+          <p:cNvPr id="27" name="Text 17"/>
+          <p:cNvSpPr/>
+          <p:nvPr/>
+        </p:nvSpPr>
+        <p:spPr>
+          <a:xfrm>
+            <a:off x="502920" y="6355080"/>
+            <a:ext cx="7315200" cy="320040"/>
+          </a:xfrm>
+          <a:prstGeom prst="rect">
+            <a:avLst/>
+          </a:prstGeom>
+          <a:noFill/>
+          <a:ln/>
+        </p:spPr>
+        <p:txBody>
+          <a:bodyPr wrap="square" rtlCol="0" anchor="t"/>
+          <a:lstStyle/>
+          <a:p>
+            <a:pPr algn="l" indent="0" marL="0">
+              <a:buNone/>
+            </a:pPr>
+            <a:r>
+              <a:rPr lang="en-US" sz="900" dirty="0">
+                <a:solidFill>
+                  <a:srgbClr val="FBD8DF"/>
+                </a:solidFill>
+                <a:latin typeface="Calibri" pitchFamily="34" charset="0"/>
+                <a:ea typeface="Calibri" pitchFamily="34" charset="-122"/>
+                <a:cs typeface="Calibri" pitchFamily="34" charset="-120"/>
+              </a:rPr>
+              <a:t>Atrial Fibrillation — Clinical Topic Review</a:t>
+            </a:r>
+            <a:endParaRPr lang="en-US" sz="900" dirty="0"/>
           </a:p>
         </p:txBody>
       </p:sp>
@@ -14654,6 +16072,477 @@
               <a:t>Atrial Fibrillation — Clinical Topic Review</a:t>
             </a:r>
             <a:endParaRPr lang="en-US" sz="900" dirty="0"/>
+          </a:p>
+        </p:txBody>
+      </p:sp>
+    </p:spTree>
+  </p:cSld>
+  <p:clrMapOvr>
+    <a:masterClrMapping/>
+  </p:clrMapOvr>
+</p:sld>
+</file>
+
+<file path=ppt/slides/slide20.xml><?xml version="1.0" encoding="utf-8"?>
+<p:sld xmlns:a="http://schemas.openxmlformats.org/drawingml/2006/main" xmlns:r="http://schemas.openxmlformats.org/officeDocument/2006/relationships" xmlns:p="http://schemas.openxmlformats.org/presentationml/2006/main">
+  <p:cSld name="Slide 20">
+    <p:bg>
+      <p:bgPr>
+        <a:solidFill>
+          <a:srgbClr val="590D22"/>
+        </a:solidFill>
+      </p:bgPr>
+    </p:bg>
+    <p:spTree>
+      <p:nvGrpSpPr>
+        <p:cNvPr id="1" name=""/>
+        <p:cNvGrpSpPr/>
+        <p:nvPr/>
+      </p:nvGrpSpPr>
+      <p:grpSpPr>
+        <a:xfrm>
+          <a:off x="0" y="0"/>
+          <a:ext cx="0" cy="0"/>
+          <a:chOff x="0" y="0"/>
+          <a:chExt cx="0" cy="0"/>
+        </a:xfrm>
+      </p:grpSpPr>
+      <p:sp>
+        <p:nvSpPr>
+          <p:cNvPr id="2" name="Shape 0"/>
+          <p:cNvSpPr/>
+          <p:nvPr/>
+        </p:nvSpPr>
+        <p:spPr>
+          <a:xfrm>
+            <a:off x="0" y="0"/>
+            <a:ext cx="12191695" cy="6858000"/>
+          </a:xfrm>
+          <a:prstGeom prst="rect">
+            <a:avLst/>
+          </a:prstGeom>
+          <a:solidFill>
+            <a:srgbClr val="3A0A17">
+              <a:alpha val="74000"/>
+            </a:srgbClr>
+          </a:solidFill>
+          <a:ln/>
+        </p:spPr>
+      </p:sp>
+      <p:pic>
+        <p:nvPicPr>
+          <p:cNvPr id="3" name="Image 0" descr="preencoded.png">    </p:cNvPr>
+          <p:cNvPicPr>
+            <a:picLocks noChangeAspect="1"/>
+          </p:cNvPicPr>
+          <p:nvPr/>
+        </p:nvPicPr>
+        <p:blipFill>
+          <a:blip r:embed="rId1">
+            <a:alphaModFix amt="10000"/>
+          </a:blip>
+          <a:stretch>
+            <a:fillRect/>
+          </a:stretch>
+        </p:blipFill>
+        <p:spPr>
+          <a:xfrm>
+            <a:off x="8092440" y="3063240"/>
+            <a:ext cx="4754880" cy="4754880"/>
+          </a:xfrm>
+          <a:prstGeom prst="rect">
+            <a:avLst/>
+          </a:prstGeom>
+        </p:spPr>
+      </p:pic>
+      <p:pic>
+        <p:nvPicPr>
+          <p:cNvPr id="4" name="Image 1" descr="preencoded.png">    </p:cNvPr>
+          <p:cNvPicPr>
+            <a:picLocks noChangeAspect="1"/>
+          </p:cNvPicPr>
+          <p:nvPr/>
+        </p:nvPicPr>
+        <p:blipFill>
+          <a:blip r:embed="rId2">
+            <a:alphaModFix amt="7000"/>
+          </a:blip>
+          <a:stretch>
+            <a:fillRect/>
+          </a:stretch>
+        </p:blipFill>
+        <p:spPr>
+          <a:xfrm>
+            <a:off x="-822960" y="-960120"/>
+            <a:ext cx="4023360" cy="4023360"/>
+          </a:xfrm>
+          <a:prstGeom prst="rect">
+            <a:avLst/>
+          </a:prstGeom>
+        </p:spPr>
+      </p:pic>
+      <p:sp>
+        <p:nvSpPr>
+          <p:cNvPr id="5" name="Shape 1"/>
+          <p:cNvSpPr/>
+          <p:nvPr/>
+        </p:nvSpPr>
+        <p:spPr>
+          <a:xfrm>
+            <a:off x="5711800" y="1234440"/>
+            <a:ext cx="768096" cy="768096"/>
+          </a:xfrm>
+          <a:prstGeom prst="ellipse">
+            <a:avLst/>
+          </a:prstGeom>
+          <a:solidFill>
+            <a:srgbClr val="A4133C"/>
+          </a:solidFill>
+          <a:ln/>
+        </p:spPr>
+      </p:sp>
+      <p:pic>
+        <p:nvPicPr>
+          <p:cNvPr id="6" name="Image 2" descr="preencoded.png">    </p:cNvPr>
+          <p:cNvPicPr>
+            <a:picLocks noChangeAspect="1"/>
+          </p:cNvPicPr>
+          <p:nvPr/>
+        </p:nvPicPr>
+        <p:blipFill>
+          <a:blip r:embed="rId3"/>
+          <a:stretch>
+            <a:fillRect/>
+          </a:stretch>
+        </p:blipFill>
+        <p:spPr>
+          <a:xfrm>
+            <a:off x="5867248" y="1399032"/>
+            <a:ext cx="457200" cy="457200"/>
+          </a:xfrm>
+          <a:prstGeom prst="rect">
+            <a:avLst/>
+          </a:prstGeom>
+        </p:spPr>
+      </p:pic>
+      <p:sp>
+        <p:nvSpPr>
+          <p:cNvPr id="7" name="Text 2"/>
+          <p:cNvSpPr/>
+          <p:nvPr/>
+        </p:nvSpPr>
+        <p:spPr>
+          <a:xfrm>
+            <a:off x="457200" y="2286000"/>
+            <a:ext cx="11274552" cy="1554480"/>
+          </a:xfrm>
+          <a:prstGeom prst="rect">
+            <a:avLst/>
+          </a:prstGeom>
+          <a:noFill/>
+          <a:ln/>
+        </p:spPr>
+        <p:txBody>
+          <a:bodyPr wrap="square" rtlCol="0" anchor="t"/>
+          <a:lstStyle/>
+          <a:p>
+            <a:pPr algn="ctr" indent="0" marL="0">
+              <a:buNone/>
+            </a:pPr>
+            <a:r>
+              <a:rPr lang="en-US" sz="8800" b="1" dirty="0">
+                <a:solidFill>
+                  <a:srgbClr val="FFFFFF"/>
+                </a:solidFill>
+                <a:latin typeface="Cambria" pitchFamily="34" charset="0"/>
+                <a:ea typeface="Cambria" pitchFamily="34" charset="-122"/>
+                <a:cs typeface="Cambria" pitchFamily="34" charset="-120"/>
+              </a:rPr>
+              <a:t>Thank You</a:t>
+            </a:r>
+            <a:endParaRPr lang="en-US" sz="8800" dirty="0"/>
+          </a:p>
+        </p:txBody>
+      </p:sp>
+      <p:sp>
+        <p:nvSpPr>
+          <p:cNvPr id="8" name="Text 3"/>
+          <p:cNvSpPr/>
+          <p:nvPr/>
+        </p:nvSpPr>
+        <p:spPr>
+          <a:xfrm>
+            <a:off x="457200" y="4114800"/>
+            <a:ext cx="11274552" cy="457200"/>
+          </a:xfrm>
+          <a:prstGeom prst="rect">
+            <a:avLst/>
+          </a:prstGeom>
+          <a:noFill/>
+          <a:ln/>
+        </p:spPr>
+        <p:txBody>
+          <a:bodyPr wrap="square" rtlCol="0" anchor="t"/>
+          <a:lstStyle/>
+          <a:p>
+            <a:pPr algn="ctr" indent="0" marL="0">
+              <a:buNone/>
+            </a:pPr>
+            <a:r>
+              <a:rPr lang="en-US" sz="2200" i="1" dirty="0">
+                <a:solidFill>
+                  <a:srgbClr val="FF4D6D"/>
+                </a:solidFill>
+                <a:latin typeface="Calibri" pitchFamily="34" charset="0"/>
+                <a:ea typeface="Calibri" pitchFamily="34" charset="-122"/>
+                <a:cs typeface="Calibri" pitchFamily="34" charset="-120"/>
+              </a:rPr>
+              <a:t>Questions &amp; Discussion Welcome</a:t>
+            </a:r>
+            <a:endParaRPr lang="en-US" sz="2200" dirty="0"/>
+          </a:p>
+        </p:txBody>
+      </p:sp>
+      <p:sp>
+        <p:nvSpPr>
+          <p:cNvPr id="9" name="Shape 4"/>
+          <p:cNvSpPr/>
+          <p:nvPr/>
+        </p:nvSpPr>
+        <p:spPr>
+          <a:xfrm>
+            <a:off x="3355848" y="5212080"/>
+            <a:ext cx="1865376" cy="0"/>
+          </a:xfrm>
+          <a:prstGeom prst="line">
+            <a:avLst/>
+          </a:prstGeom>
+          <a:noFill/>
+          <a:ln w="28575">
+            <a:solidFill>
+              <a:srgbClr val="FF4D6D"/>
+            </a:solidFill>
+            <a:prstDash val="solid"/>
+          </a:ln>
+        </p:spPr>
+      </p:sp>
+      <p:sp>
+        <p:nvSpPr>
+          <p:cNvPr id="10" name="Shape 5"/>
+          <p:cNvSpPr/>
+          <p:nvPr/>
+        </p:nvSpPr>
+        <p:spPr>
+          <a:xfrm flipV="1">
+            <a:off x="5221224" y="5065776"/>
+            <a:ext cx="329184" cy="146304"/>
+          </a:xfrm>
+          <a:prstGeom prst="line">
+            <a:avLst/>
+          </a:prstGeom>
+          <a:noFill/>
+          <a:ln w="28575">
+            <a:solidFill>
+              <a:srgbClr val="FF4D6D"/>
+            </a:solidFill>
+            <a:prstDash val="solid"/>
+          </a:ln>
+        </p:spPr>
+      </p:sp>
+      <p:sp>
+        <p:nvSpPr>
+          <p:cNvPr id="11" name="Shape 6"/>
+          <p:cNvSpPr/>
+          <p:nvPr/>
+        </p:nvSpPr>
+        <p:spPr>
+          <a:xfrm>
+            <a:off x="5550408" y="5065776"/>
+            <a:ext cx="329184" cy="457200"/>
+          </a:xfrm>
+          <a:prstGeom prst="line">
+            <a:avLst/>
+          </a:prstGeom>
+          <a:noFill/>
+          <a:ln w="28575">
+            <a:solidFill>
+              <a:srgbClr val="FF4D6D"/>
+            </a:solidFill>
+            <a:prstDash val="solid"/>
+          </a:ln>
+        </p:spPr>
+      </p:sp>
+      <p:sp>
+        <p:nvSpPr>
+          <p:cNvPr id="12" name="Shape 7"/>
+          <p:cNvSpPr/>
+          <p:nvPr/>
+        </p:nvSpPr>
+        <p:spPr>
+          <a:xfrm flipV="1">
+            <a:off x="5879592" y="4709160"/>
+            <a:ext cx="329184" cy="813816"/>
+          </a:xfrm>
+          <a:prstGeom prst="line">
+            <a:avLst/>
+          </a:prstGeom>
+          <a:noFill/>
+          <a:ln w="28575">
+            <a:solidFill>
+              <a:srgbClr val="FF4D6D"/>
+            </a:solidFill>
+            <a:prstDash val="solid"/>
+          </a:ln>
+        </p:spPr>
+      </p:sp>
+      <p:sp>
+        <p:nvSpPr>
+          <p:cNvPr id="13" name="Shape 8"/>
+          <p:cNvSpPr/>
+          <p:nvPr/>
+        </p:nvSpPr>
+        <p:spPr>
+          <a:xfrm>
+            <a:off x="6208776" y="4709160"/>
+            <a:ext cx="329184" cy="685800"/>
+          </a:xfrm>
+          <a:prstGeom prst="line">
+            <a:avLst/>
+          </a:prstGeom>
+          <a:noFill/>
+          <a:ln w="28575">
+            <a:solidFill>
+              <a:srgbClr val="FF4D6D"/>
+            </a:solidFill>
+            <a:prstDash val="solid"/>
+          </a:ln>
+        </p:spPr>
+      </p:sp>
+      <p:sp>
+        <p:nvSpPr>
+          <p:cNvPr id="14" name="Shape 9"/>
+          <p:cNvSpPr/>
+          <p:nvPr/>
+        </p:nvSpPr>
+        <p:spPr>
+          <a:xfrm flipV="1">
+            <a:off x="6537960" y="5212080"/>
+            <a:ext cx="329184" cy="182880"/>
+          </a:xfrm>
+          <a:prstGeom prst="line">
+            <a:avLst/>
+          </a:prstGeom>
+          <a:noFill/>
+          <a:ln w="28575">
+            <a:solidFill>
+              <a:srgbClr val="FF4D6D"/>
+            </a:solidFill>
+            <a:prstDash val="solid"/>
+          </a:ln>
+        </p:spPr>
+      </p:sp>
+      <p:sp>
+        <p:nvSpPr>
+          <p:cNvPr id="15" name="Shape 10"/>
+          <p:cNvSpPr/>
+          <p:nvPr/>
+        </p:nvSpPr>
+        <p:spPr>
+          <a:xfrm>
+            <a:off x="6867144" y="5212080"/>
+            <a:ext cx="1975104" cy="0"/>
+          </a:xfrm>
+          <a:prstGeom prst="line">
+            <a:avLst/>
+          </a:prstGeom>
+          <a:noFill/>
+          <a:ln w="28575">
+            <a:solidFill>
+              <a:srgbClr val="FF4D6D"/>
+            </a:solidFill>
+            <a:prstDash val="solid"/>
+          </a:ln>
+        </p:spPr>
+      </p:sp>
+      <p:sp>
+        <p:nvSpPr>
+          <p:cNvPr id="16" name="Shape 11"/>
+          <p:cNvSpPr/>
+          <p:nvPr/>
+        </p:nvSpPr>
+        <p:spPr>
+          <a:xfrm>
+            <a:off x="2621128" y="5486400"/>
+            <a:ext cx="6949440" cy="658368"/>
+          </a:xfrm>
+          <a:prstGeom prst="roundRect">
+            <a:avLst>
+              <a:gd name="adj" fmla="val 50000"/>
+            </a:avLst>
+          </a:prstGeom>
+          <a:solidFill>
+            <a:srgbClr val="FFFFFF">
+              <a:alpha val="8000"/>
+            </a:srgbClr>
+          </a:solidFill>
+          <a:ln w="12700">
+            <a:solidFill>
+              <a:srgbClr val="FF4D6D"/>
+            </a:solidFill>
+            <a:prstDash val="solid"/>
+          </a:ln>
+        </p:spPr>
+      </p:sp>
+      <p:sp>
+        <p:nvSpPr>
+          <p:cNvPr id="17" name="Text 12"/>
+          <p:cNvSpPr/>
+          <p:nvPr/>
+        </p:nvSpPr>
+        <p:spPr>
+          <a:xfrm>
+            <a:off x="2621128" y="5486400"/>
+            <a:ext cx="6949440" cy="658368"/>
+          </a:xfrm>
+          <a:prstGeom prst="rect">
+            <a:avLst/>
+          </a:prstGeom>
+          <a:noFill/>
+          <a:ln/>
+        </p:spPr>
+        <p:txBody>
+          <a:bodyPr wrap="square" rtlCol="0" anchor="ctr"/>
+          <a:lstStyle/>
+          <a:p>
+            <a:pPr algn="ctr" indent="0" marL="0">
+              <a:buNone/>
+            </a:pPr>
+            <a:r>
+              <a:rPr lang="en-US" sz="1400" b="1" dirty="0">
+                <a:solidFill>
+                  <a:srgbClr val="FFFFFF"/>
+                </a:solidFill>
+                <a:latin typeface="Calibri" pitchFamily="34" charset="0"/>
+                <a:ea typeface="Calibri" pitchFamily="34" charset="-122"/>
+                <a:cs typeface="Calibri" pitchFamily="34" charset="-120"/>
+              </a:rPr>
+              <a:t>Dr Mubashir Aziz</a:t>
+            </a:r>
+            <a:pPr algn="ctr" indent="0" marL="0">
+              <a:buNone/>
+            </a:pPr>
+            <a:r>
+              <a:rPr lang="en-US" sz="1400" dirty="0">
+                <a:solidFill>
+                  <a:srgbClr val="FBD8DF"/>
+                </a:solidFill>
+                <a:latin typeface="Calibri" pitchFamily="34" charset="0"/>
+                <a:ea typeface="Calibri" pitchFamily="34" charset="-122"/>
+                <a:cs typeface="Calibri" pitchFamily="34" charset="-120"/>
+              </a:rPr>
+              <a:t>   ·   Department of Cardiology · PEIC, Bahawalpur</a:t>
+            </a:r>
+            <a:endParaRPr lang="en-US" sz="1400" dirty="0"/>
           </a:p>
         </p:txBody>
       </p:sp>

--- a/presentations/Atrial-Fibrillation-Topic-Review.pptx
+++ b/presentations/Atrial-Fibrillation-Topic-Review.pptx
@@ -25,9 +25,10 @@
     <p:sldId id="273" r:id="rId19"/>
     <p:sldId id="274" r:id="rId20"/>
     <p:sldId id="275" r:id="rId21"/>
+    <p:sldId id="276" r:id="rId22"/>
   </p:sldIdLst>
   <p:notesMasterIdLst>
-    <p:notesMasterId r:id="rId22"/>
+    <p:notesMasterId r:id="rId23"/>
   </p:notesMasterIdLst>
   <p:sldSz cx="12191695" cy="6858000"/>
   <p:notesSz cx="6858000" cy="12191695"/>
@@ -1601,6 +1602,94 @@
             <a:fld id="{F7021451-1387-4CA6-816F-3879F97B5CBC}" type="slidenum">
               <a:rPr lang="en-US"/>
               <a:t>20</a:t>
+            </a:fld>
+            <a:endParaRPr lang="en-US"/>
+          </a:p>
+        </p:txBody>
+      </p:sp>
+    </p:spTree>
+    <p:extLst>
+      <p:ext uri="{BB962C8B-B14F-4D97-AF65-F5344CB8AC3E}">
+        <p14:creationId xmlns:p14="http://schemas.microsoft.com/office/powerpoint/2010/main" val="1024086991"/>
+      </p:ext>
+    </p:extLst>
+  </p:cSld>
+  <p:clrMapOvr>
+    <a:masterClrMapping/>
+  </p:clrMapOvr>
+</p:notes>
+</file>
+
+<file path=ppt/notesSlides/notesSlide21.xml><?xml version="1.0" encoding="utf-8"?>
+<p:notes xmlns:a="http://schemas.openxmlformats.org/drawingml/2006/main" xmlns:r="http://schemas.openxmlformats.org/officeDocument/2006/relationships" xmlns:p="http://schemas.openxmlformats.org/presentationml/2006/main">
+  <p:cSld>
+    <p:spTree>
+      <p:nvGrpSpPr>
+        <p:cNvPr id="1" name=""/>
+        <p:cNvGrpSpPr/>
+        <p:nvPr/>
+      </p:nvGrpSpPr>
+      <p:grpSpPr>
+        <a:xfrm>
+          <a:off x="0" y="0"/>
+          <a:ext cx="0" cy="0"/>
+          <a:chOff x="0" y="0"/>
+          <a:chExt cx="0" cy="0"/>
+        </a:xfrm>
+      </p:grpSpPr>
+      <p:sp>
+        <p:nvSpPr>
+          <p:cNvPr id="2" name="Slide Image Placeholder 1"/>
+          <p:cNvSpPr>
+            <a:spLocks noGrp="1" noRot="1" noChangeAspect="1"/>
+          </p:cNvSpPr>
+          <p:nvPr>
+            <p:ph type="sldImg"/>
+          </p:nvPr>
+        </p:nvSpPr>
+        <p:spPr/>
+      </p:sp>
+      <p:sp>
+        <p:nvSpPr>
+          <p:cNvPr id="3" name="Notes Placeholder 2"/>
+          <p:cNvSpPr>
+            <a:spLocks noGrp="1"/>
+          </p:cNvSpPr>
+          <p:nvPr>
+            <p:ph type="body" idx="1"/>
+          </p:nvPr>
+        </p:nvSpPr>
+        <p:spPr/>
+        <p:txBody>
+          <a:bodyPr/>
+          <a:lstStyle/>
+          <a:p>
+            <a:r>
+              <a:rPr lang="en-US" dirty="0"/>
+              <a:t/>
+            </a:r>
+            <a:endParaRPr lang="en-US" dirty="0"/>
+          </a:p>
+        </p:txBody>
+      </p:sp>
+      <p:sp>
+        <p:nvSpPr>
+          <p:cNvPr id="4" name="Slide Number Placeholder 3"/>
+          <p:cNvSpPr>
+            <a:spLocks noGrp="1"/>
+          </p:cNvSpPr>
+          <p:nvPr>
+            <p:ph type="sldNum" sz="quarter" idx="10"/>
+          </p:nvPr>
+        </p:nvSpPr>
+        <p:spPr/>
+        <p:txBody>
+          <a:bodyPr/>
+          <a:lstStyle/>
+          <a:p>
+            <a:fld id="{F7021451-1387-4CA6-816F-3879F97B5CBC}" type="slidenum">
+              <a:rPr lang="en-US"/>
+              <a:t>21</a:t>
             </a:fld>
             <a:endParaRPr lang="en-US"/>
           </a:p>
@@ -14575,7 +14664,7 @@
     <p:bg>
       <p:bgPr>
         <a:solidFill>
-          <a:srgbClr val="590D22"/>
+          <a:srgbClr val="FFFFFF"/>
         </a:solidFill>
       </p:bgPr>
     </p:bg>
@@ -14601,18 +14690,21 @@
         </p:nvSpPr>
         <p:spPr>
           <a:xfrm>
-            <a:off x="0" y="0"/>
-            <a:ext cx="12191695" cy="6858000"/>
-          </a:xfrm>
-          <a:prstGeom prst="rect">
+            <a:off x="502920" y="457200"/>
+            <a:ext cx="868680" cy="868680"/>
+          </a:xfrm>
+          <a:prstGeom prst="ellipse">
             <a:avLst/>
           </a:prstGeom>
           <a:solidFill>
-            <a:srgbClr val="3A0A17">
-              <a:alpha val="65000"/>
-            </a:srgbClr>
+            <a:srgbClr val="FFF0F3"/>
           </a:solidFill>
-          <a:ln/>
+          <a:ln w="12700">
+            <a:solidFill>
+              <a:srgbClr val="FBD8DF"/>
+            </a:solidFill>
+            <a:prstDash val="solid"/>
+          </a:ln>
         </p:spPr>
       </p:sp>
       <p:pic>
@@ -14624,17 +14716,15 @@
           <p:nvPr/>
         </p:nvPicPr>
         <p:blipFill>
-          <a:blip r:embed="rId1">
-            <a:alphaModFix amt="9000"/>
-          </a:blip>
+          <a:blip r:embed="rId1"/>
           <a:stretch>
             <a:fillRect/>
           </a:stretch>
         </p:blipFill>
         <p:spPr>
           <a:xfrm>
-            <a:off x="8321040" y="3291840"/>
-            <a:ext cx="4572000" cy="4572000"/>
+            <a:off x="694944" y="649224"/>
+            <a:ext cx="484632" cy="484632"/>
           </a:xfrm>
           <a:prstGeom prst="rect">
             <a:avLst/>
@@ -14643,14 +14733,214 @@
       </p:pic>
       <p:sp>
         <p:nvSpPr>
-          <p:cNvPr id="4" name="Shape 1"/>
-          <p:cNvSpPr/>
-          <p:nvPr/>
-        </p:nvSpPr>
-        <p:spPr>
-          <a:xfrm>
-            <a:off x="685800" y="685800"/>
-            <a:ext cx="960120" cy="960120"/>
+          <p:cNvPr id="4" name="Text 1"/>
+          <p:cNvSpPr/>
+          <p:nvPr/>
+        </p:nvSpPr>
+        <p:spPr>
+          <a:xfrm>
+            <a:off x="1572768" y="502920"/>
+            <a:ext cx="9966960" cy="274320"/>
+          </a:xfrm>
+          <a:prstGeom prst="rect">
+            <a:avLst/>
+          </a:prstGeom>
+          <a:noFill/>
+          <a:ln/>
+        </p:spPr>
+        <p:txBody>
+          <a:bodyPr wrap="square" rtlCol="0" anchor="t"/>
+          <a:lstStyle/>
+          <a:p>
+            <a:pPr algn="l" indent="0" marL="0">
+              <a:buNone/>
+            </a:pPr>
+            <a:r>
+              <a:rPr lang="en-US" sz="1250" b="1" spc="200" kern="0" dirty="0">
+                <a:solidFill>
+                  <a:srgbClr val="A4133C"/>
+                </a:solidFill>
+                <a:latin typeface="Calibri" pitchFamily="34" charset="0"/>
+                <a:ea typeface="Calibri" pitchFamily="34" charset="-122"/>
+                <a:cs typeface="Calibri" pitchFamily="34" charset="-120"/>
+              </a:rPr>
+              <a:t>SPECIAL POPULATIONS · PREGNANCY</a:t>
+            </a:r>
+            <a:endParaRPr lang="en-US" sz="1250" dirty="0"/>
+          </a:p>
+        </p:txBody>
+      </p:sp>
+      <p:sp>
+        <p:nvSpPr>
+          <p:cNvPr id="5" name="Text 2"/>
+          <p:cNvSpPr/>
+          <p:nvPr/>
+        </p:nvSpPr>
+        <p:spPr>
+          <a:xfrm>
+            <a:off x="1554480" y="749808"/>
+            <a:ext cx="10241280" cy="640080"/>
+          </a:xfrm>
+          <a:prstGeom prst="rect">
+            <a:avLst/>
+          </a:prstGeom>
+          <a:noFill/>
+          <a:ln/>
+        </p:spPr>
+        <p:txBody>
+          <a:bodyPr wrap="square" rtlCol="0" anchor="t"/>
+          <a:lstStyle/>
+          <a:p>
+            <a:pPr algn="l" indent="0" marL="0">
+              <a:buNone/>
+            </a:pPr>
+            <a:r>
+              <a:rPr lang="en-US" sz="3000" b="1" dirty="0">
+                <a:solidFill>
+                  <a:srgbClr val="2B2B33"/>
+                </a:solidFill>
+                <a:latin typeface="Cambria" pitchFamily="34" charset="0"/>
+                <a:ea typeface="Cambria" pitchFamily="34" charset="-122"/>
+                <a:cs typeface="Cambria" pitchFamily="34" charset="-120"/>
+              </a:rPr>
+              <a:t>AF in Pregnancy — Overview</a:t>
+            </a:r>
+            <a:endParaRPr lang="en-US" sz="3000" dirty="0"/>
+          </a:p>
+        </p:txBody>
+      </p:sp>
+      <p:sp>
+        <p:nvSpPr>
+          <p:cNvPr id="6" name="Shape 3"/>
+          <p:cNvSpPr/>
+          <p:nvPr/>
+        </p:nvSpPr>
+        <p:spPr>
+          <a:xfrm>
+            <a:off x="502920" y="1572768"/>
+            <a:ext cx="11183112" cy="914400"/>
+          </a:xfrm>
+          <a:prstGeom prst="roundRect">
+            <a:avLst>
+              <a:gd name="adj" fmla="val 12000"/>
+            </a:avLst>
+          </a:prstGeom>
+          <a:solidFill>
+            <a:srgbClr val="590D22"/>
+          </a:solidFill>
+          <a:ln/>
+          <a:effectLst>
+            <a:outerShdw sx="100000" sy="100000" kx="0" ky="0" algn="bl" rotWithShape="0" blurRad="127000" dist="50800" dir="5400000">
+              <a:srgbClr val="C9A3AC">
+                <a:alpha val="45000"/>
+              </a:srgbClr>
+            </a:outerShdw>
+          </a:effectLst>
+        </p:spPr>
+      </p:sp>
+      <p:sp>
+        <p:nvSpPr>
+          <p:cNvPr id="7" name="Text 4"/>
+          <p:cNvSpPr/>
+          <p:nvPr/>
+        </p:nvSpPr>
+        <p:spPr>
+          <a:xfrm>
+            <a:off x="914400" y="1572768"/>
+            <a:ext cx="10424160" cy="914400"/>
+          </a:xfrm>
+          <a:prstGeom prst="rect">
+            <a:avLst/>
+          </a:prstGeom>
+          <a:noFill/>
+          <a:ln/>
+        </p:spPr>
+        <p:txBody>
+          <a:bodyPr wrap="square" rtlCol="0" anchor="ctr"/>
+          <a:lstStyle/>
+          <a:p>
+            <a:pPr algn="l" indent="0" marL="0">
+              <a:lnSpc>
+                <a:spcPct val="110000"/>
+              </a:lnSpc>
+              <a:buNone/>
+            </a:pPr>
+            <a:r>
+              <a:rPr lang="en-US" sz="1400" b="1" dirty="0">
+                <a:solidFill>
+                  <a:srgbClr val="FFFFFF"/>
+                </a:solidFill>
+                <a:latin typeface="Calibri" pitchFamily="34" charset="0"/>
+                <a:ea typeface="Calibri" pitchFamily="34" charset="-122"/>
+                <a:cs typeface="Calibri" pitchFamily="34" charset="-120"/>
+              </a:rPr>
+              <a:t>Rare — ~60 / 100,000 pregnancies</a:t>
+            </a:r>
+            <a:pPr algn="l" indent="0" marL="0">
+              <a:lnSpc>
+                <a:spcPct val="110000"/>
+              </a:lnSpc>
+              <a:buNone/>
+            </a:pPr>
+            <a:r>
+              <a:rPr lang="en-US" sz="1400" dirty="0">
+                <a:solidFill>
+                  <a:srgbClr val="FBD8DF"/>
+                </a:solidFill>
+                <a:latin typeface="Calibri" pitchFamily="34" charset="0"/>
+                <a:ea typeface="Calibri" pitchFamily="34" charset="-122"/>
+                <a:cs typeface="Calibri" pitchFamily="34" charset="-120"/>
+              </a:rPr>
+              <a:t>   ·   often congenital / valvular disease, thyrotoxicosis or electrolyte disturbance   ·   hypercoagulable, but no proven rise in AF-related thromboembolism</a:t>
+            </a:r>
+            <a:endParaRPr lang="en-US" sz="1400" dirty="0"/>
+          </a:p>
+        </p:txBody>
+      </p:sp>
+      <p:sp>
+        <p:nvSpPr>
+          <p:cNvPr id="8" name="Shape 5"/>
+          <p:cNvSpPr/>
+          <p:nvPr/>
+        </p:nvSpPr>
+        <p:spPr>
+          <a:xfrm>
+            <a:off x="502920" y="2670048"/>
+            <a:ext cx="3611880" cy="3319272"/>
+          </a:xfrm>
+          <a:prstGeom prst="roundRect">
+            <a:avLst>
+              <a:gd name="adj" fmla="val 3306"/>
+            </a:avLst>
+          </a:prstGeom>
+          <a:solidFill>
+            <a:srgbClr val="FFF0F3"/>
+          </a:solidFill>
+          <a:ln w="12700">
+            <a:solidFill>
+              <a:srgbClr val="FBD8DF"/>
+            </a:solidFill>
+            <a:prstDash val="solid"/>
+          </a:ln>
+          <a:effectLst>
+            <a:outerShdw sx="100000" sy="100000" kx="0" ky="0" algn="bl" rotWithShape="0" blurRad="127000" dist="50800" dir="5400000">
+              <a:srgbClr val="C9A3AC">
+                <a:alpha val="45000"/>
+              </a:srgbClr>
+            </a:outerShdw>
+          </a:effectLst>
+        </p:spPr>
+      </p:sp>
+      <p:sp>
+        <p:nvSpPr>
+          <p:cNvPr id="9" name="Shape 6"/>
+          <p:cNvSpPr/>
+          <p:nvPr/>
+        </p:nvSpPr>
+        <p:spPr>
+          <a:xfrm>
+            <a:off x="777240" y="2926080"/>
+            <a:ext cx="658368" cy="658368"/>
           </a:xfrm>
           <a:prstGeom prst="ellipse">
             <a:avLst/>
@@ -14663,7 +14953,7 @@
       </p:sp>
       <p:pic>
         <p:nvPicPr>
-          <p:cNvPr id="5" name="Image 1" descr="preencoded.png">    </p:cNvPr>
+          <p:cNvPr id="10" name="Image 1" descr="preencoded.png">    </p:cNvPr>
           <p:cNvPicPr>
             <a:picLocks noChangeAspect="1"/>
           </p:cNvPicPr>
@@ -14677,8 +14967,8 @@
         </p:blipFill>
         <p:spPr>
           <a:xfrm>
-            <a:off x="905256" y="905256"/>
-            <a:ext cx="521208" cy="521208"/>
+            <a:off x="932688" y="3081528"/>
+            <a:ext cx="347472" cy="347472"/>
           </a:xfrm>
           <a:prstGeom prst="rect">
             <a:avLst/>
@@ -14687,92 +14977,273 @@
       </p:pic>
       <p:sp>
         <p:nvSpPr>
-          <p:cNvPr id="6" name="Text 2"/>
-          <p:cNvSpPr/>
-          <p:nvPr/>
-        </p:nvSpPr>
-        <p:spPr>
-          <a:xfrm>
-            <a:off x="1828800" y="868680"/>
-            <a:ext cx="8229600" cy="548640"/>
-          </a:xfrm>
-          <a:prstGeom prst="rect">
-            <a:avLst/>
-          </a:prstGeom>
-          <a:noFill/>
-          <a:ln/>
-        </p:spPr>
-        <p:txBody>
-          <a:bodyPr wrap="square" rtlCol="0" anchor="ctr"/>
-          <a:lstStyle/>
-          <a:p>
-            <a:pPr algn="l" indent="0" marL="0">
-              <a:buNone/>
-            </a:pPr>
-            <a:r>
-              <a:rPr lang="en-US" sz="1700" b="1" spc="300" kern="0" dirty="0">
-                <a:solidFill>
-                  <a:srgbClr val="FF4D6D"/>
+          <p:cNvPr id="11" name="Text 7"/>
+          <p:cNvSpPr/>
+          <p:nvPr/>
+        </p:nvSpPr>
+        <p:spPr>
+          <a:xfrm>
+            <a:off x="1554480" y="2926080"/>
+            <a:ext cx="2423160" cy="658368"/>
+          </a:xfrm>
+          <a:prstGeom prst="rect">
+            <a:avLst/>
+          </a:prstGeom>
+          <a:noFill/>
+          <a:ln/>
+        </p:spPr>
+        <p:txBody>
+          <a:bodyPr wrap="square" lIns="0" tIns="0" rIns="0" bIns="0" rtlCol="0" anchor="ctr"/>
+          <a:lstStyle/>
+          <a:p>
+            <a:pPr algn="l" indent="0" marL="0">
+              <a:buNone/>
+            </a:pPr>
+            <a:r>
+              <a:rPr lang="en-US" sz="1700" b="1" dirty="0">
+                <a:solidFill>
+                  <a:srgbClr val="2B2B33"/>
+                </a:solidFill>
+                <a:latin typeface="Cambria" pitchFamily="34" charset="0"/>
+                <a:ea typeface="Cambria" pitchFamily="34" charset="-122"/>
+                <a:cs typeface="Cambria" pitchFamily="34" charset="-120"/>
+              </a:rPr>
+              <a:t>Anticoagulation</a:t>
+            </a:r>
+            <a:endParaRPr lang="en-US" sz="1700" dirty="0"/>
+          </a:p>
+        </p:txBody>
+      </p:sp>
+      <p:sp>
+        <p:nvSpPr>
+          <p:cNvPr id="12" name="Shape 8"/>
+          <p:cNvSpPr/>
+          <p:nvPr/>
+        </p:nvSpPr>
+        <p:spPr>
+          <a:xfrm>
+            <a:off x="795528" y="3822192"/>
+            <a:ext cx="118872" cy="118872"/>
+          </a:xfrm>
+          <a:prstGeom prst="ellipse">
+            <a:avLst/>
+          </a:prstGeom>
+          <a:solidFill>
+            <a:srgbClr val="FF4D6D"/>
+          </a:solidFill>
+          <a:ln/>
+        </p:spPr>
+      </p:sp>
+      <p:sp>
+        <p:nvSpPr>
+          <p:cNvPr id="13" name="Text 9"/>
+          <p:cNvSpPr/>
+          <p:nvPr/>
+        </p:nvSpPr>
+        <p:spPr>
+          <a:xfrm>
+            <a:off x="1033272" y="3767328"/>
+            <a:ext cx="2834640" cy="676656"/>
+          </a:xfrm>
+          <a:prstGeom prst="rect">
+            <a:avLst/>
+          </a:prstGeom>
+          <a:noFill/>
+          <a:ln/>
+        </p:spPr>
+        <p:txBody>
+          <a:bodyPr wrap="square" lIns="0" tIns="0" rIns="0" bIns="0" rtlCol="0" anchor="t"/>
+          <a:lstStyle/>
+          <a:p>
+            <a:pPr algn="l" indent="0" marL="0">
+              <a:lnSpc>
+                <a:spcPct val="102000"/>
+              </a:lnSpc>
+              <a:buNone/>
+            </a:pPr>
+            <a:r>
+              <a:rPr lang="en-US" sz="1250" dirty="0">
+                <a:solidFill>
+                  <a:srgbClr val="2B2B33"/>
                 </a:solidFill>
                 <a:latin typeface="Calibri" pitchFamily="34" charset="0"/>
                 <a:ea typeface="Calibri" pitchFamily="34" charset="-122"/>
                 <a:cs typeface="Calibri" pitchFamily="34" charset="-120"/>
               </a:rPr>
-              <a:t>SUMMARY</a:t>
-            </a:r>
-            <a:endParaRPr lang="en-US" sz="1700" dirty="0"/>
-          </a:p>
-        </p:txBody>
-      </p:sp>
-      <p:sp>
-        <p:nvSpPr>
-          <p:cNvPr id="7" name="Text 3"/>
-          <p:cNvSpPr/>
-          <p:nvPr/>
-        </p:nvSpPr>
-        <p:spPr>
-          <a:xfrm>
-            <a:off x="640080" y="1691640"/>
-            <a:ext cx="10058400" cy="914400"/>
-          </a:xfrm>
-          <a:prstGeom prst="rect">
-            <a:avLst/>
-          </a:prstGeom>
-          <a:noFill/>
-          <a:ln/>
-        </p:spPr>
-        <p:txBody>
-          <a:bodyPr wrap="square" rtlCol="0" anchor="t"/>
-          <a:lstStyle/>
-          <a:p>
-            <a:pPr algn="l" indent="0" marL="0">
-              <a:buNone/>
-            </a:pPr>
-            <a:r>
-              <a:rPr lang="en-US" sz="4600" b="1" dirty="0">
-                <a:solidFill>
-                  <a:srgbClr val="FFFFFF"/>
-                </a:solidFill>
-                <a:latin typeface="Cambria" pitchFamily="34" charset="0"/>
-                <a:ea typeface="Cambria" pitchFamily="34" charset="-122"/>
-                <a:cs typeface="Cambria" pitchFamily="34" charset="-120"/>
-              </a:rPr>
-              <a:t>Key Points</a:t>
-            </a:r>
-            <a:endParaRPr lang="en-US" sz="4600" dirty="0"/>
-          </a:p>
-        </p:txBody>
-      </p:sp>
-      <p:sp>
-        <p:nvSpPr>
-          <p:cNvPr id="8" name="Shape 4"/>
-          <p:cNvSpPr/>
-          <p:nvPr/>
-        </p:nvSpPr>
-        <p:spPr>
-          <a:xfrm>
-            <a:off x="713232" y="2596896"/>
-            <a:ext cx="292608" cy="292608"/>
+              <a:t>Same criteria as non-pregnant women</a:t>
+            </a:r>
+            <a:endParaRPr lang="en-US" sz="1250" dirty="0"/>
+          </a:p>
+        </p:txBody>
+      </p:sp>
+      <p:sp>
+        <p:nvSpPr>
+          <p:cNvPr id="14" name="Shape 10"/>
+          <p:cNvSpPr/>
+          <p:nvPr/>
+        </p:nvSpPr>
+        <p:spPr>
+          <a:xfrm>
+            <a:off x="795528" y="4553712"/>
+            <a:ext cx="118872" cy="118872"/>
+          </a:xfrm>
+          <a:prstGeom prst="ellipse">
+            <a:avLst/>
+          </a:prstGeom>
+          <a:solidFill>
+            <a:srgbClr val="FF4D6D"/>
+          </a:solidFill>
+          <a:ln/>
+        </p:spPr>
+      </p:sp>
+      <p:sp>
+        <p:nvSpPr>
+          <p:cNvPr id="15" name="Text 11"/>
+          <p:cNvSpPr/>
+          <p:nvPr/>
+        </p:nvSpPr>
+        <p:spPr>
+          <a:xfrm>
+            <a:off x="1033272" y="4498848"/>
+            <a:ext cx="2834640" cy="676656"/>
+          </a:xfrm>
+          <a:prstGeom prst="rect">
+            <a:avLst/>
+          </a:prstGeom>
+          <a:noFill/>
+          <a:ln/>
+        </p:spPr>
+        <p:txBody>
+          <a:bodyPr wrap="square" lIns="0" tIns="0" rIns="0" bIns="0" rtlCol="0" anchor="t"/>
+          <a:lstStyle/>
+          <a:p>
+            <a:pPr algn="l" indent="0" marL="0">
+              <a:lnSpc>
+                <a:spcPct val="102000"/>
+              </a:lnSpc>
+              <a:buNone/>
+            </a:pPr>
+            <a:r>
+              <a:rPr lang="en-US" sz="1250" dirty="0">
+                <a:solidFill>
+                  <a:srgbClr val="2B2B33"/>
+                </a:solidFill>
+                <a:latin typeface="Calibri" pitchFamily="34" charset="0"/>
+                <a:ea typeface="Calibri" pitchFamily="34" charset="-122"/>
+                <a:cs typeface="Calibri" pitchFamily="34" charset="-120"/>
+              </a:rPr>
+              <a:t>Warfarin (not DOAC) — 2nd trimester to 1 month before delivery</a:t>
+            </a:r>
+            <a:endParaRPr lang="en-US" sz="1250" dirty="0"/>
+          </a:p>
+        </p:txBody>
+      </p:sp>
+      <p:sp>
+        <p:nvSpPr>
+          <p:cNvPr id="16" name="Shape 12"/>
+          <p:cNvSpPr/>
+          <p:nvPr/>
+        </p:nvSpPr>
+        <p:spPr>
+          <a:xfrm>
+            <a:off x="795528" y="5285232"/>
+            <a:ext cx="118872" cy="118872"/>
+          </a:xfrm>
+          <a:prstGeom prst="ellipse">
+            <a:avLst/>
+          </a:prstGeom>
+          <a:solidFill>
+            <a:srgbClr val="FF4D6D"/>
+          </a:solidFill>
+          <a:ln/>
+        </p:spPr>
+      </p:sp>
+      <p:sp>
+        <p:nvSpPr>
+          <p:cNvPr id="17" name="Text 13"/>
+          <p:cNvSpPr/>
+          <p:nvPr/>
+        </p:nvSpPr>
+        <p:spPr>
+          <a:xfrm>
+            <a:off x="1033272" y="5230368"/>
+            <a:ext cx="2834640" cy="676656"/>
+          </a:xfrm>
+          <a:prstGeom prst="rect">
+            <a:avLst/>
+          </a:prstGeom>
+          <a:noFill/>
+          <a:ln/>
+        </p:spPr>
+        <p:txBody>
+          <a:bodyPr wrap="square" lIns="0" tIns="0" rIns="0" bIns="0" rtlCol="0" anchor="t"/>
+          <a:lstStyle/>
+          <a:p>
+            <a:pPr algn="l" indent="0" marL="0">
+              <a:lnSpc>
+                <a:spcPct val="102000"/>
+              </a:lnSpc>
+              <a:buNone/>
+            </a:pPr>
+            <a:r>
+              <a:rPr lang="en-US" sz="1250" dirty="0">
+                <a:solidFill>
+                  <a:srgbClr val="2B2B33"/>
+                </a:solidFill>
+                <a:latin typeface="Calibri" pitchFamily="34" charset="0"/>
+                <a:ea typeface="Calibri" pitchFamily="34" charset="-122"/>
+                <a:cs typeface="Calibri" pitchFamily="34" charset="-120"/>
+              </a:rPr>
+              <a:t>LMWH (SC) — 1st trimester &amp; final month</a:t>
+            </a:r>
+            <a:endParaRPr lang="en-US" sz="1250" dirty="0"/>
+          </a:p>
+        </p:txBody>
+      </p:sp>
+      <p:sp>
+        <p:nvSpPr>
+          <p:cNvPr id="18" name="Shape 14"/>
+          <p:cNvSpPr/>
+          <p:nvPr/>
+        </p:nvSpPr>
+        <p:spPr>
+          <a:xfrm>
+            <a:off x="4288536" y="2670048"/>
+            <a:ext cx="3611880" cy="3319272"/>
+          </a:xfrm>
+          <a:prstGeom prst="roundRect">
+            <a:avLst>
+              <a:gd name="adj" fmla="val 3306"/>
+            </a:avLst>
+          </a:prstGeom>
+          <a:solidFill>
+            <a:srgbClr val="FFF0F3"/>
+          </a:solidFill>
+          <a:ln w="12700">
+            <a:solidFill>
+              <a:srgbClr val="FBD8DF"/>
+            </a:solidFill>
+            <a:prstDash val="solid"/>
+          </a:ln>
+          <a:effectLst>
+            <a:outerShdw sx="100000" sy="100000" kx="0" ky="0" algn="bl" rotWithShape="0" blurRad="127000" dist="50800" dir="5400000">
+              <a:srgbClr val="C9A3AC">
+                <a:alpha val="45000"/>
+              </a:srgbClr>
+            </a:outerShdw>
+          </a:effectLst>
+        </p:spPr>
+      </p:sp>
+      <p:sp>
+        <p:nvSpPr>
+          <p:cNvPr id="19" name="Shape 15"/>
+          <p:cNvSpPr/>
+          <p:nvPr/>
+        </p:nvSpPr>
+        <p:spPr>
+          <a:xfrm>
+            <a:off x="4562856" y="2926080"/>
+            <a:ext cx="658368" cy="658368"/>
           </a:xfrm>
           <a:prstGeom prst="ellipse">
             <a:avLst/>
@@ -14785,7 +15256,7 @@
       </p:sp>
       <p:pic>
         <p:nvPicPr>
-          <p:cNvPr id="9" name="Image 2" descr="preencoded.png">    </p:cNvPr>
+          <p:cNvPr id="20" name="Image 2" descr="preencoded.png">    </p:cNvPr>
           <p:cNvPicPr>
             <a:picLocks noChangeAspect="1"/>
           </p:cNvPicPr>
@@ -14799,8 +15270,8 @@
         </p:blipFill>
         <p:spPr>
           <a:xfrm>
-            <a:off x="777240" y="2660904"/>
-            <a:ext cx="164592" cy="164592"/>
+            <a:off x="4718304" y="3081528"/>
+            <a:ext cx="347472" cy="347472"/>
           </a:xfrm>
           <a:prstGeom prst="rect">
             <a:avLst/>
@@ -14809,14 +15280,14 @@
       </p:pic>
       <p:sp>
         <p:nvSpPr>
-          <p:cNvPr id="10" name="Text 5"/>
-          <p:cNvSpPr/>
-          <p:nvPr/>
-        </p:nvSpPr>
-        <p:spPr>
-          <a:xfrm>
-            <a:off x="1188720" y="2578608"/>
-            <a:ext cx="10058400" cy="502920"/>
+          <p:cNvPr id="21" name="Text 16"/>
+          <p:cNvSpPr/>
+          <p:nvPr/>
+        </p:nvSpPr>
+        <p:spPr>
+          <a:xfrm>
+            <a:off x="5340096" y="2926080"/>
+            <a:ext cx="2423160" cy="658368"/>
           </a:xfrm>
           <a:prstGeom prst="rect">
             <a:avLst/>
@@ -14829,36 +15300,253 @@
           <a:lstStyle/>
           <a:p>
             <a:pPr algn="l" indent="0" marL="0">
+              <a:buNone/>
+            </a:pPr>
+            <a:r>
+              <a:rPr lang="en-US" sz="1700" b="1" dirty="0">
+                <a:solidFill>
+                  <a:srgbClr val="2B2B33"/>
+                </a:solidFill>
+                <a:latin typeface="Cambria" pitchFamily="34" charset="0"/>
+                <a:ea typeface="Cambria" pitchFamily="34" charset="-122"/>
+                <a:cs typeface="Cambria" pitchFamily="34" charset="-120"/>
+              </a:rPr>
+              <a:t>Acute Management</a:t>
+            </a:r>
+            <a:endParaRPr lang="en-US" sz="1700" dirty="0"/>
+          </a:p>
+        </p:txBody>
+      </p:sp>
+      <p:sp>
+        <p:nvSpPr>
+          <p:cNvPr id="22" name="Shape 17"/>
+          <p:cNvSpPr/>
+          <p:nvPr/>
+        </p:nvSpPr>
+        <p:spPr>
+          <a:xfrm>
+            <a:off x="4581144" y="3822192"/>
+            <a:ext cx="118872" cy="118872"/>
+          </a:xfrm>
+          <a:prstGeom prst="ellipse">
+            <a:avLst/>
+          </a:prstGeom>
+          <a:solidFill>
+            <a:srgbClr val="FF4D6D"/>
+          </a:solidFill>
+          <a:ln/>
+        </p:spPr>
+      </p:sp>
+      <p:sp>
+        <p:nvSpPr>
+          <p:cNvPr id="23" name="Text 18"/>
+          <p:cNvSpPr/>
+          <p:nvPr/>
+        </p:nvSpPr>
+        <p:spPr>
+          <a:xfrm>
+            <a:off x="4818888" y="3767328"/>
+            <a:ext cx="2834640" cy="676656"/>
+          </a:xfrm>
+          <a:prstGeom prst="rect">
+            <a:avLst/>
+          </a:prstGeom>
+          <a:noFill/>
+          <a:ln/>
+        </p:spPr>
+        <p:txBody>
+          <a:bodyPr wrap="square" lIns="0" tIns="0" rIns="0" bIns="0" rtlCol="0" anchor="t"/>
+          <a:lstStyle/>
+          <a:p>
+            <a:pPr algn="l" indent="0" marL="0">
               <a:lnSpc>
-                <a:spcPct val="105000"/>
+                <a:spcPct val="102000"/>
               </a:lnSpc>
               <a:buNone/>
             </a:pPr>
             <a:r>
-              <a:rPr lang="en-US" sz="1500" dirty="0">
-                <a:solidFill>
-                  <a:srgbClr val="FBD8DF"/>
+              <a:rPr lang="en-US" sz="1250" dirty="0">
+                <a:solidFill>
+                  <a:srgbClr val="2B2B33"/>
                 </a:solidFill>
                 <a:latin typeface="Calibri" pitchFamily="34" charset="0"/>
                 <a:ea typeface="Calibri" pitchFamily="34" charset="-122"/>
                 <a:cs typeface="Calibri" pitchFamily="34" charset="-120"/>
               </a:rPr>
-              <a:t>AF = irregularly irregular rhythm with absent P waves and a fibrillatory baseline.</a:t>
-            </a:r>
-            <a:endParaRPr lang="en-US" sz="1500" dirty="0"/>
-          </a:p>
-        </p:txBody>
-      </p:sp>
-      <p:sp>
-        <p:nvSpPr>
-          <p:cNvPr id="11" name="Shape 6"/>
-          <p:cNvSpPr/>
-          <p:nvPr/>
-        </p:nvSpPr>
-        <p:spPr>
-          <a:xfrm>
-            <a:off x="713232" y="3145536"/>
-            <a:ext cx="292608" cy="292608"/>
+              <a:t>DC cardioversion — safe at all stages</a:t>
+            </a:r>
+            <a:endParaRPr lang="en-US" sz="1250" dirty="0"/>
+          </a:p>
+        </p:txBody>
+      </p:sp>
+      <p:sp>
+        <p:nvSpPr>
+          <p:cNvPr id="24" name="Shape 19"/>
+          <p:cNvSpPr/>
+          <p:nvPr/>
+        </p:nvSpPr>
+        <p:spPr>
+          <a:xfrm>
+            <a:off x="4581144" y="4553712"/>
+            <a:ext cx="118872" cy="118872"/>
+          </a:xfrm>
+          <a:prstGeom prst="ellipse">
+            <a:avLst/>
+          </a:prstGeom>
+          <a:solidFill>
+            <a:srgbClr val="FF4D6D"/>
+          </a:solidFill>
+          <a:ln/>
+        </p:spPr>
+      </p:sp>
+      <p:sp>
+        <p:nvSpPr>
+          <p:cNvPr id="25" name="Text 20"/>
+          <p:cNvSpPr/>
+          <p:nvPr/>
+        </p:nvSpPr>
+        <p:spPr>
+          <a:xfrm>
+            <a:off x="4818888" y="4498848"/>
+            <a:ext cx="2834640" cy="676656"/>
+          </a:xfrm>
+          <a:prstGeom prst="rect">
+            <a:avLst/>
+          </a:prstGeom>
+          <a:noFill/>
+          <a:ln/>
+        </p:spPr>
+        <p:txBody>
+          <a:bodyPr wrap="square" lIns="0" tIns="0" rIns="0" bIns="0" rtlCol="0" anchor="t"/>
+          <a:lstStyle/>
+          <a:p>
+            <a:pPr algn="l" indent="0" marL="0">
+              <a:lnSpc>
+                <a:spcPct val="102000"/>
+              </a:lnSpc>
+              <a:buNone/>
+            </a:pPr>
+            <a:r>
+              <a:rPr lang="en-US" sz="1250" dirty="0">
+                <a:solidFill>
+                  <a:srgbClr val="2B2B33"/>
+                </a:solidFill>
+                <a:latin typeface="Calibri" pitchFamily="34" charset="0"/>
+                <a:ea typeface="Calibri" pitchFamily="34" charset="-122"/>
+                <a:cs typeface="Calibri" pitchFamily="34" charset="-120"/>
+              </a:rPr>
+              <a:t>IV metoprolol — rate control</a:t>
+            </a:r>
+            <a:endParaRPr lang="en-US" sz="1250" dirty="0"/>
+          </a:p>
+        </p:txBody>
+      </p:sp>
+      <p:sp>
+        <p:nvSpPr>
+          <p:cNvPr id="26" name="Shape 21"/>
+          <p:cNvSpPr/>
+          <p:nvPr/>
+        </p:nvSpPr>
+        <p:spPr>
+          <a:xfrm>
+            <a:off x="4581144" y="5285232"/>
+            <a:ext cx="118872" cy="118872"/>
+          </a:xfrm>
+          <a:prstGeom prst="ellipse">
+            <a:avLst/>
+          </a:prstGeom>
+          <a:solidFill>
+            <a:srgbClr val="FF4D6D"/>
+          </a:solidFill>
+          <a:ln/>
+        </p:spPr>
+      </p:sp>
+      <p:sp>
+        <p:nvSpPr>
+          <p:cNvPr id="27" name="Text 22"/>
+          <p:cNvSpPr/>
+          <p:nvPr/>
+        </p:nvSpPr>
+        <p:spPr>
+          <a:xfrm>
+            <a:off x="4818888" y="5230368"/>
+            <a:ext cx="2834640" cy="676656"/>
+          </a:xfrm>
+          <a:prstGeom prst="rect">
+            <a:avLst/>
+          </a:prstGeom>
+          <a:noFill/>
+          <a:ln/>
+        </p:spPr>
+        <p:txBody>
+          <a:bodyPr wrap="square" lIns="0" tIns="0" rIns="0" bIns="0" rtlCol="0" anchor="t"/>
+          <a:lstStyle/>
+          <a:p>
+            <a:pPr algn="l" indent="0" marL="0">
+              <a:lnSpc>
+                <a:spcPct val="102000"/>
+              </a:lnSpc>
+              <a:buNone/>
+            </a:pPr>
+            <a:r>
+              <a:rPr lang="en-US" sz="1250" dirty="0">
+                <a:solidFill>
+                  <a:srgbClr val="2B2B33"/>
+                </a:solidFill>
+                <a:latin typeface="Calibri" pitchFamily="34" charset="0"/>
+                <a:ea typeface="Calibri" pitchFamily="34" charset="-122"/>
+                <a:cs typeface="Calibri" pitchFamily="34" charset="-120"/>
+              </a:rPr>
+              <a:t>Flecainide or sotalol — conversion to sinus rhythm</a:t>
+            </a:r>
+            <a:endParaRPr lang="en-US" sz="1250" dirty="0"/>
+          </a:p>
+        </p:txBody>
+      </p:sp>
+      <p:sp>
+        <p:nvSpPr>
+          <p:cNvPr id="28" name="Shape 23"/>
+          <p:cNvSpPr/>
+          <p:nvPr/>
+        </p:nvSpPr>
+        <p:spPr>
+          <a:xfrm>
+            <a:off x="8074152" y="2670048"/>
+            <a:ext cx="3611880" cy="3319272"/>
+          </a:xfrm>
+          <a:prstGeom prst="roundRect">
+            <a:avLst>
+              <a:gd name="adj" fmla="val 3306"/>
+            </a:avLst>
+          </a:prstGeom>
+          <a:solidFill>
+            <a:srgbClr val="FFF0F3"/>
+          </a:solidFill>
+          <a:ln w="12700">
+            <a:solidFill>
+              <a:srgbClr val="FBD8DF"/>
+            </a:solidFill>
+            <a:prstDash val="solid"/>
+          </a:ln>
+          <a:effectLst>
+            <a:outerShdw sx="100000" sy="100000" kx="0" ky="0" algn="bl" rotWithShape="0" blurRad="127000" dist="50800" dir="5400000">
+              <a:srgbClr val="C9A3AC">
+                <a:alpha val="45000"/>
+              </a:srgbClr>
+            </a:outerShdw>
+          </a:effectLst>
+        </p:spPr>
+      </p:sp>
+      <p:sp>
+        <p:nvSpPr>
+          <p:cNvPr id="29" name="Shape 24"/>
+          <p:cNvSpPr/>
+          <p:nvPr/>
+        </p:nvSpPr>
+        <p:spPr>
+          <a:xfrm>
+            <a:off x="8348472" y="2926080"/>
+            <a:ext cx="658368" cy="658368"/>
           </a:xfrm>
           <a:prstGeom prst="ellipse">
             <a:avLst/>
@@ -14871,7 +15559,7 @@
       </p:sp>
       <p:pic>
         <p:nvPicPr>
-          <p:cNvPr id="12" name="Image 3" descr="preencoded.png">    </p:cNvPr>
+          <p:cNvPr id="30" name="Image 3" descr="preencoded.png">    </p:cNvPr>
           <p:cNvPicPr>
             <a:picLocks noChangeAspect="1"/>
           </p:cNvPicPr>
@@ -14885,8 +15573,8 @@
         </p:blipFill>
         <p:spPr>
           <a:xfrm>
-            <a:off x="777240" y="3209544"/>
-            <a:ext cx="164592" cy="164592"/>
+            <a:off x="8503920" y="3081528"/>
+            <a:ext cx="347472" cy="347472"/>
           </a:xfrm>
           <a:prstGeom prst="rect">
             <a:avLst/>
@@ -14895,14 +15583,14 @@
       </p:pic>
       <p:sp>
         <p:nvSpPr>
-          <p:cNvPr id="13" name="Text 7"/>
-          <p:cNvSpPr/>
-          <p:nvPr/>
-        </p:nvSpPr>
-        <p:spPr>
-          <a:xfrm>
-            <a:off x="1188720" y="3127248"/>
-            <a:ext cx="10058400" cy="502920"/>
+          <p:cNvPr id="31" name="Text 25"/>
+          <p:cNvSpPr/>
+          <p:nvPr/>
+        </p:nvSpPr>
+        <p:spPr>
+          <a:xfrm>
+            <a:off x="9125712" y="2926080"/>
+            <a:ext cx="2423160" cy="658368"/>
           </a:xfrm>
           <a:prstGeom prst="rect">
             <a:avLst/>
@@ -14915,403 +15603,242 @@
           <a:lstStyle/>
           <a:p>
             <a:pPr algn="l" indent="0" marL="0">
+              <a:buNone/>
+            </a:pPr>
+            <a:r>
+              <a:rPr lang="en-US" sz="1700" b="1" dirty="0">
+                <a:solidFill>
+                  <a:srgbClr val="2B2B33"/>
+                </a:solidFill>
+                <a:latin typeface="Cambria" pitchFamily="34" charset="0"/>
+                <a:ea typeface="Cambria" pitchFamily="34" charset="-122"/>
+                <a:cs typeface="Cambria" pitchFamily="34" charset="-120"/>
+              </a:rPr>
+              <a:t>Long-term Rhythm</a:t>
+            </a:r>
+            <a:endParaRPr lang="en-US" sz="1700" dirty="0"/>
+          </a:p>
+        </p:txBody>
+      </p:sp>
+      <p:sp>
+        <p:nvSpPr>
+          <p:cNvPr id="32" name="Shape 26"/>
+          <p:cNvSpPr/>
+          <p:nvPr/>
+        </p:nvSpPr>
+        <p:spPr>
+          <a:xfrm>
+            <a:off x="8366760" y="3822192"/>
+            <a:ext cx="118872" cy="118872"/>
+          </a:xfrm>
+          <a:prstGeom prst="ellipse">
+            <a:avLst/>
+          </a:prstGeom>
+          <a:solidFill>
+            <a:srgbClr val="FF4D6D"/>
+          </a:solidFill>
+          <a:ln/>
+        </p:spPr>
+      </p:sp>
+      <p:sp>
+        <p:nvSpPr>
+          <p:cNvPr id="33" name="Text 27"/>
+          <p:cNvSpPr/>
+          <p:nvPr/>
+        </p:nvSpPr>
+        <p:spPr>
+          <a:xfrm>
+            <a:off x="8604504" y="3767328"/>
+            <a:ext cx="2834640" cy="676656"/>
+          </a:xfrm>
+          <a:prstGeom prst="rect">
+            <a:avLst/>
+          </a:prstGeom>
+          <a:noFill/>
+          <a:ln/>
+        </p:spPr>
+        <p:txBody>
+          <a:bodyPr wrap="square" lIns="0" tIns="0" rIns="0" bIns="0" rtlCol="0" anchor="t"/>
+          <a:lstStyle/>
+          <a:p>
+            <a:pPr algn="l" indent="0" marL="0">
               <a:lnSpc>
-                <a:spcPct val="105000"/>
+                <a:spcPct val="102000"/>
               </a:lnSpc>
               <a:buNone/>
             </a:pPr>
             <a:r>
-              <a:rPr lang="en-US" sz="1500" dirty="0">
-                <a:solidFill>
-                  <a:srgbClr val="FBD8DF"/>
+              <a:rPr lang="en-US" sz="1250" dirty="0">
+                <a:solidFill>
+                  <a:srgbClr val="2B2B33"/>
                 </a:solidFill>
                 <a:latin typeface="Calibri" pitchFamily="34" charset="0"/>
                 <a:ea typeface="Calibri" pitchFamily="34" charset="-122"/>
                 <a:cs typeface="Calibri" pitchFamily="34" charset="-120"/>
               </a:rPr>
-              <a:t>The commonest sustained arrhythmia — linked to hypertension, age and structural heart disease.</a:t>
-            </a:r>
-            <a:endParaRPr lang="en-US" sz="1500" dirty="0"/>
-          </a:p>
-        </p:txBody>
-      </p:sp>
-      <p:sp>
-        <p:nvSpPr>
-          <p:cNvPr id="14" name="Shape 8"/>
-          <p:cNvSpPr/>
-          <p:nvPr/>
-        </p:nvSpPr>
-        <p:spPr>
-          <a:xfrm>
-            <a:off x="713232" y="3694176"/>
-            <a:ext cx="292608" cy="292608"/>
+              <a:t>No structural disease — flecainide, sotalol</a:t>
+            </a:r>
+            <a:endParaRPr lang="en-US" sz="1250" dirty="0"/>
+          </a:p>
+        </p:txBody>
+      </p:sp>
+      <p:sp>
+        <p:nvSpPr>
+          <p:cNvPr id="34" name="Shape 28"/>
+          <p:cNvSpPr/>
+          <p:nvPr/>
+        </p:nvSpPr>
+        <p:spPr>
+          <a:xfrm>
+            <a:off x="8366760" y="4553712"/>
+            <a:ext cx="118872" cy="118872"/>
           </a:xfrm>
           <a:prstGeom prst="ellipse">
             <a:avLst/>
           </a:prstGeom>
           <a:solidFill>
-            <a:srgbClr val="A4133C"/>
+            <a:srgbClr val="FF4D6D"/>
           </a:solidFill>
           <a:ln/>
         </p:spPr>
       </p:sp>
-      <p:pic>
-        <p:nvPicPr>
-          <p:cNvPr id="15" name="Image 4" descr="preencoded.png">    </p:cNvPr>
-          <p:cNvPicPr>
-            <a:picLocks noChangeAspect="1"/>
-          </p:cNvPicPr>
-          <p:nvPr/>
-        </p:nvPicPr>
-        <p:blipFill>
-          <a:blip r:embed="rId5"/>
-          <a:stretch>
-            <a:fillRect/>
-          </a:stretch>
-        </p:blipFill>
-        <p:spPr>
-          <a:xfrm>
-            <a:off x="777240" y="3758184"/>
-            <a:ext cx="164592" cy="164592"/>
-          </a:xfrm>
-          <a:prstGeom prst="rect">
-            <a:avLst/>
-          </a:prstGeom>
-        </p:spPr>
-      </p:pic>
-      <p:sp>
-        <p:nvSpPr>
-          <p:cNvPr id="16" name="Text 9"/>
-          <p:cNvSpPr/>
-          <p:nvPr/>
-        </p:nvSpPr>
-        <p:spPr>
-          <a:xfrm>
-            <a:off x="1188720" y="3675888"/>
-            <a:ext cx="10058400" cy="502920"/>
-          </a:xfrm>
-          <a:prstGeom prst="rect">
-            <a:avLst/>
-          </a:prstGeom>
-          <a:noFill/>
-          <a:ln/>
-        </p:spPr>
-        <p:txBody>
-          <a:bodyPr wrap="square" lIns="0" tIns="0" rIns="0" bIns="0" rtlCol="0" anchor="ctr"/>
+      <p:sp>
+        <p:nvSpPr>
+          <p:cNvPr id="35" name="Text 29"/>
+          <p:cNvSpPr/>
+          <p:nvPr/>
+        </p:nvSpPr>
+        <p:spPr>
+          <a:xfrm>
+            <a:off x="8604504" y="4498848"/>
+            <a:ext cx="2834640" cy="676656"/>
+          </a:xfrm>
+          <a:prstGeom prst="rect">
+            <a:avLst/>
+          </a:prstGeom>
+          <a:noFill/>
+          <a:ln/>
+        </p:spPr>
+        <p:txBody>
+          <a:bodyPr wrap="square" lIns="0" tIns="0" rIns="0" bIns="0" rtlCol="0" anchor="t"/>
           <a:lstStyle/>
           <a:p>
             <a:pPr algn="l" indent="0" marL="0">
               <a:lnSpc>
-                <a:spcPct val="105000"/>
+                <a:spcPct val="102000"/>
               </a:lnSpc>
               <a:buNone/>
             </a:pPr>
             <a:r>
-              <a:rPr lang="en-US" sz="1500" dirty="0">
-                <a:solidFill>
-                  <a:srgbClr val="FBD8DF"/>
+              <a:rPr lang="en-US" sz="1250" dirty="0">
+                <a:solidFill>
+                  <a:srgbClr val="2B2B33"/>
                 </a:solidFill>
                 <a:latin typeface="Calibri" pitchFamily="34" charset="0"/>
                 <a:ea typeface="Calibri" pitchFamily="34" charset="-122"/>
                 <a:cs typeface="Calibri" pitchFamily="34" charset="-120"/>
               </a:rPr>
-              <a:t>Its main danger is thromboembolic stroke — always assess stroke risk (CHA₂DS₂-VASc).</a:t>
-            </a:r>
-            <a:endParaRPr lang="en-US" sz="1500" dirty="0"/>
-          </a:p>
-        </p:txBody>
-      </p:sp>
-      <p:sp>
-        <p:nvSpPr>
-          <p:cNvPr id="17" name="Shape 10"/>
-          <p:cNvSpPr/>
-          <p:nvPr/>
-        </p:nvSpPr>
-        <p:spPr>
-          <a:xfrm>
-            <a:off x="713232" y="4242816"/>
-            <a:ext cx="292608" cy="292608"/>
+              <a:t>Structural disease — amiodarone</a:t>
+            </a:r>
+            <a:endParaRPr lang="en-US" sz="1250" dirty="0"/>
+          </a:p>
+        </p:txBody>
+      </p:sp>
+      <p:sp>
+        <p:nvSpPr>
+          <p:cNvPr id="36" name="Shape 30"/>
+          <p:cNvSpPr/>
+          <p:nvPr/>
+        </p:nvSpPr>
+        <p:spPr>
+          <a:xfrm>
+            <a:off x="8366760" y="5285232"/>
+            <a:ext cx="118872" cy="118872"/>
           </a:xfrm>
           <a:prstGeom prst="ellipse">
             <a:avLst/>
           </a:prstGeom>
           <a:solidFill>
-            <a:srgbClr val="A4133C"/>
+            <a:srgbClr val="FF4D6D"/>
           </a:solidFill>
           <a:ln/>
         </p:spPr>
       </p:sp>
-      <p:pic>
-        <p:nvPicPr>
-          <p:cNvPr id="18" name="Image 5" descr="preencoded.png">    </p:cNvPr>
-          <p:cNvPicPr>
-            <a:picLocks noChangeAspect="1"/>
-          </p:cNvPicPr>
-          <p:nvPr/>
-        </p:nvPicPr>
-        <p:blipFill>
-          <a:blip r:embed="rId6"/>
-          <a:stretch>
-            <a:fillRect/>
-          </a:stretch>
-        </p:blipFill>
-        <p:spPr>
-          <a:xfrm>
-            <a:off x="777240" y="4306824"/>
-            <a:ext cx="164592" cy="164592"/>
-          </a:xfrm>
-          <a:prstGeom prst="rect">
-            <a:avLst/>
-          </a:prstGeom>
-        </p:spPr>
-      </p:pic>
-      <p:sp>
-        <p:nvSpPr>
-          <p:cNvPr id="19" name="Text 11"/>
-          <p:cNvSpPr/>
-          <p:nvPr/>
-        </p:nvSpPr>
-        <p:spPr>
-          <a:xfrm>
-            <a:off x="1188720" y="4224528"/>
-            <a:ext cx="10058400" cy="502920"/>
-          </a:xfrm>
-          <a:prstGeom prst="rect">
-            <a:avLst/>
-          </a:prstGeom>
-          <a:noFill/>
-          <a:ln/>
-        </p:spPr>
-        <p:txBody>
-          <a:bodyPr wrap="square" lIns="0" tIns="0" rIns="0" bIns="0" rtlCol="0" anchor="ctr"/>
+      <p:sp>
+        <p:nvSpPr>
+          <p:cNvPr id="37" name="Text 31"/>
+          <p:cNvSpPr/>
+          <p:nvPr/>
+        </p:nvSpPr>
+        <p:spPr>
+          <a:xfrm>
+            <a:off x="8604504" y="5230368"/>
+            <a:ext cx="2834640" cy="676656"/>
+          </a:xfrm>
+          <a:prstGeom prst="rect">
+            <a:avLst/>
+          </a:prstGeom>
+          <a:noFill/>
+          <a:ln/>
+        </p:spPr>
+        <p:txBody>
+          <a:bodyPr wrap="square" lIns="0" tIns="0" rIns="0" bIns="0" rtlCol="0" anchor="t"/>
           <a:lstStyle/>
           <a:p>
             <a:pPr algn="l" indent="0" marL="0">
               <a:lnSpc>
-                <a:spcPct val="105000"/>
+                <a:spcPct val="102000"/>
               </a:lnSpc>
               <a:buNone/>
             </a:pPr>
             <a:r>
-              <a:rPr lang="en-US" sz="1500" dirty="0">
-                <a:solidFill>
-                  <a:srgbClr val="FBD8DF"/>
+              <a:rPr lang="en-US" sz="1250" dirty="0">
+                <a:solidFill>
+                  <a:srgbClr val="2B2B33"/>
                 </a:solidFill>
                 <a:latin typeface="Calibri" pitchFamily="34" charset="0"/>
                 <a:ea typeface="Calibri" pitchFamily="34" charset="-122"/>
                 <a:cs typeface="Calibri" pitchFamily="34" charset="-120"/>
               </a:rPr>
-              <a:t>Differentials: atrial flutter, multifocal atrial tachycardia, frequent PACs, SVT, pre-excited AF / VT.</a:t>
-            </a:r>
-            <a:endParaRPr lang="en-US" sz="1500" dirty="0"/>
-          </a:p>
-        </p:txBody>
-      </p:sp>
-      <p:sp>
-        <p:nvSpPr>
-          <p:cNvPr id="20" name="Shape 12"/>
-          <p:cNvSpPr/>
-          <p:nvPr/>
-        </p:nvSpPr>
-        <p:spPr>
-          <a:xfrm>
-            <a:off x="713232" y="4791456"/>
-            <a:ext cx="292608" cy="292608"/>
-          </a:xfrm>
-          <a:prstGeom prst="ellipse">
-            <a:avLst/>
-          </a:prstGeom>
-          <a:solidFill>
-            <a:srgbClr val="A4133C"/>
-          </a:solidFill>
-          <a:ln/>
-        </p:spPr>
-      </p:sp>
-      <p:pic>
-        <p:nvPicPr>
-          <p:cNvPr id="21" name="Image 6" descr="preencoded.png">    </p:cNvPr>
-          <p:cNvPicPr>
-            <a:picLocks noChangeAspect="1"/>
-          </p:cNvPicPr>
-          <p:nvPr/>
-        </p:nvPicPr>
-        <p:blipFill>
-          <a:blip r:embed="rId7"/>
-          <a:stretch>
-            <a:fillRect/>
-          </a:stretch>
-        </p:blipFill>
-        <p:spPr>
-          <a:xfrm>
-            <a:off x="777240" y="4855464"/>
-            <a:ext cx="164592" cy="164592"/>
-          </a:xfrm>
-          <a:prstGeom prst="rect">
-            <a:avLst/>
-          </a:prstGeom>
-        </p:spPr>
-      </p:pic>
-      <p:sp>
-        <p:nvSpPr>
-          <p:cNvPr id="22" name="Text 13"/>
-          <p:cNvSpPr/>
-          <p:nvPr/>
-        </p:nvSpPr>
-        <p:spPr>
-          <a:xfrm>
-            <a:off x="1188720" y="4773168"/>
-            <a:ext cx="10058400" cy="502920"/>
-          </a:xfrm>
-          <a:prstGeom prst="rect">
-            <a:avLst/>
-          </a:prstGeom>
-          <a:noFill/>
-          <a:ln/>
-        </p:spPr>
-        <p:txBody>
-          <a:bodyPr wrap="square" lIns="0" tIns="0" rIns="0" bIns="0" rtlCol="0" anchor="ctr"/>
-          <a:lstStyle/>
-          <a:p>
-            <a:pPr algn="l" indent="0" marL="0">
-              <a:lnSpc>
-                <a:spcPct val="105000"/>
-              </a:lnSpc>
-              <a:buNone/>
-            </a:pPr>
-            <a:r>
-              <a:rPr lang="en-US" sz="1500" dirty="0">
-                <a:solidFill>
-                  <a:srgbClr val="FBD8DF"/>
+              <a:t>Rate: digoxin; beta-blocker only after 1st trimester</a:t>
+            </a:r>
+            <a:endParaRPr lang="en-US" sz="1250" dirty="0"/>
+          </a:p>
+        </p:txBody>
+      </p:sp>
+      <p:sp>
+        <p:nvSpPr>
+          <p:cNvPr id="38" name="Text 32"/>
+          <p:cNvSpPr/>
+          <p:nvPr/>
+        </p:nvSpPr>
+        <p:spPr>
+          <a:xfrm>
+            <a:off x="11277295" y="6355080"/>
+            <a:ext cx="548640" cy="320040"/>
+          </a:xfrm>
+          <a:prstGeom prst="rect">
+            <a:avLst/>
+          </a:prstGeom>
+          <a:noFill/>
+          <a:ln/>
+        </p:spPr>
+        <p:txBody>
+          <a:bodyPr wrap="square" rtlCol="0" anchor="t"/>
+          <a:lstStyle/>
+          <a:p>
+            <a:pPr algn="r" indent="0" marL="0">
+              <a:buNone/>
+            </a:pPr>
+            <a:r>
+              <a:rPr lang="en-US" sz="1100" b="1" dirty="0">
+                <a:solidFill>
+                  <a:srgbClr val="6B6B76"/>
                 </a:solidFill>
                 <a:latin typeface="Calibri" pitchFamily="34" charset="0"/>
                 <a:ea typeface="Calibri" pitchFamily="34" charset="-122"/>
                 <a:cs typeface="Calibri" pitchFamily="34" charset="-120"/>
               </a:rPr>
-              <a:t>Manage with the ABC pathway: Anticoagulation, Better symptom control, Comorbidities.</a:t>
-            </a:r>
-            <a:endParaRPr lang="en-US" sz="1500" dirty="0"/>
-          </a:p>
-        </p:txBody>
-      </p:sp>
-      <p:sp>
-        <p:nvSpPr>
-          <p:cNvPr id="23" name="Shape 14"/>
-          <p:cNvSpPr/>
-          <p:nvPr/>
-        </p:nvSpPr>
-        <p:spPr>
-          <a:xfrm>
-            <a:off x="713232" y="5340096"/>
-            <a:ext cx="292608" cy="292608"/>
-          </a:xfrm>
-          <a:prstGeom prst="ellipse">
-            <a:avLst/>
-          </a:prstGeom>
-          <a:solidFill>
-            <a:srgbClr val="A4133C"/>
-          </a:solidFill>
-          <a:ln/>
-        </p:spPr>
-      </p:sp>
-      <p:pic>
-        <p:nvPicPr>
-          <p:cNvPr id="24" name="Image 7" descr="preencoded.png">    </p:cNvPr>
-          <p:cNvPicPr>
-            <a:picLocks noChangeAspect="1"/>
-          </p:cNvPicPr>
-          <p:nvPr/>
-        </p:nvPicPr>
-        <p:blipFill>
-          <a:blip r:embed="rId8"/>
-          <a:stretch>
-            <a:fillRect/>
-          </a:stretch>
-        </p:blipFill>
-        <p:spPr>
-          <a:xfrm>
-            <a:off x="777240" y="5404104"/>
-            <a:ext cx="164592" cy="164592"/>
-          </a:xfrm>
-          <a:prstGeom prst="rect">
-            <a:avLst/>
-          </a:prstGeom>
-        </p:spPr>
-      </p:pic>
-      <p:sp>
-        <p:nvSpPr>
-          <p:cNvPr id="25" name="Text 15"/>
-          <p:cNvSpPr/>
-          <p:nvPr/>
-        </p:nvSpPr>
-        <p:spPr>
-          <a:xfrm>
-            <a:off x="1188720" y="5321808"/>
-            <a:ext cx="10058400" cy="502920"/>
-          </a:xfrm>
-          <a:prstGeom prst="rect">
-            <a:avLst/>
-          </a:prstGeom>
-          <a:noFill/>
-          <a:ln/>
-        </p:spPr>
-        <p:txBody>
-          <a:bodyPr wrap="square" lIns="0" tIns="0" rIns="0" bIns="0" rtlCol="0" anchor="ctr"/>
-          <a:lstStyle/>
-          <a:p>
-            <a:pPr algn="l" indent="0" marL="0">
-              <a:lnSpc>
-                <a:spcPct val="105000"/>
-              </a:lnSpc>
-              <a:buNone/>
-            </a:pPr>
-            <a:r>
-              <a:rPr lang="en-US" sz="1500" dirty="0">
-                <a:solidFill>
-                  <a:srgbClr val="FBD8DF"/>
-                </a:solidFill>
-                <a:latin typeface="Calibri" pitchFamily="34" charset="0"/>
-                <a:ea typeface="Calibri" pitchFamily="34" charset="-122"/>
-                <a:cs typeface="Calibri" pitchFamily="34" charset="-120"/>
-              </a:rPr>
-              <a:t>In pregnancy: LMWH is the anticoagulant of choice — avoid warfarin and DOACs.</a:t>
-            </a:r>
-            <a:endParaRPr lang="en-US" sz="1500" dirty="0"/>
-          </a:p>
-        </p:txBody>
-      </p:sp>
-      <p:sp>
-        <p:nvSpPr>
-          <p:cNvPr id="26" name="Text 16"/>
-          <p:cNvSpPr/>
-          <p:nvPr/>
-        </p:nvSpPr>
-        <p:spPr>
-          <a:xfrm>
-            <a:off x="11277295" y="6355080"/>
-            <a:ext cx="548640" cy="320040"/>
-          </a:xfrm>
-          <a:prstGeom prst="rect">
-            <a:avLst/>
-          </a:prstGeom>
-          <a:noFill/>
-          <a:ln/>
-        </p:spPr>
-        <p:txBody>
-          <a:bodyPr wrap="square" rtlCol="0" anchor="t"/>
-          <a:lstStyle/>
-          <a:p>
-            <a:pPr algn="r" indent="0" marL="0">
-              <a:buNone/>
-            </a:pPr>
-            <a:r>
-              <a:rPr lang="en-US" sz="1100" b="1" dirty="0">
-                <a:solidFill>
-                  <a:srgbClr val="FBD8DF"/>
-                </a:solidFill>
-                <a:latin typeface="Calibri" pitchFamily="34" charset="0"/>
-                <a:ea typeface="Calibri" pitchFamily="34" charset="-122"/>
-                <a:cs typeface="Calibri" pitchFamily="34" charset="-120"/>
-              </a:rPr>
               <a:t>19</a:t>
             </a:r>
             <a:endParaRPr lang="en-US" sz="1100" dirty="0"/>
@@ -15320,7 +15847,7 @@
       </p:sp>
       <p:sp>
         <p:nvSpPr>
-          <p:cNvPr id="27" name="Text 17"/>
+          <p:cNvPr id="39" name="Text 33"/>
           <p:cNvSpPr/>
           <p:nvPr/>
         </p:nvSpPr>
@@ -15345,7 +15872,7 @@
             <a:r>
               <a:rPr lang="en-US" sz="900" dirty="0">
                 <a:solidFill>
-                  <a:srgbClr val="FBD8DF"/>
+                  <a:srgbClr val="6B6B76"/>
                 </a:solidFill>
                 <a:latin typeface="Calibri" pitchFamily="34" charset="0"/>
                 <a:ea typeface="Calibri" pitchFamily="34" charset="-122"/>
@@ -16086,6 +16613,802 @@
 <file path=ppt/slides/slide20.xml><?xml version="1.0" encoding="utf-8"?>
 <p:sld xmlns:a="http://schemas.openxmlformats.org/drawingml/2006/main" xmlns:r="http://schemas.openxmlformats.org/officeDocument/2006/relationships" xmlns:p="http://schemas.openxmlformats.org/presentationml/2006/main">
   <p:cSld name="Slide 20">
+    <p:bg>
+      <p:bgPr>
+        <a:solidFill>
+          <a:srgbClr val="590D22"/>
+        </a:solidFill>
+      </p:bgPr>
+    </p:bg>
+    <p:spTree>
+      <p:nvGrpSpPr>
+        <p:cNvPr id="1" name=""/>
+        <p:cNvGrpSpPr/>
+        <p:nvPr/>
+      </p:nvGrpSpPr>
+      <p:grpSpPr>
+        <a:xfrm>
+          <a:off x="0" y="0"/>
+          <a:ext cx="0" cy="0"/>
+          <a:chOff x="0" y="0"/>
+          <a:chExt cx="0" cy="0"/>
+        </a:xfrm>
+      </p:grpSpPr>
+      <p:sp>
+        <p:nvSpPr>
+          <p:cNvPr id="2" name="Shape 0"/>
+          <p:cNvSpPr/>
+          <p:nvPr/>
+        </p:nvSpPr>
+        <p:spPr>
+          <a:xfrm>
+            <a:off x="0" y="0"/>
+            <a:ext cx="12191695" cy="6858000"/>
+          </a:xfrm>
+          <a:prstGeom prst="rect">
+            <a:avLst/>
+          </a:prstGeom>
+          <a:solidFill>
+            <a:srgbClr val="3A0A17">
+              <a:alpha val="65000"/>
+            </a:srgbClr>
+          </a:solidFill>
+          <a:ln/>
+        </p:spPr>
+      </p:sp>
+      <p:pic>
+        <p:nvPicPr>
+          <p:cNvPr id="3" name="Image 0" descr="preencoded.png">    </p:cNvPr>
+          <p:cNvPicPr>
+            <a:picLocks noChangeAspect="1"/>
+          </p:cNvPicPr>
+          <p:nvPr/>
+        </p:nvPicPr>
+        <p:blipFill>
+          <a:blip r:embed="rId1">
+            <a:alphaModFix amt="9000"/>
+          </a:blip>
+          <a:stretch>
+            <a:fillRect/>
+          </a:stretch>
+        </p:blipFill>
+        <p:spPr>
+          <a:xfrm>
+            <a:off x="8321040" y="3291840"/>
+            <a:ext cx="4572000" cy="4572000"/>
+          </a:xfrm>
+          <a:prstGeom prst="rect">
+            <a:avLst/>
+          </a:prstGeom>
+        </p:spPr>
+      </p:pic>
+      <p:sp>
+        <p:nvSpPr>
+          <p:cNvPr id="4" name="Shape 1"/>
+          <p:cNvSpPr/>
+          <p:nvPr/>
+        </p:nvSpPr>
+        <p:spPr>
+          <a:xfrm>
+            <a:off x="685800" y="685800"/>
+            <a:ext cx="960120" cy="960120"/>
+          </a:xfrm>
+          <a:prstGeom prst="ellipse">
+            <a:avLst/>
+          </a:prstGeom>
+          <a:solidFill>
+            <a:srgbClr val="A4133C"/>
+          </a:solidFill>
+          <a:ln/>
+        </p:spPr>
+      </p:sp>
+      <p:pic>
+        <p:nvPicPr>
+          <p:cNvPr id="5" name="Image 1" descr="preencoded.png">    </p:cNvPr>
+          <p:cNvPicPr>
+            <a:picLocks noChangeAspect="1"/>
+          </p:cNvPicPr>
+          <p:nvPr/>
+        </p:nvPicPr>
+        <p:blipFill>
+          <a:blip r:embed="rId2"/>
+          <a:stretch>
+            <a:fillRect/>
+          </a:stretch>
+        </p:blipFill>
+        <p:spPr>
+          <a:xfrm>
+            <a:off x="905256" y="905256"/>
+            <a:ext cx="521208" cy="521208"/>
+          </a:xfrm>
+          <a:prstGeom prst="rect">
+            <a:avLst/>
+          </a:prstGeom>
+        </p:spPr>
+      </p:pic>
+      <p:sp>
+        <p:nvSpPr>
+          <p:cNvPr id="6" name="Text 2"/>
+          <p:cNvSpPr/>
+          <p:nvPr/>
+        </p:nvSpPr>
+        <p:spPr>
+          <a:xfrm>
+            <a:off x="1828800" y="868680"/>
+            <a:ext cx="8229600" cy="548640"/>
+          </a:xfrm>
+          <a:prstGeom prst="rect">
+            <a:avLst/>
+          </a:prstGeom>
+          <a:noFill/>
+          <a:ln/>
+        </p:spPr>
+        <p:txBody>
+          <a:bodyPr wrap="square" rtlCol="0" anchor="ctr"/>
+          <a:lstStyle/>
+          <a:p>
+            <a:pPr algn="l" indent="0" marL="0">
+              <a:buNone/>
+            </a:pPr>
+            <a:r>
+              <a:rPr lang="en-US" sz="1700" b="1" spc="300" kern="0" dirty="0">
+                <a:solidFill>
+                  <a:srgbClr val="FF4D6D"/>
+                </a:solidFill>
+                <a:latin typeface="Calibri" pitchFamily="34" charset="0"/>
+                <a:ea typeface="Calibri" pitchFamily="34" charset="-122"/>
+                <a:cs typeface="Calibri" pitchFamily="34" charset="-120"/>
+              </a:rPr>
+              <a:t>SUMMARY</a:t>
+            </a:r>
+            <a:endParaRPr lang="en-US" sz="1700" dirty="0"/>
+          </a:p>
+        </p:txBody>
+      </p:sp>
+      <p:sp>
+        <p:nvSpPr>
+          <p:cNvPr id="7" name="Text 3"/>
+          <p:cNvSpPr/>
+          <p:nvPr/>
+        </p:nvSpPr>
+        <p:spPr>
+          <a:xfrm>
+            <a:off x="640080" y="1691640"/>
+            <a:ext cx="10058400" cy="914400"/>
+          </a:xfrm>
+          <a:prstGeom prst="rect">
+            <a:avLst/>
+          </a:prstGeom>
+          <a:noFill/>
+          <a:ln/>
+        </p:spPr>
+        <p:txBody>
+          <a:bodyPr wrap="square" rtlCol="0" anchor="t"/>
+          <a:lstStyle/>
+          <a:p>
+            <a:pPr algn="l" indent="0" marL="0">
+              <a:buNone/>
+            </a:pPr>
+            <a:r>
+              <a:rPr lang="en-US" sz="4600" b="1" dirty="0">
+                <a:solidFill>
+                  <a:srgbClr val="FFFFFF"/>
+                </a:solidFill>
+                <a:latin typeface="Cambria" pitchFamily="34" charset="0"/>
+                <a:ea typeface="Cambria" pitchFamily="34" charset="-122"/>
+                <a:cs typeface="Cambria" pitchFamily="34" charset="-120"/>
+              </a:rPr>
+              <a:t>Key Points</a:t>
+            </a:r>
+            <a:endParaRPr lang="en-US" sz="4600" dirty="0"/>
+          </a:p>
+        </p:txBody>
+      </p:sp>
+      <p:sp>
+        <p:nvSpPr>
+          <p:cNvPr id="8" name="Shape 4"/>
+          <p:cNvSpPr/>
+          <p:nvPr/>
+        </p:nvSpPr>
+        <p:spPr>
+          <a:xfrm>
+            <a:off x="713232" y="2596896"/>
+            <a:ext cx="292608" cy="292608"/>
+          </a:xfrm>
+          <a:prstGeom prst="ellipse">
+            <a:avLst/>
+          </a:prstGeom>
+          <a:solidFill>
+            <a:srgbClr val="A4133C"/>
+          </a:solidFill>
+          <a:ln/>
+        </p:spPr>
+      </p:sp>
+      <p:pic>
+        <p:nvPicPr>
+          <p:cNvPr id="9" name="Image 2" descr="preencoded.png">    </p:cNvPr>
+          <p:cNvPicPr>
+            <a:picLocks noChangeAspect="1"/>
+          </p:cNvPicPr>
+          <p:nvPr/>
+        </p:nvPicPr>
+        <p:blipFill>
+          <a:blip r:embed="rId3"/>
+          <a:stretch>
+            <a:fillRect/>
+          </a:stretch>
+        </p:blipFill>
+        <p:spPr>
+          <a:xfrm>
+            <a:off x="777240" y="2660904"/>
+            <a:ext cx="164592" cy="164592"/>
+          </a:xfrm>
+          <a:prstGeom prst="rect">
+            <a:avLst/>
+          </a:prstGeom>
+        </p:spPr>
+      </p:pic>
+      <p:sp>
+        <p:nvSpPr>
+          <p:cNvPr id="10" name="Text 5"/>
+          <p:cNvSpPr/>
+          <p:nvPr/>
+        </p:nvSpPr>
+        <p:spPr>
+          <a:xfrm>
+            <a:off x="1188720" y="2578608"/>
+            <a:ext cx="10058400" cy="502920"/>
+          </a:xfrm>
+          <a:prstGeom prst="rect">
+            <a:avLst/>
+          </a:prstGeom>
+          <a:noFill/>
+          <a:ln/>
+        </p:spPr>
+        <p:txBody>
+          <a:bodyPr wrap="square" lIns="0" tIns="0" rIns="0" bIns="0" rtlCol="0" anchor="ctr"/>
+          <a:lstStyle/>
+          <a:p>
+            <a:pPr algn="l" indent="0" marL="0">
+              <a:lnSpc>
+                <a:spcPct val="105000"/>
+              </a:lnSpc>
+              <a:buNone/>
+            </a:pPr>
+            <a:r>
+              <a:rPr lang="en-US" sz="1500" dirty="0">
+                <a:solidFill>
+                  <a:srgbClr val="FBD8DF"/>
+                </a:solidFill>
+                <a:latin typeface="Calibri" pitchFamily="34" charset="0"/>
+                <a:ea typeface="Calibri" pitchFamily="34" charset="-122"/>
+                <a:cs typeface="Calibri" pitchFamily="34" charset="-120"/>
+              </a:rPr>
+              <a:t>AF = irregularly irregular rhythm with absent P waves and a fibrillatory baseline.</a:t>
+            </a:r>
+            <a:endParaRPr lang="en-US" sz="1500" dirty="0"/>
+          </a:p>
+        </p:txBody>
+      </p:sp>
+      <p:sp>
+        <p:nvSpPr>
+          <p:cNvPr id="11" name="Shape 6"/>
+          <p:cNvSpPr/>
+          <p:nvPr/>
+        </p:nvSpPr>
+        <p:spPr>
+          <a:xfrm>
+            <a:off x="713232" y="3145536"/>
+            <a:ext cx="292608" cy="292608"/>
+          </a:xfrm>
+          <a:prstGeom prst="ellipse">
+            <a:avLst/>
+          </a:prstGeom>
+          <a:solidFill>
+            <a:srgbClr val="A4133C"/>
+          </a:solidFill>
+          <a:ln/>
+        </p:spPr>
+      </p:sp>
+      <p:pic>
+        <p:nvPicPr>
+          <p:cNvPr id="12" name="Image 3" descr="preencoded.png">    </p:cNvPr>
+          <p:cNvPicPr>
+            <a:picLocks noChangeAspect="1"/>
+          </p:cNvPicPr>
+          <p:nvPr/>
+        </p:nvPicPr>
+        <p:blipFill>
+          <a:blip r:embed="rId4"/>
+          <a:stretch>
+            <a:fillRect/>
+          </a:stretch>
+        </p:blipFill>
+        <p:spPr>
+          <a:xfrm>
+            <a:off x="777240" y="3209544"/>
+            <a:ext cx="164592" cy="164592"/>
+          </a:xfrm>
+          <a:prstGeom prst="rect">
+            <a:avLst/>
+          </a:prstGeom>
+        </p:spPr>
+      </p:pic>
+      <p:sp>
+        <p:nvSpPr>
+          <p:cNvPr id="13" name="Text 7"/>
+          <p:cNvSpPr/>
+          <p:nvPr/>
+        </p:nvSpPr>
+        <p:spPr>
+          <a:xfrm>
+            <a:off x="1188720" y="3127248"/>
+            <a:ext cx="10058400" cy="502920"/>
+          </a:xfrm>
+          <a:prstGeom prst="rect">
+            <a:avLst/>
+          </a:prstGeom>
+          <a:noFill/>
+          <a:ln/>
+        </p:spPr>
+        <p:txBody>
+          <a:bodyPr wrap="square" lIns="0" tIns="0" rIns="0" bIns="0" rtlCol="0" anchor="ctr"/>
+          <a:lstStyle/>
+          <a:p>
+            <a:pPr algn="l" indent="0" marL="0">
+              <a:lnSpc>
+                <a:spcPct val="105000"/>
+              </a:lnSpc>
+              <a:buNone/>
+            </a:pPr>
+            <a:r>
+              <a:rPr lang="en-US" sz="1500" dirty="0">
+                <a:solidFill>
+                  <a:srgbClr val="FBD8DF"/>
+                </a:solidFill>
+                <a:latin typeface="Calibri" pitchFamily="34" charset="0"/>
+                <a:ea typeface="Calibri" pitchFamily="34" charset="-122"/>
+                <a:cs typeface="Calibri" pitchFamily="34" charset="-120"/>
+              </a:rPr>
+              <a:t>The commonest sustained arrhythmia — linked to hypertension, age and structural heart disease.</a:t>
+            </a:r>
+            <a:endParaRPr lang="en-US" sz="1500" dirty="0"/>
+          </a:p>
+        </p:txBody>
+      </p:sp>
+      <p:sp>
+        <p:nvSpPr>
+          <p:cNvPr id="14" name="Shape 8"/>
+          <p:cNvSpPr/>
+          <p:nvPr/>
+        </p:nvSpPr>
+        <p:spPr>
+          <a:xfrm>
+            <a:off x="713232" y="3694176"/>
+            <a:ext cx="292608" cy="292608"/>
+          </a:xfrm>
+          <a:prstGeom prst="ellipse">
+            <a:avLst/>
+          </a:prstGeom>
+          <a:solidFill>
+            <a:srgbClr val="A4133C"/>
+          </a:solidFill>
+          <a:ln/>
+        </p:spPr>
+      </p:sp>
+      <p:pic>
+        <p:nvPicPr>
+          <p:cNvPr id="15" name="Image 4" descr="preencoded.png">    </p:cNvPr>
+          <p:cNvPicPr>
+            <a:picLocks noChangeAspect="1"/>
+          </p:cNvPicPr>
+          <p:nvPr/>
+        </p:nvPicPr>
+        <p:blipFill>
+          <a:blip r:embed="rId5"/>
+          <a:stretch>
+            <a:fillRect/>
+          </a:stretch>
+        </p:blipFill>
+        <p:spPr>
+          <a:xfrm>
+            <a:off x="777240" y="3758184"/>
+            <a:ext cx="164592" cy="164592"/>
+          </a:xfrm>
+          <a:prstGeom prst="rect">
+            <a:avLst/>
+          </a:prstGeom>
+        </p:spPr>
+      </p:pic>
+      <p:sp>
+        <p:nvSpPr>
+          <p:cNvPr id="16" name="Text 9"/>
+          <p:cNvSpPr/>
+          <p:nvPr/>
+        </p:nvSpPr>
+        <p:spPr>
+          <a:xfrm>
+            <a:off x="1188720" y="3675888"/>
+            <a:ext cx="10058400" cy="502920"/>
+          </a:xfrm>
+          <a:prstGeom prst="rect">
+            <a:avLst/>
+          </a:prstGeom>
+          <a:noFill/>
+          <a:ln/>
+        </p:spPr>
+        <p:txBody>
+          <a:bodyPr wrap="square" lIns="0" tIns="0" rIns="0" bIns="0" rtlCol="0" anchor="ctr"/>
+          <a:lstStyle/>
+          <a:p>
+            <a:pPr algn="l" indent="0" marL="0">
+              <a:lnSpc>
+                <a:spcPct val="105000"/>
+              </a:lnSpc>
+              <a:buNone/>
+            </a:pPr>
+            <a:r>
+              <a:rPr lang="en-US" sz="1500" dirty="0">
+                <a:solidFill>
+                  <a:srgbClr val="FBD8DF"/>
+                </a:solidFill>
+                <a:latin typeface="Calibri" pitchFamily="34" charset="0"/>
+                <a:ea typeface="Calibri" pitchFamily="34" charset="-122"/>
+                <a:cs typeface="Calibri" pitchFamily="34" charset="-120"/>
+              </a:rPr>
+              <a:t>Its main danger is thromboembolic stroke — always assess stroke risk (CHA₂DS₂-VASc).</a:t>
+            </a:r>
+            <a:endParaRPr lang="en-US" sz="1500" dirty="0"/>
+          </a:p>
+        </p:txBody>
+      </p:sp>
+      <p:sp>
+        <p:nvSpPr>
+          <p:cNvPr id="17" name="Shape 10"/>
+          <p:cNvSpPr/>
+          <p:nvPr/>
+        </p:nvSpPr>
+        <p:spPr>
+          <a:xfrm>
+            <a:off x="713232" y="4242816"/>
+            <a:ext cx="292608" cy="292608"/>
+          </a:xfrm>
+          <a:prstGeom prst="ellipse">
+            <a:avLst/>
+          </a:prstGeom>
+          <a:solidFill>
+            <a:srgbClr val="A4133C"/>
+          </a:solidFill>
+          <a:ln/>
+        </p:spPr>
+      </p:sp>
+      <p:pic>
+        <p:nvPicPr>
+          <p:cNvPr id="18" name="Image 5" descr="preencoded.png">    </p:cNvPr>
+          <p:cNvPicPr>
+            <a:picLocks noChangeAspect="1"/>
+          </p:cNvPicPr>
+          <p:nvPr/>
+        </p:nvPicPr>
+        <p:blipFill>
+          <a:blip r:embed="rId6"/>
+          <a:stretch>
+            <a:fillRect/>
+          </a:stretch>
+        </p:blipFill>
+        <p:spPr>
+          <a:xfrm>
+            <a:off x="777240" y="4306824"/>
+            <a:ext cx="164592" cy="164592"/>
+          </a:xfrm>
+          <a:prstGeom prst="rect">
+            <a:avLst/>
+          </a:prstGeom>
+        </p:spPr>
+      </p:pic>
+      <p:sp>
+        <p:nvSpPr>
+          <p:cNvPr id="19" name="Text 11"/>
+          <p:cNvSpPr/>
+          <p:nvPr/>
+        </p:nvSpPr>
+        <p:spPr>
+          <a:xfrm>
+            <a:off x="1188720" y="4224528"/>
+            <a:ext cx="10058400" cy="502920"/>
+          </a:xfrm>
+          <a:prstGeom prst="rect">
+            <a:avLst/>
+          </a:prstGeom>
+          <a:noFill/>
+          <a:ln/>
+        </p:spPr>
+        <p:txBody>
+          <a:bodyPr wrap="square" lIns="0" tIns="0" rIns="0" bIns="0" rtlCol="0" anchor="ctr"/>
+          <a:lstStyle/>
+          <a:p>
+            <a:pPr algn="l" indent="0" marL="0">
+              <a:lnSpc>
+                <a:spcPct val="105000"/>
+              </a:lnSpc>
+              <a:buNone/>
+            </a:pPr>
+            <a:r>
+              <a:rPr lang="en-US" sz="1500" dirty="0">
+                <a:solidFill>
+                  <a:srgbClr val="FBD8DF"/>
+                </a:solidFill>
+                <a:latin typeface="Calibri" pitchFamily="34" charset="0"/>
+                <a:ea typeface="Calibri" pitchFamily="34" charset="-122"/>
+                <a:cs typeface="Calibri" pitchFamily="34" charset="-120"/>
+              </a:rPr>
+              <a:t>Differentials: atrial flutter, multifocal atrial tachycardia, frequent PACs, SVT, pre-excited AF / VT.</a:t>
+            </a:r>
+            <a:endParaRPr lang="en-US" sz="1500" dirty="0"/>
+          </a:p>
+        </p:txBody>
+      </p:sp>
+      <p:sp>
+        <p:nvSpPr>
+          <p:cNvPr id="20" name="Shape 12"/>
+          <p:cNvSpPr/>
+          <p:nvPr/>
+        </p:nvSpPr>
+        <p:spPr>
+          <a:xfrm>
+            <a:off x="713232" y="4791456"/>
+            <a:ext cx="292608" cy="292608"/>
+          </a:xfrm>
+          <a:prstGeom prst="ellipse">
+            <a:avLst/>
+          </a:prstGeom>
+          <a:solidFill>
+            <a:srgbClr val="A4133C"/>
+          </a:solidFill>
+          <a:ln/>
+        </p:spPr>
+      </p:sp>
+      <p:pic>
+        <p:nvPicPr>
+          <p:cNvPr id="21" name="Image 6" descr="preencoded.png">    </p:cNvPr>
+          <p:cNvPicPr>
+            <a:picLocks noChangeAspect="1"/>
+          </p:cNvPicPr>
+          <p:nvPr/>
+        </p:nvPicPr>
+        <p:blipFill>
+          <a:blip r:embed="rId7"/>
+          <a:stretch>
+            <a:fillRect/>
+          </a:stretch>
+        </p:blipFill>
+        <p:spPr>
+          <a:xfrm>
+            <a:off x="777240" y="4855464"/>
+            <a:ext cx="164592" cy="164592"/>
+          </a:xfrm>
+          <a:prstGeom prst="rect">
+            <a:avLst/>
+          </a:prstGeom>
+        </p:spPr>
+      </p:pic>
+      <p:sp>
+        <p:nvSpPr>
+          <p:cNvPr id="22" name="Text 13"/>
+          <p:cNvSpPr/>
+          <p:nvPr/>
+        </p:nvSpPr>
+        <p:spPr>
+          <a:xfrm>
+            <a:off x="1188720" y="4773168"/>
+            <a:ext cx="10058400" cy="502920"/>
+          </a:xfrm>
+          <a:prstGeom prst="rect">
+            <a:avLst/>
+          </a:prstGeom>
+          <a:noFill/>
+          <a:ln/>
+        </p:spPr>
+        <p:txBody>
+          <a:bodyPr wrap="square" lIns="0" tIns="0" rIns="0" bIns="0" rtlCol="0" anchor="ctr"/>
+          <a:lstStyle/>
+          <a:p>
+            <a:pPr algn="l" indent="0" marL="0">
+              <a:lnSpc>
+                <a:spcPct val="105000"/>
+              </a:lnSpc>
+              <a:buNone/>
+            </a:pPr>
+            <a:r>
+              <a:rPr lang="en-US" sz="1500" dirty="0">
+                <a:solidFill>
+                  <a:srgbClr val="FBD8DF"/>
+                </a:solidFill>
+                <a:latin typeface="Calibri" pitchFamily="34" charset="0"/>
+                <a:ea typeface="Calibri" pitchFamily="34" charset="-122"/>
+                <a:cs typeface="Calibri" pitchFamily="34" charset="-120"/>
+              </a:rPr>
+              <a:t>Manage with the ABC pathway: Anticoagulation, Better symptom control, Comorbidities.</a:t>
+            </a:r>
+            <a:endParaRPr lang="en-US" sz="1500" dirty="0"/>
+          </a:p>
+        </p:txBody>
+      </p:sp>
+      <p:sp>
+        <p:nvSpPr>
+          <p:cNvPr id="23" name="Shape 14"/>
+          <p:cNvSpPr/>
+          <p:nvPr/>
+        </p:nvSpPr>
+        <p:spPr>
+          <a:xfrm>
+            <a:off x="713232" y="5340096"/>
+            <a:ext cx="292608" cy="292608"/>
+          </a:xfrm>
+          <a:prstGeom prst="ellipse">
+            <a:avLst/>
+          </a:prstGeom>
+          <a:solidFill>
+            <a:srgbClr val="A4133C"/>
+          </a:solidFill>
+          <a:ln/>
+        </p:spPr>
+      </p:sp>
+      <p:pic>
+        <p:nvPicPr>
+          <p:cNvPr id="24" name="Image 7" descr="preencoded.png">    </p:cNvPr>
+          <p:cNvPicPr>
+            <a:picLocks noChangeAspect="1"/>
+          </p:cNvPicPr>
+          <p:nvPr/>
+        </p:nvPicPr>
+        <p:blipFill>
+          <a:blip r:embed="rId8"/>
+          <a:stretch>
+            <a:fillRect/>
+          </a:stretch>
+        </p:blipFill>
+        <p:spPr>
+          <a:xfrm>
+            <a:off x="777240" y="5404104"/>
+            <a:ext cx="164592" cy="164592"/>
+          </a:xfrm>
+          <a:prstGeom prst="rect">
+            <a:avLst/>
+          </a:prstGeom>
+        </p:spPr>
+      </p:pic>
+      <p:sp>
+        <p:nvSpPr>
+          <p:cNvPr id="25" name="Text 15"/>
+          <p:cNvSpPr/>
+          <p:nvPr/>
+        </p:nvSpPr>
+        <p:spPr>
+          <a:xfrm>
+            <a:off x="1188720" y="5321808"/>
+            <a:ext cx="10058400" cy="502920"/>
+          </a:xfrm>
+          <a:prstGeom prst="rect">
+            <a:avLst/>
+          </a:prstGeom>
+          <a:noFill/>
+          <a:ln/>
+        </p:spPr>
+        <p:txBody>
+          <a:bodyPr wrap="square" lIns="0" tIns="0" rIns="0" bIns="0" rtlCol="0" anchor="ctr"/>
+          <a:lstStyle/>
+          <a:p>
+            <a:pPr algn="l" indent="0" marL="0">
+              <a:lnSpc>
+                <a:spcPct val="105000"/>
+              </a:lnSpc>
+              <a:buNone/>
+            </a:pPr>
+            <a:r>
+              <a:rPr lang="en-US" sz="1500" dirty="0">
+                <a:solidFill>
+                  <a:srgbClr val="FBD8DF"/>
+                </a:solidFill>
+                <a:latin typeface="Calibri" pitchFamily="34" charset="0"/>
+                <a:ea typeface="Calibri" pitchFamily="34" charset="-122"/>
+                <a:cs typeface="Calibri" pitchFamily="34" charset="-120"/>
+              </a:rPr>
+              <a:t>In pregnancy: LMWH is the anticoagulant of choice — avoid warfarin and DOACs.</a:t>
+            </a:r>
+            <a:endParaRPr lang="en-US" sz="1500" dirty="0"/>
+          </a:p>
+        </p:txBody>
+      </p:sp>
+      <p:sp>
+        <p:nvSpPr>
+          <p:cNvPr id="26" name="Text 16"/>
+          <p:cNvSpPr/>
+          <p:nvPr/>
+        </p:nvSpPr>
+        <p:spPr>
+          <a:xfrm>
+            <a:off x="11277295" y="6355080"/>
+            <a:ext cx="548640" cy="320040"/>
+          </a:xfrm>
+          <a:prstGeom prst="rect">
+            <a:avLst/>
+          </a:prstGeom>
+          <a:noFill/>
+          <a:ln/>
+        </p:spPr>
+        <p:txBody>
+          <a:bodyPr wrap="square" rtlCol="0" anchor="t"/>
+          <a:lstStyle/>
+          <a:p>
+            <a:pPr algn="r" indent="0" marL="0">
+              <a:buNone/>
+            </a:pPr>
+            <a:r>
+              <a:rPr lang="en-US" sz="1100" b="1" dirty="0">
+                <a:solidFill>
+                  <a:srgbClr val="FBD8DF"/>
+                </a:solidFill>
+                <a:latin typeface="Calibri" pitchFamily="34" charset="0"/>
+                <a:ea typeface="Calibri" pitchFamily="34" charset="-122"/>
+                <a:cs typeface="Calibri" pitchFamily="34" charset="-120"/>
+              </a:rPr>
+              <a:t>20</a:t>
+            </a:r>
+            <a:endParaRPr lang="en-US" sz="1100" dirty="0"/>
+          </a:p>
+        </p:txBody>
+      </p:sp>
+      <p:sp>
+        <p:nvSpPr>
+          <p:cNvPr id="27" name="Text 17"/>
+          <p:cNvSpPr/>
+          <p:nvPr/>
+        </p:nvSpPr>
+        <p:spPr>
+          <a:xfrm>
+            <a:off x="502920" y="6355080"/>
+            <a:ext cx="7315200" cy="320040"/>
+          </a:xfrm>
+          <a:prstGeom prst="rect">
+            <a:avLst/>
+          </a:prstGeom>
+          <a:noFill/>
+          <a:ln/>
+        </p:spPr>
+        <p:txBody>
+          <a:bodyPr wrap="square" rtlCol="0" anchor="t"/>
+          <a:lstStyle/>
+          <a:p>
+            <a:pPr algn="l" indent="0" marL="0">
+              <a:buNone/>
+            </a:pPr>
+            <a:r>
+              <a:rPr lang="en-US" sz="900" dirty="0">
+                <a:solidFill>
+                  <a:srgbClr val="FBD8DF"/>
+                </a:solidFill>
+                <a:latin typeface="Calibri" pitchFamily="34" charset="0"/>
+                <a:ea typeface="Calibri" pitchFamily="34" charset="-122"/>
+                <a:cs typeface="Calibri" pitchFamily="34" charset="-120"/>
+              </a:rPr>
+              <a:t>Atrial Fibrillation — Clinical Topic Review</a:t>
+            </a:r>
+            <a:endParaRPr lang="en-US" sz="900" dirty="0"/>
+          </a:p>
+        </p:txBody>
+      </p:sp>
+    </p:spTree>
+  </p:cSld>
+  <p:clrMapOvr>
+    <a:masterClrMapping/>
+  </p:clrMapOvr>
+</p:sld>
+</file>
+
+<file path=ppt/slides/slide21.xml><?xml version="1.0" encoding="utf-8"?>
+<p:sld xmlns:a="http://schemas.openxmlformats.org/drawingml/2006/main" xmlns:r="http://schemas.openxmlformats.org/officeDocument/2006/relationships" xmlns:p="http://schemas.openxmlformats.org/presentationml/2006/main">
+  <p:cSld name="Slide 21">
     <p:bg>
       <p:bgPr>
         <a:solidFill>

--- a/presentations/Atrial-Fibrillation-Topic-Review.pptx
+++ b/presentations/Atrial-Fibrillation-Topic-Review.pptx
@@ -19919,7 +19919,7 @@
         </p:nvSpPr>
         <p:spPr>
           <a:xfrm>
-            <a:off x="868680" y="2103120"/>
+            <a:off x="868680" y="2084832"/>
             <a:ext cx="4800600" cy="320040"/>
           </a:xfrm>
           <a:prstGeom prst="rect">
@@ -19958,12 +19958,12 @@
         </p:nvSpPr>
         <p:spPr>
           <a:xfrm>
-            <a:off x="868680" y="2606040"/>
-            <a:ext cx="2263140" cy="868680"/>
+            <a:off x="868680" y="2542032"/>
+            <a:ext cx="2263140" cy="713232"/>
           </a:xfrm>
           <a:prstGeom prst="roundRect">
             <a:avLst>
-              <a:gd name="adj" fmla="val 9474"/>
+              <a:gd name="adj" fmla="val 11538"/>
             </a:avLst>
           </a:prstGeom>
           <a:solidFill>
@@ -19985,8 +19985,8 @@
         </p:nvSpPr>
         <p:spPr>
           <a:xfrm>
-            <a:off x="1014984" y="2788920"/>
-            <a:ext cx="502920" cy="502920"/>
+            <a:off x="1005840" y="2688336"/>
+            <a:ext cx="438912" cy="438912"/>
           </a:xfrm>
           <a:prstGeom prst="ellipse">
             <a:avLst/>
@@ -20013,8 +20013,8 @@
         </p:blipFill>
         <p:spPr>
           <a:xfrm>
-            <a:off x="1133856" y="2907792"/>
-            <a:ext cx="265176" cy="265176"/>
+            <a:off x="1115568" y="2793492"/>
+            <a:ext cx="228600" cy="228600"/>
           </a:xfrm>
           <a:prstGeom prst="rect">
             <a:avLst/>
@@ -20029,8 +20029,8 @@
         </p:nvSpPr>
         <p:spPr>
           <a:xfrm>
-            <a:off x="1618488" y="2606040"/>
-            <a:ext cx="1421892" cy="868680"/>
+            <a:off x="1545336" y="2542032"/>
+            <a:ext cx="1495044" cy="713232"/>
           </a:xfrm>
           <a:prstGeom prst="rect">
             <a:avLst/>
@@ -20044,12 +20044,12 @@
           <a:p>
             <a:pPr algn="l" indent="0" marL="0">
               <a:lnSpc>
-                <a:spcPct val="102000"/>
+                <a:spcPct val="100000"/>
               </a:lnSpc>
               <a:buNone/>
             </a:pPr>
             <a:r>
-              <a:rPr lang="en-US" sz="1300" b="1" dirty="0">
+              <a:rPr lang="en-US" sz="1250" b="1" dirty="0">
                 <a:solidFill>
                   <a:srgbClr val="2B2B33"/>
                 </a:solidFill>
@@ -20059,7 +20059,7 @@
               </a:rPr>
               <a:t>Hypertension</a:t>
             </a:r>
-            <a:endParaRPr lang="en-US" sz="1300" dirty="0"/>
+            <a:endParaRPr lang="en-US" sz="1250" dirty="0"/>
           </a:p>
         </p:txBody>
       </p:sp>
@@ -20071,12 +20071,12 @@
         </p:nvSpPr>
         <p:spPr>
           <a:xfrm>
-            <a:off x="3406140" y="2606040"/>
-            <a:ext cx="2263140" cy="868680"/>
+            <a:off x="3406140" y="2542032"/>
+            <a:ext cx="2263140" cy="713232"/>
           </a:xfrm>
           <a:prstGeom prst="roundRect">
             <a:avLst>
-              <a:gd name="adj" fmla="val 9474"/>
+              <a:gd name="adj" fmla="val 11538"/>
             </a:avLst>
           </a:prstGeom>
           <a:solidFill>
@@ -20098,8 +20098,8 @@
         </p:nvSpPr>
         <p:spPr>
           <a:xfrm>
-            <a:off x="3552444" y="2788920"/>
-            <a:ext cx="502920" cy="502920"/>
+            <a:off x="3543300" y="2688336"/>
+            <a:ext cx="438912" cy="438912"/>
           </a:xfrm>
           <a:prstGeom prst="ellipse">
             <a:avLst/>
@@ -20126,8 +20126,8 @@
         </p:blipFill>
         <p:spPr>
           <a:xfrm>
-            <a:off x="3671316" y="2907792"/>
-            <a:ext cx="265176" cy="265176"/>
+            <a:off x="3653028" y="2793492"/>
+            <a:ext cx="228600" cy="228600"/>
           </a:xfrm>
           <a:prstGeom prst="rect">
             <a:avLst/>
@@ -20142,8 +20142,8 @@
         </p:nvSpPr>
         <p:spPr>
           <a:xfrm>
-            <a:off x="4155948" y="2606040"/>
-            <a:ext cx="1421892" cy="868680"/>
+            <a:off x="4082796" y="2542032"/>
+            <a:ext cx="1495044" cy="713232"/>
           </a:xfrm>
           <a:prstGeom prst="rect">
             <a:avLst/>
@@ -20157,12 +20157,12 @@
           <a:p>
             <a:pPr algn="l" indent="0" marL="0">
               <a:lnSpc>
-                <a:spcPct val="102000"/>
+                <a:spcPct val="100000"/>
               </a:lnSpc>
               <a:buNone/>
             </a:pPr>
             <a:r>
-              <a:rPr lang="en-US" sz="1300" b="1" dirty="0">
+              <a:rPr lang="en-US" sz="1250" b="1" dirty="0">
                 <a:solidFill>
                   <a:srgbClr val="2B2B33"/>
                 </a:solidFill>
@@ -20172,7 +20172,7 @@
               </a:rPr>
               <a:t>Ischaemic heart disease</a:t>
             </a:r>
-            <a:endParaRPr lang="en-US" sz="1300" dirty="0"/>
+            <a:endParaRPr lang="en-US" sz="1250" dirty="0"/>
           </a:p>
         </p:txBody>
       </p:sp>
@@ -20184,12 +20184,12 @@
         </p:nvSpPr>
         <p:spPr>
           <a:xfrm>
-            <a:off x="868680" y="3630168"/>
-            <a:ext cx="2263140" cy="868680"/>
+            <a:off x="868680" y="3364992"/>
+            <a:ext cx="2263140" cy="713232"/>
           </a:xfrm>
           <a:prstGeom prst="roundRect">
             <a:avLst>
-              <a:gd name="adj" fmla="val 9474"/>
+              <a:gd name="adj" fmla="val 11538"/>
             </a:avLst>
           </a:prstGeom>
           <a:solidFill>
@@ -20211,8 +20211,8 @@
         </p:nvSpPr>
         <p:spPr>
           <a:xfrm>
-            <a:off x="1014984" y="3813048"/>
-            <a:ext cx="502920" cy="502920"/>
+            <a:off x="1005840" y="3511296"/>
+            <a:ext cx="438912" cy="438912"/>
           </a:xfrm>
           <a:prstGeom prst="ellipse">
             <a:avLst/>
@@ -20239,8 +20239,8 @@
         </p:blipFill>
         <p:spPr>
           <a:xfrm>
-            <a:off x="1133856" y="3931920"/>
-            <a:ext cx="265176" cy="265176"/>
+            <a:off x="1115568" y="3616452"/>
+            <a:ext cx="228600" cy="228600"/>
           </a:xfrm>
           <a:prstGeom prst="rect">
             <a:avLst/>
@@ -20255,8 +20255,8 @@
         </p:nvSpPr>
         <p:spPr>
           <a:xfrm>
-            <a:off x="1618488" y="3630168"/>
-            <a:ext cx="1421892" cy="868680"/>
+            <a:off x="1545336" y="3364992"/>
+            <a:ext cx="1495044" cy="713232"/>
           </a:xfrm>
           <a:prstGeom prst="rect">
             <a:avLst/>
@@ -20270,12 +20270,12 @@
           <a:p>
             <a:pPr algn="l" indent="0" marL="0">
               <a:lnSpc>
-                <a:spcPct val="102000"/>
+                <a:spcPct val="100000"/>
               </a:lnSpc>
               <a:buNone/>
             </a:pPr>
             <a:r>
-              <a:rPr lang="en-US" sz="1300" b="1" dirty="0">
+              <a:rPr lang="en-US" sz="1250" b="1" dirty="0">
                 <a:solidFill>
                   <a:srgbClr val="2B2B33"/>
                 </a:solidFill>
@@ -20285,7 +20285,7 @@
               </a:rPr>
               <a:t>Valvular disease (mitral stenosis)</a:t>
             </a:r>
-            <a:endParaRPr lang="en-US" sz="1300" dirty="0"/>
+            <a:endParaRPr lang="en-US" sz="1250" dirty="0"/>
           </a:p>
         </p:txBody>
       </p:sp>
@@ -20297,12 +20297,12 @@
         </p:nvSpPr>
         <p:spPr>
           <a:xfrm>
-            <a:off x="3406140" y="3630168"/>
-            <a:ext cx="2263140" cy="868680"/>
+            <a:off x="3406140" y="3364992"/>
+            <a:ext cx="2263140" cy="713232"/>
           </a:xfrm>
           <a:prstGeom prst="roundRect">
             <a:avLst>
-              <a:gd name="adj" fmla="val 9474"/>
+              <a:gd name="adj" fmla="val 11538"/>
             </a:avLst>
           </a:prstGeom>
           <a:solidFill>
@@ -20324,8 +20324,8 @@
         </p:nvSpPr>
         <p:spPr>
           <a:xfrm>
-            <a:off x="3552444" y="3813048"/>
-            <a:ext cx="502920" cy="502920"/>
+            <a:off x="3543300" y="3511296"/>
+            <a:ext cx="438912" cy="438912"/>
           </a:xfrm>
           <a:prstGeom prst="ellipse">
             <a:avLst/>
@@ -20352,8 +20352,8 @@
         </p:blipFill>
         <p:spPr>
           <a:xfrm>
-            <a:off x="3671316" y="3931920"/>
-            <a:ext cx="265176" cy="265176"/>
+            <a:off x="3653028" y="3616452"/>
+            <a:ext cx="228600" cy="228600"/>
           </a:xfrm>
           <a:prstGeom prst="rect">
             <a:avLst/>
@@ -20368,8 +20368,8 @@
         </p:nvSpPr>
         <p:spPr>
           <a:xfrm>
-            <a:off x="4155948" y="3630168"/>
-            <a:ext cx="1421892" cy="868680"/>
+            <a:off x="4082796" y="3364992"/>
+            <a:ext cx="1495044" cy="713232"/>
           </a:xfrm>
           <a:prstGeom prst="rect">
             <a:avLst/>
@@ -20383,12 +20383,12 @@
           <a:p>
             <a:pPr algn="l" indent="0" marL="0">
               <a:lnSpc>
-                <a:spcPct val="102000"/>
+                <a:spcPct val="100000"/>
               </a:lnSpc>
               <a:buNone/>
             </a:pPr>
             <a:r>
-              <a:rPr lang="en-US" sz="1300" b="1" dirty="0">
+              <a:rPr lang="en-US" sz="1250" b="1" dirty="0">
                 <a:solidFill>
                   <a:srgbClr val="2B2B33"/>
                 </a:solidFill>
@@ -20398,7 +20398,7 @@
               </a:rPr>
               <a:t>Heart failure</a:t>
             </a:r>
-            <a:endParaRPr lang="en-US" sz="1300" dirty="0"/>
+            <a:endParaRPr lang="en-US" sz="1250" dirty="0"/>
           </a:p>
         </p:txBody>
       </p:sp>
@@ -20410,12 +20410,12 @@
         </p:nvSpPr>
         <p:spPr>
           <a:xfrm>
-            <a:off x="868680" y="4654296"/>
-            <a:ext cx="2263140" cy="868680"/>
+            <a:off x="868680" y="4187952"/>
+            <a:ext cx="2263140" cy="713232"/>
           </a:xfrm>
           <a:prstGeom prst="roundRect">
             <a:avLst>
-              <a:gd name="adj" fmla="val 9474"/>
+              <a:gd name="adj" fmla="val 11538"/>
             </a:avLst>
           </a:prstGeom>
           <a:solidFill>
@@ -20437,8 +20437,8 @@
         </p:nvSpPr>
         <p:spPr>
           <a:xfrm>
-            <a:off x="1014984" y="4837176"/>
-            <a:ext cx="502920" cy="502920"/>
+            <a:off x="1005840" y="4334256"/>
+            <a:ext cx="438912" cy="438912"/>
           </a:xfrm>
           <a:prstGeom prst="ellipse">
             <a:avLst/>
@@ -20465,8 +20465,8 @@
         </p:blipFill>
         <p:spPr>
           <a:xfrm>
-            <a:off x="1133856" y="4956048"/>
-            <a:ext cx="265176" cy="265176"/>
+            <a:off x="1115568" y="4439412"/>
+            <a:ext cx="228600" cy="228600"/>
           </a:xfrm>
           <a:prstGeom prst="rect">
             <a:avLst/>
@@ -20481,8 +20481,8 @@
         </p:nvSpPr>
         <p:spPr>
           <a:xfrm>
-            <a:off x="1618488" y="4654296"/>
-            <a:ext cx="1421892" cy="868680"/>
+            <a:off x="1545336" y="4187952"/>
+            <a:ext cx="1495044" cy="713232"/>
           </a:xfrm>
           <a:prstGeom prst="rect">
             <a:avLst/>
@@ -20496,12 +20496,12 @@
           <a:p>
             <a:pPr algn="l" indent="0" marL="0">
               <a:lnSpc>
-                <a:spcPct val="102000"/>
+                <a:spcPct val="100000"/>
               </a:lnSpc>
               <a:buNone/>
             </a:pPr>
             <a:r>
-              <a:rPr lang="en-US" sz="1300" b="1" dirty="0">
+              <a:rPr lang="en-US" sz="1250" b="1" dirty="0">
                 <a:solidFill>
                   <a:srgbClr val="2B2B33"/>
                 </a:solidFill>
@@ -20511,7 +20511,7 @@
               </a:rPr>
               <a:t>Cardiomyopathy</a:t>
             </a:r>
-            <a:endParaRPr lang="en-US" sz="1300" dirty="0"/>
+            <a:endParaRPr lang="en-US" sz="1250" dirty="0"/>
           </a:p>
         </p:txBody>
       </p:sp>
@@ -20523,12 +20523,12 @@
         </p:nvSpPr>
         <p:spPr>
           <a:xfrm>
-            <a:off x="3406140" y="4654296"/>
-            <a:ext cx="2263140" cy="868680"/>
+            <a:off x="3406140" y="4187952"/>
+            <a:ext cx="2263140" cy="713232"/>
           </a:xfrm>
           <a:prstGeom prst="roundRect">
             <a:avLst>
-              <a:gd name="adj" fmla="val 9474"/>
+              <a:gd name="adj" fmla="val 11538"/>
             </a:avLst>
           </a:prstGeom>
           <a:solidFill>
@@ -20550,8 +20550,8 @@
         </p:nvSpPr>
         <p:spPr>
           <a:xfrm>
-            <a:off x="3552444" y="4837176"/>
-            <a:ext cx="502920" cy="502920"/>
+            <a:off x="3543300" y="4334256"/>
+            <a:ext cx="438912" cy="438912"/>
           </a:xfrm>
           <a:prstGeom prst="ellipse">
             <a:avLst/>
@@ -20578,8 +20578,8 @@
         </p:blipFill>
         <p:spPr>
           <a:xfrm>
-            <a:off x="3671316" y="4956048"/>
-            <a:ext cx="265176" cy="265176"/>
+            <a:off x="3653028" y="4439412"/>
+            <a:ext cx="228600" cy="228600"/>
           </a:xfrm>
           <a:prstGeom prst="rect">
             <a:avLst/>
@@ -20594,8 +20594,8 @@
         </p:nvSpPr>
         <p:spPr>
           <a:xfrm>
-            <a:off x="4155948" y="4654296"/>
-            <a:ext cx="1421892" cy="868680"/>
+            <a:off x="4082796" y="4187952"/>
+            <a:ext cx="1495044" cy="713232"/>
           </a:xfrm>
           <a:prstGeom prst="rect">
             <a:avLst/>
@@ -20609,12 +20609,12 @@
           <a:p>
             <a:pPr algn="l" indent="0" marL="0">
               <a:lnSpc>
-                <a:spcPct val="102000"/>
+                <a:spcPct val="100000"/>
               </a:lnSpc>
               <a:buNone/>
             </a:pPr>
             <a:r>
-              <a:rPr lang="en-US" sz="1300" b="1" dirty="0">
+              <a:rPr lang="en-US" sz="1250" b="1" dirty="0">
                 <a:solidFill>
                   <a:srgbClr val="2B2B33"/>
                 </a:solidFill>
@@ -20622,15 +20622,128 @@
                 <a:ea typeface="Calibri" pitchFamily="34" charset="-122"/>
                 <a:cs typeface="Calibri" pitchFamily="34" charset="-120"/>
               </a:rPr>
+              <a:t>Pericarditis</a:t>
+            </a:r>
+            <a:endParaRPr lang="en-US" sz="1250" dirty="0"/>
+          </a:p>
+        </p:txBody>
+      </p:sp>
+      <p:sp>
+        <p:nvSpPr>
+          <p:cNvPr id="32" name="Shape 23"/>
+          <p:cNvSpPr/>
+          <p:nvPr/>
+        </p:nvSpPr>
+        <p:spPr>
+          <a:xfrm>
+            <a:off x="868680" y="5010912"/>
+            <a:ext cx="2263140" cy="713232"/>
+          </a:xfrm>
+          <a:prstGeom prst="roundRect">
+            <a:avLst>
+              <a:gd name="adj" fmla="val 11538"/>
+            </a:avLst>
+          </a:prstGeom>
+          <a:solidFill>
+            <a:srgbClr val="FFFFFF"/>
+          </a:solidFill>
+          <a:ln w="12700">
+            <a:solidFill>
+              <a:srgbClr val="FBD8DF"/>
+            </a:solidFill>
+            <a:prstDash val="solid"/>
+          </a:ln>
+        </p:spPr>
+      </p:sp>
+      <p:sp>
+        <p:nvSpPr>
+          <p:cNvPr id="33" name="Shape 24"/>
+          <p:cNvSpPr/>
+          <p:nvPr/>
+        </p:nvSpPr>
+        <p:spPr>
+          <a:xfrm>
+            <a:off x="1005840" y="5157216"/>
+            <a:ext cx="438912" cy="438912"/>
+          </a:xfrm>
+          <a:prstGeom prst="ellipse">
+            <a:avLst/>
+          </a:prstGeom>
+          <a:solidFill>
+            <a:srgbClr val="FFF0F3"/>
+          </a:solidFill>
+          <a:ln/>
+        </p:spPr>
+      </p:sp>
+      <p:pic>
+        <p:nvPicPr>
+          <p:cNvPr id="34" name="Image 7" descr="preencoded.png">    </p:cNvPr>
+          <p:cNvPicPr>
+            <a:picLocks noChangeAspect="1"/>
+          </p:cNvPicPr>
+          <p:nvPr/>
+        </p:nvPicPr>
+        <p:blipFill>
+          <a:blip r:embed="rId8"/>
+          <a:stretch>
+            <a:fillRect/>
+          </a:stretch>
+        </p:blipFill>
+        <p:spPr>
+          <a:xfrm>
+            <a:off x="1115568" y="5262372"/>
+            <a:ext cx="228600" cy="228600"/>
+          </a:xfrm>
+          <a:prstGeom prst="rect">
+            <a:avLst/>
+          </a:prstGeom>
+        </p:spPr>
+      </p:pic>
+      <p:sp>
+        <p:nvSpPr>
+          <p:cNvPr id="35" name="Text 25"/>
+          <p:cNvSpPr/>
+          <p:nvPr/>
+        </p:nvSpPr>
+        <p:spPr>
+          <a:xfrm>
+            <a:off x="1545336" y="5010912"/>
+            <a:ext cx="1495044" cy="713232"/>
+          </a:xfrm>
+          <a:prstGeom prst="rect">
+            <a:avLst/>
+          </a:prstGeom>
+          <a:noFill/>
+          <a:ln/>
+        </p:spPr>
+        <p:txBody>
+          <a:bodyPr wrap="square" lIns="0" tIns="0" rIns="0" bIns="0" rtlCol="0" anchor="ctr"/>
+          <a:lstStyle/>
+          <a:p>
+            <a:pPr algn="l" indent="0" marL="0">
+              <a:lnSpc>
+                <a:spcPct val="100000"/>
+              </a:lnSpc>
+              <a:buNone/>
+            </a:pPr>
+            <a:r>
+              <a:rPr lang="en-US" sz="1250" b="1" dirty="0">
+                <a:solidFill>
+                  <a:srgbClr val="2B2B33"/>
+                </a:solidFill>
+                <a:latin typeface="Calibri" pitchFamily="34" charset="0"/>
+                <a:ea typeface="Calibri" pitchFamily="34" charset="-122"/>
+                <a:cs typeface="Calibri" pitchFamily="34" charset="-120"/>
+              </a:rPr>
               <a:t>Post-cardiac surgery</a:t>
             </a:r>
-            <a:endParaRPr lang="en-US" sz="1300" dirty="0"/>
-          </a:p>
-        </p:txBody>
-      </p:sp>
-      <p:sp>
-        <p:nvSpPr>
-          <p:cNvPr id="32" name="Shape 23"/>
+            <a:endParaRPr lang="en-US" sz="1250" dirty="0"/>
+          </a:p>
+        </p:txBody>
+      </p:sp>
+      <p:sp>
+        <p:nvSpPr>
+          <p:cNvPr id="36" name="Shape 26"/>
           <p:cNvSpPr/>
           <p:nvPr/>
         </p:nvSpPr>
@@ -20664,13 +20777,13 @@
       </p:sp>
       <p:sp>
         <p:nvSpPr>
-          <p:cNvPr id="33" name="Text 24"/>
-          <p:cNvSpPr/>
-          <p:nvPr/>
-        </p:nvSpPr>
-        <p:spPr>
-          <a:xfrm>
-            <a:off x="6519672" y="2103120"/>
+          <p:cNvPr id="37" name="Text 27"/>
+          <p:cNvSpPr/>
+          <p:nvPr/>
+        </p:nvSpPr>
+        <p:spPr>
+          <a:xfrm>
+            <a:off x="6519672" y="2084832"/>
             <a:ext cx="4800600" cy="320040"/>
           </a:xfrm>
           <a:prstGeom prst="rect">
@@ -20703,18 +20816,18 @@
       </p:sp>
       <p:sp>
         <p:nvSpPr>
-          <p:cNvPr id="34" name="Shape 25"/>
-          <p:cNvSpPr/>
-          <p:nvPr/>
-        </p:nvSpPr>
-        <p:spPr>
-          <a:xfrm>
-            <a:off x="6519672" y="2606040"/>
-            <a:ext cx="2263140" cy="868680"/>
+          <p:cNvPr id="38" name="Shape 28"/>
+          <p:cNvSpPr/>
+          <p:nvPr/>
+        </p:nvSpPr>
+        <p:spPr>
+          <a:xfrm>
+            <a:off x="6519672" y="2542032"/>
+            <a:ext cx="2263140" cy="713232"/>
           </a:xfrm>
           <a:prstGeom prst="roundRect">
             <a:avLst>
-              <a:gd name="adj" fmla="val 9474"/>
+              <a:gd name="adj" fmla="val 11538"/>
             </a:avLst>
           </a:prstGeom>
           <a:solidFill>
@@ -20730,14 +20843,14 @@
       </p:sp>
       <p:sp>
         <p:nvSpPr>
-          <p:cNvPr id="35" name="Shape 26"/>
-          <p:cNvSpPr/>
-          <p:nvPr/>
-        </p:nvSpPr>
-        <p:spPr>
-          <a:xfrm>
-            <a:off x="6665976" y="2788920"/>
-            <a:ext cx="502920" cy="502920"/>
+          <p:cNvPr id="39" name="Shape 29"/>
+          <p:cNvSpPr/>
+          <p:nvPr/>
+        </p:nvSpPr>
+        <p:spPr>
+          <a:xfrm>
+            <a:off x="6656832" y="2688336"/>
+            <a:ext cx="438912" cy="438912"/>
           </a:xfrm>
           <a:prstGeom prst="ellipse">
             <a:avLst/>
@@ -20750,22 +20863,22 @@
       </p:sp>
       <p:pic>
         <p:nvPicPr>
-          <p:cNvPr id="36" name="Image 7" descr="preencoded.png">    </p:cNvPr>
+          <p:cNvPr id="40" name="Image 8" descr="preencoded.png">    </p:cNvPr>
           <p:cNvPicPr>
             <a:picLocks noChangeAspect="1"/>
           </p:cNvPicPr>
           <p:nvPr/>
         </p:nvPicPr>
         <p:blipFill>
-          <a:blip r:embed="rId8"/>
+          <a:blip r:embed="rId9"/>
           <a:stretch>
             <a:fillRect/>
           </a:stretch>
         </p:blipFill>
         <p:spPr>
           <a:xfrm>
-            <a:off x="6784848" y="2907792"/>
-            <a:ext cx="265176" cy="265176"/>
+            <a:off x="6766560" y="2793492"/>
+            <a:ext cx="228600" cy="228600"/>
           </a:xfrm>
           <a:prstGeom prst="rect">
             <a:avLst/>
@@ -20774,14 +20887,14 @@
       </p:pic>
       <p:sp>
         <p:nvSpPr>
-          <p:cNvPr id="37" name="Text 27"/>
-          <p:cNvSpPr/>
-          <p:nvPr/>
-        </p:nvSpPr>
-        <p:spPr>
-          <a:xfrm>
-            <a:off x="7269480" y="2606040"/>
-            <a:ext cx="1421892" cy="868680"/>
+          <p:cNvPr id="41" name="Text 30"/>
+          <p:cNvSpPr/>
+          <p:nvPr/>
+        </p:nvSpPr>
+        <p:spPr>
+          <a:xfrm>
+            <a:off x="7196328" y="2542032"/>
+            <a:ext cx="1495044" cy="713232"/>
           </a:xfrm>
           <a:prstGeom prst="rect">
             <a:avLst/>
@@ -20795,12 +20908,12 @@
           <a:p>
             <a:pPr algn="l" indent="0" marL="0">
               <a:lnSpc>
-                <a:spcPct val="102000"/>
+                <a:spcPct val="100000"/>
               </a:lnSpc>
               <a:buNone/>
             </a:pPr>
             <a:r>
-              <a:rPr lang="en-US" sz="1300" b="1" dirty="0">
+              <a:rPr lang="en-US" sz="1250" b="1" dirty="0">
                 <a:solidFill>
                   <a:srgbClr val="2B2B33"/>
                 </a:solidFill>
@@ -20810,24 +20923,24 @@
               </a:rPr>
               <a:t>Hyperthyroidism</a:t>
             </a:r>
-            <a:endParaRPr lang="en-US" sz="1300" dirty="0"/>
-          </a:p>
-        </p:txBody>
-      </p:sp>
-      <p:sp>
-        <p:nvSpPr>
-          <p:cNvPr id="38" name="Shape 28"/>
-          <p:cNvSpPr/>
-          <p:nvPr/>
-        </p:nvSpPr>
-        <p:spPr>
-          <a:xfrm>
-            <a:off x="9057132" y="2606040"/>
-            <a:ext cx="2263140" cy="868680"/>
+            <a:endParaRPr lang="en-US" sz="1250" dirty="0"/>
+          </a:p>
+        </p:txBody>
+      </p:sp>
+      <p:sp>
+        <p:nvSpPr>
+          <p:cNvPr id="42" name="Shape 31"/>
+          <p:cNvSpPr/>
+          <p:nvPr/>
+        </p:nvSpPr>
+        <p:spPr>
+          <a:xfrm>
+            <a:off x="9057132" y="2542032"/>
+            <a:ext cx="2263140" cy="713232"/>
           </a:xfrm>
           <a:prstGeom prst="roundRect">
             <a:avLst>
-              <a:gd name="adj" fmla="val 9474"/>
+              <a:gd name="adj" fmla="val 11538"/>
             </a:avLst>
           </a:prstGeom>
           <a:solidFill>
@@ -20843,14 +20956,14 @@
       </p:sp>
       <p:sp>
         <p:nvSpPr>
-          <p:cNvPr id="39" name="Shape 29"/>
-          <p:cNvSpPr/>
-          <p:nvPr/>
-        </p:nvSpPr>
-        <p:spPr>
-          <a:xfrm>
-            <a:off x="9203436" y="2788920"/>
-            <a:ext cx="502920" cy="502920"/>
+          <p:cNvPr id="43" name="Shape 32"/>
+          <p:cNvSpPr/>
+          <p:nvPr/>
+        </p:nvSpPr>
+        <p:spPr>
+          <a:xfrm>
+            <a:off x="9194292" y="2688336"/>
+            <a:ext cx="438912" cy="438912"/>
           </a:xfrm>
           <a:prstGeom prst="ellipse">
             <a:avLst/>
@@ -20863,22 +20976,22 @@
       </p:sp>
       <p:pic>
         <p:nvPicPr>
-          <p:cNvPr id="40" name="Image 8" descr="preencoded.png">    </p:cNvPr>
+          <p:cNvPr id="44" name="Image 9" descr="preencoded.png">    </p:cNvPr>
           <p:cNvPicPr>
             <a:picLocks noChangeAspect="1"/>
           </p:cNvPicPr>
           <p:nvPr/>
         </p:nvPicPr>
         <p:blipFill>
-          <a:blip r:embed="rId9"/>
+          <a:blip r:embed="rId10"/>
           <a:stretch>
             <a:fillRect/>
           </a:stretch>
         </p:blipFill>
         <p:spPr>
           <a:xfrm>
-            <a:off x="9322308" y="2907792"/>
-            <a:ext cx="265176" cy="265176"/>
+            <a:off x="9304020" y="2793492"/>
+            <a:ext cx="228600" cy="228600"/>
           </a:xfrm>
           <a:prstGeom prst="rect">
             <a:avLst/>
@@ -20887,14 +21000,14 @@
       </p:pic>
       <p:sp>
         <p:nvSpPr>
-          <p:cNvPr id="41" name="Text 30"/>
-          <p:cNvSpPr/>
-          <p:nvPr/>
-        </p:nvSpPr>
-        <p:spPr>
-          <a:xfrm>
-            <a:off x="9806940" y="2606040"/>
-            <a:ext cx="1421892" cy="868680"/>
+          <p:cNvPr id="45" name="Text 33"/>
+          <p:cNvSpPr/>
+          <p:nvPr/>
+        </p:nvSpPr>
+        <p:spPr>
+          <a:xfrm>
+            <a:off x="9733788" y="2542032"/>
+            <a:ext cx="1495044" cy="713232"/>
           </a:xfrm>
           <a:prstGeom prst="rect">
             <a:avLst/>
@@ -20908,12 +21021,12 @@
           <a:p>
             <a:pPr algn="l" indent="0" marL="0">
               <a:lnSpc>
-                <a:spcPct val="102000"/>
+                <a:spcPct val="100000"/>
               </a:lnSpc>
               <a:buNone/>
             </a:pPr>
             <a:r>
-              <a:rPr lang="en-US" sz="1300" b="1" dirty="0">
+              <a:rPr lang="en-US" sz="1250" b="1" dirty="0">
                 <a:solidFill>
                   <a:srgbClr val="2B2B33"/>
                 </a:solidFill>
@@ -20923,24 +21036,24 @@
               </a:rPr>
               <a:t>Alcohol (“holiday heart”)</a:t>
             </a:r>
-            <a:endParaRPr lang="en-US" sz="1300" dirty="0"/>
-          </a:p>
-        </p:txBody>
-      </p:sp>
-      <p:sp>
-        <p:nvSpPr>
-          <p:cNvPr id="42" name="Shape 31"/>
-          <p:cNvSpPr/>
-          <p:nvPr/>
-        </p:nvSpPr>
-        <p:spPr>
-          <a:xfrm>
-            <a:off x="6519672" y="3630168"/>
-            <a:ext cx="2263140" cy="868680"/>
+            <a:endParaRPr lang="en-US" sz="1250" dirty="0"/>
+          </a:p>
+        </p:txBody>
+      </p:sp>
+      <p:sp>
+        <p:nvSpPr>
+          <p:cNvPr id="46" name="Shape 34"/>
+          <p:cNvSpPr/>
+          <p:nvPr/>
+        </p:nvSpPr>
+        <p:spPr>
+          <a:xfrm>
+            <a:off x="6519672" y="3364992"/>
+            <a:ext cx="2263140" cy="713232"/>
           </a:xfrm>
           <a:prstGeom prst="roundRect">
             <a:avLst>
-              <a:gd name="adj" fmla="val 9474"/>
+              <a:gd name="adj" fmla="val 11538"/>
             </a:avLst>
           </a:prstGeom>
           <a:solidFill>
@@ -20956,14 +21069,14 @@
       </p:sp>
       <p:sp>
         <p:nvSpPr>
-          <p:cNvPr id="43" name="Shape 32"/>
-          <p:cNvSpPr/>
-          <p:nvPr/>
-        </p:nvSpPr>
-        <p:spPr>
-          <a:xfrm>
-            <a:off x="6665976" y="3813048"/>
-            <a:ext cx="502920" cy="502920"/>
+          <p:cNvPr id="47" name="Shape 35"/>
+          <p:cNvSpPr/>
+          <p:nvPr/>
+        </p:nvSpPr>
+        <p:spPr>
+          <a:xfrm>
+            <a:off x="6656832" y="3511296"/>
+            <a:ext cx="438912" cy="438912"/>
           </a:xfrm>
           <a:prstGeom prst="ellipse">
             <a:avLst/>
@@ -20976,22 +21089,22 @@
       </p:sp>
       <p:pic>
         <p:nvPicPr>
-          <p:cNvPr id="44" name="Image 9" descr="preencoded.png">    </p:cNvPr>
+          <p:cNvPr id="48" name="Image 10" descr="preencoded.png">    </p:cNvPr>
           <p:cNvPicPr>
             <a:picLocks noChangeAspect="1"/>
           </p:cNvPicPr>
           <p:nvPr/>
         </p:nvPicPr>
         <p:blipFill>
-          <a:blip r:embed="rId10"/>
+          <a:blip r:embed="rId11"/>
           <a:stretch>
             <a:fillRect/>
           </a:stretch>
         </p:blipFill>
         <p:spPr>
           <a:xfrm>
-            <a:off x="6784848" y="3931920"/>
-            <a:ext cx="265176" cy="265176"/>
+            <a:off x="6766560" y="3616452"/>
+            <a:ext cx="228600" cy="228600"/>
           </a:xfrm>
           <a:prstGeom prst="rect">
             <a:avLst/>
@@ -21000,14 +21113,14 @@
       </p:pic>
       <p:sp>
         <p:nvSpPr>
-          <p:cNvPr id="45" name="Text 33"/>
-          <p:cNvSpPr/>
-          <p:nvPr/>
-        </p:nvSpPr>
-        <p:spPr>
-          <a:xfrm>
-            <a:off x="7269480" y="3630168"/>
-            <a:ext cx="1421892" cy="868680"/>
+          <p:cNvPr id="49" name="Text 36"/>
+          <p:cNvSpPr/>
+          <p:nvPr/>
+        </p:nvSpPr>
+        <p:spPr>
+          <a:xfrm>
+            <a:off x="7196328" y="3364992"/>
+            <a:ext cx="1495044" cy="713232"/>
           </a:xfrm>
           <a:prstGeom prst="rect">
             <a:avLst/>
@@ -21021,12 +21134,12 @@
           <a:p>
             <a:pPr algn="l" indent="0" marL="0">
               <a:lnSpc>
-                <a:spcPct val="102000"/>
+                <a:spcPct val="100000"/>
               </a:lnSpc>
               <a:buNone/>
             </a:pPr>
             <a:r>
-              <a:rPr lang="en-US" sz="1300" b="1" dirty="0">
+              <a:rPr lang="en-US" sz="1250" b="1" dirty="0">
                 <a:solidFill>
                   <a:srgbClr val="2B2B33"/>
                 </a:solidFill>
@@ -21036,24 +21149,24 @@
               </a:rPr>
               <a:t>Obesity / sleep apnoea</a:t>
             </a:r>
-            <a:endParaRPr lang="en-US" sz="1300" dirty="0"/>
-          </a:p>
-        </p:txBody>
-      </p:sp>
-      <p:sp>
-        <p:nvSpPr>
-          <p:cNvPr id="46" name="Shape 34"/>
-          <p:cNvSpPr/>
-          <p:nvPr/>
-        </p:nvSpPr>
-        <p:spPr>
-          <a:xfrm>
-            <a:off x="9057132" y="3630168"/>
-            <a:ext cx="2263140" cy="868680"/>
+            <a:endParaRPr lang="en-US" sz="1250" dirty="0"/>
+          </a:p>
+        </p:txBody>
+      </p:sp>
+      <p:sp>
+        <p:nvSpPr>
+          <p:cNvPr id="50" name="Shape 37"/>
+          <p:cNvSpPr/>
+          <p:nvPr/>
+        </p:nvSpPr>
+        <p:spPr>
+          <a:xfrm>
+            <a:off x="9057132" y="3364992"/>
+            <a:ext cx="2263140" cy="713232"/>
           </a:xfrm>
           <a:prstGeom prst="roundRect">
             <a:avLst>
-              <a:gd name="adj" fmla="val 9474"/>
+              <a:gd name="adj" fmla="val 11538"/>
             </a:avLst>
           </a:prstGeom>
           <a:solidFill>
@@ -21069,14 +21182,14 @@
       </p:sp>
       <p:sp>
         <p:nvSpPr>
-          <p:cNvPr id="47" name="Shape 35"/>
-          <p:cNvSpPr/>
-          <p:nvPr/>
-        </p:nvSpPr>
-        <p:spPr>
-          <a:xfrm>
-            <a:off x="9203436" y="3813048"/>
-            <a:ext cx="502920" cy="502920"/>
+          <p:cNvPr id="51" name="Shape 38"/>
+          <p:cNvSpPr/>
+          <p:nvPr/>
+        </p:nvSpPr>
+        <p:spPr>
+          <a:xfrm>
+            <a:off x="9194292" y="3511296"/>
+            <a:ext cx="438912" cy="438912"/>
           </a:xfrm>
           <a:prstGeom prst="ellipse">
             <a:avLst/>
@@ -21089,22 +21202,22 @@
       </p:sp>
       <p:pic>
         <p:nvPicPr>
-          <p:cNvPr id="48" name="Image 10" descr="preencoded.png">    </p:cNvPr>
+          <p:cNvPr id="52" name="Image 11" descr="preencoded.png">    </p:cNvPr>
           <p:cNvPicPr>
             <a:picLocks noChangeAspect="1"/>
           </p:cNvPicPr>
           <p:nvPr/>
         </p:nvPicPr>
         <p:blipFill>
-          <a:blip r:embed="rId11"/>
+          <a:blip r:embed="rId12"/>
           <a:stretch>
             <a:fillRect/>
           </a:stretch>
         </p:blipFill>
         <p:spPr>
           <a:xfrm>
-            <a:off x="9322308" y="3931920"/>
-            <a:ext cx="265176" cy="265176"/>
+            <a:off x="9304020" y="3616452"/>
+            <a:ext cx="228600" cy="228600"/>
           </a:xfrm>
           <a:prstGeom prst="rect">
             <a:avLst/>
@@ -21113,14 +21226,14 @@
       </p:pic>
       <p:sp>
         <p:nvSpPr>
-          <p:cNvPr id="49" name="Text 36"/>
-          <p:cNvSpPr/>
-          <p:nvPr/>
-        </p:nvSpPr>
-        <p:spPr>
-          <a:xfrm>
-            <a:off x="9806940" y="3630168"/>
-            <a:ext cx="1421892" cy="868680"/>
+          <p:cNvPr id="53" name="Text 39"/>
+          <p:cNvSpPr/>
+          <p:nvPr/>
+        </p:nvSpPr>
+        <p:spPr>
+          <a:xfrm>
+            <a:off x="9733788" y="3364992"/>
+            <a:ext cx="1495044" cy="713232"/>
           </a:xfrm>
           <a:prstGeom prst="rect">
             <a:avLst/>
@@ -21134,12 +21247,12 @@
           <a:p>
             <a:pPr algn="l" indent="0" marL="0">
               <a:lnSpc>
-                <a:spcPct val="102000"/>
+                <a:spcPct val="100000"/>
               </a:lnSpc>
               <a:buNone/>
             </a:pPr>
             <a:r>
-              <a:rPr lang="en-US" sz="1300" b="1" dirty="0">
+              <a:rPr lang="en-US" sz="1250" b="1" dirty="0">
                 <a:solidFill>
                   <a:srgbClr val="2B2B33"/>
                 </a:solidFill>
@@ -21149,24 +21262,24 @@
               </a:rPr>
               <a:t>Sepsis / infection</a:t>
             </a:r>
-            <a:endParaRPr lang="en-US" sz="1300" dirty="0"/>
-          </a:p>
-        </p:txBody>
-      </p:sp>
-      <p:sp>
-        <p:nvSpPr>
-          <p:cNvPr id="50" name="Shape 37"/>
-          <p:cNvSpPr/>
-          <p:nvPr/>
-        </p:nvSpPr>
-        <p:spPr>
-          <a:xfrm>
-            <a:off x="6519672" y="4654296"/>
-            <a:ext cx="2263140" cy="868680"/>
+            <a:endParaRPr lang="en-US" sz="1250" dirty="0"/>
+          </a:p>
+        </p:txBody>
+      </p:sp>
+      <p:sp>
+        <p:nvSpPr>
+          <p:cNvPr id="54" name="Shape 40"/>
+          <p:cNvSpPr/>
+          <p:nvPr/>
+        </p:nvSpPr>
+        <p:spPr>
+          <a:xfrm>
+            <a:off x="6519672" y="4187952"/>
+            <a:ext cx="2263140" cy="713232"/>
           </a:xfrm>
           <a:prstGeom prst="roundRect">
             <a:avLst>
-              <a:gd name="adj" fmla="val 9474"/>
+              <a:gd name="adj" fmla="val 11538"/>
             </a:avLst>
           </a:prstGeom>
           <a:solidFill>
@@ -21182,14 +21295,14 @@
       </p:sp>
       <p:sp>
         <p:nvSpPr>
-          <p:cNvPr id="51" name="Shape 38"/>
-          <p:cNvSpPr/>
-          <p:nvPr/>
-        </p:nvSpPr>
-        <p:spPr>
-          <a:xfrm>
-            <a:off x="6665976" y="4837176"/>
-            <a:ext cx="502920" cy="502920"/>
+          <p:cNvPr id="55" name="Shape 41"/>
+          <p:cNvSpPr/>
+          <p:nvPr/>
+        </p:nvSpPr>
+        <p:spPr>
+          <a:xfrm>
+            <a:off x="6656832" y="4334256"/>
+            <a:ext cx="438912" cy="438912"/>
           </a:xfrm>
           <a:prstGeom prst="ellipse">
             <a:avLst/>
@@ -21202,22 +21315,22 @@
       </p:sp>
       <p:pic>
         <p:nvPicPr>
-          <p:cNvPr id="52" name="Image 11" descr="preencoded.png">    </p:cNvPr>
+          <p:cNvPr id="56" name="Image 12" descr="preencoded.png">    </p:cNvPr>
           <p:cNvPicPr>
             <a:picLocks noChangeAspect="1"/>
           </p:cNvPicPr>
           <p:nvPr/>
         </p:nvPicPr>
         <p:blipFill>
-          <a:blip r:embed="rId12"/>
+          <a:blip r:embed="rId13"/>
           <a:stretch>
             <a:fillRect/>
           </a:stretch>
         </p:blipFill>
         <p:spPr>
           <a:xfrm>
-            <a:off x="6784848" y="4956048"/>
-            <a:ext cx="265176" cy="265176"/>
+            <a:off x="6766560" y="4439412"/>
+            <a:ext cx="228600" cy="228600"/>
           </a:xfrm>
           <a:prstGeom prst="rect">
             <a:avLst/>
@@ -21226,14 +21339,14 @@
       </p:pic>
       <p:sp>
         <p:nvSpPr>
-          <p:cNvPr id="53" name="Text 39"/>
-          <p:cNvSpPr/>
-          <p:nvPr/>
-        </p:nvSpPr>
-        <p:spPr>
-          <a:xfrm>
-            <a:off x="7269480" y="4654296"/>
-            <a:ext cx="1421892" cy="868680"/>
+          <p:cNvPr id="57" name="Text 42"/>
+          <p:cNvSpPr/>
+          <p:nvPr/>
+        </p:nvSpPr>
+        <p:spPr>
+          <a:xfrm>
+            <a:off x="7196328" y="4187952"/>
+            <a:ext cx="1495044" cy="713232"/>
           </a:xfrm>
           <a:prstGeom prst="rect">
             <a:avLst/>
@@ -21247,12 +21360,12 @@
           <a:p>
             <a:pPr algn="l" indent="0" marL="0">
               <a:lnSpc>
-                <a:spcPct val="102000"/>
+                <a:spcPct val="100000"/>
               </a:lnSpc>
               <a:buNone/>
             </a:pPr>
             <a:r>
-              <a:rPr lang="en-US" sz="1300" b="1" dirty="0">
+              <a:rPr lang="en-US" sz="1250" b="1" dirty="0">
                 <a:solidFill>
                   <a:srgbClr val="2B2B33"/>
                 </a:solidFill>
@@ -21262,24 +21375,24 @@
               </a:rPr>
               <a:t>Pulmonary — PE, COPD</a:t>
             </a:r>
-            <a:endParaRPr lang="en-US" sz="1300" dirty="0"/>
-          </a:p>
-        </p:txBody>
-      </p:sp>
-      <p:sp>
-        <p:nvSpPr>
-          <p:cNvPr id="54" name="Shape 40"/>
-          <p:cNvSpPr/>
-          <p:nvPr/>
-        </p:nvSpPr>
-        <p:spPr>
-          <a:xfrm>
-            <a:off x="9057132" y="4654296"/>
-            <a:ext cx="2263140" cy="868680"/>
+            <a:endParaRPr lang="en-US" sz="1250" dirty="0"/>
+          </a:p>
+        </p:txBody>
+      </p:sp>
+      <p:sp>
+        <p:nvSpPr>
+          <p:cNvPr id="58" name="Shape 43"/>
+          <p:cNvSpPr/>
+          <p:nvPr/>
+        </p:nvSpPr>
+        <p:spPr>
+          <a:xfrm>
+            <a:off x="9057132" y="4187952"/>
+            <a:ext cx="2263140" cy="713232"/>
           </a:xfrm>
           <a:prstGeom prst="roundRect">
             <a:avLst>
-              <a:gd name="adj" fmla="val 9474"/>
+              <a:gd name="adj" fmla="val 11538"/>
             </a:avLst>
           </a:prstGeom>
           <a:solidFill>
@@ -21295,14 +21408,14 @@
       </p:sp>
       <p:sp>
         <p:nvSpPr>
-          <p:cNvPr id="55" name="Shape 41"/>
-          <p:cNvSpPr/>
-          <p:nvPr/>
-        </p:nvSpPr>
-        <p:spPr>
-          <a:xfrm>
-            <a:off x="9203436" y="4837176"/>
-            <a:ext cx="502920" cy="502920"/>
+          <p:cNvPr id="59" name="Shape 44"/>
+          <p:cNvSpPr/>
+          <p:nvPr/>
+        </p:nvSpPr>
+        <p:spPr>
+          <a:xfrm>
+            <a:off x="9194292" y="4334256"/>
+            <a:ext cx="438912" cy="438912"/>
           </a:xfrm>
           <a:prstGeom prst="ellipse">
             <a:avLst/>
@@ -21315,22 +21428,22 @@
       </p:sp>
       <p:pic>
         <p:nvPicPr>
-          <p:cNvPr id="56" name="Image 12" descr="preencoded.png">    </p:cNvPr>
+          <p:cNvPr id="60" name="Image 13" descr="preencoded.png">    </p:cNvPr>
           <p:cNvPicPr>
             <a:picLocks noChangeAspect="1"/>
           </p:cNvPicPr>
           <p:nvPr/>
         </p:nvPicPr>
         <p:blipFill>
-          <a:blip r:embed="rId13"/>
+          <a:blip r:embed="rId14"/>
           <a:stretch>
             <a:fillRect/>
           </a:stretch>
         </p:blipFill>
         <p:spPr>
           <a:xfrm>
-            <a:off x="9322308" y="4956048"/>
-            <a:ext cx="265176" cy="265176"/>
+            <a:off x="9304020" y="4439412"/>
+            <a:ext cx="228600" cy="228600"/>
           </a:xfrm>
           <a:prstGeom prst="rect">
             <a:avLst/>
@@ -21339,14 +21452,14 @@
       </p:pic>
       <p:sp>
         <p:nvSpPr>
-          <p:cNvPr id="57" name="Text 42"/>
-          <p:cNvSpPr/>
-          <p:nvPr/>
-        </p:nvSpPr>
-        <p:spPr>
-          <a:xfrm>
-            <a:off x="9806940" y="4654296"/>
-            <a:ext cx="1421892" cy="868680"/>
+          <p:cNvPr id="61" name="Text 45"/>
+          <p:cNvSpPr/>
+          <p:nvPr/>
+        </p:nvSpPr>
+        <p:spPr>
+          <a:xfrm>
+            <a:off x="9733788" y="4187952"/>
+            <a:ext cx="1495044" cy="713232"/>
           </a:xfrm>
           <a:prstGeom prst="rect">
             <a:avLst/>
@@ -21360,12 +21473,12 @@
           <a:p>
             <a:pPr algn="l" indent="0" marL="0">
               <a:lnSpc>
-                <a:spcPct val="102000"/>
+                <a:spcPct val="100000"/>
               </a:lnSpc>
               <a:buNone/>
             </a:pPr>
             <a:r>
-              <a:rPr lang="en-US" sz="1300" b="1" dirty="0">
+              <a:rPr lang="en-US" sz="1250" b="1" dirty="0">
                 <a:solidFill>
                   <a:srgbClr val="2B2B33"/>
                 </a:solidFill>
@@ -21373,45 +21486,158 @@
                 <a:ea typeface="Calibri" pitchFamily="34" charset="-122"/>
                 <a:cs typeface="Calibri" pitchFamily="34" charset="-120"/>
               </a:rPr>
-              <a:t>Electrolytes / diabetes / age</a:t>
-            </a:r>
-            <a:endParaRPr lang="en-US" sz="1300" dirty="0"/>
-          </a:p>
-        </p:txBody>
-      </p:sp>
-      <p:sp>
-        <p:nvSpPr>
-          <p:cNvPr id="58" name="Text 43"/>
-          <p:cNvSpPr/>
-          <p:nvPr/>
-        </p:nvSpPr>
-        <p:spPr>
-          <a:xfrm>
-            <a:off x="11277295" y="6355080"/>
-            <a:ext cx="548640" cy="320040"/>
-          </a:xfrm>
-          <a:prstGeom prst="rect">
-            <a:avLst/>
-          </a:prstGeom>
-          <a:noFill/>
-          <a:ln/>
-        </p:spPr>
-        <p:txBody>
-          <a:bodyPr wrap="square" rtlCol="0" anchor="t"/>
-          <a:lstStyle/>
-          <a:p>
-            <a:pPr algn="r" indent="0" marL="0">
-              <a:buNone/>
-            </a:pPr>
-            <a:r>
-              <a:rPr lang="en-US" sz="1100" b="1" dirty="0">
-                <a:solidFill>
-                  <a:srgbClr val="6B6B76"/>
+              <a:t>Electrolytes / diabetes</a:t>
+            </a:r>
+            <a:endParaRPr lang="en-US" sz="1250" dirty="0"/>
+          </a:p>
+        </p:txBody>
+      </p:sp>
+      <p:sp>
+        <p:nvSpPr>
+          <p:cNvPr id="62" name="Shape 46"/>
+          <p:cNvSpPr/>
+          <p:nvPr/>
+        </p:nvSpPr>
+        <p:spPr>
+          <a:xfrm>
+            <a:off x="6519672" y="5010912"/>
+            <a:ext cx="2263140" cy="713232"/>
+          </a:xfrm>
+          <a:prstGeom prst="roundRect">
+            <a:avLst>
+              <a:gd name="adj" fmla="val 11538"/>
+            </a:avLst>
+          </a:prstGeom>
+          <a:solidFill>
+            <a:srgbClr val="FFFFFF"/>
+          </a:solidFill>
+          <a:ln w="12700">
+            <a:solidFill>
+              <a:srgbClr val="FBD8DF"/>
+            </a:solidFill>
+            <a:prstDash val="solid"/>
+          </a:ln>
+        </p:spPr>
+      </p:sp>
+      <p:sp>
+        <p:nvSpPr>
+          <p:cNvPr id="63" name="Shape 47"/>
+          <p:cNvSpPr/>
+          <p:nvPr/>
+        </p:nvSpPr>
+        <p:spPr>
+          <a:xfrm>
+            <a:off x="6656832" y="5157216"/>
+            <a:ext cx="438912" cy="438912"/>
+          </a:xfrm>
+          <a:prstGeom prst="ellipse">
+            <a:avLst/>
+          </a:prstGeom>
+          <a:solidFill>
+            <a:srgbClr val="FFF0F3"/>
+          </a:solidFill>
+          <a:ln/>
+        </p:spPr>
+      </p:sp>
+      <p:pic>
+        <p:nvPicPr>
+          <p:cNvPr id="64" name="Image 14" descr="preencoded.png">    </p:cNvPr>
+          <p:cNvPicPr>
+            <a:picLocks noChangeAspect="1"/>
+          </p:cNvPicPr>
+          <p:nvPr/>
+        </p:nvPicPr>
+        <p:blipFill>
+          <a:blip r:embed="rId15"/>
+          <a:stretch>
+            <a:fillRect/>
+          </a:stretch>
+        </p:blipFill>
+        <p:spPr>
+          <a:xfrm>
+            <a:off x="6766560" y="5262372"/>
+            <a:ext cx="228600" cy="228600"/>
+          </a:xfrm>
+          <a:prstGeom prst="rect">
+            <a:avLst/>
+          </a:prstGeom>
+        </p:spPr>
+      </p:pic>
+      <p:sp>
+        <p:nvSpPr>
+          <p:cNvPr id="65" name="Text 48"/>
+          <p:cNvSpPr/>
+          <p:nvPr/>
+        </p:nvSpPr>
+        <p:spPr>
+          <a:xfrm>
+            <a:off x="7196328" y="5010912"/>
+            <a:ext cx="1495044" cy="713232"/>
+          </a:xfrm>
+          <a:prstGeom prst="rect">
+            <a:avLst/>
+          </a:prstGeom>
+          <a:noFill/>
+          <a:ln/>
+        </p:spPr>
+        <p:txBody>
+          <a:bodyPr wrap="square" lIns="0" tIns="0" rIns="0" bIns="0" rtlCol="0" anchor="ctr"/>
+          <a:lstStyle/>
+          <a:p>
+            <a:pPr algn="l" indent="0" marL="0">
+              <a:lnSpc>
+                <a:spcPct val="100000"/>
+              </a:lnSpc>
+              <a:buNone/>
+            </a:pPr>
+            <a:r>
+              <a:rPr lang="en-US" sz="1250" b="1" dirty="0">
+                <a:solidFill>
+                  <a:srgbClr val="2B2B33"/>
                 </a:solidFill>
                 <a:latin typeface="Calibri" pitchFamily="34" charset="0"/>
                 <a:ea typeface="Calibri" pitchFamily="34" charset="-122"/>
                 <a:cs typeface="Calibri" pitchFamily="34" charset="-120"/>
               </a:rPr>
+              <a:t>Advancing age</a:t>
+            </a:r>
+            <a:endParaRPr lang="en-US" sz="1250" dirty="0"/>
+          </a:p>
+        </p:txBody>
+      </p:sp>
+      <p:sp>
+        <p:nvSpPr>
+          <p:cNvPr id="66" name="Text 49"/>
+          <p:cNvSpPr/>
+          <p:nvPr/>
+        </p:nvSpPr>
+        <p:spPr>
+          <a:xfrm>
+            <a:off x="11277295" y="6355080"/>
+            <a:ext cx="548640" cy="320040"/>
+          </a:xfrm>
+          <a:prstGeom prst="rect">
+            <a:avLst/>
+          </a:prstGeom>
+          <a:noFill/>
+          <a:ln/>
+        </p:spPr>
+        <p:txBody>
+          <a:bodyPr wrap="square" rtlCol="0" anchor="t"/>
+          <a:lstStyle/>
+          <a:p>
+            <a:pPr algn="r" indent="0" marL="0">
+              <a:buNone/>
+            </a:pPr>
+            <a:r>
+              <a:rPr lang="en-US" sz="1100" b="1" dirty="0">
+                <a:solidFill>
+                  <a:srgbClr val="6B6B76"/>
+                </a:solidFill>
+                <a:latin typeface="Calibri" pitchFamily="34" charset="0"/>
+                <a:ea typeface="Calibri" pitchFamily="34" charset="-122"/>
+                <a:cs typeface="Calibri" pitchFamily="34" charset="-120"/>
+              </a:rPr>
               <a:t>05</a:t>
             </a:r>
             <a:endParaRPr lang="en-US" sz="1100" dirty="0"/>
@@ -21420,7 +21646,7 @@
       </p:sp>
       <p:sp>
         <p:nvSpPr>
-          <p:cNvPr id="59" name="Text 44"/>
+          <p:cNvPr id="67" name="Text 50"/>
           <p:cNvSpPr/>
           <p:nvPr/>
         </p:nvSpPr>

--- a/presentations/Atrial-Fibrillation-Topic-Review.pptx
+++ b/presentations/Atrial-Fibrillation-Topic-Review.pptx
@@ -26,9 +26,10 @@
     <p:sldId id="274" r:id="rId20"/>
     <p:sldId id="275" r:id="rId21"/>
     <p:sldId id="276" r:id="rId22"/>
+    <p:sldId id="277" r:id="rId23"/>
   </p:sldIdLst>
   <p:notesMasterIdLst>
-    <p:notesMasterId r:id="rId23"/>
+    <p:notesMasterId r:id="rId24"/>
   </p:notesMasterIdLst>
   <p:sldSz cx="12191695" cy="6858000"/>
   <p:notesSz cx="6858000" cy="12191695"/>
@@ -1690,6 +1691,94 @@
             <a:fld id="{F7021451-1387-4CA6-816F-3879F97B5CBC}" type="slidenum">
               <a:rPr lang="en-US"/>
               <a:t>21</a:t>
+            </a:fld>
+            <a:endParaRPr lang="en-US"/>
+          </a:p>
+        </p:txBody>
+      </p:sp>
+    </p:spTree>
+    <p:extLst>
+      <p:ext uri="{BB962C8B-B14F-4D97-AF65-F5344CB8AC3E}">
+        <p14:creationId xmlns:p14="http://schemas.microsoft.com/office/powerpoint/2010/main" val="1024086991"/>
+      </p:ext>
+    </p:extLst>
+  </p:cSld>
+  <p:clrMapOvr>
+    <a:masterClrMapping/>
+  </p:clrMapOvr>
+</p:notes>
+</file>
+
+<file path=ppt/notesSlides/notesSlide22.xml><?xml version="1.0" encoding="utf-8"?>
+<p:notes xmlns:a="http://schemas.openxmlformats.org/drawingml/2006/main" xmlns:r="http://schemas.openxmlformats.org/officeDocument/2006/relationships" xmlns:p="http://schemas.openxmlformats.org/presentationml/2006/main">
+  <p:cSld>
+    <p:spTree>
+      <p:nvGrpSpPr>
+        <p:cNvPr id="1" name=""/>
+        <p:cNvGrpSpPr/>
+        <p:nvPr/>
+      </p:nvGrpSpPr>
+      <p:grpSpPr>
+        <a:xfrm>
+          <a:off x="0" y="0"/>
+          <a:ext cx="0" cy="0"/>
+          <a:chOff x="0" y="0"/>
+          <a:chExt cx="0" cy="0"/>
+        </a:xfrm>
+      </p:grpSpPr>
+      <p:sp>
+        <p:nvSpPr>
+          <p:cNvPr id="2" name="Slide Image Placeholder 1"/>
+          <p:cNvSpPr>
+            <a:spLocks noGrp="1" noRot="1" noChangeAspect="1"/>
+          </p:cNvSpPr>
+          <p:nvPr>
+            <p:ph type="sldImg"/>
+          </p:nvPr>
+        </p:nvSpPr>
+        <p:spPr/>
+      </p:sp>
+      <p:sp>
+        <p:nvSpPr>
+          <p:cNvPr id="3" name="Notes Placeholder 2"/>
+          <p:cNvSpPr>
+            <a:spLocks noGrp="1"/>
+          </p:cNvSpPr>
+          <p:nvPr>
+            <p:ph type="body" idx="1"/>
+          </p:nvPr>
+        </p:nvSpPr>
+        <p:spPr/>
+        <p:txBody>
+          <a:bodyPr/>
+          <a:lstStyle/>
+          <a:p>
+            <a:r>
+              <a:rPr lang="en-US" dirty="0"/>
+              <a:t/>
+            </a:r>
+            <a:endParaRPr lang="en-US" dirty="0"/>
+          </a:p>
+        </p:txBody>
+      </p:sp>
+      <p:sp>
+        <p:nvSpPr>
+          <p:cNvPr id="4" name="Slide Number Placeholder 3"/>
+          <p:cNvSpPr>
+            <a:spLocks noGrp="1"/>
+          </p:cNvSpPr>
+          <p:nvPr>
+            <p:ph type="sldNum" sz="quarter" idx="10"/>
+          </p:nvPr>
+        </p:nvSpPr>
+        <p:spPr/>
+        <p:txBody>
+          <a:bodyPr/>
+          <a:lstStyle/>
+          <a:p>
+            <a:fld id="{F7021451-1387-4CA6-816F-3879F97B5CBC}" type="slidenum">
+              <a:rPr lang="en-US"/>
+              <a:t>22</a:t>
             </a:fld>
             <a:endParaRPr lang="en-US"/>
           </a:p>
@@ -12672,7 +12761,7 @@
                 <a:ea typeface="Calibri" pitchFamily="34" charset="-122"/>
                 <a:cs typeface="Calibri" pitchFamily="34" charset="-120"/>
               </a:rPr>
-              <a:t>SPECIAL POPULATIONS · PREGNANCY</a:t>
+              <a:t>STROKE PREVENTION · VALVULAR VS NONVALVULAR</a:t>
             </a:r>
             <a:endParaRPr lang="en-US" sz="1250" dirty="0"/>
           </a:p>
@@ -12711,7 +12800,7 @@
                 <a:ea typeface="Cambria" pitchFamily="34" charset="-122"/>
                 <a:cs typeface="Cambria" pitchFamily="34" charset="-120"/>
               </a:rPr>
-              <a:t>Anticoagulation in Pregnancy</a:t>
+              <a:t>Choice of Anticoagulant</a:t>
             </a:r>
             <a:endParaRPr lang="en-US" sz="3000" dirty="0"/>
           </a:p>
@@ -12726,11 +12815,11 @@
         <p:spPr>
           <a:xfrm>
             <a:off x="502920" y="1783080"/>
-            <a:ext cx="5532120" cy="2971800"/>
+            <a:ext cx="5532120" cy="4206240"/>
           </a:xfrm>
           <a:prstGeom prst="roundRect">
             <a:avLst>
-              <a:gd name="adj" fmla="val 3692"/>
+              <a:gd name="adj" fmla="val 2609"/>
             </a:avLst>
           </a:prstGeom>
           <a:solidFill>
@@ -12753,13 +12842,72 @@
       </p:sp>
       <p:sp>
         <p:nvSpPr>
-          <p:cNvPr id="7" name="Text 4"/>
-          <p:cNvSpPr/>
-          <p:nvPr/>
-        </p:nvSpPr>
-        <p:spPr>
-          <a:xfrm>
-            <a:off x="822960" y="2011680"/>
+          <p:cNvPr id="7" name="Shape 4"/>
+          <p:cNvSpPr/>
+          <p:nvPr/>
+        </p:nvSpPr>
+        <p:spPr>
+          <a:xfrm>
+            <a:off x="822960" y="2084832"/>
+            <a:ext cx="749808" cy="749808"/>
+          </a:xfrm>
+          <a:prstGeom prst="ellipse">
+            <a:avLst/>
+          </a:prstGeom>
+          <a:solidFill>
+            <a:srgbClr val="A4133C"/>
+          </a:solidFill>
+          <a:ln/>
+        </p:spPr>
+      </p:sp>
+      <p:sp>
+        <p:nvSpPr>
+          <p:cNvPr id="8" name="Text 5"/>
+          <p:cNvSpPr/>
+          <p:nvPr/>
+        </p:nvSpPr>
+        <p:spPr>
+          <a:xfrm>
+            <a:off x="1783080" y="2084832"/>
+            <a:ext cx="4114800" cy="749808"/>
+          </a:xfrm>
+          <a:prstGeom prst="rect">
+            <a:avLst/>
+          </a:prstGeom>
+          <a:noFill/>
+          <a:ln/>
+        </p:spPr>
+        <p:txBody>
+          <a:bodyPr wrap="square" lIns="0" tIns="0" rIns="0" bIns="0" rtlCol="0" anchor="ctr"/>
+          <a:lstStyle/>
+          <a:p>
+            <a:pPr algn="l" indent="0" marL="0">
+              <a:buNone/>
+            </a:pPr>
+            <a:r>
+              <a:rPr lang="en-US" sz="2200" b="1" dirty="0">
+                <a:solidFill>
+                  <a:srgbClr val="2B2B33"/>
+                </a:solidFill>
+                <a:latin typeface="Cambria" pitchFamily="34" charset="0"/>
+                <a:ea typeface="Cambria" pitchFamily="34" charset="-122"/>
+                <a:cs typeface="Cambria" pitchFamily="34" charset="-120"/>
+              </a:rPr>
+              <a:t>Nonvalvular AF</a:t>
+            </a:r>
+            <a:endParaRPr lang="en-US" sz="2200" dirty="0"/>
+          </a:p>
+        </p:txBody>
+      </p:sp>
+      <p:sp>
+        <p:nvSpPr>
+          <p:cNvPr id="9" name="Text 6"/>
+          <p:cNvSpPr/>
+          <p:nvPr/>
+        </p:nvSpPr>
+        <p:spPr>
+          <a:xfrm>
+            <a:off x="868680" y="2944368"/>
             <a:ext cx="4846320" cy="274320"/>
           </a:xfrm>
           <a:prstGeom prst="rect">
@@ -12769,36 +12917,302 @@
           <a:ln/>
         </p:spPr>
         <p:txBody>
-          <a:bodyPr wrap="square" rtlCol="0" anchor="t"/>
-          <a:lstStyle/>
-          <a:p>
-            <a:pPr algn="l" indent="0" marL="0">
-              <a:buNone/>
-            </a:pPr>
-            <a:r>
-              <a:rPr lang="en-US" sz="1300" b="1" spc="150" kern="0" dirty="0">
-                <a:solidFill>
-                  <a:srgbClr val="2E7D32"/>
+          <a:bodyPr wrap="square" lIns="0" tIns="0" rIns="0" bIns="0" rtlCol="0" anchor="t"/>
+          <a:lstStyle/>
+          <a:p>
+            <a:pPr algn="l" indent="0" marL="0">
+              <a:buNone/>
+            </a:pPr>
+            <a:r>
+              <a:rPr lang="en-US" sz="1350" i="1" dirty="0">
+                <a:solidFill>
+                  <a:srgbClr val="6B6B76"/>
                 </a:solidFill>
                 <a:latin typeface="Calibri" pitchFamily="34" charset="0"/>
                 <a:ea typeface="Calibri" pitchFamily="34" charset="-122"/>
                 <a:cs typeface="Calibri" pitchFamily="34" charset="-120"/>
               </a:rPr>
-              <a:t>✓  </a:t>
-            </a:r>
-            <a:pPr algn="l" indent="0" marL="0">
-              <a:buNone/>
-            </a:pPr>
-            <a:r>
-              <a:rPr lang="en-US" sz="1300" b="1" spc="150" kern="0" dirty="0">
-                <a:solidFill>
-                  <a:srgbClr val="2E7D32"/>
+              <a:t>Broadest choice of agents</a:t>
+            </a:r>
+            <a:endParaRPr lang="en-US" sz="1350" dirty="0"/>
+          </a:p>
+        </p:txBody>
+      </p:sp>
+      <p:sp>
+        <p:nvSpPr>
+          <p:cNvPr id="10" name="Shape 7"/>
+          <p:cNvSpPr/>
+          <p:nvPr/>
+        </p:nvSpPr>
+        <p:spPr>
+          <a:xfrm>
+            <a:off x="914400" y="3419856"/>
+            <a:ext cx="128016" cy="128016"/>
+          </a:xfrm>
+          <a:prstGeom prst="ellipse">
+            <a:avLst/>
+          </a:prstGeom>
+          <a:solidFill>
+            <a:srgbClr val="FF4D6D"/>
+          </a:solidFill>
+          <a:ln/>
+        </p:spPr>
+      </p:sp>
+      <p:sp>
+        <p:nvSpPr>
+          <p:cNvPr id="11" name="Text 8"/>
+          <p:cNvSpPr/>
+          <p:nvPr/>
+        </p:nvSpPr>
+        <p:spPr>
+          <a:xfrm>
+            <a:off x="1170432" y="3346704"/>
+            <a:ext cx="4663440" cy="365760"/>
+          </a:xfrm>
+          <a:prstGeom prst="rect">
+            <a:avLst/>
+          </a:prstGeom>
+          <a:noFill/>
+          <a:ln/>
+        </p:spPr>
+        <p:txBody>
+          <a:bodyPr wrap="square" lIns="0" tIns="0" rIns="0" bIns="0" rtlCol="0" anchor="ctr"/>
+          <a:lstStyle/>
+          <a:p>
+            <a:pPr algn="l" indent="0" marL="0">
+              <a:buNone/>
+            </a:pPr>
+            <a:r>
+              <a:rPr lang="en-US" sz="1350" b="1" dirty="0">
+                <a:solidFill>
+                  <a:srgbClr val="A4133C"/>
                 </a:solidFill>
                 <a:latin typeface="Calibri" pitchFamily="34" charset="0"/>
                 <a:ea typeface="Calibri" pitchFamily="34" charset="-122"/>
                 <a:cs typeface="Calibri" pitchFamily="34" charset="-120"/>
               </a:rPr>
-              <a:t>PREFERRED</a:t>
+              <a:t>IV heparin / LMWH  </a:t>
+            </a:r>
+            <a:pPr algn="l" indent="0" marL="0">
+              <a:buNone/>
+            </a:pPr>
+            <a:r>
+              <a:rPr lang="en-US" sz="1350" dirty="0">
+                <a:solidFill>
+                  <a:srgbClr val="6B6B76"/>
+                </a:solidFill>
+                <a:latin typeface="Calibri" pitchFamily="34" charset="0"/>
+                <a:ea typeface="Calibri" pitchFamily="34" charset="-122"/>
+                <a:cs typeface="Calibri" pitchFamily="34" charset="-120"/>
+              </a:rPr>
+              <a:t>— Parenteral anticoagulation</a:t>
+            </a:r>
+            <a:endParaRPr lang="en-US" sz="1350" dirty="0"/>
+          </a:p>
+        </p:txBody>
+      </p:sp>
+      <p:sp>
+        <p:nvSpPr>
+          <p:cNvPr id="12" name="Shape 9"/>
+          <p:cNvSpPr/>
+          <p:nvPr/>
+        </p:nvSpPr>
+        <p:spPr>
+          <a:xfrm>
+            <a:off x="914400" y="3968496"/>
+            <a:ext cx="128016" cy="128016"/>
+          </a:xfrm>
+          <a:prstGeom prst="ellipse">
+            <a:avLst/>
+          </a:prstGeom>
+          <a:solidFill>
+            <a:srgbClr val="FF4D6D"/>
+          </a:solidFill>
+          <a:ln/>
+        </p:spPr>
+      </p:sp>
+      <p:sp>
+        <p:nvSpPr>
+          <p:cNvPr id="13" name="Text 10"/>
+          <p:cNvSpPr/>
+          <p:nvPr/>
+        </p:nvSpPr>
+        <p:spPr>
+          <a:xfrm>
+            <a:off x="1170432" y="3895344"/>
+            <a:ext cx="4663440" cy="365760"/>
+          </a:xfrm>
+          <a:prstGeom prst="rect">
+            <a:avLst/>
+          </a:prstGeom>
+          <a:noFill/>
+          <a:ln/>
+        </p:spPr>
+        <p:txBody>
+          <a:bodyPr wrap="square" lIns="0" tIns="0" rIns="0" bIns="0" rtlCol="0" anchor="ctr"/>
+          <a:lstStyle/>
+          <a:p>
+            <a:pPr algn="l" indent="0" marL="0">
+              <a:buNone/>
+            </a:pPr>
+            <a:r>
+              <a:rPr lang="en-US" sz="1350" b="1" dirty="0">
+                <a:solidFill>
+                  <a:srgbClr val="A4133C"/>
+                </a:solidFill>
+                <a:latin typeface="Calibri" pitchFamily="34" charset="0"/>
+                <a:ea typeface="Calibri" pitchFamily="34" charset="-122"/>
+                <a:cs typeface="Calibri" pitchFamily="34" charset="-120"/>
+              </a:rPr>
+              <a:t>Warfarin  </a:t>
+            </a:r>
+            <a:pPr algn="l" indent="0" marL="0">
+              <a:buNone/>
+            </a:pPr>
+            <a:r>
+              <a:rPr lang="en-US" sz="1350" dirty="0">
+                <a:solidFill>
+                  <a:srgbClr val="6B6B76"/>
+                </a:solidFill>
+                <a:latin typeface="Calibri" pitchFamily="34" charset="0"/>
+                <a:ea typeface="Calibri" pitchFamily="34" charset="-122"/>
+                <a:cs typeface="Calibri" pitchFamily="34" charset="-120"/>
+              </a:rPr>
+              <a:t>— Vitamin-K antagonist</a:t>
+            </a:r>
+            <a:endParaRPr lang="en-US" sz="1350" dirty="0"/>
+          </a:p>
+        </p:txBody>
+      </p:sp>
+      <p:sp>
+        <p:nvSpPr>
+          <p:cNvPr id="14" name="Shape 11"/>
+          <p:cNvSpPr/>
+          <p:nvPr/>
+        </p:nvSpPr>
+        <p:spPr>
+          <a:xfrm>
+            <a:off x="914400" y="4517136"/>
+            <a:ext cx="128016" cy="128016"/>
+          </a:xfrm>
+          <a:prstGeom prst="ellipse">
+            <a:avLst/>
+          </a:prstGeom>
+          <a:solidFill>
+            <a:srgbClr val="FF4D6D"/>
+          </a:solidFill>
+          <a:ln/>
+        </p:spPr>
+      </p:sp>
+      <p:sp>
+        <p:nvSpPr>
+          <p:cNvPr id="15" name="Text 12"/>
+          <p:cNvSpPr/>
+          <p:nvPr/>
+        </p:nvSpPr>
+        <p:spPr>
+          <a:xfrm>
+            <a:off x="1170432" y="4443984"/>
+            <a:ext cx="4663440" cy="365760"/>
+          </a:xfrm>
+          <a:prstGeom prst="rect">
+            <a:avLst/>
+          </a:prstGeom>
+          <a:noFill/>
+          <a:ln/>
+        </p:spPr>
+        <p:txBody>
+          <a:bodyPr wrap="square" lIns="0" tIns="0" rIns="0" bIns="0" rtlCol="0" anchor="ctr"/>
+          <a:lstStyle/>
+          <a:p>
+            <a:pPr algn="l" indent="0" marL="0">
+              <a:buNone/>
+            </a:pPr>
+            <a:r>
+              <a:rPr lang="en-US" sz="1350" b="1" dirty="0">
+                <a:solidFill>
+                  <a:srgbClr val="A4133C"/>
+                </a:solidFill>
+                <a:latin typeface="Calibri" pitchFamily="34" charset="0"/>
+                <a:ea typeface="Calibri" pitchFamily="34" charset="-122"/>
+                <a:cs typeface="Calibri" pitchFamily="34" charset="-120"/>
+              </a:rPr>
+              <a:t>DOACs  </a:t>
+            </a:r>
+            <a:pPr algn="l" indent="0" marL="0">
+              <a:buNone/>
+            </a:pPr>
+            <a:r>
+              <a:rPr lang="en-US" sz="1350" dirty="0">
+                <a:solidFill>
+                  <a:srgbClr val="6B6B76"/>
+                </a:solidFill>
+                <a:latin typeface="Calibri" pitchFamily="34" charset="0"/>
+                <a:ea typeface="Calibri" pitchFamily="34" charset="-122"/>
+                <a:cs typeface="Calibri" pitchFamily="34" charset="-120"/>
+              </a:rPr>
+              <a:t>— New oral anticoagulants</a:t>
+            </a:r>
+            <a:endParaRPr lang="en-US" sz="1350" dirty="0"/>
+          </a:p>
+        </p:txBody>
+      </p:sp>
+      <p:sp>
+        <p:nvSpPr>
+          <p:cNvPr id="16" name="Shape 13"/>
+          <p:cNvSpPr/>
+          <p:nvPr/>
+        </p:nvSpPr>
+        <p:spPr>
+          <a:xfrm>
+            <a:off x="822960" y="5175504"/>
+            <a:ext cx="4892040" cy="566928"/>
+          </a:xfrm>
+          <a:prstGeom prst="roundRect">
+            <a:avLst>
+              <a:gd name="adj" fmla="val 50000"/>
+            </a:avLst>
+          </a:prstGeom>
+          <a:solidFill>
+            <a:srgbClr val="590D22"/>
+          </a:solidFill>
+          <a:ln/>
+        </p:spPr>
+      </p:sp>
+      <p:sp>
+        <p:nvSpPr>
+          <p:cNvPr id="17" name="Text 14"/>
+          <p:cNvSpPr/>
+          <p:nvPr/>
+        </p:nvSpPr>
+        <p:spPr>
+          <a:xfrm>
+            <a:off x="822960" y="5175504"/>
+            <a:ext cx="4892040" cy="566928"/>
+          </a:xfrm>
+          <a:prstGeom prst="rect">
+            <a:avLst/>
+          </a:prstGeom>
+          <a:noFill/>
+          <a:ln/>
+        </p:spPr>
+        <p:txBody>
+          <a:bodyPr wrap="square" lIns="0" tIns="0" rIns="0" bIns="0" rtlCol="0" anchor="ctr"/>
+          <a:lstStyle/>
+          <a:p>
+            <a:pPr algn="ctr" indent="0" marL="0">
+              <a:buNone/>
+            </a:pPr>
+            <a:r>
+              <a:rPr lang="en-US" sz="1300" b="1" dirty="0">
+                <a:solidFill>
+                  <a:srgbClr val="FBD8DF"/>
+                </a:solidFill>
+                <a:latin typeface="Calibri" pitchFamily="34" charset="0"/>
+                <a:ea typeface="Calibri" pitchFamily="34" charset="-122"/>
+                <a:cs typeface="Calibri" pitchFamily="34" charset="-120"/>
+              </a:rPr>
+              <a:t>Any of these may be considered</a:t>
             </a:r>
             <a:endParaRPr lang="en-US" sz="1300" dirty="0"/>
           </a:p>
@@ -12806,27 +13220,61 @@
       </p:sp>
       <p:sp>
         <p:nvSpPr>
-          <p:cNvPr id="8" name="Shape 5"/>
-          <p:cNvSpPr/>
-          <p:nvPr/>
-        </p:nvSpPr>
-        <p:spPr>
-          <a:xfrm>
-            <a:off x="822960" y="2395728"/>
-            <a:ext cx="548640" cy="548640"/>
+          <p:cNvPr id="18" name="Shape 15"/>
+          <p:cNvSpPr/>
+          <p:nvPr/>
+        </p:nvSpPr>
+        <p:spPr>
+          <a:xfrm>
+            <a:off x="6153912" y="1783080"/>
+            <a:ext cx="5532120" cy="4206240"/>
+          </a:xfrm>
+          <a:prstGeom prst="roundRect">
+            <a:avLst>
+              <a:gd name="adj" fmla="val 2609"/>
+            </a:avLst>
+          </a:prstGeom>
+          <a:solidFill>
+            <a:srgbClr val="FFF0F3"/>
+          </a:solidFill>
+          <a:ln w="12700">
+            <a:solidFill>
+              <a:srgbClr val="FBD8DF"/>
+            </a:solidFill>
+            <a:prstDash val="solid"/>
+          </a:ln>
+          <a:effectLst>
+            <a:outerShdw sx="100000" sy="100000" kx="0" ky="0" algn="bl" rotWithShape="0" blurRad="127000" dist="50800" dir="5400000">
+              <a:srgbClr val="C9A3AC">
+                <a:alpha val="45000"/>
+              </a:srgbClr>
+            </a:outerShdw>
+          </a:effectLst>
+        </p:spPr>
+      </p:sp>
+      <p:sp>
+        <p:nvSpPr>
+          <p:cNvPr id="19" name="Shape 16"/>
+          <p:cNvSpPr/>
+          <p:nvPr/>
+        </p:nvSpPr>
+        <p:spPr>
+          <a:xfrm>
+            <a:off x="6473952" y="2084832"/>
+            <a:ext cx="749808" cy="749808"/>
           </a:xfrm>
           <a:prstGeom prst="ellipse">
             <a:avLst/>
           </a:prstGeom>
           <a:solidFill>
-            <a:srgbClr val="2E7D32"/>
+            <a:srgbClr val="A4133C"/>
           </a:solidFill>
           <a:ln/>
         </p:spPr>
       </p:sp>
       <p:pic>
         <p:nvPicPr>
-          <p:cNvPr id="9" name="Image 1" descr="preencoded.png">    </p:cNvPr>
+          <p:cNvPr id="20" name="Image 1" descr="preencoded.png">    </p:cNvPr>
           <p:cNvPicPr>
             <a:picLocks noChangeAspect="1"/>
           </p:cNvPicPr>
@@ -12840,8 +13288,8 @@
         </p:blipFill>
         <p:spPr>
           <a:xfrm>
-            <a:off x="960120" y="2551176"/>
-            <a:ext cx="283464" cy="246888"/>
+            <a:off x="6693408" y="2304288"/>
+            <a:ext cx="310896" cy="310896"/>
           </a:xfrm>
           <a:prstGeom prst="rect">
             <a:avLst/>
@@ -12850,30 +13298,30 @@
       </p:pic>
       <p:sp>
         <p:nvSpPr>
-          <p:cNvPr id="10" name="Text 6"/>
-          <p:cNvSpPr/>
-          <p:nvPr/>
-        </p:nvSpPr>
-        <p:spPr>
-          <a:xfrm>
-            <a:off x="1508760" y="2350008"/>
-            <a:ext cx="4343400" cy="365760"/>
-          </a:xfrm>
-          <a:prstGeom prst="rect">
-            <a:avLst/>
-          </a:prstGeom>
-          <a:noFill/>
-          <a:ln/>
-        </p:spPr>
-        <p:txBody>
-          <a:bodyPr wrap="square" lIns="0" tIns="0" rIns="0" bIns="0" rtlCol="0" anchor="t"/>
-          <a:lstStyle/>
-          <a:p>
-            <a:pPr algn="l" indent="0" marL="0">
-              <a:buNone/>
-            </a:pPr>
-            <a:r>
-              <a:rPr lang="en-US" sz="1650" b="1" dirty="0">
+          <p:cNvPr id="21" name="Text 17"/>
+          <p:cNvSpPr/>
+          <p:nvPr/>
+        </p:nvSpPr>
+        <p:spPr>
+          <a:xfrm>
+            <a:off x="7434072" y="2084832"/>
+            <a:ext cx="4114800" cy="749808"/>
+          </a:xfrm>
+          <a:prstGeom prst="rect">
+            <a:avLst/>
+          </a:prstGeom>
+          <a:noFill/>
+          <a:ln/>
+        </p:spPr>
+        <p:txBody>
+          <a:bodyPr wrap="square" lIns="0" tIns="0" rIns="0" bIns="0" rtlCol="0" anchor="ctr"/>
+          <a:lstStyle/>
+          <a:p>
+            <a:pPr algn="l" indent="0" marL="0">
+              <a:buNone/>
+            </a:pPr>
+            <a:r>
+              <a:rPr lang="en-US" sz="2200" b="1" dirty="0">
                 <a:solidFill>
                   <a:srgbClr val="2B2B33"/>
                 </a:solidFill>
@@ -12881,22 +13329,22 @@
                 <a:ea typeface="Cambria" pitchFamily="34" charset="-122"/>
                 <a:cs typeface="Cambria" pitchFamily="34" charset="-120"/>
               </a:rPr>
-              <a:t>LMWH (enoxaparin)</a:t>
-            </a:r>
-            <a:endParaRPr lang="en-US" sz="1650" dirty="0"/>
-          </a:p>
-        </p:txBody>
-      </p:sp>
-      <p:sp>
-        <p:nvSpPr>
-          <p:cNvPr id="11" name="Text 7"/>
-          <p:cNvSpPr/>
-          <p:nvPr/>
-        </p:nvSpPr>
-        <p:spPr>
-          <a:xfrm>
-            <a:off x="1508760" y="2706624"/>
-            <a:ext cx="4389120" cy="685800"/>
+              <a:t>Valvular AF</a:t>
+            </a:r>
+            <a:endParaRPr lang="en-US" sz="2200" dirty="0"/>
+          </a:p>
+        </p:txBody>
+      </p:sp>
+      <p:sp>
+        <p:nvSpPr>
+          <p:cNvPr id="22" name="Text 18"/>
+          <p:cNvSpPr/>
+          <p:nvPr/>
+        </p:nvSpPr>
+        <p:spPr>
+          <a:xfrm>
+            <a:off x="6519672" y="2944368"/>
+            <a:ext cx="5029200" cy="274320"/>
           </a:xfrm>
           <a:prstGeom prst="rect">
             <a:avLst/>
@@ -12909,13 +13357,10 @@
           <a:lstStyle/>
           <a:p>
             <a:pPr algn="l" indent="0" marL="0">
-              <a:lnSpc>
-                <a:spcPct val="108000"/>
-              </a:lnSpc>
-              <a:buNone/>
-            </a:pPr>
-            <a:r>
-              <a:rPr lang="en-US" sz="1250" dirty="0">
+              <a:buNone/>
+            </a:pPr>
+            <a:r>
+              <a:rPr lang="en-US" sz="1350" i="1" dirty="0">
                 <a:solidFill>
                   <a:srgbClr val="6B6B76"/>
                 </a:solidFill>
@@ -12923,66 +13368,49 @@
                 <a:ea typeface="Calibri" pitchFamily="34" charset="-122"/>
                 <a:cs typeface="Calibri" pitchFamily="34" charset="-120"/>
               </a:rPr>
-              <a:t>Does not cross the placenta — the agent of choice; weight-adjusted, monitor anti-Xa</a:t>
-            </a:r>
-            <a:endParaRPr lang="en-US" sz="1250" dirty="0"/>
-          </a:p>
-        </p:txBody>
-      </p:sp>
-      <p:sp>
-        <p:nvSpPr>
-          <p:cNvPr id="12" name="Shape 8"/>
-          <p:cNvSpPr/>
-          <p:nvPr/>
-        </p:nvSpPr>
-        <p:spPr>
-          <a:xfrm>
-            <a:off x="822960" y="3511296"/>
-            <a:ext cx="548640" cy="548640"/>
-          </a:xfrm>
-          <a:prstGeom prst="ellipse">
-            <a:avLst/>
+              <a:t>Agent depends on the valve lesion</a:t>
+            </a:r>
+            <a:endParaRPr lang="en-US" sz="1350" dirty="0"/>
+          </a:p>
+        </p:txBody>
+      </p:sp>
+      <p:sp>
+        <p:nvSpPr>
+          <p:cNvPr id="23" name="Shape 19"/>
+          <p:cNvSpPr/>
+          <p:nvPr/>
+        </p:nvSpPr>
+        <p:spPr>
+          <a:xfrm>
+            <a:off x="6473952" y="3246120"/>
+            <a:ext cx="4892040" cy="1170432"/>
+          </a:xfrm>
+          <a:prstGeom prst="roundRect">
+            <a:avLst>
+              <a:gd name="adj" fmla="val 7813"/>
+            </a:avLst>
           </a:prstGeom>
           <a:solidFill>
-            <a:srgbClr val="2E7D32"/>
+            <a:srgbClr val="590D22"/>
           </a:solidFill>
-          <a:ln/>
-        </p:spPr>
-      </p:sp>
-      <p:pic>
-        <p:nvPicPr>
-          <p:cNvPr id="13" name="Image 2" descr="preencoded.png">    </p:cNvPr>
-          <p:cNvPicPr>
-            <a:picLocks noChangeAspect="1"/>
-          </p:cNvPicPr>
-          <p:nvPr/>
-        </p:nvPicPr>
-        <p:blipFill>
-          <a:blip r:embed="rId3"/>
-          <a:stretch>
-            <a:fillRect/>
-          </a:stretch>
-        </p:blipFill>
-        <p:spPr>
-          <a:xfrm>
-            <a:off x="960120" y="3666744"/>
-            <a:ext cx="283464" cy="246888"/>
-          </a:xfrm>
-          <a:prstGeom prst="rect">
-            <a:avLst/>
-          </a:prstGeom>
-        </p:spPr>
-      </p:pic>
-      <p:sp>
-        <p:nvSpPr>
-          <p:cNvPr id="14" name="Text 9"/>
-          <p:cNvSpPr/>
-          <p:nvPr/>
-        </p:nvSpPr>
-        <p:spPr>
-          <a:xfrm>
-            <a:off x="1508760" y="3465576"/>
-            <a:ext cx="4343400" cy="365760"/>
+          <a:ln w="12700">
+            <a:solidFill>
+              <a:srgbClr val="FBD8DF"/>
+            </a:solidFill>
+            <a:prstDash val="solid"/>
+          </a:ln>
+        </p:spPr>
+      </p:sp>
+      <p:sp>
+        <p:nvSpPr>
+          <p:cNvPr id="24" name="Text 20"/>
+          <p:cNvSpPr/>
+          <p:nvPr/>
+        </p:nvSpPr>
+        <p:spPr>
+          <a:xfrm>
+            <a:off x="6720840" y="3410712"/>
+            <a:ext cx="4480560" cy="274320"/>
           </a:xfrm>
           <a:prstGeom prst="rect">
             <a:avLst/>
@@ -12998,30 +13426,30 @@
               <a:buNone/>
             </a:pPr>
             <a:r>
-              <a:rPr lang="en-US" sz="1650" b="1" dirty="0">
-                <a:solidFill>
-                  <a:srgbClr val="2B2B33"/>
+              <a:rPr lang="en-US" sz="1500" b="1" dirty="0">
+                <a:solidFill>
+                  <a:srgbClr val="FF4D6D"/>
                 </a:solidFill>
                 <a:latin typeface="Cambria" pitchFamily="34" charset="0"/>
                 <a:ea typeface="Cambria" pitchFamily="34" charset="-122"/>
                 <a:cs typeface="Cambria" pitchFamily="34" charset="-120"/>
               </a:rPr>
-              <a:t>Unfractionated heparin</a:t>
-            </a:r>
-            <a:endParaRPr lang="en-US" sz="1650" dirty="0"/>
-          </a:p>
-        </p:txBody>
-      </p:sp>
-      <p:sp>
-        <p:nvSpPr>
-          <p:cNvPr id="15" name="Text 10"/>
-          <p:cNvSpPr/>
-          <p:nvPr/>
-        </p:nvSpPr>
-        <p:spPr>
-          <a:xfrm>
-            <a:off x="1508760" y="3822192"/>
-            <a:ext cx="4389120" cy="685800"/>
+              <a:t>Mitral stenosis + AF</a:t>
+            </a:r>
+            <a:endParaRPr lang="en-US" sz="1500" dirty="0"/>
+          </a:p>
+        </p:txBody>
+      </p:sp>
+      <p:sp>
+        <p:nvSpPr>
+          <p:cNvPr id="25" name="Text 21"/>
+          <p:cNvSpPr/>
+          <p:nvPr/>
+        </p:nvSpPr>
+        <p:spPr>
+          <a:xfrm>
+            <a:off x="6720840" y="3758184"/>
+            <a:ext cx="4434840" cy="594360"/>
           </a:xfrm>
           <a:prstGeom prst="rect">
             <a:avLst/>
@@ -13035,518 +13463,166 @@
           <a:p>
             <a:pPr algn="l" indent="0" marL="0">
               <a:lnSpc>
-                <a:spcPct val="108000"/>
+                <a:spcPct val="105000"/>
               </a:lnSpc>
               <a:buNone/>
             </a:pPr>
             <a:r>
-              <a:rPr lang="en-US" sz="1250" dirty="0">
-                <a:solidFill>
-                  <a:srgbClr val="6B6B76"/>
+              <a:rPr lang="en-US" sz="1300" dirty="0">
+                <a:solidFill>
+                  <a:srgbClr val="FBD8DF"/>
                 </a:solidFill>
                 <a:latin typeface="Calibri" pitchFamily="34" charset="0"/>
                 <a:ea typeface="Calibri" pitchFamily="34" charset="-122"/>
                 <a:cs typeface="Calibri" pitchFamily="34" charset="-120"/>
               </a:rPr>
-              <a:t>Also placenta-safe; useful peri-delivery — short-acting &amp; reversible</a:t>
-            </a:r>
-            <a:endParaRPr lang="en-US" sz="1250" dirty="0"/>
-          </a:p>
-        </p:txBody>
-      </p:sp>
-      <p:sp>
-        <p:nvSpPr>
-          <p:cNvPr id="16" name="Shape 11"/>
-          <p:cNvSpPr/>
-          <p:nvPr/>
-        </p:nvSpPr>
-        <p:spPr>
-          <a:xfrm>
-            <a:off x="6172200" y="1783080"/>
-            <a:ext cx="5532120" cy="2971800"/>
+              <a:t>Warfarin — the only proven oral anticoagulant to date</a:t>
+            </a:r>
+            <a:endParaRPr lang="en-US" sz="1300" dirty="0"/>
+          </a:p>
+        </p:txBody>
+      </p:sp>
+      <p:sp>
+        <p:nvSpPr>
+          <p:cNvPr id="26" name="Shape 22"/>
+          <p:cNvSpPr/>
+          <p:nvPr/>
+        </p:nvSpPr>
+        <p:spPr>
+          <a:xfrm>
+            <a:off x="6473952" y="4544568"/>
+            <a:ext cx="4892040" cy="1170432"/>
           </a:xfrm>
           <a:prstGeom prst="roundRect">
             <a:avLst>
-              <a:gd name="adj" fmla="val 3692"/>
+              <a:gd name="adj" fmla="val 7813"/>
             </a:avLst>
           </a:prstGeom>
           <a:solidFill>
-            <a:srgbClr val="590D22"/>
+            <a:srgbClr val="FFFFFF"/>
           </a:solidFill>
-          <a:ln/>
-          <a:effectLst>
-            <a:outerShdw sx="100000" sy="100000" kx="0" ky="0" algn="bl" rotWithShape="0" blurRad="127000" dist="50800" dir="5400000">
-              <a:srgbClr val="C9A3AC">
-                <a:alpha val="45000"/>
-              </a:srgbClr>
-            </a:outerShdw>
-          </a:effectLst>
-        </p:spPr>
-      </p:sp>
-      <p:sp>
-        <p:nvSpPr>
-          <p:cNvPr id="17" name="Text 12"/>
-          <p:cNvSpPr/>
-          <p:nvPr/>
-        </p:nvSpPr>
-        <p:spPr>
-          <a:xfrm>
-            <a:off x="6492240" y="2011680"/>
-            <a:ext cx="4846320" cy="274320"/>
-          </a:xfrm>
-          <a:prstGeom prst="rect">
-            <a:avLst/>
-          </a:prstGeom>
-          <a:noFill/>
-          <a:ln/>
-        </p:spPr>
-        <p:txBody>
-          <a:bodyPr wrap="square" rtlCol="0" anchor="t"/>
-          <a:lstStyle/>
-          <a:p>
-            <a:pPr algn="l" indent="0" marL="0">
-              <a:buNone/>
-            </a:pPr>
-            <a:r>
-              <a:rPr lang="en-US" sz="1300" b="1" spc="150" kern="0" dirty="0">
-                <a:solidFill>
-                  <a:srgbClr val="FF4D6D"/>
+          <a:ln w="12700">
+            <a:solidFill>
+              <a:srgbClr val="FBD8DF"/>
+            </a:solidFill>
+            <a:prstDash val="solid"/>
+          </a:ln>
+        </p:spPr>
+      </p:sp>
+      <p:sp>
+        <p:nvSpPr>
+          <p:cNvPr id="27" name="Text 23"/>
+          <p:cNvSpPr/>
+          <p:nvPr/>
+        </p:nvSpPr>
+        <p:spPr>
+          <a:xfrm>
+            <a:off x="6720840" y="4709160"/>
+            <a:ext cx="4480560" cy="274320"/>
+          </a:xfrm>
+          <a:prstGeom prst="rect">
+            <a:avLst/>
+          </a:prstGeom>
+          <a:noFill/>
+          <a:ln/>
+        </p:spPr>
+        <p:txBody>
+          <a:bodyPr wrap="square" lIns="0" tIns="0" rIns="0" bIns="0" rtlCol="0" anchor="t"/>
+          <a:lstStyle/>
+          <a:p>
+            <a:pPr algn="l" indent="0" marL="0">
+              <a:buNone/>
+            </a:pPr>
+            <a:r>
+              <a:rPr lang="en-US" sz="1500" b="1" dirty="0">
+                <a:solidFill>
+                  <a:srgbClr val="A4133C"/>
+                </a:solidFill>
+                <a:latin typeface="Cambria" pitchFamily="34" charset="0"/>
+                <a:ea typeface="Cambria" pitchFamily="34" charset="-122"/>
+                <a:cs typeface="Cambria" pitchFamily="34" charset="-120"/>
+              </a:rPr>
+              <a:t>Other valve disease + AF</a:t>
+            </a:r>
+            <a:endParaRPr lang="en-US" sz="1500" dirty="0"/>
+          </a:p>
+        </p:txBody>
+      </p:sp>
+      <p:sp>
+        <p:nvSpPr>
+          <p:cNvPr id="28" name="Text 24"/>
+          <p:cNvSpPr/>
+          <p:nvPr/>
+        </p:nvSpPr>
+        <p:spPr>
+          <a:xfrm>
+            <a:off x="6720840" y="5056632"/>
+            <a:ext cx="4434840" cy="594360"/>
+          </a:xfrm>
+          <a:prstGeom prst="rect">
+            <a:avLst/>
+          </a:prstGeom>
+          <a:noFill/>
+          <a:ln/>
+        </p:spPr>
+        <p:txBody>
+          <a:bodyPr wrap="square" lIns="0" tIns="0" rIns="0" bIns="0" rtlCol="0" anchor="t"/>
+          <a:lstStyle/>
+          <a:p>
+            <a:pPr algn="l" indent="0" marL="0">
+              <a:lnSpc>
+                <a:spcPct val="105000"/>
+              </a:lnSpc>
+              <a:buNone/>
+            </a:pPr>
+            <a:r>
+              <a:rPr lang="en-US" sz="1300" dirty="0">
+                <a:solidFill>
+                  <a:srgbClr val="2B2B33"/>
                 </a:solidFill>
                 <a:latin typeface="Calibri" pitchFamily="34" charset="0"/>
                 <a:ea typeface="Calibri" pitchFamily="34" charset="-122"/>
                 <a:cs typeface="Calibri" pitchFamily="34" charset="-120"/>
               </a:rPr>
-              <a:t>✕  </a:t>
-            </a:r>
-            <a:pPr algn="l" indent="0" marL="0">
-              <a:buNone/>
-            </a:pPr>
-            <a:r>
-              <a:rPr lang="en-US" sz="1300" b="1" spc="150" kern="0" dirty="0">
-                <a:solidFill>
-                  <a:srgbClr val="FFFFFF"/>
+              <a:t>Non-coumadin agents (DOACs) supported — ACC/AHA guidelines (registry data)</a:t>
+            </a:r>
+            <a:endParaRPr lang="en-US" sz="1300" dirty="0"/>
+          </a:p>
+        </p:txBody>
+      </p:sp>
+      <p:sp>
+        <p:nvSpPr>
+          <p:cNvPr id="29" name="Text 25"/>
+          <p:cNvSpPr/>
+          <p:nvPr/>
+        </p:nvSpPr>
+        <p:spPr>
+          <a:xfrm>
+            <a:off x="11277295" y="6355080"/>
+            <a:ext cx="548640" cy="320040"/>
+          </a:xfrm>
+          <a:prstGeom prst="rect">
+            <a:avLst/>
+          </a:prstGeom>
+          <a:noFill/>
+          <a:ln/>
+        </p:spPr>
+        <p:txBody>
+          <a:bodyPr wrap="square" rtlCol="0" anchor="t"/>
+          <a:lstStyle/>
+          <a:p>
+            <a:pPr algn="r" indent="0" marL="0">
+              <a:buNone/>
+            </a:pPr>
+            <a:r>
+              <a:rPr lang="en-US" sz="1100" b="1" dirty="0">
+                <a:solidFill>
+                  <a:srgbClr val="6B6B76"/>
                 </a:solidFill>
                 <a:latin typeface="Calibri" pitchFamily="34" charset="0"/>
                 <a:ea typeface="Calibri" pitchFamily="34" charset="-122"/>
                 <a:cs typeface="Calibri" pitchFamily="34" charset="-120"/>
               </a:rPr>
-              <a:t>AVOID</a:t>
-            </a:r>
-            <a:endParaRPr lang="en-US" sz="1300" dirty="0"/>
-          </a:p>
-        </p:txBody>
-      </p:sp>
-      <p:sp>
-        <p:nvSpPr>
-          <p:cNvPr id="18" name="Shape 13"/>
-          <p:cNvSpPr/>
-          <p:nvPr/>
-        </p:nvSpPr>
-        <p:spPr>
-          <a:xfrm>
-            <a:off x="6492240" y="2395728"/>
-            <a:ext cx="548640" cy="548640"/>
-          </a:xfrm>
-          <a:prstGeom prst="ellipse">
-            <a:avLst/>
-          </a:prstGeom>
-          <a:solidFill>
-            <a:srgbClr val="A4133C"/>
-          </a:solidFill>
-          <a:ln/>
-        </p:spPr>
-      </p:sp>
-      <p:pic>
-        <p:nvPicPr>
-          <p:cNvPr id="19" name="Image 3" descr="preencoded.png">    </p:cNvPr>
-          <p:cNvPicPr>
-            <a:picLocks noChangeAspect="1"/>
-          </p:cNvPicPr>
-          <p:nvPr/>
-        </p:nvPicPr>
-        <p:blipFill>
-          <a:blip r:embed="rId4"/>
-          <a:stretch>
-            <a:fillRect/>
-          </a:stretch>
-        </p:blipFill>
-        <p:spPr>
-          <a:xfrm>
-            <a:off x="6638544" y="2551176"/>
-            <a:ext cx="256032" cy="256032"/>
-          </a:xfrm>
-          <a:prstGeom prst="rect">
-            <a:avLst/>
-          </a:prstGeom>
-        </p:spPr>
-      </p:pic>
-      <p:sp>
-        <p:nvSpPr>
-          <p:cNvPr id="20" name="Text 14"/>
-          <p:cNvSpPr/>
-          <p:nvPr/>
-        </p:nvSpPr>
-        <p:spPr>
-          <a:xfrm>
-            <a:off x="7178040" y="2350008"/>
-            <a:ext cx="4297680" cy="365760"/>
-          </a:xfrm>
-          <a:prstGeom prst="rect">
-            <a:avLst/>
-          </a:prstGeom>
-          <a:noFill/>
-          <a:ln/>
-        </p:spPr>
-        <p:txBody>
-          <a:bodyPr wrap="square" lIns="0" tIns="0" rIns="0" bIns="0" rtlCol="0" anchor="t"/>
-          <a:lstStyle/>
-          <a:p>
-            <a:pPr algn="l" indent="0" marL="0">
-              <a:buNone/>
-            </a:pPr>
-            <a:r>
-              <a:rPr lang="en-US" sz="1650" b="1" dirty="0">
-                <a:solidFill>
-                  <a:srgbClr val="FFFFFF"/>
-                </a:solidFill>
-                <a:latin typeface="Cambria" pitchFamily="34" charset="0"/>
-                <a:ea typeface="Cambria" pitchFamily="34" charset="-122"/>
-                <a:cs typeface="Cambria" pitchFamily="34" charset="-120"/>
-              </a:rPr>
-              <a:t>Warfarin (VKA)</a:t>
-            </a:r>
-            <a:endParaRPr lang="en-US" sz="1650" dirty="0"/>
-          </a:p>
-        </p:txBody>
-      </p:sp>
-      <p:sp>
-        <p:nvSpPr>
-          <p:cNvPr id="21" name="Text 15"/>
-          <p:cNvSpPr/>
-          <p:nvPr/>
-        </p:nvSpPr>
-        <p:spPr>
-          <a:xfrm>
-            <a:off x="7178040" y="2706624"/>
-            <a:ext cx="4343400" cy="685800"/>
-          </a:xfrm>
-          <a:prstGeom prst="rect">
-            <a:avLst/>
-          </a:prstGeom>
-          <a:noFill/>
-          <a:ln/>
-        </p:spPr>
-        <p:txBody>
-          <a:bodyPr wrap="square" lIns="0" tIns="0" rIns="0" bIns="0" rtlCol="0" anchor="t"/>
-          <a:lstStyle/>
-          <a:p>
-            <a:pPr algn="l" indent="0" marL="0">
-              <a:lnSpc>
-                <a:spcPct val="108000"/>
-              </a:lnSpc>
-              <a:buNone/>
-            </a:pPr>
-            <a:r>
-              <a:rPr lang="en-US" sz="1250" dirty="0">
-                <a:solidFill>
-                  <a:srgbClr val="FBD8DF"/>
-                </a:solidFill>
-                <a:latin typeface="Calibri" pitchFamily="34" charset="0"/>
-                <a:ea typeface="Calibri" pitchFamily="34" charset="-122"/>
-                <a:cs typeface="Calibri" pitchFamily="34" charset="-120"/>
-              </a:rPr>
-              <a:t>Teratogenic — embryopathy at weeks 6–12 and fetal bleeding near term</a:t>
-            </a:r>
-            <a:endParaRPr lang="en-US" sz="1250" dirty="0"/>
-          </a:p>
-        </p:txBody>
-      </p:sp>
-      <p:sp>
-        <p:nvSpPr>
-          <p:cNvPr id="22" name="Shape 16"/>
-          <p:cNvSpPr/>
-          <p:nvPr/>
-        </p:nvSpPr>
-        <p:spPr>
-          <a:xfrm>
-            <a:off x="6492240" y="3511296"/>
-            <a:ext cx="548640" cy="548640"/>
-          </a:xfrm>
-          <a:prstGeom prst="ellipse">
-            <a:avLst/>
-          </a:prstGeom>
-          <a:solidFill>
-            <a:srgbClr val="A4133C"/>
-          </a:solidFill>
-          <a:ln/>
-        </p:spPr>
-      </p:sp>
-      <p:pic>
-        <p:nvPicPr>
-          <p:cNvPr id="23" name="Image 4" descr="preencoded.png">    </p:cNvPr>
-          <p:cNvPicPr>
-            <a:picLocks noChangeAspect="1"/>
-          </p:cNvPicPr>
-          <p:nvPr/>
-        </p:nvPicPr>
-        <p:blipFill>
-          <a:blip r:embed="rId5"/>
-          <a:stretch>
-            <a:fillRect/>
-          </a:stretch>
-        </p:blipFill>
-        <p:spPr>
-          <a:xfrm>
-            <a:off x="6638544" y="3666744"/>
-            <a:ext cx="256032" cy="256032"/>
-          </a:xfrm>
-          <a:prstGeom prst="rect">
-            <a:avLst/>
-          </a:prstGeom>
-        </p:spPr>
-      </p:pic>
-      <p:sp>
-        <p:nvSpPr>
-          <p:cNvPr id="24" name="Text 17"/>
-          <p:cNvSpPr/>
-          <p:nvPr/>
-        </p:nvSpPr>
-        <p:spPr>
-          <a:xfrm>
-            <a:off x="7178040" y="3465576"/>
-            <a:ext cx="4297680" cy="365760"/>
-          </a:xfrm>
-          <a:prstGeom prst="rect">
-            <a:avLst/>
-          </a:prstGeom>
-          <a:noFill/>
-          <a:ln/>
-        </p:spPr>
-        <p:txBody>
-          <a:bodyPr wrap="square" lIns="0" tIns="0" rIns="0" bIns="0" rtlCol="0" anchor="t"/>
-          <a:lstStyle/>
-          <a:p>
-            <a:pPr algn="l" indent="0" marL="0">
-              <a:buNone/>
-            </a:pPr>
-            <a:r>
-              <a:rPr lang="en-US" sz="1650" b="1" dirty="0">
-                <a:solidFill>
-                  <a:srgbClr val="FFFFFF"/>
-                </a:solidFill>
-                <a:latin typeface="Cambria" pitchFamily="34" charset="0"/>
-                <a:ea typeface="Cambria" pitchFamily="34" charset="-122"/>
-                <a:cs typeface="Cambria" pitchFamily="34" charset="-120"/>
-              </a:rPr>
-              <a:t>DOACs</a:t>
-            </a:r>
-            <a:endParaRPr lang="en-US" sz="1650" dirty="0"/>
-          </a:p>
-        </p:txBody>
-      </p:sp>
-      <p:sp>
-        <p:nvSpPr>
-          <p:cNvPr id="25" name="Text 18"/>
-          <p:cNvSpPr/>
-          <p:nvPr/>
-        </p:nvSpPr>
-        <p:spPr>
-          <a:xfrm>
-            <a:off x="7178040" y="3822192"/>
-            <a:ext cx="4343400" cy="685800"/>
-          </a:xfrm>
-          <a:prstGeom prst="rect">
-            <a:avLst/>
-          </a:prstGeom>
-          <a:noFill/>
-          <a:ln/>
-        </p:spPr>
-        <p:txBody>
-          <a:bodyPr wrap="square" lIns="0" tIns="0" rIns="0" bIns="0" rtlCol="0" anchor="t"/>
-          <a:lstStyle/>
-          <a:p>
-            <a:pPr algn="l" indent="0" marL="0">
-              <a:lnSpc>
-                <a:spcPct val="108000"/>
-              </a:lnSpc>
-              <a:buNone/>
-            </a:pPr>
-            <a:r>
-              <a:rPr lang="en-US" sz="1250" dirty="0">
-                <a:solidFill>
-                  <a:srgbClr val="FBD8DF"/>
-                </a:solidFill>
-                <a:latin typeface="Calibri" pitchFamily="34" charset="0"/>
-                <a:ea typeface="Calibri" pitchFamily="34" charset="-122"/>
-                <a:cs typeface="Calibri" pitchFamily="34" charset="-120"/>
-              </a:rPr>
-              <a:t>Not recommended — cross the placenta with limited safety data</a:t>
-            </a:r>
-            <a:endParaRPr lang="en-US" sz="1250" dirty="0"/>
-          </a:p>
-        </p:txBody>
-      </p:sp>
-      <p:sp>
-        <p:nvSpPr>
-          <p:cNvPr id="26" name="Shape 19"/>
-          <p:cNvSpPr/>
-          <p:nvPr/>
-        </p:nvSpPr>
-        <p:spPr>
-          <a:xfrm>
-            <a:off x="502920" y="4937760"/>
-            <a:ext cx="11183112" cy="1051560"/>
-          </a:xfrm>
-          <a:prstGeom prst="roundRect">
-            <a:avLst>
-              <a:gd name="adj" fmla="val 10435"/>
-            </a:avLst>
-          </a:prstGeom>
-          <a:solidFill>
-            <a:srgbClr val="FBD8DF"/>
-          </a:solidFill>
-          <a:ln/>
-        </p:spPr>
-      </p:sp>
-      <p:sp>
-        <p:nvSpPr>
-          <p:cNvPr id="27" name="Text 20"/>
-          <p:cNvSpPr/>
-          <p:nvPr/>
-        </p:nvSpPr>
-        <p:spPr>
-          <a:xfrm>
-            <a:off x="914400" y="5084064"/>
-            <a:ext cx="10424160" cy="365760"/>
-          </a:xfrm>
-          <a:prstGeom prst="rect">
-            <a:avLst/>
-          </a:prstGeom>
-          <a:noFill/>
-          <a:ln/>
-        </p:spPr>
-        <p:txBody>
-          <a:bodyPr wrap="square" lIns="0" tIns="0" rIns="0" bIns="0" rtlCol="0" anchor="ctr"/>
-          <a:lstStyle/>
-          <a:p>
-            <a:pPr algn="l" indent="0" marL="0">
-              <a:buNone/>
-            </a:pPr>
-            <a:r>
-              <a:rPr lang="en-US" sz="1350" b="1" dirty="0">
-                <a:solidFill>
-                  <a:srgbClr val="A4133C"/>
-                </a:solidFill>
-                <a:latin typeface="Calibri" pitchFamily="34" charset="0"/>
-                <a:ea typeface="Calibri" pitchFamily="34" charset="-122"/>
-                <a:cs typeface="Calibri" pitchFamily="34" charset="-120"/>
-              </a:rPr>
-              <a:t>Peri-delivery   </a:t>
-            </a:r>
-            <a:pPr algn="l" indent="0" marL="0">
-              <a:buNone/>
-            </a:pPr>
-            <a:r>
-              <a:rPr lang="en-US" sz="1350" dirty="0">
-                <a:solidFill>
-                  <a:srgbClr val="2B2B33"/>
-                </a:solidFill>
-                <a:latin typeface="Calibri" pitchFamily="34" charset="0"/>
-                <a:ea typeface="Calibri" pitchFamily="34" charset="-122"/>
-                <a:cs typeface="Calibri" pitchFamily="34" charset="-120"/>
-              </a:rPr>
-              <a:t>switch LMWH → UFH (or briefly hold) to allow neuraxial anaesthesia and limit bleeding.</a:t>
-            </a:r>
-            <a:endParaRPr lang="en-US" sz="1350" dirty="0"/>
-          </a:p>
-        </p:txBody>
-      </p:sp>
-      <p:sp>
-        <p:nvSpPr>
-          <p:cNvPr id="28" name="Text 21"/>
-          <p:cNvSpPr/>
-          <p:nvPr/>
-        </p:nvSpPr>
-        <p:spPr>
-          <a:xfrm>
-            <a:off x="914400" y="5468112"/>
-            <a:ext cx="10607040" cy="365760"/>
-          </a:xfrm>
-          <a:prstGeom prst="rect">
-            <a:avLst/>
-          </a:prstGeom>
-          <a:noFill/>
-          <a:ln/>
-        </p:spPr>
-        <p:txBody>
-          <a:bodyPr wrap="square" lIns="0" tIns="0" rIns="0" bIns="0" rtlCol="0" anchor="ctr"/>
-          <a:lstStyle/>
-          <a:p>
-            <a:pPr algn="l" indent="0" marL="0">
-              <a:buNone/>
-            </a:pPr>
-            <a:r>
-              <a:rPr lang="en-US" sz="1350" b="1" dirty="0">
-                <a:solidFill>
-                  <a:srgbClr val="A4133C"/>
-                </a:solidFill>
-                <a:latin typeface="Calibri" pitchFamily="34" charset="0"/>
-                <a:ea typeface="Calibri" pitchFamily="34" charset="-122"/>
-                <a:cs typeface="Calibri" pitchFamily="34" charset="-120"/>
-              </a:rPr>
-              <a:t>Breastfeeding   </a:t>
-            </a:r>
-            <a:pPr algn="l" indent="0" marL="0">
-              <a:buNone/>
-            </a:pPr>
-            <a:r>
-              <a:rPr lang="en-US" sz="1350" dirty="0">
-                <a:solidFill>
-                  <a:srgbClr val="2B2B33"/>
-                </a:solidFill>
-                <a:latin typeface="Calibri" pitchFamily="34" charset="0"/>
-                <a:ea typeface="Calibri" pitchFamily="34" charset="-122"/>
-                <a:cs typeface="Calibri" pitchFamily="34" charset="-120"/>
-              </a:rPr>
-              <a:t>warfarin, LMWH and UFH are compatible; DOACs are avoided. Plan with a specialist team.</a:t>
-            </a:r>
-            <a:endParaRPr lang="en-US" sz="1350" dirty="0"/>
-          </a:p>
-        </p:txBody>
-      </p:sp>
-      <p:sp>
-        <p:nvSpPr>
-          <p:cNvPr id="29" name="Text 22"/>
-          <p:cNvSpPr/>
-          <p:nvPr/>
-        </p:nvSpPr>
-        <p:spPr>
-          <a:xfrm>
-            <a:off x="11277295" y="6355080"/>
-            <a:ext cx="548640" cy="320040"/>
-          </a:xfrm>
-          <a:prstGeom prst="rect">
-            <a:avLst/>
-          </a:prstGeom>
-          <a:noFill/>
-          <a:ln/>
-        </p:spPr>
-        <p:txBody>
-          <a:bodyPr wrap="square" rtlCol="0" anchor="t"/>
-          <a:lstStyle/>
-          <a:p>
-            <a:pPr algn="r" indent="0" marL="0">
-              <a:buNone/>
-            </a:pPr>
-            <a:r>
-              <a:rPr lang="en-US" sz="1100" b="1" dirty="0">
-                <a:solidFill>
-                  <a:srgbClr val="6B6B76"/>
-                </a:solidFill>
-                <a:latin typeface="Calibri" pitchFamily="34" charset="0"/>
-                <a:ea typeface="Calibri" pitchFamily="34" charset="-122"/>
-                <a:cs typeface="Calibri" pitchFamily="34" charset="-120"/>
-              </a:rPr>
               <a:t>17</a:t>
             </a:r>
             <a:endParaRPr lang="en-US" sz="1100" dirty="0"/>
@@ -13555,7 +13631,7 @@
       </p:sp>
       <p:sp>
         <p:nvSpPr>
-          <p:cNvPr id="30" name="Text 23"/>
+          <p:cNvPr id="30" name="Text 26"/>
           <p:cNvSpPr/>
           <p:nvPr/>
         </p:nvSpPr>
@@ -13745,7 +13821,7 @@
                 <a:ea typeface="Cambria" pitchFamily="34" charset="-122"/>
                 <a:cs typeface="Cambria" pitchFamily="34" charset="-120"/>
               </a:rPr>
-              <a:t>Rhythm &amp; Rate Control in Pregnancy</a:t>
+              <a:t>Anticoagulation in Pregnancy</a:t>
             </a:r>
             <a:endParaRPr lang="en-US" sz="3000" dirty="0"/>
           </a:p>
@@ -13760,11 +13836,11 @@
         <p:spPr>
           <a:xfrm>
             <a:off x="502920" y="1783080"/>
-            <a:ext cx="5532120" cy="4206240"/>
+            <a:ext cx="5532120" cy="2971800"/>
           </a:xfrm>
           <a:prstGeom prst="roundRect">
             <a:avLst>
-              <a:gd name="adj" fmla="val 2609"/>
+              <a:gd name="adj" fmla="val 3692"/>
             </a:avLst>
           </a:prstGeom>
           <a:solidFill>
@@ -13793,7 +13869,7 @@
         </p:nvSpPr>
         <p:spPr>
           <a:xfrm>
-            <a:off x="868680" y="2057400"/>
+            <a:off x="822960" y="2011680"/>
             <a:ext cx="4846320" cy="274320"/>
           </a:xfrm>
           <a:prstGeom prst="rect">
@@ -13832,7 +13908,7 @@
                 <a:ea typeface="Calibri" pitchFamily="34" charset="-122"/>
                 <a:cs typeface="Calibri" pitchFamily="34" charset="-120"/>
               </a:rPr>
-              <a:t>GENERALLY SAFE</a:t>
+              <a:t>PREFERRED</a:t>
             </a:r>
             <a:endParaRPr lang="en-US" sz="1300" dirty="0"/>
           </a:p>
@@ -13846,21 +13922,16 @@
         </p:nvSpPr>
         <p:spPr>
           <a:xfrm>
-            <a:off x="868680" y="2542032"/>
-            <a:ext cx="566928" cy="566928"/>
+            <a:off x="822960" y="2395728"/>
+            <a:ext cx="548640" cy="548640"/>
           </a:xfrm>
           <a:prstGeom prst="ellipse">
             <a:avLst/>
           </a:prstGeom>
           <a:solidFill>
-            <a:srgbClr val="FFFFFF"/>
+            <a:srgbClr val="2E7D32"/>
           </a:solidFill>
-          <a:ln w="12700">
-            <a:solidFill>
-              <a:srgbClr val="FBD8DF"/>
-            </a:solidFill>
-            <a:prstDash val="solid"/>
-          </a:ln>
+          <a:ln/>
         </p:spPr>
       </p:sp>
       <p:pic>
@@ -13879,8 +13950,8 @@
         </p:blipFill>
         <p:spPr>
           <a:xfrm>
-            <a:off x="1014984" y="2688336"/>
-            <a:ext cx="274320" cy="274320"/>
+            <a:off x="960120" y="2551176"/>
+            <a:ext cx="283464" cy="246888"/>
           </a:xfrm>
           <a:prstGeom prst="rect">
             <a:avLst/>
@@ -13895,8 +13966,8 @@
         </p:nvSpPr>
         <p:spPr>
           <a:xfrm>
-            <a:off x="1618488" y="2505456"/>
-            <a:ext cx="4233672" cy="292608"/>
+            <a:off x="1508760" y="2350008"/>
+            <a:ext cx="4343400" cy="365760"/>
           </a:xfrm>
           <a:prstGeom prst="rect">
             <a:avLst/>
@@ -13912,7 +13983,7 @@
               <a:buNone/>
             </a:pPr>
             <a:r>
-              <a:rPr lang="en-US" sz="1600" b="1" dirty="0">
+              <a:rPr lang="en-US" sz="1650" b="1" dirty="0">
                 <a:solidFill>
                   <a:srgbClr val="2B2B33"/>
                 </a:solidFill>
@@ -13920,9 +13991,9 @@
                 <a:ea typeface="Cambria" pitchFamily="34" charset="-122"/>
                 <a:cs typeface="Cambria" pitchFamily="34" charset="-120"/>
               </a:rPr>
-              <a:t>Beta-blockers</a:t>
-            </a:r>
-            <a:endParaRPr lang="en-US" sz="1600" dirty="0"/>
+              <a:t>LMWH (enoxaparin)</a:t>
+            </a:r>
+            <a:endParaRPr lang="en-US" sz="1650" dirty="0"/>
           </a:p>
         </p:txBody>
       </p:sp>
@@ -13934,8 +14005,8 @@
         </p:nvSpPr>
         <p:spPr>
           <a:xfrm>
-            <a:off x="1618488" y="2816352"/>
-            <a:ext cx="4233672" cy="365760"/>
+            <a:off x="1508760" y="2706624"/>
+            <a:ext cx="4389120" cy="685800"/>
           </a:xfrm>
           <a:prstGeom prst="rect">
             <a:avLst/>
@@ -13948,6 +14019,9 @@
           <a:lstStyle/>
           <a:p>
             <a:pPr algn="l" indent="0" marL="0">
+              <a:lnSpc>
+                <a:spcPct val="108000"/>
+              </a:lnSpc>
               <a:buNone/>
             </a:pPr>
             <a:r>
@@ -13959,7 +14033,7 @@
                 <a:ea typeface="Calibri" pitchFamily="34" charset="-122"/>
                 <a:cs typeface="Calibri" pitchFamily="34" charset="-120"/>
               </a:rPr>
-              <a:t>First-line rate control (metoprolol, bisoprolol) — avoid atenolol</a:t>
+              <a:t>Does not cross the placenta — the agent of choice; weight-adjusted, monitor anti-Xa</a:t>
             </a:r>
             <a:endParaRPr lang="en-US" sz="1250" dirty="0"/>
           </a:p>
@@ -13973,21 +14047,16 @@
         </p:nvSpPr>
         <p:spPr>
           <a:xfrm>
-            <a:off x="868680" y="3621024"/>
-            <a:ext cx="566928" cy="566928"/>
+            <a:off x="822960" y="3511296"/>
+            <a:ext cx="548640" cy="548640"/>
           </a:xfrm>
           <a:prstGeom prst="ellipse">
             <a:avLst/>
           </a:prstGeom>
           <a:solidFill>
-            <a:srgbClr val="FFFFFF"/>
+            <a:srgbClr val="2E7D32"/>
           </a:solidFill>
-          <a:ln w="12700">
-            <a:solidFill>
-              <a:srgbClr val="FBD8DF"/>
-            </a:solidFill>
-            <a:prstDash val="solid"/>
-          </a:ln>
+          <a:ln/>
         </p:spPr>
       </p:sp>
       <p:pic>
@@ -14006,8 +14075,8 @@
         </p:blipFill>
         <p:spPr>
           <a:xfrm>
-            <a:off x="1014984" y="3767328"/>
-            <a:ext cx="274320" cy="274320"/>
+            <a:off x="960120" y="3666744"/>
+            <a:ext cx="283464" cy="246888"/>
           </a:xfrm>
           <a:prstGeom prst="rect">
             <a:avLst/>
@@ -14022,8 +14091,8 @@
         </p:nvSpPr>
         <p:spPr>
           <a:xfrm>
-            <a:off x="1618488" y="3584448"/>
-            <a:ext cx="4233672" cy="292608"/>
+            <a:off x="1508760" y="3465576"/>
+            <a:ext cx="4343400" cy="365760"/>
           </a:xfrm>
           <a:prstGeom prst="rect">
             <a:avLst/>
@@ -14039,7 +14108,7 @@
               <a:buNone/>
             </a:pPr>
             <a:r>
-              <a:rPr lang="en-US" sz="1600" b="1" dirty="0">
+              <a:rPr lang="en-US" sz="1650" b="1" dirty="0">
                 <a:solidFill>
                   <a:srgbClr val="2B2B33"/>
                 </a:solidFill>
@@ -14047,9 +14116,9 @@
                 <a:ea typeface="Cambria" pitchFamily="34" charset="-122"/>
                 <a:cs typeface="Cambria" pitchFamily="34" charset="-120"/>
               </a:rPr>
-              <a:t>Digoxin</a:t>
-            </a:r>
-            <a:endParaRPr lang="en-US" sz="1600" dirty="0"/>
+              <a:t>Unfractionated heparin</a:t>
+            </a:r>
+            <a:endParaRPr lang="en-US" sz="1650" dirty="0"/>
           </a:p>
         </p:txBody>
       </p:sp>
@@ -14061,8 +14130,8 @@
         </p:nvSpPr>
         <p:spPr>
           <a:xfrm>
-            <a:off x="1618488" y="3895344"/>
-            <a:ext cx="4233672" cy="365760"/>
+            <a:off x="1508760" y="3822192"/>
+            <a:ext cx="4389120" cy="685800"/>
           </a:xfrm>
           <a:prstGeom prst="rect">
             <a:avLst/>
@@ -14075,6 +14144,9 @@
           <a:lstStyle/>
           <a:p>
             <a:pPr algn="l" indent="0" marL="0">
+              <a:lnSpc>
+                <a:spcPct val="108000"/>
+              </a:lnSpc>
               <a:buNone/>
             </a:pPr>
             <a:r>
@@ -14086,7 +14158,7 @@
                 <a:ea typeface="Calibri" pitchFamily="34" charset="-122"/>
                 <a:cs typeface="Calibri" pitchFamily="34" charset="-120"/>
               </a:rPr>
-              <a:t>Safe option for rate control</a:t>
+              <a:t>Also placenta-safe; useful peri-delivery — short-acting &amp; reversible</a:t>
             </a:r>
             <a:endParaRPr lang="en-US" sz="1250" dirty="0"/>
           </a:p>
@@ -14100,26 +14172,103 @@
         </p:nvSpPr>
         <p:spPr>
           <a:xfrm>
-            <a:off x="868680" y="4700016"/>
-            <a:ext cx="566928" cy="566928"/>
+            <a:off x="6172200" y="1783080"/>
+            <a:ext cx="5532120" cy="2971800"/>
+          </a:xfrm>
+          <a:prstGeom prst="roundRect">
+            <a:avLst>
+              <a:gd name="adj" fmla="val 3692"/>
+            </a:avLst>
+          </a:prstGeom>
+          <a:solidFill>
+            <a:srgbClr val="590D22"/>
+          </a:solidFill>
+          <a:ln/>
+          <a:effectLst>
+            <a:outerShdw sx="100000" sy="100000" kx="0" ky="0" algn="bl" rotWithShape="0" blurRad="127000" dist="50800" dir="5400000">
+              <a:srgbClr val="C9A3AC">
+                <a:alpha val="45000"/>
+              </a:srgbClr>
+            </a:outerShdw>
+          </a:effectLst>
+        </p:spPr>
+      </p:sp>
+      <p:sp>
+        <p:nvSpPr>
+          <p:cNvPr id="17" name="Text 12"/>
+          <p:cNvSpPr/>
+          <p:nvPr/>
+        </p:nvSpPr>
+        <p:spPr>
+          <a:xfrm>
+            <a:off x="6492240" y="2011680"/>
+            <a:ext cx="4846320" cy="274320"/>
+          </a:xfrm>
+          <a:prstGeom prst="rect">
+            <a:avLst/>
+          </a:prstGeom>
+          <a:noFill/>
+          <a:ln/>
+        </p:spPr>
+        <p:txBody>
+          <a:bodyPr wrap="square" rtlCol="0" anchor="t"/>
+          <a:lstStyle/>
+          <a:p>
+            <a:pPr algn="l" indent="0" marL="0">
+              <a:buNone/>
+            </a:pPr>
+            <a:r>
+              <a:rPr lang="en-US" sz="1300" b="1" spc="150" kern="0" dirty="0">
+                <a:solidFill>
+                  <a:srgbClr val="FF4D6D"/>
+                </a:solidFill>
+                <a:latin typeface="Calibri" pitchFamily="34" charset="0"/>
+                <a:ea typeface="Calibri" pitchFamily="34" charset="-122"/>
+                <a:cs typeface="Calibri" pitchFamily="34" charset="-120"/>
+              </a:rPr>
+              <a:t>✕  </a:t>
+            </a:r>
+            <a:pPr algn="l" indent="0" marL="0">
+              <a:buNone/>
+            </a:pPr>
+            <a:r>
+              <a:rPr lang="en-US" sz="1300" b="1" spc="150" kern="0" dirty="0">
+                <a:solidFill>
+                  <a:srgbClr val="FFFFFF"/>
+                </a:solidFill>
+                <a:latin typeface="Calibri" pitchFamily="34" charset="0"/>
+                <a:ea typeface="Calibri" pitchFamily="34" charset="-122"/>
+                <a:cs typeface="Calibri" pitchFamily="34" charset="-120"/>
+              </a:rPr>
+              <a:t>AVOID</a:t>
+            </a:r>
+            <a:endParaRPr lang="en-US" sz="1300" dirty="0"/>
+          </a:p>
+        </p:txBody>
+      </p:sp>
+      <p:sp>
+        <p:nvSpPr>
+          <p:cNvPr id="18" name="Shape 13"/>
+          <p:cNvSpPr/>
+          <p:nvPr/>
+        </p:nvSpPr>
+        <p:spPr>
+          <a:xfrm>
+            <a:off x="6492240" y="2395728"/>
+            <a:ext cx="548640" cy="548640"/>
           </a:xfrm>
           <a:prstGeom prst="ellipse">
             <a:avLst/>
           </a:prstGeom>
           <a:solidFill>
-            <a:srgbClr val="FFFFFF"/>
+            <a:srgbClr val="A4133C"/>
           </a:solidFill>
-          <a:ln w="12700">
-            <a:solidFill>
-              <a:srgbClr val="FBD8DF"/>
-            </a:solidFill>
-            <a:prstDash val="solid"/>
-          </a:ln>
+          <a:ln/>
         </p:spPr>
       </p:sp>
       <p:pic>
         <p:nvPicPr>
-          <p:cNvPr id="17" name="Image 3" descr="preencoded.png">    </p:cNvPr>
+          <p:cNvPr id="19" name="Image 3" descr="preencoded.png">    </p:cNvPr>
           <p:cNvPicPr>
             <a:picLocks noChangeAspect="1"/>
           </p:cNvPicPr>
@@ -14133,8 +14282,8 @@
         </p:blipFill>
         <p:spPr>
           <a:xfrm>
-            <a:off x="1014984" y="4846320"/>
-            <a:ext cx="274320" cy="274320"/>
+            <a:off x="6638544" y="2551176"/>
+            <a:ext cx="256032" cy="256032"/>
           </a:xfrm>
           <a:prstGeom prst="rect">
             <a:avLst/>
@@ -14143,14 +14292,14 @@
       </p:pic>
       <p:sp>
         <p:nvSpPr>
-          <p:cNvPr id="18" name="Text 12"/>
-          <p:cNvSpPr/>
-          <p:nvPr/>
-        </p:nvSpPr>
-        <p:spPr>
-          <a:xfrm>
-            <a:off x="1618488" y="4663440"/>
-            <a:ext cx="4233672" cy="292608"/>
+          <p:cNvPr id="20" name="Text 14"/>
+          <p:cNvSpPr/>
+          <p:nvPr/>
+        </p:nvSpPr>
+        <p:spPr>
+          <a:xfrm>
+            <a:off x="7178040" y="2350008"/>
+            <a:ext cx="4297680" cy="365760"/>
           </a:xfrm>
           <a:prstGeom prst="rect">
             <a:avLst/>
@@ -14166,30 +14315,30 @@
               <a:buNone/>
             </a:pPr>
             <a:r>
-              <a:rPr lang="en-US" sz="1600" b="1" dirty="0">
-                <a:solidFill>
-                  <a:srgbClr val="2B2B33"/>
+              <a:rPr lang="en-US" sz="1650" b="1" dirty="0">
+                <a:solidFill>
+                  <a:srgbClr val="FFFFFF"/>
                 </a:solidFill>
                 <a:latin typeface="Cambria" pitchFamily="34" charset="0"/>
                 <a:ea typeface="Cambria" pitchFamily="34" charset="-122"/>
                 <a:cs typeface="Cambria" pitchFamily="34" charset="-120"/>
               </a:rPr>
-              <a:t>Flecainide / sotalol</a:t>
-            </a:r>
-            <a:endParaRPr lang="en-US" sz="1600" dirty="0"/>
-          </a:p>
-        </p:txBody>
-      </p:sp>
-      <p:sp>
-        <p:nvSpPr>
-          <p:cNvPr id="19" name="Text 13"/>
-          <p:cNvSpPr/>
-          <p:nvPr/>
-        </p:nvSpPr>
-        <p:spPr>
-          <a:xfrm>
-            <a:off x="1618488" y="4974336"/>
-            <a:ext cx="4233672" cy="365760"/>
+              <a:t>Warfarin (VKA)</a:t>
+            </a:r>
+            <a:endParaRPr lang="en-US" sz="1650" dirty="0"/>
+          </a:p>
+        </p:txBody>
+      </p:sp>
+      <p:sp>
+        <p:nvSpPr>
+          <p:cNvPr id="21" name="Text 15"/>
+          <p:cNvSpPr/>
+          <p:nvPr/>
+        </p:nvSpPr>
+        <p:spPr>
+          <a:xfrm>
+            <a:off x="7178040" y="2706624"/>
+            <a:ext cx="4343400" cy="685800"/>
           </a:xfrm>
           <a:prstGeom prst="rect">
             <a:avLst/>
@@ -14202,18 +14351,21 @@
           <a:lstStyle/>
           <a:p>
             <a:pPr algn="l" indent="0" marL="0">
+              <a:lnSpc>
+                <a:spcPct val="108000"/>
+              </a:lnSpc>
               <a:buNone/>
             </a:pPr>
             <a:r>
               <a:rPr lang="en-US" sz="1250" dirty="0">
                 <a:solidFill>
-                  <a:srgbClr val="6B6B76"/>
+                  <a:srgbClr val="FBD8DF"/>
                 </a:solidFill>
                 <a:latin typeface="Calibri" pitchFamily="34" charset="0"/>
                 <a:ea typeface="Calibri" pitchFamily="34" charset="-122"/>
                 <a:cs typeface="Calibri" pitchFamily="34" charset="-120"/>
               </a:rPr>
-              <a:t>For rhythm control when needed</a:t>
+              <a:t>Teratogenic — embryopathy at weeks 6–12 and fetal bleeding near term</a:t>
             </a:r>
             <a:endParaRPr lang="en-US" sz="1250" dirty="0"/>
           </a:p>
@@ -14221,43 +14373,14 @@
       </p:sp>
       <p:sp>
         <p:nvSpPr>
-          <p:cNvPr id="20" name="Shape 14"/>
-          <p:cNvSpPr/>
-          <p:nvPr/>
-        </p:nvSpPr>
-        <p:spPr>
-          <a:xfrm>
-            <a:off x="6172200" y="1783080"/>
-            <a:ext cx="5532120" cy="2011680"/>
-          </a:xfrm>
-          <a:prstGeom prst="roundRect">
-            <a:avLst>
-              <a:gd name="adj" fmla="val 5455"/>
-            </a:avLst>
-          </a:prstGeom>
-          <a:solidFill>
-            <a:srgbClr val="590D22"/>
-          </a:solidFill>
-          <a:ln/>
-          <a:effectLst>
-            <a:outerShdw sx="100000" sy="100000" kx="0" ky="0" algn="bl" rotWithShape="0" blurRad="127000" dist="50800" dir="5400000">
-              <a:srgbClr val="C9A3AC">
-                <a:alpha val="45000"/>
-              </a:srgbClr>
-            </a:outerShdw>
-          </a:effectLst>
-        </p:spPr>
-      </p:sp>
-      <p:sp>
-        <p:nvSpPr>
-          <p:cNvPr id="21" name="Shape 15"/>
-          <p:cNvSpPr/>
-          <p:nvPr/>
-        </p:nvSpPr>
-        <p:spPr>
-          <a:xfrm>
-            <a:off x="6492240" y="2148840"/>
-            <a:ext cx="868680" cy="868680"/>
+          <p:cNvPr id="22" name="Shape 16"/>
+          <p:cNvSpPr/>
+          <p:nvPr/>
+        </p:nvSpPr>
+        <p:spPr>
+          <a:xfrm>
+            <a:off x="6492240" y="3511296"/>
+            <a:ext cx="548640" cy="548640"/>
           </a:xfrm>
           <a:prstGeom prst="ellipse">
             <a:avLst/>
@@ -14270,7 +14393,7 @@
       </p:sp>
       <p:pic>
         <p:nvPicPr>
-          <p:cNvPr id="22" name="Image 4" descr="preencoded.png">    </p:cNvPr>
+          <p:cNvPr id="23" name="Image 4" descr="preencoded.png">    </p:cNvPr>
           <p:cNvPicPr>
             <a:picLocks noChangeAspect="1"/>
           </p:cNvPicPr>
@@ -14284,8 +14407,8 @@
         </p:blipFill>
         <p:spPr>
           <a:xfrm>
-            <a:off x="6729984" y="2377440"/>
-            <a:ext cx="402336" cy="402336"/>
+            <a:off x="6638544" y="3666744"/>
+            <a:ext cx="256032" cy="256032"/>
           </a:xfrm>
           <a:prstGeom prst="rect">
             <a:avLst/>
@@ -14294,30 +14417,30 @@
       </p:pic>
       <p:sp>
         <p:nvSpPr>
-          <p:cNvPr id="23" name="Text 16"/>
-          <p:cNvSpPr/>
-          <p:nvPr/>
-        </p:nvSpPr>
-        <p:spPr>
-          <a:xfrm>
-            <a:off x="7498080" y="2194560"/>
-            <a:ext cx="4023360" cy="457200"/>
-          </a:xfrm>
-          <a:prstGeom prst="rect">
-            <a:avLst/>
-          </a:prstGeom>
-          <a:noFill/>
-          <a:ln/>
-        </p:spPr>
-        <p:txBody>
-          <a:bodyPr wrap="square" rtlCol="0" anchor="ctr"/>
-          <a:lstStyle/>
-          <a:p>
-            <a:pPr algn="l" indent="0" marL="0">
-              <a:buNone/>
-            </a:pPr>
-            <a:r>
-              <a:rPr lang="en-US" sz="2100" b="1" dirty="0">
+          <p:cNvPr id="24" name="Text 17"/>
+          <p:cNvSpPr/>
+          <p:nvPr/>
+        </p:nvSpPr>
+        <p:spPr>
+          <a:xfrm>
+            <a:off x="7178040" y="3465576"/>
+            <a:ext cx="4297680" cy="365760"/>
+          </a:xfrm>
+          <a:prstGeom prst="rect">
+            <a:avLst/>
+          </a:prstGeom>
+          <a:noFill/>
+          <a:ln/>
+        </p:spPr>
+        <p:txBody>
+          <a:bodyPr wrap="square" lIns="0" tIns="0" rIns="0" bIns="0" rtlCol="0" anchor="t"/>
+          <a:lstStyle/>
+          <a:p>
+            <a:pPr algn="l" indent="0" marL="0">
+              <a:buNone/>
+            </a:pPr>
+            <a:r>
+              <a:rPr lang="en-US" sz="1650" b="1" dirty="0">
                 <a:solidFill>
                   <a:srgbClr val="FFFFFF"/>
                 </a:solidFill>
@@ -14325,41 +14448,41 @@
                 <a:ea typeface="Cambria" pitchFamily="34" charset="-122"/>
                 <a:cs typeface="Cambria" pitchFamily="34" charset="-120"/>
               </a:rPr>
-              <a:t>Cardioversion</a:t>
-            </a:r>
-            <a:endParaRPr lang="en-US" sz="2100" dirty="0"/>
-          </a:p>
-        </p:txBody>
-      </p:sp>
-      <p:sp>
-        <p:nvSpPr>
-          <p:cNvPr id="24" name="Text 17"/>
-          <p:cNvSpPr/>
-          <p:nvPr/>
-        </p:nvSpPr>
-        <p:spPr>
-          <a:xfrm>
-            <a:off x="6537960" y="2852928"/>
-            <a:ext cx="5029200" cy="822960"/>
-          </a:xfrm>
-          <a:prstGeom prst="rect">
-            <a:avLst/>
-          </a:prstGeom>
-          <a:noFill/>
-          <a:ln/>
-        </p:spPr>
-        <p:txBody>
-          <a:bodyPr wrap="square" rtlCol="0" anchor="t"/>
+              <a:t>DOACs</a:t>
+            </a:r>
+            <a:endParaRPr lang="en-US" sz="1650" dirty="0"/>
+          </a:p>
+        </p:txBody>
+      </p:sp>
+      <p:sp>
+        <p:nvSpPr>
+          <p:cNvPr id="25" name="Text 18"/>
+          <p:cNvSpPr/>
+          <p:nvPr/>
+        </p:nvSpPr>
+        <p:spPr>
+          <a:xfrm>
+            <a:off x="7178040" y="3822192"/>
+            <a:ext cx="4343400" cy="685800"/>
+          </a:xfrm>
+          <a:prstGeom prst="rect">
+            <a:avLst/>
+          </a:prstGeom>
+          <a:noFill/>
+          <a:ln/>
+        </p:spPr>
+        <p:txBody>
+          <a:bodyPr wrap="square" lIns="0" tIns="0" rIns="0" bIns="0" rtlCol="0" anchor="t"/>
           <a:lstStyle/>
           <a:p>
             <a:pPr algn="l" indent="0" marL="0">
               <a:lnSpc>
-                <a:spcPct val="112000"/>
+                <a:spcPct val="108000"/>
               </a:lnSpc>
               <a:buNone/>
             </a:pPr>
             <a:r>
-              <a:rPr lang="en-US" sz="1400" dirty="0">
+              <a:rPr lang="en-US" sz="1250" dirty="0">
                 <a:solidFill>
                   <a:srgbClr val="FBD8DF"/>
                 </a:solidFill>
@@ -14367,72 +14490,60 @@
                 <a:ea typeface="Calibri" pitchFamily="34" charset="-122"/>
                 <a:cs typeface="Calibri" pitchFamily="34" charset="-120"/>
               </a:rPr>
-              <a:t>DC cardioversion is safe in all trimesters — perform with fetal monitoring.</a:t>
-            </a:r>
-            <a:endParaRPr lang="en-US" sz="1400" dirty="0"/>
-          </a:p>
-        </p:txBody>
-      </p:sp>
-      <p:sp>
-        <p:nvSpPr>
-          <p:cNvPr id="25" name="Shape 18"/>
-          <p:cNvSpPr/>
-          <p:nvPr/>
-        </p:nvSpPr>
-        <p:spPr>
-          <a:xfrm>
-            <a:off x="6172200" y="3977640"/>
-            <a:ext cx="5532120" cy="2011680"/>
+              <a:t>Not recommended — cross the placenta with limited safety data</a:t>
+            </a:r>
+            <a:endParaRPr lang="en-US" sz="1250" dirty="0"/>
+          </a:p>
+        </p:txBody>
+      </p:sp>
+      <p:sp>
+        <p:nvSpPr>
+          <p:cNvPr id="26" name="Shape 19"/>
+          <p:cNvSpPr/>
+          <p:nvPr/>
+        </p:nvSpPr>
+        <p:spPr>
+          <a:xfrm>
+            <a:off x="502920" y="4937760"/>
+            <a:ext cx="11183112" cy="1051560"/>
           </a:xfrm>
           <a:prstGeom prst="roundRect">
             <a:avLst>
-              <a:gd name="adj" fmla="val 5455"/>
+              <a:gd name="adj" fmla="val 10435"/>
             </a:avLst>
           </a:prstGeom>
           <a:solidFill>
-            <a:srgbClr val="FFF0F3"/>
+            <a:srgbClr val="FBD8DF"/>
           </a:solidFill>
-          <a:ln w="12700">
-            <a:solidFill>
-              <a:srgbClr val="FBD8DF"/>
-            </a:solidFill>
-            <a:prstDash val="solid"/>
-          </a:ln>
-          <a:effectLst>
-            <a:outerShdw sx="100000" sy="100000" kx="0" ky="0" algn="bl" rotWithShape="0" blurRad="127000" dist="50800" dir="5400000">
-              <a:srgbClr val="C9A3AC">
-                <a:alpha val="45000"/>
-              </a:srgbClr>
-            </a:outerShdw>
-          </a:effectLst>
-        </p:spPr>
-      </p:sp>
-      <p:sp>
-        <p:nvSpPr>
-          <p:cNvPr id="26" name="Text 19"/>
-          <p:cNvSpPr/>
-          <p:nvPr/>
-        </p:nvSpPr>
-        <p:spPr>
-          <a:xfrm>
-            <a:off x="6537960" y="4206240"/>
-            <a:ext cx="4937760" cy="274320"/>
-          </a:xfrm>
-          <a:prstGeom prst="rect">
-            <a:avLst/>
-          </a:prstGeom>
-          <a:noFill/>
-          <a:ln/>
-        </p:spPr>
-        <p:txBody>
-          <a:bodyPr wrap="square" rtlCol="0" anchor="t"/>
-          <a:lstStyle/>
-          <a:p>
-            <a:pPr algn="l" indent="0" marL="0">
-              <a:buNone/>
-            </a:pPr>
-            <a:r>
-              <a:rPr lang="en-US" sz="1300" b="1" spc="120" kern="0" dirty="0">
+          <a:ln/>
+        </p:spPr>
+      </p:sp>
+      <p:sp>
+        <p:nvSpPr>
+          <p:cNvPr id="27" name="Text 20"/>
+          <p:cNvSpPr/>
+          <p:nvPr/>
+        </p:nvSpPr>
+        <p:spPr>
+          <a:xfrm>
+            <a:off x="914400" y="5084064"/>
+            <a:ext cx="10424160" cy="365760"/>
+          </a:xfrm>
+          <a:prstGeom prst="rect">
+            <a:avLst/>
+          </a:prstGeom>
+          <a:noFill/>
+          <a:ln/>
+        </p:spPr>
+        <p:txBody>
+          <a:bodyPr wrap="square" lIns="0" tIns="0" rIns="0" bIns="0" rtlCol="0" anchor="ctr"/>
+          <a:lstStyle/>
+          <a:p>
+            <a:pPr algn="l" indent="0" marL="0">
+              <a:buNone/>
+            </a:pPr>
+            <a:r>
+              <a:rPr lang="en-US" sz="1350" b="1" dirty="0">
                 <a:solidFill>
                   <a:srgbClr val="A4133C"/>
                 </a:solidFill>
@@ -14440,133 +14551,74 @@
                 <a:ea typeface="Calibri" pitchFamily="34" charset="-122"/>
                 <a:cs typeface="Calibri" pitchFamily="34" charset="-120"/>
               </a:rPr>
-              <a:t>✕  </a:t>
-            </a:r>
-            <a:pPr algn="l" indent="0" marL="0">
-              <a:buNone/>
-            </a:pPr>
-            <a:r>
-              <a:rPr lang="en-US" sz="1300" b="1" spc="120" kern="0" dirty="0">
-                <a:solidFill>
-                  <a:srgbClr val="A4133C"/>
+              <a:t>Peri-delivery   </a:t>
+            </a:r>
+            <a:pPr algn="l" indent="0" marL="0">
+              <a:buNone/>
+            </a:pPr>
+            <a:r>
+              <a:rPr lang="en-US" sz="1350" dirty="0">
+                <a:solidFill>
+                  <a:srgbClr val="2B2B33"/>
                 </a:solidFill>
                 <a:latin typeface="Calibri" pitchFamily="34" charset="0"/>
                 <a:ea typeface="Calibri" pitchFamily="34" charset="-122"/>
                 <a:cs typeface="Calibri" pitchFamily="34" charset="-120"/>
               </a:rPr>
-              <a:t>USE WITH CAUTION / AVOID</a:t>
-            </a:r>
-            <a:endParaRPr lang="en-US" sz="1300" dirty="0"/>
-          </a:p>
-        </p:txBody>
-      </p:sp>
-      <p:sp>
-        <p:nvSpPr>
-          <p:cNvPr id="27" name="Text 20"/>
-          <p:cNvSpPr/>
-          <p:nvPr/>
-        </p:nvSpPr>
-        <p:spPr>
-          <a:xfrm>
-            <a:off x="6537960" y="4645152"/>
-            <a:ext cx="5029200" cy="594360"/>
-          </a:xfrm>
-          <a:prstGeom prst="rect">
-            <a:avLst/>
-          </a:prstGeom>
-          <a:noFill/>
-          <a:ln/>
-        </p:spPr>
-        <p:txBody>
-          <a:bodyPr wrap="square" lIns="0" tIns="0" rIns="0" bIns="0" rtlCol="0" anchor="t"/>
-          <a:lstStyle/>
-          <a:p>
-            <a:pPr algn="l" indent="0" marL="0">
-              <a:lnSpc>
-                <a:spcPct val="105000"/>
-              </a:lnSpc>
+              <a:t>switch LMWH → UFH (or briefly hold) to allow neuraxial anaesthesia and limit bleeding.</a:t>
+            </a:r>
+            <a:endParaRPr lang="en-US" sz="1350" dirty="0"/>
+          </a:p>
+        </p:txBody>
+      </p:sp>
+      <p:sp>
+        <p:nvSpPr>
+          <p:cNvPr id="28" name="Text 21"/>
+          <p:cNvSpPr/>
+          <p:nvPr/>
+        </p:nvSpPr>
+        <p:spPr>
+          <a:xfrm>
+            <a:off x="914400" y="5468112"/>
+            <a:ext cx="10607040" cy="365760"/>
+          </a:xfrm>
+          <a:prstGeom prst="rect">
+            <a:avLst/>
+          </a:prstGeom>
+          <a:noFill/>
+          <a:ln/>
+        </p:spPr>
+        <p:txBody>
+          <a:bodyPr wrap="square" lIns="0" tIns="0" rIns="0" bIns="0" rtlCol="0" anchor="ctr"/>
+          <a:lstStyle/>
+          <a:p>
+            <a:pPr algn="l" indent="0" marL="0">
               <a:buNone/>
             </a:pPr>
             <a:r>
               <a:rPr lang="en-US" sz="1350" b="1" dirty="0">
                 <a:solidFill>
-                  <a:srgbClr val="2B2B33"/>
+                  <a:srgbClr val="A4133C"/>
                 </a:solidFill>
                 <a:latin typeface="Calibri" pitchFamily="34" charset="0"/>
                 <a:ea typeface="Calibri" pitchFamily="34" charset="-122"/>
                 <a:cs typeface="Calibri" pitchFamily="34" charset="-120"/>
               </a:rPr>
-              <a:t>Amiodarone  </a:t>
-            </a:r>
-            <a:pPr algn="l" indent="0" marL="0">
-              <a:lnSpc>
-                <a:spcPct val="105000"/>
-              </a:lnSpc>
+              <a:t>Breastfeeding   </a:t>
+            </a:r>
+            <a:pPr algn="l" indent="0" marL="0">
               <a:buNone/>
             </a:pPr>
             <a:r>
               <a:rPr lang="en-US" sz="1350" dirty="0">
                 <a:solidFill>
-                  <a:srgbClr val="6B6B76"/>
+                  <a:srgbClr val="2B2B33"/>
                 </a:solidFill>
                 <a:latin typeface="Calibri" pitchFamily="34" charset="0"/>
                 <a:ea typeface="Calibri" pitchFamily="34" charset="-122"/>
                 <a:cs typeface="Calibri" pitchFamily="34" charset="-120"/>
               </a:rPr>
-              <a:t>— fetal thyroid dysfunction &amp; IUGR; only if life-threatening</a:t>
-            </a:r>
-            <a:endParaRPr lang="en-US" sz="1350" dirty="0"/>
-          </a:p>
-        </p:txBody>
-      </p:sp>
-      <p:sp>
-        <p:nvSpPr>
-          <p:cNvPr id="28" name="Text 21"/>
-          <p:cNvSpPr/>
-          <p:nvPr/>
-        </p:nvSpPr>
-        <p:spPr>
-          <a:xfrm>
-            <a:off x="6537960" y="5285232"/>
-            <a:ext cx="5029200" cy="457200"/>
-          </a:xfrm>
-          <a:prstGeom prst="rect">
-            <a:avLst/>
-          </a:prstGeom>
-          <a:noFill/>
-          <a:ln/>
-        </p:spPr>
-        <p:txBody>
-          <a:bodyPr wrap="square" lIns="0" tIns="0" rIns="0" bIns="0" rtlCol="0" anchor="t"/>
-          <a:lstStyle/>
-          <a:p>
-            <a:pPr algn="l" indent="0" marL="0">
-              <a:buNone/>
-            </a:pPr>
-            <a:r>
-              <a:rPr lang="en-US" sz="1350" b="1" dirty="0">
-                <a:solidFill>
-                  <a:srgbClr val="2B2B33"/>
-                </a:solidFill>
-                <a:latin typeface="Calibri" pitchFamily="34" charset="0"/>
-                <a:ea typeface="Calibri" pitchFamily="34" charset="-122"/>
-                <a:cs typeface="Calibri" pitchFamily="34" charset="-120"/>
-              </a:rPr>
-              <a:t>Atenolol  </a:t>
-            </a:r>
-            <a:pPr algn="l" indent="0" marL="0">
-              <a:buNone/>
-            </a:pPr>
-            <a:r>
-              <a:rPr lang="en-US" sz="1350" dirty="0">
-                <a:solidFill>
-                  <a:srgbClr val="6B6B76"/>
-                </a:solidFill>
-                <a:latin typeface="Calibri" pitchFamily="34" charset="0"/>
-                <a:ea typeface="Calibri" pitchFamily="34" charset="-122"/>
-                <a:cs typeface="Calibri" pitchFamily="34" charset="-120"/>
-              </a:rPr>
-              <a:t>— linked to fetal growth restriction</a:t>
+              <a:t>warfarin, LMWH and UFH are compatible; DOACs are avoided. Plan with a specialist team.</a:t>
             </a:r>
             <a:endParaRPr lang="en-US" sz="1350" dirty="0"/>
           </a:p>
@@ -14803,7 +14855,7 @@
                 <a:ea typeface="Cambria" pitchFamily="34" charset="-122"/>
                 <a:cs typeface="Cambria" pitchFamily="34" charset="-120"/>
               </a:rPr>
-              <a:t>AF in Pregnancy — Overview</a:t>
+              <a:t>Rhythm &amp; Rate Control in Pregnancy</a:t>
             </a:r>
             <a:endParaRPr lang="en-US" sz="3000" dirty="0"/>
           </a:p>
@@ -14817,100 +14869,12 @@
         </p:nvSpPr>
         <p:spPr>
           <a:xfrm>
-            <a:off x="502920" y="1572768"/>
-            <a:ext cx="11183112" cy="914400"/>
+            <a:off x="502920" y="1783080"/>
+            <a:ext cx="5532120" cy="4206240"/>
           </a:xfrm>
           <a:prstGeom prst="roundRect">
             <a:avLst>
-              <a:gd name="adj" fmla="val 12000"/>
-            </a:avLst>
-          </a:prstGeom>
-          <a:solidFill>
-            <a:srgbClr val="590D22"/>
-          </a:solidFill>
-          <a:ln/>
-          <a:effectLst>
-            <a:outerShdw sx="100000" sy="100000" kx="0" ky="0" algn="bl" rotWithShape="0" blurRad="127000" dist="50800" dir="5400000">
-              <a:srgbClr val="C9A3AC">
-                <a:alpha val="45000"/>
-              </a:srgbClr>
-            </a:outerShdw>
-          </a:effectLst>
-        </p:spPr>
-      </p:sp>
-      <p:sp>
-        <p:nvSpPr>
-          <p:cNvPr id="7" name="Text 4"/>
-          <p:cNvSpPr/>
-          <p:nvPr/>
-        </p:nvSpPr>
-        <p:spPr>
-          <a:xfrm>
-            <a:off x="914400" y="1572768"/>
-            <a:ext cx="10424160" cy="914400"/>
-          </a:xfrm>
-          <a:prstGeom prst="rect">
-            <a:avLst/>
-          </a:prstGeom>
-          <a:noFill/>
-          <a:ln/>
-        </p:spPr>
-        <p:txBody>
-          <a:bodyPr wrap="square" rtlCol="0" anchor="ctr"/>
-          <a:lstStyle/>
-          <a:p>
-            <a:pPr algn="l" indent="0" marL="0">
-              <a:lnSpc>
-                <a:spcPct val="110000"/>
-              </a:lnSpc>
-              <a:buNone/>
-            </a:pPr>
-            <a:r>
-              <a:rPr lang="en-US" sz="1400" b="1" dirty="0">
-                <a:solidFill>
-                  <a:srgbClr val="FFFFFF"/>
-                </a:solidFill>
-                <a:latin typeface="Calibri" pitchFamily="34" charset="0"/>
-                <a:ea typeface="Calibri" pitchFamily="34" charset="-122"/>
-                <a:cs typeface="Calibri" pitchFamily="34" charset="-120"/>
-              </a:rPr>
-              <a:t>Rare — ~60 / 100,000 pregnancies</a:t>
-            </a:r>
-            <a:pPr algn="l" indent="0" marL="0">
-              <a:lnSpc>
-                <a:spcPct val="110000"/>
-              </a:lnSpc>
-              <a:buNone/>
-            </a:pPr>
-            <a:r>
-              <a:rPr lang="en-US" sz="1400" dirty="0">
-                <a:solidFill>
-                  <a:srgbClr val="FBD8DF"/>
-                </a:solidFill>
-                <a:latin typeface="Calibri" pitchFamily="34" charset="0"/>
-                <a:ea typeface="Calibri" pitchFamily="34" charset="-122"/>
-                <a:cs typeface="Calibri" pitchFamily="34" charset="-120"/>
-              </a:rPr>
-              <a:t>   ·   often congenital / valvular disease, thyrotoxicosis or electrolyte disturbance   ·   hypercoagulable, but no proven rise in AF-related thromboembolism</a:t>
-            </a:r>
-            <a:endParaRPr lang="en-US" sz="1400" dirty="0"/>
-          </a:p>
-        </p:txBody>
-      </p:sp>
-      <p:sp>
-        <p:nvSpPr>
-          <p:cNvPr id="8" name="Shape 5"/>
-          <p:cNvSpPr/>
-          <p:nvPr/>
-        </p:nvSpPr>
-        <p:spPr>
-          <a:xfrm>
-            <a:off x="502920" y="2670048"/>
-            <a:ext cx="3611880" cy="3319272"/>
-          </a:xfrm>
-          <a:prstGeom prst="roundRect">
-            <a:avLst>
-              <a:gd name="adj" fmla="val 3306"/>
+              <a:gd name="adj" fmla="val 2609"/>
             </a:avLst>
           </a:prstGeom>
           <a:solidFill>
@@ -14933,27 +14897,85 @@
       </p:sp>
       <p:sp>
         <p:nvSpPr>
-          <p:cNvPr id="9" name="Shape 6"/>
-          <p:cNvSpPr/>
-          <p:nvPr/>
-        </p:nvSpPr>
-        <p:spPr>
-          <a:xfrm>
-            <a:off x="777240" y="2926080"/>
-            <a:ext cx="658368" cy="658368"/>
+          <p:cNvPr id="7" name="Text 4"/>
+          <p:cNvSpPr/>
+          <p:nvPr/>
+        </p:nvSpPr>
+        <p:spPr>
+          <a:xfrm>
+            <a:off x="868680" y="2057400"/>
+            <a:ext cx="4846320" cy="274320"/>
+          </a:xfrm>
+          <a:prstGeom prst="rect">
+            <a:avLst/>
+          </a:prstGeom>
+          <a:noFill/>
+          <a:ln/>
+        </p:spPr>
+        <p:txBody>
+          <a:bodyPr wrap="square" rtlCol="0" anchor="t"/>
+          <a:lstStyle/>
+          <a:p>
+            <a:pPr algn="l" indent="0" marL="0">
+              <a:buNone/>
+            </a:pPr>
+            <a:r>
+              <a:rPr lang="en-US" sz="1300" b="1" spc="150" kern="0" dirty="0">
+                <a:solidFill>
+                  <a:srgbClr val="2E7D32"/>
+                </a:solidFill>
+                <a:latin typeface="Calibri" pitchFamily="34" charset="0"/>
+                <a:ea typeface="Calibri" pitchFamily="34" charset="-122"/>
+                <a:cs typeface="Calibri" pitchFamily="34" charset="-120"/>
+              </a:rPr>
+              <a:t>✓  </a:t>
+            </a:r>
+            <a:pPr algn="l" indent="0" marL="0">
+              <a:buNone/>
+            </a:pPr>
+            <a:r>
+              <a:rPr lang="en-US" sz="1300" b="1" spc="150" kern="0" dirty="0">
+                <a:solidFill>
+                  <a:srgbClr val="2E7D32"/>
+                </a:solidFill>
+                <a:latin typeface="Calibri" pitchFamily="34" charset="0"/>
+                <a:ea typeface="Calibri" pitchFamily="34" charset="-122"/>
+                <a:cs typeface="Calibri" pitchFamily="34" charset="-120"/>
+              </a:rPr>
+              <a:t>GENERALLY SAFE</a:t>
+            </a:r>
+            <a:endParaRPr lang="en-US" sz="1300" dirty="0"/>
+          </a:p>
+        </p:txBody>
+      </p:sp>
+      <p:sp>
+        <p:nvSpPr>
+          <p:cNvPr id="8" name="Shape 5"/>
+          <p:cNvSpPr/>
+          <p:nvPr/>
+        </p:nvSpPr>
+        <p:spPr>
+          <a:xfrm>
+            <a:off x="868680" y="2542032"/>
+            <a:ext cx="566928" cy="566928"/>
           </a:xfrm>
           <a:prstGeom prst="ellipse">
             <a:avLst/>
           </a:prstGeom>
           <a:solidFill>
-            <a:srgbClr val="A4133C"/>
+            <a:srgbClr val="FFFFFF"/>
           </a:solidFill>
-          <a:ln/>
+          <a:ln w="12700">
+            <a:solidFill>
+              <a:srgbClr val="FBD8DF"/>
+            </a:solidFill>
+            <a:prstDash val="solid"/>
+          </a:ln>
         </p:spPr>
       </p:sp>
       <p:pic>
         <p:nvPicPr>
-          <p:cNvPr id="10" name="Image 1" descr="preencoded.png">    </p:cNvPr>
+          <p:cNvPr id="9" name="Image 1" descr="preencoded.png">    </p:cNvPr>
           <p:cNvPicPr>
             <a:picLocks noChangeAspect="1"/>
           </p:cNvPicPr>
@@ -14967,8 +14989,8 @@
         </p:blipFill>
         <p:spPr>
           <a:xfrm>
-            <a:off x="932688" y="3081528"/>
-            <a:ext cx="347472" cy="347472"/>
+            <a:off x="1014984" y="2688336"/>
+            <a:ext cx="274320" cy="274320"/>
           </a:xfrm>
           <a:prstGeom prst="rect">
             <a:avLst/>
@@ -14977,30 +14999,30 @@
       </p:pic>
       <p:sp>
         <p:nvSpPr>
-          <p:cNvPr id="11" name="Text 7"/>
-          <p:cNvSpPr/>
-          <p:nvPr/>
-        </p:nvSpPr>
-        <p:spPr>
-          <a:xfrm>
-            <a:off x="1554480" y="2926080"/>
-            <a:ext cx="2423160" cy="658368"/>
-          </a:xfrm>
-          <a:prstGeom prst="rect">
-            <a:avLst/>
-          </a:prstGeom>
-          <a:noFill/>
-          <a:ln/>
-        </p:spPr>
-        <p:txBody>
-          <a:bodyPr wrap="square" lIns="0" tIns="0" rIns="0" bIns="0" rtlCol="0" anchor="ctr"/>
-          <a:lstStyle/>
-          <a:p>
-            <a:pPr algn="l" indent="0" marL="0">
-              <a:buNone/>
-            </a:pPr>
-            <a:r>
-              <a:rPr lang="en-US" sz="1700" b="1" dirty="0">
+          <p:cNvPr id="10" name="Text 6"/>
+          <p:cNvSpPr/>
+          <p:nvPr/>
+        </p:nvSpPr>
+        <p:spPr>
+          <a:xfrm>
+            <a:off x="1618488" y="2505456"/>
+            <a:ext cx="4233672" cy="292608"/>
+          </a:xfrm>
+          <a:prstGeom prst="rect">
+            <a:avLst/>
+          </a:prstGeom>
+          <a:noFill/>
+          <a:ln/>
+        </p:spPr>
+        <p:txBody>
+          <a:bodyPr wrap="square" lIns="0" tIns="0" rIns="0" bIns="0" rtlCol="0" anchor="t"/>
+          <a:lstStyle/>
+          <a:p>
+            <a:pPr algn="l" indent="0" marL="0">
+              <a:buNone/>
+            </a:pPr>
+            <a:r>
+              <a:rPr lang="en-US" sz="1600" b="1" dirty="0">
                 <a:solidFill>
                   <a:srgbClr val="2B2B33"/>
                 </a:solidFill>
@@ -15008,42 +15030,22 @@
                 <a:ea typeface="Cambria" pitchFamily="34" charset="-122"/>
                 <a:cs typeface="Cambria" pitchFamily="34" charset="-120"/>
               </a:rPr>
-              <a:t>Anticoagulation</a:t>
-            </a:r>
-            <a:endParaRPr lang="en-US" sz="1700" dirty="0"/>
-          </a:p>
-        </p:txBody>
-      </p:sp>
-      <p:sp>
-        <p:nvSpPr>
-          <p:cNvPr id="12" name="Shape 8"/>
-          <p:cNvSpPr/>
-          <p:nvPr/>
-        </p:nvSpPr>
-        <p:spPr>
-          <a:xfrm>
-            <a:off x="795528" y="3822192"/>
-            <a:ext cx="118872" cy="118872"/>
-          </a:xfrm>
-          <a:prstGeom prst="ellipse">
-            <a:avLst/>
-          </a:prstGeom>
-          <a:solidFill>
-            <a:srgbClr val="FF4D6D"/>
-          </a:solidFill>
-          <a:ln/>
-        </p:spPr>
-      </p:sp>
-      <p:sp>
-        <p:nvSpPr>
-          <p:cNvPr id="13" name="Text 9"/>
-          <p:cNvSpPr/>
-          <p:nvPr/>
-        </p:nvSpPr>
-        <p:spPr>
-          <a:xfrm>
-            <a:off x="1033272" y="3767328"/>
-            <a:ext cx="2834640" cy="676656"/>
+              <a:t>Beta-blockers</a:t>
+            </a:r>
+            <a:endParaRPr lang="en-US" sz="1600" dirty="0"/>
+          </a:p>
+        </p:txBody>
+      </p:sp>
+      <p:sp>
+        <p:nvSpPr>
+          <p:cNvPr id="11" name="Text 7"/>
+          <p:cNvSpPr/>
+          <p:nvPr/>
+        </p:nvSpPr>
+        <p:spPr>
+          <a:xfrm>
+            <a:off x="1618488" y="2816352"/>
+            <a:ext cx="4233672" cy="365760"/>
           </a:xfrm>
           <a:prstGeom prst="rect">
             <a:avLst/>
@@ -15056,21 +15058,18 @@
           <a:lstStyle/>
           <a:p>
             <a:pPr algn="l" indent="0" marL="0">
-              <a:lnSpc>
-                <a:spcPct val="102000"/>
-              </a:lnSpc>
               <a:buNone/>
             </a:pPr>
             <a:r>
               <a:rPr lang="en-US" sz="1250" dirty="0">
                 <a:solidFill>
-                  <a:srgbClr val="2B2B33"/>
+                  <a:srgbClr val="6B6B76"/>
                 </a:solidFill>
                 <a:latin typeface="Calibri" pitchFamily="34" charset="0"/>
                 <a:ea typeface="Calibri" pitchFamily="34" charset="-122"/>
                 <a:cs typeface="Calibri" pitchFamily="34" charset="-120"/>
               </a:rPr>
-              <a:t>Same criteria as non-pregnant women</a:t>
+              <a:t>First-line rate control (metoprolol, bisoprolol) — avoid atenolol</a:t>
             </a:r>
             <a:endParaRPr lang="en-US" sz="1250" dirty="0"/>
           </a:p>
@@ -15078,34 +15077,63 @@
       </p:sp>
       <p:sp>
         <p:nvSpPr>
-          <p:cNvPr id="14" name="Shape 10"/>
-          <p:cNvSpPr/>
-          <p:nvPr/>
-        </p:nvSpPr>
-        <p:spPr>
-          <a:xfrm>
-            <a:off x="795528" y="4553712"/>
-            <a:ext cx="118872" cy="118872"/>
+          <p:cNvPr id="12" name="Shape 8"/>
+          <p:cNvSpPr/>
+          <p:nvPr/>
+        </p:nvSpPr>
+        <p:spPr>
+          <a:xfrm>
+            <a:off x="868680" y="3621024"/>
+            <a:ext cx="566928" cy="566928"/>
           </a:xfrm>
           <a:prstGeom prst="ellipse">
             <a:avLst/>
           </a:prstGeom>
           <a:solidFill>
-            <a:srgbClr val="FF4D6D"/>
+            <a:srgbClr val="FFFFFF"/>
           </a:solidFill>
-          <a:ln/>
-        </p:spPr>
-      </p:sp>
-      <p:sp>
-        <p:nvSpPr>
-          <p:cNvPr id="15" name="Text 11"/>
-          <p:cNvSpPr/>
-          <p:nvPr/>
-        </p:nvSpPr>
-        <p:spPr>
-          <a:xfrm>
-            <a:off x="1033272" y="4498848"/>
-            <a:ext cx="2834640" cy="676656"/>
+          <a:ln w="12700">
+            <a:solidFill>
+              <a:srgbClr val="FBD8DF"/>
+            </a:solidFill>
+            <a:prstDash val="solid"/>
+          </a:ln>
+        </p:spPr>
+      </p:sp>
+      <p:pic>
+        <p:nvPicPr>
+          <p:cNvPr id="13" name="Image 2" descr="preencoded.png">    </p:cNvPr>
+          <p:cNvPicPr>
+            <a:picLocks noChangeAspect="1"/>
+          </p:cNvPicPr>
+          <p:nvPr/>
+        </p:nvPicPr>
+        <p:blipFill>
+          <a:blip r:embed="rId3"/>
+          <a:stretch>
+            <a:fillRect/>
+          </a:stretch>
+        </p:blipFill>
+        <p:spPr>
+          <a:xfrm>
+            <a:off x="1014984" y="3767328"/>
+            <a:ext cx="274320" cy="274320"/>
+          </a:xfrm>
+          <a:prstGeom prst="rect">
+            <a:avLst/>
+          </a:prstGeom>
+        </p:spPr>
+      </p:pic>
+      <p:sp>
+        <p:nvSpPr>
+          <p:cNvPr id="14" name="Text 9"/>
+          <p:cNvSpPr/>
+          <p:nvPr/>
+        </p:nvSpPr>
+        <p:spPr>
+          <a:xfrm>
+            <a:off x="1618488" y="3584448"/>
+            <a:ext cx="4233672" cy="292608"/>
           </a:xfrm>
           <a:prstGeom prst="rect">
             <a:avLst/>
@@ -15118,21 +15146,57 @@
           <a:lstStyle/>
           <a:p>
             <a:pPr algn="l" indent="0" marL="0">
-              <a:lnSpc>
-                <a:spcPct val="102000"/>
-              </a:lnSpc>
+              <a:buNone/>
+            </a:pPr>
+            <a:r>
+              <a:rPr lang="en-US" sz="1600" b="1" dirty="0">
+                <a:solidFill>
+                  <a:srgbClr val="2B2B33"/>
+                </a:solidFill>
+                <a:latin typeface="Cambria" pitchFamily="34" charset="0"/>
+                <a:ea typeface="Cambria" pitchFamily="34" charset="-122"/>
+                <a:cs typeface="Cambria" pitchFamily="34" charset="-120"/>
+              </a:rPr>
+              <a:t>Digoxin</a:t>
+            </a:r>
+            <a:endParaRPr lang="en-US" sz="1600" dirty="0"/>
+          </a:p>
+        </p:txBody>
+      </p:sp>
+      <p:sp>
+        <p:nvSpPr>
+          <p:cNvPr id="15" name="Text 10"/>
+          <p:cNvSpPr/>
+          <p:nvPr/>
+        </p:nvSpPr>
+        <p:spPr>
+          <a:xfrm>
+            <a:off x="1618488" y="3895344"/>
+            <a:ext cx="4233672" cy="365760"/>
+          </a:xfrm>
+          <a:prstGeom prst="rect">
+            <a:avLst/>
+          </a:prstGeom>
+          <a:noFill/>
+          <a:ln/>
+        </p:spPr>
+        <p:txBody>
+          <a:bodyPr wrap="square" lIns="0" tIns="0" rIns="0" bIns="0" rtlCol="0" anchor="t"/>
+          <a:lstStyle/>
+          <a:p>
+            <a:pPr algn="l" indent="0" marL="0">
               <a:buNone/>
             </a:pPr>
             <a:r>
               <a:rPr lang="en-US" sz="1250" dirty="0">
                 <a:solidFill>
-                  <a:srgbClr val="2B2B33"/>
+                  <a:srgbClr val="6B6B76"/>
                 </a:solidFill>
                 <a:latin typeface="Calibri" pitchFamily="34" charset="0"/>
                 <a:ea typeface="Calibri" pitchFamily="34" charset="-122"/>
                 <a:cs typeface="Calibri" pitchFamily="34" charset="-120"/>
               </a:rPr>
-              <a:t>Warfarin (not DOAC) — 2nd trimester to 1 month before delivery</a:t>
+              <a:t>Safe option for rate control</a:t>
             </a:r>
             <a:endParaRPr lang="en-US" sz="1250" dirty="0"/>
           </a:p>
@@ -15140,34 +15204,63 @@
       </p:sp>
       <p:sp>
         <p:nvSpPr>
-          <p:cNvPr id="16" name="Shape 12"/>
-          <p:cNvSpPr/>
-          <p:nvPr/>
-        </p:nvSpPr>
-        <p:spPr>
-          <a:xfrm>
-            <a:off x="795528" y="5285232"/>
-            <a:ext cx="118872" cy="118872"/>
+          <p:cNvPr id="16" name="Shape 11"/>
+          <p:cNvSpPr/>
+          <p:nvPr/>
+        </p:nvSpPr>
+        <p:spPr>
+          <a:xfrm>
+            <a:off x="868680" y="4700016"/>
+            <a:ext cx="566928" cy="566928"/>
           </a:xfrm>
           <a:prstGeom prst="ellipse">
             <a:avLst/>
           </a:prstGeom>
           <a:solidFill>
-            <a:srgbClr val="FF4D6D"/>
+            <a:srgbClr val="FFFFFF"/>
           </a:solidFill>
-          <a:ln/>
-        </p:spPr>
-      </p:sp>
-      <p:sp>
-        <p:nvSpPr>
-          <p:cNvPr id="17" name="Text 13"/>
-          <p:cNvSpPr/>
-          <p:nvPr/>
-        </p:nvSpPr>
-        <p:spPr>
-          <a:xfrm>
-            <a:off x="1033272" y="5230368"/>
-            <a:ext cx="2834640" cy="676656"/>
+          <a:ln w="12700">
+            <a:solidFill>
+              <a:srgbClr val="FBD8DF"/>
+            </a:solidFill>
+            <a:prstDash val="solid"/>
+          </a:ln>
+        </p:spPr>
+      </p:sp>
+      <p:pic>
+        <p:nvPicPr>
+          <p:cNvPr id="17" name="Image 3" descr="preencoded.png">    </p:cNvPr>
+          <p:cNvPicPr>
+            <a:picLocks noChangeAspect="1"/>
+          </p:cNvPicPr>
+          <p:nvPr/>
+        </p:nvPicPr>
+        <p:blipFill>
+          <a:blip r:embed="rId4"/>
+          <a:stretch>
+            <a:fillRect/>
+          </a:stretch>
+        </p:blipFill>
+        <p:spPr>
+          <a:xfrm>
+            <a:off x="1014984" y="4846320"/>
+            <a:ext cx="274320" cy="274320"/>
+          </a:xfrm>
+          <a:prstGeom prst="rect">
+            <a:avLst/>
+          </a:prstGeom>
+        </p:spPr>
+      </p:pic>
+      <p:sp>
+        <p:nvSpPr>
+          <p:cNvPr id="18" name="Text 12"/>
+          <p:cNvSpPr/>
+          <p:nvPr/>
+        </p:nvSpPr>
+        <p:spPr>
+          <a:xfrm>
+            <a:off x="1618488" y="4663440"/>
+            <a:ext cx="4233672" cy="292608"/>
           </a:xfrm>
           <a:prstGeom prst="rect">
             <a:avLst/>
@@ -15180,21 +15273,57 @@
           <a:lstStyle/>
           <a:p>
             <a:pPr algn="l" indent="0" marL="0">
-              <a:lnSpc>
-                <a:spcPct val="102000"/>
-              </a:lnSpc>
+              <a:buNone/>
+            </a:pPr>
+            <a:r>
+              <a:rPr lang="en-US" sz="1600" b="1" dirty="0">
+                <a:solidFill>
+                  <a:srgbClr val="2B2B33"/>
+                </a:solidFill>
+                <a:latin typeface="Cambria" pitchFamily="34" charset="0"/>
+                <a:ea typeface="Cambria" pitchFamily="34" charset="-122"/>
+                <a:cs typeface="Cambria" pitchFamily="34" charset="-120"/>
+              </a:rPr>
+              <a:t>Flecainide / sotalol</a:t>
+            </a:r>
+            <a:endParaRPr lang="en-US" sz="1600" dirty="0"/>
+          </a:p>
+        </p:txBody>
+      </p:sp>
+      <p:sp>
+        <p:nvSpPr>
+          <p:cNvPr id="19" name="Text 13"/>
+          <p:cNvSpPr/>
+          <p:nvPr/>
+        </p:nvSpPr>
+        <p:spPr>
+          <a:xfrm>
+            <a:off x="1618488" y="4974336"/>
+            <a:ext cx="4233672" cy="365760"/>
+          </a:xfrm>
+          <a:prstGeom prst="rect">
+            <a:avLst/>
+          </a:prstGeom>
+          <a:noFill/>
+          <a:ln/>
+        </p:spPr>
+        <p:txBody>
+          <a:bodyPr wrap="square" lIns="0" tIns="0" rIns="0" bIns="0" rtlCol="0" anchor="t"/>
+          <a:lstStyle/>
+          <a:p>
+            <a:pPr algn="l" indent="0" marL="0">
               <a:buNone/>
             </a:pPr>
             <a:r>
               <a:rPr lang="en-US" sz="1250" dirty="0">
                 <a:solidFill>
-                  <a:srgbClr val="2B2B33"/>
+                  <a:srgbClr val="6B6B76"/>
                 </a:solidFill>
                 <a:latin typeface="Calibri" pitchFamily="34" charset="0"/>
                 <a:ea typeface="Calibri" pitchFamily="34" charset="-122"/>
                 <a:cs typeface="Calibri" pitchFamily="34" charset="-120"/>
               </a:rPr>
-              <a:t>LMWH (SC) — 1st trimester &amp; final month</a:t>
+              <a:t>For rhythm control when needed</a:t>
             </a:r>
             <a:endParaRPr lang="en-US" sz="1250" dirty="0"/>
           </a:p>
@@ -15202,18 +15331,172 @@
       </p:sp>
       <p:sp>
         <p:nvSpPr>
-          <p:cNvPr id="18" name="Shape 14"/>
-          <p:cNvSpPr/>
-          <p:nvPr/>
-        </p:nvSpPr>
-        <p:spPr>
-          <a:xfrm>
-            <a:off x="4288536" y="2670048"/>
-            <a:ext cx="3611880" cy="3319272"/>
+          <p:cNvPr id="20" name="Shape 14"/>
+          <p:cNvSpPr/>
+          <p:nvPr/>
+        </p:nvSpPr>
+        <p:spPr>
+          <a:xfrm>
+            <a:off x="6172200" y="1783080"/>
+            <a:ext cx="5532120" cy="2011680"/>
           </a:xfrm>
           <a:prstGeom prst="roundRect">
             <a:avLst>
-              <a:gd name="adj" fmla="val 3306"/>
+              <a:gd name="adj" fmla="val 5455"/>
+            </a:avLst>
+          </a:prstGeom>
+          <a:solidFill>
+            <a:srgbClr val="590D22"/>
+          </a:solidFill>
+          <a:ln/>
+          <a:effectLst>
+            <a:outerShdw sx="100000" sy="100000" kx="0" ky="0" algn="bl" rotWithShape="0" blurRad="127000" dist="50800" dir="5400000">
+              <a:srgbClr val="C9A3AC">
+                <a:alpha val="45000"/>
+              </a:srgbClr>
+            </a:outerShdw>
+          </a:effectLst>
+        </p:spPr>
+      </p:sp>
+      <p:sp>
+        <p:nvSpPr>
+          <p:cNvPr id="21" name="Shape 15"/>
+          <p:cNvSpPr/>
+          <p:nvPr/>
+        </p:nvSpPr>
+        <p:spPr>
+          <a:xfrm>
+            <a:off x="6492240" y="2148840"/>
+            <a:ext cx="868680" cy="868680"/>
+          </a:xfrm>
+          <a:prstGeom prst="ellipse">
+            <a:avLst/>
+          </a:prstGeom>
+          <a:solidFill>
+            <a:srgbClr val="A4133C"/>
+          </a:solidFill>
+          <a:ln/>
+        </p:spPr>
+      </p:sp>
+      <p:pic>
+        <p:nvPicPr>
+          <p:cNvPr id="22" name="Image 4" descr="preencoded.png">    </p:cNvPr>
+          <p:cNvPicPr>
+            <a:picLocks noChangeAspect="1"/>
+          </p:cNvPicPr>
+          <p:nvPr/>
+        </p:nvPicPr>
+        <p:blipFill>
+          <a:blip r:embed="rId5"/>
+          <a:stretch>
+            <a:fillRect/>
+          </a:stretch>
+        </p:blipFill>
+        <p:spPr>
+          <a:xfrm>
+            <a:off x="6729984" y="2377440"/>
+            <a:ext cx="402336" cy="402336"/>
+          </a:xfrm>
+          <a:prstGeom prst="rect">
+            <a:avLst/>
+          </a:prstGeom>
+        </p:spPr>
+      </p:pic>
+      <p:sp>
+        <p:nvSpPr>
+          <p:cNvPr id="23" name="Text 16"/>
+          <p:cNvSpPr/>
+          <p:nvPr/>
+        </p:nvSpPr>
+        <p:spPr>
+          <a:xfrm>
+            <a:off x="7498080" y="2194560"/>
+            <a:ext cx="4023360" cy="457200"/>
+          </a:xfrm>
+          <a:prstGeom prst="rect">
+            <a:avLst/>
+          </a:prstGeom>
+          <a:noFill/>
+          <a:ln/>
+        </p:spPr>
+        <p:txBody>
+          <a:bodyPr wrap="square" rtlCol="0" anchor="ctr"/>
+          <a:lstStyle/>
+          <a:p>
+            <a:pPr algn="l" indent="0" marL="0">
+              <a:buNone/>
+            </a:pPr>
+            <a:r>
+              <a:rPr lang="en-US" sz="2100" b="1" dirty="0">
+                <a:solidFill>
+                  <a:srgbClr val="FFFFFF"/>
+                </a:solidFill>
+                <a:latin typeface="Cambria" pitchFamily="34" charset="0"/>
+                <a:ea typeface="Cambria" pitchFamily="34" charset="-122"/>
+                <a:cs typeface="Cambria" pitchFamily="34" charset="-120"/>
+              </a:rPr>
+              <a:t>Cardioversion</a:t>
+            </a:r>
+            <a:endParaRPr lang="en-US" sz="2100" dirty="0"/>
+          </a:p>
+        </p:txBody>
+      </p:sp>
+      <p:sp>
+        <p:nvSpPr>
+          <p:cNvPr id="24" name="Text 17"/>
+          <p:cNvSpPr/>
+          <p:nvPr/>
+        </p:nvSpPr>
+        <p:spPr>
+          <a:xfrm>
+            <a:off x="6537960" y="2852928"/>
+            <a:ext cx="5029200" cy="822960"/>
+          </a:xfrm>
+          <a:prstGeom prst="rect">
+            <a:avLst/>
+          </a:prstGeom>
+          <a:noFill/>
+          <a:ln/>
+        </p:spPr>
+        <p:txBody>
+          <a:bodyPr wrap="square" rtlCol="0" anchor="t"/>
+          <a:lstStyle/>
+          <a:p>
+            <a:pPr algn="l" indent="0" marL="0">
+              <a:lnSpc>
+                <a:spcPct val="112000"/>
+              </a:lnSpc>
+              <a:buNone/>
+            </a:pPr>
+            <a:r>
+              <a:rPr lang="en-US" sz="1400" dirty="0">
+                <a:solidFill>
+                  <a:srgbClr val="FBD8DF"/>
+                </a:solidFill>
+                <a:latin typeface="Calibri" pitchFamily="34" charset="0"/>
+                <a:ea typeface="Calibri" pitchFamily="34" charset="-122"/>
+                <a:cs typeface="Calibri" pitchFamily="34" charset="-120"/>
+              </a:rPr>
+              <a:t>DC cardioversion is safe in all trimesters — perform with fetal monitoring.</a:t>
+            </a:r>
+            <a:endParaRPr lang="en-US" sz="1400" dirty="0"/>
+          </a:p>
+        </p:txBody>
+      </p:sp>
+      <p:sp>
+        <p:nvSpPr>
+          <p:cNvPr id="25" name="Shape 18"/>
+          <p:cNvSpPr/>
+          <p:nvPr/>
+        </p:nvSpPr>
+        <p:spPr>
+          <a:xfrm>
+            <a:off x="6172200" y="3977640"/>
+            <a:ext cx="5532120" cy="2011680"/>
+          </a:xfrm>
+          <a:prstGeom prst="roundRect">
+            <a:avLst>
+              <a:gd name="adj" fmla="val 5455"/>
             </a:avLst>
           </a:prstGeom>
           <a:solidFill>
@@ -15236,241 +15519,67 @@
       </p:sp>
       <p:sp>
         <p:nvSpPr>
-          <p:cNvPr id="19" name="Shape 15"/>
-          <p:cNvSpPr/>
-          <p:nvPr/>
-        </p:nvSpPr>
-        <p:spPr>
-          <a:xfrm>
-            <a:off x="4562856" y="2926080"/>
-            <a:ext cx="658368" cy="658368"/>
-          </a:xfrm>
-          <a:prstGeom prst="ellipse">
-            <a:avLst/>
-          </a:prstGeom>
-          <a:solidFill>
-            <a:srgbClr val="A4133C"/>
-          </a:solidFill>
-          <a:ln/>
-        </p:spPr>
-      </p:sp>
-      <p:pic>
-        <p:nvPicPr>
-          <p:cNvPr id="20" name="Image 2" descr="preencoded.png">    </p:cNvPr>
-          <p:cNvPicPr>
-            <a:picLocks noChangeAspect="1"/>
-          </p:cNvPicPr>
-          <p:nvPr/>
-        </p:nvPicPr>
-        <p:blipFill>
-          <a:blip r:embed="rId3"/>
-          <a:stretch>
-            <a:fillRect/>
-          </a:stretch>
-        </p:blipFill>
-        <p:spPr>
-          <a:xfrm>
-            <a:off x="4718304" y="3081528"/>
-            <a:ext cx="347472" cy="347472"/>
-          </a:xfrm>
-          <a:prstGeom prst="rect">
-            <a:avLst/>
-          </a:prstGeom>
-        </p:spPr>
-      </p:pic>
-      <p:sp>
-        <p:nvSpPr>
-          <p:cNvPr id="21" name="Text 16"/>
-          <p:cNvSpPr/>
-          <p:nvPr/>
-        </p:nvSpPr>
-        <p:spPr>
-          <a:xfrm>
-            <a:off x="5340096" y="2926080"/>
-            <a:ext cx="2423160" cy="658368"/>
-          </a:xfrm>
-          <a:prstGeom prst="rect">
-            <a:avLst/>
-          </a:prstGeom>
-          <a:noFill/>
-          <a:ln/>
-        </p:spPr>
-        <p:txBody>
-          <a:bodyPr wrap="square" lIns="0" tIns="0" rIns="0" bIns="0" rtlCol="0" anchor="ctr"/>
-          <a:lstStyle/>
-          <a:p>
-            <a:pPr algn="l" indent="0" marL="0">
-              <a:buNone/>
-            </a:pPr>
-            <a:r>
-              <a:rPr lang="en-US" sz="1700" b="1" dirty="0">
-                <a:solidFill>
-                  <a:srgbClr val="2B2B33"/>
-                </a:solidFill>
-                <a:latin typeface="Cambria" pitchFamily="34" charset="0"/>
-                <a:ea typeface="Cambria" pitchFamily="34" charset="-122"/>
-                <a:cs typeface="Cambria" pitchFamily="34" charset="-120"/>
-              </a:rPr>
-              <a:t>Acute Management</a:t>
-            </a:r>
-            <a:endParaRPr lang="en-US" sz="1700" dirty="0"/>
-          </a:p>
-        </p:txBody>
-      </p:sp>
-      <p:sp>
-        <p:nvSpPr>
-          <p:cNvPr id="22" name="Shape 17"/>
-          <p:cNvSpPr/>
-          <p:nvPr/>
-        </p:nvSpPr>
-        <p:spPr>
-          <a:xfrm>
-            <a:off x="4581144" y="3822192"/>
-            <a:ext cx="118872" cy="118872"/>
-          </a:xfrm>
-          <a:prstGeom prst="ellipse">
-            <a:avLst/>
-          </a:prstGeom>
-          <a:solidFill>
-            <a:srgbClr val="FF4D6D"/>
-          </a:solidFill>
-          <a:ln/>
-        </p:spPr>
-      </p:sp>
-      <p:sp>
-        <p:nvSpPr>
-          <p:cNvPr id="23" name="Text 18"/>
-          <p:cNvSpPr/>
-          <p:nvPr/>
-        </p:nvSpPr>
-        <p:spPr>
-          <a:xfrm>
-            <a:off x="4818888" y="3767328"/>
-            <a:ext cx="2834640" cy="676656"/>
-          </a:xfrm>
-          <a:prstGeom prst="rect">
-            <a:avLst/>
-          </a:prstGeom>
-          <a:noFill/>
-          <a:ln/>
-        </p:spPr>
-        <p:txBody>
-          <a:bodyPr wrap="square" lIns="0" tIns="0" rIns="0" bIns="0" rtlCol="0" anchor="t"/>
-          <a:lstStyle/>
-          <a:p>
-            <a:pPr algn="l" indent="0" marL="0">
-              <a:lnSpc>
-                <a:spcPct val="102000"/>
-              </a:lnSpc>
-              <a:buNone/>
-            </a:pPr>
-            <a:r>
-              <a:rPr lang="en-US" sz="1250" dirty="0">
-                <a:solidFill>
-                  <a:srgbClr val="2B2B33"/>
+          <p:cNvPr id="26" name="Text 19"/>
+          <p:cNvSpPr/>
+          <p:nvPr/>
+        </p:nvSpPr>
+        <p:spPr>
+          <a:xfrm>
+            <a:off x="6537960" y="4206240"/>
+            <a:ext cx="4937760" cy="274320"/>
+          </a:xfrm>
+          <a:prstGeom prst="rect">
+            <a:avLst/>
+          </a:prstGeom>
+          <a:noFill/>
+          <a:ln/>
+        </p:spPr>
+        <p:txBody>
+          <a:bodyPr wrap="square" rtlCol="0" anchor="t"/>
+          <a:lstStyle/>
+          <a:p>
+            <a:pPr algn="l" indent="0" marL="0">
+              <a:buNone/>
+            </a:pPr>
+            <a:r>
+              <a:rPr lang="en-US" sz="1300" b="1" spc="120" kern="0" dirty="0">
+                <a:solidFill>
+                  <a:srgbClr val="A4133C"/>
                 </a:solidFill>
                 <a:latin typeface="Calibri" pitchFamily="34" charset="0"/>
                 <a:ea typeface="Calibri" pitchFamily="34" charset="-122"/>
                 <a:cs typeface="Calibri" pitchFamily="34" charset="-120"/>
               </a:rPr>
-              <a:t>DC cardioversion — safe at all stages</a:t>
-            </a:r>
-            <a:endParaRPr lang="en-US" sz="1250" dirty="0"/>
-          </a:p>
-        </p:txBody>
-      </p:sp>
-      <p:sp>
-        <p:nvSpPr>
-          <p:cNvPr id="24" name="Shape 19"/>
-          <p:cNvSpPr/>
-          <p:nvPr/>
-        </p:nvSpPr>
-        <p:spPr>
-          <a:xfrm>
-            <a:off x="4581144" y="4553712"/>
-            <a:ext cx="118872" cy="118872"/>
-          </a:xfrm>
-          <a:prstGeom prst="ellipse">
-            <a:avLst/>
-          </a:prstGeom>
-          <a:solidFill>
-            <a:srgbClr val="FF4D6D"/>
-          </a:solidFill>
-          <a:ln/>
-        </p:spPr>
-      </p:sp>
-      <p:sp>
-        <p:nvSpPr>
-          <p:cNvPr id="25" name="Text 20"/>
-          <p:cNvSpPr/>
-          <p:nvPr/>
-        </p:nvSpPr>
-        <p:spPr>
-          <a:xfrm>
-            <a:off x="4818888" y="4498848"/>
-            <a:ext cx="2834640" cy="676656"/>
-          </a:xfrm>
-          <a:prstGeom prst="rect">
-            <a:avLst/>
-          </a:prstGeom>
-          <a:noFill/>
-          <a:ln/>
-        </p:spPr>
-        <p:txBody>
-          <a:bodyPr wrap="square" lIns="0" tIns="0" rIns="0" bIns="0" rtlCol="0" anchor="t"/>
-          <a:lstStyle/>
-          <a:p>
-            <a:pPr algn="l" indent="0" marL="0">
-              <a:lnSpc>
-                <a:spcPct val="102000"/>
-              </a:lnSpc>
-              <a:buNone/>
-            </a:pPr>
-            <a:r>
-              <a:rPr lang="en-US" sz="1250" dirty="0">
-                <a:solidFill>
-                  <a:srgbClr val="2B2B33"/>
+              <a:t>✕  </a:t>
+            </a:r>
+            <a:pPr algn="l" indent="0" marL="0">
+              <a:buNone/>
+            </a:pPr>
+            <a:r>
+              <a:rPr lang="en-US" sz="1300" b="1" spc="120" kern="0" dirty="0">
+                <a:solidFill>
+                  <a:srgbClr val="A4133C"/>
                 </a:solidFill>
                 <a:latin typeface="Calibri" pitchFamily="34" charset="0"/>
                 <a:ea typeface="Calibri" pitchFamily="34" charset="-122"/>
                 <a:cs typeface="Calibri" pitchFamily="34" charset="-120"/>
               </a:rPr>
-              <a:t>IV metoprolol — rate control</a:t>
-            </a:r>
-            <a:endParaRPr lang="en-US" sz="1250" dirty="0"/>
-          </a:p>
-        </p:txBody>
-      </p:sp>
-      <p:sp>
-        <p:nvSpPr>
-          <p:cNvPr id="26" name="Shape 21"/>
-          <p:cNvSpPr/>
-          <p:nvPr/>
-        </p:nvSpPr>
-        <p:spPr>
-          <a:xfrm>
-            <a:off x="4581144" y="5285232"/>
-            <a:ext cx="118872" cy="118872"/>
-          </a:xfrm>
-          <a:prstGeom prst="ellipse">
-            <a:avLst/>
-          </a:prstGeom>
-          <a:solidFill>
-            <a:srgbClr val="FF4D6D"/>
-          </a:solidFill>
-          <a:ln/>
-        </p:spPr>
-      </p:sp>
-      <p:sp>
-        <p:nvSpPr>
-          <p:cNvPr id="27" name="Text 22"/>
-          <p:cNvSpPr/>
-          <p:nvPr/>
-        </p:nvSpPr>
-        <p:spPr>
-          <a:xfrm>
-            <a:off x="4818888" y="5230368"/>
-            <a:ext cx="2834640" cy="676656"/>
+              <a:t>USE WITH CAUTION / AVOID</a:t>
+            </a:r>
+            <a:endParaRPr lang="en-US" sz="1300" dirty="0"/>
+          </a:p>
+        </p:txBody>
+      </p:sp>
+      <p:sp>
+        <p:nvSpPr>
+          <p:cNvPr id="27" name="Text 20"/>
+          <p:cNvSpPr/>
+          <p:nvPr/>
+        </p:nvSpPr>
+        <p:spPr>
+          <a:xfrm>
+            <a:off x="6537960" y="4645152"/>
+            <a:ext cx="5029200" cy="594360"/>
           </a:xfrm>
           <a:prstGeom prst="rect">
             <a:avLst/>
@@ -15484,12 +15593,12 @@
           <a:p>
             <a:pPr algn="l" indent="0" marL="0">
               <a:lnSpc>
-                <a:spcPct val="102000"/>
+                <a:spcPct val="105000"/>
               </a:lnSpc>
               <a:buNone/>
             </a:pPr>
             <a:r>
-              <a:rPr lang="en-US" sz="1250" dirty="0">
+              <a:rPr lang="en-US" sz="1350" b="1" dirty="0">
                 <a:solidFill>
                   <a:srgbClr val="2B2B33"/>
                 </a:solidFill>
@@ -15497,221 +15606,39 @@
                 <a:ea typeface="Calibri" pitchFamily="34" charset="-122"/>
                 <a:cs typeface="Calibri" pitchFamily="34" charset="-120"/>
               </a:rPr>
-              <a:t>Flecainide or sotalol — conversion to sinus rhythm</a:t>
-            </a:r>
-            <a:endParaRPr lang="en-US" sz="1250" dirty="0"/>
-          </a:p>
-        </p:txBody>
-      </p:sp>
-      <p:sp>
-        <p:nvSpPr>
-          <p:cNvPr id="28" name="Shape 23"/>
-          <p:cNvSpPr/>
-          <p:nvPr/>
-        </p:nvSpPr>
-        <p:spPr>
-          <a:xfrm>
-            <a:off x="8074152" y="2670048"/>
-            <a:ext cx="3611880" cy="3319272"/>
-          </a:xfrm>
-          <a:prstGeom prst="roundRect">
-            <a:avLst>
-              <a:gd name="adj" fmla="val 3306"/>
-            </a:avLst>
-          </a:prstGeom>
-          <a:solidFill>
-            <a:srgbClr val="FFF0F3"/>
-          </a:solidFill>
-          <a:ln w="12700">
-            <a:solidFill>
-              <a:srgbClr val="FBD8DF"/>
-            </a:solidFill>
-            <a:prstDash val="solid"/>
-          </a:ln>
-          <a:effectLst>
-            <a:outerShdw sx="100000" sy="100000" kx="0" ky="0" algn="bl" rotWithShape="0" blurRad="127000" dist="50800" dir="5400000">
-              <a:srgbClr val="C9A3AC">
-                <a:alpha val="45000"/>
-              </a:srgbClr>
-            </a:outerShdw>
-          </a:effectLst>
-        </p:spPr>
-      </p:sp>
-      <p:sp>
-        <p:nvSpPr>
-          <p:cNvPr id="29" name="Shape 24"/>
-          <p:cNvSpPr/>
-          <p:nvPr/>
-        </p:nvSpPr>
-        <p:spPr>
-          <a:xfrm>
-            <a:off x="8348472" y="2926080"/>
-            <a:ext cx="658368" cy="658368"/>
-          </a:xfrm>
-          <a:prstGeom prst="ellipse">
-            <a:avLst/>
-          </a:prstGeom>
-          <a:solidFill>
-            <a:srgbClr val="A4133C"/>
-          </a:solidFill>
-          <a:ln/>
-        </p:spPr>
-      </p:sp>
-      <p:pic>
-        <p:nvPicPr>
-          <p:cNvPr id="30" name="Image 3" descr="preencoded.png">    </p:cNvPr>
-          <p:cNvPicPr>
-            <a:picLocks noChangeAspect="1"/>
-          </p:cNvPicPr>
-          <p:nvPr/>
-        </p:nvPicPr>
-        <p:blipFill>
-          <a:blip r:embed="rId4"/>
-          <a:stretch>
-            <a:fillRect/>
-          </a:stretch>
-        </p:blipFill>
-        <p:spPr>
-          <a:xfrm>
-            <a:off x="8503920" y="3081528"/>
-            <a:ext cx="347472" cy="347472"/>
-          </a:xfrm>
-          <a:prstGeom prst="rect">
-            <a:avLst/>
-          </a:prstGeom>
-        </p:spPr>
-      </p:pic>
-      <p:sp>
-        <p:nvSpPr>
-          <p:cNvPr id="31" name="Text 25"/>
-          <p:cNvSpPr/>
-          <p:nvPr/>
-        </p:nvSpPr>
-        <p:spPr>
-          <a:xfrm>
-            <a:off x="9125712" y="2926080"/>
-            <a:ext cx="2423160" cy="658368"/>
-          </a:xfrm>
-          <a:prstGeom prst="rect">
-            <a:avLst/>
-          </a:prstGeom>
-          <a:noFill/>
-          <a:ln/>
-        </p:spPr>
-        <p:txBody>
-          <a:bodyPr wrap="square" lIns="0" tIns="0" rIns="0" bIns="0" rtlCol="0" anchor="ctr"/>
-          <a:lstStyle/>
-          <a:p>
-            <a:pPr algn="l" indent="0" marL="0">
-              <a:buNone/>
-            </a:pPr>
-            <a:r>
-              <a:rPr lang="en-US" sz="1700" b="1" dirty="0">
-                <a:solidFill>
-                  <a:srgbClr val="2B2B33"/>
-                </a:solidFill>
-                <a:latin typeface="Cambria" pitchFamily="34" charset="0"/>
-                <a:ea typeface="Cambria" pitchFamily="34" charset="-122"/>
-                <a:cs typeface="Cambria" pitchFamily="34" charset="-120"/>
-              </a:rPr>
-              <a:t>Long-term Rhythm</a:t>
-            </a:r>
-            <a:endParaRPr lang="en-US" sz="1700" dirty="0"/>
-          </a:p>
-        </p:txBody>
-      </p:sp>
-      <p:sp>
-        <p:nvSpPr>
-          <p:cNvPr id="32" name="Shape 26"/>
-          <p:cNvSpPr/>
-          <p:nvPr/>
-        </p:nvSpPr>
-        <p:spPr>
-          <a:xfrm>
-            <a:off x="8366760" y="3822192"/>
-            <a:ext cx="118872" cy="118872"/>
-          </a:xfrm>
-          <a:prstGeom prst="ellipse">
-            <a:avLst/>
-          </a:prstGeom>
-          <a:solidFill>
-            <a:srgbClr val="FF4D6D"/>
-          </a:solidFill>
-          <a:ln/>
-        </p:spPr>
-      </p:sp>
-      <p:sp>
-        <p:nvSpPr>
-          <p:cNvPr id="33" name="Text 27"/>
-          <p:cNvSpPr/>
-          <p:nvPr/>
-        </p:nvSpPr>
-        <p:spPr>
-          <a:xfrm>
-            <a:off x="8604504" y="3767328"/>
-            <a:ext cx="2834640" cy="676656"/>
-          </a:xfrm>
-          <a:prstGeom prst="rect">
-            <a:avLst/>
-          </a:prstGeom>
-          <a:noFill/>
-          <a:ln/>
-        </p:spPr>
-        <p:txBody>
-          <a:bodyPr wrap="square" lIns="0" tIns="0" rIns="0" bIns="0" rtlCol="0" anchor="t"/>
-          <a:lstStyle/>
-          <a:p>
+              <a:t>Amiodarone  </a:t>
+            </a:r>
             <a:pPr algn="l" indent="0" marL="0">
               <a:lnSpc>
-                <a:spcPct val="102000"/>
+                <a:spcPct val="105000"/>
               </a:lnSpc>
               <a:buNone/>
             </a:pPr>
             <a:r>
-              <a:rPr lang="en-US" sz="1250" dirty="0">
-                <a:solidFill>
-                  <a:srgbClr val="2B2B33"/>
+              <a:rPr lang="en-US" sz="1350" dirty="0">
+                <a:solidFill>
+                  <a:srgbClr val="6B6B76"/>
                 </a:solidFill>
                 <a:latin typeface="Calibri" pitchFamily="34" charset="0"/>
                 <a:ea typeface="Calibri" pitchFamily="34" charset="-122"/>
                 <a:cs typeface="Calibri" pitchFamily="34" charset="-120"/>
               </a:rPr>
-              <a:t>No structural disease — flecainide, sotalol</a:t>
-            </a:r>
-            <a:endParaRPr lang="en-US" sz="1250" dirty="0"/>
-          </a:p>
-        </p:txBody>
-      </p:sp>
-      <p:sp>
-        <p:nvSpPr>
-          <p:cNvPr id="34" name="Shape 28"/>
-          <p:cNvSpPr/>
-          <p:nvPr/>
-        </p:nvSpPr>
-        <p:spPr>
-          <a:xfrm>
-            <a:off x="8366760" y="4553712"/>
-            <a:ext cx="118872" cy="118872"/>
-          </a:xfrm>
-          <a:prstGeom prst="ellipse">
-            <a:avLst/>
-          </a:prstGeom>
-          <a:solidFill>
-            <a:srgbClr val="FF4D6D"/>
-          </a:solidFill>
-          <a:ln/>
-        </p:spPr>
-      </p:sp>
-      <p:sp>
-        <p:nvSpPr>
-          <p:cNvPr id="35" name="Text 29"/>
-          <p:cNvSpPr/>
-          <p:nvPr/>
-        </p:nvSpPr>
-        <p:spPr>
-          <a:xfrm>
-            <a:off x="8604504" y="4498848"/>
-            <a:ext cx="2834640" cy="676656"/>
+              <a:t>— fetal thyroid dysfunction &amp; IUGR; only if life-threatening</a:t>
+            </a:r>
+            <a:endParaRPr lang="en-US" sz="1350" dirty="0"/>
+          </a:p>
+        </p:txBody>
+      </p:sp>
+      <p:sp>
+        <p:nvSpPr>
+          <p:cNvPr id="28" name="Text 21"/>
+          <p:cNvSpPr/>
+          <p:nvPr/>
+        </p:nvSpPr>
+        <p:spPr>
+          <a:xfrm>
+            <a:off x="6537960" y="5285232"/>
+            <a:ext cx="5029200" cy="457200"/>
           </a:xfrm>
           <a:prstGeom prst="rect">
             <a:avLst/>
@@ -15724,13 +15651,10 @@
           <a:lstStyle/>
           <a:p>
             <a:pPr algn="l" indent="0" marL="0">
-              <a:lnSpc>
-                <a:spcPct val="102000"/>
-              </a:lnSpc>
-              <a:buNone/>
-            </a:pPr>
-            <a:r>
-              <a:rPr lang="en-US" sz="1250" dirty="0">
+              <a:buNone/>
+            </a:pPr>
+            <a:r>
+              <a:rPr lang="en-US" sz="1350" b="1" dirty="0">
                 <a:solidFill>
                   <a:srgbClr val="2B2B33"/>
                 </a:solidFill>
@@ -15738,77 +15662,29 @@
                 <a:ea typeface="Calibri" pitchFamily="34" charset="-122"/>
                 <a:cs typeface="Calibri" pitchFamily="34" charset="-120"/>
               </a:rPr>
-              <a:t>Structural disease — amiodarone</a:t>
-            </a:r>
-            <a:endParaRPr lang="en-US" sz="1250" dirty="0"/>
-          </a:p>
-        </p:txBody>
-      </p:sp>
-      <p:sp>
-        <p:nvSpPr>
-          <p:cNvPr id="36" name="Shape 30"/>
-          <p:cNvSpPr/>
-          <p:nvPr/>
-        </p:nvSpPr>
-        <p:spPr>
-          <a:xfrm>
-            <a:off x="8366760" y="5285232"/>
-            <a:ext cx="118872" cy="118872"/>
-          </a:xfrm>
-          <a:prstGeom prst="ellipse">
-            <a:avLst/>
-          </a:prstGeom>
-          <a:solidFill>
-            <a:srgbClr val="FF4D6D"/>
-          </a:solidFill>
-          <a:ln/>
-        </p:spPr>
-      </p:sp>
-      <p:sp>
-        <p:nvSpPr>
-          <p:cNvPr id="37" name="Text 31"/>
-          <p:cNvSpPr/>
-          <p:nvPr/>
-        </p:nvSpPr>
-        <p:spPr>
-          <a:xfrm>
-            <a:off x="8604504" y="5230368"/>
-            <a:ext cx="2834640" cy="676656"/>
-          </a:xfrm>
-          <a:prstGeom prst="rect">
-            <a:avLst/>
-          </a:prstGeom>
-          <a:noFill/>
-          <a:ln/>
-        </p:spPr>
-        <p:txBody>
-          <a:bodyPr wrap="square" lIns="0" tIns="0" rIns="0" bIns="0" rtlCol="0" anchor="t"/>
-          <a:lstStyle/>
-          <a:p>
-            <a:pPr algn="l" indent="0" marL="0">
-              <a:lnSpc>
-                <a:spcPct val="102000"/>
-              </a:lnSpc>
-              <a:buNone/>
-            </a:pPr>
-            <a:r>
-              <a:rPr lang="en-US" sz="1250" dirty="0">
-                <a:solidFill>
-                  <a:srgbClr val="2B2B33"/>
+              <a:t>Atenolol  </a:t>
+            </a:r>
+            <a:pPr algn="l" indent="0" marL="0">
+              <a:buNone/>
+            </a:pPr>
+            <a:r>
+              <a:rPr lang="en-US" sz="1350" dirty="0">
+                <a:solidFill>
+                  <a:srgbClr val="6B6B76"/>
                 </a:solidFill>
                 <a:latin typeface="Calibri" pitchFamily="34" charset="0"/>
                 <a:ea typeface="Calibri" pitchFamily="34" charset="-122"/>
                 <a:cs typeface="Calibri" pitchFamily="34" charset="-120"/>
               </a:rPr>
-              <a:t>Rate: digoxin; beta-blocker only after 1st trimester</a:t>
-            </a:r>
-            <a:endParaRPr lang="en-US" sz="1250" dirty="0"/>
-          </a:p>
-        </p:txBody>
-      </p:sp>
-      <p:sp>
-        <p:nvSpPr>
-          <p:cNvPr id="38" name="Text 32"/>
+              <a:t>— linked to fetal growth restriction</a:t>
+            </a:r>
+            <a:endParaRPr lang="en-US" sz="1350" dirty="0"/>
+          </a:p>
+        </p:txBody>
+      </p:sp>
+      <p:sp>
+        <p:nvSpPr>
+          <p:cNvPr id="29" name="Text 22"/>
           <p:cNvSpPr/>
           <p:nvPr/>
         </p:nvSpPr>
@@ -15847,7 +15723,7 @@
       </p:sp>
       <p:sp>
         <p:nvSpPr>
-          <p:cNvPr id="39" name="Text 33"/>
+          <p:cNvPr id="30" name="Text 23"/>
           <p:cNvSpPr/>
           <p:nvPr/>
         </p:nvSpPr>
@@ -16616,6 +16492,1240 @@
     <p:bg>
       <p:bgPr>
         <a:solidFill>
+          <a:srgbClr val="FFFFFF"/>
+        </a:solidFill>
+      </p:bgPr>
+    </p:bg>
+    <p:spTree>
+      <p:nvGrpSpPr>
+        <p:cNvPr id="1" name=""/>
+        <p:cNvGrpSpPr/>
+        <p:nvPr/>
+      </p:nvGrpSpPr>
+      <p:grpSpPr>
+        <a:xfrm>
+          <a:off x="0" y="0"/>
+          <a:ext cx="0" cy="0"/>
+          <a:chOff x="0" y="0"/>
+          <a:chExt cx="0" cy="0"/>
+        </a:xfrm>
+      </p:grpSpPr>
+      <p:sp>
+        <p:nvSpPr>
+          <p:cNvPr id="2" name="Shape 0"/>
+          <p:cNvSpPr/>
+          <p:nvPr/>
+        </p:nvSpPr>
+        <p:spPr>
+          <a:xfrm>
+            <a:off x="502920" y="457200"/>
+            <a:ext cx="868680" cy="868680"/>
+          </a:xfrm>
+          <a:prstGeom prst="ellipse">
+            <a:avLst/>
+          </a:prstGeom>
+          <a:solidFill>
+            <a:srgbClr val="FFF0F3"/>
+          </a:solidFill>
+          <a:ln w="12700">
+            <a:solidFill>
+              <a:srgbClr val="FBD8DF"/>
+            </a:solidFill>
+            <a:prstDash val="solid"/>
+          </a:ln>
+        </p:spPr>
+      </p:sp>
+      <p:pic>
+        <p:nvPicPr>
+          <p:cNvPr id="3" name="Image 0" descr="preencoded.png">    </p:cNvPr>
+          <p:cNvPicPr>
+            <a:picLocks noChangeAspect="1"/>
+          </p:cNvPicPr>
+          <p:nvPr/>
+        </p:nvPicPr>
+        <p:blipFill>
+          <a:blip r:embed="rId1"/>
+          <a:stretch>
+            <a:fillRect/>
+          </a:stretch>
+        </p:blipFill>
+        <p:spPr>
+          <a:xfrm>
+            <a:off x="694944" y="649224"/>
+            <a:ext cx="484632" cy="484632"/>
+          </a:xfrm>
+          <a:prstGeom prst="rect">
+            <a:avLst/>
+          </a:prstGeom>
+        </p:spPr>
+      </p:pic>
+      <p:sp>
+        <p:nvSpPr>
+          <p:cNvPr id="4" name="Text 1"/>
+          <p:cNvSpPr/>
+          <p:nvPr/>
+        </p:nvSpPr>
+        <p:spPr>
+          <a:xfrm>
+            <a:off x="1572768" y="502920"/>
+            <a:ext cx="9966960" cy="274320"/>
+          </a:xfrm>
+          <a:prstGeom prst="rect">
+            <a:avLst/>
+          </a:prstGeom>
+          <a:noFill/>
+          <a:ln/>
+        </p:spPr>
+        <p:txBody>
+          <a:bodyPr wrap="square" rtlCol="0" anchor="t"/>
+          <a:lstStyle/>
+          <a:p>
+            <a:pPr algn="l" indent="0" marL="0">
+              <a:buNone/>
+            </a:pPr>
+            <a:r>
+              <a:rPr lang="en-US" sz="1250" b="1" spc="200" kern="0" dirty="0">
+                <a:solidFill>
+                  <a:srgbClr val="A4133C"/>
+                </a:solidFill>
+                <a:latin typeface="Calibri" pitchFamily="34" charset="0"/>
+                <a:ea typeface="Calibri" pitchFamily="34" charset="-122"/>
+                <a:cs typeface="Calibri" pitchFamily="34" charset="-120"/>
+              </a:rPr>
+              <a:t>SPECIAL POPULATIONS · PREGNANCY</a:t>
+            </a:r>
+            <a:endParaRPr lang="en-US" sz="1250" dirty="0"/>
+          </a:p>
+        </p:txBody>
+      </p:sp>
+      <p:sp>
+        <p:nvSpPr>
+          <p:cNvPr id="5" name="Text 2"/>
+          <p:cNvSpPr/>
+          <p:nvPr/>
+        </p:nvSpPr>
+        <p:spPr>
+          <a:xfrm>
+            <a:off x="1554480" y="749808"/>
+            <a:ext cx="10241280" cy="640080"/>
+          </a:xfrm>
+          <a:prstGeom prst="rect">
+            <a:avLst/>
+          </a:prstGeom>
+          <a:noFill/>
+          <a:ln/>
+        </p:spPr>
+        <p:txBody>
+          <a:bodyPr wrap="square" rtlCol="0" anchor="t"/>
+          <a:lstStyle/>
+          <a:p>
+            <a:pPr algn="l" indent="0" marL="0">
+              <a:buNone/>
+            </a:pPr>
+            <a:r>
+              <a:rPr lang="en-US" sz="3000" b="1" dirty="0">
+                <a:solidFill>
+                  <a:srgbClr val="2B2B33"/>
+                </a:solidFill>
+                <a:latin typeface="Cambria" pitchFamily="34" charset="0"/>
+                <a:ea typeface="Cambria" pitchFamily="34" charset="-122"/>
+                <a:cs typeface="Cambria" pitchFamily="34" charset="-120"/>
+              </a:rPr>
+              <a:t>AF in Pregnancy — Overview</a:t>
+            </a:r>
+            <a:endParaRPr lang="en-US" sz="3000" dirty="0"/>
+          </a:p>
+        </p:txBody>
+      </p:sp>
+      <p:sp>
+        <p:nvSpPr>
+          <p:cNvPr id="6" name="Shape 3"/>
+          <p:cNvSpPr/>
+          <p:nvPr/>
+        </p:nvSpPr>
+        <p:spPr>
+          <a:xfrm>
+            <a:off x="502920" y="1572768"/>
+            <a:ext cx="11183112" cy="914400"/>
+          </a:xfrm>
+          <a:prstGeom prst="roundRect">
+            <a:avLst>
+              <a:gd name="adj" fmla="val 12000"/>
+            </a:avLst>
+          </a:prstGeom>
+          <a:solidFill>
+            <a:srgbClr val="590D22"/>
+          </a:solidFill>
+          <a:ln/>
+          <a:effectLst>
+            <a:outerShdw sx="100000" sy="100000" kx="0" ky="0" algn="bl" rotWithShape="0" blurRad="127000" dist="50800" dir="5400000">
+              <a:srgbClr val="C9A3AC">
+                <a:alpha val="45000"/>
+              </a:srgbClr>
+            </a:outerShdw>
+          </a:effectLst>
+        </p:spPr>
+      </p:sp>
+      <p:sp>
+        <p:nvSpPr>
+          <p:cNvPr id="7" name="Text 4"/>
+          <p:cNvSpPr/>
+          <p:nvPr/>
+        </p:nvSpPr>
+        <p:spPr>
+          <a:xfrm>
+            <a:off x="914400" y="1572768"/>
+            <a:ext cx="10424160" cy="914400"/>
+          </a:xfrm>
+          <a:prstGeom prst="rect">
+            <a:avLst/>
+          </a:prstGeom>
+          <a:noFill/>
+          <a:ln/>
+        </p:spPr>
+        <p:txBody>
+          <a:bodyPr wrap="square" rtlCol="0" anchor="ctr"/>
+          <a:lstStyle/>
+          <a:p>
+            <a:pPr algn="l" indent="0" marL="0">
+              <a:lnSpc>
+                <a:spcPct val="110000"/>
+              </a:lnSpc>
+              <a:buNone/>
+            </a:pPr>
+            <a:r>
+              <a:rPr lang="en-US" sz="1400" b="1" dirty="0">
+                <a:solidFill>
+                  <a:srgbClr val="FFFFFF"/>
+                </a:solidFill>
+                <a:latin typeface="Calibri" pitchFamily="34" charset="0"/>
+                <a:ea typeface="Calibri" pitchFamily="34" charset="-122"/>
+                <a:cs typeface="Calibri" pitchFamily="34" charset="-120"/>
+              </a:rPr>
+              <a:t>Rare — ~60 / 100,000 pregnancies</a:t>
+            </a:r>
+            <a:pPr algn="l" indent="0" marL="0">
+              <a:lnSpc>
+                <a:spcPct val="110000"/>
+              </a:lnSpc>
+              <a:buNone/>
+            </a:pPr>
+            <a:r>
+              <a:rPr lang="en-US" sz="1400" dirty="0">
+                <a:solidFill>
+                  <a:srgbClr val="FBD8DF"/>
+                </a:solidFill>
+                <a:latin typeface="Calibri" pitchFamily="34" charset="0"/>
+                <a:ea typeface="Calibri" pitchFamily="34" charset="-122"/>
+                <a:cs typeface="Calibri" pitchFamily="34" charset="-120"/>
+              </a:rPr>
+              <a:t>   ·   often congenital / valvular disease, thyrotoxicosis or electrolyte disturbance   ·   hypercoagulable, but no proven rise in AF-related thromboembolism</a:t>
+            </a:r>
+            <a:endParaRPr lang="en-US" sz="1400" dirty="0"/>
+          </a:p>
+        </p:txBody>
+      </p:sp>
+      <p:sp>
+        <p:nvSpPr>
+          <p:cNvPr id="8" name="Shape 5"/>
+          <p:cNvSpPr/>
+          <p:nvPr/>
+        </p:nvSpPr>
+        <p:spPr>
+          <a:xfrm>
+            <a:off x="502920" y="2670048"/>
+            <a:ext cx="3611880" cy="3319272"/>
+          </a:xfrm>
+          <a:prstGeom prst="roundRect">
+            <a:avLst>
+              <a:gd name="adj" fmla="val 3306"/>
+            </a:avLst>
+          </a:prstGeom>
+          <a:solidFill>
+            <a:srgbClr val="FFF0F3"/>
+          </a:solidFill>
+          <a:ln w="12700">
+            <a:solidFill>
+              <a:srgbClr val="FBD8DF"/>
+            </a:solidFill>
+            <a:prstDash val="solid"/>
+          </a:ln>
+          <a:effectLst>
+            <a:outerShdw sx="100000" sy="100000" kx="0" ky="0" algn="bl" rotWithShape="0" blurRad="127000" dist="50800" dir="5400000">
+              <a:srgbClr val="C9A3AC">
+                <a:alpha val="45000"/>
+              </a:srgbClr>
+            </a:outerShdw>
+          </a:effectLst>
+        </p:spPr>
+      </p:sp>
+      <p:sp>
+        <p:nvSpPr>
+          <p:cNvPr id="9" name="Shape 6"/>
+          <p:cNvSpPr/>
+          <p:nvPr/>
+        </p:nvSpPr>
+        <p:spPr>
+          <a:xfrm>
+            <a:off x="777240" y="2926080"/>
+            <a:ext cx="658368" cy="658368"/>
+          </a:xfrm>
+          <a:prstGeom prst="ellipse">
+            <a:avLst/>
+          </a:prstGeom>
+          <a:solidFill>
+            <a:srgbClr val="A4133C"/>
+          </a:solidFill>
+          <a:ln/>
+        </p:spPr>
+      </p:sp>
+      <p:pic>
+        <p:nvPicPr>
+          <p:cNvPr id="10" name="Image 1" descr="preencoded.png">    </p:cNvPr>
+          <p:cNvPicPr>
+            <a:picLocks noChangeAspect="1"/>
+          </p:cNvPicPr>
+          <p:nvPr/>
+        </p:nvPicPr>
+        <p:blipFill>
+          <a:blip r:embed="rId2"/>
+          <a:stretch>
+            <a:fillRect/>
+          </a:stretch>
+        </p:blipFill>
+        <p:spPr>
+          <a:xfrm>
+            <a:off x="932688" y="3081528"/>
+            <a:ext cx="347472" cy="347472"/>
+          </a:xfrm>
+          <a:prstGeom prst="rect">
+            <a:avLst/>
+          </a:prstGeom>
+        </p:spPr>
+      </p:pic>
+      <p:sp>
+        <p:nvSpPr>
+          <p:cNvPr id="11" name="Text 7"/>
+          <p:cNvSpPr/>
+          <p:nvPr/>
+        </p:nvSpPr>
+        <p:spPr>
+          <a:xfrm>
+            <a:off x="1554480" y="2926080"/>
+            <a:ext cx="2423160" cy="658368"/>
+          </a:xfrm>
+          <a:prstGeom prst="rect">
+            <a:avLst/>
+          </a:prstGeom>
+          <a:noFill/>
+          <a:ln/>
+        </p:spPr>
+        <p:txBody>
+          <a:bodyPr wrap="square" lIns="0" tIns="0" rIns="0" bIns="0" rtlCol="0" anchor="ctr"/>
+          <a:lstStyle/>
+          <a:p>
+            <a:pPr algn="l" indent="0" marL="0">
+              <a:buNone/>
+            </a:pPr>
+            <a:r>
+              <a:rPr lang="en-US" sz="1700" b="1" dirty="0">
+                <a:solidFill>
+                  <a:srgbClr val="2B2B33"/>
+                </a:solidFill>
+                <a:latin typeface="Cambria" pitchFamily="34" charset="0"/>
+                <a:ea typeface="Cambria" pitchFamily="34" charset="-122"/>
+                <a:cs typeface="Cambria" pitchFamily="34" charset="-120"/>
+              </a:rPr>
+              <a:t>Anticoagulation</a:t>
+            </a:r>
+            <a:endParaRPr lang="en-US" sz="1700" dirty="0"/>
+          </a:p>
+        </p:txBody>
+      </p:sp>
+      <p:sp>
+        <p:nvSpPr>
+          <p:cNvPr id="12" name="Shape 8"/>
+          <p:cNvSpPr/>
+          <p:nvPr/>
+        </p:nvSpPr>
+        <p:spPr>
+          <a:xfrm>
+            <a:off x="795528" y="3822192"/>
+            <a:ext cx="118872" cy="118872"/>
+          </a:xfrm>
+          <a:prstGeom prst="ellipse">
+            <a:avLst/>
+          </a:prstGeom>
+          <a:solidFill>
+            <a:srgbClr val="FF4D6D"/>
+          </a:solidFill>
+          <a:ln/>
+        </p:spPr>
+      </p:sp>
+      <p:sp>
+        <p:nvSpPr>
+          <p:cNvPr id="13" name="Text 9"/>
+          <p:cNvSpPr/>
+          <p:nvPr/>
+        </p:nvSpPr>
+        <p:spPr>
+          <a:xfrm>
+            <a:off x="1033272" y="3767328"/>
+            <a:ext cx="2834640" cy="676656"/>
+          </a:xfrm>
+          <a:prstGeom prst="rect">
+            <a:avLst/>
+          </a:prstGeom>
+          <a:noFill/>
+          <a:ln/>
+        </p:spPr>
+        <p:txBody>
+          <a:bodyPr wrap="square" lIns="0" tIns="0" rIns="0" bIns="0" rtlCol="0" anchor="t"/>
+          <a:lstStyle/>
+          <a:p>
+            <a:pPr algn="l" indent="0" marL="0">
+              <a:lnSpc>
+                <a:spcPct val="102000"/>
+              </a:lnSpc>
+              <a:buNone/>
+            </a:pPr>
+            <a:r>
+              <a:rPr lang="en-US" sz="1250" dirty="0">
+                <a:solidFill>
+                  <a:srgbClr val="2B2B33"/>
+                </a:solidFill>
+                <a:latin typeface="Calibri" pitchFamily="34" charset="0"/>
+                <a:ea typeface="Calibri" pitchFamily="34" charset="-122"/>
+                <a:cs typeface="Calibri" pitchFamily="34" charset="-120"/>
+              </a:rPr>
+              <a:t>Same criteria as non-pregnant women</a:t>
+            </a:r>
+            <a:endParaRPr lang="en-US" sz="1250" dirty="0"/>
+          </a:p>
+        </p:txBody>
+      </p:sp>
+      <p:sp>
+        <p:nvSpPr>
+          <p:cNvPr id="14" name="Shape 10"/>
+          <p:cNvSpPr/>
+          <p:nvPr/>
+        </p:nvSpPr>
+        <p:spPr>
+          <a:xfrm>
+            <a:off x="795528" y="4553712"/>
+            <a:ext cx="118872" cy="118872"/>
+          </a:xfrm>
+          <a:prstGeom prst="ellipse">
+            <a:avLst/>
+          </a:prstGeom>
+          <a:solidFill>
+            <a:srgbClr val="FF4D6D"/>
+          </a:solidFill>
+          <a:ln/>
+        </p:spPr>
+      </p:sp>
+      <p:sp>
+        <p:nvSpPr>
+          <p:cNvPr id="15" name="Text 11"/>
+          <p:cNvSpPr/>
+          <p:nvPr/>
+        </p:nvSpPr>
+        <p:spPr>
+          <a:xfrm>
+            <a:off x="1033272" y="4498848"/>
+            <a:ext cx="2834640" cy="676656"/>
+          </a:xfrm>
+          <a:prstGeom prst="rect">
+            <a:avLst/>
+          </a:prstGeom>
+          <a:noFill/>
+          <a:ln/>
+        </p:spPr>
+        <p:txBody>
+          <a:bodyPr wrap="square" lIns="0" tIns="0" rIns="0" bIns="0" rtlCol="0" anchor="t"/>
+          <a:lstStyle/>
+          <a:p>
+            <a:pPr algn="l" indent="0" marL="0">
+              <a:lnSpc>
+                <a:spcPct val="102000"/>
+              </a:lnSpc>
+              <a:buNone/>
+            </a:pPr>
+            <a:r>
+              <a:rPr lang="en-US" sz="1250" dirty="0">
+                <a:solidFill>
+                  <a:srgbClr val="2B2B33"/>
+                </a:solidFill>
+                <a:latin typeface="Calibri" pitchFamily="34" charset="0"/>
+                <a:ea typeface="Calibri" pitchFamily="34" charset="-122"/>
+                <a:cs typeface="Calibri" pitchFamily="34" charset="-120"/>
+              </a:rPr>
+              <a:t>Warfarin (not DOAC) — 2nd trimester to 1 month before delivery</a:t>
+            </a:r>
+            <a:endParaRPr lang="en-US" sz="1250" dirty="0"/>
+          </a:p>
+        </p:txBody>
+      </p:sp>
+      <p:sp>
+        <p:nvSpPr>
+          <p:cNvPr id="16" name="Shape 12"/>
+          <p:cNvSpPr/>
+          <p:nvPr/>
+        </p:nvSpPr>
+        <p:spPr>
+          <a:xfrm>
+            <a:off x="795528" y="5285232"/>
+            <a:ext cx="118872" cy="118872"/>
+          </a:xfrm>
+          <a:prstGeom prst="ellipse">
+            <a:avLst/>
+          </a:prstGeom>
+          <a:solidFill>
+            <a:srgbClr val="FF4D6D"/>
+          </a:solidFill>
+          <a:ln/>
+        </p:spPr>
+      </p:sp>
+      <p:sp>
+        <p:nvSpPr>
+          <p:cNvPr id="17" name="Text 13"/>
+          <p:cNvSpPr/>
+          <p:nvPr/>
+        </p:nvSpPr>
+        <p:spPr>
+          <a:xfrm>
+            <a:off x="1033272" y="5230368"/>
+            <a:ext cx="2834640" cy="676656"/>
+          </a:xfrm>
+          <a:prstGeom prst="rect">
+            <a:avLst/>
+          </a:prstGeom>
+          <a:noFill/>
+          <a:ln/>
+        </p:spPr>
+        <p:txBody>
+          <a:bodyPr wrap="square" lIns="0" tIns="0" rIns="0" bIns="0" rtlCol="0" anchor="t"/>
+          <a:lstStyle/>
+          <a:p>
+            <a:pPr algn="l" indent="0" marL="0">
+              <a:lnSpc>
+                <a:spcPct val="102000"/>
+              </a:lnSpc>
+              <a:buNone/>
+            </a:pPr>
+            <a:r>
+              <a:rPr lang="en-US" sz="1250" dirty="0">
+                <a:solidFill>
+                  <a:srgbClr val="2B2B33"/>
+                </a:solidFill>
+                <a:latin typeface="Calibri" pitchFamily="34" charset="0"/>
+                <a:ea typeface="Calibri" pitchFamily="34" charset="-122"/>
+                <a:cs typeface="Calibri" pitchFamily="34" charset="-120"/>
+              </a:rPr>
+              <a:t>LMWH (SC) — 1st trimester &amp; final month</a:t>
+            </a:r>
+            <a:endParaRPr lang="en-US" sz="1250" dirty="0"/>
+          </a:p>
+        </p:txBody>
+      </p:sp>
+      <p:sp>
+        <p:nvSpPr>
+          <p:cNvPr id="18" name="Shape 14"/>
+          <p:cNvSpPr/>
+          <p:nvPr/>
+        </p:nvSpPr>
+        <p:spPr>
+          <a:xfrm>
+            <a:off x="4288536" y="2670048"/>
+            <a:ext cx="3611880" cy="3319272"/>
+          </a:xfrm>
+          <a:prstGeom prst="roundRect">
+            <a:avLst>
+              <a:gd name="adj" fmla="val 3306"/>
+            </a:avLst>
+          </a:prstGeom>
+          <a:solidFill>
+            <a:srgbClr val="FFF0F3"/>
+          </a:solidFill>
+          <a:ln w="12700">
+            <a:solidFill>
+              <a:srgbClr val="FBD8DF"/>
+            </a:solidFill>
+            <a:prstDash val="solid"/>
+          </a:ln>
+          <a:effectLst>
+            <a:outerShdw sx="100000" sy="100000" kx="0" ky="0" algn="bl" rotWithShape="0" blurRad="127000" dist="50800" dir="5400000">
+              <a:srgbClr val="C9A3AC">
+                <a:alpha val="45000"/>
+              </a:srgbClr>
+            </a:outerShdw>
+          </a:effectLst>
+        </p:spPr>
+      </p:sp>
+      <p:sp>
+        <p:nvSpPr>
+          <p:cNvPr id="19" name="Shape 15"/>
+          <p:cNvSpPr/>
+          <p:nvPr/>
+        </p:nvSpPr>
+        <p:spPr>
+          <a:xfrm>
+            <a:off x="4562856" y="2926080"/>
+            <a:ext cx="658368" cy="658368"/>
+          </a:xfrm>
+          <a:prstGeom prst="ellipse">
+            <a:avLst/>
+          </a:prstGeom>
+          <a:solidFill>
+            <a:srgbClr val="A4133C"/>
+          </a:solidFill>
+          <a:ln/>
+        </p:spPr>
+      </p:sp>
+      <p:pic>
+        <p:nvPicPr>
+          <p:cNvPr id="20" name="Image 2" descr="preencoded.png">    </p:cNvPr>
+          <p:cNvPicPr>
+            <a:picLocks noChangeAspect="1"/>
+          </p:cNvPicPr>
+          <p:nvPr/>
+        </p:nvPicPr>
+        <p:blipFill>
+          <a:blip r:embed="rId3"/>
+          <a:stretch>
+            <a:fillRect/>
+          </a:stretch>
+        </p:blipFill>
+        <p:spPr>
+          <a:xfrm>
+            <a:off x="4718304" y="3081528"/>
+            <a:ext cx="347472" cy="347472"/>
+          </a:xfrm>
+          <a:prstGeom prst="rect">
+            <a:avLst/>
+          </a:prstGeom>
+        </p:spPr>
+      </p:pic>
+      <p:sp>
+        <p:nvSpPr>
+          <p:cNvPr id="21" name="Text 16"/>
+          <p:cNvSpPr/>
+          <p:nvPr/>
+        </p:nvSpPr>
+        <p:spPr>
+          <a:xfrm>
+            <a:off x="5340096" y="2926080"/>
+            <a:ext cx="2423160" cy="658368"/>
+          </a:xfrm>
+          <a:prstGeom prst="rect">
+            <a:avLst/>
+          </a:prstGeom>
+          <a:noFill/>
+          <a:ln/>
+        </p:spPr>
+        <p:txBody>
+          <a:bodyPr wrap="square" lIns="0" tIns="0" rIns="0" bIns="0" rtlCol="0" anchor="ctr"/>
+          <a:lstStyle/>
+          <a:p>
+            <a:pPr algn="l" indent="0" marL="0">
+              <a:buNone/>
+            </a:pPr>
+            <a:r>
+              <a:rPr lang="en-US" sz="1700" b="1" dirty="0">
+                <a:solidFill>
+                  <a:srgbClr val="2B2B33"/>
+                </a:solidFill>
+                <a:latin typeface="Cambria" pitchFamily="34" charset="0"/>
+                <a:ea typeface="Cambria" pitchFamily="34" charset="-122"/>
+                <a:cs typeface="Cambria" pitchFamily="34" charset="-120"/>
+              </a:rPr>
+              <a:t>Acute Management</a:t>
+            </a:r>
+            <a:endParaRPr lang="en-US" sz="1700" dirty="0"/>
+          </a:p>
+        </p:txBody>
+      </p:sp>
+      <p:sp>
+        <p:nvSpPr>
+          <p:cNvPr id="22" name="Shape 17"/>
+          <p:cNvSpPr/>
+          <p:nvPr/>
+        </p:nvSpPr>
+        <p:spPr>
+          <a:xfrm>
+            <a:off x="4581144" y="3822192"/>
+            <a:ext cx="118872" cy="118872"/>
+          </a:xfrm>
+          <a:prstGeom prst="ellipse">
+            <a:avLst/>
+          </a:prstGeom>
+          <a:solidFill>
+            <a:srgbClr val="FF4D6D"/>
+          </a:solidFill>
+          <a:ln/>
+        </p:spPr>
+      </p:sp>
+      <p:sp>
+        <p:nvSpPr>
+          <p:cNvPr id="23" name="Text 18"/>
+          <p:cNvSpPr/>
+          <p:nvPr/>
+        </p:nvSpPr>
+        <p:spPr>
+          <a:xfrm>
+            <a:off x="4818888" y="3767328"/>
+            <a:ext cx="2834640" cy="676656"/>
+          </a:xfrm>
+          <a:prstGeom prst="rect">
+            <a:avLst/>
+          </a:prstGeom>
+          <a:noFill/>
+          <a:ln/>
+        </p:spPr>
+        <p:txBody>
+          <a:bodyPr wrap="square" lIns="0" tIns="0" rIns="0" bIns="0" rtlCol="0" anchor="t"/>
+          <a:lstStyle/>
+          <a:p>
+            <a:pPr algn="l" indent="0" marL="0">
+              <a:lnSpc>
+                <a:spcPct val="102000"/>
+              </a:lnSpc>
+              <a:buNone/>
+            </a:pPr>
+            <a:r>
+              <a:rPr lang="en-US" sz="1250" dirty="0">
+                <a:solidFill>
+                  <a:srgbClr val="2B2B33"/>
+                </a:solidFill>
+                <a:latin typeface="Calibri" pitchFamily="34" charset="0"/>
+                <a:ea typeface="Calibri" pitchFamily="34" charset="-122"/>
+                <a:cs typeface="Calibri" pitchFamily="34" charset="-120"/>
+              </a:rPr>
+              <a:t>DC cardioversion — safe at all stages</a:t>
+            </a:r>
+            <a:endParaRPr lang="en-US" sz="1250" dirty="0"/>
+          </a:p>
+        </p:txBody>
+      </p:sp>
+      <p:sp>
+        <p:nvSpPr>
+          <p:cNvPr id="24" name="Shape 19"/>
+          <p:cNvSpPr/>
+          <p:nvPr/>
+        </p:nvSpPr>
+        <p:spPr>
+          <a:xfrm>
+            <a:off x="4581144" y="4553712"/>
+            <a:ext cx="118872" cy="118872"/>
+          </a:xfrm>
+          <a:prstGeom prst="ellipse">
+            <a:avLst/>
+          </a:prstGeom>
+          <a:solidFill>
+            <a:srgbClr val="FF4D6D"/>
+          </a:solidFill>
+          <a:ln/>
+        </p:spPr>
+      </p:sp>
+      <p:sp>
+        <p:nvSpPr>
+          <p:cNvPr id="25" name="Text 20"/>
+          <p:cNvSpPr/>
+          <p:nvPr/>
+        </p:nvSpPr>
+        <p:spPr>
+          <a:xfrm>
+            <a:off x="4818888" y="4498848"/>
+            <a:ext cx="2834640" cy="676656"/>
+          </a:xfrm>
+          <a:prstGeom prst="rect">
+            <a:avLst/>
+          </a:prstGeom>
+          <a:noFill/>
+          <a:ln/>
+        </p:spPr>
+        <p:txBody>
+          <a:bodyPr wrap="square" lIns="0" tIns="0" rIns="0" bIns="0" rtlCol="0" anchor="t"/>
+          <a:lstStyle/>
+          <a:p>
+            <a:pPr algn="l" indent="0" marL="0">
+              <a:lnSpc>
+                <a:spcPct val="102000"/>
+              </a:lnSpc>
+              <a:buNone/>
+            </a:pPr>
+            <a:r>
+              <a:rPr lang="en-US" sz="1250" dirty="0">
+                <a:solidFill>
+                  <a:srgbClr val="2B2B33"/>
+                </a:solidFill>
+                <a:latin typeface="Calibri" pitchFamily="34" charset="0"/>
+                <a:ea typeface="Calibri" pitchFamily="34" charset="-122"/>
+                <a:cs typeface="Calibri" pitchFamily="34" charset="-120"/>
+              </a:rPr>
+              <a:t>IV metoprolol — rate control</a:t>
+            </a:r>
+            <a:endParaRPr lang="en-US" sz="1250" dirty="0"/>
+          </a:p>
+        </p:txBody>
+      </p:sp>
+      <p:sp>
+        <p:nvSpPr>
+          <p:cNvPr id="26" name="Shape 21"/>
+          <p:cNvSpPr/>
+          <p:nvPr/>
+        </p:nvSpPr>
+        <p:spPr>
+          <a:xfrm>
+            <a:off x="4581144" y="5285232"/>
+            <a:ext cx="118872" cy="118872"/>
+          </a:xfrm>
+          <a:prstGeom prst="ellipse">
+            <a:avLst/>
+          </a:prstGeom>
+          <a:solidFill>
+            <a:srgbClr val="FF4D6D"/>
+          </a:solidFill>
+          <a:ln/>
+        </p:spPr>
+      </p:sp>
+      <p:sp>
+        <p:nvSpPr>
+          <p:cNvPr id="27" name="Text 22"/>
+          <p:cNvSpPr/>
+          <p:nvPr/>
+        </p:nvSpPr>
+        <p:spPr>
+          <a:xfrm>
+            <a:off x="4818888" y="5230368"/>
+            <a:ext cx="2834640" cy="676656"/>
+          </a:xfrm>
+          <a:prstGeom prst="rect">
+            <a:avLst/>
+          </a:prstGeom>
+          <a:noFill/>
+          <a:ln/>
+        </p:spPr>
+        <p:txBody>
+          <a:bodyPr wrap="square" lIns="0" tIns="0" rIns="0" bIns="0" rtlCol="0" anchor="t"/>
+          <a:lstStyle/>
+          <a:p>
+            <a:pPr algn="l" indent="0" marL="0">
+              <a:lnSpc>
+                <a:spcPct val="102000"/>
+              </a:lnSpc>
+              <a:buNone/>
+            </a:pPr>
+            <a:r>
+              <a:rPr lang="en-US" sz="1250" dirty="0">
+                <a:solidFill>
+                  <a:srgbClr val="2B2B33"/>
+                </a:solidFill>
+                <a:latin typeface="Calibri" pitchFamily="34" charset="0"/>
+                <a:ea typeface="Calibri" pitchFamily="34" charset="-122"/>
+                <a:cs typeface="Calibri" pitchFamily="34" charset="-120"/>
+              </a:rPr>
+              <a:t>Flecainide or sotalol — conversion to sinus rhythm</a:t>
+            </a:r>
+            <a:endParaRPr lang="en-US" sz="1250" dirty="0"/>
+          </a:p>
+        </p:txBody>
+      </p:sp>
+      <p:sp>
+        <p:nvSpPr>
+          <p:cNvPr id="28" name="Shape 23"/>
+          <p:cNvSpPr/>
+          <p:nvPr/>
+        </p:nvSpPr>
+        <p:spPr>
+          <a:xfrm>
+            <a:off x="8074152" y="2670048"/>
+            <a:ext cx="3611880" cy="3319272"/>
+          </a:xfrm>
+          <a:prstGeom prst="roundRect">
+            <a:avLst>
+              <a:gd name="adj" fmla="val 3306"/>
+            </a:avLst>
+          </a:prstGeom>
+          <a:solidFill>
+            <a:srgbClr val="FFF0F3"/>
+          </a:solidFill>
+          <a:ln w="12700">
+            <a:solidFill>
+              <a:srgbClr val="FBD8DF"/>
+            </a:solidFill>
+            <a:prstDash val="solid"/>
+          </a:ln>
+          <a:effectLst>
+            <a:outerShdw sx="100000" sy="100000" kx="0" ky="0" algn="bl" rotWithShape="0" blurRad="127000" dist="50800" dir="5400000">
+              <a:srgbClr val="C9A3AC">
+                <a:alpha val="45000"/>
+              </a:srgbClr>
+            </a:outerShdw>
+          </a:effectLst>
+        </p:spPr>
+      </p:sp>
+      <p:sp>
+        <p:nvSpPr>
+          <p:cNvPr id="29" name="Shape 24"/>
+          <p:cNvSpPr/>
+          <p:nvPr/>
+        </p:nvSpPr>
+        <p:spPr>
+          <a:xfrm>
+            <a:off x="8348472" y="2926080"/>
+            <a:ext cx="658368" cy="658368"/>
+          </a:xfrm>
+          <a:prstGeom prst="ellipse">
+            <a:avLst/>
+          </a:prstGeom>
+          <a:solidFill>
+            <a:srgbClr val="A4133C"/>
+          </a:solidFill>
+          <a:ln/>
+        </p:spPr>
+      </p:sp>
+      <p:pic>
+        <p:nvPicPr>
+          <p:cNvPr id="30" name="Image 3" descr="preencoded.png">    </p:cNvPr>
+          <p:cNvPicPr>
+            <a:picLocks noChangeAspect="1"/>
+          </p:cNvPicPr>
+          <p:nvPr/>
+        </p:nvPicPr>
+        <p:blipFill>
+          <a:blip r:embed="rId4"/>
+          <a:stretch>
+            <a:fillRect/>
+          </a:stretch>
+        </p:blipFill>
+        <p:spPr>
+          <a:xfrm>
+            <a:off x="8503920" y="3081528"/>
+            <a:ext cx="347472" cy="347472"/>
+          </a:xfrm>
+          <a:prstGeom prst="rect">
+            <a:avLst/>
+          </a:prstGeom>
+        </p:spPr>
+      </p:pic>
+      <p:sp>
+        <p:nvSpPr>
+          <p:cNvPr id="31" name="Text 25"/>
+          <p:cNvSpPr/>
+          <p:nvPr/>
+        </p:nvSpPr>
+        <p:spPr>
+          <a:xfrm>
+            <a:off x="9125712" y="2926080"/>
+            <a:ext cx="2423160" cy="658368"/>
+          </a:xfrm>
+          <a:prstGeom prst="rect">
+            <a:avLst/>
+          </a:prstGeom>
+          <a:noFill/>
+          <a:ln/>
+        </p:spPr>
+        <p:txBody>
+          <a:bodyPr wrap="square" lIns="0" tIns="0" rIns="0" bIns="0" rtlCol="0" anchor="ctr"/>
+          <a:lstStyle/>
+          <a:p>
+            <a:pPr algn="l" indent="0" marL="0">
+              <a:buNone/>
+            </a:pPr>
+            <a:r>
+              <a:rPr lang="en-US" sz="1700" b="1" dirty="0">
+                <a:solidFill>
+                  <a:srgbClr val="2B2B33"/>
+                </a:solidFill>
+                <a:latin typeface="Cambria" pitchFamily="34" charset="0"/>
+                <a:ea typeface="Cambria" pitchFamily="34" charset="-122"/>
+                <a:cs typeface="Cambria" pitchFamily="34" charset="-120"/>
+              </a:rPr>
+              <a:t>Long-term Rhythm</a:t>
+            </a:r>
+            <a:endParaRPr lang="en-US" sz="1700" dirty="0"/>
+          </a:p>
+        </p:txBody>
+      </p:sp>
+      <p:sp>
+        <p:nvSpPr>
+          <p:cNvPr id="32" name="Shape 26"/>
+          <p:cNvSpPr/>
+          <p:nvPr/>
+        </p:nvSpPr>
+        <p:spPr>
+          <a:xfrm>
+            <a:off x="8366760" y="3822192"/>
+            <a:ext cx="118872" cy="118872"/>
+          </a:xfrm>
+          <a:prstGeom prst="ellipse">
+            <a:avLst/>
+          </a:prstGeom>
+          <a:solidFill>
+            <a:srgbClr val="FF4D6D"/>
+          </a:solidFill>
+          <a:ln/>
+        </p:spPr>
+      </p:sp>
+      <p:sp>
+        <p:nvSpPr>
+          <p:cNvPr id="33" name="Text 27"/>
+          <p:cNvSpPr/>
+          <p:nvPr/>
+        </p:nvSpPr>
+        <p:spPr>
+          <a:xfrm>
+            <a:off x="8604504" y="3767328"/>
+            <a:ext cx="2834640" cy="676656"/>
+          </a:xfrm>
+          <a:prstGeom prst="rect">
+            <a:avLst/>
+          </a:prstGeom>
+          <a:noFill/>
+          <a:ln/>
+        </p:spPr>
+        <p:txBody>
+          <a:bodyPr wrap="square" lIns="0" tIns="0" rIns="0" bIns="0" rtlCol="0" anchor="t"/>
+          <a:lstStyle/>
+          <a:p>
+            <a:pPr algn="l" indent="0" marL="0">
+              <a:lnSpc>
+                <a:spcPct val="102000"/>
+              </a:lnSpc>
+              <a:buNone/>
+            </a:pPr>
+            <a:r>
+              <a:rPr lang="en-US" sz="1250" dirty="0">
+                <a:solidFill>
+                  <a:srgbClr val="2B2B33"/>
+                </a:solidFill>
+                <a:latin typeface="Calibri" pitchFamily="34" charset="0"/>
+                <a:ea typeface="Calibri" pitchFamily="34" charset="-122"/>
+                <a:cs typeface="Calibri" pitchFamily="34" charset="-120"/>
+              </a:rPr>
+              <a:t>No structural disease — flecainide, sotalol</a:t>
+            </a:r>
+            <a:endParaRPr lang="en-US" sz="1250" dirty="0"/>
+          </a:p>
+        </p:txBody>
+      </p:sp>
+      <p:sp>
+        <p:nvSpPr>
+          <p:cNvPr id="34" name="Shape 28"/>
+          <p:cNvSpPr/>
+          <p:nvPr/>
+        </p:nvSpPr>
+        <p:spPr>
+          <a:xfrm>
+            <a:off x="8366760" y="4553712"/>
+            <a:ext cx="118872" cy="118872"/>
+          </a:xfrm>
+          <a:prstGeom prst="ellipse">
+            <a:avLst/>
+          </a:prstGeom>
+          <a:solidFill>
+            <a:srgbClr val="FF4D6D"/>
+          </a:solidFill>
+          <a:ln/>
+        </p:spPr>
+      </p:sp>
+      <p:sp>
+        <p:nvSpPr>
+          <p:cNvPr id="35" name="Text 29"/>
+          <p:cNvSpPr/>
+          <p:nvPr/>
+        </p:nvSpPr>
+        <p:spPr>
+          <a:xfrm>
+            <a:off x="8604504" y="4498848"/>
+            <a:ext cx="2834640" cy="676656"/>
+          </a:xfrm>
+          <a:prstGeom prst="rect">
+            <a:avLst/>
+          </a:prstGeom>
+          <a:noFill/>
+          <a:ln/>
+        </p:spPr>
+        <p:txBody>
+          <a:bodyPr wrap="square" lIns="0" tIns="0" rIns="0" bIns="0" rtlCol="0" anchor="t"/>
+          <a:lstStyle/>
+          <a:p>
+            <a:pPr algn="l" indent="0" marL="0">
+              <a:lnSpc>
+                <a:spcPct val="102000"/>
+              </a:lnSpc>
+              <a:buNone/>
+            </a:pPr>
+            <a:r>
+              <a:rPr lang="en-US" sz="1250" dirty="0">
+                <a:solidFill>
+                  <a:srgbClr val="2B2B33"/>
+                </a:solidFill>
+                <a:latin typeface="Calibri" pitchFamily="34" charset="0"/>
+                <a:ea typeface="Calibri" pitchFamily="34" charset="-122"/>
+                <a:cs typeface="Calibri" pitchFamily="34" charset="-120"/>
+              </a:rPr>
+              <a:t>Structural disease — amiodarone</a:t>
+            </a:r>
+            <a:endParaRPr lang="en-US" sz="1250" dirty="0"/>
+          </a:p>
+        </p:txBody>
+      </p:sp>
+      <p:sp>
+        <p:nvSpPr>
+          <p:cNvPr id="36" name="Shape 30"/>
+          <p:cNvSpPr/>
+          <p:nvPr/>
+        </p:nvSpPr>
+        <p:spPr>
+          <a:xfrm>
+            <a:off x="8366760" y="5285232"/>
+            <a:ext cx="118872" cy="118872"/>
+          </a:xfrm>
+          <a:prstGeom prst="ellipse">
+            <a:avLst/>
+          </a:prstGeom>
+          <a:solidFill>
+            <a:srgbClr val="FF4D6D"/>
+          </a:solidFill>
+          <a:ln/>
+        </p:spPr>
+      </p:sp>
+      <p:sp>
+        <p:nvSpPr>
+          <p:cNvPr id="37" name="Text 31"/>
+          <p:cNvSpPr/>
+          <p:nvPr/>
+        </p:nvSpPr>
+        <p:spPr>
+          <a:xfrm>
+            <a:off x="8604504" y="5230368"/>
+            <a:ext cx="2834640" cy="676656"/>
+          </a:xfrm>
+          <a:prstGeom prst="rect">
+            <a:avLst/>
+          </a:prstGeom>
+          <a:noFill/>
+          <a:ln/>
+        </p:spPr>
+        <p:txBody>
+          <a:bodyPr wrap="square" lIns="0" tIns="0" rIns="0" bIns="0" rtlCol="0" anchor="t"/>
+          <a:lstStyle/>
+          <a:p>
+            <a:pPr algn="l" indent="0" marL="0">
+              <a:lnSpc>
+                <a:spcPct val="102000"/>
+              </a:lnSpc>
+              <a:buNone/>
+            </a:pPr>
+            <a:r>
+              <a:rPr lang="en-US" sz="1250" dirty="0">
+                <a:solidFill>
+                  <a:srgbClr val="2B2B33"/>
+                </a:solidFill>
+                <a:latin typeface="Calibri" pitchFamily="34" charset="0"/>
+                <a:ea typeface="Calibri" pitchFamily="34" charset="-122"/>
+                <a:cs typeface="Calibri" pitchFamily="34" charset="-120"/>
+              </a:rPr>
+              <a:t>Rate: digoxin; beta-blocker only after 1st trimester</a:t>
+            </a:r>
+            <a:endParaRPr lang="en-US" sz="1250" dirty="0"/>
+          </a:p>
+        </p:txBody>
+      </p:sp>
+      <p:sp>
+        <p:nvSpPr>
+          <p:cNvPr id="38" name="Text 32"/>
+          <p:cNvSpPr/>
+          <p:nvPr/>
+        </p:nvSpPr>
+        <p:spPr>
+          <a:xfrm>
+            <a:off x="11277295" y="6355080"/>
+            <a:ext cx="548640" cy="320040"/>
+          </a:xfrm>
+          <a:prstGeom prst="rect">
+            <a:avLst/>
+          </a:prstGeom>
+          <a:noFill/>
+          <a:ln/>
+        </p:spPr>
+        <p:txBody>
+          <a:bodyPr wrap="square" rtlCol="0" anchor="t"/>
+          <a:lstStyle/>
+          <a:p>
+            <a:pPr algn="r" indent="0" marL="0">
+              <a:buNone/>
+            </a:pPr>
+            <a:r>
+              <a:rPr lang="en-US" sz="1100" b="1" dirty="0">
+                <a:solidFill>
+                  <a:srgbClr val="6B6B76"/>
+                </a:solidFill>
+                <a:latin typeface="Calibri" pitchFamily="34" charset="0"/>
+                <a:ea typeface="Calibri" pitchFamily="34" charset="-122"/>
+                <a:cs typeface="Calibri" pitchFamily="34" charset="-120"/>
+              </a:rPr>
+              <a:t>20</a:t>
+            </a:r>
+            <a:endParaRPr lang="en-US" sz="1100" dirty="0"/>
+          </a:p>
+        </p:txBody>
+      </p:sp>
+      <p:sp>
+        <p:nvSpPr>
+          <p:cNvPr id="39" name="Text 33"/>
+          <p:cNvSpPr/>
+          <p:nvPr/>
+        </p:nvSpPr>
+        <p:spPr>
+          <a:xfrm>
+            <a:off x="502920" y="6355080"/>
+            <a:ext cx="7315200" cy="320040"/>
+          </a:xfrm>
+          <a:prstGeom prst="rect">
+            <a:avLst/>
+          </a:prstGeom>
+          <a:noFill/>
+          <a:ln/>
+        </p:spPr>
+        <p:txBody>
+          <a:bodyPr wrap="square" rtlCol="0" anchor="t"/>
+          <a:lstStyle/>
+          <a:p>
+            <a:pPr algn="l" indent="0" marL="0">
+              <a:buNone/>
+            </a:pPr>
+            <a:r>
+              <a:rPr lang="en-US" sz="900" dirty="0">
+                <a:solidFill>
+                  <a:srgbClr val="6B6B76"/>
+                </a:solidFill>
+                <a:latin typeface="Calibri" pitchFamily="34" charset="0"/>
+                <a:ea typeface="Calibri" pitchFamily="34" charset="-122"/>
+                <a:cs typeface="Calibri" pitchFamily="34" charset="-120"/>
+              </a:rPr>
+              <a:t>Atrial Fibrillation — Clinical Topic Review</a:t>
+            </a:r>
+            <a:endParaRPr lang="en-US" sz="900" dirty="0"/>
+          </a:p>
+        </p:txBody>
+      </p:sp>
+    </p:spTree>
+  </p:cSld>
+  <p:clrMapOvr>
+    <a:masterClrMapping/>
+  </p:clrMapOvr>
+</p:sld>
+</file>
+
+<file path=ppt/slides/slide21.xml><?xml version="1.0" encoding="utf-8"?>
+<p:sld xmlns:a="http://schemas.openxmlformats.org/drawingml/2006/main" xmlns:r="http://schemas.openxmlformats.org/officeDocument/2006/relationships" xmlns:p="http://schemas.openxmlformats.org/presentationml/2006/main">
+  <p:cSld name="Slide 21">
+    <p:bg>
+      <p:bgPr>
+        <a:solidFill>
           <a:srgbClr val="590D22"/>
         </a:solidFill>
       </p:bgPr>
@@ -17353,7 +18463,7 @@
                 <a:ea typeface="Calibri" pitchFamily="34" charset="-122"/>
                 <a:cs typeface="Calibri" pitchFamily="34" charset="-120"/>
               </a:rPr>
-              <a:t>20</a:t>
+              <a:t>21</a:t>
             </a:r>
             <a:endParaRPr lang="en-US" sz="1100" dirty="0"/>
           </a:p>
@@ -17406,9 +18516,9 @@
 </p:sld>
 </file>
 
-<file path=ppt/slides/slide21.xml><?xml version="1.0" encoding="utf-8"?>
+<file path=ppt/slides/slide22.xml><?xml version="1.0" encoding="utf-8"?>
 <p:sld xmlns:a="http://schemas.openxmlformats.org/drawingml/2006/main" xmlns:r="http://schemas.openxmlformats.org/officeDocument/2006/relationships" xmlns:p="http://schemas.openxmlformats.org/presentationml/2006/main">
-  <p:cSld name="Slide 21">
+  <p:cSld name="Slide 22">
     <p:bg>
       <p:bgPr>
         <a:solidFill>

--- a/presentations/Atrial-Fibrillation-Topic-Review.pptx
+++ b/presentations/Atrial-Fibrillation-Topic-Review.pptx
@@ -4407,7 +4407,7 @@
                 <a:ea typeface="Calibri" pitchFamily="34" charset="-122"/>
                 <a:cs typeface="Calibri" pitchFamily="34" charset="-120"/>
               </a:rPr>
-              <a:t>Atrial Fibrillation — Clinical Topic Review</a:t>
+              <a:t>Clinical Topic Review</a:t>
             </a:r>
             <a:endParaRPr lang="en-US" sz="900" dirty="0"/>
           </a:p>
@@ -5145,7 +5145,7 @@
                 <a:ea typeface="Calibri" pitchFamily="34" charset="-122"/>
                 <a:cs typeface="Calibri" pitchFamily="34" charset="-120"/>
               </a:rPr>
-              <a:t>Atrial Fibrillation — Clinical Topic Review</a:t>
+              <a:t>Clinical Topic Review</a:t>
             </a:r>
             <a:endParaRPr lang="en-US" sz="900" dirty="0"/>
           </a:p>
@@ -7350,7 +7350,7 @@
                 <a:ea typeface="Calibri" pitchFamily="34" charset="-122"/>
                 <a:cs typeface="Calibri" pitchFamily="34" charset="-120"/>
               </a:rPr>
-              <a:t>Atrial Fibrillation — Clinical Topic Review</a:t>
+              <a:t>Clinical Topic Review</a:t>
             </a:r>
             <a:endParaRPr lang="en-US" sz="900" dirty="0"/>
           </a:p>
@@ -8175,7 +8175,7 @@
                 <a:ea typeface="Calibri" pitchFamily="34" charset="-122"/>
                 <a:cs typeface="Calibri" pitchFamily="34" charset="-120"/>
               </a:rPr>
-              <a:t>Atrial Fibrillation — Clinical Topic Review</a:t>
+              <a:t>Clinical Topic Review</a:t>
             </a:r>
             <a:endParaRPr lang="en-US" sz="900" dirty="0"/>
           </a:p>
@@ -9975,7 +9975,7 @@
                 <a:ea typeface="Calibri" pitchFamily="34" charset="-122"/>
                 <a:cs typeface="Calibri" pitchFamily="34" charset="-120"/>
               </a:rPr>
-              <a:t>Atrial Fibrillation — Clinical Topic Review</a:t>
+              <a:t>Clinical Topic Review</a:t>
             </a:r>
             <a:endParaRPr lang="en-US" sz="900" dirty="0"/>
           </a:p>
@@ -10955,7 +10955,7 @@
                 <a:ea typeface="Calibri" pitchFamily="34" charset="-122"/>
                 <a:cs typeface="Calibri" pitchFamily="34" charset="-120"/>
               </a:rPr>
-              <a:t>Atrial Fibrillation — Clinical Topic Review</a:t>
+              <a:t>Clinical Topic Review</a:t>
             </a:r>
             <a:endParaRPr lang="en-US" sz="900" dirty="0"/>
           </a:p>
@@ -11781,7 +11781,7 @@
                 <a:ea typeface="Calibri" pitchFamily="34" charset="-122"/>
                 <a:cs typeface="Calibri" pitchFamily="34" charset="-120"/>
               </a:rPr>
-              <a:t>Atrial Fibrillation — Clinical Topic Review</a:t>
+              <a:t>Clinical Topic Review</a:t>
             </a:r>
             <a:endParaRPr lang="en-US" sz="900" dirty="0"/>
           </a:p>
@@ -12641,7 +12641,7 @@
                 <a:ea typeface="Calibri" pitchFamily="34" charset="-122"/>
                 <a:cs typeface="Calibri" pitchFamily="34" charset="-120"/>
               </a:rPr>
-              <a:t>Atrial Fibrillation — Clinical Topic Review</a:t>
+              <a:t>Clinical Topic Review</a:t>
             </a:r>
             <a:endParaRPr lang="en-US" sz="900" dirty="0"/>
           </a:p>
@@ -13662,7 +13662,7 @@
                 <a:ea typeface="Calibri" pitchFamily="34" charset="-122"/>
                 <a:cs typeface="Calibri" pitchFamily="34" charset="-120"/>
               </a:rPr>
-              <a:t>Atrial Fibrillation — Clinical Topic Review</a:t>
+              <a:t>Clinical Topic Review</a:t>
             </a:r>
             <a:endParaRPr lang="en-US" sz="900" dirty="0"/>
           </a:p>
@@ -14696,7 +14696,7 @@
                 <a:ea typeface="Calibri" pitchFamily="34" charset="-122"/>
                 <a:cs typeface="Calibri" pitchFamily="34" charset="-120"/>
               </a:rPr>
-              <a:t>Atrial Fibrillation — Clinical Topic Review</a:t>
+              <a:t>Clinical Topic Review</a:t>
             </a:r>
             <a:endParaRPr lang="en-US" sz="900" dirty="0"/>
           </a:p>
@@ -15754,7 +15754,7 @@
                 <a:ea typeface="Calibri" pitchFamily="34" charset="-122"/>
                 <a:cs typeface="Calibri" pitchFamily="34" charset="-120"/>
               </a:rPr>
-              <a:t>Atrial Fibrillation — Clinical Topic Review</a:t>
+              <a:t>Clinical Topic Review</a:t>
             </a:r>
             <a:endParaRPr lang="en-US" sz="900" dirty="0"/>
           </a:p>
@@ -16472,7 +16472,7 @@
                 <a:ea typeface="Calibri" pitchFamily="34" charset="-122"/>
                 <a:cs typeface="Calibri" pitchFamily="34" charset="-120"/>
               </a:rPr>
-              <a:t>Atrial Fibrillation — Clinical Topic Review</a:t>
+              <a:t>Clinical Topic Review</a:t>
             </a:r>
             <a:endParaRPr lang="en-US" sz="900" dirty="0"/>
           </a:p>
@@ -17706,7 +17706,7 @@
                 <a:ea typeface="Calibri" pitchFamily="34" charset="-122"/>
                 <a:cs typeface="Calibri" pitchFamily="34" charset="-120"/>
               </a:rPr>
-              <a:t>Atrial Fibrillation — Clinical Topic Review</a:t>
+              <a:t>Clinical Topic Review</a:t>
             </a:r>
             <a:endParaRPr lang="en-US" sz="900" dirty="0"/>
           </a:p>
@@ -18502,7 +18502,7 @@
                 <a:ea typeface="Calibri" pitchFamily="34" charset="-122"/>
                 <a:cs typeface="Calibri" pitchFamily="34" charset="-120"/>
               </a:rPr>
-              <a:t>Atrial Fibrillation — Clinical Topic Review</a:t>
+              <a:t>Clinical Topic Review</a:t>
             </a:r>
             <a:endParaRPr lang="en-US" sz="900" dirty="0"/>
           </a:p>
@@ -19941,7 +19941,7 @@
                 <a:ea typeface="Calibri" pitchFamily="34" charset="-122"/>
                 <a:cs typeface="Calibri" pitchFamily="34" charset="-120"/>
               </a:rPr>
-              <a:t>Atrial Fibrillation — Clinical Topic Review</a:t>
+              <a:t>Clinical Topic Review</a:t>
             </a:r>
             <a:endParaRPr lang="en-US" sz="900" dirty="0"/>
           </a:p>
@@ -20822,7 +20822,7 @@
                 <a:ea typeface="Calibri" pitchFamily="34" charset="-122"/>
                 <a:cs typeface="Calibri" pitchFamily="34" charset="-120"/>
               </a:rPr>
-              <a:t>Atrial Fibrillation — Clinical Topic Review</a:t>
+              <a:t>Clinical Topic Review</a:t>
             </a:r>
             <a:endParaRPr lang="en-US" sz="900" dirty="0"/>
           </a:p>
@@ -22787,7 +22787,7 @@
                 <a:ea typeface="Calibri" pitchFamily="34" charset="-122"/>
                 <a:cs typeface="Calibri" pitchFamily="34" charset="-120"/>
               </a:rPr>
-              <a:t>Atrial Fibrillation — Clinical Topic Review</a:t>
+              <a:t>Clinical Topic Review</a:t>
             </a:r>
             <a:endParaRPr lang="en-US" sz="900" dirty="0"/>
           </a:p>
@@ -24242,7 +24242,7 @@
                 <a:ea typeface="Calibri" pitchFamily="34" charset="-122"/>
                 <a:cs typeface="Calibri" pitchFamily="34" charset="-120"/>
               </a:rPr>
-              <a:t>Atrial Fibrillation — Clinical Topic Review</a:t>
+              <a:t>Clinical Topic Review</a:t>
             </a:r>
             <a:endParaRPr lang="en-US" sz="900" dirty="0"/>
           </a:p>
@@ -26537,7 +26537,7 @@
                 <a:ea typeface="Calibri" pitchFamily="34" charset="-122"/>
                 <a:cs typeface="Calibri" pitchFamily="34" charset="-120"/>
               </a:rPr>
-              <a:t>Atrial Fibrillation — Clinical Topic Review</a:t>
+              <a:t>Clinical Topic Review</a:t>
             </a:r>
             <a:endParaRPr lang="en-US" sz="900" dirty="0"/>
           </a:p>
@@ -27758,7 +27758,7 @@
                 <a:ea typeface="Calibri" pitchFamily="34" charset="-122"/>
                 <a:cs typeface="Calibri" pitchFamily="34" charset="-120"/>
               </a:rPr>
-              <a:t>Atrial Fibrillation — Clinical Topic Review</a:t>
+              <a:t>Clinical Topic Review</a:t>
             </a:r>
             <a:endParaRPr lang="en-US" sz="900" dirty="0"/>
           </a:p>
@@ -29142,7 +29142,7 @@
                 <a:ea typeface="Calibri" pitchFamily="34" charset="-122"/>
                 <a:cs typeface="Calibri" pitchFamily="34" charset="-120"/>
               </a:rPr>
-              <a:t>Atrial Fibrillation — Clinical Topic Review</a:t>
+              <a:t>Clinical Topic Review</a:t>
             </a:r>
             <a:endParaRPr lang="en-US" sz="900" dirty="0"/>
           </a:p>
